--- a/output/presentation/techflow-community-ui-modernization.pptx
+++ b/output/presentation/techflow-community-ui-modernization.pptx
@@ -2,19 +2,19 @@
 <file path=ppt/presentation.xml><?xml version="1.0" encoding="utf-8"?>
 <p:presentation xmlns:p="http://schemas.openxmlformats.org/presentationml/2006/main">
   <p:sldMasterIdLst>
-    <p:sldMasterId xmlns:r="http://schemas.openxmlformats.org/officeDocument/2006/relationships" id="2147483648" r:id="R5c6ceb06316f4483"/>
+    <p:sldMasterId xmlns:r="http://schemas.openxmlformats.org/officeDocument/2006/relationships" id="2147483648" r:id="R4323ed2c59ab4a48"/>
   </p:sldMasterIdLst>
   <p:notesMasterIdLst>
-    <p:notesMasterId xmlns:r="http://schemas.openxmlformats.org/officeDocument/2006/relationships" r:id="Rcb8efe9ddc394072"/>
+    <p:notesMasterId xmlns:r="http://schemas.openxmlformats.org/officeDocument/2006/relationships" r:id="R2ac1b75db5b54a3f"/>
   </p:notesMasterIdLst>
   <p:sldIdLst>
-    <p:sldId xmlns:r="http://schemas.openxmlformats.org/officeDocument/2006/relationships" id="256" r:id="Rc2dd14c03a92421c"/>
-    <p:sldId xmlns:r="http://schemas.openxmlformats.org/officeDocument/2006/relationships" id="257" r:id="R6de45b9a4f7041cd"/>
-    <p:sldId xmlns:r="http://schemas.openxmlformats.org/officeDocument/2006/relationships" id="258" r:id="Rcf322dd2e2d8447b"/>
-    <p:sldId xmlns:r="http://schemas.openxmlformats.org/officeDocument/2006/relationships" id="259" r:id="Rf36e72383d1d4ca0"/>
-    <p:sldId xmlns:r="http://schemas.openxmlformats.org/officeDocument/2006/relationships" id="260" r:id="R111548922daa424d"/>
-    <p:sldId xmlns:r="http://schemas.openxmlformats.org/officeDocument/2006/relationships" id="261" r:id="R4b7ad0d608a248b4"/>
-    <p:sldId xmlns:r="http://schemas.openxmlformats.org/officeDocument/2006/relationships" id="262" r:id="R1c22f7e99ccf415a"/>
+    <p:sldId xmlns:r="http://schemas.openxmlformats.org/officeDocument/2006/relationships" id="256" r:id="R29902aa5288b4f46"/>
+    <p:sldId xmlns:r="http://schemas.openxmlformats.org/officeDocument/2006/relationships" id="257" r:id="R82200808d0ba46cd"/>
+    <p:sldId xmlns:r="http://schemas.openxmlformats.org/officeDocument/2006/relationships" id="258" r:id="R9459cd57773545b4"/>
+    <p:sldId xmlns:r="http://schemas.openxmlformats.org/officeDocument/2006/relationships" id="259" r:id="R58daa52f907e4816"/>
+    <p:sldId xmlns:r="http://schemas.openxmlformats.org/officeDocument/2006/relationships" id="260" r:id="R0498629cca9f484b"/>
+    <p:sldId xmlns:r="http://schemas.openxmlformats.org/officeDocument/2006/relationships" id="261" r:id="Rfbb6947407f24e94"/>
+    <p:sldId xmlns:r="http://schemas.openxmlformats.org/officeDocument/2006/relationships" id="262" r:id="R868b946573cd4b7e"/>
   </p:sldIdLst>
   <p:sldSz cx="12192000" cy="6858000"/>
   <p:notesSz cx="6858000" cy="9144000"/>
@@ -1076,7 +1076,7 @@
   </p:cSld>
   <p:clrMap bg1="lt1" tx1="dk1" bg2="lt2" tx2="dk2" accent1="accent1" accent2="accent2" accent3="accent3" accent4="accent4" accent5="accent5" accent6="accent6" hlink="hlink" folHlink="folHlink"/>
   <p:sldLayoutIdLst>
-    <p:sldLayoutId xmlns:r="http://schemas.openxmlformats.org/officeDocument/2006/relationships" id="2147483649" r:id="Rc74d5161f4da4c0e"/>
+    <p:sldLayoutId xmlns:r="http://schemas.openxmlformats.org/officeDocument/2006/relationships" id="2147483649" r:id="Rfb8c9d92b24b49e7"/>
   </p:sldLayoutIdLst>
   <p:txStyles>
     <p:titleStyle>
@@ -1627,7 +1627,7 @@
           <p:cNvPr id="7" name="cover-kicker">
             <a:extLst xmlns:a="http://schemas.openxmlformats.org/drawingml/2006/main">
               <a:ext uri="{FF2B5EF4-FFF2-40B4-BE49-F238E27FC236}">
-                <a16:creationId xmlns:a16="http://schemas.microsoft.com/office/drawing/2014/main" id="{91680549-CE80-4458-994D-C3A287E0D0CA}"/>
+                <a16:creationId xmlns:a16="http://schemas.microsoft.com/office/drawing/2014/main" id="{3383A91F-21B8-4498-BF9B-01E891F76360}"/>
               </a:ext>
             </a:extLst>
           </p:cNvPr>
@@ -1683,7 +1683,7 @@
           <p:cNvPr id="2" name="cover-title">
             <a:extLst xmlns:a="http://schemas.openxmlformats.org/drawingml/2006/main">
               <a:ext uri="{FF2B5EF4-FFF2-40B4-BE49-F238E27FC236}">
-                <a16:creationId xmlns:a16="http://schemas.microsoft.com/office/drawing/2014/main" id="{3FE3A896-EFD3-43EA-9444-00AA215A1FCC}"/>
+                <a16:creationId xmlns:a16="http://schemas.microsoft.com/office/drawing/2014/main" id="{4FD253A8-C98C-4236-AA14-70A454EE2E85}"/>
               </a:ext>
             </a:extLst>
           </p:cNvPr>
@@ -1762,7 +1762,7 @@
           <p:cNvPr id="3" name="cover-subtitle">
             <a:extLst xmlns:a="http://schemas.openxmlformats.org/drawingml/2006/main">
               <a:ext uri="{FF2B5EF4-FFF2-40B4-BE49-F238E27FC236}">
-                <a16:creationId xmlns:a16="http://schemas.microsoft.com/office/drawing/2014/main" id="{D2ECFF94-0CC1-4EFA-9F46-950A38BACC83}"/>
+                <a16:creationId xmlns:a16="http://schemas.microsoft.com/office/drawing/2014/main" id="{4654B557-AA2E-4933-A038-5468D31A3142}"/>
               </a:ext>
             </a:extLst>
           </p:cNvPr>
@@ -1818,7 +1818,7 @@
           <p:cNvPr id="4" name="cover-image-frame">
             <a:extLst xmlns:a="http://schemas.openxmlformats.org/drawingml/2006/main">
               <a:ext uri="{FF2B5EF4-FFF2-40B4-BE49-F238E27FC236}">
-                <a16:creationId xmlns:a16="http://schemas.microsoft.com/office/drawing/2014/main" id="{CEC32381-2A15-4D9D-BA8D-97F8261FBABF}"/>
+                <a16:creationId xmlns:a16="http://schemas.microsoft.com/office/drawing/2014/main" id="{4D5A548F-8989-43B9-8B7E-571E87E3C90B}"/>
               </a:ext>
             </a:extLst>
           </p:cNvPr>
@@ -1838,11 +1838,11 @@
             </a:avLst>
           </a:prstGeom>
           <a:solidFill xmlns:a="http://schemas.openxmlformats.org/drawingml/2006/main">
-            <a:srgbClr val="F5F7FB"/>
+            <a:srgbClr val="F3F7FC"/>
           </a:solidFill>
           <a:ln xmlns:a="http://schemas.openxmlformats.org/drawingml/2006/main" w="9525">
             <a:solidFill>
-              <a:srgbClr val="D8E0EC"/>
+              <a:srgbClr val="D5E1F1"/>
             </a:solidFill>
             <a:prstDash val="solid"/>
           </a:ln>
@@ -1857,7 +1857,7 @@
           <p:nvPr/>
         </p:nvPicPr>
         <p:blipFill>
-          <a:blip xmlns:r="http://schemas.openxmlformats.org/officeDocument/2006/relationships" xmlns:a="http://schemas.openxmlformats.org/drawingml/2006/main" r:embed="Rc47cd4200bc14518"/>
+          <a:blip xmlns:r="http://schemas.openxmlformats.org/officeDocument/2006/relationships" xmlns:a="http://schemas.openxmlformats.org/drawingml/2006/main" r:embed="R2a84c82562ae4722"/>
           <a:stretch xmlns:a="http://schemas.openxmlformats.org/drawingml/2006/main"/>
         </p:blipFill>
         <p:spPr>
@@ -1877,7 +1877,7 @@
           <p:cNvPr id="6" name="cover-status">
             <a:extLst xmlns:a="http://schemas.openxmlformats.org/drawingml/2006/main">
               <a:ext uri="{FF2B5EF4-FFF2-40B4-BE49-F238E27FC236}">
-                <a16:creationId xmlns:a16="http://schemas.microsoft.com/office/drawing/2014/main" id="{A6D54DF7-2113-410A-85A6-5969AAA8F9F3}"/>
+                <a16:creationId xmlns:a16="http://schemas.microsoft.com/office/drawing/2014/main" id="{E68E7183-2E8D-4233-B2A6-2D26B78D5E56}"/>
               </a:ext>
             </a:extLst>
           </p:cNvPr>
@@ -1931,7 +1931,7 @@
     </p:spTree>
     <p:extLst>
       <p:ext uri="{BB962C8B-B14F-4D97-AF65-F5344CB8AC3E}">
-        <p14:creationId xmlns:p14="http://schemas.microsoft.com/office/powerpoint/2010/main" val="1091068431"/>
+        <p14:creationId xmlns:p14="http://schemas.microsoft.com/office/powerpoint/2010/main" val="1846505965"/>
       </p:ext>
     </p:extLst>
   </p:cSld>
@@ -1962,7 +1962,7 @@
           <p:cNvPr id="9" name="title-2">
             <a:extLst xmlns:a="http://schemas.openxmlformats.org/drawingml/2006/main">
               <a:ext uri="{FF2B5EF4-FFF2-40B4-BE49-F238E27FC236}">
-                <a16:creationId xmlns:a16="http://schemas.microsoft.com/office/drawing/2014/main" id="{5BAAFDC0-B916-440F-91B2-3565308DE18A}"/>
+                <a16:creationId xmlns:a16="http://schemas.microsoft.com/office/drawing/2014/main" id="{580589C4-B7E9-4AA3-B671-4BDEE4AFACF5}"/>
               </a:ext>
             </a:extLst>
           </p:cNvPr>
@@ -2018,7 +2018,7 @@
           <p:cNvPr id="2" name="page-2">
             <a:extLst xmlns:a="http://schemas.openxmlformats.org/drawingml/2006/main">
               <a:ext uri="{FF2B5EF4-FFF2-40B4-BE49-F238E27FC236}">
-                <a16:creationId xmlns:a16="http://schemas.microsoft.com/office/drawing/2014/main" id="{8E2D9527-0B4D-48EE-A546-21180FF3C8C6}"/>
+                <a16:creationId xmlns:a16="http://schemas.microsoft.com/office/drawing/2014/main" id="{A73990A1-E581-4844-85FA-41CE04F4D72D}"/>
               </a:ext>
             </a:extLst>
           </p:cNvPr>
@@ -2074,7 +2074,7 @@
           <p:cNvPr id="3" name="before-label">
             <a:extLst xmlns:a="http://schemas.openxmlformats.org/drawingml/2006/main">
               <a:ext uri="{FF2B5EF4-FFF2-40B4-BE49-F238E27FC236}">
-                <a16:creationId xmlns:a16="http://schemas.microsoft.com/office/drawing/2014/main" id="{B6CD03B7-A90D-42DC-B5B9-33C70AB12601}"/>
+                <a16:creationId xmlns:a16="http://schemas.microsoft.com/office/drawing/2014/main" id="{10EE9B8C-6A55-4B3B-BBCB-D9C03E248D65}"/>
               </a:ext>
             </a:extLst>
           </p:cNvPr>
@@ -2130,7 +2130,7 @@
           <p:cNvPr id="4" name="after-label">
             <a:extLst xmlns:a="http://schemas.openxmlformats.org/drawingml/2006/main">
               <a:ext uri="{FF2B5EF4-FFF2-40B4-BE49-F238E27FC236}">
-                <a16:creationId xmlns:a16="http://schemas.microsoft.com/office/drawing/2014/main" id="{804A9045-4FAB-493F-B586-89FC8A4846EA}"/>
+                <a16:creationId xmlns:a16="http://schemas.microsoft.com/office/drawing/2014/main" id="{0C7D763B-84F1-48DB-B696-54625AF499DC}"/>
               </a:ext>
             </a:extLst>
           </p:cNvPr>
@@ -2190,7 +2190,7 @@
           <p:nvPr/>
         </p:nvPicPr>
         <p:blipFill>
-          <a:blip xmlns:r="http://schemas.openxmlformats.org/officeDocument/2006/relationships" xmlns:a="http://schemas.openxmlformats.org/drawingml/2006/main" r:embed="Rf381dd1ff34c40ba"/>
+          <a:blip xmlns:r="http://schemas.openxmlformats.org/officeDocument/2006/relationships" xmlns:a="http://schemas.openxmlformats.org/drawingml/2006/main" r:embed="Ra29c05c119834702"/>
           <a:stretch xmlns:a="http://schemas.openxmlformats.org/drawingml/2006/main"/>
         </p:blipFill>
         <p:spPr>
@@ -2214,7 +2214,7 @@
           <p:nvPr/>
         </p:nvPicPr>
         <p:blipFill>
-          <a:blip xmlns:r="http://schemas.openxmlformats.org/officeDocument/2006/relationships" xmlns:a="http://schemas.openxmlformats.org/drawingml/2006/main" r:embed="R6879a08eb87c45ca"/>
+          <a:blip xmlns:r="http://schemas.openxmlformats.org/officeDocument/2006/relationships" xmlns:a="http://schemas.openxmlformats.org/drawingml/2006/main" r:embed="Rbf75648e436a4827"/>
           <a:stretch xmlns:a="http://schemas.openxmlformats.org/drawingml/2006/main"/>
         </p:blipFill>
         <p:spPr>
@@ -2234,7 +2234,7 @@
           <p:cNvPr id="7" name="before-copy">
             <a:extLst xmlns:a="http://schemas.openxmlformats.org/drawingml/2006/main">
               <a:ext uri="{FF2B5EF4-FFF2-40B4-BE49-F238E27FC236}">
-                <a16:creationId xmlns:a16="http://schemas.microsoft.com/office/drawing/2014/main" id="{19C1749B-31E2-4883-9B8C-22658E46028B}"/>
+                <a16:creationId xmlns:a16="http://schemas.microsoft.com/office/drawing/2014/main" id="{A4534A8D-020E-4041-A167-F5DC46875822}"/>
               </a:ext>
             </a:extLst>
           </p:cNvPr>
@@ -2290,7 +2290,7 @@
           <p:cNvPr id="8" name="after-copy">
             <a:extLst xmlns:a="http://schemas.openxmlformats.org/drawingml/2006/main">
               <a:ext uri="{FF2B5EF4-FFF2-40B4-BE49-F238E27FC236}">
-                <a16:creationId xmlns:a16="http://schemas.microsoft.com/office/drawing/2014/main" id="{19FE9EA7-2A05-4C05-993E-9BA0C353BF1B}"/>
+                <a16:creationId xmlns:a16="http://schemas.microsoft.com/office/drawing/2014/main" id="{9F05B65F-39F7-4188-9961-2AE11285B618}"/>
               </a:ext>
             </a:extLst>
           </p:cNvPr>
@@ -2318,7 +2318,7 @@
           <a:lstStyle xmlns:a="http://schemas.openxmlformats.org/drawingml/2006/main"/>
           <a:p xmlns:a="http://schemas.openxmlformats.org/drawingml/2006/main">
             <a:pPr algn="ctr">
-              <a:defRPr sz="1650" b="1">
+              <a:defRPr sz="1575" b="1">
                 <a:solidFill>
                   <a:srgbClr val="15253E"/>
                 </a:solidFill>
@@ -2328,7 +2328,7 @@
               </a:defRPr>
             </a:pPr>
             <a:r>
-              <a:rPr sz="1650" b="1">
+              <a:rPr sz="1575" b="1">
                 <a:solidFill>
                   <a:srgbClr val="15253E"/>
                 </a:solidFill>
@@ -2336,7 +2336,7 @@
                 <a:ea typeface="Malgun Gothic"/>
                 <a:cs typeface="Malgun Gothic"/>
               </a:rPr>
-              <a:t>브랜드 Hero · 카드 목록 · 한글 상태 · 44px 조작</a:t>
+              <a:t>블루 Hero · 넉넉한 카드 여백 · 한글 상태 · 44px 조작</a:t>
             </a:r>
           </a:p>
         </p:txBody>
@@ -2344,7 +2344,7 @@
     </p:spTree>
     <p:extLst>
       <p:ext uri="{BB962C8B-B14F-4D97-AF65-F5344CB8AC3E}">
-        <p14:creationId xmlns:p14="http://schemas.microsoft.com/office/powerpoint/2010/main" val="44588073"/>
+        <p14:creationId xmlns:p14="http://schemas.microsoft.com/office/powerpoint/2010/main" val="1435919711"/>
       </p:ext>
     </p:extLst>
   </p:cSld>
@@ -2375,7 +2375,7 @@
           <p:cNvPr id="15" name="title-3">
             <a:extLst xmlns:a="http://schemas.openxmlformats.org/drawingml/2006/main">
               <a:ext uri="{FF2B5EF4-FFF2-40B4-BE49-F238E27FC236}">
-                <a16:creationId xmlns:a16="http://schemas.microsoft.com/office/drawing/2014/main" id="{5FBCB95F-9314-4279-A16F-687B0DB37839}"/>
+                <a16:creationId xmlns:a16="http://schemas.microsoft.com/office/drawing/2014/main" id="{D3837D8A-9A68-4EC0-91AA-3E8703153CFE}"/>
               </a:ext>
             </a:extLst>
           </p:cNvPr>
@@ -2431,7 +2431,7 @@
           <p:cNvPr id="2" name="page-3">
             <a:extLst xmlns:a="http://schemas.openxmlformats.org/drawingml/2006/main">
               <a:ext uri="{FF2B5EF4-FFF2-40B4-BE49-F238E27FC236}">
-                <a16:creationId xmlns:a16="http://schemas.microsoft.com/office/drawing/2014/main" id="{16FECE9A-D2B6-4F98-A6AA-84194AC4ADFD}"/>
+                <a16:creationId xmlns:a16="http://schemas.microsoft.com/office/drawing/2014/main" id="{0E6DA27A-E755-4BC7-9E9A-5C8FFC8B4028}"/>
               </a:ext>
             </a:extLst>
           </p:cNvPr>
@@ -2487,7 +2487,7 @@
           <p:cNvPr id="3" name="state-0">
             <a:extLst xmlns:a="http://schemas.openxmlformats.org/drawingml/2006/main">
               <a:ext uri="{FF2B5EF4-FFF2-40B4-BE49-F238E27FC236}">
-                <a16:creationId xmlns:a16="http://schemas.microsoft.com/office/drawing/2014/main" id="{7A75C80A-ADAC-4040-BE86-62E079CD32BB}"/>
+                <a16:creationId xmlns:a16="http://schemas.microsoft.com/office/drawing/2014/main" id="{636B64CF-2FD0-46DB-8316-7AAA71E4B35B}"/>
               </a:ext>
             </a:extLst>
           </p:cNvPr>
@@ -2511,7 +2511,7 @@
           </a:solidFill>
           <a:ln xmlns:a="http://schemas.openxmlformats.org/drawingml/2006/main" w="9525">
             <a:solidFill>
-              <a:srgbClr val="D8E0EC"/>
+              <a:srgbClr val="D5E1F1"/>
             </a:solidFill>
             <a:prstDash val="solid"/>
           </a:ln>
@@ -2522,7 +2522,7 @@
           <p:cNvPr id="4" name="state-label-0">
             <a:extLst xmlns:a="http://schemas.openxmlformats.org/drawingml/2006/main">
               <a:ext uri="{FF2B5EF4-FFF2-40B4-BE49-F238E27FC236}">
-                <a16:creationId xmlns:a16="http://schemas.microsoft.com/office/drawing/2014/main" id="{BB1918FC-5789-40B5-9C74-94D9A42FF2A1}"/>
+                <a16:creationId xmlns:a16="http://schemas.microsoft.com/office/drawing/2014/main" id="{E500C165-7006-4E22-8052-0AB106F4538C}"/>
               </a:ext>
             </a:extLst>
           </p:cNvPr>
@@ -2578,7 +2578,7 @@
           <p:cNvPr id="5" name="state-detail-0">
             <a:extLst xmlns:a="http://schemas.openxmlformats.org/drawingml/2006/main">
               <a:ext uri="{FF2B5EF4-FFF2-40B4-BE49-F238E27FC236}">
-                <a16:creationId xmlns:a16="http://schemas.microsoft.com/office/drawing/2014/main" id="{09F14AC0-5A0C-42ED-9F51-AAB0A53F6D24}"/>
+                <a16:creationId xmlns:a16="http://schemas.microsoft.com/office/drawing/2014/main" id="{7F694103-997A-491E-9251-327AA93A3E73}"/>
               </a:ext>
             </a:extLst>
           </p:cNvPr>
@@ -2634,7 +2634,7 @@
           <p:cNvPr id="6" name="state-1">
             <a:extLst xmlns:a="http://schemas.openxmlformats.org/drawingml/2006/main">
               <a:ext uri="{FF2B5EF4-FFF2-40B4-BE49-F238E27FC236}">
-                <a16:creationId xmlns:a16="http://schemas.microsoft.com/office/drawing/2014/main" id="{3E72D55E-0027-4699-86F8-ED11DC812B01}"/>
+                <a16:creationId xmlns:a16="http://schemas.microsoft.com/office/drawing/2014/main" id="{549F9B41-52CF-4721-AF15-7609E423FDED}"/>
               </a:ext>
             </a:extLst>
           </p:cNvPr>
@@ -2669,7 +2669,7 @@
           <p:cNvPr id="7" name="state-label-1">
             <a:extLst xmlns:a="http://schemas.openxmlformats.org/drawingml/2006/main">
               <a:ext uri="{FF2B5EF4-FFF2-40B4-BE49-F238E27FC236}">
-                <a16:creationId xmlns:a16="http://schemas.microsoft.com/office/drawing/2014/main" id="{5B12408D-5975-4BDA-8617-C0EBFED9620A}"/>
+                <a16:creationId xmlns:a16="http://schemas.microsoft.com/office/drawing/2014/main" id="{57D059EB-29F1-4FC2-9BDB-EB48E9DF0CE9}"/>
               </a:ext>
             </a:extLst>
           </p:cNvPr>
@@ -2725,7 +2725,7 @@
           <p:cNvPr id="8" name="state-detail-1">
             <a:extLst xmlns:a="http://schemas.openxmlformats.org/drawingml/2006/main">
               <a:ext uri="{FF2B5EF4-FFF2-40B4-BE49-F238E27FC236}">
-                <a16:creationId xmlns:a16="http://schemas.microsoft.com/office/drawing/2014/main" id="{DC5F0F68-71F2-461D-8239-530774CA761C}"/>
+                <a16:creationId xmlns:a16="http://schemas.microsoft.com/office/drawing/2014/main" id="{6EBA6FE6-1DC3-49C1-9E6D-83DFC25E7D64}"/>
               </a:ext>
             </a:extLst>
           </p:cNvPr>
@@ -2781,7 +2781,7 @@
           <p:cNvPr id="9" name="state-2">
             <a:extLst xmlns:a="http://schemas.openxmlformats.org/drawingml/2006/main">
               <a:ext uri="{FF2B5EF4-FFF2-40B4-BE49-F238E27FC236}">
-                <a16:creationId xmlns:a16="http://schemas.microsoft.com/office/drawing/2014/main" id="{D036181D-4D01-45F0-9CF5-A6D640834771}"/>
+                <a16:creationId xmlns:a16="http://schemas.microsoft.com/office/drawing/2014/main" id="{56FC9D8D-B176-4297-858F-E57A4B426B7A}"/>
               </a:ext>
             </a:extLst>
           </p:cNvPr>
@@ -2816,7 +2816,7 @@
           <p:cNvPr id="10" name="state-label-2">
             <a:extLst xmlns:a="http://schemas.openxmlformats.org/drawingml/2006/main">
               <a:ext uri="{FF2B5EF4-FFF2-40B4-BE49-F238E27FC236}">
-                <a16:creationId xmlns:a16="http://schemas.microsoft.com/office/drawing/2014/main" id="{41CD6F0C-110D-4E90-93B5-37221C3F56A6}"/>
+                <a16:creationId xmlns:a16="http://schemas.microsoft.com/office/drawing/2014/main" id="{98FF19C0-A503-4AC8-97A6-7DB7EA2E07BA}"/>
               </a:ext>
             </a:extLst>
           </p:cNvPr>
@@ -2872,7 +2872,7 @@
           <p:cNvPr id="11" name="state-detail-2">
             <a:extLst xmlns:a="http://schemas.openxmlformats.org/drawingml/2006/main">
               <a:ext uri="{FF2B5EF4-FFF2-40B4-BE49-F238E27FC236}">
-                <a16:creationId xmlns:a16="http://schemas.microsoft.com/office/drawing/2014/main" id="{F8C74544-3392-4D89-8846-2E720EED8CA0}"/>
+                <a16:creationId xmlns:a16="http://schemas.microsoft.com/office/drawing/2014/main" id="{59DD1760-E734-48D9-8F0F-296DD57A1622}"/>
               </a:ext>
             </a:extLst>
           </p:cNvPr>
@@ -2928,7 +2928,7 @@
           <p:cNvPr id="12" name="state-3">
             <a:extLst xmlns:a="http://schemas.openxmlformats.org/drawingml/2006/main">
               <a:ext uri="{FF2B5EF4-FFF2-40B4-BE49-F238E27FC236}">
-                <a16:creationId xmlns:a16="http://schemas.microsoft.com/office/drawing/2014/main" id="{C5E71AC0-F762-498B-9F4B-FC9F53154A15}"/>
+                <a16:creationId xmlns:a16="http://schemas.microsoft.com/office/drawing/2014/main" id="{C5A2AB33-B88D-454D-8A97-BAB9A38C088A}"/>
               </a:ext>
             </a:extLst>
           </p:cNvPr>
@@ -2963,7 +2963,7 @@
           <p:cNvPr id="13" name="state-label-3">
             <a:extLst xmlns:a="http://schemas.openxmlformats.org/drawingml/2006/main">
               <a:ext uri="{FF2B5EF4-FFF2-40B4-BE49-F238E27FC236}">
-                <a16:creationId xmlns:a16="http://schemas.microsoft.com/office/drawing/2014/main" id="{528FF452-CB64-4804-A93B-394A7E8DA99C}"/>
+                <a16:creationId xmlns:a16="http://schemas.microsoft.com/office/drawing/2014/main" id="{5C1FC302-C3CA-4F0F-9B1B-640BD6269E38}"/>
               </a:ext>
             </a:extLst>
           </p:cNvPr>
@@ -3019,7 +3019,7 @@
           <p:cNvPr id="14" name="state-detail-3">
             <a:extLst xmlns:a="http://schemas.openxmlformats.org/drawingml/2006/main">
               <a:ext uri="{FF2B5EF4-FFF2-40B4-BE49-F238E27FC236}">
-                <a16:creationId xmlns:a16="http://schemas.microsoft.com/office/drawing/2014/main" id="{D3B60F42-BC99-44F9-B119-E7678398D45C}"/>
+                <a16:creationId xmlns:a16="http://schemas.microsoft.com/office/drawing/2014/main" id="{40941DC3-4513-4A4F-9AD4-99EDB444E86D}"/>
               </a:ext>
             </a:extLst>
           </p:cNvPr>
@@ -3073,7 +3073,7 @@
     </p:spTree>
     <p:extLst>
       <p:ext uri="{BB962C8B-B14F-4D97-AF65-F5344CB8AC3E}">
-        <p14:creationId xmlns:p14="http://schemas.microsoft.com/office/powerpoint/2010/main" val="1780673362"/>
+        <p14:creationId xmlns:p14="http://schemas.microsoft.com/office/powerpoint/2010/main" val="1035959051"/>
       </p:ext>
     </p:extLst>
   </p:cSld>
@@ -3104,7 +3104,7 @@
           <p:cNvPr id="11" name="title-4">
             <a:extLst xmlns:a="http://schemas.openxmlformats.org/drawingml/2006/main">
               <a:ext uri="{FF2B5EF4-FFF2-40B4-BE49-F238E27FC236}">
-                <a16:creationId xmlns:a16="http://schemas.microsoft.com/office/drawing/2014/main" id="{6680B715-1A00-444C-BBD2-3F94C7318390}"/>
+                <a16:creationId xmlns:a16="http://schemas.microsoft.com/office/drawing/2014/main" id="{2F15FEEA-C6F5-424D-83D4-55BABD3675F2}"/>
               </a:ext>
             </a:extLst>
           </p:cNvPr>
@@ -3160,7 +3160,7 @@
           <p:cNvPr id="2" name="page-4">
             <a:extLst xmlns:a="http://schemas.openxmlformats.org/drawingml/2006/main">
               <a:ext uri="{FF2B5EF4-FFF2-40B4-BE49-F238E27FC236}">
-                <a16:creationId xmlns:a16="http://schemas.microsoft.com/office/drawing/2014/main" id="{81327CE6-4F4B-4EDA-A996-FBED6CF4C744}"/>
+                <a16:creationId xmlns:a16="http://schemas.microsoft.com/office/drawing/2014/main" id="{CB9751A4-DF02-4A22-8C21-23203702D9B1}"/>
               </a:ext>
             </a:extLst>
           </p:cNvPr>
@@ -3220,7 +3220,7 @@
           <p:nvPr/>
         </p:nvPicPr>
         <p:blipFill>
-          <a:blip xmlns:r="http://schemas.openxmlformats.org/officeDocument/2006/relationships" xmlns:a="http://schemas.openxmlformats.org/drawingml/2006/main" r:embed="Rb50bffb16a6d43f9"/>
+          <a:blip xmlns:r="http://schemas.openxmlformats.org/officeDocument/2006/relationships" xmlns:a="http://schemas.openxmlformats.org/drawingml/2006/main" r:embed="Rec4814ea54df4c50"/>
           <a:stretch xmlns:a="http://schemas.openxmlformats.org/drawingml/2006/main"/>
         </p:blipFill>
         <p:spPr>
@@ -3240,7 +3240,7 @@
           <p:cNvPr id="4" name="mobile-fact-1">
             <a:extLst xmlns:a="http://schemas.openxmlformats.org/drawingml/2006/main">
               <a:ext uri="{FF2B5EF4-FFF2-40B4-BE49-F238E27FC236}">
-                <a16:creationId xmlns:a16="http://schemas.microsoft.com/office/drawing/2014/main" id="{6FB15226-17CB-4448-95DE-FAEB5A8F7A03}"/>
+                <a16:creationId xmlns:a16="http://schemas.microsoft.com/office/drawing/2014/main" id="{EA59F433-3E23-4CCB-8EA3-4463B2C16FDB}"/>
               </a:ext>
             </a:extLst>
           </p:cNvPr>
@@ -3296,7 +3296,7 @@
           <p:cNvPr id="5" name="mobile-desc-1">
             <a:extLst xmlns:a="http://schemas.openxmlformats.org/drawingml/2006/main">
               <a:ext uri="{FF2B5EF4-FFF2-40B4-BE49-F238E27FC236}">
-                <a16:creationId xmlns:a16="http://schemas.microsoft.com/office/drawing/2014/main" id="{A0C34297-DB2A-4849-8DCA-8D9A21113410}"/>
+                <a16:creationId xmlns:a16="http://schemas.microsoft.com/office/drawing/2014/main" id="{373D4433-A77F-4B84-93D9-1930DA384868}"/>
               </a:ext>
             </a:extLst>
           </p:cNvPr>
@@ -3352,7 +3352,7 @@
           <p:cNvPr id="6" name="mobile-fact-2">
             <a:extLst xmlns:a="http://schemas.openxmlformats.org/drawingml/2006/main">
               <a:ext uri="{FF2B5EF4-FFF2-40B4-BE49-F238E27FC236}">
-                <a16:creationId xmlns:a16="http://schemas.microsoft.com/office/drawing/2014/main" id="{82C7D91A-77CB-4C4F-8E2E-33CFC2BF2226}"/>
+                <a16:creationId xmlns:a16="http://schemas.microsoft.com/office/drawing/2014/main" id="{58275460-FB05-411D-B02D-9252A4F1C701}"/>
               </a:ext>
             </a:extLst>
           </p:cNvPr>
@@ -3408,7 +3408,7 @@
           <p:cNvPr id="7" name="mobile-desc-2">
             <a:extLst xmlns:a="http://schemas.openxmlformats.org/drawingml/2006/main">
               <a:ext uri="{FF2B5EF4-FFF2-40B4-BE49-F238E27FC236}">
-                <a16:creationId xmlns:a16="http://schemas.microsoft.com/office/drawing/2014/main" id="{E606FF7E-E099-445C-BA59-300A4630D916}"/>
+                <a16:creationId xmlns:a16="http://schemas.microsoft.com/office/drawing/2014/main" id="{E260E1DC-E08D-4F90-A60C-BEC7B4AF8C10}"/>
               </a:ext>
             </a:extLst>
           </p:cNvPr>
@@ -3464,7 +3464,7 @@
           <p:cNvPr id="8" name="mobile-fact-3">
             <a:extLst xmlns:a="http://schemas.openxmlformats.org/drawingml/2006/main">
               <a:ext uri="{FF2B5EF4-FFF2-40B4-BE49-F238E27FC236}">
-                <a16:creationId xmlns:a16="http://schemas.microsoft.com/office/drawing/2014/main" id="{24526196-C9B2-4C3F-A142-5DCEA934D39C}"/>
+                <a16:creationId xmlns:a16="http://schemas.microsoft.com/office/drawing/2014/main" id="{6CE8AF66-EA2E-4CF9-8B9B-E76DF2DE0F9C}"/>
               </a:ext>
             </a:extLst>
           </p:cNvPr>
@@ -3520,7 +3520,7 @@
           <p:cNvPr id="9" name="mobile-desc-3">
             <a:extLst xmlns:a="http://schemas.openxmlformats.org/drawingml/2006/main">
               <a:ext uri="{FF2B5EF4-FFF2-40B4-BE49-F238E27FC236}">
-                <a16:creationId xmlns:a16="http://schemas.microsoft.com/office/drawing/2014/main" id="{127B6EE8-D4EA-49DA-8018-1068DF205F9C}"/>
+                <a16:creationId xmlns:a16="http://schemas.microsoft.com/office/drawing/2014/main" id="{DAA544EE-D0D3-4995-8347-F2794F01EFC4}"/>
               </a:ext>
             </a:extLst>
           </p:cNvPr>
@@ -3576,7 +3576,7 @@
           <p:cNvPr id="10" name="mobile-foot">
             <a:extLst xmlns:a="http://schemas.openxmlformats.org/drawingml/2006/main">
               <a:ext uri="{FF2B5EF4-FFF2-40B4-BE49-F238E27FC236}">
-                <a16:creationId xmlns:a16="http://schemas.microsoft.com/office/drawing/2014/main" id="{6C5DC943-78AF-4493-BBA4-2529758CC1A8}"/>
+                <a16:creationId xmlns:a16="http://schemas.microsoft.com/office/drawing/2014/main" id="{2AB98398-C233-4C7F-9E16-46DFCA172ED0}"/>
               </a:ext>
             </a:extLst>
           </p:cNvPr>
@@ -3630,7 +3630,7 @@
     </p:spTree>
     <p:extLst>
       <p:ext uri="{BB962C8B-B14F-4D97-AF65-F5344CB8AC3E}">
-        <p14:creationId xmlns:p14="http://schemas.microsoft.com/office/powerpoint/2010/main" val="1375303794"/>
+        <p14:creationId xmlns:p14="http://schemas.microsoft.com/office/powerpoint/2010/main" val="127206879"/>
       </p:ext>
     </p:extLst>
   </p:cSld>
@@ -3661,7 +3661,7 @@
           <p:cNvPr id="20" name="title-5">
             <a:extLst xmlns:a="http://schemas.openxmlformats.org/drawingml/2006/main">
               <a:ext uri="{FF2B5EF4-FFF2-40B4-BE49-F238E27FC236}">
-                <a16:creationId xmlns:a16="http://schemas.microsoft.com/office/drawing/2014/main" id="{658E6956-4CF3-4C88-A534-CDA205C0BA22}"/>
+                <a16:creationId xmlns:a16="http://schemas.microsoft.com/office/drawing/2014/main" id="{6BB39D81-FAB5-40E3-8C37-5F642A85F56A}"/>
               </a:ext>
             </a:extLst>
           </p:cNvPr>
@@ -3717,7 +3717,7 @@
           <p:cNvPr id="2" name="page-5">
             <a:extLst xmlns:a="http://schemas.openxmlformats.org/drawingml/2006/main">
               <a:ext uri="{FF2B5EF4-FFF2-40B4-BE49-F238E27FC236}">
-                <a16:creationId xmlns:a16="http://schemas.microsoft.com/office/drawing/2014/main" id="{52C6E615-9E59-4593-927D-9F06339C7CD2}"/>
+                <a16:creationId xmlns:a16="http://schemas.microsoft.com/office/drawing/2014/main" id="{62253063-E7AC-4BCF-BBC7-2D6E46369F82}"/>
               </a:ext>
             </a:extLst>
           </p:cNvPr>
@@ -3773,7 +3773,7 @@
           <p:cNvPr id="3" name="arrow-0">
             <a:extLst xmlns:a="http://schemas.openxmlformats.org/drawingml/2006/main">
               <a:ext uri="{FF2B5EF4-FFF2-40B4-BE49-F238E27FC236}">
-                <a16:creationId xmlns:a16="http://schemas.microsoft.com/office/drawing/2014/main" id="{1FC54BE4-DDEE-4B8A-9779-44CE8DF5B3D4}"/>
+                <a16:creationId xmlns:a16="http://schemas.microsoft.com/office/drawing/2014/main" id="{F83CE108-D5A7-406B-BB46-1891E63C64A7}"/>
               </a:ext>
             </a:extLst>
           </p:cNvPr>
@@ -3829,7 +3829,7 @@
           <p:cNvPr id="4" name="phase-0">
             <a:extLst xmlns:a="http://schemas.openxmlformats.org/drawingml/2006/main">
               <a:ext uri="{FF2B5EF4-FFF2-40B4-BE49-F238E27FC236}">
-                <a16:creationId xmlns:a16="http://schemas.microsoft.com/office/drawing/2014/main" id="{5621E798-0475-4445-A8E7-D63F7C6A591B}"/>
+                <a16:creationId xmlns:a16="http://schemas.microsoft.com/office/drawing/2014/main" id="{9D6CB411-3441-466D-907B-23D68BB900A1}"/>
               </a:ext>
             </a:extLst>
           </p:cNvPr>
@@ -3849,11 +3849,11 @@
             </a:avLst>
           </a:prstGeom>
           <a:solidFill xmlns:a="http://schemas.openxmlformats.org/drawingml/2006/main">
-            <a:srgbClr val="F5F7FB"/>
+            <a:srgbClr val="F3F7FC"/>
           </a:solidFill>
           <a:ln xmlns:a="http://schemas.openxmlformats.org/drawingml/2006/main" w="9525">
             <a:solidFill>
-              <a:srgbClr val="D8E0EC"/>
+              <a:srgbClr val="D5E1F1"/>
             </a:solidFill>
             <a:prstDash val="solid"/>
           </a:ln>
@@ -3864,7 +3864,7 @@
           <p:cNvPr id="5" name="phase-label-0">
             <a:extLst xmlns:a="http://schemas.openxmlformats.org/drawingml/2006/main">
               <a:ext uri="{FF2B5EF4-FFF2-40B4-BE49-F238E27FC236}">
-                <a16:creationId xmlns:a16="http://schemas.microsoft.com/office/drawing/2014/main" id="{5623CFD8-438F-455E-83AD-6676C5E12EE9}"/>
+                <a16:creationId xmlns:a16="http://schemas.microsoft.com/office/drawing/2014/main" id="{B1D25370-BB38-40FF-9FE8-216457D5A331}"/>
               </a:ext>
             </a:extLst>
           </p:cNvPr>
@@ -3943,7 +3943,7 @@
           <p:cNvPr id="6" name="phase-http-0">
             <a:extLst xmlns:a="http://schemas.openxmlformats.org/drawingml/2006/main">
               <a:ext uri="{FF2B5EF4-FFF2-40B4-BE49-F238E27FC236}">
-                <a16:creationId xmlns:a16="http://schemas.microsoft.com/office/drawing/2014/main" id="{0567E467-B22F-4B46-8A18-FC591176E2CD}"/>
+                <a16:creationId xmlns:a16="http://schemas.microsoft.com/office/drawing/2014/main" id="{D034EF33-E754-4A5F-A744-690CD4E85173}"/>
               </a:ext>
             </a:extLst>
           </p:cNvPr>
@@ -3999,7 +3999,7 @@
           <p:cNvPr id="7" name="arrow-1">
             <a:extLst xmlns:a="http://schemas.openxmlformats.org/drawingml/2006/main">
               <a:ext uri="{FF2B5EF4-FFF2-40B4-BE49-F238E27FC236}">
-                <a16:creationId xmlns:a16="http://schemas.microsoft.com/office/drawing/2014/main" id="{94734BCA-AA5F-4AFF-842B-CFE9961B2654}"/>
+                <a16:creationId xmlns:a16="http://schemas.microsoft.com/office/drawing/2014/main" id="{974A4E60-DA99-40EC-BDFA-F1F1DF2516E6}"/>
               </a:ext>
             </a:extLst>
           </p:cNvPr>
@@ -4055,7 +4055,7 @@
           <p:cNvPr id="8" name="phase-1">
             <a:extLst xmlns:a="http://schemas.openxmlformats.org/drawingml/2006/main">
               <a:ext uri="{FF2B5EF4-FFF2-40B4-BE49-F238E27FC236}">
-                <a16:creationId xmlns:a16="http://schemas.microsoft.com/office/drawing/2014/main" id="{56CD48A5-C9FB-4010-9367-A392398F61B7}"/>
+                <a16:creationId xmlns:a16="http://schemas.microsoft.com/office/drawing/2014/main" id="{4DA65038-233C-4076-8F19-0CD2BD7C89B3}"/>
               </a:ext>
             </a:extLst>
           </p:cNvPr>
@@ -4090,7 +4090,7 @@
           <p:cNvPr id="9" name="phase-label-1">
             <a:extLst xmlns:a="http://schemas.openxmlformats.org/drawingml/2006/main">
               <a:ext uri="{FF2B5EF4-FFF2-40B4-BE49-F238E27FC236}">
-                <a16:creationId xmlns:a16="http://schemas.microsoft.com/office/drawing/2014/main" id="{9124B49A-7039-49C5-AF13-3064730FEAF0}"/>
+                <a16:creationId xmlns:a16="http://schemas.microsoft.com/office/drawing/2014/main" id="{2784A685-1C25-4739-9479-3630A580D77D}"/>
               </a:ext>
             </a:extLst>
           </p:cNvPr>
@@ -4169,7 +4169,7 @@
           <p:cNvPr id="10" name="phase-http-1">
             <a:extLst xmlns:a="http://schemas.openxmlformats.org/drawingml/2006/main">
               <a:ext uri="{FF2B5EF4-FFF2-40B4-BE49-F238E27FC236}">
-                <a16:creationId xmlns:a16="http://schemas.microsoft.com/office/drawing/2014/main" id="{32A14D2F-997B-4C5A-9E8E-C01E92D5B2E7}"/>
+                <a16:creationId xmlns:a16="http://schemas.microsoft.com/office/drawing/2014/main" id="{06580123-C9A3-4E80-831B-6C708F462C6A}"/>
               </a:ext>
             </a:extLst>
           </p:cNvPr>
@@ -4225,7 +4225,7 @@
           <p:cNvPr id="11" name="arrow-2">
             <a:extLst xmlns:a="http://schemas.openxmlformats.org/drawingml/2006/main">
               <a:ext uri="{FF2B5EF4-FFF2-40B4-BE49-F238E27FC236}">
-                <a16:creationId xmlns:a16="http://schemas.microsoft.com/office/drawing/2014/main" id="{170D32A7-0330-4BDF-AB20-47E8E1E4AE39}"/>
+                <a16:creationId xmlns:a16="http://schemas.microsoft.com/office/drawing/2014/main" id="{20923B26-3CA5-42C5-BEBC-3402BAB77E6B}"/>
               </a:ext>
             </a:extLst>
           </p:cNvPr>
@@ -4281,7 +4281,7 @@
           <p:cNvPr id="12" name="phase-2">
             <a:extLst xmlns:a="http://schemas.openxmlformats.org/drawingml/2006/main">
               <a:ext uri="{FF2B5EF4-FFF2-40B4-BE49-F238E27FC236}">
-                <a16:creationId xmlns:a16="http://schemas.microsoft.com/office/drawing/2014/main" id="{D4B0644D-094A-4EA4-B6C8-1C85D75BD328}"/>
+                <a16:creationId xmlns:a16="http://schemas.microsoft.com/office/drawing/2014/main" id="{432A0B7B-2753-4E49-9623-6095659F599D}"/>
               </a:ext>
             </a:extLst>
           </p:cNvPr>
@@ -4301,11 +4301,11 @@
             </a:avLst>
           </a:prstGeom>
           <a:solidFill xmlns:a="http://schemas.openxmlformats.org/drawingml/2006/main">
-            <a:srgbClr val="F5F7FB"/>
+            <a:srgbClr val="F3F7FC"/>
           </a:solidFill>
           <a:ln xmlns:a="http://schemas.openxmlformats.org/drawingml/2006/main" w="9525">
             <a:solidFill>
-              <a:srgbClr val="D8E0EC"/>
+              <a:srgbClr val="D5E1F1"/>
             </a:solidFill>
             <a:prstDash val="solid"/>
           </a:ln>
@@ -4316,7 +4316,7 @@
           <p:cNvPr id="13" name="phase-label-2">
             <a:extLst xmlns:a="http://schemas.openxmlformats.org/drawingml/2006/main">
               <a:ext uri="{FF2B5EF4-FFF2-40B4-BE49-F238E27FC236}">
-                <a16:creationId xmlns:a16="http://schemas.microsoft.com/office/drawing/2014/main" id="{0AE69C35-98ED-4E09-9DBB-8AAA4A005F63}"/>
+                <a16:creationId xmlns:a16="http://schemas.microsoft.com/office/drawing/2014/main" id="{C497E9CF-5413-4558-9FDD-684AB1366DB9}"/>
               </a:ext>
             </a:extLst>
           </p:cNvPr>
@@ -4395,7 +4395,7 @@
           <p:cNvPr id="14" name="phase-http-2">
             <a:extLst xmlns:a="http://schemas.openxmlformats.org/drawingml/2006/main">
               <a:ext uri="{FF2B5EF4-FFF2-40B4-BE49-F238E27FC236}">
-                <a16:creationId xmlns:a16="http://schemas.microsoft.com/office/drawing/2014/main" id="{EF194639-EB90-4E9E-A82C-77D4BEC05E05}"/>
+                <a16:creationId xmlns:a16="http://schemas.microsoft.com/office/drawing/2014/main" id="{767860F9-3517-46FB-8DB2-2D26EC68B91C}"/>
               </a:ext>
             </a:extLst>
           </p:cNvPr>
@@ -4451,7 +4451,7 @@
           <p:cNvPr id="15" name="phase-3">
             <a:extLst xmlns:a="http://schemas.openxmlformats.org/drawingml/2006/main">
               <a:ext uri="{FF2B5EF4-FFF2-40B4-BE49-F238E27FC236}">
-                <a16:creationId xmlns:a16="http://schemas.microsoft.com/office/drawing/2014/main" id="{A04A4922-20F8-45E4-858A-E8BA686C55E8}"/>
+                <a16:creationId xmlns:a16="http://schemas.microsoft.com/office/drawing/2014/main" id="{E64AA44B-4729-4FB0-AA17-CBFF4655D37B}"/>
               </a:ext>
             </a:extLst>
           </p:cNvPr>
@@ -4486,7 +4486,7 @@
           <p:cNvPr id="16" name="phase-label-3">
             <a:extLst xmlns:a="http://schemas.openxmlformats.org/drawingml/2006/main">
               <a:ext uri="{FF2B5EF4-FFF2-40B4-BE49-F238E27FC236}">
-                <a16:creationId xmlns:a16="http://schemas.microsoft.com/office/drawing/2014/main" id="{6CAB776A-DE9C-4E46-90C9-815D821B562E}"/>
+                <a16:creationId xmlns:a16="http://schemas.microsoft.com/office/drawing/2014/main" id="{7E4B26EC-BEB1-4C3D-8081-29603864DC22}"/>
               </a:ext>
             </a:extLst>
           </p:cNvPr>
@@ -4565,7 +4565,7 @@
           <p:cNvPr id="17" name="phase-http-3">
             <a:extLst xmlns:a="http://schemas.openxmlformats.org/drawingml/2006/main">
               <a:ext uri="{FF2B5EF4-FFF2-40B4-BE49-F238E27FC236}">
-                <a16:creationId xmlns:a16="http://schemas.microsoft.com/office/drawing/2014/main" id="{247AF0D5-4E22-4815-918B-B10608081D16}"/>
+                <a16:creationId xmlns:a16="http://schemas.microsoft.com/office/drawing/2014/main" id="{6A6C3AF3-3A7C-43F3-B1E8-89834F493AF0}"/>
               </a:ext>
             </a:extLst>
           </p:cNvPr>
@@ -4621,7 +4621,7 @@
           <p:cNvPr id="18" name="integrity-count">
             <a:extLst xmlns:a="http://schemas.openxmlformats.org/drawingml/2006/main">
               <a:ext uri="{FF2B5EF4-FFF2-40B4-BE49-F238E27FC236}">
-                <a16:creationId xmlns:a16="http://schemas.microsoft.com/office/drawing/2014/main" id="{9894574C-C982-4BC8-A76D-C5A584712184}"/>
+                <a16:creationId xmlns:a16="http://schemas.microsoft.com/office/drawing/2014/main" id="{8B9C66D0-8E04-484D-8C02-BEB87EF6C966}"/>
               </a:ext>
             </a:extLst>
           </p:cNvPr>
@@ -4677,7 +4677,7 @@
           <p:cNvPr id="19" name="integrity-hash">
             <a:extLst xmlns:a="http://schemas.openxmlformats.org/drawingml/2006/main">
               <a:ext uri="{FF2B5EF4-FFF2-40B4-BE49-F238E27FC236}">
-                <a16:creationId xmlns:a16="http://schemas.microsoft.com/office/drawing/2014/main" id="{2C7AF541-490A-4364-8B77-A382B8B6AF9C}"/>
+                <a16:creationId xmlns:a16="http://schemas.microsoft.com/office/drawing/2014/main" id="{30945544-F938-4AE9-9341-2AB12566F1D8}"/>
               </a:ext>
             </a:extLst>
           </p:cNvPr>
@@ -4731,7 +4731,7 @@
     </p:spTree>
     <p:extLst>
       <p:ext uri="{BB962C8B-B14F-4D97-AF65-F5344CB8AC3E}">
-        <p14:creationId xmlns:p14="http://schemas.microsoft.com/office/powerpoint/2010/main" val="761788461"/>
+        <p14:creationId xmlns:p14="http://schemas.microsoft.com/office/powerpoint/2010/main" val="28413815"/>
       </p:ext>
     </p:extLst>
   </p:cSld>
@@ -4762,7 +4762,7 @@
           <p:cNvPr id="16" name="title-6">
             <a:extLst xmlns:a="http://schemas.openxmlformats.org/drawingml/2006/main">
               <a:ext uri="{FF2B5EF4-FFF2-40B4-BE49-F238E27FC236}">
-                <a16:creationId xmlns:a16="http://schemas.microsoft.com/office/drawing/2014/main" id="{34158DD9-2A88-48BE-905F-F50C1BE0C88F}"/>
+                <a16:creationId xmlns:a16="http://schemas.microsoft.com/office/drawing/2014/main" id="{C2C6F4D2-9EE2-4FDD-BC52-173AF175D052}"/>
               </a:ext>
             </a:extLst>
           </p:cNvPr>
@@ -4818,7 +4818,7 @@
           <p:cNvPr id="2" name="page-6">
             <a:extLst xmlns:a="http://schemas.openxmlformats.org/drawingml/2006/main">
               <a:ext uri="{FF2B5EF4-FFF2-40B4-BE49-F238E27FC236}">
-                <a16:creationId xmlns:a16="http://schemas.microsoft.com/office/drawing/2014/main" id="{74DFDF43-A65D-4C07-8A76-108AFAF417D2}"/>
+                <a16:creationId xmlns:a16="http://schemas.microsoft.com/office/drawing/2014/main" id="{13D7E22A-AE64-475F-9196-E0C1A7F83D18}"/>
               </a:ext>
             </a:extLst>
           </p:cNvPr>
@@ -4874,7 +4874,7 @@
           <p:cNvPr id="3" name="flow-arrow-1">
             <a:extLst xmlns:a="http://schemas.openxmlformats.org/drawingml/2006/main">
               <a:ext uri="{FF2B5EF4-FFF2-40B4-BE49-F238E27FC236}">
-                <a16:creationId xmlns:a16="http://schemas.microsoft.com/office/drawing/2014/main" id="{70A45F54-972C-474D-A28F-8B7212A4C24C}"/>
+                <a16:creationId xmlns:a16="http://schemas.microsoft.com/office/drawing/2014/main" id="{97EC3B7F-386C-4786-97DF-F409D48780AD}"/>
               </a:ext>
             </a:extLst>
           </p:cNvPr>
@@ -4930,7 +4930,7 @@
           <p:cNvPr id="4" name="flow-arrow-2">
             <a:extLst xmlns:a="http://schemas.openxmlformats.org/drawingml/2006/main">
               <a:ext uri="{FF2B5EF4-FFF2-40B4-BE49-F238E27FC236}">
-                <a16:creationId xmlns:a16="http://schemas.microsoft.com/office/drawing/2014/main" id="{807268F8-4442-4F18-9691-2FED0F5D5BBE}"/>
+                <a16:creationId xmlns:a16="http://schemas.microsoft.com/office/drawing/2014/main" id="{E66F4DD0-920C-4E1B-AED5-9C85E6D3DDF2}"/>
               </a:ext>
             </a:extLst>
           </p:cNvPr>
@@ -4986,7 +4986,7 @@
           <p:cNvPr id="5" name="flarum-core">
             <a:extLst xmlns:a="http://schemas.openxmlformats.org/drawingml/2006/main">
               <a:ext uri="{FF2B5EF4-FFF2-40B4-BE49-F238E27FC236}">
-                <a16:creationId xmlns:a16="http://schemas.microsoft.com/office/drawing/2014/main" id="{DCCFFB2F-DC0F-41F8-8A41-BBED13FB7E3E}"/>
+                <a16:creationId xmlns:a16="http://schemas.microsoft.com/office/drawing/2014/main" id="{9CA3784D-5454-448A-8F5F-9E7D825DD376}"/>
               </a:ext>
             </a:extLst>
           </p:cNvPr>
@@ -5006,11 +5006,11 @@
             </a:avLst>
           </a:prstGeom>
           <a:solidFill xmlns:a="http://schemas.openxmlformats.org/drawingml/2006/main">
-            <a:srgbClr val="F5F7FB"/>
+            <a:srgbClr val="F3F7FC"/>
           </a:solidFill>
           <a:ln xmlns:a="http://schemas.openxmlformats.org/drawingml/2006/main" w="9525">
             <a:solidFill>
-              <a:srgbClr val="D8E0EC"/>
+              <a:srgbClr val="D5E1F1"/>
             </a:solidFill>
             <a:prstDash val="solid"/>
           </a:ln>
@@ -5021,7 +5021,7 @@
           <p:cNvPr id="6" name="theme-extension">
             <a:extLst xmlns:a="http://schemas.openxmlformats.org/drawingml/2006/main">
               <a:ext uri="{FF2B5EF4-FFF2-40B4-BE49-F238E27FC236}">
-                <a16:creationId xmlns:a16="http://schemas.microsoft.com/office/drawing/2014/main" id="{37792805-176F-455D-B2A3-7BC7E7B086A7}"/>
+                <a16:creationId xmlns:a16="http://schemas.microsoft.com/office/drawing/2014/main" id="{E4ED5645-5B51-41AF-A900-421E4F43D1BC}"/>
               </a:ext>
             </a:extLst>
           </p:cNvPr>
@@ -5056,7 +5056,7 @@
           <p:cNvPr id="7" name="community-ui">
             <a:extLst xmlns:a="http://schemas.openxmlformats.org/drawingml/2006/main">
               <a:ext uri="{FF2B5EF4-FFF2-40B4-BE49-F238E27FC236}">
-                <a16:creationId xmlns:a16="http://schemas.microsoft.com/office/drawing/2014/main" id="{24B96011-B45F-418D-B936-C61BA3FB14CB}"/>
+                <a16:creationId xmlns:a16="http://schemas.microsoft.com/office/drawing/2014/main" id="{F39AAF2B-FB0D-44C8-B00D-5CF5CF3D9003}"/>
               </a:ext>
             </a:extLst>
           </p:cNvPr>
@@ -5091,7 +5091,7 @@
           <p:cNvPr id="8" name="flarum-core-title">
             <a:extLst xmlns:a="http://schemas.openxmlformats.org/drawingml/2006/main">
               <a:ext uri="{FF2B5EF4-FFF2-40B4-BE49-F238E27FC236}">
-                <a16:creationId xmlns:a16="http://schemas.microsoft.com/office/drawing/2014/main" id="{DD1A6F92-6CBD-4C19-9F90-7C3875BABA0B}"/>
+                <a16:creationId xmlns:a16="http://schemas.microsoft.com/office/drawing/2014/main" id="{25F1602E-147F-40D5-BB7F-7A4652B7C106}"/>
               </a:ext>
             </a:extLst>
           </p:cNvPr>
@@ -5147,7 +5147,7 @@
           <p:cNvPr id="9" name="flarum-core-copy">
             <a:extLst xmlns:a="http://schemas.openxmlformats.org/drawingml/2006/main">
               <a:ext uri="{FF2B5EF4-FFF2-40B4-BE49-F238E27FC236}">
-                <a16:creationId xmlns:a16="http://schemas.microsoft.com/office/drawing/2014/main" id="{4CB49841-0399-4F61-BB5E-72A829466481}"/>
+                <a16:creationId xmlns:a16="http://schemas.microsoft.com/office/drawing/2014/main" id="{AA7CDD2A-CDBC-4BB6-8BF7-4C81D4D8C759}"/>
               </a:ext>
             </a:extLst>
           </p:cNvPr>
@@ -5203,7 +5203,7 @@
           <p:cNvPr id="10" name="theme-title">
             <a:extLst xmlns:a="http://schemas.openxmlformats.org/drawingml/2006/main">
               <a:ext uri="{FF2B5EF4-FFF2-40B4-BE49-F238E27FC236}">
-                <a16:creationId xmlns:a16="http://schemas.microsoft.com/office/drawing/2014/main" id="{9D30F129-F0C1-4737-A0E1-D36DBC649D77}"/>
+                <a16:creationId xmlns:a16="http://schemas.microsoft.com/office/drawing/2014/main" id="{C069B4FC-9974-45E8-8B0C-E5825BCF430B}"/>
               </a:ext>
             </a:extLst>
           </p:cNvPr>
@@ -5282,7 +5282,7 @@
           <p:cNvPr id="11" name="theme-copy">
             <a:extLst xmlns:a="http://schemas.openxmlformats.org/drawingml/2006/main">
               <a:ext uri="{FF2B5EF4-FFF2-40B4-BE49-F238E27FC236}">
-                <a16:creationId xmlns:a16="http://schemas.microsoft.com/office/drawing/2014/main" id="{02452F53-54EC-4526-B8E3-3FA8EEF5AE2D}"/>
+                <a16:creationId xmlns:a16="http://schemas.microsoft.com/office/drawing/2014/main" id="{16017296-655A-4257-BDBA-713B8D5FD465}"/>
               </a:ext>
             </a:extLst>
           </p:cNvPr>
@@ -5338,7 +5338,7 @@
           <p:cNvPr id="12" name="ui-title">
             <a:extLst xmlns:a="http://schemas.openxmlformats.org/drawingml/2006/main">
               <a:ext uri="{FF2B5EF4-FFF2-40B4-BE49-F238E27FC236}">
-                <a16:creationId xmlns:a16="http://schemas.microsoft.com/office/drawing/2014/main" id="{6D266778-55F9-4D32-8287-0D11FD7925D3}"/>
+                <a16:creationId xmlns:a16="http://schemas.microsoft.com/office/drawing/2014/main" id="{8AA4CAC8-BB88-429F-A32A-BC5EF660BD9D}"/>
               </a:ext>
             </a:extLst>
           </p:cNvPr>
@@ -5394,7 +5394,7 @@
           <p:cNvPr id="13" name="ui-copy">
             <a:extLst xmlns:a="http://schemas.openxmlformats.org/drawingml/2006/main">
               <a:ext uri="{FF2B5EF4-FFF2-40B4-BE49-F238E27FC236}">
-                <a16:creationId xmlns:a16="http://schemas.microsoft.com/office/drawing/2014/main" id="{04C00FC2-1A8F-4511-933A-0D9CBA0F0EFB}"/>
+                <a16:creationId xmlns:a16="http://schemas.microsoft.com/office/drawing/2014/main" id="{B78B82E9-1C01-471A-8A5A-094B891E2A0B}"/>
               </a:ext>
             </a:extLst>
           </p:cNvPr>
@@ -5450,7 +5450,7 @@
           <p:cNvPr id="14" name="rollback-strip">
             <a:extLst xmlns:a="http://schemas.openxmlformats.org/drawingml/2006/main">
               <a:ext uri="{FF2B5EF4-FFF2-40B4-BE49-F238E27FC236}">
-                <a16:creationId xmlns:a16="http://schemas.microsoft.com/office/drawing/2014/main" id="{7BB9F9E2-03D1-49C7-B189-059695079842}"/>
+                <a16:creationId xmlns:a16="http://schemas.microsoft.com/office/drawing/2014/main" id="{F1678DA7-86C2-45D4-B880-46856B6D82EB}"/>
               </a:ext>
             </a:extLst>
           </p:cNvPr>
@@ -5485,7 +5485,7 @@
           <p:cNvPr id="15" name="rollback-copy">
             <a:extLst xmlns:a="http://schemas.openxmlformats.org/drawingml/2006/main">
               <a:ext uri="{FF2B5EF4-FFF2-40B4-BE49-F238E27FC236}">
-                <a16:creationId xmlns:a16="http://schemas.microsoft.com/office/drawing/2014/main" id="{E2C7D22E-982A-4965-90B4-E246A6F9BD9B}"/>
+                <a16:creationId xmlns:a16="http://schemas.microsoft.com/office/drawing/2014/main" id="{5F1F7096-604A-46C3-937C-B66DBCC66B20}"/>
               </a:ext>
             </a:extLst>
           </p:cNvPr>
@@ -5539,7 +5539,7 @@
     </p:spTree>
     <p:extLst>
       <p:ext uri="{BB962C8B-B14F-4D97-AF65-F5344CB8AC3E}">
-        <p14:creationId xmlns:p14="http://schemas.microsoft.com/office/powerpoint/2010/main" val="1373276761"/>
+        <p14:creationId xmlns:p14="http://schemas.microsoft.com/office/powerpoint/2010/main" val="1822389716"/>
       </p:ext>
     </p:extLst>
   </p:cSld>
@@ -5570,7 +5570,7 @@
           <p:cNvPr id="8" name="close-kicker">
             <a:extLst xmlns:a="http://schemas.openxmlformats.org/drawingml/2006/main">
               <a:ext uri="{FF2B5EF4-FFF2-40B4-BE49-F238E27FC236}">
-                <a16:creationId xmlns:a16="http://schemas.microsoft.com/office/drawing/2014/main" id="{E23BD62A-074B-4266-BC13-F92E434B7FD4}"/>
+                <a16:creationId xmlns:a16="http://schemas.microsoft.com/office/drawing/2014/main" id="{8845B3F0-8CA6-49C8-BD93-DDD1F8F83681}"/>
               </a:ext>
             </a:extLst>
           </p:cNvPr>
@@ -5626,7 +5626,7 @@
           <p:cNvPr id="2" name="close-title">
             <a:extLst xmlns:a="http://schemas.openxmlformats.org/drawingml/2006/main">
               <a:ext uri="{FF2B5EF4-FFF2-40B4-BE49-F238E27FC236}">
-                <a16:creationId xmlns:a16="http://schemas.microsoft.com/office/drawing/2014/main" id="{8A254BB3-8E28-4AF9-942E-1815CC62C194}"/>
+                <a16:creationId xmlns:a16="http://schemas.microsoft.com/office/drawing/2014/main" id="{B90482D9-E49D-4A75-A7DD-D20A8403701F}"/>
               </a:ext>
             </a:extLst>
           </p:cNvPr>
@@ -5705,7 +5705,7 @@
           <p:cNvPr id="3" name="close-detail">
             <a:extLst xmlns:a="http://schemas.openxmlformats.org/drawingml/2006/main">
               <a:ext uri="{FF2B5EF4-FFF2-40B4-BE49-F238E27FC236}">
-                <a16:creationId xmlns:a16="http://schemas.microsoft.com/office/drawing/2014/main" id="{0153F1D8-2F9E-4F18-B45A-B19AC9030436}"/>
+                <a16:creationId xmlns:a16="http://schemas.microsoft.com/office/drawing/2014/main" id="{07786C93-BD25-40E4-9FD9-D2A9C6876874}"/>
               </a:ext>
             </a:extLst>
           </p:cNvPr>
@@ -5784,7 +5784,7 @@
           <p:cNvPr id="4" name="close-status">
             <a:extLst xmlns:a="http://schemas.openxmlformats.org/drawingml/2006/main">
               <a:ext uri="{FF2B5EF4-FFF2-40B4-BE49-F238E27FC236}">
-                <a16:creationId xmlns:a16="http://schemas.microsoft.com/office/drawing/2014/main" id="{32481C1C-6A60-430E-BFBC-FD2AD86AF2F4}"/>
+                <a16:creationId xmlns:a16="http://schemas.microsoft.com/office/drawing/2014/main" id="{4A99C6E8-A50F-478C-ABEC-15A175845BC5}"/>
               </a:ext>
             </a:extLst>
           </p:cNvPr>
@@ -5819,7 +5819,7 @@
           <p:cNvPr id="5" name="close-go">
             <a:extLst xmlns:a="http://schemas.openxmlformats.org/drawingml/2006/main">
               <a:ext uri="{FF2B5EF4-FFF2-40B4-BE49-F238E27FC236}">
-                <a16:creationId xmlns:a16="http://schemas.microsoft.com/office/drawing/2014/main" id="{A6116457-78B9-41FF-B107-F1FB47229EB8}"/>
+                <a16:creationId xmlns:a16="http://schemas.microsoft.com/office/drawing/2014/main" id="{7216BC89-86DB-4940-84C2-0E9AD119D7E1}"/>
               </a:ext>
             </a:extLst>
           </p:cNvPr>
@@ -5875,7 +5875,7 @@
           <p:cNvPr id="6" name="close-condition">
             <a:extLst xmlns:a="http://schemas.openxmlformats.org/drawingml/2006/main">
               <a:ext uri="{FF2B5EF4-FFF2-40B4-BE49-F238E27FC236}">
-                <a16:creationId xmlns:a16="http://schemas.microsoft.com/office/drawing/2014/main" id="{69DB25A2-1F60-4BE4-B838-20BBE53A0F7C}"/>
+                <a16:creationId xmlns:a16="http://schemas.microsoft.com/office/drawing/2014/main" id="{A737D8EF-3E59-4E0F-B875-8CE04D6F1CD6}"/>
               </a:ext>
             </a:extLst>
           </p:cNvPr>
@@ -5931,7 +5931,7 @@
           <p:cNvPr id="7" name="close-next">
             <a:extLst xmlns:a="http://schemas.openxmlformats.org/drawingml/2006/main">
               <a:ext uri="{FF2B5EF4-FFF2-40B4-BE49-F238E27FC236}">
-                <a16:creationId xmlns:a16="http://schemas.microsoft.com/office/drawing/2014/main" id="{6A56977A-1B2C-481C-9B2D-3E3DD895472C}"/>
+                <a16:creationId xmlns:a16="http://schemas.microsoft.com/office/drawing/2014/main" id="{75AB3431-1F98-4F70-9CF4-B76ADFF23BE4}"/>
               </a:ext>
             </a:extLst>
           </p:cNvPr>
@@ -5985,7 +5985,7 @@
     </p:spTree>
     <p:extLst>
       <p:ext uri="{BB962C8B-B14F-4D97-AF65-F5344CB8AC3E}">
-        <p14:creationId xmlns:p14="http://schemas.microsoft.com/office/powerpoint/2010/main" val="966512777"/>
+        <p14:creationId xmlns:p14="http://schemas.microsoft.com/office/powerpoint/2010/main" val="145209803"/>
       </p:ext>
     </p:extLst>
   </p:cSld>

--- a/output/presentation/techflow-community-ui-modernization.pptx
+++ b/output/presentation/techflow-community-ui-modernization.pptx
@@ -2,19 +2,19 @@
 <file path=ppt/presentation.xml><?xml version="1.0" encoding="utf-8"?>
 <p:presentation xmlns:p="http://schemas.openxmlformats.org/presentationml/2006/main">
   <p:sldMasterIdLst>
-    <p:sldMasterId xmlns:r="http://schemas.openxmlformats.org/officeDocument/2006/relationships" id="2147483648" r:id="R4323ed2c59ab4a48"/>
+    <p:sldMasterId xmlns:r="http://schemas.openxmlformats.org/officeDocument/2006/relationships" id="2147483648" r:id="R83284510fb2c4e6a"/>
   </p:sldMasterIdLst>
   <p:notesMasterIdLst>
-    <p:notesMasterId xmlns:r="http://schemas.openxmlformats.org/officeDocument/2006/relationships" r:id="R2ac1b75db5b54a3f"/>
+    <p:notesMasterId xmlns:r="http://schemas.openxmlformats.org/officeDocument/2006/relationships" r:id="Rb97b412fbf5d49f6"/>
   </p:notesMasterIdLst>
   <p:sldIdLst>
-    <p:sldId xmlns:r="http://schemas.openxmlformats.org/officeDocument/2006/relationships" id="256" r:id="R29902aa5288b4f46"/>
-    <p:sldId xmlns:r="http://schemas.openxmlformats.org/officeDocument/2006/relationships" id="257" r:id="R82200808d0ba46cd"/>
-    <p:sldId xmlns:r="http://schemas.openxmlformats.org/officeDocument/2006/relationships" id="258" r:id="R9459cd57773545b4"/>
-    <p:sldId xmlns:r="http://schemas.openxmlformats.org/officeDocument/2006/relationships" id="259" r:id="R58daa52f907e4816"/>
-    <p:sldId xmlns:r="http://schemas.openxmlformats.org/officeDocument/2006/relationships" id="260" r:id="R0498629cca9f484b"/>
-    <p:sldId xmlns:r="http://schemas.openxmlformats.org/officeDocument/2006/relationships" id="261" r:id="Rfbb6947407f24e94"/>
-    <p:sldId xmlns:r="http://schemas.openxmlformats.org/officeDocument/2006/relationships" id="262" r:id="R868b946573cd4b7e"/>
+    <p:sldId xmlns:r="http://schemas.openxmlformats.org/officeDocument/2006/relationships" id="256" r:id="R1a967ddc46a14adc"/>
+    <p:sldId xmlns:r="http://schemas.openxmlformats.org/officeDocument/2006/relationships" id="257" r:id="R5f15f6ccac1345ea"/>
+    <p:sldId xmlns:r="http://schemas.openxmlformats.org/officeDocument/2006/relationships" id="258" r:id="R1fea2b4f0b2443e7"/>
+    <p:sldId xmlns:r="http://schemas.openxmlformats.org/officeDocument/2006/relationships" id="259" r:id="Rf92d09e73e1e4986"/>
+    <p:sldId xmlns:r="http://schemas.openxmlformats.org/officeDocument/2006/relationships" id="260" r:id="R5ea16cb5e6c24b3f"/>
+    <p:sldId xmlns:r="http://schemas.openxmlformats.org/officeDocument/2006/relationships" id="261" r:id="R4208fce0a3b949c2"/>
+    <p:sldId xmlns:r="http://schemas.openxmlformats.org/officeDocument/2006/relationships" id="262" r:id="R098e1a5ba4474b2a"/>
   </p:sldIdLst>
   <p:sldSz cx="12192000" cy="6858000"/>
   <p:notesSz cx="6858000" cy="9144000"/>
@@ -1076,7 +1076,7 @@
   </p:cSld>
   <p:clrMap bg1="lt1" tx1="dk1" bg2="lt2" tx2="dk2" accent1="accent1" accent2="accent2" accent3="accent3" accent4="accent4" accent5="accent5" accent6="accent6" hlink="hlink" folHlink="folHlink"/>
   <p:sldLayoutIdLst>
-    <p:sldLayoutId xmlns:r="http://schemas.openxmlformats.org/officeDocument/2006/relationships" id="2147483649" r:id="Rfb8c9d92b24b49e7"/>
+    <p:sldLayoutId xmlns:r="http://schemas.openxmlformats.org/officeDocument/2006/relationships" id="2147483649" r:id="R8345dfe464324a28"/>
   </p:sldLayoutIdLst>
   <p:txStyles>
     <p:titleStyle>
@@ -1627,7 +1627,7 @@
           <p:cNvPr id="7" name="cover-kicker">
             <a:extLst xmlns:a="http://schemas.openxmlformats.org/drawingml/2006/main">
               <a:ext uri="{FF2B5EF4-FFF2-40B4-BE49-F238E27FC236}">
-                <a16:creationId xmlns:a16="http://schemas.microsoft.com/office/drawing/2014/main" id="{3383A91F-21B8-4498-BF9B-01E891F76360}"/>
+                <a16:creationId xmlns:a16="http://schemas.microsoft.com/office/drawing/2014/main" id="{B30C517E-02CD-47F7-B7FB-6A4A9F2C0223}"/>
               </a:ext>
             </a:extLst>
           </p:cNvPr>
@@ -1683,7 +1683,7 @@
           <p:cNvPr id="2" name="cover-title">
             <a:extLst xmlns:a="http://schemas.openxmlformats.org/drawingml/2006/main">
               <a:ext uri="{FF2B5EF4-FFF2-40B4-BE49-F238E27FC236}">
-                <a16:creationId xmlns:a16="http://schemas.microsoft.com/office/drawing/2014/main" id="{4FD253A8-C98C-4236-AA14-70A454EE2E85}"/>
+                <a16:creationId xmlns:a16="http://schemas.microsoft.com/office/drawing/2014/main" id="{AB7F3300-C30F-436E-B722-FD76091A9096}"/>
               </a:ext>
             </a:extLst>
           </p:cNvPr>
@@ -1762,7 +1762,7 @@
           <p:cNvPr id="3" name="cover-subtitle">
             <a:extLst xmlns:a="http://schemas.openxmlformats.org/drawingml/2006/main">
               <a:ext uri="{FF2B5EF4-FFF2-40B4-BE49-F238E27FC236}">
-                <a16:creationId xmlns:a16="http://schemas.microsoft.com/office/drawing/2014/main" id="{4654B557-AA2E-4933-A038-5468D31A3142}"/>
+                <a16:creationId xmlns:a16="http://schemas.microsoft.com/office/drawing/2014/main" id="{776B1FC0-5714-41D6-A0C6-4DD00F3AD449}"/>
               </a:ext>
             </a:extLst>
           </p:cNvPr>
@@ -1818,7 +1818,7 @@
           <p:cNvPr id="4" name="cover-image-frame">
             <a:extLst xmlns:a="http://schemas.openxmlformats.org/drawingml/2006/main">
               <a:ext uri="{FF2B5EF4-FFF2-40B4-BE49-F238E27FC236}">
-                <a16:creationId xmlns:a16="http://schemas.microsoft.com/office/drawing/2014/main" id="{4D5A548F-8989-43B9-8B7E-571E87E3C90B}"/>
+                <a16:creationId xmlns:a16="http://schemas.microsoft.com/office/drawing/2014/main" id="{3E47E418-CE4E-41DB-9ECD-70662FC6B20F}"/>
               </a:ext>
             </a:extLst>
           </p:cNvPr>
@@ -1857,7 +1857,7 @@
           <p:nvPr/>
         </p:nvPicPr>
         <p:blipFill>
-          <a:blip xmlns:r="http://schemas.openxmlformats.org/officeDocument/2006/relationships" xmlns:a="http://schemas.openxmlformats.org/drawingml/2006/main" r:embed="R2a84c82562ae4722"/>
+          <a:blip xmlns:r="http://schemas.openxmlformats.org/officeDocument/2006/relationships" xmlns:a="http://schemas.openxmlformats.org/drawingml/2006/main" r:embed="R351cc1dffecc43f0"/>
           <a:stretch xmlns:a="http://schemas.openxmlformats.org/drawingml/2006/main"/>
         </p:blipFill>
         <p:spPr>
@@ -1877,7 +1877,7 @@
           <p:cNvPr id="6" name="cover-status">
             <a:extLst xmlns:a="http://schemas.openxmlformats.org/drawingml/2006/main">
               <a:ext uri="{FF2B5EF4-FFF2-40B4-BE49-F238E27FC236}">
-                <a16:creationId xmlns:a16="http://schemas.microsoft.com/office/drawing/2014/main" id="{E68E7183-2E8D-4233-B2A6-2D26B78D5E56}"/>
+                <a16:creationId xmlns:a16="http://schemas.microsoft.com/office/drawing/2014/main" id="{F3ABF863-A594-457D-BC55-BDC23A83DDC1}"/>
               </a:ext>
             </a:extLst>
           </p:cNvPr>
@@ -1931,7 +1931,7 @@
     </p:spTree>
     <p:extLst>
       <p:ext uri="{BB962C8B-B14F-4D97-AF65-F5344CB8AC3E}">
-        <p14:creationId xmlns:p14="http://schemas.microsoft.com/office/powerpoint/2010/main" val="1846505965"/>
+        <p14:creationId xmlns:p14="http://schemas.microsoft.com/office/powerpoint/2010/main" val="1356351078"/>
       </p:ext>
     </p:extLst>
   </p:cSld>
@@ -1962,7 +1962,7 @@
           <p:cNvPr id="9" name="title-2">
             <a:extLst xmlns:a="http://schemas.openxmlformats.org/drawingml/2006/main">
               <a:ext uri="{FF2B5EF4-FFF2-40B4-BE49-F238E27FC236}">
-                <a16:creationId xmlns:a16="http://schemas.microsoft.com/office/drawing/2014/main" id="{580589C4-B7E9-4AA3-B671-4BDEE4AFACF5}"/>
+                <a16:creationId xmlns:a16="http://schemas.microsoft.com/office/drawing/2014/main" id="{8F834E69-3D26-4FA4-8F92-4AB62DE0A133}"/>
               </a:ext>
             </a:extLst>
           </p:cNvPr>
@@ -2018,7 +2018,7 @@
           <p:cNvPr id="2" name="page-2">
             <a:extLst xmlns:a="http://schemas.openxmlformats.org/drawingml/2006/main">
               <a:ext uri="{FF2B5EF4-FFF2-40B4-BE49-F238E27FC236}">
-                <a16:creationId xmlns:a16="http://schemas.microsoft.com/office/drawing/2014/main" id="{A73990A1-E581-4844-85FA-41CE04F4D72D}"/>
+                <a16:creationId xmlns:a16="http://schemas.microsoft.com/office/drawing/2014/main" id="{90A132A9-F840-4709-BDCF-9ECF3DC2C25E}"/>
               </a:ext>
             </a:extLst>
           </p:cNvPr>
@@ -2074,7 +2074,7 @@
           <p:cNvPr id="3" name="before-label">
             <a:extLst xmlns:a="http://schemas.openxmlformats.org/drawingml/2006/main">
               <a:ext uri="{FF2B5EF4-FFF2-40B4-BE49-F238E27FC236}">
-                <a16:creationId xmlns:a16="http://schemas.microsoft.com/office/drawing/2014/main" id="{10EE9B8C-6A55-4B3B-BBCB-D9C03E248D65}"/>
+                <a16:creationId xmlns:a16="http://schemas.microsoft.com/office/drawing/2014/main" id="{2BCD3387-73D4-427D-840E-DF406D47C5BF}"/>
               </a:ext>
             </a:extLst>
           </p:cNvPr>
@@ -2130,7 +2130,7 @@
           <p:cNvPr id="4" name="after-label">
             <a:extLst xmlns:a="http://schemas.openxmlformats.org/drawingml/2006/main">
               <a:ext uri="{FF2B5EF4-FFF2-40B4-BE49-F238E27FC236}">
-                <a16:creationId xmlns:a16="http://schemas.microsoft.com/office/drawing/2014/main" id="{0C7D763B-84F1-48DB-B696-54625AF499DC}"/>
+                <a16:creationId xmlns:a16="http://schemas.microsoft.com/office/drawing/2014/main" id="{3FF48F15-66D2-4E02-A402-EF3E08D98E40}"/>
               </a:ext>
             </a:extLst>
           </p:cNvPr>
@@ -2190,7 +2190,7 @@
           <p:nvPr/>
         </p:nvPicPr>
         <p:blipFill>
-          <a:blip xmlns:r="http://schemas.openxmlformats.org/officeDocument/2006/relationships" xmlns:a="http://schemas.openxmlformats.org/drawingml/2006/main" r:embed="Ra29c05c119834702"/>
+          <a:blip xmlns:r="http://schemas.openxmlformats.org/officeDocument/2006/relationships" xmlns:a="http://schemas.openxmlformats.org/drawingml/2006/main" r:embed="R4dd8a080a26a482b"/>
           <a:stretch xmlns:a="http://schemas.openxmlformats.org/drawingml/2006/main"/>
         </p:blipFill>
         <p:spPr>
@@ -2214,7 +2214,7 @@
           <p:nvPr/>
         </p:nvPicPr>
         <p:blipFill>
-          <a:blip xmlns:r="http://schemas.openxmlformats.org/officeDocument/2006/relationships" xmlns:a="http://schemas.openxmlformats.org/drawingml/2006/main" r:embed="Rbf75648e436a4827"/>
+          <a:blip xmlns:r="http://schemas.openxmlformats.org/officeDocument/2006/relationships" xmlns:a="http://schemas.openxmlformats.org/drawingml/2006/main" r:embed="R527004dc2efe499a"/>
           <a:stretch xmlns:a="http://schemas.openxmlformats.org/drawingml/2006/main"/>
         </p:blipFill>
         <p:spPr>
@@ -2234,7 +2234,7 @@
           <p:cNvPr id="7" name="before-copy">
             <a:extLst xmlns:a="http://schemas.openxmlformats.org/drawingml/2006/main">
               <a:ext uri="{FF2B5EF4-FFF2-40B4-BE49-F238E27FC236}">
-                <a16:creationId xmlns:a16="http://schemas.microsoft.com/office/drawing/2014/main" id="{A4534A8D-020E-4041-A167-F5DC46875822}"/>
+                <a16:creationId xmlns:a16="http://schemas.microsoft.com/office/drawing/2014/main" id="{A7452FD0-121D-49B0-9629-0C16A27F8D17}"/>
               </a:ext>
             </a:extLst>
           </p:cNvPr>
@@ -2290,7 +2290,7 @@
           <p:cNvPr id="8" name="after-copy">
             <a:extLst xmlns:a="http://schemas.openxmlformats.org/drawingml/2006/main">
               <a:ext uri="{FF2B5EF4-FFF2-40B4-BE49-F238E27FC236}">
-                <a16:creationId xmlns:a16="http://schemas.microsoft.com/office/drawing/2014/main" id="{9F05B65F-39F7-4188-9961-2AE11285B618}"/>
+                <a16:creationId xmlns:a16="http://schemas.microsoft.com/office/drawing/2014/main" id="{5043334E-AB41-4998-8A95-1D5917263A35}"/>
               </a:ext>
             </a:extLst>
           </p:cNvPr>
@@ -2318,7 +2318,7 @@
           <a:lstStyle xmlns:a="http://schemas.openxmlformats.org/drawingml/2006/main"/>
           <a:p xmlns:a="http://schemas.openxmlformats.org/drawingml/2006/main">
             <a:pPr algn="ctr">
-              <a:defRPr sz="1575" b="1">
+              <a:defRPr sz="1425" b="1">
                 <a:solidFill>
                   <a:srgbClr val="15253E"/>
                 </a:solidFill>
@@ -2328,7 +2328,7 @@
               </a:defRPr>
             </a:pPr>
             <a:r>
-              <a:rPr sz="1575" b="1">
+              <a:rPr sz="1425" b="1">
                 <a:solidFill>
                   <a:srgbClr val="15253E"/>
                 </a:solidFill>
@@ -2336,7 +2336,7 @@
                 <a:ea typeface="Malgun Gothic"/>
                 <a:cs typeface="Malgun Gothic"/>
               </a:rPr>
-              <a:t>블루 Hero · 넉넉한 카드 여백 · 한글 상태 · 44px 조작</a:t>
+              <a:t>128px Hero · 28px 타이틀 · 240px 탐색 · 버튼 넘침 0px</a:t>
             </a:r>
           </a:p>
         </p:txBody>
@@ -2344,7 +2344,7 @@
     </p:spTree>
     <p:extLst>
       <p:ext uri="{BB962C8B-B14F-4D97-AF65-F5344CB8AC3E}">
-        <p14:creationId xmlns:p14="http://schemas.microsoft.com/office/powerpoint/2010/main" val="1435919711"/>
+        <p14:creationId xmlns:p14="http://schemas.microsoft.com/office/powerpoint/2010/main" val="1627751249"/>
       </p:ext>
     </p:extLst>
   </p:cSld>
@@ -2375,7 +2375,7 @@
           <p:cNvPr id="15" name="title-3">
             <a:extLst xmlns:a="http://schemas.openxmlformats.org/drawingml/2006/main">
               <a:ext uri="{FF2B5EF4-FFF2-40B4-BE49-F238E27FC236}">
-                <a16:creationId xmlns:a16="http://schemas.microsoft.com/office/drawing/2014/main" id="{D3837D8A-9A68-4EC0-91AA-3E8703153CFE}"/>
+                <a16:creationId xmlns:a16="http://schemas.microsoft.com/office/drawing/2014/main" id="{E35B2A2A-517B-4272-898B-2A046A2DC360}"/>
               </a:ext>
             </a:extLst>
           </p:cNvPr>
@@ -2431,7 +2431,7 @@
           <p:cNvPr id="2" name="page-3">
             <a:extLst xmlns:a="http://schemas.openxmlformats.org/drawingml/2006/main">
               <a:ext uri="{FF2B5EF4-FFF2-40B4-BE49-F238E27FC236}">
-                <a16:creationId xmlns:a16="http://schemas.microsoft.com/office/drawing/2014/main" id="{0E6DA27A-E755-4BC7-9E9A-5C8FFC8B4028}"/>
+                <a16:creationId xmlns:a16="http://schemas.microsoft.com/office/drawing/2014/main" id="{9C0A3593-1AB6-4176-8118-FA382F61EB4D}"/>
               </a:ext>
             </a:extLst>
           </p:cNvPr>
@@ -2487,7 +2487,7 @@
           <p:cNvPr id="3" name="state-0">
             <a:extLst xmlns:a="http://schemas.openxmlformats.org/drawingml/2006/main">
               <a:ext uri="{FF2B5EF4-FFF2-40B4-BE49-F238E27FC236}">
-                <a16:creationId xmlns:a16="http://schemas.microsoft.com/office/drawing/2014/main" id="{636B64CF-2FD0-46DB-8316-7AAA71E4B35B}"/>
+                <a16:creationId xmlns:a16="http://schemas.microsoft.com/office/drawing/2014/main" id="{44EE3C0F-D19C-422D-986E-5E4D6B709BDE}"/>
               </a:ext>
             </a:extLst>
           </p:cNvPr>
@@ -2522,7 +2522,7 @@
           <p:cNvPr id="4" name="state-label-0">
             <a:extLst xmlns:a="http://schemas.openxmlformats.org/drawingml/2006/main">
               <a:ext uri="{FF2B5EF4-FFF2-40B4-BE49-F238E27FC236}">
-                <a16:creationId xmlns:a16="http://schemas.microsoft.com/office/drawing/2014/main" id="{E500C165-7006-4E22-8052-0AB106F4538C}"/>
+                <a16:creationId xmlns:a16="http://schemas.microsoft.com/office/drawing/2014/main" id="{60A20C07-2808-4EEE-BF38-9A1A396EFCF6}"/>
               </a:ext>
             </a:extLst>
           </p:cNvPr>
@@ -2578,7 +2578,7 @@
           <p:cNvPr id="5" name="state-detail-0">
             <a:extLst xmlns:a="http://schemas.openxmlformats.org/drawingml/2006/main">
               <a:ext uri="{FF2B5EF4-FFF2-40B4-BE49-F238E27FC236}">
-                <a16:creationId xmlns:a16="http://schemas.microsoft.com/office/drawing/2014/main" id="{7F694103-997A-491E-9251-327AA93A3E73}"/>
+                <a16:creationId xmlns:a16="http://schemas.microsoft.com/office/drawing/2014/main" id="{19DF42A7-5B22-4B82-8B34-F234AC855E22}"/>
               </a:ext>
             </a:extLst>
           </p:cNvPr>
@@ -2634,7 +2634,7 @@
           <p:cNvPr id="6" name="state-1">
             <a:extLst xmlns:a="http://schemas.openxmlformats.org/drawingml/2006/main">
               <a:ext uri="{FF2B5EF4-FFF2-40B4-BE49-F238E27FC236}">
-                <a16:creationId xmlns:a16="http://schemas.microsoft.com/office/drawing/2014/main" id="{549F9B41-52CF-4721-AF15-7609E423FDED}"/>
+                <a16:creationId xmlns:a16="http://schemas.microsoft.com/office/drawing/2014/main" id="{FF9B2690-7305-480C-B838-F4836305B8EB}"/>
               </a:ext>
             </a:extLst>
           </p:cNvPr>
@@ -2669,7 +2669,7 @@
           <p:cNvPr id="7" name="state-label-1">
             <a:extLst xmlns:a="http://schemas.openxmlformats.org/drawingml/2006/main">
               <a:ext uri="{FF2B5EF4-FFF2-40B4-BE49-F238E27FC236}">
-                <a16:creationId xmlns:a16="http://schemas.microsoft.com/office/drawing/2014/main" id="{57D059EB-29F1-4FC2-9BDB-EB48E9DF0CE9}"/>
+                <a16:creationId xmlns:a16="http://schemas.microsoft.com/office/drawing/2014/main" id="{6A80EF6D-692F-4F25-A4C1-A69DF4E16AB1}"/>
               </a:ext>
             </a:extLst>
           </p:cNvPr>
@@ -2725,7 +2725,7 @@
           <p:cNvPr id="8" name="state-detail-1">
             <a:extLst xmlns:a="http://schemas.openxmlformats.org/drawingml/2006/main">
               <a:ext uri="{FF2B5EF4-FFF2-40B4-BE49-F238E27FC236}">
-                <a16:creationId xmlns:a16="http://schemas.microsoft.com/office/drawing/2014/main" id="{6EBA6FE6-1DC3-49C1-9E6D-83DFC25E7D64}"/>
+                <a16:creationId xmlns:a16="http://schemas.microsoft.com/office/drawing/2014/main" id="{7A79B4B4-D4CB-4170-86F4-7FCA95496391}"/>
               </a:ext>
             </a:extLst>
           </p:cNvPr>
@@ -2781,7 +2781,7 @@
           <p:cNvPr id="9" name="state-2">
             <a:extLst xmlns:a="http://schemas.openxmlformats.org/drawingml/2006/main">
               <a:ext uri="{FF2B5EF4-FFF2-40B4-BE49-F238E27FC236}">
-                <a16:creationId xmlns:a16="http://schemas.microsoft.com/office/drawing/2014/main" id="{56FC9D8D-B176-4297-858F-E57A4B426B7A}"/>
+                <a16:creationId xmlns:a16="http://schemas.microsoft.com/office/drawing/2014/main" id="{F1B6E346-1686-4F1E-B6BE-3A82E05A886B}"/>
               </a:ext>
             </a:extLst>
           </p:cNvPr>
@@ -2816,7 +2816,7 @@
           <p:cNvPr id="10" name="state-label-2">
             <a:extLst xmlns:a="http://schemas.openxmlformats.org/drawingml/2006/main">
               <a:ext uri="{FF2B5EF4-FFF2-40B4-BE49-F238E27FC236}">
-                <a16:creationId xmlns:a16="http://schemas.microsoft.com/office/drawing/2014/main" id="{98FF19C0-A503-4AC8-97A6-7DB7EA2E07BA}"/>
+                <a16:creationId xmlns:a16="http://schemas.microsoft.com/office/drawing/2014/main" id="{8F24D563-2FA6-4055-95AA-94BD01ED6D79}"/>
               </a:ext>
             </a:extLst>
           </p:cNvPr>
@@ -2872,7 +2872,7 @@
           <p:cNvPr id="11" name="state-detail-2">
             <a:extLst xmlns:a="http://schemas.openxmlformats.org/drawingml/2006/main">
               <a:ext uri="{FF2B5EF4-FFF2-40B4-BE49-F238E27FC236}">
-                <a16:creationId xmlns:a16="http://schemas.microsoft.com/office/drawing/2014/main" id="{59DD1760-E734-48D9-8F0F-296DD57A1622}"/>
+                <a16:creationId xmlns:a16="http://schemas.microsoft.com/office/drawing/2014/main" id="{7AEB40EC-3DA0-4A0D-8C01-C384A1AC9956}"/>
               </a:ext>
             </a:extLst>
           </p:cNvPr>
@@ -2928,7 +2928,7 @@
           <p:cNvPr id="12" name="state-3">
             <a:extLst xmlns:a="http://schemas.openxmlformats.org/drawingml/2006/main">
               <a:ext uri="{FF2B5EF4-FFF2-40B4-BE49-F238E27FC236}">
-                <a16:creationId xmlns:a16="http://schemas.microsoft.com/office/drawing/2014/main" id="{C5A2AB33-B88D-454D-8A97-BAB9A38C088A}"/>
+                <a16:creationId xmlns:a16="http://schemas.microsoft.com/office/drawing/2014/main" id="{71E76F99-9DD9-4DED-8A6E-BFF2AC431D94}"/>
               </a:ext>
             </a:extLst>
           </p:cNvPr>
@@ -2963,7 +2963,7 @@
           <p:cNvPr id="13" name="state-label-3">
             <a:extLst xmlns:a="http://schemas.openxmlformats.org/drawingml/2006/main">
               <a:ext uri="{FF2B5EF4-FFF2-40B4-BE49-F238E27FC236}">
-                <a16:creationId xmlns:a16="http://schemas.microsoft.com/office/drawing/2014/main" id="{5C1FC302-C3CA-4F0F-9B1B-640BD6269E38}"/>
+                <a16:creationId xmlns:a16="http://schemas.microsoft.com/office/drawing/2014/main" id="{C69927BF-29FE-4BFB-A307-D50F58E7AEC8}"/>
               </a:ext>
             </a:extLst>
           </p:cNvPr>
@@ -3019,7 +3019,7 @@
           <p:cNvPr id="14" name="state-detail-3">
             <a:extLst xmlns:a="http://schemas.openxmlformats.org/drawingml/2006/main">
               <a:ext uri="{FF2B5EF4-FFF2-40B4-BE49-F238E27FC236}">
-                <a16:creationId xmlns:a16="http://schemas.microsoft.com/office/drawing/2014/main" id="{40941DC3-4513-4A4F-9AD4-99EDB444E86D}"/>
+                <a16:creationId xmlns:a16="http://schemas.microsoft.com/office/drawing/2014/main" id="{EC212F34-1579-49F5-9C60-4D38A2E0AD14}"/>
               </a:ext>
             </a:extLst>
           </p:cNvPr>
@@ -3073,7 +3073,7 @@
     </p:spTree>
     <p:extLst>
       <p:ext uri="{BB962C8B-B14F-4D97-AF65-F5344CB8AC3E}">
-        <p14:creationId xmlns:p14="http://schemas.microsoft.com/office/powerpoint/2010/main" val="1035959051"/>
+        <p14:creationId xmlns:p14="http://schemas.microsoft.com/office/powerpoint/2010/main" val="1569714647"/>
       </p:ext>
     </p:extLst>
   </p:cSld>
@@ -3104,7 +3104,7 @@
           <p:cNvPr id="11" name="title-4">
             <a:extLst xmlns:a="http://schemas.openxmlformats.org/drawingml/2006/main">
               <a:ext uri="{FF2B5EF4-FFF2-40B4-BE49-F238E27FC236}">
-                <a16:creationId xmlns:a16="http://schemas.microsoft.com/office/drawing/2014/main" id="{2F15FEEA-C6F5-424D-83D4-55BABD3675F2}"/>
+                <a16:creationId xmlns:a16="http://schemas.microsoft.com/office/drawing/2014/main" id="{364DDEE9-32AA-424D-8E5E-D1EDCA90C8FE}"/>
               </a:ext>
             </a:extLst>
           </p:cNvPr>
@@ -3160,7 +3160,7 @@
           <p:cNvPr id="2" name="page-4">
             <a:extLst xmlns:a="http://schemas.openxmlformats.org/drawingml/2006/main">
               <a:ext uri="{FF2B5EF4-FFF2-40B4-BE49-F238E27FC236}">
-                <a16:creationId xmlns:a16="http://schemas.microsoft.com/office/drawing/2014/main" id="{CB9751A4-DF02-4A22-8C21-23203702D9B1}"/>
+                <a16:creationId xmlns:a16="http://schemas.microsoft.com/office/drawing/2014/main" id="{0BA99E0B-A0F3-49AB-88F1-2426C3CE2102}"/>
               </a:ext>
             </a:extLst>
           </p:cNvPr>
@@ -3220,7 +3220,7 @@
           <p:nvPr/>
         </p:nvPicPr>
         <p:blipFill>
-          <a:blip xmlns:r="http://schemas.openxmlformats.org/officeDocument/2006/relationships" xmlns:a="http://schemas.openxmlformats.org/drawingml/2006/main" r:embed="Rec4814ea54df4c50"/>
+          <a:blip xmlns:r="http://schemas.openxmlformats.org/officeDocument/2006/relationships" xmlns:a="http://schemas.openxmlformats.org/drawingml/2006/main" r:embed="R7ba50e144fe844e4"/>
           <a:stretch xmlns:a="http://schemas.openxmlformats.org/drawingml/2006/main"/>
         </p:blipFill>
         <p:spPr>
@@ -3240,7 +3240,7 @@
           <p:cNvPr id="4" name="mobile-fact-1">
             <a:extLst xmlns:a="http://schemas.openxmlformats.org/drawingml/2006/main">
               <a:ext uri="{FF2B5EF4-FFF2-40B4-BE49-F238E27FC236}">
-                <a16:creationId xmlns:a16="http://schemas.microsoft.com/office/drawing/2014/main" id="{EA59F433-3E23-4CCB-8EA3-4463B2C16FDB}"/>
+                <a16:creationId xmlns:a16="http://schemas.microsoft.com/office/drawing/2014/main" id="{1ED04589-AECA-4ECD-B785-ABD2B20E5F99}"/>
               </a:ext>
             </a:extLst>
           </p:cNvPr>
@@ -3296,7 +3296,7 @@
           <p:cNvPr id="5" name="mobile-desc-1">
             <a:extLst xmlns:a="http://schemas.openxmlformats.org/drawingml/2006/main">
               <a:ext uri="{FF2B5EF4-FFF2-40B4-BE49-F238E27FC236}">
-                <a16:creationId xmlns:a16="http://schemas.microsoft.com/office/drawing/2014/main" id="{373D4433-A77F-4B84-93D9-1930DA384868}"/>
+                <a16:creationId xmlns:a16="http://schemas.microsoft.com/office/drawing/2014/main" id="{1D6DDF5C-E0C5-4B88-8A67-8695AE7EF33B}"/>
               </a:ext>
             </a:extLst>
           </p:cNvPr>
@@ -3352,7 +3352,7 @@
           <p:cNvPr id="6" name="mobile-fact-2">
             <a:extLst xmlns:a="http://schemas.openxmlformats.org/drawingml/2006/main">
               <a:ext uri="{FF2B5EF4-FFF2-40B4-BE49-F238E27FC236}">
-                <a16:creationId xmlns:a16="http://schemas.microsoft.com/office/drawing/2014/main" id="{58275460-FB05-411D-B02D-9252A4F1C701}"/>
+                <a16:creationId xmlns:a16="http://schemas.microsoft.com/office/drawing/2014/main" id="{B6748176-C57F-44B7-B51A-5DB5301CE2A8}"/>
               </a:ext>
             </a:extLst>
           </p:cNvPr>
@@ -3408,7 +3408,7 @@
           <p:cNvPr id="7" name="mobile-desc-2">
             <a:extLst xmlns:a="http://schemas.openxmlformats.org/drawingml/2006/main">
               <a:ext uri="{FF2B5EF4-FFF2-40B4-BE49-F238E27FC236}">
-                <a16:creationId xmlns:a16="http://schemas.microsoft.com/office/drawing/2014/main" id="{E260E1DC-E08D-4F90-A60C-BEC7B4AF8C10}"/>
+                <a16:creationId xmlns:a16="http://schemas.microsoft.com/office/drawing/2014/main" id="{1DCD3B08-338E-4060-B5E9-2367297C15B8}"/>
               </a:ext>
             </a:extLst>
           </p:cNvPr>
@@ -3464,7 +3464,7 @@
           <p:cNvPr id="8" name="mobile-fact-3">
             <a:extLst xmlns:a="http://schemas.openxmlformats.org/drawingml/2006/main">
               <a:ext uri="{FF2B5EF4-FFF2-40B4-BE49-F238E27FC236}">
-                <a16:creationId xmlns:a16="http://schemas.microsoft.com/office/drawing/2014/main" id="{6CE8AF66-EA2E-4CF9-8B9B-E76DF2DE0F9C}"/>
+                <a16:creationId xmlns:a16="http://schemas.microsoft.com/office/drawing/2014/main" id="{351D7747-9A75-4B88-A194-12002F37DBA7}"/>
               </a:ext>
             </a:extLst>
           </p:cNvPr>
@@ -3520,7 +3520,7 @@
           <p:cNvPr id="9" name="mobile-desc-3">
             <a:extLst xmlns:a="http://schemas.openxmlformats.org/drawingml/2006/main">
               <a:ext uri="{FF2B5EF4-FFF2-40B4-BE49-F238E27FC236}">
-                <a16:creationId xmlns:a16="http://schemas.microsoft.com/office/drawing/2014/main" id="{DAA544EE-D0D3-4995-8347-F2794F01EFC4}"/>
+                <a16:creationId xmlns:a16="http://schemas.microsoft.com/office/drawing/2014/main" id="{413C1D88-C228-4ABE-99E5-D6470B7D0CCB}"/>
               </a:ext>
             </a:extLst>
           </p:cNvPr>
@@ -3576,7 +3576,7 @@
           <p:cNvPr id="10" name="mobile-foot">
             <a:extLst xmlns:a="http://schemas.openxmlformats.org/drawingml/2006/main">
               <a:ext uri="{FF2B5EF4-FFF2-40B4-BE49-F238E27FC236}">
-                <a16:creationId xmlns:a16="http://schemas.microsoft.com/office/drawing/2014/main" id="{2AB98398-C233-4C7F-9E16-46DFCA172ED0}"/>
+                <a16:creationId xmlns:a16="http://schemas.microsoft.com/office/drawing/2014/main" id="{0A5760AE-27F5-499A-B46B-014DB29DBF4B}"/>
               </a:ext>
             </a:extLst>
           </p:cNvPr>
@@ -3630,7 +3630,7 @@
     </p:spTree>
     <p:extLst>
       <p:ext uri="{BB962C8B-B14F-4D97-AF65-F5344CB8AC3E}">
-        <p14:creationId xmlns:p14="http://schemas.microsoft.com/office/powerpoint/2010/main" val="127206879"/>
+        <p14:creationId xmlns:p14="http://schemas.microsoft.com/office/powerpoint/2010/main" val="2069577870"/>
       </p:ext>
     </p:extLst>
   </p:cSld>
@@ -3661,7 +3661,7 @@
           <p:cNvPr id="20" name="title-5">
             <a:extLst xmlns:a="http://schemas.openxmlformats.org/drawingml/2006/main">
               <a:ext uri="{FF2B5EF4-FFF2-40B4-BE49-F238E27FC236}">
-                <a16:creationId xmlns:a16="http://schemas.microsoft.com/office/drawing/2014/main" id="{6BB39D81-FAB5-40E3-8C37-5F642A85F56A}"/>
+                <a16:creationId xmlns:a16="http://schemas.microsoft.com/office/drawing/2014/main" id="{7C7115AC-2500-477F-A76B-032C779ED07C}"/>
               </a:ext>
             </a:extLst>
           </p:cNvPr>
@@ -3717,7 +3717,7 @@
           <p:cNvPr id="2" name="page-5">
             <a:extLst xmlns:a="http://schemas.openxmlformats.org/drawingml/2006/main">
               <a:ext uri="{FF2B5EF4-FFF2-40B4-BE49-F238E27FC236}">
-                <a16:creationId xmlns:a16="http://schemas.microsoft.com/office/drawing/2014/main" id="{62253063-E7AC-4BCF-BBC7-2D6E46369F82}"/>
+                <a16:creationId xmlns:a16="http://schemas.microsoft.com/office/drawing/2014/main" id="{867E932A-D99E-41C3-859A-F7D8243DF6C5}"/>
               </a:ext>
             </a:extLst>
           </p:cNvPr>
@@ -3773,7 +3773,7 @@
           <p:cNvPr id="3" name="arrow-0">
             <a:extLst xmlns:a="http://schemas.openxmlformats.org/drawingml/2006/main">
               <a:ext uri="{FF2B5EF4-FFF2-40B4-BE49-F238E27FC236}">
-                <a16:creationId xmlns:a16="http://schemas.microsoft.com/office/drawing/2014/main" id="{F83CE108-D5A7-406B-BB46-1891E63C64A7}"/>
+                <a16:creationId xmlns:a16="http://schemas.microsoft.com/office/drawing/2014/main" id="{02DA7620-22D1-468B-B978-439EECC6101A}"/>
               </a:ext>
             </a:extLst>
           </p:cNvPr>
@@ -3829,7 +3829,7 @@
           <p:cNvPr id="4" name="phase-0">
             <a:extLst xmlns:a="http://schemas.openxmlformats.org/drawingml/2006/main">
               <a:ext uri="{FF2B5EF4-FFF2-40B4-BE49-F238E27FC236}">
-                <a16:creationId xmlns:a16="http://schemas.microsoft.com/office/drawing/2014/main" id="{9D6CB411-3441-466D-907B-23D68BB900A1}"/>
+                <a16:creationId xmlns:a16="http://schemas.microsoft.com/office/drawing/2014/main" id="{65C31113-1990-4E1B-AFAC-6F4356129C6C}"/>
               </a:ext>
             </a:extLst>
           </p:cNvPr>
@@ -3864,7 +3864,7 @@
           <p:cNvPr id="5" name="phase-label-0">
             <a:extLst xmlns:a="http://schemas.openxmlformats.org/drawingml/2006/main">
               <a:ext uri="{FF2B5EF4-FFF2-40B4-BE49-F238E27FC236}">
-                <a16:creationId xmlns:a16="http://schemas.microsoft.com/office/drawing/2014/main" id="{B1D25370-BB38-40FF-9FE8-216457D5A331}"/>
+                <a16:creationId xmlns:a16="http://schemas.microsoft.com/office/drawing/2014/main" id="{6DED1DD9-7A5C-4E9F-A14C-5AD7AC93C183}"/>
               </a:ext>
             </a:extLst>
           </p:cNvPr>
@@ -3943,7 +3943,7 @@
           <p:cNvPr id="6" name="phase-http-0">
             <a:extLst xmlns:a="http://schemas.openxmlformats.org/drawingml/2006/main">
               <a:ext uri="{FF2B5EF4-FFF2-40B4-BE49-F238E27FC236}">
-                <a16:creationId xmlns:a16="http://schemas.microsoft.com/office/drawing/2014/main" id="{D034EF33-E754-4A5F-A744-690CD4E85173}"/>
+                <a16:creationId xmlns:a16="http://schemas.microsoft.com/office/drawing/2014/main" id="{FEF4294B-0EBC-4C49-897E-08644B1DBF2F}"/>
               </a:ext>
             </a:extLst>
           </p:cNvPr>
@@ -3999,7 +3999,7 @@
           <p:cNvPr id="7" name="arrow-1">
             <a:extLst xmlns:a="http://schemas.openxmlformats.org/drawingml/2006/main">
               <a:ext uri="{FF2B5EF4-FFF2-40B4-BE49-F238E27FC236}">
-                <a16:creationId xmlns:a16="http://schemas.microsoft.com/office/drawing/2014/main" id="{974A4E60-DA99-40EC-BDFA-F1F1DF2516E6}"/>
+                <a16:creationId xmlns:a16="http://schemas.microsoft.com/office/drawing/2014/main" id="{B3791DE9-44AD-4BA6-8BA0-ACFE8CED89C8}"/>
               </a:ext>
             </a:extLst>
           </p:cNvPr>
@@ -4055,7 +4055,7 @@
           <p:cNvPr id="8" name="phase-1">
             <a:extLst xmlns:a="http://schemas.openxmlformats.org/drawingml/2006/main">
               <a:ext uri="{FF2B5EF4-FFF2-40B4-BE49-F238E27FC236}">
-                <a16:creationId xmlns:a16="http://schemas.microsoft.com/office/drawing/2014/main" id="{4DA65038-233C-4076-8F19-0CD2BD7C89B3}"/>
+                <a16:creationId xmlns:a16="http://schemas.microsoft.com/office/drawing/2014/main" id="{0F9CF05A-D6DB-4883-9FB6-38C24BB3E76D}"/>
               </a:ext>
             </a:extLst>
           </p:cNvPr>
@@ -4090,7 +4090,7 @@
           <p:cNvPr id="9" name="phase-label-1">
             <a:extLst xmlns:a="http://schemas.openxmlformats.org/drawingml/2006/main">
               <a:ext uri="{FF2B5EF4-FFF2-40B4-BE49-F238E27FC236}">
-                <a16:creationId xmlns:a16="http://schemas.microsoft.com/office/drawing/2014/main" id="{2784A685-1C25-4739-9479-3630A580D77D}"/>
+                <a16:creationId xmlns:a16="http://schemas.microsoft.com/office/drawing/2014/main" id="{DE3571C8-CC88-42CE-B623-82880703F94C}"/>
               </a:ext>
             </a:extLst>
           </p:cNvPr>
@@ -4169,7 +4169,7 @@
           <p:cNvPr id="10" name="phase-http-1">
             <a:extLst xmlns:a="http://schemas.openxmlformats.org/drawingml/2006/main">
               <a:ext uri="{FF2B5EF4-FFF2-40B4-BE49-F238E27FC236}">
-                <a16:creationId xmlns:a16="http://schemas.microsoft.com/office/drawing/2014/main" id="{06580123-C9A3-4E80-831B-6C708F462C6A}"/>
+                <a16:creationId xmlns:a16="http://schemas.microsoft.com/office/drawing/2014/main" id="{6AE13730-A351-4D2C-A953-A1AD3C873D59}"/>
               </a:ext>
             </a:extLst>
           </p:cNvPr>
@@ -4225,7 +4225,7 @@
           <p:cNvPr id="11" name="arrow-2">
             <a:extLst xmlns:a="http://schemas.openxmlformats.org/drawingml/2006/main">
               <a:ext uri="{FF2B5EF4-FFF2-40B4-BE49-F238E27FC236}">
-                <a16:creationId xmlns:a16="http://schemas.microsoft.com/office/drawing/2014/main" id="{20923B26-3CA5-42C5-BEBC-3402BAB77E6B}"/>
+                <a16:creationId xmlns:a16="http://schemas.microsoft.com/office/drawing/2014/main" id="{A942B671-4EFD-40FC-8628-3D18C3E7FFA3}"/>
               </a:ext>
             </a:extLst>
           </p:cNvPr>
@@ -4281,7 +4281,7 @@
           <p:cNvPr id="12" name="phase-2">
             <a:extLst xmlns:a="http://schemas.openxmlformats.org/drawingml/2006/main">
               <a:ext uri="{FF2B5EF4-FFF2-40B4-BE49-F238E27FC236}">
-                <a16:creationId xmlns:a16="http://schemas.microsoft.com/office/drawing/2014/main" id="{432A0B7B-2753-4E49-9623-6095659F599D}"/>
+                <a16:creationId xmlns:a16="http://schemas.microsoft.com/office/drawing/2014/main" id="{2C5380C8-08C7-4A62-81E9-10DAAEC9D1A0}"/>
               </a:ext>
             </a:extLst>
           </p:cNvPr>
@@ -4316,7 +4316,7 @@
           <p:cNvPr id="13" name="phase-label-2">
             <a:extLst xmlns:a="http://schemas.openxmlformats.org/drawingml/2006/main">
               <a:ext uri="{FF2B5EF4-FFF2-40B4-BE49-F238E27FC236}">
-                <a16:creationId xmlns:a16="http://schemas.microsoft.com/office/drawing/2014/main" id="{C497E9CF-5413-4558-9FDD-684AB1366DB9}"/>
+                <a16:creationId xmlns:a16="http://schemas.microsoft.com/office/drawing/2014/main" id="{44F93C3B-1630-48A0-87A0-E34BF208906C}"/>
               </a:ext>
             </a:extLst>
           </p:cNvPr>
@@ -4395,7 +4395,7 @@
           <p:cNvPr id="14" name="phase-http-2">
             <a:extLst xmlns:a="http://schemas.openxmlformats.org/drawingml/2006/main">
               <a:ext uri="{FF2B5EF4-FFF2-40B4-BE49-F238E27FC236}">
-                <a16:creationId xmlns:a16="http://schemas.microsoft.com/office/drawing/2014/main" id="{767860F9-3517-46FB-8DB2-2D26EC68B91C}"/>
+                <a16:creationId xmlns:a16="http://schemas.microsoft.com/office/drawing/2014/main" id="{1EABD644-F355-4E63-A3C0-4C40E9EE57F7}"/>
               </a:ext>
             </a:extLst>
           </p:cNvPr>
@@ -4451,7 +4451,7 @@
           <p:cNvPr id="15" name="phase-3">
             <a:extLst xmlns:a="http://schemas.openxmlformats.org/drawingml/2006/main">
               <a:ext uri="{FF2B5EF4-FFF2-40B4-BE49-F238E27FC236}">
-                <a16:creationId xmlns:a16="http://schemas.microsoft.com/office/drawing/2014/main" id="{E64AA44B-4729-4FB0-AA17-CBFF4655D37B}"/>
+                <a16:creationId xmlns:a16="http://schemas.microsoft.com/office/drawing/2014/main" id="{88C13E14-ECA3-4A8D-AEB1-12A8A2B951E7}"/>
               </a:ext>
             </a:extLst>
           </p:cNvPr>
@@ -4486,7 +4486,7 @@
           <p:cNvPr id="16" name="phase-label-3">
             <a:extLst xmlns:a="http://schemas.openxmlformats.org/drawingml/2006/main">
               <a:ext uri="{FF2B5EF4-FFF2-40B4-BE49-F238E27FC236}">
-                <a16:creationId xmlns:a16="http://schemas.microsoft.com/office/drawing/2014/main" id="{7E4B26EC-BEB1-4C3D-8081-29603864DC22}"/>
+                <a16:creationId xmlns:a16="http://schemas.microsoft.com/office/drawing/2014/main" id="{C2394D85-BDC6-4D3E-9F38-5E0B65E18272}"/>
               </a:ext>
             </a:extLst>
           </p:cNvPr>
@@ -4565,7 +4565,7 @@
           <p:cNvPr id="17" name="phase-http-3">
             <a:extLst xmlns:a="http://schemas.openxmlformats.org/drawingml/2006/main">
               <a:ext uri="{FF2B5EF4-FFF2-40B4-BE49-F238E27FC236}">
-                <a16:creationId xmlns:a16="http://schemas.microsoft.com/office/drawing/2014/main" id="{6A6C3AF3-3A7C-43F3-B1E8-89834F493AF0}"/>
+                <a16:creationId xmlns:a16="http://schemas.microsoft.com/office/drawing/2014/main" id="{884B2FE5-FB57-4421-9A7A-E476FC168D13}"/>
               </a:ext>
             </a:extLst>
           </p:cNvPr>
@@ -4621,7 +4621,7 @@
           <p:cNvPr id="18" name="integrity-count">
             <a:extLst xmlns:a="http://schemas.openxmlformats.org/drawingml/2006/main">
               <a:ext uri="{FF2B5EF4-FFF2-40B4-BE49-F238E27FC236}">
-                <a16:creationId xmlns:a16="http://schemas.microsoft.com/office/drawing/2014/main" id="{8B9C66D0-8E04-484D-8C02-BEB87EF6C966}"/>
+                <a16:creationId xmlns:a16="http://schemas.microsoft.com/office/drawing/2014/main" id="{E32C6351-882A-4A72-9227-5974C7984657}"/>
               </a:ext>
             </a:extLst>
           </p:cNvPr>
@@ -4677,7 +4677,7 @@
           <p:cNvPr id="19" name="integrity-hash">
             <a:extLst xmlns:a="http://schemas.openxmlformats.org/drawingml/2006/main">
               <a:ext uri="{FF2B5EF4-FFF2-40B4-BE49-F238E27FC236}">
-                <a16:creationId xmlns:a16="http://schemas.microsoft.com/office/drawing/2014/main" id="{30945544-F938-4AE9-9341-2AB12566F1D8}"/>
+                <a16:creationId xmlns:a16="http://schemas.microsoft.com/office/drawing/2014/main" id="{4A91C376-C0C0-4F29-A738-E48467983F9B}"/>
               </a:ext>
             </a:extLst>
           </p:cNvPr>
@@ -4723,7 +4723,7 @@
                 <a:ea typeface="Malgun Gothic"/>
                 <a:cs typeface="Malgun Gothic"/>
               </a:rPr>
-              <a:t>콘텐츠 SHA-256 동일 · 첨부 SHA-256 동일 · 정적 계약 7/7</a:t>
+              <a:t>콘텐츠 SHA-256 동일 · 첨부 SHA-256 동일 · 정적 계약 8/8</a:t>
             </a:r>
           </a:p>
         </p:txBody>
@@ -4731,7 +4731,7 @@
     </p:spTree>
     <p:extLst>
       <p:ext uri="{BB962C8B-B14F-4D97-AF65-F5344CB8AC3E}">
-        <p14:creationId xmlns:p14="http://schemas.microsoft.com/office/powerpoint/2010/main" val="28413815"/>
+        <p14:creationId xmlns:p14="http://schemas.microsoft.com/office/powerpoint/2010/main" val="1778098845"/>
       </p:ext>
     </p:extLst>
   </p:cSld>
@@ -4762,7 +4762,7 @@
           <p:cNvPr id="16" name="title-6">
             <a:extLst xmlns:a="http://schemas.openxmlformats.org/drawingml/2006/main">
               <a:ext uri="{FF2B5EF4-FFF2-40B4-BE49-F238E27FC236}">
-                <a16:creationId xmlns:a16="http://schemas.microsoft.com/office/drawing/2014/main" id="{C2C6F4D2-9EE2-4FDD-BC52-173AF175D052}"/>
+                <a16:creationId xmlns:a16="http://schemas.microsoft.com/office/drawing/2014/main" id="{936FB80E-5395-4A55-AD96-BEDB34A10EA4}"/>
               </a:ext>
             </a:extLst>
           </p:cNvPr>
@@ -4818,7 +4818,7 @@
           <p:cNvPr id="2" name="page-6">
             <a:extLst xmlns:a="http://schemas.openxmlformats.org/drawingml/2006/main">
               <a:ext uri="{FF2B5EF4-FFF2-40B4-BE49-F238E27FC236}">
-                <a16:creationId xmlns:a16="http://schemas.microsoft.com/office/drawing/2014/main" id="{13D7E22A-AE64-475F-9196-E0C1A7F83D18}"/>
+                <a16:creationId xmlns:a16="http://schemas.microsoft.com/office/drawing/2014/main" id="{3F45BDCE-34E9-4077-B6E9-8798632294DA}"/>
               </a:ext>
             </a:extLst>
           </p:cNvPr>
@@ -4874,7 +4874,7 @@
           <p:cNvPr id="3" name="flow-arrow-1">
             <a:extLst xmlns:a="http://schemas.openxmlformats.org/drawingml/2006/main">
               <a:ext uri="{FF2B5EF4-FFF2-40B4-BE49-F238E27FC236}">
-                <a16:creationId xmlns:a16="http://schemas.microsoft.com/office/drawing/2014/main" id="{97EC3B7F-386C-4786-97DF-F409D48780AD}"/>
+                <a16:creationId xmlns:a16="http://schemas.microsoft.com/office/drawing/2014/main" id="{EB86C32F-C4FD-45E8-9497-343C1812BBDB}"/>
               </a:ext>
             </a:extLst>
           </p:cNvPr>
@@ -4930,7 +4930,7 @@
           <p:cNvPr id="4" name="flow-arrow-2">
             <a:extLst xmlns:a="http://schemas.openxmlformats.org/drawingml/2006/main">
               <a:ext uri="{FF2B5EF4-FFF2-40B4-BE49-F238E27FC236}">
-                <a16:creationId xmlns:a16="http://schemas.microsoft.com/office/drawing/2014/main" id="{E66F4DD0-920C-4E1B-AED5-9C85E6D3DDF2}"/>
+                <a16:creationId xmlns:a16="http://schemas.microsoft.com/office/drawing/2014/main" id="{6F22E331-7339-4254-919A-CCAE04D6ECA4}"/>
               </a:ext>
             </a:extLst>
           </p:cNvPr>
@@ -4986,7 +4986,7 @@
           <p:cNvPr id="5" name="flarum-core">
             <a:extLst xmlns:a="http://schemas.openxmlformats.org/drawingml/2006/main">
               <a:ext uri="{FF2B5EF4-FFF2-40B4-BE49-F238E27FC236}">
-                <a16:creationId xmlns:a16="http://schemas.microsoft.com/office/drawing/2014/main" id="{9CA3784D-5454-448A-8F5F-9E7D825DD376}"/>
+                <a16:creationId xmlns:a16="http://schemas.microsoft.com/office/drawing/2014/main" id="{DA23153E-79AE-48B3-A25B-D56C8D304631}"/>
               </a:ext>
             </a:extLst>
           </p:cNvPr>
@@ -5021,7 +5021,7 @@
           <p:cNvPr id="6" name="theme-extension">
             <a:extLst xmlns:a="http://schemas.openxmlformats.org/drawingml/2006/main">
               <a:ext uri="{FF2B5EF4-FFF2-40B4-BE49-F238E27FC236}">
-                <a16:creationId xmlns:a16="http://schemas.microsoft.com/office/drawing/2014/main" id="{E4ED5645-5B51-41AF-A900-421E4F43D1BC}"/>
+                <a16:creationId xmlns:a16="http://schemas.microsoft.com/office/drawing/2014/main" id="{FDE91976-7457-4CFE-B630-516C6F2F8910}"/>
               </a:ext>
             </a:extLst>
           </p:cNvPr>
@@ -5056,7 +5056,7 @@
           <p:cNvPr id="7" name="community-ui">
             <a:extLst xmlns:a="http://schemas.openxmlformats.org/drawingml/2006/main">
               <a:ext uri="{FF2B5EF4-FFF2-40B4-BE49-F238E27FC236}">
-                <a16:creationId xmlns:a16="http://schemas.microsoft.com/office/drawing/2014/main" id="{F39AAF2B-FB0D-44C8-B00D-5CF5CF3D9003}"/>
+                <a16:creationId xmlns:a16="http://schemas.microsoft.com/office/drawing/2014/main" id="{99C8A671-21F5-4CCE-984F-FFDA4482C553}"/>
               </a:ext>
             </a:extLst>
           </p:cNvPr>
@@ -5091,7 +5091,7 @@
           <p:cNvPr id="8" name="flarum-core-title">
             <a:extLst xmlns:a="http://schemas.openxmlformats.org/drawingml/2006/main">
               <a:ext uri="{FF2B5EF4-FFF2-40B4-BE49-F238E27FC236}">
-                <a16:creationId xmlns:a16="http://schemas.microsoft.com/office/drawing/2014/main" id="{25F1602E-147F-40D5-BB7F-7A4652B7C106}"/>
+                <a16:creationId xmlns:a16="http://schemas.microsoft.com/office/drawing/2014/main" id="{AEFC3C39-A8D6-49E8-A2CD-DCB6196FF1C3}"/>
               </a:ext>
             </a:extLst>
           </p:cNvPr>
@@ -5147,7 +5147,7 @@
           <p:cNvPr id="9" name="flarum-core-copy">
             <a:extLst xmlns:a="http://schemas.openxmlformats.org/drawingml/2006/main">
               <a:ext uri="{FF2B5EF4-FFF2-40B4-BE49-F238E27FC236}">
-                <a16:creationId xmlns:a16="http://schemas.microsoft.com/office/drawing/2014/main" id="{AA7CDD2A-CDBC-4BB6-8BF7-4C81D4D8C759}"/>
+                <a16:creationId xmlns:a16="http://schemas.microsoft.com/office/drawing/2014/main" id="{921626C5-662F-4967-BEC0-07F29A8DCED0}"/>
               </a:ext>
             </a:extLst>
           </p:cNvPr>
@@ -5203,7 +5203,7 @@
           <p:cNvPr id="10" name="theme-title">
             <a:extLst xmlns:a="http://schemas.openxmlformats.org/drawingml/2006/main">
               <a:ext uri="{FF2B5EF4-FFF2-40B4-BE49-F238E27FC236}">
-                <a16:creationId xmlns:a16="http://schemas.microsoft.com/office/drawing/2014/main" id="{C069B4FC-9974-45E8-8B0C-E5825BCF430B}"/>
+                <a16:creationId xmlns:a16="http://schemas.microsoft.com/office/drawing/2014/main" id="{C39A71F0-144B-4F5B-90E3-26EF4A4CB9EC}"/>
               </a:ext>
             </a:extLst>
           </p:cNvPr>
@@ -5282,7 +5282,7 @@
           <p:cNvPr id="11" name="theme-copy">
             <a:extLst xmlns:a="http://schemas.openxmlformats.org/drawingml/2006/main">
               <a:ext uri="{FF2B5EF4-FFF2-40B4-BE49-F238E27FC236}">
-                <a16:creationId xmlns:a16="http://schemas.microsoft.com/office/drawing/2014/main" id="{16017296-655A-4257-BDBA-713B8D5FD465}"/>
+                <a16:creationId xmlns:a16="http://schemas.microsoft.com/office/drawing/2014/main" id="{50BC9FF5-CF2D-4B73-8AF0-12FC42B1BD19}"/>
               </a:ext>
             </a:extLst>
           </p:cNvPr>
@@ -5338,7 +5338,7 @@
           <p:cNvPr id="12" name="ui-title">
             <a:extLst xmlns:a="http://schemas.openxmlformats.org/drawingml/2006/main">
               <a:ext uri="{FF2B5EF4-FFF2-40B4-BE49-F238E27FC236}">
-                <a16:creationId xmlns:a16="http://schemas.microsoft.com/office/drawing/2014/main" id="{8AA4CAC8-BB88-429F-A32A-BC5EF660BD9D}"/>
+                <a16:creationId xmlns:a16="http://schemas.microsoft.com/office/drawing/2014/main" id="{283B322A-01FC-48D8-8FCE-05C601059157}"/>
               </a:ext>
             </a:extLst>
           </p:cNvPr>
@@ -5394,7 +5394,7 @@
           <p:cNvPr id="13" name="ui-copy">
             <a:extLst xmlns:a="http://schemas.openxmlformats.org/drawingml/2006/main">
               <a:ext uri="{FF2B5EF4-FFF2-40B4-BE49-F238E27FC236}">
-                <a16:creationId xmlns:a16="http://schemas.microsoft.com/office/drawing/2014/main" id="{B78B82E9-1C01-471A-8A5A-094B891E2A0B}"/>
+                <a16:creationId xmlns:a16="http://schemas.microsoft.com/office/drawing/2014/main" id="{739BED58-F52D-47EA-90CA-37B122117631}"/>
               </a:ext>
             </a:extLst>
           </p:cNvPr>
@@ -5450,7 +5450,7 @@
           <p:cNvPr id="14" name="rollback-strip">
             <a:extLst xmlns:a="http://schemas.openxmlformats.org/drawingml/2006/main">
               <a:ext uri="{FF2B5EF4-FFF2-40B4-BE49-F238E27FC236}">
-                <a16:creationId xmlns:a16="http://schemas.microsoft.com/office/drawing/2014/main" id="{F1678DA7-86C2-45D4-B880-46856B6D82EB}"/>
+                <a16:creationId xmlns:a16="http://schemas.microsoft.com/office/drawing/2014/main" id="{62AD6541-9226-48D0-9347-826D4FFF9A1A}"/>
               </a:ext>
             </a:extLst>
           </p:cNvPr>
@@ -5485,7 +5485,7 @@
           <p:cNvPr id="15" name="rollback-copy">
             <a:extLst xmlns:a="http://schemas.openxmlformats.org/drawingml/2006/main">
               <a:ext uri="{FF2B5EF4-FFF2-40B4-BE49-F238E27FC236}">
-                <a16:creationId xmlns:a16="http://schemas.microsoft.com/office/drawing/2014/main" id="{5F1F7096-604A-46C3-937C-B66DBCC66B20}"/>
+                <a16:creationId xmlns:a16="http://schemas.microsoft.com/office/drawing/2014/main" id="{46F68522-A016-4317-82DD-1A7C7A60632F}"/>
               </a:ext>
             </a:extLst>
           </p:cNvPr>
@@ -5539,7 +5539,7 @@
     </p:spTree>
     <p:extLst>
       <p:ext uri="{BB962C8B-B14F-4D97-AF65-F5344CB8AC3E}">
-        <p14:creationId xmlns:p14="http://schemas.microsoft.com/office/powerpoint/2010/main" val="1822389716"/>
+        <p14:creationId xmlns:p14="http://schemas.microsoft.com/office/powerpoint/2010/main" val="492373279"/>
       </p:ext>
     </p:extLst>
   </p:cSld>
@@ -5570,7 +5570,7 @@
           <p:cNvPr id="8" name="close-kicker">
             <a:extLst xmlns:a="http://schemas.openxmlformats.org/drawingml/2006/main">
               <a:ext uri="{FF2B5EF4-FFF2-40B4-BE49-F238E27FC236}">
-                <a16:creationId xmlns:a16="http://schemas.microsoft.com/office/drawing/2014/main" id="{8845B3F0-8CA6-49C8-BD93-DDD1F8F83681}"/>
+                <a16:creationId xmlns:a16="http://schemas.microsoft.com/office/drawing/2014/main" id="{D1BDAAFA-749F-4F68-B0B3-D02CB6F0DE94}"/>
               </a:ext>
             </a:extLst>
           </p:cNvPr>
@@ -5626,7 +5626,7 @@
           <p:cNvPr id="2" name="close-title">
             <a:extLst xmlns:a="http://schemas.openxmlformats.org/drawingml/2006/main">
               <a:ext uri="{FF2B5EF4-FFF2-40B4-BE49-F238E27FC236}">
-                <a16:creationId xmlns:a16="http://schemas.microsoft.com/office/drawing/2014/main" id="{B90482D9-E49D-4A75-A7DD-D20A8403701F}"/>
+                <a16:creationId xmlns:a16="http://schemas.microsoft.com/office/drawing/2014/main" id="{79087787-4218-4B4D-9D5E-876C14FB2008}"/>
               </a:ext>
             </a:extLst>
           </p:cNvPr>
@@ -5705,7 +5705,7 @@
           <p:cNvPr id="3" name="close-detail">
             <a:extLst xmlns:a="http://schemas.openxmlformats.org/drawingml/2006/main">
               <a:ext uri="{FF2B5EF4-FFF2-40B4-BE49-F238E27FC236}">
-                <a16:creationId xmlns:a16="http://schemas.microsoft.com/office/drawing/2014/main" id="{07786C93-BD25-40E4-9FD9-D2A9C6876874}"/>
+                <a16:creationId xmlns:a16="http://schemas.microsoft.com/office/drawing/2014/main" id="{E2399564-ACA1-440B-8B67-6DA3C26096E3}"/>
               </a:ext>
             </a:extLst>
           </p:cNvPr>
@@ -5784,7 +5784,7 @@
           <p:cNvPr id="4" name="close-status">
             <a:extLst xmlns:a="http://schemas.openxmlformats.org/drawingml/2006/main">
               <a:ext uri="{FF2B5EF4-FFF2-40B4-BE49-F238E27FC236}">
-                <a16:creationId xmlns:a16="http://schemas.microsoft.com/office/drawing/2014/main" id="{4A99C6E8-A50F-478C-ABEC-15A175845BC5}"/>
+                <a16:creationId xmlns:a16="http://schemas.microsoft.com/office/drawing/2014/main" id="{B0D82F77-79CC-42A8-B90C-B3D5283F24E3}"/>
               </a:ext>
             </a:extLst>
           </p:cNvPr>
@@ -5819,7 +5819,7 @@
           <p:cNvPr id="5" name="close-go">
             <a:extLst xmlns:a="http://schemas.openxmlformats.org/drawingml/2006/main">
               <a:ext uri="{FF2B5EF4-FFF2-40B4-BE49-F238E27FC236}">
-                <a16:creationId xmlns:a16="http://schemas.microsoft.com/office/drawing/2014/main" id="{7216BC89-86DB-4940-84C2-0E9AD119D7E1}"/>
+                <a16:creationId xmlns:a16="http://schemas.microsoft.com/office/drawing/2014/main" id="{4C24718F-5617-4A4E-A7C3-4A6724066465}"/>
               </a:ext>
             </a:extLst>
           </p:cNvPr>
@@ -5875,7 +5875,7 @@
           <p:cNvPr id="6" name="close-condition">
             <a:extLst xmlns:a="http://schemas.openxmlformats.org/drawingml/2006/main">
               <a:ext uri="{FF2B5EF4-FFF2-40B4-BE49-F238E27FC236}">
-                <a16:creationId xmlns:a16="http://schemas.microsoft.com/office/drawing/2014/main" id="{A737D8EF-3E59-4E0F-B875-8CE04D6F1CD6}"/>
+                <a16:creationId xmlns:a16="http://schemas.microsoft.com/office/drawing/2014/main" id="{E0ED3DBD-A662-414D-BC4C-72CD92E82052}"/>
               </a:ext>
             </a:extLst>
           </p:cNvPr>
@@ -5931,7 +5931,7 @@
           <p:cNvPr id="7" name="close-next">
             <a:extLst xmlns:a="http://schemas.openxmlformats.org/drawingml/2006/main">
               <a:ext uri="{FF2B5EF4-FFF2-40B4-BE49-F238E27FC236}">
-                <a16:creationId xmlns:a16="http://schemas.microsoft.com/office/drawing/2014/main" id="{75AB3431-1F98-4F70-9CF4-B76ADFF23BE4}"/>
+                <a16:creationId xmlns:a16="http://schemas.microsoft.com/office/drawing/2014/main" id="{260A11F1-9615-4262-91E0-CDC2F64E7EC4}"/>
               </a:ext>
             </a:extLst>
           </p:cNvPr>
@@ -5985,7 +5985,7 @@
     </p:spTree>
     <p:extLst>
       <p:ext uri="{BB962C8B-B14F-4D97-AF65-F5344CB8AC3E}">
-        <p14:creationId xmlns:p14="http://schemas.microsoft.com/office/powerpoint/2010/main" val="145209803"/>
+        <p14:creationId xmlns:p14="http://schemas.microsoft.com/office/powerpoint/2010/main" val="1153721952"/>
       </p:ext>
     </p:extLst>
   </p:cSld>

--- a/output/presentation/techflow-community-ui-modernization.pptx
+++ b/output/presentation/techflow-community-ui-modernization.pptx
@@ -2,19 +2,19 @@
 <file path=ppt/presentation.xml><?xml version="1.0" encoding="utf-8"?>
 <p:presentation xmlns:p="http://schemas.openxmlformats.org/presentationml/2006/main">
   <p:sldMasterIdLst>
-    <p:sldMasterId xmlns:r="http://schemas.openxmlformats.org/officeDocument/2006/relationships" id="2147483648" r:id="R83284510fb2c4e6a"/>
+    <p:sldMasterId xmlns:r="http://schemas.openxmlformats.org/officeDocument/2006/relationships" id="2147483648" r:id="Rb78e8af48d82496e"/>
   </p:sldMasterIdLst>
   <p:notesMasterIdLst>
-    <p:notesMasterId xmlns:r="http://schemas.openxmlformats.org/officeDocument/2006/relationships" r:id="Rb97b412fbf5d49f6"/>
+    <p:notesMasterId xmlns:r="http://schemas.openxmlformats.org/officeDocument/2006/relationships" r:id="R2e4d0efb0f124e19"/>
   </p:notesMasterIdLst>
   <p:sldIdLst>
-    <p:sldId xmlns:r="http://schemas.openxmlformats.org/officeDocument/2006/relationships" id="256" r:id="R1a967ddc46a14adc"/>
-    <p:sldId xmlns:r="http://schemas.openxmlformats.org/officeDocument/2006/relationships" id="257" r:id="R5f15f6ccac1345ea"/>
-    <p:sldId xmlns:r="http://schemas.openxmlformats.org/officeDocument/2006/relationships" id="258" r:id="R1fea2b4f0b2443e7"/>
-    <p:sldId xmlns:r="http://schemas.openxmlformats.org/officeDocument/2006/relationships" id="259" r:id="Rf92d09e73e1e4986"/>
-    <p:sldId xmlns:r="http://schemas.openxmlformats.org/officeDocument/2006/relationships" id="260" r:id="R5ea16cb5e6c24b3f"/>
-    <p:sldId xmlns:r="http://schemas.openxmlformats.org/officeDocument/2006/relationships" id="261" r:id="R4208fce0a3b949c2"/>
-    <p:sldId xmlns:r="http://schemas.openxmlformats.org/officeDocument/2006/relationships" id="262" r:id="R098e1a5ba4474b2a"/>
+    <p:sldId xmlns:r="http://schemas.openxmlformats.org/officeDocument/2006/relationships" id="256" r:id="R586d8f44807b4cd6"/>
+    <p:sldId xmlns:r="http://schemas.openxmlformats.org/officeDocument/2006/relationships" id="257" r:id="Re6143a2aec974c4e"/>
+    <p:sldId xmlns:r="http://schemas.openxmlformats.org/officeDocument/2006/relationships" id="258" r:id="Rfb435698e4554495"/>
+    <p:sldId xmlns:r="http://schemas.openxmlformats.org/officeDocument/2006/relationships" id="259" r:id="R6c6030d32ddd425b"/>
+    <p:sldId xmlns:r="http://schemas.openxmlformats.org/officeDocument/2006/relationships" id="260" r:id="R9171fab713664173"/>
+    <p:sldId xmlns:r="http://schemas.openxmlformats.org/officeDocument/2006/relationships" id="261" r:id="Rd66f3738420a4757"/>
+    <p:sldId xmlns:r="http://schemas.openxmlformats.org/officeDocument/2006/relationships" id="262" r:id="R66728f70f92e4210"/>
   </p:sldIdLst>
   <p:sldSz cx="12192000" cy="6858000"/>
   <p:notesSz cx="6858000" cy="9144000"/>
@@ -1076,7 +1076,7 @@
   </p:cSld>
   <p:clrMap bg1="lt1" tx1="dk1" bg2="lt2" tx2="dk2" accent1="accent1" accent2="accent2" accent3="accent3" accent4="accent4" accent5="accent5" accent6="accent6" hlink="hlink" folHlink="folHlink"/>
   <p:sldLayoutIdLst>
-    <p:sldLayoutId xmlns:r="http://schemas.openxmlformats.org/officeDocument/2006/relationships" id="2147483649" r:id="R8345dfe464324a28"/>
+    <p:sldLayoutId xmlns:r="http://schemas.openxmlformats.org/officeDocument/2006/relationships" id="2147483649" r:id="R8b30979858c54e14"/>
   </p:sldLayoutIdLst>
   <p:txStyles>
     <p:titleStyle>
@@ -1627,7 +1627,7 @@
           <p:cNvPr id="7" name="cover-kicker">
             <a:extLst xmlns:a="http://schemas.openxmlformats.org/drawingml/2006/main">
               <a:ext uri="{FF2B5EF4-FFF2-40B4-BE49-F238E27FC236}">
-                <a16:creationId xmlns:a16="http://schemas.microsoft.com/office/drawing/2014/main" id="{B30C517E-02CD-47F7-B7FB-6A4A9F2C0223}"/>
+                <a16:creationId xmlns:a16="http://schemas.microsoft.com/office/drawing/2014/main" id="{64A8B3D6-56A8-4B21-BB86-E37AAA284D2C}"/>
               </a:ext>
             </a:extLst>
           </p:cNvPr>
@@ -1683,7 +1683,7 @@
           <p:cNvPr id="2" name="cover-title">
             <a:extLst xmlns:a="http://schemas.openxmlformats.org/drawingml/2006/main">
               <a:ext uri="{FF2B5EF4-FFF2-40B4-BE49-F238E27FC236}">
-                <a16:creationId xmlns:a16="http://schemas.microsoft.com/office/drawing/2014/main" id="{AB7F3300-C30F-436E-B722-FD76091A9096}"/>
+                <a16:creationId xmlns:a16="http://schemas.microsoft.com/office/drawing/2014/main" id="{ED45A480-310E-4EC2-86CA-4D1D3E155AFD}"/>
               </a:ext>
             </a:extLst>
           </p:cNvPr>
@@ -1762,7 +1762,7 @@
           <p:cNvPr id="3" name="cover-subtitle">
             <a:extLst xmlns:a="http://schemas.openxmlformats.org/drawingml/2006/main">
               <a:ext uri="{FF2B5EF4-FFF2-40B4-BE49-F238E27FC236}">
-                <a16:creationId xmlns:a16="http://schemas.microsoft.com/office/drawing/2014/main" id="{776B1FC0-5714-41D6-A0C6-4DD00F3AD449}"/>
+                <a16:creationId xmlns:a16="http://schemas.microsoft.com/office/drawing/2014/main" id="{903A914A-4ED6-4771-9CED-00ADB0697A37}"/>
               </a:ext>
             </a:extLst>
           </p:cNvPr>
@@ -1818,7 +1818,7 @@
           <p:cNvPr id="4" name="cover-image-frame">
             <a:extLst xmlns:a="http://schemas.openxmlformats.org/drawingml/2006/main">
               <a:ext uri="{FF2B5EF4-FFF2-40B4-BE49-F238E27FC236}">
-                <a16:creationId xmlns:a16="http://schemas.microsoft.com/office/drawing/2014/main" id="{3E47E418-CE4E-41DB-9ECD-70662FC6B20F}"/>
+                <a16:creationId xmlns:a16="http://schemas.microsoft.com/office/drawing/2014/main" id="{3B0254DF-3B69-468E-9FD4-62C6A66D065D}"/>
               </a:ext>
             </a:extLst>
           </p:cNvPr>
@@ -1857,7 +1857,7 @@
           <p:nvPr/>
         </p:nvPicPr>
         <p:blipFill>
-          <a:blip xmlns:r="http://schemas.openxmlformats.org/officeDocument/2006/relationships" xmlns:a="http://schemas.openxmlformats.org/drawingml/2006/main" r:embed="R351cc1dffecc43f0"/>
+          <a:blip xmlns:r="http://schemas.openxmlformats.org/officeDocument/2006/relationships" xmlns:a="http://schemas.openxmlformats.org/drawingml/2006/main" r:embed="Rded17299b08d48e8"/>
           <a:stretch xmlns:a="http://schemas.openxmlformats.org/drawingml/2006/main"/>
         </p:blipFill>
         <p:spPr>
@@ -1877,7 +1877,7 @@
           <p:cNvPr id="6" name="cover-status">
             <a:extLst xmlns:a="http://schemas.openxmlformats.org/drawingml/2006/main">
               <a:ext uri="{FF2B5EF4-FFF2-40B4-BE49-F238E27FC236}">
-                <a16:creationId xmlns:a16="http://schemas.microsoft.com/office/drawing/2014/main" id="{F3ABF863-A594-457D-BC55-BDC23A83DDC1}"/>
+                <a16:creationId xmlns:a16="http://schemas.microsoft.com/office/drawing/2014/main" id="{26357597-2A02-4C01-A36D-33AFC97A83EF}"/>
               </a:ext>
             </a:extLst>
           </p:cNvPr>
@@ -1931,7 +1931,7 @@
     </p:spTree>
     <p:extLst>
       <p:ext uri="{BB962C8B-B14F-4D97-AF65-F5344CB8AC3E}">
-        <p14:creationId xmlns:p14="http://schemas.microsoft.com/office/powerpoint/2010/main" val="1356351078"/>
+        <p14:creationId xmlns:p14="http://schemas.microsoft.com/office/powerpoint/2010/main" val="1780637165"/>
       </p:ext>
     </p:extLst>
   </p:cSld>
@@ -1962,7 +1962,7 @@
           <p:cNvPr id="9" name="title-2">
             <a:extLst xmlns:a="http://schemas.openxmlformats.org/drawingml/2006/main">
               <a:ext uri="{FF2B5EF4-FFF2-40B4-BE49-F238E27FC236}">
-                <a16:creationId xmlns:a16="http://schemas.microsoft.com/office/drawing/2014/main" id="{8F834E69-3D26-4FA4-8F92-4AB62DE0A133}"/>
+                <a16:creationId xmlns:a16="http://schemas.microsoft.com/office/drawing/2014/main" id="{2ED890D1-9E91-4F2D-836A-B448CCE899DE}"/>
               </a:ext>
             </a:extLst>
           </p:cNvPr>
@@ -2018,7 +2018,7 @@
           <p:cNvPr id="2" name="page-2">
             <a:extLst xmlns:a="http://schemas.openxmlformats.org/drawingml/2006/main">
               <a:ext uri="{FF2B5EF4-FFF2-40B4-BE49-F238E27FC236}">
-                <a16:creationId xmlns:a16="http://schemas.microsoft.com/office/drawing/2014/main" id="{90A132A9-F840-4709-BDCF-9ECF3DC2C25E}"/>
+                <a16:creationId xmlns:a16="http://schemas.microsoft.com/office/drawing/2014/main" id="{FADC1203-3BA2-4020-95D4-BD268B7D38EF}"/>
               </a:ext>
             </a:extLst>
           </p:cNvPr>
@@ -2074,7 +2074,7 @@
           <p:cNvPr id="3" name="before-label">
             <a:extLst xmlns:a="http://schemas.openxmlformats.org/drawingml/2006/main">
               <a:ext uri="{FF2B5EF4-FFF2-40B4-BE49-F238E27FC236}">
-                <a16:creationId xmlns:a16="http://schemas.microsoft.com/office/drawing/2014/main" id="{2BCD3387-73D4-427D-840E-DF406D47C5BF}"/>
+                <a16:creationId xmlns:a16="http://schemas.microsoft.com/office/drawing/2014/main" id="{AABD7FF3-0411-49D0-B44B-62E24993EE04}"/>
               </a:ext>
             </a:extLst>
           </p:cNvPr>
@@ -2130,7 +2130,7 @@
           <p:cNvPr id="4" name="after-label">
             <a:extLst xmlns:a="http://schemas.openxmlformats.org/drawingml/2006/main">
               <a:ext uri="{FF2B5EF4-FFF2-40B4-BE49-F238E27FC236}">
-                <a16:creationId xmlns:a16="http://schemas.microsoft.com/office/drawing/2014/main" id="{3FF48F15-66D2-4E02-A402-EF3E08D98E40}"/>
+                <a16:creationId xmlns:a16="http://schemas.microsoft.com/office/drawing/2014/main" id="{1B8EA5CA-A506-4FAC-87C6-576712A27965}"/>
               </a:ext>
             </a:extLst>
           </p:cNvPr>
@@ -2190,7 +2190,7 @@
           <p:nvPr/>
         </p:nvPicPr>
         <p:blipFill>
-          <a:blip xmlns:r="http://schemas.openxmlformats.org/officeDocument/2006/relationships" xmlns:a="http://schemas.openxmlformats.org/drawingml/2006/main" r:embed="R4dd8a080a26a482b"/>
+          <a:blip xmlns:r="http://schemas.openxmlformats.org/officeDocument/2006/relationships" xmlns:a="http://schemas.openxmlformats.org/drawingml/2006/main" r:embed="R2c89418c9b4d401e"/>
           <a:stretch xmlns:a="http://schemas.openxmlformats.org/drawingml/2006/main"/>
         </p:blipFill>
         <p:spPr>
@@ -2214,7 +2214,7 @@
           <p:nvPr/>
         </p:nvPicPr>
         <p:blipFill>
-          <a:blip xmlns:r="http://schemas.openxmlformats.org/officeDocument/2006/relationships" xmlns:a="http://schemas.openxmlformats.org/drawingml/2006/main" r:embed="R527004dc2efe499a"/>
+          <a:blip xmlns:r="http://schemas.openxmlformats.org/officeDocument/2006/relationships" xmlns:a="http://schemas.openxmlformats.org/drawingml/2006/main" r:embed="R183eb4a8455540e0"/>
           <a:stretch xmlns:a="http://schemas.openxmlformats.org/drawingml/2006/main"/>
         </p:blipFill>
         <p:spPr>
@@ -2234,7 +2234,7 @@
           <p:cNvPr id="7" name="before-copy">
             <a:extLst xmlns:a="http://schemas.openxmlformats.org/drawingml/2006/main">
               <a:ext uri="{FF2B5EF4-FFF2-40B4-BE49-F238E27FC236}">
-                <a16:creationId xmlns:a16="http://schemas.microsoft.com/office/drawing/2014/main" id="{A7452FD0-121D-49B0-9629-0C16A27F8D17}"/>
+                <a16:creationId xmlns:a16="http://schemas.microsoft.com/office/drawing/2014/main" id="{6B82ABC1-E485-487E-A1A2-DA204ED337FA}"/>
               </a:ext>
             </a:extLst>
           </p:cNvPr>
@@ -2290,7 +2290,7 @@
           <p:cNvPr id="8" name="after-copy">
             <a:extLst xmlns:a="http://schemas.openxmlformats.org/drawingml/2006/main">
               <a:ext uri="{FF2B5EF4-FFF2-40B4-BE49-F238E27FC236}">
-                <a16:creationId xmlns:a16="http://schemas.microsoft.com/office/drawing/2014/main" id="{5043334E-AB41-4998-8A95-1D5917263A35}"/>
+                <a16:creationId xmlns:a16="http://schemas.microsoft.com/office/drawing/2014/main" id="{96ED2411-529F-4FD5-8EB8-9431CAEB402D}"/>
               </a:ext>
             </a:extLst>
           </p:cNvPr>
@@ -2336,7 +2336,7 @@
                 <a:ea typeface="Malgun Gothic"/>
                 <a:cs typeface="Malgun Gothic"/>
               </a:rPr>
-              <a:t>128px Hero · 28px 타이틀 · 240px 탐색 · 버튼 넘침 0px</a:t>
+              <a:t>62px 단일 행 · 제목·태그·댓글 수 한 줄 · 240px 탐색</a:t>
             </a:r>
           </a:p>
         </p:txBody>
@@ -2344,7 +2344,7 @@
     </p:spTree>
     <p:extLst>
       <p:ext uri="{BB962C8B-B14F-4D97-AF65-F5344CB8AC3E}">
-        <p14:creationId xmlns:p14="http://schemas.microsoft.com/office/powerpoint/2010/main" val="1627751249"/>
+        <p14:creationId xmlns:p14="http://schemas.microsoft.com/office/powerpoint/2010/main" val="1749192529"/>
       </p:ext>
     </p:extLst>
   </p:cSld>
@@ -2375,7 +2375,7 @@
           <p:cNvPr id="15" name="title-3">
             <a:extLst xmlns:a="http://schemas.openxmlformats.org/drawingml/2006/main">
               <a:ext uri="{FF2B5EF4-FFF2-40B4-BE49-F238E27FC236}">
-                <a16:creationId xmlns:a16="http://schemas.microsoft.com/office/drawing/2014/main" id="{E35B2A2A-517B-4272-898B-2A046A2DC360}"/>
+                <a16:creationId xmlns:a16="http://schemas.microsoft.com/office/drawing/2014/main" id="{D67AB2C1-0C42-48DD-B48C-05B537B5BA07}"/>
               </a:ext>
             </a:extLst>
           </p:cNvPr>
@@ -2421,7 +2421,7 @@
                 <a:ea typeface="Malgun Gothic"/>
                 <a:cs typeface="Malgun Gothic"/>
               </a:rPr>
-              <a:t>AI 진행 답변과 최종 해결 가이드를 한눈에 구분합니다</a:t>
+              <a:t>진행 답변과 선택된 해결 답변을 간결하게 구분합니다</a:t>
             </a:r>
           </a:p>
         </p:txBody>
@@ -2431,7 +2431,7 @@
           <p:cNvPr id="2" name="page-3">
             <a:extLst xmlns:a="http://schemas.openxmlformats.org/drawingml/2006/main">
               <a:ext uri="{FF2B5EF4-FFF2-40B4-BE49-F238E27FC236}">
-                <a16:creationId xmlns:a16="http://schemas.microsoft.com/office/drawing/2014/main" id="{9C0A3593-1AB6-4176-8118-FA382F61EB4D}"/>
+                <a16:creationId xmlns:a16="http://schemas.microsoft.com/office/drawing/2014/main" id="{13B6FE40-ADFE-48C6-8306-0B2C0FC66D3A}"/>
               </a:ext>
             </a:extLst>
           </p:cNvPr>
@@ -2487,7 +2487,7 @@
           <p:cNvPr id="3" name="state-0">
             <a:extLst xmlns:a="http://schemas.openxmlformats.org/drawingml/2006/main">
               <a:ext uri="{FF2B5EF4-FFF2-40B4-BE49-F238E27FC236}">
-                <a16:creationId xmlns:a16="http://schemas.microsoft.com/office/drawing/2014/main" id="{44EE3C0F-D19C-422D-986E-5E4D6B709BDE}"/>
+                <a16:creationId xmlns:a16="http://schemas.microsoft.com/office/drawing/2014/main" id="{43E71CFB-B1C0-41EA-A70B-458E65FA60A8}"/>
               </a:ext>
             </a:extLst>
           </p:cNvPr>
@@ -2522,7 +2522,7 @@
           <p:cNvPr id="4" name="state-label-0">
             <a:extLst xmlns:a="http://schemas.openxmlformats.org/drawingml/2006/main">
               <a:ext uri="{FF2B5EF4-FFF2-40B4-BE49-F238E27FC236}">
-                <a16:creationId xmlns:a16="http://schemas.microsoft.com/office/drawing/2014/main" id="{60A20C07-2808-4EEE-BF38-9A1A396EFCF6}"/>
+                <a16:creationId xmlns:a16="http://schemas.microsoft.com/office/drawing/2014/main" id="{D22F51B7-2440-4578-94B8-871C7294178A}"/>
               </a:ext>
             </a:extLst>
           </p:cNvPr>
@@ -2578,7 +2578,7 @@
           <p:cNvPr id="5" name="state-detail-0">
             <a:extLst xmlns:a="http://schemas.openxmlformats.org/drawingml/2006/main">
               <a:ext uri="{FF2B5EF4-FFF2-40B4-BE49-F238E27FC236}">
-                <a16:creationId xmlns:a16="http://schemas.microsoft.com/office/drawing/2014/main" id="{19DF42A7-5B22-4B82-8B34-F234AC855E22}"/>
+                <a16:creationId xmlns:a16="http://schemas.microsoft.com/office/drawing/2014/main" id="{7DD4558B-7FC7-4218-9893-F3240433F174}"/>
               </a:ext>
             </a:extLst>
           </p:cNvPr>
@@ -2634,7 +2634,7 @@
           <p:cNvPr id="6" name="state-1">
             <a:extLst xmlns:a="http://schemas.openxmlformats.org/drawingml/2006/main">
               <a:ext uri="{FF2B5EF4-FFF2-40B4-BE49-F238E27FC236}">
-                <a16:creationId xmlns:a16="http://schemas.microsoft.com/office/drawing/2014/main" id="{FF9B2690-7305-480C-B838-F4836305B8EB}"/>
+                <a16:creationId xmlns:a16="http://schemas.microsoft.com/office/drawing/2014/main" id="{023F7870-19BB-4303-A5DE-008DD00F54C5}"/>
               </a:ext>
             </a:extLst>
           </p:cNvPr>
@@ -2669,7 +2669,7 @@
           <p:cNvPr id="7" name="state-label-1">
             <a:extLst xmlns:a="http://schemas.openxmlformats.org/drawingml/2006/main">
               <a:ext uri="{FF2B5EF4-FFF2-40B4-BE49-F238E27FC236}">
-                <a16:creationId xmlns:a16="http://schemas.microsoft.com/office/drawing/2014/main" id="{6A80EF6D-692F-4F25-A4C1-A69DF4E16AB1}"/>
+                <a16:creationId xmlns:a16="http://schemas.microsoft.com/office/drawing/2014/main" id="{665B9FDB-D343-4FA7-AF80-B99FA0945AAF}"/>
               </a:ext>
             </a:extLst>
           </p:cNvPr>
@@ -2725,7 +2725,7 @@
           <p:cNvPr id="8" name="state-detail-1">
             <a:extLst xmlns:a="http://schemas.openxmlformats.org/drawingml/2006/main">
               <a:ext uri="{FF2B5EF4-FFF2-40B4-BE49-F238E27FC236}">
-                <a16:creationId xmlns:a16="http://schemas.microsoft.com/office/drawing/2014/main" id="{7A79B4B4-D4CB-4170-86F4-7FCA95496391}"/>
+                <a16:creationId xmlns:a16="http://schemas.microsoft.com/office/drawing/2014/main" id="{7E4DF82C-CA0F-4499-8571-DFC864DA6F5C}"/>
               </a:ext>
             </a:extLst>
           </p:cNvPr>
@@ -2781,7 +2781,7 @@
           <p:cNvPr id="9" name="state-2">
             <a:extLst xmlns:a="http://schemas.openxmlformats.org/drawingml/2006/main">
               <a:ext uri="{FF2B5EF4-FFF2-40B4-BE49-F238E27FC236}">
-                <a16:creationId xmlns:a16="http://schemas.microsoft.com/office/drawing/2014/main" id="{F1B6E346-1686-4F1E-B6BE-3A82E05A886B}"/>
+                <a16:creationId xmlns:a16="http://schemas.microsoft.com/office/drawing/2014/main" id="{39319E1F-ACFB-403B-B63D-ED60135B2AA4}"/>
               </a:ext>
             </a:extLst>
           </p:cNvPr>
@@ -2816,7 +2816,7 @@
           <p:cNvPr id="10" name="state-label-2">
             <a:extLst xmlns:a="http://schemas.openxmlformats.org/drawingml/2006/main">
               <a:ext uri="{FF2B5EF4-FFF2-40B4-BE49-F238E27FC236}">
-                <a16:creationId xmlns:a16="http://schemas.microsoft.com/office/drawing/2014/main" id="{8F24D563-2FA6-4055-95AA-94BD01ED6D79}"/>
+                <a16:creationId xmlns:a16="http://schemas.microsoft.com/office/drawing/2014/main" id="{A3C9F546-443A-465F-9563-9EF193C86DC1}"/>
               </a:ext>
             </a:extLst>
           </p:cNvPr>
@@ -2872,7 +2872,7 @@
           <p:cNvPr id="11" name="state-detail-2">
             <a:extLst xmlns:a="http://schemas.openxmlformats.org/drawingml/2006/main">
               <a:ext uri="{FF2B5EF4-FFF2-40B4-BE49-F238E27FC236}">
-                <a16:creationId xmlns:a16="http://schemas.microsoft.com/office/drawing/2014/main" id="{7AEB40EC-3DA0-4A0D-8C01-C384A1AC9956}"/>
+                <a16:creationId xmlns:a16="http://schemas.microsoft.com/office/drawing/2014/main" id="{35D54D01-639C-4876-AB4F-A284BC4D6BBC}"/>
               </a:ext>
             </a:extLst>
           </p:cNvPr>
@@ -2928,7 +2928,7 @@
           <p:cNvPr id="12" name="state-3">
             <a:extLst xmlns:a="http://schemas.openxmlformats.org/drawingml/2006/main">
               <a:ext uri="{FF2B5EF4-FFF2-40B4-BE49-F238E27FC236}">
-                <a16:creationId xmlns:a16="http://schemas.microsoft.com/office/drawing/2014/main" id="{71E76F99-9DD9-4DED-8A6E-BFF2AC431D94}"/>
+                <a16:creationId xmlns:a16="http://schemas.microsoft.com/office/drawing/2014/main" id="{38245A61-FA4E-43C8-9349-D4A51EE4942D}"/>
               </a:ext>
             </a:extLst>
           </p:cNvPr>
@@ -2963,7 +2963,7 @@
           <p:cNvPr id="13" name="state-label-3">
             <a:extLst xmlns:a="http://schemas.openxmlformats.org/drawingml/2006/main">
               <a:ext uri="{FF2B5EF4-FFF2-40B4-BE49-F238E27FC236}">
-                <a16:creationId xmlns:a16="http://schemas.microsoft.com/office/drawing/2014/main" id="{C69927BF-29FE-4BFB-A307-D50F58E7AEC8}"/>
+                <a16:creationId xmlns:a16="http://schemas.microsoft.com/office/drawing/2014/main" id="{AF2CC4F5-17AB-4688-9BDF-FC94505BA457}"/>
               </a:ext>
             </a:extLst>
           </p:cNvPr>
@@ -3009,7 +3009,7 @@
                 <a:ea typeface="Malgun Gothic"/>
                 <a:cs typeface="Malgun Gothic"/>
               </a:rPr>
-              <a:t>최종 해결 가이드</a:t>
+              <a:t>해결된 답변</a:t>
             </a:r>
           </a:p>
         </p:txBody>
@@ -3019,7 +3019,7 @@
           <p:cNvPr id="14" name="state-detail-3">
             <a:extLst xmlns:a="http://schemas.openxmlformats.org/drawingml/2006/main">
               <a:ext uri="{FF2B5EF4-FFF2-40B4-BE49-F238E27FC236}">
-                <a16:creationId xmlns:a16="http://schemas.microsoft.com/office/drawing/2014/main" id="{EC212F34-1579-49F5-9C60-4D38A2E0AD14}"/>
+                <a16:creationId xmlns:a16="http://schemas.microsoft.com/office/drawing/2014/main" id="{0582A4AC-E331-4488-9C3F-EB98A8C6AB1D}"/>
               </a:ext>
             </a:extLst>
           </p:cNvPr>
@@ -3065,7 +3065,7 @@
                 <a:ea typeface="Malgun Gothic"/>
                 <a:cs typeface="Malgun Gothic"/>
               </a:rPr>
-              <a:t>질문자가 선택한 Knowledge Base</a:t>
+              <a:t>작은 배지 · 녹색 강조선 · 중복 작성자 정보 제거</a:t>
             </a:r>
           </a:p>
         </p:txBody>
@@ -3073,7 +3073,7 @@
     </p:spTree>
     <p:extLst>
       <p:ext uri="{BB962C8B-B14F-4D97-AF65-F5344CB8AC3E}">
-        <p14:creationId xmlns:p14="http://schemas.microsoft.com/office/powerpoint/2010/main" val="1569714647"/>
+        <p14:creationId xmlns:p14="http://schemas.microsoft.com/office/powerpoint/2010/main" val="897282157"/>
       </p:ext>
     </p:extLst>
   </p:cSld>
@@ -3104,7 +3104,7 @@
           <p:cNvPr id="11" name="title-4">
             <a:extLst xmlns:a="http://schemas.openxmlformats.org/drawingml/2006/main">
               <a:ext uri="{FF2B5EF4-FFF2-40B4-BE49-F238E27FC236}">
-                <a16:creationId xmlns:a16="http://schemas.microsoft.com/office/drawing/2014/main" id="{364DDEE9-32AA-424D-8E5E-D1EDCA90C8FE}"/>
+                <a16:creationId xmlns:a16="http://schemas.microsoft.com/office/drawing/2014/main" id="{D7F2A7EE-C2B0-4F95-8F62-78CAF893DDF0}"/>
               </a:ext>
             </a:extLst>
           </p:cNvPr>
@@ -3160,7 +3160,7 @@
           <p:cNvPr id="2" name="page-4">
             <a:extLst xmlns:a="http://schemas.openxmlformats.org/drawingml/2006/main">
               <a:ext uri="{FF2B5EF4-FFF2-40B4-BE49-F238E27FC236}">
-                <a16:creationId xmlns:a16="http://schemas.microsoft.com/office/drawing/2014/main" id="{0BA99E0B-A0F3-49AB-88F1-2426C3CE2102}"/>
+                <a16:creationId xmlns:a16="http://schemas.microsoft.com/office/drawing/2014/main" id="{1F20B655-F3AE-407B-8BFA-F2EF3741DD45}"/>
               </a:ext>
             </a:extLst>
           </p:cNvPr>
@@ -3220,7 +3220,7 @@
           <p:nvPr/>
         </p:nvPicPr>
         <p:blipFill>
-          <a:blip xmlns:r="http://schemas.openxmlformats.org/officeDocument/2006/relationships" xmlns:a="http://schemas.openxmlformats.org/drawingml/2006/main" r:embed="R7ba50e144fe844e4"/>
+          <a:blip xmlns:r="http://schemas.openxmlformats.org/officeDocument/2006/relationships" xmlns:a="http://schemas.openxmlformats.org/drawingml/2006/main" r:embed="R161bd5b70dac460f"/>
           <a:stretch xmlns:a="http://schemas.openxmlformats.org/drawingml/2006/main"/>
         </p:blipFill>
         <p:spPr>
@@ -3240,7 +3240,7 @@
           <p:cNvPr id="4" name="mobile-fact-1">
             <a:extLst xmlns:a="http://schemas.openxmlformats.org/drawingml/2006/main">
               <a:ext uri="{FF2B5EF4-FFF2-40B4-BE49-F238E27FC236}">
-                <a16:creationId xmlns:a16="http://schemas.microsoft.com/office/drawing/2014/main" id="{1ED04589-AECA-4ECD-B785-ABD2B20E5F99}"/>
+                <a16:creationId xmlns:a16="http://schemas.microsoft.com/office/drawing/2014/main" id="{F9993767-D5E7-45F3-B8C2-65F7E3613031}"/>
               </a:ext>
             </a:extLst>
           </p:cNvPr>
@@ -3296,7 +3296,7 @@
           <p:cNvPr id="5" name="mobile-desc-1">
             <a:extLst xmlns:a="http://schemas.openxmlformats.org/drawingml/2006/main">
               <a:ext uri="{FF2B5EF4-FFF2-40B4-BE49-F238E27FC236}">
-                <a16:creationId xmlns:a16="http://schemas.microsoft.com/office/drawing/2014/main" id="{1D6DDF5C-E0C5-4B88-8A67-8695AE7EF33B}"/>
+                <a16:creationId xmlns:a16="http://schemas.microsoft.com/office/drawing/2014/main" id="{C4017E73-C77E-4179-89B3-7B4264BD35D1}"/>
               </a:ext>
             </a:extLst>
           </p:cNvPr>
@@ -3352,7 +3352,7 @@
           <p:cNvPr id="6" name="mobile-fact-2">
             <a:extLst xmlns:a="http://schemas.openxmlformats.org/drawingml/2006/main">
               <a:ext uri="{FF2B5EF4-FFF2-40B4-BE49-F238E27FC236}">
-                <a16:creationId xmlns:a16="http://schemas.microsoft.com/office/drawing/2014/main" id="{B6748176-C57F-44B7-B51A-5DB5301CE2A8}"/>
+                <a16:creationId xmlns:a16="http://schemas.microsoft.com/office/drawing/2014/main" id="{2CAEF345-CB70-47E8-B0C2-8801C03A4A9D}"/>
               </a:ext>
             </a:extLst>
           </p:cNvPr>
@@ -3408,7 +3408,7 @@
           <p:cNvPr id="7" name="mobile-desc-2">
             <a:extLst xmlns:a="http://schemas.openxmlformats.org/drawingml/2006/main">
               <a:ext uri="{FF2B5EF4-FFF2-40B4-BE49-F238E27FC236}">
-                <a16:creationId xmlns:a16="http://schemas.microsoft.com/office/drawing/2014/main" id="{1DCD3B08-338E-4060-B5E9-2367297C15B8}"/>
+                <a16:creationId xmlns:a16="http://schemas.microsoft.com/office/drawing/2014/main" id="{E1A8B56F-9A9F-4AA0-B8E7-15B05197369E}"/>
               </a:ext>
             </a:extLst>
           </p:cNvPr>
@@ -3464,7 +3464,7 @@
           <p:cNvPr id="8" name="mobile-fact-3">
             <a:extLst xmlns:a="http://schemas.openxmlformats.org/drawingml/2006/main">
               <a:ext uri="{FF2B5EF4-FFF2-40B4-BE49-F238E27FC236}">
-                <a16:creationId xmlns:a16="http://schemas.microsoft.com/office/drawing/2014/main" id="{351D7747-9A75-4B88-A194-12002F37DBA7}"/>
+                <a16:creationId xmlns:a16="http://schemas.microsoft.com/office/drawing/2014/main" id="{9704A82C-C2A4-49A7-AEED-4554A524FE31}"/>
               </a:ext>
             </a:extLst>
           </p:cNvPr>
@@ -3520,7 +3520,7 @@
           <p:cNvPr id="9" name="mobile-desc-3">
             <a:extLst xmlns:a="http://schemas.openxmlformats.org/drawingml/2006/main">
               <a:ext uri="{FF2B5EF4-FFF2-40B4-BE49-F238E27FC236}">
-                <a16:creationId xmlns:a16="http://schemas.microsoft.com/office/drawing/2014/main" id="{413C1D88-C228-4ABE-99E5-D6470B7D0CCB}"/>
+                <a16:creationId xmlns:a16="http://schemas.microsoft.com/office/drawing/2014/main" id="{E1F35D93-E274-4481-9D41-08E8E721431B}"/>
               </a:ext>
             </a:extLst>
           </p:cNvPr>
@@ -3576,7 +3576,7 @@
           <p:cNvPr id="10" name="mobile-foot">
             <a:extLst xmlns:a="http://schemas.openxmlformats.org/drawingml/2006/main">
               <a:ext uri="{FF2B5EF4-FFF2-40B4-BE49-F238E27FC236}">
-                <a16:creationId xmlns:a16="http://schemas.microsoft.com/office/drawing/2014/main" id="{0A5760AE-27F5-499A-B46B-014DB29DBF4B}"/>
+                <a16:creationId xmlns:a16="http://schemas.microsoft.com/office/drawing/2014/main" id="{9CA7FCF4-021C-4706-BB1D-F5BFF353362B}"/>
               </a:ext>
             </a:extLst>
           </p:cNvPr>
@@ -3630,7 +3630,7 @@
     </p:spTree>
     <p:extLst>
       <p:ext uri="{BB962C8B-B14F-4D97-AF65-F5344CB8AC3E}">
-        <p14:creationId xmlns:p14="http://schemas.microsoft.com/office/powerpoint/2010/main" val="2069577870"/>
+        <p14:creationId xmlns:p14="http://schemas.microsoft.com/office/powerpoint/2010/main" val="1132278332"/>
       </p:ext>
     </p:extLst>
   </p:cSld>
@@ -3661,7 +3661,7 @@
           <p:cNvPr id="20" name="title-5">
             <a:extLst xmlns:a="http://schemas.openxmlformats.org/drawingml/2006/main">
               <a:ext uri="{FF2B5EF4-FFF2-40B4-BE49-F238E27FC236}">
-                <a16:creationId xmlns:a16="http://schemas.microsoft.com/office/drawing/2014/main" id="{7C7115AC-2500-477F-A76B-032C779ED07C}"/>
+                <a16:creationId xmlns:a16="http://schemas.microsoft.com/office/drawing/2014/main" id="{C929FA20-84E2-41AD-843B-9850742CDB15}"/>
               </a:ext>
             </a:extLst>
           </p:cNvPr>
@@ -3717,7 +3717,7 @@
           <p:cNvPr id="2" name="page-5">
             <a:extLst xmlns:a="http://schemas.openxmlformats.org/drawingml/2006/main">
               <a:ext uri="{FF2B5EF4-FFF2-40B4-BE49-F238E27FC236}">
-                <a16:creationId xmlns:a16="http://schemas.microsoft.com/office/drawing/2014/main" id="{867E932A-D99E-41C3-859A-F7D8243DF6C5}"/>
+                <a16:creationId xmlns:a16="http://schemas.microsoft.com/office/drawing/2014/main" id="{773A7A95-750E-4060-9B94-9A3F830884C9}"/>
               </a:ext>
             </a:extLst>
           </p:cNvPr>
@@ -3773,7 +3773,7 @@
           <p:cNvPr id="3" name="arrow-0">
             <a:extLst xmlns:a="http://schemas.openxmlformats.org/drawingml/2006/main">
               <a:ext uri="{FF2B5EF4-FFF2-40B4-BE49-F238E27FC236}">
-                <a16:creationId xmlns:a16="http://schemas.microsoft.com/office/drawing/2014/main" id="{02DA7620-22D1-468B-B978-439EECC6101A}"/>
+                <a16:creationId xmlns:a16="http://schemas.microsoft.com/office/drawing/2014/main" id="{860F500C-B677-4290-86C7-D0A6960717D0}"/>
               </a:ext>
             </a:extLst>
           </p:cNvPr>
@@ -3829,7 +3829,7 @@
           <p:cNvPr id="4" name="phase-0">
             <a:extLst xmlns:a="http://schemas.openxmlformats.org/drawingml/2006/main">
               <a:ext uri="{FF2B5EF4-FFF2-40B4-BE49-F238E27FC236}">
-                <a16:creationId xmlns:a16="http://schemas.microsoft.com/office/drawing/2014/main" id="{65C31113-1990-4E1B-AFAC-6F4356129C6C}"/>
+                <a16:creationId xmlns:a16="http://schemas.microsoft.com/office/drawing/2014/main" id="{BC94B2AF-36E1-4783-B4C6-BD316D3B3C4A}"/>
               </a:ext>
             </a:extLst>
           </p:cNvPr>
@@ -3864,7 +3864,7 @@
           <p:cNvPr id="5" name="phase-label-0">
             <a:extLst xmlns:a="http://schemas.openxmlformats.org/drawingml/2006/main">
               <a:ext uri="{FF2B5EF4-FFF2-40B4-BE49-F238E27FC236}">
-                <a16:creationId xmlns:a16="http://schemas.microsoft.com/office/drawing/2014/main" id="{6DED1DD9-7A5C-4E9F-A14C-5AD7AC93C183}"/>
+                <a16:creationId xmlns:a16="http://schemas.microsoft.com/office/drawing/2014/main" id="{39C5A6F7-03C9-4D6D-B141-A6E5D81E1C74}"/>
               </a:ext>
             </a:extLst>
           </p:cNvPr>
@@ -3943,7 +3943,7 @@
           <p:cNvPr id="6" name="phase-http-0">
             <a:extLst xmlns:a="http://schemas.openxmlformats.org/drawingml/2006/main">
               <a:ext uri="{FF2B5EF4-FFF2-40B4-BE49-F238E27FC236}">
-                <a16:creationId xmlns:a16="http://schemas.microsoft.com/office/drawing/2014/main" id="{FEF4294B-0EBC-4C49-897E-08644B1DBF2F}"/>
+                <a16:creationId xmlns:a16="http://schemas.microsoft.com/office/drawing/2014/main" id="{A3390EB5-0E0A-402E-96FF-DEB3E390920C}"/>
               </a:ext>
             </a:extLst>
           </p:cNvPr>
@@ -3999,7 +3999,7 @@
           <p:cNvPr id="7" name="arrow-1">
             <a:extLst xmlns:a="http://schemas.openxmlformats.org/drawingml/2006/main">
               <a:ext uri="{FF2B5EF4-FFF2-40B4-BE49-F238E27FC236}">
-                <a16:creationId xmlns:a16="http://schemas.microsoft.com/office/drawing/2014/main" id="{B3791DE9-44AD-4BA6-8BA0-ACFE8CED89C8}"/>
+                <a16:creationId xmlns:a16="http://schemas.microsoft.com/office/drawing/2014/main" id="{B15E3F45-189B-4F0A-AFCA-A25B84067D20}"/>
               </a:ext>
             </a:extLst>
           </p:cNvPr>
@@ -4055,7 +4055,7 @@
           <p:cNvPr id="8" name="phase-1">
             <a:extLst xmlns:a="http://schemas.openxmlformats.org/drawingml/2006/main">
               <a:ext uri="{FF2B5EF4-FFF2-40B4-BE49-F238E27FC236}">
-                <a16:creationId xmlns:a16="http://schemas.microsoft.com/office/drawing/2014/main" id="{0F9CF05A-D6DB-4883-9FB6-38C24BB3E76D}"/>
+                <a16:creationId xmlns:a16="http://schemas.microsoft.com/office/drawing/2014/main" id="{732115CE-CF9E-4FB2-A163-BDD5AB7B6776}"/>
               </a:ext>
             </a:extLst>
           </p:cNvPr>
@@ -4090,7 +4090,7 @@
           <p:cNvPr id="9" name="phase-label-1">
             <a:extLst xmlns:a="http://schemas.openxmlformats.org/drawingml/2006/main">
               <a:ext uri="{FF2B5EF4-FFF2-40B4-BE49-F238E27FC236}">
-                <a16:creationId xmlns:a16="http://schemas.microsoft.com/office/drawing/2014/main" id="{DE3571C8-CC88-42CE-B623-82880703F94C}"/>
+                <a16:creationId xmlns:a16="http://schemas.microsoft.com/office/drawing/2014/main" id="{AE47776E-0448-4ECB-9D4D-0052212D71EB}"/>
               </a:ext>
             </a:extLst>
           </p:cNvPr>
@@ -4169,7 +4169,7 @@
           <p:cNvPr id="10" name="phase-http-1">
             <a:extLst xmlns:a="http://schemas.openxmlformats.org/drawingml/2006/main">
               <a:ext uri="{FF2B5EF4-FFF2-40B4-BE49-F238E27FC236}">
-                <a16:creationId xmlns:a16="http://schemas.microsoft.com/office/drawing/2014/main" id="{6AE13730-A351-4D2C-A953-A1AD3C873D59}"/>
+                <a16:creationId xmlns:a16="http://schemas.microsoft.com/office/drawing/2014/main" id="{7581C60E-ADCD-486E-8D61-FABF003638C5}"/>
               </a:ext>
             </a:extLst>
           </p:cNvPr>
@@ -4225,7 +4225,7 @@
           <p:cNvPr id="11" name="arrow-2">
             <a:extLst xmlns:a="http://schemas.openxmlformats.org/drawingml/2006/main">
               <a:ext uri="{FF2B5EF4-FFF2-40B4-BE49-F238E27FC236}">
-                <a16:creationId xmlns:a16="http://schemas.microsoft.com/office/drawing/2014/main" id="{A942B671-4EFD-40FC-8628-3D18C3E7FFA3}"/>
+                <a16:creationId xmlns:a16="http://schemas.microsoft.com/office/drawing/2014/main" id="{99B75DAD-D8E3-4AEE-B156-813951EA1AC2}"/>
               </a:ext>
             </a:extLst>
           </p:cNvPr>
@@ -4281,7 +4281,7 @@
           <p:cNvPr id="12" name="phase-2">
             <a:extLst xmlns:a="http://schemas.openxmlformats.org/drawingml/2006/main">
               <a:ext uri="{FF2B5EF4-FFF2-40B4-BE49-F238E27FC236}">
-                <a16:creationId xmlns:a16="http://schemas.microsoft.com/office/drawing/2014/main" id="{2C5380C8-08C7-4A62-81E9-10DAAEC9D1A0}"/>
+                <a16:creationId xmlns:a16="http://schemas.microsoft.com/office/drawing/2014/main" id="{E67802A1-D4C6-4720-B27E-4C73683CB195}"/>
               </a:ext>
             </a:extLst>
           </p:cNvPr>
@@ -4316,7 +4316,7 @@
           <p:cNvPr id="13" name="phase-label-2">
             <a:extLst xmlns:a="http://schemas.openxmlformats.org/drawingml/2006/main">
               <a:ext uri="{FF2B5EF4-FFF2-40B4-BE49-F238E27FC236}">
-                <a16:creationId xmlns:a16="http://schemas.microsoft.com/office/drawing/2014/main" id="{44F93C3B-1630-48A0-87A0-E34BF208906C}"/>
+                <a16:creationId xmlns:a16="http://schemas.microsoft.com/office/drawing/2014/main" id="{57737DEE-F66F-4387-95AD-92710C1C90DB}"/>
               </a:ext>
             </a:extLst>
           </p:cNvPr>
@@ -4395,7 +4395,7 @@
           <p:cNvPr id="14" name="phase-http-2">
             <a:extLst xmlns:a="http://schemas.openxmlformats.org/drawingml/2006/main">
               <a:ext uri="{FF2B5EF4-FFF2-40B4-BE49-F238E27FC236}">
-                <a16:creationId xmlns:a16="http://schemas.microsoft.com/office/drawing/2014/main" id="{1EABD644-F355-4E63-A3C0-4C40E9EE57F7}"/>
+                <a16:creationId xmlns:a16="http://schemas.microsoft.com/office/drawing/2014/main" id="{43E67CDF-C4C3-48C9-828B-3CD1BA0D68A4}"/>
               </a:ext>
             </a:extLst>
           </p:cNvPr>
@@ -4451,7 +4451,7 @@
           <p:cNvPr id="15" name="phase-3">
             <a:extLst xmlns:a="http://schemas.openxmlformats.org/drawingml/2006/main">
               <a:ext uri="{FF2B5EF4-FFF2-40B4-BE49-F238E27FC236}">
-                <a16:creationId xmlns:a16="http://schemas.microsoft.com/office/drawing/2014/main" id="{88C13E14-ECA3-4A8D-AEB1-12A8A2B951E7}"/>
+                <a16:creationId xmlns:a16="http://schemas.microsoft.com/office/drawing/2014/main" id="{45413C8F-73C1-444E-99DE-D5C2A77BD2C0}"/>
               </a:ext>
             </a:extLst>
           </p:cNvPr>
@@ -4486,7 +4486,7 @@
           <p:cNvPr id="16" name="phase-label-3">
             <a:extLst xmlns:a="http://schemas.openxmlformats.org/drawingml/2006/main">
               <a:ext uri="{FF2B5EF4-FFF2-40B4-BE49-F238E27FC236}">
-                <a16:creationId xmlns:a16="http://schemas.microsoft.com/office/drawing/2014/main" id="{C2394D85-BDC6-4D3E-9F38-5E0B65E18272}"/>
+                <a16:creationId xmlns:a16="http://schemas.microsoft.com/office/drawing/2014/main" id="{D388AFCC-660D-4CC1-903B-0F8AD9E9D78C}"/>
               </a:ext>
             </a:extLst>
           </p:cNvPr>
@@ -4565,7 +4565,7 @@
           <p:cNvPr id="17" name="phase-http-3">
             <a:extLst xmlns:a="http://schemas.openxmlformats.org/drawingml/2006/main">
               <a:ext uri="{FF2B5EF4-FFF2-40B4-BE49-F238E27FC236}">
-                <a16:creationId xmlns:a16="http://schemas.microsoft.com/office/drawing/2014/main" id="{884B2FE5-FB57-4421-9A7A-E476FC168D13}"/>
+                <a16:creationId xmlns:a16="http://schemas.microsoft.com/office/drawing/2014/main" id="{DFE92A0D-9599-475E-B252-D3AF6B7071E7}"/>
               </a:ext>
             </a:extLst>
           </p:cNvPr>
@@ -4621,7 +4621,7 @@
           <p:cNvPr id="18" name="integrity-count">
             <a:extLst xmlns:a="http://schemas.openxmlformats.org/drawingml/2006/main">
               <a:ext uri="{FF2B5EF4-FFF2-40B4-BE49-F238E27FC236}">
-                <a16:creationId xmlns:a16="http://schemas.microsoft.com/office/drawing/2014/main" id="{E32C6351-882A-4A72-9227-5974C7984657}"/>
+                <a16:creationId xmlns:a16="http://schemas.microsoft.com/office/drawing/2014/main" id="{8DC938F6-DF81-4876-B6F3-530BA52102E7}"/>
               </a:ext>
             </a:extLst>
           </p:cNvPr>
@@ -4677,7 +4677,7 @@
           <p:cNvPr id="19" name="integrity-hash">
             <a:extLst xmlns:a="http://schemas.openxmlformats.org/drawingml/2006/main">
               <a:ext uri="{FF2B5EF4-FFF2-40B4-BE49-F238E27FC236}">
-                <a16:creationId xmlns:a16="http://schemas.microsoft.com/office/drawing/2014/main" id="{4A91C376-C0C0-4F29-A738-E48467983F9B}"/>
+                <a16:creationId xmlns:a16="http://schemas.microsoft.com/office/drawing/2014/main" id="{AD94B953-C2EA-4B22-B43B-C5A97A47FFE1}"/>
               </a:ext>
             </a:extLst>
           </p:cNvPr>
@@ -4731,7 +4731,7 @@
     </p:spTree>
     <p:extLst>
       <p:ext uri="{BB962C8B-B14F-4D97-AF65-F5344CB8AC3E}">
-        <p14:creationId xmlns:p14="http://schemas.microsoft.com/office/powerpoint/2010/main" val="1778098845"/>
+        <p14:creationId xmlns:p14="http://schemas.microsoft.com/office/powerpoint/2010/main" val="1782787895"/>
       </p:ext>
     </p:extLst>
   </p:cSld>
@@ -4762,7 +4762,7 @@
           <p:cNvPr id="16" name="title-6">
             <a:extLst xmlns:a="http://schemas.openxmlformats.org/drawingml/2006/main">
               <a:ext uri="{FF2B5EF4-FFF2-40B4-BE49-F238E27FC236}">
-                <a16:creationId xmlns:a16="http://schemas.microsoft.com/office/drawing/2014/main" id="{936FB80E-5395-4A55-AD96-BEDB34A10EA4}"/>
+                <a16:creationId xmlns:a16="http://schemas.microsoft.com/office/drawing/2014/main" id="{F6FDFB05-57FC-48AE-826C-DCB47E355740}"/>
               </a:ext>
             </a:extLst>
           </p:cNvPr>
@@ -4818,7 +4818,7 @@
           <p:cNvPr id="2" name="page-6">
             <a:extLst xmlns:a="http://schemas.openxmlformats.org/drawingml/2006/main">
               <a:ext uri="{FF2B5EF4-FFF2-40B4-BE49-F238E27FC236}">
-                <a16:creationId xmlns:a16="http://schemas.microsoft.com/office/drawing/2014/main" id="{3F45BDCE-34E9-4077-B6E9-8798632294DA}"/>
+                <a16:creationId xmlns:a16="http://schemas.microsoft.com/office/drawing/2014/main" id="{5C57E274-4D6C-4844-BB31-93CBAE0136BE}"/>
               </a:ext>
             </a:extLst>
           </p:cNvPr>
@@ -4874,7 +4874,7 @@
           <p:cNvPr id="3" name="flow-arrow-1">
             <a:extLst xmlns:a="http://schemas.openxmlformats.org/drawingml/2006/main">
               <a:ext uri="{FF2B5EF4-FFF2-40B4-BE49-F238E27FC236}">
-                <a16:creationId xmlns:a16="http://schemas.microsoft.com/office/drawing/2014/main" id="{EB86C32F-C4FD-45E8-9497-343C1812BBDB}"/>
+                <a16:creationId xmlns:a16="http://schemas.microsoft.com/office/drawing/2014/main" id="{3E0F1BD3-91BC-4911-98D6-AB8A210E300B}"/>
               </a:ext>
             </a:extLst>
           </p:cNvPr>
@@ -4930,7 +4930,7 @@
           <p:cNvPr id="4" name="flow-arrow-2">
             <a:extLst xmlns:a="http://schemas.openxmlformats.org/drawingml/2006/main">
               <a:ext uri="{FF2B5EF4-FFF2-40B4-BE49-F238E27FC236}">
-                <a16:creationId xmlns:a16="http://schemas.microsoft.com/office/drawing/2014/main" id="{6F22E331-7339-4254-919A-CCAE04D6ECA4}"/>
+                <a16:creationId xmlns:a16="http://schemas.microsoft.com/office/drawing/2014/main" id="{F8A5AD1C-734D-49D4-8FE5-7FA6063052CD}"/>
               </a:ext>
             </a:extLst>
           </p:cNvPr>
@@ -4986,7 +4986,7 @@
           <p:cNvPr id="5" name="flarum-core">
             <a:extLst xmlns:a="http://schemas.openxmlformats.org/drawingml/2006/main">
               <a:ext uri="{FF2B5EF4-FFF2-40B4-BE49-F238E27FC236}">
-                <a16:creationId xmlns:a16="http://schemas.microsoft.com/office/drawing/2014/main" id="{DA23153E-79AE-48B3-A25B-D56C8D304631}"/>
+                <a16:creationId xmlns:a16="http://schemas.microsoft.com/office/drawing/2014/main" id="{E9E250B1-3CB4-4B55-8456-D64E639AB434}"/>
               </a:ext>
             </a:extLst>
           </p:cNvPr>
@@ -5021,7 +5021,7 @@
           <p:cNvPr id="6" name="theme-extension">
             <a:extLst xmlns:a="http://schemas.openxmlformats.org/drawingml/2006/main">
               <a:ext uri="{FF2B5EF4-FFF2-40B4-BE49-F238E27FC236}">
-                <a16:creationId xmlns:a16="http://schemas.microsoft.com/office/drawing/2014/main" id="{FDE91976-7457-4CFE-B630-516C6F2F8910}"/>
+                <a16:creationId xmlns:a16="http://schemas.microsoft.com/office/drawing/2014/main" id="{4B1B960E-9F71-47F5-AB26-FD6C0C360147}"/>
               </a:ext>
             </a:extLst>
           </p:cNvPr>
@@ -5056,7 +5056,7 @@
           <p:cNvPr id="7" name="community-ui">
             <a:extLst xmlns:a="http://schemas.openxmlformats.org/drawingml/2006/main">
               <a:ext uri="{FF2B5EF4-FFF2-40B4-BE49-F238E27FC236}">
-                <a16:creationId xmlns:a16="http://schemas.microsoft.com/office/drawing/2014/main" id="{99C8A671-21F5-4CCE-984F-FFDA4482C553}"/>
+                <a16:creationId xmlns:a16="http://schemas.microsoft.com/office/drawing/2014/main" id="{F67E9A45-E075-48E2-A31C-DE312458AEA3}"/>
               </a:ext>
             </a:extLst>
           </p:cNvPr>
@@ -5091,7 +5091,7 @@
           <p:cNvPr id="8" name="flarum-core-title">
             <a:extLst xmlns:a="http://schemas.openxmlformats.org/drawingml/2006/main">
               <a:ext uri="{FF2B5EF4-FFF2-40B4-BE49-F238E27FC236}">
-                <a16:creationId xmlns:a16="http://schemas.microsoft.com/office/drawing/2014/main" id="{AEFC3C39-A8D6-49E8-A2CD-DCB6196FF1C3}"/>
+                <a16:creationId xmlns:a16="http://schemas.microsoft.com/office/drawing/2014/main" id="{0C55306A-5C92-4B20-8E17-0BC97FFD895C}"/>
               </a:ext>
             </a:extLst>
           </p:cNvPr>
@@ -5147,7 +5147,7 @@
           <p:cNvPr id="9" name="flarum-core-copy">
             <a:extLst xmlns:a="http://schemas.openxmlformats.org/drawingml/2006/main">
               <a:ext uri="{FF2B5EF4-FFF2-40B4-BE49-F238E27FC236}">
-                <a16:creationId xmlns:a16="http://schemas.microsoft.com/office/drawing/2014/main" id="{921626C5-662F-4967-BEC0-07F29A8DCED0}"/>
+                <a16:creationId xmlns:a16="http://schemas.microsoft.com/office/drawing/2014/main" id="{E042DB5B-3A2A-4A2A-9D87-24A54A9EC6D2}"/>
               </a:ext>
             </a:extLst>
           </p:cNvPr>
@@ -5203,7 +5203,7 @@
           <p:cNvPr id="10" name="theme-title">
             <a:extLst xmlns:a="http://schemas.openxmlformats.org/drawingml/2006/main">
               <a:ext uri="{FF2B5EF4-FFF2-40B4-BE49-F238E27FC236}">
-                <a16:creationId xmlns:a16="http://schemas.microsoft.com/office/drawing/2014/main" id="{C39A71F0-144B-4F5B-90E3-26EF4A4CB9EC}"/>
+                <a16:creationId xmlns:a16="http://schemas.microsoft.com/office/drawing/2014/main" id="{DCDCC8F1-7323-4355-BC1E-F8193C7533B6}"/>
               </a:ext>
             </a:extLst>
           </p:cNvPr>
@@ -5282,7 +5282,7 @@
           <p:cNvPr id="11" name="theme-copy">
             <a:extLst xmlns:a="http://schemas.openxmlformats.org/drawingml/2006/main">
               <a:ext uri="{FF2B5EF4-FFF2-40B4-BE49-F238E27FC236}">
-                <a16:creationId xmlns:a16="http://schemas.microsoft.com/office/drawing/2014/main" id="{50BC9FF5-CF2D-4B73-8AF0-12FC42B1BD19}"/>
+                <a16:creationId xmlns:a16="http://schemas.microsoft.com/office/drawing/2014/main" id="{729AB971-CC80-4D2E-824A-3C81287C60E9}"/>
               </a:ext>
             </a:extLst>
           </p:cNvPr>
@@ -5338,7 +5338,7 @@
           <p:cNvPr id="12" name="ui-title">
             <a:extLst xmlns:a="http://schemas.openxmlformats.org/drawingml/2006/main">
               <a:ext uri="{FF2B5EF4-FFF2-40B4-BE49-F238E27FC236}">
-                <a16:creationId xmlns:a16="http://schemas.microsoft.com/office/drawing/2014/main" id="{283B322A-01FC-48D8-8FCE-05C601059157}"/>
+                <a16:creationId xmlns:a16="http://schemas.microsoft.com/office/drawing/2014/main" id="{95D36358-5041-46DF-BB6F-B4697C251E77}"/>
               </a:ext>
             </a:extLst>
           </p:cNvPr>
@@ -5394,7 +5394,7 @@
           <p:cNvPr id="13" name="ui-copy">
             <a:extLst xmlns:a="http://schemas.openxmlformats.org/drawingml/2006/main">
               <a:ext uri="{FF2B5EF4-FFF2-40B4-BE49-F238E27FC236}">
-                <a16:creationId xmlns:a16="http://schemas.microsoft.com/office/drawing/2014/main" id="{739BED58-F52D-47EA-90CA-37B122117631}"/>
+                <a16:creationId xmlns:a16="http://schemas.microsoft.com/office/drawing/2014/main" id="{CC5A6B57-5BB5-4CAF-9539-A6150BD58625}"/>
               </a:ext>
             </a:extLst>
           </p:cNvPr>
@@ -5450,7 +5450,7 @@
           <p:cNvPr id="14" name="rollback-strip">
             <a:extLst xmlns:a="http://schemas.openxmlformats.org/drawingml/2006/main">
               <a:ext uri="{FF2B5EF4-FFF2-40B4-BE49-F238E27FC236}">
-                <a16:creationId xmlns:a16="http://schemas.microsoft.com/office/drawing/2014/main" id="{62AD6541-9226-48D0-9347-826D4FFF9A1A}"/>
+                <a16:creationId xmlns:a16="http://schemas.microsoft.com/office/drawing/2014/main" id="{09DE0CC0-A299-4814-9D5C-844038B58A01}"/>
               </a:ext>
             </a:extLst>
           </p:cNvPr>
@@ -5485,7 +5485,7 @@
           <p:cNvPr id="15" name="rollback-copy">
             <a:extLst xmlns:a="http://schemas.openxmlformats.org/drawingml/2006/main">
               <a:ext uri="{FF2B5EF4-FFF2-40B4-BE49-F238E27FC236}">
-                <a16:creationId xmlns:a16="http://schemas.microsoft.com/office/drawing/2014/main" id="{46F68522-A016-4317-82DD-1A7C7A60632F}"/>
+                <a16:creationId xmlns:a16="http://schemas.microsoft.com/office/drawing/2014/main" id="{016CDBFE-B9C2-45C0-9CBD-18E9A6711A51}"/>
               </a:ext>
             </a:extLst>
           </p:cNvPr>
@@ -5539,7 +5539,7 @@
     </p:spTree>
     <p:extLst>
       <p:ext uri="{BB962C8B-B14F-4D97-AF65-F5344CB8AC3E}">
-        <p14:creationId xmlns:p14="http://schemas.microsoft.com/office/powerpoint/2010/main" val="492373279"/>
+        <p14:creationId xmlns:p14="http://schemas.microsoft.com/office/powerpoint/2010/main" val="1553381866"/>
       </p:ext>
     </p:extLst>
   </p:cSld>
@@ -5570,7 +5570,7 @@
           <p:cNvPr id="8" name="close-kicker">
             <a:extLst xmlns:a="http://schemas.openxmlformats.org/drawingml/2006/main">
               <a:ext uri="{FF2B5EF4-FFF2-40B4-BE49-F238E27FC236}">
-                <a16:creationId xmlns:a16="http://schemas.microsoft.com/office/drawing/2014/main" id="{D1BDAAFA-749F-4F68-B0B3-D02CB6F0DE94}"/>
+                <a16:creationId xmlns:a16="http://schemas.microsoft.com/office/drawing/2014/main" id="{EA8B258C-21B5-43C2-BC02-87C1BA29CE47}"/>
               </a:ext>
             </a:extLst>
           </p:cNvPr>
@@ -5626,7 +5626,7 @@
           <p:cNvPr id="2" name="close-title">
             <a:extLst xmlns:a="http://schemas.openxmlformats.org/drawingml/2006/main">
               <a:ext uri="{FF2B5EF4-FFF2-40B4-BE49-F238E27FC236}">
-                <a16:creationId xmlns:a16="http://schemas.microsoft.com/office/drawing/2014/main" id="{79087787-4218-4B4D-9D5E-876C14FB2008}"/>
+                <a16:creationId xmlns:a16="http://schemas.microsoft.com/office/drawing/2014/main" id="{2E902BC8-B852-40C5-ACEF-1D799A7C431D}"/>
               </a:ext>
             </a:extLst>
           </p:cNvPr>
@@ -5705,7 +5705,7 @@
           <p:cNvPr id="3" name="close-detail">
             <a:extLst xmlns:a="http://schemas.openxmlformats.org/drawingml/2006/main">
               <a:ext uri="{FF2B5EF4-FFF2-40B4-BE49-F238E27FC236}">
-                <a16:creationId xmlns:a16="http://schemas.microsoft.com/office/drawing/2014/main" id="{E2399564-ACA1-440B-8B67-6DA3C26096E3}"/>
+                <a16:creationId xmlns:a16="http://schemas.microsoft.com/office/drawing/2014/main" id="{C9E59AFE-6F29-4A00-B806-74BFCA691716}"/>
               </a:ext>
             </a:extLst>
           </p:cNvPr>
@@ -5784,7 +5784,7 @@
           <p:cNvPr id="4" name="close-status">
             <a:extLst xmlns:a="http://schemas.openxmlformats.org/drawingml/2006/main">
               <a:ext uri="{FF2B5EF4-FFF2-40B4-BE49-F238E27FC236}">
-                <a16:creationId xmlns:a16="http://schemas.microsoft.com/office/drawing/2014/main" id="{B0D82F77-79CC-42A8-B90C-B3D5283F24E3}"/>
+                <a16:creationId xmlns:a16="http://schemas.microsoft.com/office/drawing/2014/main" id="{B25A48F7-FCB1-4E07-8674-8BB7D011803D}"/>
               </a:ext>
             </a:extLst>
           </p:cNvPr>
@@ -5819,7 +5819,7 @@
           <p:cNvPr id="5" name="close-go">
             <a:extLst xmlns:a="http://schemas.openxmlformats.org/drawingml/2006/main">
               <a:ext uri="{FF2B5EF4-FFF2-40B4-BE49-F238E27FC236}">
-                <a16:creationId xmlns:a16="http://schemas.microsoft.com/office/drawing/2014/main" id="{4C24718F-5617-4A4E-A7C3-4A6724066465}"/>
+                <a16:creationId xmlns:a16="http://schemas.microsoft.com/office/drawing/2014/main" id="{979D0803-0056-4382-9DC6-47BEBD6114B7}"/>
               </a:ext>
             </a:extLst>
           </p:cNvPr>
@@ -5875,7 +5875,7 @@
           <p:cNvPr id="6" name="close-condition">
             <a:extLst xmlns:a="http://schemas.openxmlformats.org/drawingml/2006/main">
               <a:ext uri="{FF2B5EF4-FFF2-40B4-BE49-F238E27FC236}">
-                <a16:creationId xmlns:a16="http://schemas.microsoft.com/office/drawing/2014/main" id="{E0ED3DBD-A662-414D-BC4C-72CD92E82052}"/>
+                <a16:creationId xmlns:a16="http://schemas.microsoft.com/office/drawing/2014/main" id="{AF090212-A666-4697-AEAF-031F4D98DEF0}"/>
               </a:ext>
             </a:extLst>
           </p:cNvPr>
@@ -5931,7 +5931,7 @@
           <p:cNvPr id="7" name="close-next">
             <a:extLst xmlns:a="http://schemas.openxmlformats.org/drawingml/2006/main">
               <a:ext uri="{FF2B5EF4-FFF2-40B4-BE49-F238E27FC236}">
-                <a16:creationId xmlns:a16="http://schemas.microsoft.com/office/drawing/2014/main" id="{260A11F1-9615-4262-91E0-CDC2F64E7EC4}"/>
+                <a16:creationId xmlns:a16="http://schemas.microsoft.com/office/drawing/2014/main" id="{D2680D33-56AB-466A-B17D-FDDA9792DF99}"/>
               </a:ext>
             </a:extLst>
           </p:cNvPr>
@@ -5985,7 +5985,7 @@
     </p:spTree>
     <p:extLst>
       <p:ext uri="{BB962C8B-B14F-4D97-AF65-F5344CB8AC3E}">
-        <p14:creationId xmlns:p14="http://schemas.microsoft.com/office/powerpoint/2010/main" val="1153721952"/>
+        <p14:creationId xmlns:p14="http://schemas.microsoft.com/office/powerpoint/2010/main" val="836933390"/>
       </p:ext>
     </p:extLst>
   </p:cSld>

--- a/output/presentation/techflow-community-ui-modernization.pptx
+++ b/output/presentation/techflow-community-ui-modernization.pptx
@@ -2,19 +2,19 @@
 <file path=ppt/presentation.xml><?xml version="1.0" encoding="utf-8"?>
 <p:presentation xmlns:p="http://schemas.openxmlformats.org/presentationml/2006/main">
   <p:sldMasterIdLst>
-    <p:sldMasterId xmlns:r="http://schemas.openxmlformats.org/officeDocument/2006/relationships" id="2147483648" r:id="Rb78e8af48d82496e"/>
+    <p:sldMasterId xmlns:r="http://schemas.openxmlformats.org/officeDocument/2006/relationships" id="2147483648" r:id="R3d289dac5715463c"/>
   </p:sldMasterIdLst>
   <p:notesMasterIdLst>
-    <p:notesMasterId xmlns:r="http://schemas.openxmlformats.org/officeDocument/2006/relationships" r:id="R2e4d0efb0f124e19"/>
+    <p:notesMasterId xmlns:r="http://schemas.openxmlformats.org/officeDocument/2006/relationships" r:id="R5a63753992904720"/>
   </p:notesMasterIdLst>
   <p:sldIdLst>
-    <p:sldId xmlns:r="http://schemas.openxmlformats.org/officeDocument/2006/relationships" id="256" r:id="R586d8f44807b4cd6"/>
-    <p:sldId xmlns:r="http://schemas.openxmlformats.org/officeDocument/2006/relationships" id="257" r:id="Re6143a2aec974c4e"/>
-    <p:sldId xmlns:r="http://schemas.openxmlformats.org/officeDocument/2006/relationships" id="258" r:id="Rfb435698e4554495"/>
-    <p:sldId xmlns:r="http://schemas.openxmlformats.org/officeDocument/2006/relationships" id="259" r:id="R6c6030d32ddd425b"/>
-    <p:sldId xmlns:r="http://schemas.openxmlformats.org/officeDocument/2006/relationships" id="260" r:id="R9171fab713664173"/>
-    <p:sldId xmlns:r="http://schemas.openxmlformats.org/officeDocument/2006/relationships" id="261" r:id="Rd66f3738420a4757"/>
-    <p:sldId xmlns:r="http://schemas.openxmlformats.org/officeDocument/2006/relationships" id="262" r:id="R66728f70f92e4210"/>
+    <p:sldId xmlns:r="http://schemas.openxmlformats.org/officeDocument/2006/relationships" id="256" r:id="Rf3f2e224f62b4df2"/>
+    <p:sldId xmlns:r="http://schemas.openxmlformats.org/officeDocument/2006/relationships" id="257" r:id="R47346d6cfa0441d2"/>
+    <p:sldId xmlns:r="http://schemas.openxmlformats.org/officeDocument/2006/relationships" id="258" r:id="R85128aca2b114b12"/>
+    <p:sldId xmlns:r="http://schemas.openxmlformats.org/officeDocument/2006/relationships" id="259" r:id="R38b18c58551044bb"/>
+    <p:sldId xmlns:r="http://schemas.openxmlformats.org/officeDocument/2006/relationships" id="260" r:id="Rd74c630ae9b84172"/>
+    <p:sldId xmlns:r="http://schemas.openxmlformats.org/officeDocument/2006/relationships" id="261" r:id="Rf0f6bd67daf34aa1"/>
+    <p:sldId xmlns:r="http://schemas.openxmlformats.org/officeDocument/2006/relationships" id="262" r:id="R93afc6a75361472b"/>
   </p:sldIdLst>
   <p:sldSz cx="12192000" cy="6858000"/>
   <p:notesSz cx="6858000" cy="9144000"/>
@@ -1076,7 +1076,7 @@
   </p:cSld>
   <p:clrMap bg1="lt1" tx1="dk1" bg2="lt2" tx2="dk2" accent1="accent1" accent2="accent2" accent3="accent3" accent4="accent4" accent5="accent5" accent6="accent6" hlink="hlink" folHlink="folHlink"/>
   <p:sldLayoutIdLst>
-    <p:sldLayoutId xmlns:r="http://schemas.openxmlformats.org/officeDocument/2006/relationships" id="2147483649" r:id="R8b30979858c54e14"/>
+    <p:sldLayoutId xmlns:r="http://schemas.openxmlformats.org/officeDocument/2006/relationships" id="2147483649" r:id="Rccedec4aa97f467f"/>
   </p:sldLayoutIdLst>
   <p:txStyles>
     <p:titleStyle>
@@ -1627,7 +1627,7 @@
           <p:cNvPr id="7" name="cover-kicker">
             <a:extLst xmlns:a="http://schemas.openxmlformats.org/drawingml/2006/main">
               <a:ext uri="{FF2B5EF4-FFF2-40B4-BE49-F238E27FC236}">
-                <a16:creationId xmlns:a16="http://schemas.microsoft.com/office/drawing/2014/main" id="{64A8B3D6-56A8-4B21-BB86-E37AAA284D2C}"/>
+                <a16:creationId xmlns:a16="http://schemas.microsoft.com/office/drawing/2014/main" id="{6A0E1AE2-8141-4D8A-BB5D-1EF2067A0706}"/>
               </a:ext>
             </a:extLst>
           </p:cNvPr>
@@ -1683,7 +1683,7 @@
           <p:cNvPr id="2" name="cover-title">
             <a:extLst xmlns:a="http://schemas.openxmlformats.org/drawingml/2006/main">
               <a:ext uri="{FF2B5EF4-FFF2-40B4-BE49-F238E27FC236}">
-                <a16:creationId xmlns:a16="http://schemas.microsoft.com/office/drawing/2014/main" id="{ED45A480-310E-4EC2-86CA-4D1D3E155AFD}"/>
+                <a16:creationId xmlns:a16="http://schemas.microsoft.com/office/drawing/2014/main" id="{124B2A0A-4D5E-4B36-8D1C-7070601C79BF}"/>
               </a:ext>
             </a:extLst>
           </p:cNvPr>
@@ -1762,7 +1762,7 @@
           <p:cNvPr id="3" name="cover-subtitle">
             <a:extLst xmlns:a="http://schemas.openxmlformats.org/drawingml/2006/main">
               <a:ext uri="{FF2B5EF4-FFF2-40B4-BE49-F238E27FC236}">
-                <a16:creationId xmlns:a16="http://schemas.microsoft.com/office/drawing/2014/main" id="{903A914A-4ED6-4771-9CED-00ADB0697A37}"/>
+                <a16:creationId xmlns:a16="http://schemas.microsoft.com/office/drawing/2014/main" id="{84D2850B-0AFE-42D9-90D2-CD007796AD84}"/>
               </a:ext>
             </a:extLst>
           </p:cNvPr>
@@ -1818,7 +1818,7 @@
           <p:cNvPr id="4" name="cover-image-frame">
             <a:extLst xmlns:a="http://schemas.openxmlformats.org/drawingml/2006/main">
               <a:ext uri="{FF2B5EF4-FFF2-40B4-BE49-F238E27FC236}">
-                <a16:creationId xmlns:a16="http://schemas.microsoft.com/office/drawing/2014/main" id="{3B0254DF-3B69-468E-9FD4-62C6A66D065D}"/>
+                <a16:creationId xmlns:a16="http://schemas.microsoft.com/office/drawing/2014/main" id="{F664099D-0A70-40DB-A9CC-E74DAC987CF5}"/>
               </a:ext>
             </a:extLst>
           </p:cNvPr>
@@ -1857,7 +1857,7 @@
           <p:nvPr/>
         </p:nvPicPr>
         <p:blipFill>
-          <a:blip xmlns:r="http://schemas.openxmlformats.org/officeDocument/2006/relationships" xmlns:a="http://schemas.openxmlformats.org/drawingml/2006/main" r:embed="Rded17299b08d48e8"/>
+          <a:blip xmlns:r="http://schemas.openxmlformats.org/officeDocument/2006/relationships" xmlns:a="http://schemas.openxmlformats.org/drawingml/2006/main" r:embed="Rec128fe052de40fb"/>
           <a:stretch xmlns:a="http://schemas.openxmlformats.org/drawingml/2006/main"/>
         </p:blipFill>
         <p:spPr>
@@ -1877,7 +1877,7 @@
           <p:cNvPr id="6" name="cover-status">
             <a:extLst xmlns:a="http://schemas.openxmlformats.org/drawingml/2006/main">
               <a:ext uri="{FF2B5EF4-FFF2-40B4-BE49-F238E27FC236}">
-                <a16:creationId xmlns:a16="http://schemas.microsoft.com/office/drawing/2014/main" id="{26357597-2A02-4C01-A36D-33AFC97A83EF}"/>
+                <a16:creationId xmlns:a16="http://schemas.microsoft.com/office/drawing/2014/main" id="{E92B467F-7C9A-44D9-A263-6761D18541B6}"/>
               </a:ext>
             </a:extLst>
           </p:cNvPr>
@@ -1931,7 +1931,7 @@
     </p:spTree>
     <p:extLst>
       <p:ext uri="{BB962C8B-B14F-4D97-AF65-F5344CB8AC3E}">
-        <p14:creationId xmlns:p14="http://schemas.microsoft.com/office/powerpoint/2010/main" val="1780637165"/>
+        <p14:creationId xmlns:p14="http://schemas.microsoft.com/office/powerpoint/2010/main" val="801462801"/>
       </p:ext>
     </p:extLst>
   </p:cSld>
@@ -1962,7 +1962,7 @@
           <p:cNvPr id="9" name="title-2">
             <a:extLst xmlns:a="http://schemas.openxmlformats.org/drawingml/2006/main">
               <a:ext uri="{FF2B5EF4-FFF2-40B4-BE49-F238E27FC236}">
-                <a16:creationId xmlns:a16="http://schemas.microsoft.com/office/drawing/2014/main" id="{2ED890D1-9E91-4F2D-836A-B448CCE899DE}"/>
+                <a16:creationId xmlns:a16="http://schemas.microsoft.com/office/drawing/2014/main" id="{E682403E-9681-42A3-B766-F5D321C05D5C}"/>
               </a:ext>
             </a:extLst>
           </p:cNvPr>
@@ -2018,7 +2018,7 @@
           <p:cNvPr id="2" name="page-2">
             <a:extLst xmlns:a="http://schemas.openxmlformats.org/drawingml/2006/main">
               <a:ext uri="{FF2B5EF4-FFF2-40B4-BE49-F238E27FC236}">
-                <a16:creationId xmlns:a16="http://schemas.microsoft.com/office/drawing/2014/main" id="{FADC1203-3BA2-4020-95D4-BD268B7D38EF}"/>
+                <a16:creationId xmlns:a16="http://schemas.microsoft.com/office/drawing/2014/main" id="{F22B46BE-E734-4392-A3D5-79F00C048310}"/>
               </a:ext>
             </a:extLst>
           </p:cNvPr>
@@ -2074,7 +2074,7 @@
           <p:cNvPr id="3" name="before-label">
             <a:extLst xmlns:a="http://schemas.openxmlformats.org/drawingml/2006/main">
               <a:ext uri="{FF2B5EF4-FFF2-40B4-BE49-F238E27FC236}">
-                <a16:creationId xmlns:a16="http://schemas.microsoft.com/office/drawing/2014/main" id="{AABD7FF3-0411-49D0-B44B-62E24993EE04}"/>
+                <a16:creationId xmlns:a16="http://schemas.microsoft.com/office/drawing/2014/main" id="{93AB476D-7088-40F5-B8F7-033C16EA648F}"/>
               </a:ext>
             </a:extLst>
           </p:cNvPr>
@@ -2130,7 +2130,7 @@
           <p:cNvPr id="4" name="after-label">
             <a:extLst xmlns:a="http://schemas.openxmlformats.org/drawingml/2006/main">
               <a:ext uri="{FF2B5EF4-FFF2-40B4-BE49-F238E27FC236}">
-                <a16:creationId xmlns:a16="http://schemas.microsoft.com/office/drawing/2014/main" id="{1B8EA5CA-A506-4FAC-87C6-576712A27965}"/>
+                <a16:creationId xmlns:a16="http://schemas.microsoft.com/office/drawing/2014/main" id="{6D383DBB-B7FB-4A43-8069-01FB7F791900}"/>
               </a:ext>
             </a:extLst>
           </p:cNvPr>
@@ -2190,7 +2190,7 @@
           <p:nvPr/>
         </p:nvPicPr>
         <p:blipFill>
-          <a:blip xmlns:r="http://schemas.openxmlformats.org/officeDocument/2006/relationships" xmlns:a="http://schemas.openxmlformats.org/drawingml/2006/main" r:embed="R2c89418c9b4d401e"/>
+          <a:blip xmlns:r="http://schemas.openxmlformats.org/officeDocument/2006/relationships" xmlns:a="http://schemas.openxmlformats.org/drawingml/2006/main" r:embed="Rc34234274fbb45c3"/>
           <a:stretch xmlns:a="http://schemas.openxmlformats.org/drawingml/2006/main"/>
         </p:blipFill>
         <p:spPr>
@@ -2214,7 +2214,7 @@
           <p:nvPr/>
         </p:nvPicPr>
         <p:blipFill>
-          <a:blip xmlns:r="http://schemas.openxmlformats.org/officeDocument/2006/relationships" xmlns:a="http://schemas.openxmlformats.org/drawingml/2006/main" r:embed="R183eb4a8455540e0"/>
+          <a:blip xmlns:r="http://schemas.openxmlformats.org/officeDocument/2006/relationships" xmlns:a="http://schemas.openxmlformats.org/drawingml/2006/main" r:embed="R4fc30fecaf514fcf"/>
           <a:stretch xmlns:a="http://schemas.openxmlformats.org/drawingml/2006/main"/>
         </p:blipFill>
         <p:spPr>
@@ -2234,7 +2234,7 @@
           <p:cNvPr id="7" name="before-copy">
             <a:extLst xmlns:a="http://schemas.openxmlformats.org/drawingml/2006/main">
               <a:ext uri="{FF2B5EF4-FFF2-40B4-BE49-F238E27FC236}">
-                <a16:creationId xmlns:a16="http://schemas.microsoft.com/office/drawing/2014/main" id="{6B82ABC1-E485-487E-A1A2-DA204ED337FA}"/>
+                <a16:creationId xmlns:a16="http://schemas.microsoft.com/office/drawing/2014/main" id="{AAD1D29B-5DE8-4131-BC01-9DEC41B2ABF0}"/>
               </a:ext>
             </a:extLst>
           </p:cNvPr>
@@ -2290,7 +2290,7 @@
           <p:cNvPr id="8" name="after-copy">
             <a:extLst xmlns:a="http://schemas.openxmlformats.org/drawingml/2006/main">
               <a:ext uri="{FF2B5EF4-FFF2-40B4-BE49-F238E27FC236}">
-                <a16:creationId xmlns:a16="http://schemas.microsoft.com/office/drawing/2014/main" id="{96ED2411-529F-4FD5-8EB8-9431CAEB402D}"/>
+                <a16:creationId xmlns:a16="http://schemas.microsoft.com/office/drawing/2014/main" id="{754AA158-47C2-4550-ABE9-A81B06E6F52B}"/>
               </a:ext>
             </a:extLst>
           </p:cNvPr>
@@ -2344,7 +2344,7 @@
     </p:spTree>
     <p:extLst>
       <p:ext uri="{BB962C8B-B14F-4D97-AF65-F5344CB8AC3E}">
-        <p14:creationId xmlns:p14="http://schemas.microsoft.com/office/powerpoint/2010/main" val="1749192529"/>
+        <p14:creationId xmlns:p14="http://schemas.microsoft.com/office/powerpoint/2010/main" val="873590176"/>
       </p:ext>
     </p:extLst>
   </p:cSld>
@@ -2375,7 +2375,7 @@
           <p:cNvPr id="15" name="title-3">
             <a:extLst xmlns:a="http://schemas.openxmlformats.org/drawingml/2006/main">
               <a:ext uri="{FF2B5EF4-FFF2-40B4-BE49-F238E27FC236}">
-                <a16:creationId xmlns:a16="http://schemas.microsoft.com/office/drawing/2014/main" id="{D67AB2C1-0C42-48DD-B48C-05B537B5BA07}"/>
+                <a16:creationId xmlns:a16="http://schemas.microsoft.com/office/drawing/2014/main" id="{C37C2F42-6B54-4121-9AB6-858B07747FFB}"/>
               </a:ext>
             </a:extLst>
           </p:cNvPr>
@@ -2431,7 +2431,7 @@
           <p:cNvPr id="2" name="page-3">
             <a:extLst xmlns:a="http://schemas.openxmlformats.org/drawingml/2006/main">
               <a:ext uri="{FF2B5EF4-FFF2-40B4-BE49-F238E27FC236}">
-                <a16:creationId xmlns:a16="http://schemas.microsoft.com/office/drawing/2014/main" id="{13B6FE40-ADFE-48C6-8306-0B2C0FC66D3A}"/>
+                <a16:creationId xmlns:a16="http://schemas.microsoft.com/office/drawing/2014/main" id="{B2276FE2-CE0C-4F87-8FAC-4194A4624882}"/>
               </a:ext>
             </a:extLst>
           </p:cNvPr>
@@ -2487,7 +2487,7 @@
           <p:cNvPr id="3" name="state-0">
             <a:extLst xmlns:a="http://schemas.openxmlformats.org/drawingml/2006/main">
               <a:ext uri="{FF2B5EF4-FFF2-40B4-BE49-F238E27FC236}">
-                <a16:creationId xmlns:a16="http://schemas.microsoft.com/office/drawing/2014/main" id="{43E71CFB-B1C0-41EA-A70B-458E65FA60A8}"/>
+                <a16:creationId xmlns:a16="http://schemas.microsoft.com/office/drawing/2014/main" id="{114BF808-C15E-484F-9CE7-174AEAAB50B9}"/>
               </a:ext>
             </a:extLst>
           </p:cNvPr>
@@ -2522,7 +2522,7 @@
           <p:cNvPr id="4" name="state-label-0">
             <a:extLst xmlns:a="http://schemas.openxmlformats.org/drawingml/2006/main">
               <a:ext uri="{FF2B5EF4-FFF2-40B4-BE49-F238E27FC236}">
-                <a16:creationId xmlns:a16="http://schemas.microsoft.com/office/drawing/2014/main" id="{D22F51B7-2440-4578-94B8-871C7294178A}"/>
+                <a16:creationId xmlns:a16="http://schemas.microsoft.com/office/drawing/2014/main" id="{D72A2202-E576-4375-BEA5-E932B8E9CB46}"/>
               </a:ext>
             </a:extLst>
           </p:cNvPr>
@@ -2578,7 +2578,7 @@
           <p:cNvPr id="5" name="state-detail-0">
             <a:extLst xmlns:a="http://schemas.openxmlformats.org/drawingml/2006/main">
               <a:ext uri="{FF2B5EF4-FFF2-40B4-BE49-F238E27FC236}">
-                <a16:creationId xmlns:a16="http://schemas.microsoft.com/office/drawing/2014/main" id="{7DD4558B-7FC7-4218-9893-F3240433F174}"/>
+                <a16:creationId xmlns:a16="http://schemas.microsoft.com/office/drawing/2014/main" id="{1B2929B8-A873-400C-86C2-C208A7C29DD1}"/>
               </a:ext>
             </a:extLst>
           </p:cNvPr>
@@ -2634,7 +2634,7 @@
           <p:cNvPr id="6" name="state-1">
             <a:extLst xmlns:a="http://schemas.openxmlformats.org/drawingml/2006/main">
               <a:ext uri="{FF2B5EF4-FFF2-40B4-BE49-F238E27FC236}">
-                <a16:creationId xmlns:a16="http://schemas.microsoft.com/office/drawing/2014/main" id="{023F7870-19BB-4303-A5DE-008DD00F54C5}"/>
+                <a16:creationId xmlns:a16="http://schemas.microsoft.com/office/drawing/2014/main" id="{DB03F58E-DEA0-4CF3-ADD0-818AD6CC5AD4}"/>
               </a:ext>
             </a:extLst>
           </p:cNvPr>
@@ -2669,7 +2669,7 @@
           <p:cNvPr id="7" name="state-label-1">
             <a:extLst xmlns:a="http://schemas.openxmlformats.org/drawingml/2006/main">
               <a:ext uri="{FF2B5EF4-FFF2-40B4-BE49-F238E27FC236}">
-                <a16:creationId xmlns:a16="http://schemas.microsoft.com/office/drawing/2014/main" id="{665B9FDB-D343-4FA7-AF80-B99FA0945AAF}"/>
+                <a16:creationId xmlns:a16="http://schemas.microsoft.com/office/drawing/2014/main" id="{B53D863D-8110-405C-BAFD-06EDE0C50D60}"/>
               </a:ext>
             </a:extLst>
           </p:cNvPr>
@@ -2725,7 +2725,7 @@
           <p:cNvPr id="8" name="state-detail-1">
             <a:extLst xmlns:a="http://schemas.openxmlformats.org/drawingml/2006/main">
               <a:ext uri="{FF2B5EF4-FFF2-40B4-BE49-F238E27FC236}">
-                <a16:creationId xmlns:a16="http://schemas.microsoft.com/office/drawing/2014/main" id="{7E4DF82C-CA0F-4499-8571-DFC864DA6F5C}"/>
+                <a16:creationId xmlns:a16="http://schemas.microsoft.com/office/drawing/2014/main" id="{DBF71906-FCF0-4067-96A0-DA994AFD8CEF}"/>
               </a:ext>
             </a:extLst>
           </p:cNvPr>
@@ -2781,7 +2781,7 @@
           <p:cNvPr id="9" name="state-2">
             <a:extLst xmlns:a="http://schemas.openxmlformats.org/drawingml/2006/main">
               <a:ext uri="{FF2B5EF4-FFF2-40B4-BE49-F238E27FC236}">
-                <a16:creationId xmlns:a16="http://schemas.microsoft.com/office/drawing/2014/main" id="{39319E1F-ACFB-403B-B63D-ED60135B2AA4}"/>
+                <a16:creationId xmlns:a16="http://schemas.microsoft.com/office/drawing/2014/main" id="{AA39FFA4-4360-42F7-9C46-79A6AC40D92F}"/>
               </a:ext>
             </a:extLst>
           </p:cNvPr>
@@ -2816,7 +2816,7 @@
           <p:cNvPr id="10" name="state-label-2">
             <a:extLst xmlns:a="http://schemas.openxmlformats.org/drawingml/2006/main">
               <a:ext uri="{FF2B5EF4-FFF2-40B4-BE49-F238E27FC236}">
-                <a16:creationId xmlns:a16="http://schemas.microsoft.com/office/drawing/2014/main" id="{A3C9F546-443A-465F-9563-9EF193C86DC1}"/>
+                <a16:creationId xmlns:a16="http://schemas.microsoft.com/office/drawing/2014/main" id="{C269C019-D6E1-44DC-853C-75668B130779}"/>
               </a:ext>
             </a:extLst>
           </p:cNvPr>
@@ -2872,7 +2872,7 @@
           <p:cNvPr id="11" name="state-detail-2">
             <a:extLst xmlns:a="http://schemas.openxmlformats.org/drawingml/2006/main">
               <a:ext uri="{FF2B5EF4-FFF2-40B4-BE49-F238E27FC236}">
-                <a16:creationId xmlns:a16="http://schemas.microsoft.com/office/drawing/2014/main" id="{35D54D01-639C-4876-AB4F-A284BC4D6BBC}"/>
+                <a16:creationId xmlns:a16="http://schemas.microsoft.com/office/drawing/2014/main" id="{224680BB-1527-472E-9473-566F6F4AF335}"/>
               </a:ext>
             </a:extLst>
           </p:cNvPr>
@@ -2928,7 +2928,7 @@
           <p:cNvPr id="12" name="state-3">
             <a:extLst xmlns:a="http://schemas.openxmlformats.org/drawingml/2006/main">
               <a:ext uri="{FF2B5EF4-FFF2-40B4-BE49-F238E27FC236}">
-                <a16:creationId xmlns:a16="http://schemas.microsoft.com/office/drawing/2014/main" id="{38245A61-FA4E-43C8-9349-D4A51EE4942D}"/>
+                <a16:creationId xmlns:a16="http://schemas.microsoft.com/office/drawing/2014/main" id="{1ABFA78A-C8FF-4506-B579-635CE39CF70D}"/>
               </a:ext>
             </a:extLst>
           </p:cNvPr>
@@ -2963,7 +2963,7 @@
           <p:cNvPr id="13" name="state-label-3">
             <a:extLst xmlns:a="http://schemas.openxmlformats.org/drawingml/2006/main">
               <a:ext uri="{FF2B5EF4-FFF2-40B4-BE49-F238E27FC236}">
-                <a16:creationId xmlns:a16="http://schemas.microsoft.com/office/drawing/2014/main" id="{AF2CC4F5-17AB-4688-9BDF-FC94505BA457}"/>
+                <a16:creationId xmlns:a16="http://schemas.microsoft.com/office/drawing/2014/main" id="{298AC384-1A5B-43B1-8430-9DFF7077752A}"/>
               </a:ext>
             </a:extLst>
           </p:cNvPr>
@@ -3019,7 +3019,7 @@
           <p:cNvPr id="14" name="state-detail-3">
             <a:extLst xmlns:a="http://schemas.openxmlformats.org/drawingml/2006/main">
               <a:ext uri="{FF2B5EF4-FFF2-40B4-BE49-F238E27FC236}">
-                <a16:creationId xmlns:a16="http://schemas.microsoft.com/office/drawing/2014/main" id="{0582A4AC-E331-4488-9C3F-EB98A8C6AB1D}"/>
+                <a16:creationId xmlns:a16="http://schemas.microsoft.com/office/drawing/2014/main" id="{ABFD9291-295B-4FCF-9D69-C15FEA59C81F}"/>
               </a:ext>
             </a:extLst>
           </p:cNvPr>
@@ -3073,7 +3073,7 @@
     </p:spTree>
     <p:extLst>
       <p:ext uri="{BB962C8B-B14F-4D97-AF65-F5344CB8AC3E}">
-        <p14:creationId xmlns:p14="http://schemas.microsoft.com/office/powerpoint/2010/main" val="897282157"/>
+        <p14:creationId xmlns:p14="http://schemas.microsoft.com/office/powerpoint/2010/main" val="1398717328"/>
       </p:ext>
     </p:extLst>
   </p:cSld>
@@ -3104,7 +3104,7 @@
           <p:cNvPr id="11" name="title-4">
             <a:extLst xmlns:a="http://schemas.openxmlformats.org/drawingml/2006/main">
               <a:ext uri="{FF2B5EF4-FFF2-40B4-BE49-F238E27FC236}">
-                <a16:creationId xmlns:a16="http://schemas.microsoft.com/office/drawing/2014/main" id="{D7F2A7EE-C2B0-4F95-8F62-78CAF893DDF0}"/>
+                <a16:creationId xmlns:a16="http://schemas.microsoft.com/office/drawing/2014/main" id="{BEC821CE-0705-4BC0-92BF-DB54CADD3462}"/>
               </a:ext>
             </a:extLst>
           </p:cNvPr>
@@ -3150,7 +3150,7 @@
                 <a:ea typeface="Malgun Gothic"/>
                 <a:cs typeface="Malgun Gothic"/>
               </a:rPr>
-              <a:t>390px 모바일과 한글 화면을 검증했습니다</a:t>
+              <a:t>정렬과 작업 버튼도 읽기 흐름에 맞췄습니다</a:t>
             </a:r>
           </a:p>
         </p:txBody>
@@ -3160,7 +3160,7 @@
           <p:cNvPr id="2" name="page-4">
             <a:extLst xmlns:a="http://schemas.openxmlformats.org/drawingml/2006/main">
               <a:ext uri="{FF2B5EF4-FFF2-40B4-BE49-F238E27FC236}">
-                <a16:creationId xmlns:a16="http://schemas.microsoft.com/office/drawing/2014/main" id="{1F20B655-F3AE-407B-8BFA-F2EF3741DD45}"/>
+                <a16:creationId xmlns:a16="http://schemas.microsoft.com/office/drawing/2014/main" id="{D262422D-8F74-46F3-9CF9-3C883E5A0B98}"/>
               </a:ext>
             </a:extLst>
           </p:cNvPr>
@@ -3220,7 +3220,7 @@
           <p:nvPr/>
         </p:nvPicPr>
         <p:blipFill>
-          <a:blip xmlns:r="http://schemas.openxmlformats.org/officeDocument/2006/relationships" xmlns:a="http://schemas.openxmlformats.org/drawingml/2006/main" r:embed="R161bd5b70dac460f"/>
+          <a:blip xmlns:r="http://schemas.openxmlformats.org/officeDocument/2006/relationships" xmlns:a="http://schemas.openxmlformats.org/drawingml/2006/main" r:embed="R4130c8acc2b64afe"/>
           <a:stretch xmlns:a="http://schemas.openxmlformats.org/drawingml/2006/main"/>
         </p:blipFill>
         <p:spPr>
@@ -3240,19 +3240,19 @@
           <p:cNvPr id="4" name="mobile-fact-1">
             <a:extLst xmlns:a="http://schemas.openxmlformats.org/drawingml/2006/main">
               <a:ext uri="{FF2B5EF4-FFF2-40B4-BE49-F238E27FC236}">
-                <a16:creationId xmlns:a16="http://schemas.microsoft.com/office/drawing/2014/main" id="{F9993767-D5E7-45F3-B8C2-65F7E3613031}"/>
-              </a:ext>
-            </a:extLst>
-          </p:cNvPr>
-          <p:cNvSpPr>
-            <a:spLocks xmlns:a="http://schemas.openxmlformats.org/drawingml/2006/main" noGrp="1"/>
-          </p:cNvSpPr>
-          <p:nvPr/>
-        </p:nvSpPr>
-        <p:spPr>
-          <a:xfrm xmlns:a="http://schemas.openxmlformats.org/drawingml/2006/main">
-            <a:off x="4953000" y="1695450"/>
-            <a:ext cx="2000250" cy="666750"/>
+                <a16:creationId xmlns:a16="http://schemas.microsoft.com/office/drawing/2014/main" id="{09D6411F-335B-40CB-980D-4B476E93B012}"/>
+              </a:ext>
+            </a:extLst>
+          </p:cNvPr>
+          <p:cNvSpPr>
+            <a:spLocks xmlns:a="http://schemas.openxmlformats.org/drawingml/2006/main" noGrp="1"/>
+          </p:cNvSpPr>
+          <p:nvPr/>
+        </p:nvSpPr>
+        <p:spPr>
+          <a:xfrm xmlns:a="http://schemas.openxmlformats.org/drawingml/2006/main">
+            <a:off x="4762500" y="1695450"/>
+            <a:ext cx="2333625" cy="666750"/>
           </a:xfrm>
           <a:prstGeom xmlns:a="http://schemas.openxmlformats.org/drawingml/2006/main" prst="rect">
             <a:avLst/>
@@ -3268,7 +3268,7 @@
           <a:lstStyle xmlns:a="http://schemas.openxmlformats.org/drawingml/2006/main"/>
           <a:p xmlns:a="http://schemas.openxmlformats.org/drawingml/2006/main">
             <a:pPr algn="l">
-              <a:defRPr sz="3900" b="1">
+              <a:defRPr sz="3600" b="1">
                 <a:solidFill>
                   <a:srgbClr val="155EEF"/>
                 </a:solidFill>
@@ -3278,7 +3278,7 @@
               </a:defRPr>
             </a:pPr>
             <a:r>
-              <a:rPr sz="3900" b="1">
+              <a:rPr sz="3600" b="1">
                 <a:solidFill>
                   <a:srgbClr val="155EEF"/>
                 </a:solidFill>
@@ -3286,7 +3286,7 @@
                 <a:ea typeface="Malgun Gothic"/>
                 <a:cs typeface="Malgun Gothic"/>
               </a:rPr>
-              <a:t>2줄</a:t>
+              <a:t>19/17px</a:t>
             </a:r>
           </a:p>
         </p:txBody>
@@ -3296,7 +3296,7 @@
           <p:cNvPr id="5" name="mobile-desc-1">
             <a:extLst xmlns:a="http://schemas.openxmlformats.org/drawingml/2006/main">
               <a:ext uri="{FF2B5EF4-FFF2-40B4-BE49-F238E27FC236}">
-                <a16:creationId xmlns:a16="http://schemas.microsoft.com/office/drawing/2014/main" id="{C4017E73-C77E-4179-89B3-7B4264BD35D1}"/>
+                <a16:creationId xmlns:a16="http://schemas.microsoft.com/office/drawing/2014/main" id="{7EF65A59-6E66-43CF-A7DC-2019E638A9E1}"/>
               </a:ext>
             </a:extLst>
           </p:cNvPr>
@@ -3308,7 +3308,7 @@
         <p:spPr>
           <a:xfrm xmlns:a="http://schemas.openxmlformats.org/drawingml/2006/main">
             <a:off x="7124700" y="1847850"/>
-            <a:ext cx="3238500" cy="419100"/>
+            <a:ext cx="4095750" cy="419100"/>
           </a:xfrm>
           <a:prstGeom xmlns:a="http://schemas.openxmlformats.org/drawingml/2006/main" prst="rect">
             <a:avLst/>
@@ -3324,7 +3324,7 @@
           <a:lstStyle xmlns:a="http://schemas.openxmlformats.org/drawingml/2006/main"/>
           <a:p xmlns:a="http://schemas.openxmlformats.org/drawingml/2006/main">
             <a:pPr algn="l">
-              <a:defRPr sz="1800" b="0">
+              <a:defRPr sz="1650" b="0">
                 <a:solidFill>
                   <a:srgbClr val="52647D"/>
                 </a:solidFill>
@@ -3334,7 +3334,7 @@
               </a:defRPr>
             </a:pPr>
             <a:r>
-              <a:rPr sz="1800" b="0">
+              <a:rPr sz="1650" b="0">
                 <a:solidFill>
                   <a:srgbClr val="52647D"/>
                 </a:solidFill>
@@ -3342,7 +3342,7 @@
                 <a:ea typeface="Malgun Gothic"/>
                 <a:cs typeface="Malgun Gothic"/>
               </a:rPr>
-              <a:t>토의 제목</a:t>
+              <a:t>Desktop/Mobile 대칭 여백</a:t>
             </a:r>
           </a:p>
         </p:txBody>
@@ -3352,7 +3352,7 @@
           <p:cNvPr id="6" name="mobile-fact-2">
             <a:extLst xmlns:a="http://schemas.openxmlformats.org/drawingml/2006/main">
               <a:ext uri="{FF2B5EF4-FFF2-40B4-BE49-F238E27FC236}">
-                <a16:creationId xmlns:a16="http://schemas.microsoft.com/office/drawing/2014/main" id="{2CAEF345-CB70-47E8-B0C2-8801C03A4A9D}"/>
+                <a16:creationId xmlns:a16="http://schemas.microsoft.com/office/drawing/2014/main" id="{F1746BC5-A36C-4DE7-81AF-A63EC41232F7}"/>
               </a:ext>
             </a:extLst>
           </p:cNvPr>
@@ -3398,7 +3398,7 @@
                 <a:ea typeface="Malgun Gothic"/>
                 <a:cs typeface="Malgun Gothic"/>
               </a:rPr>
-              <a:t>44px</a:t>
+              <a:t>0px</a:t>
             </a:r>
           </a:p>
         </p:txBody>
@@ -3408,7 +3408,7 @@
           <p:cNvPr id="7" name="mobile-desc-2">
             <a:extLst xmlns:a="http://schemas.openxmlformats.org/drawingml/2006/main">
               <a:ext uri="{FF2B5EF4-FFF2-40B4-BE49-F238E27FC236}">
-                <a16:creationId xmlns:a16="http://schemas.microsoft.com/office/drawing/2014/main" id="{E1A8B56F-9A9F-4AA0-B8E7-15B05197369E}"/>
+                <a16:creationId xmlns:a16="http://schemas.microsoft.com/office/drawing/2014/main" id="{0DE1872B-12D7-4C84-BE84-B0BD4D321862}"/>
               </a:ext>
             </a:extLst>
           </p:cNvPr>
@@ -3420,7 +3420,7 @@
         <p:spPr>
           <a:xfrm xmlns:a="http://schemas.openxmlformats.org/drawingml/2006/main">
             <a:off x="7124700" y="3009900"/>
-            <a:ext cx="3238500" cy="419100"/>
+            <a:ext cx="3714750" cy="419100"/>
           </a:xfrm>
           <a:prstGeom xmlns:a="http://schemas.openxmlformats.org/drawingml/2006/main" prst="rect">
             <a:avLst/>
@@ -3454,7 +3454,7 @@
                 <a:ea typeface="Malgun Gothic"/>
                 <a:cs typeface="Malgun Gothic"/>
               </a:rPr>
-              <a:t>주요 조작 영역</a:t>
+              <a:t>아바타·제목 중심 차이</a:t>
             </a:r>
           </a:p>
         </p:txBody>
@@ -3464,7 +3464,7 @@
           <p:cNvPr id="8" name="mobile-fact-3">
             <a:extLst xmlns:a="http://schemas.openxmlformats.org/drawingml/2006/main">
               <a:ext uri="{FF2B5EF4-FFF2-40B4-BE49-F238E27FC236}">
-                <a16:creationId xmlns:a16="http://schemas.microsoft.com/office/drawing/2014/main" id="{9704A82C-C2A4-49A7-AEED-4554A524FE31}"/>
+                <a16:creationId xmlns:a16="http://schemas.microsoft.com/office/drawing/2014/main" id="{816C6C50-3955-496F-BC95-33AAE6BD71DD}"/>
               </a:ext>
             </a:extLst>
           </p:cNvPr>
@@ -3510,7 +3510,7 @@
                 <a:ea typeface="Malgun Gothic"/>
                 <a:cs typeface="Malgun Gothic"/>
               </a:rPr>
-              <a:t>0건</a:t>
+              <a:t>40px</a:t>
             </a:r>
           </a:p>
         </p:txBody>
@@ -3520,7 +3520,7 @@
           <p:cNvPr id="9" name="mobile-desc-3">
             <a:extLst xmlns:a="http://schemas.openxmlformats.org/drawingml/2006/main">
               <a:ext uri="{FF2B5EF4-FFF2-40B4-BE49-F238E27FC236}">
-                <a16:creationId xmlns:a16="http://schemas.microsoft.com/office/drawing/2014/main" id="{E1F35D93-E274-4481-9D41-08E8E721431B}"/>
+                <a16:creationId xmlns:a16="http://schemas.microsoft.com/office/drawing/2014/main" id="{2F113371-1F20-49F1-91BF-0D1587E32DC8}"/>
               </a:ext>
             </a:extLst>
           </p:cNvPr>
@@ -3566,7 +3566,7 @@
                 <a:ea typeface="Malgun Gothic"/>
                 <a:cs typeface="Malgun Gothic"/>
               </a:rPr>
-              <a:t>원문 core.* 키 노출</a:t>
+              <a:t>상시 답장 아이콘</a:t>
             </a:r>
           </a:p>
         </p:txBody>
@@ -3576,19 +3576,19 @@
           <p:cNvPr id="10" name="mobile-foot">
             <a:extLst xmlns:a="http://schemas.openxmlformats.org/drawingml/2006/main">
               <a:ext uri="{FF2B5EF4-FFF2-40B4-BE49-F238E27FC236}">
-                <a16:creationId xmlns:a16="http://schemas.microsoft.com/office/drawing/2014/main" id="{9CA7FCF4-021C-4706-BB1D-F5BFF353362B}"/>
-              </a:ext>
-            </a:extLst>
-          </p:cNvPr>
-          <p:cNvSpPr>
-            <a:spLocks xmlns:a="http://schemas.openxmlformats.org/drawingml/2006/main" noGrp="1"/>
-          </p:cNvSpPr>
-          <p:nvPr/>
-        </p:nvSpPr>
-        <p:spPr>
-          <a:xfrm xmlns:a="http://schemas.openxmlformats.org/drawingml/2006/main">
-            <a:off x="4953000" y="5391150"/>
-            <a:ext cx="5810250" cy="495300"/>
+                <a16:creationId xmlns:a16="http://schemas.microsoft.com/office/drawing/2014/main" id="{54218DC0-40E3-4663-A3DF-EF44F843582D}"/>
+              </a:ext>
+            </a:extLst>
+          </p:cNvPr>
+          <p:cNvSpPr>
+            <a:spLocks xmlns:a="http://schemas.openxmlformats.org/drawingml/2006/main" noGrp="1"/>
+          </p:cNvSpPr>
+          <p:nvPr/>
+        </p:nvSpPr>
+        <p:spPr>
+          <a:xfrm xmlns:a="http://schemas.openxmlformats.org/drawingml/2006/main">
+            <a:off x="4762500" y="5391150"/>
+            <a:ext cx="6477000" cy="495300"/>
           </a:xfrm>
           <a:prstGeom xmlns:a="http://schemas.openxmlformats.org/drawingml/2006/main" prst="rect">
             <a:avLst/>
@@ -3604,7 +3604,7 @@
           <a:lstStyle xmlns:a="http://schemas.openxmlformats.org/drawingml/2006/main"/>
           <a:p xmlns:a="http://schemas.openxmlformats.org/drawingml/2006/main">
             <a:pPr algn="l">
-              <a:defRPr sz="1800" b="1">
+              <a:defRPr sz="1725" b="1">
                 <a:solidFill>
                   <a:srgbClr val="15253E"/>
                 </a:solidFill>
@@ -3614,7 +3614,7 @@
               </a:defRPr>
             </a:pPr>
             <a:r>
-              <a:rPr sz="1800" b="1">
+              <a:rPr sz="1725" b="1">
                 <a:solidFill>
                   <a:srgbClr val="15253E"/>
                 </a:solidFill>
@@ -3622,7 +3622,7 @@
                 <a:ea typeface="Malgun Gothic"/>
                 <a:cs typeface="Malgun Gothic"/>
               </a:rPr>
-              <a:t>검색 · 로그인 · 홈 · 목록 실제 브라우저 Smoke 통과</a:t>
+              <a:t>비로그인 상태는 회색 비활성 · Desktop/Mobile 실제 검증</a:t>
             </a:r>
           </a:p>
         </p:txBody>
@@ -3630,7 +3630,7 @@
     </p:spTree>
     <p:extLst>
       <p:ext uri="{BB962C8B-B14F-4D97-AF65-F5344CB8AC3E}">
-        <p14:creationId xmlns:p14="http://schemas.microsoft.com/office/powerpoint/2010/main" val="1132278332"/>
+        <p14:creationId xmlns:p14="http://schemas.microsoft.com/office/powerpoint/2010/main" val="1900703019"/>
       </p:ext>
     </p:extLst>
   </p:cSld>
@@ -3661,7 +3661,7 @@
           <p:cNvPr id="20" name="title-5">
             <a:extLst xmlns:a="http://schemas.openxmlformats.org/drawingml/2006/main">
               <a:ext uri="{FF2B5EF4-FFF2-40B4-BE49-F238E27FC236}">
-                <a16:creationId xmlns:a16="http://schemas.microsoft.com/office/drawing/2014/main" id="{C929FA20-84E2-41AD-843B-9850742CDB15}"/>
+                <a16:creationId xmlns:a16="http://schemas.microsoft.com/office/drawing/2014/main" id="{1B3C5397-287D-4853-AF72-D2728BBCCE4E}"/>
               </a:ext>
             </a:extLst>
           </p:cNvPr>
@@ -3717,7 +3717,7 @@
           <p:cNvPr id="2" name="page-5">
             <a:extLst xmlns:a="http://schemas.openxmlformats.org/drawingml/2006/main">
               <a:ext uri="{FF2B5EF4-FFF2-40B4-BE49-F238E27FC236}">
-                <a16:creationId xmlns:a16="http://schemas.microsoft.com/office/drawing/2014/main" id="{773A7A95-750E-4060-9B94-9A3F830884C9}"/>
+                <a16:creationId xmlns:a16="http://schemas.microsoft.com/office/drawing/2014/main" id="{45BC8912-A3D0-4A6F-9907-637E72259167}"/>
               </a:ext>
             </a:extLst>
           </p:cNvPr>
@@ -3773,7 +3773,7 @@
           <p:cNvPr id="3" name="arrow-0">
             <a:extLst xmlns:a="http://schemas.openxmlformats.org/drawingml/2006/main">
               <a:ext uri="{FF2B5EF4-FFF2-40B4-BE49-F238E27FC236}">
-                <a16:creationId xmlns:a16="http://schemas.microsoft.com/office/drawing/2014/main" id="{860F500C-B677-4290-86C7-D0A6960717D0}"/>
+                <a16:creationId xmlns:a16="http://schemas.microsoft.com/office/drawing/2014/main" id="{8F1034F4-056A-4EBA-B354-E6FFD365B097}"/>
               </a:ext>
             </a:extLst>
           </p:cNvPr>
@@ -3829,7 +3829,7 @@
           <p:cNvPr id="4" name="phase-0">
             <a:extLst xmlns:a="http://schemas.openxmlformats.org/drawingml/2006/main">
               <a:ext uri="{FF2B5EF4-FFF2-40B4-BE49-F238E27FC236}">
-                <a16:creationId xmlns:a16="http://schemas.microsoft.com/office/drawing/2014/main" id="{BC94B2AF-36E1-4783-B4C6-BD316D3B3C4A}"/>
+                <a16:creationId xmlns:a16="http://schemas.microsoft.com/office/drawing/2014/main" id="{9BA29C60-2ECB-41EE-A8F2-91010B3377DE}"/>
               </a:ext>
             </a:extLst>
           </p:cNvPr>
@@ -3864,7 +3864,7 @@
           <p:cNvPr id="5" name="phase-label-0">
             <a:extLst xmlns:a="http://schemas.openxmlformats.org/drawingml/2006/main">
               <a:ext uri="{FF2B5EF4-FFF2-40B4-BE49-F238E27FC236}">
-                <a16:creationId xmlns:a16="http://schemas.microsoft.com/office/drawing/2014/main" id="{39C5A6F7-03C9-4D6D-B141-A6E5D81E1C74}"/>
+                <a16:creationId xmlns:a16="http://schemas.microsoft.com/office/drawing/2014/main" id="{08C6C6CF-8578-4077-B9DF-ED5478A3BB86}"/>
               </a:ext>
             </a:extLst>
           </p:cNvPr>
@@ -3943,7 +3943,7 @@
           <p:cNvPr id="6" name="phase-http-0">
             <a:extLst xmlns:a="http://schemas.openxmlformats.org/drawingml/2006/main">
               <a:ext uri="{FF2B5EF4-FFF2-40B4-BE49-F238E27FC236}">
-                <a16:creationId xmlns:a16="http://schemas.microsoft.com/office/drawing/2014/main" id="{A3390EB5-0E0A-402E-96FF-DEB3E390920C}"/>
+                <a16:creationId xmlns:a16="http://schemas.microsoft.com/office/drawing/2014/main" id="{09E54E61-1DF0-4E0B-A60D-7C1FCD75CE24}"/>
               </a:ext>
             </a:extLst>
           </p:cNvPr>
@@ -3999,7 +3999,7 @@
           <p:cNvPr id="7" name="arrow-1">
             <a:extLst xmlns:a="http://schemas.openxmlformats.org/drawingml/2006/main">
               <a:ext uri="{FF2B5EF4-FFF2-40B4-BE49-F238E27FC236}">
-                <a16:creationId xmlns:a16="http://schemas.microsoft.com/office/drawing/2014/main" id="{B15E3F45-189B-4F0A-AFCA-A25B84067D20}"/>
+                <a16:creationId xmlns:a16="http://schemas.microsoft.com/office/drawing/2014/main" id="{D6F79204-1667-4E8D-8B2B-5DAE84EA69E0}"/>
               </a:ext>
             </a:extLst>
           </p:cNvPr>
@@ -4055,7 +4055,7 @@
           <p:cNvPr id="8" name="phase-1">
             <a:extLst xmlns:a="http://schemas.openxmlformats.org/drawingml/2006/main">
               <a:ext uri="{FF2B5EF4-FFF2-40B4-BE49-F238E27FC236}">
-                <a16:creationId xmlns:a16="http://schemas.microsoft.com/office/drawing/2014/main" id="{732115CE-CF9E-4FB2-A163-BDD5AB7B6776}"/>
+                <a16:creationId xmlns:a16="http://schemas.microsoft.com/office/drawing/2014/main" id="{BC07B156-EF30-405C-9984-94CF6200B884}"/>
               </a:ext>
             </a:extLst>
           </p:cNvPr>
@@ -4090,7 +4090,7 @@
           <p:cNvPr id="9" name="phase-label-1">
             <a:extLst xmlns:a="http://schemas.openxmlformats.org/drawingml/2006/main">
               <a:ext uri="{FF2B5EF4-FFF2-40B4-BE49-F238E27FC236}">
-                <a16:creationId xmlns:a16="http://schemas.microsoft.com/office/drawing/2014/main" id="{AE47776E-0448-4ECB-9D4D-0052212D71EB}"/>
+                <a16:creationId xmlns:a16="http://schemas.microsoft.com/office/drawing/2014/main" id="{50A6A4F4-989B-4BC6-BEF6-A9E7D843CD52}"/>
               </a:ext>
             </a:extLst>
           </p:cNvPr>
@@ -4169,7 +4169,7 @@
           <p:cNvPr id="10" name="phase-http-1">
             <a:extLst xmlns:a="http://schemas.openxmlformats.org/drawingml/2006/main">
               <a:ext uri="{FF2B5EF4-FFF2-40B4-BE49-F238E27FC236}">
-                <a16:creationId xmlns:a16="http://schemas.microsoft.com/office/drawing/2014/main" id="{7581C60E-ADCD-486E-8D61-FABF003638C5}"/>
+                <a16:creationId xmlns:a16="http://schemas.microsoft.com/office/drawing/2014/main" id="{CD3CC1DC-ACB0-41E7-B280-4B3547B5048D}"/>
               </a:ext>
             </a:extLst>
           </p:cNvPr>
@@ -4225,7 +4225,7 @@
           <p:cNvPr id="11" name="arrow-2">
             <a:extLst xmlns:a="http://schemas.openxmlformats.org/drawingml/2006/main">
               <a:ext uri="{FF2B5EF4-FFF2-40B4-BE49-F238E27FC236}">
-                <a16:creationId xmlns:a16="http://schemas.microsoft.com/office/drawing/2014/main" id="{99B75DAD-D8E3-4AEE-B156-813951EA1AC2}"/>
+                <a16:creationId xmlns:a16="http://schemas.microsoft.com/office/drawing/2014/main" id="{AAEA09B0-FA33-4EA0-9E08-EF007FAA071C}"/>
               </a:ext>
             </a:extLst>
           </p:cNvPr>
@@ -4281,7 +4281,7 @@
           <p:cNvPr id="12" name="phase-2">
             <a:extLst xmlns:a="http://schemas.openxmlformats.org/drawingml/2006/main">
               <a:ext uri="{FF2B5EF4-FFF2-40B4-BE49-F238E27FC236}">
-                <a16:creationId xmlns:a16="http://schemas.microsoft.com/office/drawing/2014/main" id="{E67802A1-D4C6-4720-B27E-4C73683CB195}"/>
+                <a16:creationId xmlns:a16="http://schemas.microsoft.com/office/drawing/2014/main" id="{434D4675-1793-4E04-806D-9DEF1861EE0F}"/>
               </a:ext>
             </a:extLst>
           </p:cNvPr>
@@ -4316,7 +4316,7 @@
           <p:cNvPr id="13" name="phase-label-2">
             <a:extLst xmlns:a="http://schemas.openxmlformats.org/drawingml/2006/main">
               <a:ext uri="{FF2B5EF4-FFF2-40B4-BE49-F238E27FC236}">
-                <a16:creationId xmlns:a16="http://schemas.microsoft.com/office/drawing/2014/main" id="{57737DEE-F66F-4387-95AD-92710C1C90DB}"/>
+                <a16:creationId xmlns:a16="http://schemas.microsoft.com/office/drawing/2014/main" id="{F100F7E7-6F51-465F-AF51-804099899FBF}"/>
               </a:ext>
             </a:extLst>
           </p:cNvPr>
@@ -4395,7 +4395,7 @@
           <p:cNvPr id="14" name="phase-http-2">
             <a:extLst xmlns:a="http://schemas.openxmlformats.org/drawingml/2006/main">
               <a:ext uri="{FF2B5EF4-FFF2-40B4-BE49-F238E27FC236}">
-                <a16:creationId xmlns:a16="http://schemas.microsoft.com/office/drawing/2014/main" id="{43E67CDF-C4C3-48C9-828B-3CD1BA0D68A4}"/>
+                <a16:creationId xmlns:a16="http://schemas.microsoft.com/office/drawing/2014/main" id="{A42F71EB-F022-4DD5-AB01-2B14D5D55484}"/>
               </a:ext>
             </a:extLst>
           </p:cNvPr>
@@ -4451,7 +4451,7 @@
           <p:cNvPr id="15" name="phase-3">
             <a:extLst xmlns:a="http://schemas.openxmlformats.org/drawingml/2006/main">
               <a:ext uri="{FF2B5EF4-FFF2-40B4-BE49-F238E27FC236}">
-                <a16:creationId xmlns:a16="http://schemas.microsoft.com/office/drawing/2014/main" id="{45413C8F-73C1-444E-99DE-D5C2A77BD2C0}"/>
+                <a16:creationId xmlns:a16="http://schemas.microsoft.com/office/drawing/2014/main" id="{14B0C104-1F07-4201-B8C5-8EE29BDCD7A3}"/>
               </a:ext>
             </a:extLst>
           </p:cNvPr>
@@ -4486,7 +4486,7 @@
           <p:cNvPr id="16" name="phase-label-3">
             <a:extLst xmlns:a="http://schemas.openxmlformats.org/drawingml/2006/main">
               <a:ext uri="{FF2B5EF4-FFF2-40B4-BE49-F238E27FC236}">
-                <a16:creationId xmlns:a16="http://schemas.microsoft.com/office/drawing/2014/main" id="{D388AFCC-660D-4CC1-903B-0F8AD9E9D78C}"/>
+                <a16:creationId xmlns:a16="http://schemas.microsoft.com/office/drawing/2014/main" id="{D85FD0E7-B1A2-454E-A1A1-1714CBC4E8F7}"/>
               </a:ext>
             </a:extLst>
           </p:cNvPr>
@@ -4565,7 +4565,7 @@
           <p:cNvPr id="17" name="phase-http-3">
             <a:extLst xmlns:a="http://schemas.openxmlformats.org/drawingml/2006/main">
               <a:ext uri="{FF2B5EF4-FFF2-40B4-BE49-F238E27FC236}">
-                <a16:creationId xmlns:a16="http://schemas.microsoft.com/office/drawing/2014/main" id="{DFE92A0D-9599-475E-B252-D3AF6B7071E7}"/>
+                <a16:creationId xmlns:a16="http://schemas.microsoft.com/office/drawing/2014/main" id="{918B2065-C7D9-41A2-9FC3-524B9CE36269}"/>
               </a:ext>
             </a:extLst>
           </p:cNvPr>
@@ -4621,7 +4621,7 @@
           <p:cNvPr id="18" name="integrity-count">
             <a:extLst xmlns:a="http://schemas.openxmlformats.org/drawingml/2006/main">
               <a:ext uri="{FF2B5EF4-FFF2-40B4-BE49-F238E27FC236}">
-                <a16:creationId xmlns:a16="http://schemas.microsoft.com/office/drawing/2014/main" id="{8DC938F6-DF81-4876-B6F3-530BA52102E7}"/>
+                <a16:creationId xmlns:a16="http://schemas.microsoft.com/office/drawing/2014/main" id="{162BA18B-473C-45A2-AE0B-0DCCC9966973}"/>
               </a:ext>
             </a:extLst>
           </p:cNvPr>
@@ -4677,7 +4677,7 @@
           <p:cNvPr id="19" name="integrity-hash">
             <a:extLst xmlns:a="http://schemas.openxmlformats.org/drawingml/2006/main">
               <a:ext uri="{FF2B5EF4-FFF2-40B4-BE49-F238E27FC236}">
-                <a16:creationId xmlns:a16="http://schemas.microsoft.com/office/drawing/2014/main" id="{AD94B953-C2EA-4B22-B43B-C5A97A47FFE1}"/>
+                <a16:creationId xmlns:a16="http://schemas.microsoft.com/office/drawing/2014/main" id="{00D4A4F6-6C7D-4046-AE0F-A6CF52651F3D}"/>
               </a:ext>
             </a:extLst>
           </p:cNvPr>
@@ -4731,7 +4731,7 @@
     </p:spTree>
     <p:extLst>
       <p:ext uri="{BB962C8B-B14F-4D97-AF65-F5344CB8AC3E}">
-        <p14:creationId xmlns:p14="http://schemas.microsoft.com/office/powerpoint/2010/main" val="1782787895"/>
+        <p14:creationId xmlns:p14="http://schemas.microsoft.com/office/powerpoint/2010/main" val="1946560939"/>
       </p:ext>
     </p:extLst>
   </p:cSld>
@@ -4762,7 +4762,7 @@
           <p:cNvPr id="16" name="title-6">
             <a:extLst xmlns:a="http://schemas.openxmlformats.org/drawingml/2006/main">
               <a:ext uri="{FF2B5EF4-FFF2-40B4-BE49-F238E27FC236}">
-                <a16:creationId xmlns:a16="http://schemas.microsoft.com/office/drawing/2014/main" id="{F6FDFB05-57FC-48AE-826C-DCB47E355740}"/>
+                <a16:creationId xmlns:a16="http://schemas.microsoft.com/office/drawing/2014/main" id="{71FD96AE-EEF9-4DED-9916-D2F27916A441}"/>
               </a:ext>
             </a:extLst>
           </p:cNvPr>
@@ -4818,7 +4818,7 @@
           <p:cNvPr id="2" name="page-6">
             <a:extLst xmlns:a="http://schemas.openxmlformats.org/drawingml/2006/main">
               <a:ext uri="{FF2B5EF4-FFF2-40B4-BE49-F238E27FC236}">
-                <a16:creationId xmlns:a16="http://schemas.microsoft.com/office/drawing/2014/main" id="{5C57E274-4D6C-4844-BB31-93CBAE0136BE}"/>
+                <a16:creationId xmlns:a16="http://schemas.microsoft.com/office/drawing/2014/main" id="{BEB05283-32D7-4EF7-AFC5-0543788ACC01}"/>
               </a:ext>
             </a:extLst>
           </p:cNvPr>
@@ -4874,7 +4874,7 @@
           <p:cNvPr id="3" name="flow-arrow-1">
             <a:extLst xmlns:a="http://schemas.openxmlformats.org/drawingml/2006/main">
               <a:ext uri="{FF2B5EF4-FFF2-40B4-BE49-F238E27FC236}">
-                <a16:creationId xmlns:a16="http://schemas.microsoft.com/office/drawing/2014/main" id="{3E0F1BD3-91BC-4911-98D6-AB8A210E300B}"/>
+                <a16:creationId xmlns:a16="http://schemas.microsoft.com/office/drawing/2014/main" id="{24407C0C-201C-43B4-8FC2-DB0F9C2339E3}"/>
               </a:ext>
             </a:extLst>
           </p:cNvPr>
@@ -4930,7 +4930,7 @@
           <p:cNvPr id="4" name="flow-arrow-2">
             <a:extLst xmlns:a="http://schemas.openxmlformats.org/drawingml/2006/main">
               <a:ext uri="{FF2B5EF4-FFF2-40B4-BE49-F238E27FC236}">
-                <a16:creationId xmlns:a16="http://schemas.microsoft.com/office/drawing/2014/main" id="{F8A5AD1C-734D-49D4-8FE5-7FA6063052CD}"/>
+                <a16:creationId xmlns:a16="http://schemas.microsoft.com/office/drawing/2014/main" id="{75B3B0B6-8528-4ECC-A6B2-37F572E799B9}"/>
               </a:ext>
             </a:extLst>
           </p:cNvPr>
@@ -4986,7 +4986,7 @@
           <p:cNvPr id="5" name="flarum-core">
             <a:extLst xmlns:a="http://schemas.openxmlformats.org/drawingml/2006/main">
               <a:ext uri="{FF2B5EF4-FFF2-40B4-BE49-F238E27FC236}">
-                <a16:creationId xmlns:a16="http://schemas.microsoft.com/office/drawing/2014/main" id="{E9E250B1-3CB4-4B55-8456-D64E639AB434}"/>
+                <a16:creationId xmlns:a16="http://schemas.microsoft.com/office/drawing/2014/main" id="{38F29F28-8A67-4448-8A19-77F1DA765FF6}"/>
               </a:ext>
             </a:extLst>
           </p:cNvPr>
@@ -5021,7 +5021,7 @@
           <p:cNvPr id="6" name="theme-extension">
             <a:extLst xmlns:a="http://schemas.openxmlformats.org/drawingml/2006/main">
               <a:ext uri="{FF2B5EF4-FFF2-40B4-BE49-F238E27FC236}">
-                <a16:creationId xmlns:a16="http://schemas.microsoft.com/office/drawing/2014/main" id="{4B1B960E-9F71-47F5-AB26-FD6C0C360147}"/>
+                <a16:creationId xmlns:a16="http://schemas.microsoft.com/office/drawing/2014/main" id="{E89FFF8F-96F3-47EF-8311-6DD97244C839}"/>
               </a:ext>
             </a:extLst>
           </p:cNvPr>
@@ -5056,7 +5056,7 @@
           <p:cNvPr id="7" name="community-ui">
             <a:extLst xmlns:a="http://schemas.openxmlformats.org/drawingml/2006/main">
               <a:ext uri="{FF2B5EF4-FFF2-40B4-BE49-F238E27FC236}">
-                <a16:creationId xmlns:a16="http://schemas.microsoft.com/office/drawing/2014/main" id="{F67E9A45-E075-48E2-A31C-DE312458AEA3}"/>
+                <a16:creationId xmlns:a16="http://schemas.microsoft.com/office/drawing/2014/main" id="{F36AE2A6-5829-4597-9988-4418EAA2B45F}"/>
               </a:ext>
             </a:extLst>
           </p:cNvPr>
@@ -5091,7 +5091,7 @@
           <p:cNvPr id="8" name="flarum-core-title">
             <a:extLst xmlns:a="http://schemas.openxmlformats.org/drawingml/2006/main">
               <a:ext uri="{FF2B5EF4-FFF2-40B4-BE49-F238E27FC236}">
-                <a16:creationId xmlns:a16="http://schemas.microsoft.com/office/drawing/2014/main" id="{0C55306A-5C92-4B20-8E17-0BC97FFD895C}"/>
+                <a16:creationId xmlns:a16="http://schemas.microsoft.com/office/drawing/2014/main" id="{C5667768-B215-4D15-9325-B094D971EE1E}"/>
               </a:ext>
             </a:extLst>
           </p:cNvPr>
@@ -5147,7 +5147,7 @@
           <p:cNvPr id="9" name="flarum-core-copy">
             <a:extLst xmlns:a="http://schemas.openxmlformats.org/drawingml/2006/main">
               <a:ext uri="{FF2B5EF4-FFF2-40B4-BE49-F238E27FC236}">
-                <a16:creationId xmlns:a16="http://schemas.microsoft.com/office/drawing/2014/main" id="{E042DB5B-3A2A-4A2A-9D87-24A54A9EC6D2}"/>
+                <a16:creationId xmlns:a16="http://schemas.microsoft.com/office/drawing/2014/main" id="{A5E3BAFA-68D6-4749-BA3E-FD15D79E1969}"/>
               </a:ext>
             </a:extLst>
           </p:cNvPr>
@@ -5203,7 +5203,7 @@
           <p:cNvPr id="10" name="theme-title">
             <a:extLst xmlns:a="http://schemas.openxmlformats.org/drawingml/2006/main">
               <a:ext uri="{FF2B5EF4-FFF2-40B4-BE49-F238E27FC236}">
-                <a16:creationId xmlns:a16="http://schemas.microsoft.com/office/drawing/2014/main" id="{DCDCC8F1-7323-4355-BC1E-F8193C7533B6}"/>
+                <a16:creationId xmlns:a16="http://schemas.microsoft.com/office/drawing/2014/main" id="{B0C11CFA-EAD4-4642-BE8F-4F3E5E2EBE0C}"/>
               </a:ext>
             </a:extLst>
           </p:cNvPr>
@@ -5282,7 +5282,7 @@
           <p:cNvPr id="11" name="theme-copy">
             <a:extLst xmlns:a="http://schemas.openxmlformats.org/drawingml/2006/main">
               <a:ext uri="{FF2B5EF4-FFF2-40B4-BE49-F238E27FC236}">
-                <a16:creationId xmlns:a16="http://schemas.microsoft.com/office/drawing/2014/main" id="{729AB971-CC80-4D2E-824A-3C81287C60E9}"/>
+                <a16:creationId xmlns:a16="http://schemas.microsoft.com/office/drawing/2014/main" id="{49427B8E-7B15-40A3-AC4D-BB7FDD795C95}"/>
               </a:ext>
             </a:extLst>
           </p:cNvPr>
@@ -5338,7 +5338,7 @@
           <p:cNvPr id="12" name="ui-title">
             <a:extLst xmlns:a="http://schemas.openxmlformats.org/drawingml/2006/main">
               <a:ext uri="{FF2B5EF4-FFF2-40B4-BE49-F238E27FC236}">
-                <a16:creationId xmlns:a16="http://schemas.microsoft.com/office/drawing/2014/main" id="{95D36358-5041-46DF-BB6F-B4697C251E77}"/>
+                <a16:creationId xmlns:a16="http://schemas.microsoft.com/office/drawing/2014/main" id="{47E9E6E6-E8B2-4075-ABA2-206B2D6B05C6}"/>
               </a:ext>
             </a:extLst>
           </p:cNvPr>
@@ -5394,7 +5394,7 @@
           <p:cNvPr id="13" name="ui-copy">
             <a:extLst xmlns:a="http://schemas.openxmlformats.org/drawingml/2006/main">
               <a:ext uri="{FF2B5EF4-FFF2-40B4-BE49-F238E27FC236}">
-                <a16:creationId xmlns:a16="http://schemas.microsoft.com/office/drawing/2014/main" id="{CC5A6B57-5BB5-4CAF-9539-A6150BD58625}"/>
+                <a16:creationId xmlns:a16="http://schemas.microsoft.com/office/drawing/2014/main" id="{39C69243-91CB-421B-A675-DB13E6F9F02F}"/>
               </a:ext>
             </a:extLst>
           </p:cNvPr>
@@ -5450,7 +5450,7 @@
           <p:cNvPr id="14" name="rollback-strip">
             <a:extLst xmlns:a="http://schemas.openxmlformats.org/drawingml/2006/main">
               <a:ext uri="{FF2B5EF4-FFF2-40B4-BE49-F238E27FC236}">
-                <a16:creationId xmlns:a16="http://schemas.microsoft.com/office/drawing/2014/main" id="{09DE0CC0-A299-4814-9D5C-844038B58A01}"/>
+                <a16:creationId xmlns:a16="http://schemas.microsoft.com/office/drawing/2014/main" id="{BBA2CD8A-2933-4B8D-B211-9178B2AD1108}"/>
               </a:ext>
             </a:extLst>
           </p:cNvPr>
@@ -5485,7 +5485,7 @@
           <p:cNvPr id="15" name="rollback-copy">
             <a:extLst xmlns:a="http://schemas.openxmlformats.org/drawingml/2006/main">
               <a:ext uri="{FF2B5EF4-FFF2-40B4-BE49-F238E27FC236}">
-                <a16:creationId xmlns:a16="http://schemas.microsoft.com/office/drawing/2014/main" id="{016CDBFE-B9C2-45C0-9CBD-18E9A6711A51}"/>
+                <a16:creationId xmlns:a16="http://schemas.microsoft.com/office/drawing/2014/main" id="{1209170B-CF3A-4720-ACD9-C475BD6F984C}"/>
               </a:ext>
             </a:extLst>
           </p:cNvPr>
@@ -5539,7 +5539,7 @@
     </p:spTree>
     <p:extLst>
       <p:ext uri="{BB962C8B-B14F-4D97-AF65-F5344CB8AC3E}">
-        <p14:creationId xmlns:p14="http://schemas.microsoft.com/office/powerpoint/2010/main" val="1553381866"/>
+        <p14:creationId xmlns:p14="http://schemas.microsoft.com/office/powerpoint/2010/main" val="925633380"/>
       </p:ext>
     </p:extLst>
   </p:cSld>
@@ -5570,7 +5570,7 @@
           <p:cNvPr id="8" name="close-kicker">
             <a:extLst xmlns:a="http://schemas.openxmlformats.org/drawingml/2006/main">
               <a:ext uri="{FF2B5EF4-FFF2-40B4-BE49-F238E27FC236}">
-                <a16:creationId xmlns:a16="http://schemas.microsoft.com/office/drawing/2014/main" id="{EA8B258C-21B5-43C2-BC02-87C1BA29CE47}"/>
+                <a16:creationId xmlns:a16="http://schemas.microsoft.com/office/drawing/2014/main" id="{6632BABF-0D1E-4528-AB50-514CEDBA041A}"/>
               </a:ext>
             </a:extLst>
           </p:cNvPr>
@@ -5626,7 +5626,7 @@
           <p:cNvPr id="2" name="close-title">
             <a:extLst xmlns:a="http://schemas.openxmlformats.org/drawingml/2006/main">
               <a:ext uri="{FF2B5EF4-FFF2-40B4-BE49-F238E27FC236}">
-                <a16:creationId xmlns:a16="http://schemas.microsoft.com/office/drawing/2014/main" id="{2E902BC8-B852-40C5-ACEF-1D799A7C431D}"/>
+                <a16:creationId xmlns:a16="http://schemas.microsoft.com/office/drawing/2014/main" id="{0027A857-2D8B-4F2B-8D42-DE090DD6B017}"/>
               </a:ext>
             </a:extLst>
           </p:cNvPr>
@@ -5705,7 +5705,7 @@
           <p:cNvPr id="3" name="close-detail">
             <a:extLst xmlns:a="http://schemas.openxmlformats.org/drawingml/2006/main">
               <a:ext uri="{FF2B5EF4-FFF2-40B4-BE49-F238E27FC236}">
-                <a16:creationId xmlns:a16="http://schemas.microsoft.com/office/drawing/2014/main" id="{C9E59AFE-6F29-4A00-B806-74BFCA691716}"/>
+                <a16:creationId xmlns:a16="http://schemas.microsoft.com/office/drawing/2014/main" id="{57D29F66-3BE0-4920-B160-42D789792CA5}"/>
               </a:ext>
             </a:extLst>
           </p:cNvPr>
@@ -5784,7 +5784,7 @@
           <p:cNvPr id="4" name="close-status">
             <a:extLst xmlns:a="http://schemas.openxmlformats.org/drawingml/2006/main">
               <a:ext uri="{FF2B5EF4-FFF2-40B4-BE49-F238E27FC236}">
-                <a16:creationId xmlns:a16="http://schemas.microsoft.com/office/drawing/2014/main" id="{B25A48F7-FCB1-4E07-8674-8BB7D011803D}"/>
+                <a16:creationId xmlns:a16="http://schemas.microsoft.com/office/drawing/2014/main" id="{466DB24B-45C1-45D6-A539-A1A318ACFD01}"/>
               </a:ext>
             </a:extLst>
           </p:cNvPr>
@@ -5819,7 +5819,7 @@
           <p:cNvPr id="5" name="close-go">
             <a:extLst xmlns:a="http://schemas.openxmlformats.org/drawingml/2006/main">
               <a:ext uri="{FF2B5EF4-FFF2-40B4-BE49-F238E27FC236}">
-                <a16:creationId xmlns:a16="http://schemas.microsoft.com/office/drawing/2014/main" id="{979D0803-0056-4382-9DC6-47BEBD6114B7}"/>
+                <a16:creationId xmlns:a16="http://schemas.microsoft.com/office/drawing/2014/main" id="{A52553F0-2810-4987-98BA-251191E7CD32}"/>
               </a:ext>
             </a:extLst>
           </p:cNvPr>
@@ -5875,7 +5875,7 @@
           <p:cNvPr id="6" name="close-condition">
             <a:extLst xmlns:a="http://schemas.openxmlformats.org/drawingml/2006/main">
               <a:ext uri="{FF2B5EF4-FFF2-40B4-BE49-F238E27FC236}">
-                <a16:creationId xmlns:a16="http://schemas.microsoft.com/office/drawing/2014/main" id="{AF090212-A666-4697-AEAF-031F4D98DEF0}"/>
+                <a16:creationId xmlns:a16="http://schemas.microsoft.com/office/drawing/2014/main" id="{FBEDFCA8-CBEA-4567-A6DD-BD0D44BB0771}"/>
               </a:ext>
             </a:extLst>
           </p:cNvPr>
@@ -5931,7 +5931,7 @@
           <p:cNvPr id="7" name="close-next">
             <a:extLst xmlns:a="http://schemas.openxmlformats.org/drawingml/2006/main">
               <a:ext uri="{FF2B5EF4-FFF2-40B4-BE49-F238E27FC236}">
-                <a16:creationId xmlns:a16="http://schemas.microsoft.com/office/drawing/2014/main" id="{D2680D33-56AB-466A-B17D-FDDA9792DF99}"/>
+                <a16:creationId xmlns:a16="http://schemas.microsoft.com/office/drawing/2014/main" id="{448D6E2F-7D5F-4429-AA19-45282D8D41D0}"/>
               </a:ext>
             </a:extLst>
           </p:cNvPr>
@@ -5985,7 +5985,7 @@
     </p:spTree>
     <p:extLst>
       <p:ext uri="{BB962C8B-B14F-4D97-AF65-F5344CB8AC3E}">
-        <p14:creationId xmlns:p14="http://schemas.microsoft.com/office/powerpoint/2010/main" val="836933390"/>
+        <p14:creationId xmlns:p14="http://schemas.microsoft.com/office/powerpoint/2010/main" val="1961874798"/>
       </p:ext>
     </p:extLst>
   </p:cSld>

--- a/output/presentation/techflow-community-ui-modernization.pptx
+++ b/output/presentation/techflow-community-ui-modernization.pptx
@@ -2,19 +2,19 @@
 <file path=ppt/presentation.xml><?xml version="1.0" encoding="utf-8"?>
 <p:presentation xmlns:p="http://schemas.openxmlformats.org/presentationml/2006/main">
   <p:sldMasterIdLst>
-    <p:sldMasterId xmlns:r="http://schemas.openxmlformats.org/officeDocument/2006/relationships" id="2147483648" r:id="R3d289dac5715463c"/>
+    <p:sldMasterId xmlns:r="http://schemas.openxmlformats.org/officeDocument/2006/relationships" id="2147483648" r:id="R450690a8877d4ced"/>
   </p:sldMasterIdLst>
   <p:notesMasterIdLst>
-    <p:notesMasterId xmlns:r="http://schemas.openxmlformats.org/officeDocument/2006/relationships" r:id="R5a63753992904720"/>
+    <p:notesMasterId xmlns:r="http://schemas.openxmlformats.org/officeDocument/2006/relationships" r:id="Rc26c27cb0ed3427f"/>
   </p:notesMasterIdLst>
   <p:sldIdLst>
-    <p:sldId xmlns:r="http://schemas.openxmlformats.org/officeDocument/2006/relationships" id="256" r:id="Rf3f2e224f62b4df2"/>
-    <p:sldId xmlns:r="http://schemas.openxmlformats.org/officeDocument/2006/relationships" id="257" r:id="R47346d6cfa0441d2"/>
-    <p:sldId xmlns:r="http://schemas.openxmlformats.org/officeDocument/2006/relationships" id="258" r:id="R85128aca2b114b12"/>
-    <p:sldId xmlns:r="http://schemas.openxmlformats.org/officeDocument/2006/relationships" id="259" r:id="R38b18c58551044bb"/>
-    <p:sldId xmlns:r="http://schemas.openxmlformats.org/officeDocument/2006/relationships" id="260" r:id="Rd74c630ae9b84172"/>
-    <p:sldId xmlns:r="http://schemas.openxmlformats.org/officeDocument/2006/relationships" id="261" r:id="Rf0f6bd67daf34aa1"/>
-    <p:sldId xmlns:r="http://schemas.openxmlformats.org/officeDocument/2006/relationships" id="262" r:id="R93afc6a75361472b"/>
+    <p:sldId xmlns:r="http://schemas.openxmlformats.org/officeDocument/2006/relationships" id="256" r:id="R1350407f928f44a1"/>
+    <p:sldId xmlns:r="http://schemas.openxmlformats.org/officeDocument/2006/relationships" id="257" r:id="R4c5523f84c9c4173"/>
+    <p:sldId xmlns:r="http://schemas.openxmlformats.org/officeDocument/2006/relationships" id="258" r:id="Rac3669ab81f548da"/>
+    <p:sldId xmlns:r="http://schemas.openxmlformats.org/officeDocument/2006/relationships" id="259" r:id="Re315f48afea24bf3"/>
+    <p:sldId xmlns:r="http://schemas.openxmlformats.org/officeDocument/2006/relationships" id="260" r:id="R658251d49ec94dc4"/>
+    <p:sldId xmlns:r="http://schemas.openxmlformats.org/officeDocument/2006/relationships" id="261" r:id="R6dd2094094424d27"/>
+    <p:sldId xmlns:r="http://schemas.openxmlformats.org/officeDocument/2006/relationships" id="262" r:id="R97b5e5630ac14a01"/>
   </p:sldIdLst>
   <p:sldSz cx="12192000" cy="6858000"/>
   <p:notesSz cx="6858000" cy="9144000"/>
@@ -1076,7 +1076,7 @@
   </p:cSld>
   <p:clrMap bg1="lt1" tx1="dk1" bg2="lt2" tx2="dk2" accent1="accent1" accent2="accent2" accent3="accent3" accent4="accent4" accent5="accent5" accent6="accent6" hlink="hlink" folHlink="folHlink"/>
   <p:sldLayoutIdLst>
-    <p:sldLayoutId xmlns:r="http://schemas.openxmlformats.org/officeDocument/2006/relationships" id="2147483649" r:id="Rccedec4aa97f467f"/>
+    <p:sldLayoutId xmlns:r="http://schemas.openxmlformats.org/officeDocument/2006/relationships" id="2147483649" r:id="R95c7e8cca22843b5"/>
   </p:sldLayoutIdLst>
   <p:txStyles>
     <p:titleStyle>
@@ -1627,7 +1627,7 @@
           <p:cNvPr id="7" name="cover-kicker">
             <a:extLst xmlns:a="http://schemas.openxmlformats.org/drawingml/2006/main">
               <a:ext uri="{FF2B5EF4-FFF2-40B4-BE49-F238E27FC236}">
-                <a16:creationId xmlns:a16="http://schemas.microsoft.com/office/drawing/2014/main" id="{6A0E1AE2-8141-4D8A-BB5D-1EF2067A0706}"/>
+                <a16:creationId xmlns:a16="http://schemas.microsoft.com/office/drawing/2014/main" id="{4B7B93E2-6442-4270-AE4F-B64538F39974}"/>
               </a:ext>
             </a:extLst>
           </p:cNvPr>
@@ -1683,7 +1683,7 @@
           <p:cNvPr id="2" name="cover-title">
             <a:extLst xmlns:a="http://schemas.openxmlformats.org/drawingml/2006/main">
               <a:ext uri="{FF2B5EF4-FFF2-40B4-BE49-F238E27FC236}">
-                <a16:creationId xmlns:a16="http://schemas.microsoft.com/office/drawing/2014/main" id="{124B2A0A-4D5E-4B36-8D1C-7070601C79BF}"/>
+                <a16:creationId xmlns:a16="http://schemas.microsoft.com/office/drawing/2014/main" id="{CD4A67E8-893A-4EB1-9204-B81B03D1816C}"/>
               </a:ext>
             </a:extLst>
           </p:cNvPr>
@@ -1762,7 +1762,7 @@
           <p:cNvPr id="3" name="cover-subtitle">
             <a:extLst xmlns:a="http://schemas.openxmlformats.org/drawingml/2006/main">
               <a:ext uri="{FF2B5EF4-FFF2-40B4-BE49-F238E27FC236}">
-                <a16:creationId xmlns:a16="http://schemas.microsoft.com/office/drawing/2014/main" id="{84D2850B-0AFE-42D9-90D2-CD007796AD84}"/>
+                <a16:creationId xmlns:a16="http://schemas.microsoft.com/office/drawing/2014/main" id="{2664A089-42F5-44B7-831E-8FD64B314969}"/>
               </a:ext>
             </a:extLst>
           </p:cNvPr>
@@ -1818,7 +1818,7 @@
           <p:cNvPr id="4" name="cover-image-frame">
             <a:extLst xmlns:a="http://schemas.openxmlformats.org/drawingml/2006/main">
               <a:ext uri="{FF2B5EF4-FFF2-40B4-BE49-F238E27FC236}">
-                <a16:creationId xmlns:a16="http://schemas.microsoft.com/office/drawing/2014/main" id="{F664099D-0A70-40DB-A9CC-E74DAC987CF5}"/>
+                <a16:creationId xmlns:a16="http://schemas.microsoft.com/office/drawing/2014/main" id="{B554C5A4-C2B8-4CFF-9A43-5C8F4917F7C2}"/>
               </a:ext>
             </a:extLst>
           </p:cNvPr>
@@ -1857,13 +1857,13 @@
           <p:nvPr/>
         </p:nvPicPr>
         <p:blipFill>
-          <a:blip xmlns:r="http://schemas.openxmlformats.org/officeDocument/2006/relationships" xmlns:a="http://schemas.openxmlformats.org/drawingml/2006/main" r:embed="Rec128fe052de40fb"/>
+          <a:blip xmlns:r="http://schemas.openxmlformats.org/officeDocument/2006/relationships" xmlns:a="http://schemas.openxmlformats.org/drawingml/2006/main" r:embed="Rbe76d691cd0e4aac"/>
           <a:stretch xmlns:a="http://schemas.openxmlformats.org/drawingml/2006/main"/>
         </p:blipFill>
         <p:spPr>
           <a:xfrm xmlns:a="http://schemas.openxmlformats.org/drawingml/2006/main">
-            <a:off x="6438900" y="1632347"/>
-            <a:ext cx="5048250" cy="3155156"/>
+            <a:off x="6438900" y="1631683"/>
+            <a:ext cx="5048250" cy="3156485"/>
           </a:xfrm>
           <a:prstGeom xmlns:a="http://schemas.openxmlformats.org/drawingml/2006/main" prst="roundRect">
             <a:avLst>
@@ -1877,7 +1877,7 @@
           <p:cNvPr id="6" name="cover-status">
             <a:extLst xmlns:a="http://schemas.openxmlformats.org/drawingml/2006/main">
               <a:ext uri="{FF2B5EF4-FFF2-40B4-BE49-F238E27FC236}">
-                <a16:creationId xmlns:a16="http://schemas.microsoft.com/office/drawing/2014/main" id="{E92B467F-7C9A-44D9-A263-6761D18541B6}"/>
+                <a16:creationId xmlns:a16="http://schemas.microsoft.com/office/drawing/2014/main" id="{15AAC152-9414-47E5-B35E-5D2E9FCC4838}"/>
               </a:ext>
             </a:extLst>
           </p:cNvPr>
@@ -1931,7 +1931,7 @@
     </p:spTree>
     <p:extLst>
       <p:ext uri="{BB962C8B-B14F-4D97-AF65-F5344CB8AC3E}">
-        <p14:creationId xmlns:p14="http://schemas.microsoft.com/office/powerpoint/2010/main" val="801462801"/>
+        <p14:creationId xmlns:p14="http://schemas.microsoft.com/office/powerpoint/2010/main" val="1706827009"/>
       </p:ext>
     </p:extLst>
   </p:cSld>
@@ -1962,7 +1962,7 @@
           <p:cNvPr id="9" name="title-2">
             <a:extLst xmlns:a="http://schemas.openxmlformats.org/drawingml/2006/main">
               <a:ext uri="{FF2B5EF4-FFF2-40B4-BE49-F238E27FC236}">
-                <a16:creationId xmlns:a16="http://schemas.microsoft.com/office/drawing/2014/main" id="{E682403E-9681-42A3-B766-F5D321C05D5C}"/>
+                <a16:creationId xmlns:a16="http://schemas.microsoft.com/office/drawing/2014/main" id="{A1283ABD-A432-4E85-8769-9450E8AAAD10}"/>
               </a:ext>
             </a:extLst>
           </p:cNvPr>
@@ -2018,7 +2018,7 @@
           <p:cNvPr id="2" name="page-2">
             <a:extLst xmlns:a="http://schemas.openxmlformats.org/drawingml/2006/main">
               <a:ext uri="{FF2B5EF4-FFF2-40B4-BE49-F238E27FC236}">
-                <a16:creationId xmlns:a16="http://schemas.microsoft.com/office/drawing/2014/main" id="{F22B46BE-E734-4392-A3D5-79F00C048310}"/>
+                <a16:creationId xmlns:a16="http://schemas.microsoft.com/office/drawing/2014/main" id="{A27105BC-7324-4AA9-A9D8-90E2F185D9E1}"/>
               </a:ext>
             </a:extLst>
           </p:cNvPr>
@@ -2074,7 +2074,7 @@
           <p:cNvPr id="3" name="before-label">
             <a:extLst xmlns:a="http://schemas.openxmlformats.org/drawingml/2006/main">
               <a:ext uri="{FF2B5EF4-FFF2-40B4-BE49-F238E27FC236}">
-                <a16:creationId xmlns:a16="http://schemas.microsoft.com/office/drawing/2014/main" id="{93AB476D-7088-40F5-B8F7-033C16EA648F}"/>
+                <a16:creationId xmlns:a16="http://schemas.microsoft.com/office/drawing/2014/main" id="{B45CADA3-BAB2-40F8-BC44-CFDCD51AA752}"/>
               </a:ext>
             </a:extLst>
           </p:cNvPr>
@@ -2130,7 +2130,7 @@
           <p:cNvPr id="4" name="after-label">
             <a:extLst xmlns:a="http://schemas.openxmlformats.org/drawingml/2006/main">
               <a:ext uri="{FF2B5EF4-FFF2-40B4-BE49-F238E27FC236}">
-                <a16:creationId xmlns:a16="http://schemas.microsoft.com/office/drawing/2014/main" id="{6D383DBB-B7FB-4A43-8069-01FB7F791900}"/>
+                <a16:creationId xmlns:a16="http://schemas.microsoft.com/office/drawing/2014/main" id="{3164679E-B971-43CC-8418-CD44429943B5}"/>
               </a:ext>
             </a:extLst>
           </p:cNvPr>
@@ -2190,7 +2190,7 @@
           <p:nvPr/>
         </p:nvPicPr>
         <p:blipFill>
-          <a:blip xmlns:r="http://schemas.openxmlformats.org/officeDocument/2006/relationships" xmlns:a="http://schemas.openxmlformats.org/drawingml/2006/main" r:embed="Rc34234274fbb45c3"/>
+          <a:blip xmlns:r="http://schemas.openxmlformats.org/officeDocument/2006/relationships" xmlns:a="http://schemas.openxmlformats.org/drawingml/2006/main" r:embed="R73321c643e4d4662"/>
           <a:stretch xmlns:a="http://schemas.openxmlformats.org/drawingml/2006/main"/>
         </p:blipFill>
         <p:spPr>
@@ -2214,13 +2214,13 @@
           <p:nvPr/>
         </p:nvPicPr>
         <p:blipFill>
-          <a:blip xmlns:r="http://schemas.openxmlformats.org/officeDocument/2006/relationships" xmlns:a="http://schemas.openxmlformats.org/drawingml/2006/main" r:embed="R4fc30fecaf514fcf"/>
+          <a:blip xmlns:r="http://schemas.openxmlformats.org/officeDocument/2006/relationships" xmlns:a="http://schemas.openxmlformats.org/drawingml/2006/main" r:embed="R9d0db0d874a24d4f"/>
           <a:stretch xmlns:a="http://schemas.openxmlformats.org/drawingml/2006/main"/>
         </p:blipFill>
         <p:spPr>
           <a:xfrm xmlns:a="http://schemas.openxmlformats.org/drawingml/2006/main">
-            <a:off x="6362700" y="1583531"/>
-            <a:ext cx="5143500" cy="3214688"/>
+            <a:off x="6362700" y="1582854"/>
+            <a:ext cx="5143500" cy="3216041"/>
           </a:xfrm>
           <a:prstGeom xmlns:a="http://schemas.openxmlformats.org/drawingml/2006/main" prst="roundRect">
             <a:avLst>
@@ -2234,7 +2234,7 @@
           <p:cNvPr id="7" name="before-copy">
             <a:extLst xmlns:a="http://schemas.openxmlformats.org/drawingml/2006/main">
               <a:ext uri="{FF2B5EF4-FFF2-40B4-BE49-F238E27FC236}">
-                <a16:creationId xmlns:a16="http://schemas.microsoft.com/office/drawing/2014/main" id="{AAD1D29B-5DE8-4131-BC01-9DEC41B2ABF0}"/>
+                <a16:creationId xmlns:a16="http://schemas.microsoft.com/office/drawing/2014/main" id="{C4066924-24C7-4FEA-8B6B-E52E75A6FA92}"/>
               </a:ext>
             </a:extLst>
           </p:cNvPr>
@@ -2290,7 +2290,7 @@
           <p:cNvPr id="8" name="after-copy">
             <a:extLst xmlns:a="http://schemas.openxmlformats.org/drawingml/2006/main">
               <a:ext uri="{FF2B5EF4-FFF2-40B4-BE49-F238E27FC236}">
-                <a16:creationId xmlns:a16="http://schemas.microsoft.com/office/drawing/2014/main" id="{754AA158-47C2-4550-ABE9-A81B06E6F52B}"/>
+                <a16:creationId xmlns:a16="http://schemas.microsoft.com/office/drawing/2014/main" id="{D8F642DD-110A-44B0-AB46-C6DBAF828DF2}"/>
               </a:ext>
             </a:extLst>
           </p:cNvPr>
@@ -2344,7 +2344,7 @@
     </p:spTree>
     <p:extLst>
       <p:ext uri="{BB962C8B-B14F-4D97-AF65-F5344CB8AC3E}">
-        <p14:creationId xmlns:p14="http://schemas.microsoft.com/office/powerpoint/2010/main" val="873590176"/>
+        <p14:creationId xmlns:p14="http://schemas.microsoft.com/office/powerpoint/2010/main" val="430419967"/>
       </p:ext>
     </p:extLst>
   </p:cSld>
@@ -2375,7 +2375,7 @@
           <p:cNvPr id="15" name="title-3">
             <a:extLst xmlns:a="http://schemas.openxmlformats.org/drawingml/2006/main">
               <a:ext uri="{FF2B5EF4-FFF2-40B4-BE49-F238E27FC236}">
-                <a16:creationId xmlns:a16="http://schemas.microsoft.com/office/drawing/2014/main" id="{C37C2F42-6B54-4121-9AB6-858B07747FFB}"/>
+                <a16:creationId xmlns:a16="http://schemas.microsoft.com/office/drawing/2014/main" id="{75B0F050-EE6B-405E-A8FB-6143546661FE}"/>
               </a:ext>
             </a:extLst>
           </p:cNvPr>
@@ -2431,7 +2431,7 @@
           <p:cNvPr id="2" name="page-3">
             <a:extLst xmlns:a="http://schemas.openxmlformats.org/drawingml/2006/main">
               <a:ext uri="{FF2B5EF4-FFF2-40B4-BE49-F238E27FC236}">
-                <a16:creationId xmlns:a16="http://schemas.microsoft.com/office/drawing/2014/main" id="{B2276FE2-CE0C-4F87-8FAC-4194A4624882}"/>
+                <a16:creationId xmlns:a16="http://schemas.microsoft.com/office/drawing/2014/main" id="{7BD68930-1D90-4E70-8434-7E1146E69B72}"/>
               </a:ext>
             </a:extLst>
           </p:cNvPr>
@@ -2487,7 +2487,7 @@
           <p:cNvPr id="3" name="state-0">
             <a:extLst xmlns:a="http://schemas.openxmlformats.org/drawingml/2006/main">
               <a:ext uri="{FF2B5EF4-FFF2-40B4-BE49-F238E27FC236}">
-                <a16:creationId xmlns:a16="http://schemas.microsoft.com/office/drawing/2014/main" id="{114BF808-C15E-484F-9CE7-174AEAAB50B9}"/>
+                <a16:creationId xmlns:a16="http://schemas.microsoft.com/office/drawing/2014/main" id="{0BEEDC12-5BF6-4506-9389-0B6D328AA036}"/>
               </a:ext>
             </a:extLst>
           </p:cNvPr>
@@ -2522,7 +2522,7 @@
           <p:cNvPr id="4" name="state-label-0">
             <a:extLst xmlns:a="http://schemas.openxmlformats.org/drawingml/2006/main">
               <a:ext uri="{FF2B5EF4-FFF2-40B4-BE49-F238E27FC236}">
-                <a16:creationId xmlns:a16="http://schemas.microsoft.com/office/drawing/2014/main" id="{D72A2202-E576-4375-BEA5-E932B8E9CB46}"/>
+                <a16:creationId xmlns:a16="http://schemas.microsoft.com/office/drawing/2014/main" id="{4E5D7712-E169-41E6-8C93-56D3FA538880}"/>
               </a:ext>
             </a:extLst>
           </p:cNvPr>
@@ -2578,7 +2578,7 @@
           <p:cNvPr id="5" name="state-detail-0">
             <a:extLst xmlns:a="http://schemas.openxmlformats.org/drawingml/2006/main">
               <a:ext uri="{FF2B5EF4-FFF2-40B4-BE49-F238E27FC236}">
-                <a16:creationId xmlns:a16="http://schemas.microsoft.com/office/drawing/2014/main" id="{1B2929B8-A873-400C-86C2-C208A7C29DD1}"/>
+                <a16:creationId xmlns:a16="http://schemas.microsoft.com/office/drawing/2014/main" id="{9CC6A1E6-7539-4D38-A178-7E3965CF8D7F}"/>
               </a:ext>
             </a:extLst>
           </p:cNvPr>
@@ -2634,7 +2634,7 @@
           <p:cNvPr id="6" name="state-1">
             <a:extLst xmlns:a="http://schemas.openxmlformats.org/drawingml/2006/main">
               <a:ext uri="{FF2B5EF4-FFF2-40B4-BE49-F238E27FC236}">
-                <a16:creationId xmlns:a16="http://schemas.microsoft.com/office/drawing/2014/main" id="{DB03F58E-DEA0-4CF3-ADD0-818AD6CC5AD4}"/>
+                <a16:creationId xmlns:a16="http://schemas.microsoft.com/office/drawing/2014/main" id="{3A2B37F0-680C-4C4A-87AC-71C6F649439E}"/>
               </a:ext>
             </a:extLst>
           </p:cNvPr>
@@ -2669,7 +2669,7 @@
           <p:cNvPr id="7" name="state-label-1">
             <a:extLst xmlns:a="http://schemas.openxmlformats.org/drawingml/2006/main">
               <a:ext uri="{FF2B5EF4-FFF2-40B4-BE49-F238E27FC236}">
-                <a16:creationId xmlns:a16="http://schemas.microsoft.com/office/drawing/2014/main" id="{B53D863D-8110-405C-BAFD-06EDE0C50D60}"/>
+                <a16:creationId xmlns:a16="http://schemas.microsoft.com/office/drawing/2014/main" id="{6DD98BBE-53C5-452F-B8C7-081631B85979}"/>
               </a:ext>
             </a:extLst>
           </p:cNvPr>
@@ -2725,7 +2725,7 @@
           <p:cNvPr id="8" name="state-detail-1">
             <a:extLst xmlns:a="http://schemas.openxmlformats.org/drawingml/2006/main">
               <a:ext uri="{FF2B5EF4-FFF2-40B4-BE49-F238E27FC236}">
-                <a16:creationId xmlns:a16="http://schemas.microsoft.com/office/drawing/2014/main" id="{DBF71906-FCF0-4067-96A0-DA994AFD8CEF}"/>
+                <a16:creationId xmlns:a16="http://schemas.microsoft.com/office/drawing/2014/main" id="{8E51167F-478E-4FD4-B3E6-91D1925B7BC6}"/>
               </a:ext>
             </a:extLst>
           </p:cNvPr>
@@ -2781,7 +2781,7 @@
           <p:cNvPr id="9" name="state-2">
             <a:extLst xmlns:a="http://schemas.openxmlformats.org/drawingml/2006/main">
               <a:ext uri="{FF2B5EF4-FFF2-40B4-BE49-F238E27FC236}">
-                <a16:creationId xmlns:a16="http://schemas.microsoft.com/office/drawing/2014/main" id="{AA39FFA4-4360-42F7-9C46-79A6AC40D92F}"/>
+                <a16:creationId xmlns:a16="http://schemas.microsoft.com/office/drawing/2014/main" id="{508A98F1-E253-4DF6-87E5-C765A653FE57}"/>
               </a:ext>
             </a:extLst>
           </p:cNvPr>
@@ -2816,7 +2816,7 @@
           <p:cNvPr id="10" name="state-label-2">
             <a:extLst xmlns:a="http://schemas.openxmlformats.org/drawingml/2006/main">
               <a:ext uri="{FF2B5EF4-FFF2-40B4-BE49-F238E27FC236}">
-                <a16:creationId xmlns:a16="http://schemas.microsoft.com/office/drawing/2014/main" id="{C269C019-D6E1-44DC-853C-75668B130779}"/>
+                <a16:creationId xmlns:a16="http://schemas.microsoft.com/office/drawing/2014/main" id="{03E5AF0B-B361-4F1B-888C-390D535E7848}"/>
               </a:ext>
             </a:extLst>
           </p:cNvPr>
@@ -2872,7 +2872,7 @@
           <p:cNvPr id="11" name="state-detail-2">
             <a:extLst xmlns:a="http://schemas.openxmlformats.org/drawingml/2006/main">
               <a:ext uri="{FF2B5EF4-FFF2-40B4-BE49-F238E27FC236}">
-                <a16:creationId xmlns:a16="http://schemas.microsoft.com/office/drawing/2014/main" id="{224680BB-1527-472E-9473-566F6F4AF335}"/>
+                <a16:creationId xmlns:a16="http://schemas.microsoft.com/office/drawing/2014/main" id="{C5B1CAF8-47B3-4E01-A1C3-78BFB4F5F308}"/>
               </a:ext>
             </a:extLst>
           </p:cNvPr>
@@ -2928,7 +2928,7 @@
           <p:cNvPr id="12" name="state-3">
             <a:extLst xmlns:a="http://schemas.openxmlformats.org/drawingml/2006/main">
               <a:ext uri="{FF2B5EF4-FFF2-40B4-BE49-F238E27FC236}">
-                <a16:creationId xmlns:a16="http://schemas.microsoft.com/office/drawing/2014/main" id="{1ABFA78A-C8FF-4506-B579-635CE39CF70D}"/>
+                <a16:creationId xmlns:a16="http://schemas.microsoft.com/office/drawing/2014/main" id="{835489CD-574C-4B2D-B382-FA54F6C9742A}"/>
               </a:ext>
             </a:extLst>
           </p:cNvPr>
@@ -2963,7 +2963,7 @@
           <p:cNvPr id="13" name="state-label-3">
             <a:extLst xmlns:a="http://schemas.openxmlformats.org/drawingml/2006/main">
               <a:ext uri="{FF2B5EF4-FFF2-40B4-BE49-F238E27FC236}">
-                <a16:creationId xmlns:a16="http://schemas.microsoft.com/office/drawing/2014/main" id="{298AC384-1A5B-43B1-8430-9DFF7077752A}"/>
+                <a16:creationId xmlns:a16="http://schemas.microsoft.com/office/drawing/2014/main" id="{0770E9D6-A9C5-4992-9EAB-ABF33EE58428}"/>
               </a:ext>
             </a:extLst>
           </p:cNvPr>
@@ -3019,7 +3019,7 @@
           <p:cNvPr id="14" name="state-detail-3">
             <a:extLst xmlns:a="http://schemas.openxmlformats.org/drawingml/2006/main">
               <a:ext uri="{FF2B5EF4-FFF2-40B4-BE49-F238E27FC236}">
-                <a16:creationId xmlns:a16="http://schemas.microsoft.com/office/drawing/2014/main" id="{ABFD9291-295B-4FCF-9D69-C15FEA59C81F}"/>
+                <a16:creationId xmlns:a16="http://schemas.microsoft.com/office/drawing/2014/main" id="{D96A8BC2-60FE-47A2-9EEA-873F9533715B}"/>
               </a:ext>
             </a:extLst>
           </p:cNvPr>
@@ -3073,7 +3073,7 @@
     </p:spTree>
     <p:extLst>
       <p:ext uri="{BB962C8B-B14F-4D97-AF65-F5344CB8AC3E}">
-        <p14:creationId xmlns:p14="http://schemas.microsoft.com/office/powerpoint/2010/main" val="1398717328"/>
+        <p14:creationId xmlns:p14="http://schemas.microsoft.com/office/powerpoint/2010/main" val="1726701621"/>
       </p:ext>
     </p:extLst>
   </p:cSld>
@@ -3104,7 +3104,7 @@
           <p:cNvPr id="11" name="title-4">
             <a:extLst xmlns:a="http://schemas.openxmlformats.org/drawingml/2006/main">
               <a:ext uri="{FF2B5EF4-FFF2-40B4-BE49-F238E27FC236}">
-                <a16:creationId xmlns:a16="http://schemas.microsoft.com/office/drawing/2014/main" id="{BEC821CE-0705-4BC0-92BF-DB54CADD3462}"/>
+                <a16:creationId xmlns:a16="http://schemas.microsoft.com/office/drawing/2014/main" id="{A94BB092-25C0-41AC-A3EC-796817B2E124}"/>
               </a:ext>
             </a:extLst>
           </p:cNvPr>
@@ -3150,7 +3150,7 @@
                 <a:ea typeface="Malgun Gothic"/>
                 <a:cs typeface="Malgun Gothic"/>
               </a:rPr>
-              <a:t>정렬과 작업 버튼도 읽기 흐름에 맞췄습니다</a:t>
+              <a:t>작업 버튼과 Footer를 별도 영역으로 분리했습니다</a:t>
             </a:r>
           </a:p>
         </p:txBody>
@@ -3160,7 +3160,7 @@
           <p:cNvPr id="2" name="page-4">
             <a:extLst xmlns:a="http://schemas.openxmlformats.org/drawingml/2006/main">
               <a:ext uri="{FF2B5EF4-FFF2-40B4-BE49-F238E27FC236}">
-                <a16:creationId xmlns:a16="http://schemas.microsoft.com/office/drawing/2014/main" id="{D262422D-8F74-46F3-9CF9-3C883E5A0B98}"/>
+                <a16:creationId xmlns:a16="http://schemas.microsoft.com/office/drawing/2014/main" id="{3129D753-EEFC-4FFB-A7DD-D71ADCFE576E}"/>
               </a:ext>
             </a:extLst>
           </p:cNvPr>
@@ -3220,13 +3220,13 @@
           <p:nvPr/>
         </p:nvPicPr>
         <p:blipFill>
-          <a:blip xmlns:r="http://schemas.openxmlformats.org/officeDocument/2006/relationships" xmlns:a="http://schemas.openxmlformats.org/drawingml/2006/main" r:embed="R4130c8acc2b64afe"/>
+          <a:blip xmlns:r="http://schemas.openxmlformats.org/officeDocument/2006/relationships" xmlns:a="http://schemas.openxmlformats.org/drawingml/2006/main" r:embed="R844661b7a9fc46a5"/>
           <a:stretch xmlns:a="http://schemas.openxmlformats.org/drawingml/2006/main"/>
         </p:blipFill>
         <p:spPr>
           <a:xfrm xmlns:a="http://schemas.openxmlformats.org/drawingml/2006/main">
-            <a:off x="1151171" y="1295400"/>
-            <a:ext cx="2288709" cy="4953000"/>
+            <a:off x="1151821" y="1295400"/>
+            <a:ext cx="2287408" cy="4953000"/>
           </a:xfrm>
           <a:prstGeom xmlns:a="http://schemas.openxmlformats.org/drawingml/2006/main" prst="roundRect">
             <a:avLst>
@@ -3240,19 +3240,19 @@
           <p:cNvPr id="4" name="mobile-fact-1">
             <a:extLst xmlns:a="http://schemas.openxmlformats.org/drawingml/2006/main">
               <a:ext uri="{FF2B5EF4-FFF2-40B4-BE49-F238E27FC236}">
-                <a16:creationId xmlns:a16="http://schemas.microsoft.com/office/drawing/2014/main" id="{09D6411F-335B-40CB-980D-4B476E93B012}"/>
-              </a:ext>
-            </a:extLst>
-          </p:cNvPr>
-          <p:cNvSpPr>
-            <a:spLocks xmlns:a="http://schemas.openxmlformats.org/drawingml/2006/main" noGrp="1"/>
-          </p:cNvSpPr>
-          <p:nvPr/>
-        </p:nvSpPr>
-        <p:spPr>
-          <a:xfrm xmlns:a="http://schemas.openxmlformats.org/drawingml/2006/main">
-            <a:off x="4762500" y="1695450"/>
-            <a:ext cx="2333625" cy="666750"/>
+                <a16:creationId xmlns:a16="http://schemas.microsoft.com/office/drawing/2014/main" id="{15C9C83B-D3F8-4456-8C5F-CBC306A688E7}"/>
+              </a:ext>
+            </a:extLst>
+          </p:cNvPr>
+          <p:cNvSpPr>
+            <a:spLocks xmlns:a="http://schemas.openxmlformats.org/drawingml/2006/main" noGrp="1"/>
+          </p:cNvSpPr>
+          <p:nvPr/>
+        </p:nvSpPr>
+        <p:spPr>
+          <a:xfrm xmlns:a="http://schemas.openxmlformats.org/drawingml/2006/main">
+            <a:off x="4953000" y="1695450"/>
+            <a:ext cx="2000250" cy="666750"/>
           </a:xfrm>
           <a:prstGeom xmlns:a="http://schemas.openxmlformats.org/drawingml/2006/main" prst="rect">
             <a:avLst/>
@@ -3268,7 +3268,7 @@
           <a:lstStyle xmlns:a="http://schemas.openxmlformats.org/drawingml/2006/main"/>
           <a:p xmlns:a="http://schemas.openxmlformats.org/drawingml/2006/main">
             <a:pPr algn="l">
-              <a:defRPr sz="3600" b="1">
+              <a:defRPr sz="3900" b="1">
                 <a:solidFill>
                   <a:srgbClr val="155EEF"/>
                 </a:solidFill>
@@ -3278,7 +3278,7 @@
               </a:defRPr>
             </a:pPr>
             <a:r>
-              <a:rPr sz="3600" b="1">
+              <a:rPr sz="3900" b="1">
                 <a:solidFill>
                   <a:srgbClr val="155EEF"/>
                 </a:solidFill>
@@ -3286,7 +3286,7 @@
                 <a:ea typeface="Malgun Gothic"/>
                 <a:cs typeface="Malgun Gothic"/>
               </a:rPr>
-              <a:t>19/17px</a:t>
+              <a:t>8px</a:t>
             </a:r>
           </a:p>
         </p:txBody>
@@ -3296,7 +3296,7 @@
           <p:cNvPr id="5" name="mobile-desc-1">
             <a:extLst xmlns:a="http://schemas.openxmlformats.org/drawingml/2006/main">
               <a:ext uri="{FF2B5EF4-FFF2-40B4-BE49-F238E27FC236}">
-                <a16:creationId xmlns:a16="http://schemas.microsoft.com/office/drawing/2014/main" id="{7EF65A59-6E66-43CF-A7DC-2019E638A9E1}"/>
+                <a16:creationId xmlns:a16="http://schemas.microsoft.com/office/drawing/2014/main" id="{738E5E57-66FA-4596-9CAE-6DED76A0752B}"/>
               </a:ext>
             </a:extLst>
           </p:cNvPr>
@@ -3342,7 +3342,7 @@
                 <a:ea typeface="Malgun Gothic"/>
                 <a:cs typeface="Malgun Gothic"/>
               </a:rPr>
-              <a:t>Desktop/Mobile 대칭 여백</a:t>
+              <a:t>카드 아래 답장 작업 영역</a:t>
             </a:r>
           </a:p>
         </p:txBody>
@@ -3352,7 +3352,7 @@
           <p:cNvPr id="6" name="mobile-fact-2">
             <a:extLst xmlns:a="http://schemas.openxmlformats.org/drawingml/2006/main">
               <a:ext uri="{FF2B5EF4-FFF2-40B4-BE49-F238E27FC236}">
-                <a16:creationId xmlns:a16="http://schemas.microsoft.com/office/drawing/2014/main" id="{F1746BC5-A36C-4DE7-81AF-A63EC41232F7}"/>
+                <a16:creationId xmlns:a16="http://schemas.microsoft.com/office/drawing/2014/main" id="{9CBB2B0B-B879-4EAA-B56C-3DC917E757F8}"/>
               </a:ext>
             </a:extLst>
           </p:cNvPr>
@@ -3398,7 +3398,7 @@
                 <a:ea typeface="Malgun Gothic"/>
                 <a:cs typeface="Malgun Gothic"/>
               </a:rPr>
-              <a:t>0px</a:t>
+              <a:t>1px</a:t>
             </a:r>
           </a:p>
         </p:txBody>
@@ -3408,7 +3408,7 @@
           <p:cNvPr id="7" name="mobile-desc-2">
             <a:extLst xmlns:a="http://schemas.openxmlformats.org/drawingml/2006/main">
               <a:ext uri="{FF2B5EF4-FFF2-40B4-BE49-F238E27FC236}">
-                <a16:creationId xmlns:a16="http://schemas.microsoft.com/office/drawing/2014/main" id="{0DE1872B-12D7-4C84-BE84-B0BD4D321862}"/>
+                <a16:creationId xmlns:a16="http://schemas.microsoft.com/office/drawing/2014/main" id="{833FCFD6-EFE7-4BDF-9FA5-654341881078}"/>
               </a:ext>
             </a:extLst>
           </p:cNvPr>
@@ -3454,7 +3454,7 @@
                 <a:ea typeface="Malgun Gothic"/>
                 <a:cs typeface="Malgun Gothic"/>
               </a:rPr>
-              <a:t>아바타·제목 중심 차이</a:t>
+              <a:t>카드·버튼 오른쪽 선 차이</a:t>
             </a:r>
           </a:p>
         </p:txBody>
@@ -3464,19 +3464,19 @@
           <p:cNvPr id="8" name="mobile-fact-3">
             <a:extLst xmlns:a="http://schemas.openxmlformats.org/drawingml/2006/main">
               <a:ext uri="{FF2B5EF4-FFF2-40B4-BE49-F238E27FC236}">
-                <a16:creationId xmlns:a16="http://schemas.microsoft.com/office/drawing/2014/main" id="{816C6C50-3955-496F-BC95-33AAE6BD71DD}"/>
-              </a:ext>
-            </a:extLst>
-          </p:cNvPr>
-          <p:cNvSpPr>
-            <a:spLocks xmlns:a="http://schemas.openxmlformats.org/drawingml/2006/main" noGrp="1"/>
-          </p:cNvSpPr>
-          <p:nvPr/>
-        </p:nvSpPr>
-        <p:spPr>
-          <a:xfrm xmlns:a="http://schemas.openxmlformats.org/drawingml/2006/main">
-            <a:off x="4953000" y="4019550"/>
-            <a:ext cx="2000250" cy="666750"/>
+                <a16:creationId xmlns:a16="http://schemas.microsoft.com/office/drawing/2014/main" id="{BA9E087C-4DBE-434A-8A2C-EDB518CFD0C5}"/>
+              </a:ext>
+            </a:extLst>
+          </p:cNvPr>
+          <p:cNvSpPr>
+            <a:spLocks xmlns:a="http://schemas.openxmlformats.org/drawingml/2006/main" noGrp="1"/>
+          </p:cNvSpPr>
+          <p:nvPr/>
+        </p:nvSpPr>
+        <p:spPr>
+          <a:xfrm xmlns:a="http://schemas.openxmlformats.org/drawingml/2006/main">
+            <a:off x="4762500" y="4019550"/>
+            <a:ext cx="2333625" cy="666750"/>
           </a:xfrm>
           <a:prstGeom xmlns:a="http://schemas.openxmlformats.org/drawingml/2006/main" prst="rect">
             <a:avLst/>
@@ -3492,7 +3492,7 @@
           <a:lstStyle xmlns:a="http://schemas.openxmlformats.org/drawingml/2006/main"/>
           <a:p xmlns:a="http://schemas.openxmlformats.org/drawingml/2006/main">
             <a:pPr algn="l">
-              <a:defRPr sz="3900" b="1">
+              <a:defRPr sz="3600" b="1">
                 <a:solidFill>
                   <a:srgbClr val="078248"/>
                 </a:solidFill>
@@ -3502,7 +3502,7 @@
               </a:defRPr>
             </a:pPr>
             <a:r>
-              <a:rPr sz="3900" b="1">
+              <a:rPr sz="3600" b="1">
                 <a:solidFill>
                   <a:srgbClr val="078248"/>
                 </a:solidFill>
@@ -3510,7 +3510,7 @@
                 <a:ea typeface="Malgun Gothic"/>
                 <a:cs typeface="Malgun Gothic"/>
               </a:rPr>
-              <a:t>40px</a:t>
+              <a:t>38/36px</a:t>
             </a:r>
           </a:p>
         </p:txBody>
@@ -3520,7 +3520,7 @@
           <p:cNvPr id="9" name="mobile-desc-3">
             <a:extLst xmlns:a="http://schemas.openxmlformats.org/drawingml/2006/main">
               <a:ext uri="{FF2B5EF4-FFF2-40B4-BE49-F238E27FC236}">
-                <a16:creationId xmlns:a16="http://schemas.microsoft.com/office/drawing/2014/main" id="{2F113371-1F20-49F1-91BF-0D1587E32DC8}"/>
+                <a16:creationId xmlns:a16="http://schemas.microsoft.com/office/drawing/2014/main" id="{109EBE79-AA01-4765-9F11-0E4AF7F8BB28}"/>
               </a:ext>
             </a:extLst>
           </p:cNvPr>
@@ -3532,7 +3532,7 @@
         <p:spPr>
           <a:xfrm xmlns:a="http://schemas.openxmlformats.org/drawingml/2006/main">
             <a:off x="7124700" y="4171950"/>
-            <a:ext cx="3714750" cy="419100"/>
+            <a:ext cx="4095750" cy="419100"/>
           </a:xfrm>
           <a:prstGeom xmlns:a="http://schemas.openxmlformats.org/drawingml/2006/main" prst="rect">
             <a:avLst/>
@@ -3548,7 +3548,7 @@
           <a:lstStyle xmlns:a="http://schemas.openxmlformats.org/drawingml/2006/main"/>
           <a:p xmlns:a="http://schemas.openxmlformats.org/drawingml/2006/main">
             <a:pPr algn="l">
-              <a:defRPr sz="1800" b="0">
+              <a:defRPr sz="1650" b="0">
                 <a:solidFill>
                   <a:srgbClr val="52647D"/>
                 </a:solidFill>
@@ -3558,7 +3558,7 @@
               </a:defRPr>
             </a:pPr>
             <a:r>
-              <a:rPr sz="1800" b="0">
+              <a:rPr sz="1650" b="0">
                 <a:solidFill>
                   <a:srgbClr val="52647D"/>
                 </a:solidFill>
@@ -3566,7 +3566,7 @@
                 <a:ea typeface="Malgun Gothic"/>
                 <a:cs typeface="Malgun Gothic"/>
               </a:rPr>
-              <a:t>상시 답장 아이콘</a:t>
+              <a:t>Desktop/Mobile Footer 아이콘</a:t>
             </a:r>
           </a:p>
         </p:txBody>
@@ -3576,7 +3576,7 @@
           <p:cNvPr id="10" name="mobile-foot">
             <a:extLst xmlns:a="http://schemas.openxmlformats.org/drawingml/2006/main">
               <a:ext uri="{FF2B5EF4-FFF2-40B4-BE49-F238E27FC236}">
-                <a16:creationId xmlns:a16="http://schemas.microsoft.com/office/drawing/2014/main" id="{54218DC0-40E3-4663-A3DF-EF44F843582D}"/>
+                <a16:creationId xmlns:a16="http://schemas.microsoft.com/office/drawing/2014/main" id="{7FBADA9F-BA90-43A1-841A-4AA87EE07104}"/>
               </a:ext>
             </a:extLst>
           </p:cNvPr>
@@ -3604,7 +3604,7 @@
           <a:lstStyle xmlns:a="http://schemas.openxmlformats.org/drawingml/2006/main"/>
           <a:p xmlns:a="http://schemas.openxmlformats.org/drawingml/2006/main">
             <a:pPr algn="l">
-              <a:defRPr sz="1725" b="1">
+              <a:defRPr sz="1575" b="1">
                 <a:solidFill>
                   <a:srgbClr val="15253E"/>
                 </a:solidFill>
@@ -3614,7 +3614,7 @@
               </a:defRPr>
             </a:pPr>
             <a:r>
-              <a:rPr sz="1725" b="1">
+              <a:rPr sz="1575" b="1">
                 <a:solidFill>
                   <a:srgbClr val="15253E"/>
                 </a:solidFill>
@@ -3622,7 +3622,7 @@
                 <a:ea typeface="Malgun Gothic"/>
                 <a:cs typeface="Malgun Gothic"/>
               </a:rPr>
-              <a:t>비로그인 상태는 회색 비활성 · Desktop/Mobile 실제 검증</a:t>
+              <a:t>중복 구분선 제거 · 비로그인 답장 비활성 · 모바일 넘침 0px</a:t>
             </a:r>
           </a:p>
         </p:txBody>
@@ -3630,7 +3630,7 @@
     </p:spTree>
     <p:extLst>
       <p:ext uri="{BB962C8B-B14F-4D97-AF65-F5344CB8AC3E}">
-        <p14:creationId xmlns:p14="http://schemas.microsoft.com/office/powerpoint/2010/main" val="1900703019"/>
+        <p14:creationId xmlns:p14="http://schemas.microsoft.com/office/powerpoint/2010/main" val="122365680"/>
       </p:ext>
     </p:extLst>
   </p:cSld>
@@ -3661,7 +3661,7 @@
           <p:cNvPr id="20" name="title-5">
             <a:extLst xmlns:a="http://schemas.openxmlformats.org/drawingml/2006/main">
               <a:ext uri="{FF2B5EF4-FFF2-40B4-BE49-F238E27FC236}">
-                <a16:creationId xmlns:a16="http://schemas.microsoft.com/office/drawing/2014/main" id="{1B3C5397-287D-4853-AF72-D2728BBCCE4E}"/>
+                <a16:creationId xmlns:a16="http://schemas.microsoft.com/office/drawing/2014/main" id="{D9F1C426-603E-4E77-A1F0-62AAC17DD675}"/>
               </a:ext>
             </a:extLst>
           </p:cNvPr>
@@ -3717,7 +3717,7 @@
           <p:cNvPr id="2" name="page-5">
             <a:extLst xmlns:a="http://schemas.openxmlformats.org/drawingml/2006/main">
               <a:ext uri="{FF2B5EF4-FFF2-40B4-BE49-F238E27FC236}">
-                <a16:creationId xmlns:a16="http://schemas.microsoft.com/office/drawing/2014/main" id="{45BC8912-A3D0-4A6F-9907-637E72259167}"/>
+                <a16:creationId xmlns:a16="http://schemas.microsoft.com/office/drawing/2014/main" id="{23F6A1F1-7E1F-462F-9621-A96BA6FF8180}"/>
               </a:ext>
             </a:extLst>
           </p:cNvPr>
@@ -3773,7 +3773,7 @@
           <p:cNvPr id="3" name="arrow-0">
             <a:extLst xmlns:a="http://schemas.openxmlformats.org/drawingml/2006/main">
               <a:ext uri="{FF2B5EF4-FFF2-40B4-BE49-F238E27FC236}">
-                <a16:creationId xmlns:a16="http://schemas.microsoft.com/office/drawing/2014/main" id="{8F1034F4-056A-4EBA-B354-E6FFD365B097}"/>
+                <a16:creationId xmlns:a16="http://schemas.microsoft.com/office/drawing/2014/main" id="{AB83CF44-8E5E-4759-832C-417E6F527F77}"/>
               </a:ext>
             </a:extLst>
           </p:cNvPr>
@@ -3829,7 +3829,7 @@
           <p:cNvPr id="4" name="phase-0">
             <a:extLst xmlns:a="http://schemas.openxmlformats.org/drawingml/2006/main">
               <a:ext uri="{FF2B5EF4-FFF2-40B4-BE49-F238E27FC236}">
-                <a16:creationId xmlns:a16="http://schemas.microsoft.com/office/drawing/2014/main" id="{9BA29C60-2ECB-41EE-A8F2-91010B3377DE}"/>
+                <a16:creationId xmlns:a16="http://schemas.microsoft.com/office/drawing/2014/main" id="{7B8FD691-1520-43AB-BA99-FEBC32BC54AA}"/>
               </a:ext>
             </a:extLst>
           </p:cNvPr>
@@ -3864,7 +3864,7 @@
           <p:cNvPr id="5" name="phase-label-0">
             <a:extLst xmlns:a="http://schemas.openxmlformats.org/drawingml/2006/main">
               <a:ext uri="{FF2B5EF4-FFF2-40B4-BE49-F238E27FC236}">
-                <a16:creationId xmlns:a16="http://schemas.microsoft.com/office/drawing/2014/main" id="{08C6C6CF-8578-4077-B9DF-ED5478A3BB86}"/>
+                <a16:creationId xmlns:a16="http://schemas.microsoft.com/office/drawing/2014/main" id="{F995D299-D9DE-4620-B3F9-20A651318EBF}"/>
               </a:ext>
             </a:extLst>
           </p:cNvPr>
@@ -3943,7 +3943,7 @@
           <p:cNvPr id="6" name="phase-http-0">
             <a:extLst xmlns:a="http://schemas.openxmlformats.org/drawingml/2006/main">
               <a:ext uri="{FF2B5EF4-FFF2-40B4-BE49-F238E27FC236}">
-                <a16:creationId xmlns:a16="http://schemas.microsoft.com/office/drawing/2014/main" id="{09E54E61-1DF0-4E0B-A60D-7C1FCD75CE24}"/>
+                <a16:creationId xmlns:a16="http://schemas.microsoft.com/office/drawing/2014/main" id="{AAECC66E-49BA-49BE-8D6F-814C0CB2BC1F}"/>
               </a:ext>
             </a:extLst>
           </p:cNvPr>
@@ -3999,7 +3999,7 @@
           <p:cNvPr id="7" name="arrow-1">
             <a:extLst xmlns:a="http://schemas.openxmlformats.org/drawingml/2006/main">
               <a:ext uri="{FF2B5EF4-FFF2-40B4-BE49-F238E27FC236}">
-                <a16:creationId xmlns:a16="http://schemas.microsoft.com/office/drawing/2014/main" id="{D6F79204-1667-4E8D-8B2B-5DAE84EA69E0}"/>
+                <a16:creationId xmlns:a16="http://schemas.microsoft.com/office/drawing/2014/main" id="{5C3DD1B8-0BA2-4AA5-AE2B-A8A1B11208C3}"/>
               </a:ext>
             </a:extLst>
           </p:cNvPr>
@@ -4055,7 +4055,7 @@
           <p:cNvPr id="8" name="phase-1">
             <a:extLst xmlns:a="http://schemas.openxmlformats.org/drawingml/2006/main">
               <a:ext uri="{FF2B5EF4-FFF2-40B4-BE49-F238E27FC236}">
-                <a16:creationId xmlns:a16="http://schemas.microsoft.com/office/drawing/2014/main" id="{BC07B156-EF30-405C-9984-94CF6200B884}"/>
+                <a16:creationId xmlns:a16="http://schemas.microsoft.com/office/drawing/2014/main" id="{04F0BD8A-CC9B-47B5-8142-71D1D19857D4}"/>
               </a:ext>
             </a:extLst>
           </p:cNvPr>
@@ -4090,7 +4090,7 @@
           <p:cNvPr id="9" name="phase-label-1">
             <a:extLst xmlns:a="http://schemas.openxmlformats.org/drawingml/2006/main">
               <a:ext uri="{FF2B5EF4-FFF2-40B4-BE49-F238E27FC236}">
-                <a16:creationId xmlns:a16="http://schemas.microsoft.com/office/drawing/2014/main" id="{50A6A4F4-989B-4BC6-BEF6-A9E7D843CD52}"/>
+                <a16:creationId xmlns:a16="http://schemas.microsoft.com/office/drawing/2014/main" id="{A580E82A-444F-4B6C-BBDB-BC56DBFF3B5D}"/>
               </a:ext>
             </a:extLst>
           </p:cNvPr>
@@ -4169,7 +4169,7 @@
           <p:cNvPr id="10" name="phase-http-1">
             <a:extLst xmlns:a="http://schemas.openxmlformats.org/drawingml/2006/main">
               <a:ext uri="{FF2B5EF4-FFF2-40B4-BE49-F238E27FC236}">
-                <a16:creationId xmlns:a16="http://schemas.microsoft.com/office/drawing/2014/main" id="{CD3CC1DC-ACB0-41E7-B280-4B3547B5048D}"/>
+                <a16:creationId xmlns:a16="http://schemas.microsoft.com/office/drawing/2014/main" id="{C82E3898-C652-4870-AD21-16B0C2BE347F}"/>
               </a:ext>
             </a:extLst>
           </p:cNvPr>
@@ -4225,7 +4225,7 @@
           <p:cNvPr id="11" name="arrow-2">
             <a:extLst xmlns:a="http://schemas.openxmlformats.org/drawingml/2006/main">
               <a:ext uri="{FF2B5EF4-FFF2-40B4-BE49-F238E27FC236}">
-                <a16:creationId xmlns:a16="http://schemas.microsoft.com/office/drawing/2014/main" id="{AAEA09B0-FA33-4EA0-9E08-EF007FAA071C}"/>
+                <a16:creationId xmlns:a16="http://schemas.microsoft.com/office/drawing/2014/main" id="{D0B1051D-001D-485F-B0B8-962CC4580FC1}"/>
               </a:ext>
             </a:extLst>
           </p:cNvPr>
@@ -4281,7 +4281,7 @@
           <p:cNvPr id="12" name="phase-2">
             <a:extLst xmlns:a="http://schemas.openxmlformats.org/drawingml/2006/main">
               <a:ext uri="{FF2B5EF4-FFF2-40B4-BE49-F238E27FC236}">
-                <a16:creationId xmlns:a16="http://schemas.microsoft.com/office/drawing/2014/main" id="{434D4675-1793-4E04-806D-9DEF1861EE0F}"/>
+                <a16:creationId xmlns:a16="http://schemas.microsoft.com/office/drawing/2014/main" id="{709BF6E1-758D-48E1-A1B0-17B6D4CBE4FA}"/>
               </a:ext>
             </a:extLst>
           </p:cNvPr>
@@ -4316,7 +4316,7 @@
           <p:cNvPr id="13" name="phase-label-2">
             <a:extLst xmlns:a="http://schemas.openxmlformats.org/drawingml/2006/main">
               <a:ext uri="{FF2B5EF4-FFF2-40B4-BE49-F238E27FC236}">
-                <a16:creationId xmlns:a16="http://schemas.microsoft.com/office/drawing/2014/main" id="{F100F7E7-6F51-465F-AF51-804099899FBF}"/>
+                <a16:creationId xmlns:a16="http://schemas.microsoft.com/office/drawing/2014/main" id="{5B3B237C-267C-4280-8F0C-F238E8027E2A}"/>
               </a:ext>
             </a:extLst>
           </p:cNvPr>
@@ -4395,7 +4395,7 @@
           <p:cNvPr id="14" name="phase-http-2">
             <a:extLst xmlns:a="http://schemas.openxmlformats.org/drawingml/2006/main">
               <a:ext uri="{FF2B5EF4-FFF2-40B4-BE49-F238E27FC236}">
-                <a16:creationId xmlns:a16="http://schemas.microsoft.com/office/drawing/2014/main" id="{A42F71EB-F022-4DD5-AB01-2B14D5D55484}"/>
+                <a16:creationId xmlns:a16="http://schemas.microsoft.com/office/drawing/2014/main" id="{D8B27D83-C915-4520-82DA-3AF234744CE4}"/>
               </a:ext>
             </a:extLst>
           </p:cNvPr>
@@ -4451,7 +4451,7 @@
           <p:cNvPr id="15" name="phase-3">
             <a:extLst xmlns:a="http://schemas.openxmlformats.org/drawingml/2006/main">
               <a:ext uri="{FF2B5EF4-FFF2-40B4-BE49-F238E27FC236}">
-                <a16:creationId xmlns:a16="http://schemas.microsoft.com/office/drawing/2014/main" id="{14B0C104-1F07-4201-B8C5-8EE29BDCD7A3}"/>
+                <a16:creationId xmlns:a16="http://schemas.microsoft.com/office/drawing/2014/main" id="{78828B45-037A-4A7D-ADB8-2CDB9BAA9FDE}"/>
               </a:ext>
             </a:extLst>
           </p:cNvPr>
@@ -4486,7 +4486,7 @@
           <p:cNvPr id="16" name="phase-label-3">
             <a:extLst xmlns:a="http://schemas.openxmlformats.org/drawingml/2006/main">
               <a:ext uri="{FF2B5EF4-FFF2-40B4-BE49-F238E27FC236}">
-                <a16:creationId xmlns:a16="http://schemas.microsoft.com/office/drawing/2014/main" id="{D85FD0E7-B1A2-454E-A1A1-1714CBC4E8F7}"/>
+                <a16:creationId xmlns:a16="http://schemas.microsoft.com/office/drawing/2014/main" id="{A111AD34-6EAC-4873-85E5-EC1A3821F84A}"/>
               </a:ext>
             </a:extLst>
           </p:cNvPr>
@@ -4565,7 +4565,7 @@
           <p:cNvPr id="17" name="phase-http-3">
             <a:extLst xmlns:a="http://schemas.openxmlformats.org/drawingml/2006/main">
               <a:ext uri="{FF2B5EF4-FFF2-40B4-BE49-F238E27FC236}">
-                <a16:creationId xmlns:a16="http://schemas.microsoft.com/office/drawing/2014/main" id="{918B2065-C7D9-41A2-9FC3-524B9CE36269}"/>
+                <a16:creationId xmlns:a16="http://schemas.microsoft.com/office/drawing/2014/main" id="{6C409C6D-D26C-463B-B2CA-7E96D252AAF6}"/>
               </a:ext>
             </a:extLst>
           </p:cNvPr>
@@ -4621,7 +4621,7 @@
           <p:cNvPr id="18" name="integrity-count">
             <a:extLst xmlns:a="http://schemas.openxmlformats.org/drawingml/2006/main">
               <a:ext uri="{FF2B5EF4-FFF2-40B4-BE49-F238E27FC236}">
-                <a16:creationId xmlns:a16="http://schemas.microsoft.com/office/drawing/2014/main" id="{162BA18B-473C-45A2-AE0B-0DCCC9966973}"/>
+                <a16:creationId xmlns:a16="http://schemas.microsoft.com/office/drawing/2014/main" id="{82827E20-F3D1-4539-8348-6F7134CDB650}"/>
               </a:ext>
             </a:extLst>
           </p:cNvPr>
@@ -4677,7 +4677,7 @@
           <p:cNvPr id="19" name="integrity-hash">
             <a:extLst xmlns:a="http://schemas.openxmlformats.org/drawingml/2006/main">
               <a:ext uri="{FF2B5EF4-FFF2-40B4-BE49-F238E27FC236}">
-                <a16:creationId xmlns:a16="http://schemas.microsoft.com/office/drawing/2014/main" id="{00D4A4F6-6C7D-4046-AE0F-A6CF52651F3D}"/>
+                <a16:creationId xmlns:a16="http://schemas.microsoft.com/office/drawing/2014/main" id="{F62C0DBE-98A4-44FA-BCCF-1D2C224A6349}"/>
               </a:ext>
             </a:extLst>
           </p:cNvPr>
@@ -4731,7 +4731,7 @@
     </p:spTree>
     <p:extLst>
       <p:ext uri="{BB962C8B-B14F-4D97-AF65-F5344CB8AC3E}">
-        <p14:creationId xmlns:p14="http://schemas.microsoft.com/office/powerpoint/2010/main" val="1946560939"/>
+        <p14:creationId xmlns:p14="http://schemas.microsoft.com/office/powerpoint/2010/main" val="646802830"/>
       </p:ext>
     </p:extLst>
   </p:cSld>
@@ -4762,7 +4762,7 @@
           <p:cNvPr id="16" name="title-6">
             <a:extLst xmlns:a="http://schemas.openxmlformats.org/drawingml/2006/main">
               <a:ext uri="{FF2B5EF4-FFF2-40B4-BE49-F238E27FC236}">
-                <a16:creationId xmlns:a16="http://schemas.microsoft.com/office/drawing/2014/main" id="{71FD96AE-EEF9-4DED-9916-D2F27916A441}"/>
+                <a16:creationId xmlns:a16="http://schemas.microsoft.com/office/drawing/2014/main" id="{7664DB93-0890-4CD0-BD39-20B103397E5B}"/>
               </a:ext>
             </a:extLst>
           </p:cNvPr>
@@ -4818,7 +4818,7 @@
           <p:cNvPr id="2" name="page-6">
             <a:extLst xmlns:a="http://schemas.openxmlformats.org/drawingml/2006/main">
               <a:ext uri="{FF2B5EF4-FFF2-40B4-BE49-F238E27FC236}">
-                <a16:creationId xmlns:a16="http://schemas.microsoft.com/office/drawing/2014/main" id="{BEB05283-32D7-4EF7-AFC5-0543788ACC01}"/>
+                <a16:creationId xmlns:a16="http://schemas.microsoft.com/office/drawing/2014/main" id="{3F3A5760-3F2F-457F-ABB9-7B9E4EF27D5F}"/>
               </a:ext>
             </a:extLst>
           </p:cNvPr>
@@ -4874,7 +4874,7 @@
           <p:cNvPr id="3" name="flow-arrow-1">
             <a:extLst xmlns:a="http://schemas.openxmlformats.org/drawingml/2006/main">
               <a:ext uri="{FF2B5EF4-FFF2-40B4-BE49-F238E27FC236}">
-                <a16:creationId xmlns:a16="http://schemas.microsoft.com/office/drawing/2014/main" id="{24407C0C-201C-43B4-8FC2-DB0F9C2339E3}"/>
+                <a16:creationId xmlns:a16="http://schemas.microsoft.com/office/drawing/2014/main" id="{4D7A4765-56DD-4DBF-AAA8-B068FC4C526F}"/>
               </a:ext>
             </a:extLst>
           </p:cNvPr>
@@ -4930,7 +4930,7 @@
           <p:cNvPr id="4" name="flow-arrow-2">
             <a:extLst xmlns:a="http://schemas.openxmlformats.org/drawingml/2006/main">
               <a:ext uri="{FF2B5EF4-FFF2-40B4-BE49-F238E27FC236}">
-                <a16:creationId xmlns:a16="http://schemas.microsoft.com/office/drawing/2014/main" id="{75B3B0B6-8528-4ECC-A6B2-37F572E799B9}"/>
+                <a16:creationId xmlns:a16="http://schemas.microsoft.com/office/drawing/2014/main" id="{75C0061E-10B5-4ECC-A97F-E90FF44C661F}"/>
               </a:ext>
             </a:extLst>
           </p:cNvPr>
@@ -4986,7 +4986,7 @@
           <p:cNvPr id="5" name="flarum-core">
             <a:extLst xmlns:a="http://schemas.openxmlformats.org/drawingml/2006/main">
               <a:ext uri="{FF2B5EF4-FFF2-40B4-BE49-F238E27FC236}">
-                <a16:creationId xmlns:a16="http://schemas.microsoft.com/office/drawing/2014/main" id="{38F29F28-8A67-4448-8A19-77F1DA765FF6}"/>
+                <a16:creationId xmlns:a16="http://schemas.microsoft.com/office/drawing/2014/main" id="{67F19C25-F757-4A5E-8A6F-69650BABCB80}"/>
               </a:ext>
             </a:extLst>
           </p:cNvPr>
@@ -5021,7 +5021,7 @@
           <p:cNvPr id="6" name="theme-extension">
             <a:extLst xmlns:a="http://schemas.openxmlformats.org/drawingml/2006/main">
               <a:ext uri="{FF2B5EF4-FFF2-40B4-BE49-F238E27FC236}">
-                <a16:creationId xmlns:a16="http://schemas.microsoft.com/office/drawing/2014/main" id="{E89FFF8F-96F3-47EF-8311-6DD97244C839}"/>
+                <a16:creationId xmlns:a16="http://schemas.microsoft.com/office/drawing/2014/main" id="{B833FFDA-1BB0-450B-B2F8-0963868ED475}"/>
               </a:ext>
             </a:extLst>
           </p:cNvPr>
@@ -5056,7 +5056,7 @@
           <p:cNvPr id="7" name="community-ui">
             <a:extLst xmlns:a="http://schemas.openxmlformats.org/drawingml/2006/main">
               <a:ext uri="{FF2B5EF4-FFF2-40B4-BE49-F238E27FC236}">
-                <a16:creationId xmlns:a16="http://schemas.microsoft.com/office/drawing/2014/main" id="{F36AE2A6-5829-4597-9988-4418EAA2B45F}"/>
+                <a16:creationId xmlns:a16="http://schemas.microsoft.com/office/drawing/2014/main" id="{ED714F1C-07CD-49DA-A70D-0CDE790DC00D}"/>
               </a:ext>
             </a:extLst>
           </p:cNvPr>
@@ -5091,7 +5091,7 @@
           <p:cNvPr id="8" name="flarum-core-title">
             <a:extLst xmlns:a="http://schemas.openxmlformats.org/drawingml/2006/main">
               <a:ext uri="{FF2B5EF4-FFF2-40B4-BE49-F238E27FC236}">
-                <a16:creationId xmlns:a16="http://schemas.microsoft.com/office/drawing/2014/main" id="{C5667768-B215-4D15-9325-B094D971EE1E}"/>
+                <a16:creationId xmlns:a16="http://schemas.microsoft.com/office/drawing/2014/main" id="{19738C16-A9C1-4AE6-BB29-0820BE5E755D}"/>
               </a:ext>
             </a:extLst>
           </p:cNvPr>
@@ -5147,7 +5147,7 @@
           <p:cNvPr id="9" name="flarum-core-copy">
             <a:extLst xmlns:a="http://schemas.openxmlformats.org/drawingml/2006/main">
               <a:ext uri="{FF2B5EF4-FFF2-40B4-BE49-F238E27FC236}">
-                <a16:creationId xmlns:a16="http://schemas.microsoft.com/office/drawing/2014/main" id="{A5E3BAFA-68D6-4749-BA3E-FD15D79E1969}"/>
+                <a16:creationId xmlns:a16="http://schemas.microsoft.com/office/drawing/2014/main" id="{9B4AF3F7-E82F-4BD2-959E-CE6247FA041B}"/>
               </a:ext>
             </a:extLst>
           </p:cNvPr>
@@ -5203,7 +5203,7 @@
           <p:cNvPr id="10" name="theme-title">
             <a:extLst xmlns:a="http://schemas.openxmlformats.org/drawingml/2006/main">
               <a:ext uri="{FF2B5EF4-FFF2-40B4-BE49-F238E27FC236}">
-                <a16:creationId xmlns:a16="http://schemas.microsoft.com/office/drawing/2014/main" id="{B0C11CFA-EAD4-4642-BE8F-4F3E5E2EBE0C}"/>
+                <a16:creationId xmlns:a16="http://schemas.microsoft.com/office/drawing/2014/main" id="{D0688116-870D-40B4-9B55-AEB2C58FFA45}"/>
               </a:ext>
             </a:extLst>
           </p:cNvPr>
@@ -5282,7 +5282,7 @@
           <p:cNvPr id="11" name="theme-copy">
             <a:extLst xmlns:a="http://schemas.openxmlformats.org/drawingml/2006/main">
               <a:ext uri="{FF2B5EF4-FFF2-40B4-BE49-F238E27FC236}">
-                <a16:creationId xmlns:a16="http://schemas.microsoft.com/office/drawing/2014/main" id="{49427B8E-7B15-40A3-AC4D-BB7FDD795C95}"/>
+                <a16:creationId xmlns:a16="http://schemas.microsoft.com/office/drawing/2014/main" id="{64116E7C-269E-4C5D-8134-0C8223544F8C}"/>
               </a:ext>
             </a:extLst>
           </p:cNvPr>
@@ -5338,7 +5338,7 @@
           <p:cNvPr id="12" name="ui-title">
             <a:extLst xmlns:a="http://schemas.openxmlformats.org/drawingml/2006/main">
               <a:ext uri="{FF2B5EF4-FFF2-40B4-BE49-F238E27FC236}">
-                <a16:creationId xmlns:a16="http://schemas.microsoft.com/office/drawing/2014/main" id="{47E9E6E6-E8B2-4075-ABA2-206B2D6B05C6}"/>
+                <a16:creationId xmlns:a16="http://schemas.microsoft.com/office/drawing/2014/main" id="{D029147F-6E28-4610-AC1E-F747C2A21AEC}"/>
               </a:ext>
             </a:extLst>
           </p:cNvPr>
@@ -5394,7 +5394,7 @@
           <p:cNvPr id="13" name="ui-copy">
             <a:extLst xmlns:a="http://schemas.openxmlformats.org/drawingml/2006/main">
               <a:ext uri="{FF2B5EF4-FFF2-40B4-BE49-F238E27FC236}">
-                <a16:creationId xmlns:a16="http://schemas.microsoft.com/office/drawing/2014/main" id="{39C69243-91CB-421B-A675-DB13E6F9F02F}"/>
+                <a16:creationId xmlns:a16="http://schemas.microsoft.com/office/drawing/2014/main" id="{65DA998A-74FA-476A-96F4-4E5182B0832E}"/>
               </a:ext>
             </a:extLst>
           </p:cNvPr>
@@ -5450,7 +5450,7 @@
           <p:cNvPr id="14" name="rollback-strip">
             <a:extLst xmlns:a="http://schemas.openxmlformats.org/drawingml/2006/main">
               <a:ext uri="{FF2B5EF4-FFF2-40B4-BE49-F238E27FC236}">
-                <a16:creationId xmlns:a16="http://schemas.microsoft.com/office/drawing/2014/main" id="{BBA2CD8A-2933-4B8D-B211-9178B2AD1108}"/>
+                <a16:creationId xmlns:a16="http://schemas.microsoft.com/office/drawing/2014/main" id="{1F45A8B5-6E2F-4440-AFDD-EB9F32979E3A}"/>
               </a:ext>
             </a:extLst>
           </p:cNvPr>
@@ -5485,7 +5485,7 @@
           <p:cNvPr id="15" name="rollback-copy">
             <a:extLst xmlns:a="http://schemas.openxmlformats.org/drawingml/2006/main">
               <a:ext uri="{FF2B5EF4-FFF2-40B4-BE49-F238E27FC236}">
-                <a16:creationId xmlns:a16="http://schemas.microsoft.com/office/drawing/2014/main" id="{1209170B-CF3A-4720-ACD9-C475BD6F984C}"/>
+                <a16:creationId xmlns:a16="http://schemas.microsoft.com/office/drawing/2014/main" id="{6036D89C-F74E-4AB0-8A3D-0B2034F9C622}"/>
               </a:ext>
             </a:extLst>
           </p:cNvPr>
@@ -5539,7 +5539,7 @@
     </p:spTree>
     <p:extLst>
       <p:ext uri="{BB962C8B-B14F-4D97-AF65-F5344CB8AC3E}">
-        <p14:creationId xmlns:p14="http://schemas.microsoft.com/office/powerpoint/2010/main" val="925633380"/>
+        <p14:creationId xmlns:p14="http://schemas.microsoft.com/office/powerpoint/2010/main" val="1478164979"/>
       </p:ext>
     </p:extLst>
   </p:cSld>
@@ -5570,7 +5570,7 @@
           <p:cNvPr id="8" name="close-kicker">
             <a:extLst xmlns:a="http://schemas.openxmlformats.org/drawingml/2006/main">
               <a:ext uri="{FF2B5EF4-FFF2-40B4-BE49-F238E27FC236}">
-                <a16:creationId xmlns:a16="http://schemas.microsoft.com/office/drawing/2014/main" id="{6632BABF-0D1E-4528-AB50-514CEDBA041A}"/>
+                <a16:creationId xmlns:a16="http://schemas.microsoft.com/office/drawing/2014/main" id="{FECF0E5B-C068-4021-9581-CC58CA474BD4}"/>
               </a:ext>
             </a:extLst>
           </p:cNvPr>
@@ -5626,7 +5626,7 @@
           <p:cNvPr id="2" name="close-title">
             <a:extLst xmlns:a="http://schemas.openxmlformats.org/drawingml/2006/main">
               <a:ext uri="{FF2B5EF4-FFF2-40B4-BE49-F238E27FC236}">
-                <a16:creationId xmlns:a16="http://schemas.microsoft.com/office/drawing/2014/main" id="{0027A857-2D8B-4F2B-8D42-DE090DD6B017}"/>
+                <a16:creationId xmlns:a16="http://schemas.microsoft.com/office/drawing/2014/main" id="{F9FE3DB6-675F-44C2-9E8A-DADE365136AE}"/>
               </a:ext>
             </a:extLst>
           </p:cNvPr>
@@ -5705,7 +5705,7 @@
           <p:cNvPr id="3" name="close-detail">
             <a:extLst xmlns:a="http://schemas.openxmlformats.org/drawingml/2006/main">
               <a:ext uri="{FF2B5EF4-FFF2-40B4-BE49-F238E27FC236}">
-                <a16:creationId xmlns:a16="http://schemas.microsoft.com/office/drawing/2014/main" id="{57D29F66-3BE0-4920-B160-42D789792CA5}"/>
+                <a16:creationId xmlns:a16="http://schemas.microsoft.com/office/drawing/2014/main" id="{A1CAB914-18CF-4BE4-B5D7-88DA13335A84}"/>
               </a:ext>
             </a:extLst>
           </p:cNvPr>
@@ -5784,7 +5784,7 @@
           <p:cNvPr id="4" name="close-status">
             <a:extLst xmlns:a="http://schemas.openxmlformats.org/drawingml/2006/main">
               <a:ext uri="{FF2B5EF4-FFF2-40B4-BE49-F238E27FC236}">
-                <a16:creationId xmlns:a16="http://schemas.microsoft.com/office/drawing/2014/main" id="{466DB24B-45C1-45D6-A539-A1A318ACFD01}"/>
+                <a16:creationId xmlns:a16="http://schemas.microsoft.com/office/drawing/2014/main" id="{886A65CC-C403-48BE-A859-BA55364CBFC9}"/>
               </a:ext>
             </a:extLst>
           </p:cNvPr>
@@ -5819,7 +5819,7 @@
           <p:cNvPr id="5" name="close-go">
             <a:extLst xmlns:a="http://schemas.openxmlformats.org/drawingml/2006/main">
               <a:ext uri="{FF2B5EF4-FFF2-40B4-BE49-F238E27FC236}">
-                <a16:creationId xmlns:a16="http://schemas.microsoft.com/office/drawing/2014/main" id="{A52553F0-2810-4987-98BA-251191E7CD32}"/>
+                <a16:creationId xmlns:a16="http://schemas.microsoft.com/office/drawing/2014/main" id="{98678C02-5A3E-469A-941D-A45818F462B0}"/>
               </a:ext>
             </a:extLst>
           </p:cNvPr>
@@ -5875,7 +5875,7 @@
           <p:cNvPr id="6" name="close-condition">
             <a:extLst xmlns:a="http://schemas.openxmlformats.org/drawingml/2006/main">
               <a:ext uri="{FF2B5EF4-FFF2-40B4-BE49-F238E27FC236}">
-                <a16:creationId xmlns:a16="http://schemas.microsoft.com/office/drawing/2014/main" id="{FBEDFCA8-CBEA-4567-A6DD-BD0D44BB0771}"/>
+                <a16:creationId xmlns:a16="http://schemas.microsoft.com/office/drawing/2014/main" id="{7EB563E0-4F3A-44D9-A34D-A42189E14DE9}"/>
               </a:ext>
             </a:extLst>
           </p:cNvPr>
@@ -5931,7 +5931,7 @@
           <p:cNvPr id="7" name="close-next">
             <a:extLst xmlns:a="http://schemas.openxmlformats.org/drawingml/2006/main">
               <a:ext uri="{FF2B5EF4-FFF2-40B4-BE49-F238E27FC236}">
-                <a16:creationId xmlns:a16="http://schemas.microsoft.com/office/drawing/2014/main" id="{448D6E2F-7D5F-4429-AA19-45282D8D41D0}"/>
+                <a16:creationId xmlns:a16="http://schemas.microsoft.com/office/drawing/2014/main" id="{276483CC-135F-45D4-8AF0-EF992BAF1C5D}"/>
               </a:ext>
             </a:extLst>
           </p:cNvPr>
@@ -5985,7 +5985,7 @@
     </p:spTree>
     <p:extLst>
       <p:ext uri="{BB962C8B-B14F-4D97-AF65-F5344CB8AC3E}">
-        <p14:creationId xmlns:p14="http://schemas.microsoft.com/office/powerpoint/2010/main" val="1961874798"/>
+        <p14:creationId xmlns:p14="http://schemas.microsoft.com/office/powerpoint/2010/main" val="380533456"/>
       </p:ext>
     </p:extLst>
   </p:cSld>

--- a/output/presentation/techflow-community-ui-modernization.pptx
+++ b/output/presentation/techflow-community-ui-modernization.pptx
@@ -2,19 +2,19 @@
 <file path=ppt/presentation.xml><?xml version="1.0" encoding="utf-8"?>
 <p:presentation xmlns:p="http://schemas.openxmlformats.org/presentationml/2006/main">
   <p:sldMasterIdLst>
-    <p:sldMasterId xmlns:r="http://schemas.openxmlformats.org/officeDocument/2006/relationships" id="2147483648" r:id="R450690a8877d4ced"/>
+    <p:sldMasterId xmlns:r="http://schemas.openxmlformats.org/officeDocument/2006/relationships" id="2147483648" r:id="R8128d4a5547b40a3"/>
   </p:sldMasterIdLst>
   <p:notesMasterIdLst>
-    <p:notesMasterId xmlns:r="http://schemas.openxmlformats.org/officeDocument/2006/relationships" r:id="Rc26c27cb0ed3427f"/>
+    <p:notesMasterId xmlns:r="http://schemas.openxmlformats.org/officeDocument/2006/relationships" r:id="Rfe3d9586424b4b53"/>
   </p:notesMasterIdLst>
   <p:sldIdLst>
-    <p:sldId xmlns:r="http://schemas.openxmlformats.org/officeDocument/2006/relationships" id="256" r:id="R1350407f928f44a1"/>
-    <p:sldId xmlns:r="http://schemas.openxmlformats.org/officeDocument/2006/relationships" id="257" r:id="R4c5523f84c9c4173"/>
-    <p:sldId xmlns:r="http://schemas.openxmlformats.org/officeDocument/2006/relationships" id="258" r:id="Rac3669ab81f548da"/>
-    <p:sldId xmlns:r="http://schemas.openxmlformats.org/officeDocument/2006/relationships" id="259" r:id="Re315f48afea24bf3"/>
-    <p:sldId xmlns:r="http://schemas.openxmlformats.org/officeDocument/2006/relationships" id="260" r:id="R658251d49ec94dc4"/>
-    <p:sldId xmlns:r="http://schemas.openxmlformats.org/officeDocument/2006/relationships" id="261" r:id="R6dd2094094424d27"/>
-    <p:sldId xmlns:r="http://schemas.openxmlformats.org/officeDocument/2006/relationships" id="262" r:id="R97b5e5630ac14a01"/>
+    <p:sldId xmlns:r="http://schemas.openxmlformats.org/officeDocument/2006/relationships" id="256" r:id="Re0db7bc1f14c4b6c"/>
+    <p:sldId xmlns:r="http://schemas.openxmlformats.org/officeDocument/2006/relationships" id="257" r:id="R2f51b9001dc345ad"/>
+    <p:sldId xmlns:r="http://schemas.openxmlformats.org/officeDocument/2006/relationships" id="258" r:id="R9cf8cc73950b4cfe"/>
+    <p:sldId xmlns:r="http://schemas.openxmlformats.org/officeDocument/2006/relationships" id="259" r:id="Ra38110e758634e27"/>
+    <p:sldId xmlns:r="http://schemas.openxmlformats.org/officeDocument/2006/relationships" id="260" r:id="R98c792ba31af484a"/>
+    <p:sldId xmlns:r="http://schemas.openxmlformats.org/officeDocument/2006/relationships" id="261" r:id="R2f4cc16b75fb4165"/>
+    <p:sldId xmlns:r="http://schemas.openxmlformats.org/officeDocument/2006/relationships" id="262" r:id="R3ec9014c327e46d4"/>
   </p:sldIdLst>
   <p:sldSz cx="12192000" cy="6858000"/>
   <p:notesSz cx="6858000" cy="9144000"/>
@@ -1076,7 +1076,7 @@
   </p:cSld>
   <p:clrMap bg1="lt1" tx1="dk1" bg2="lt2" tx2="dk2" accent1="accent1" accent2="accent2" accent3="accent3" accent4="accent4" accent5="accent5" accent6="accent6" hlink="hlink" folHlink="folHlink"/>
   <p:sldLayoutIdLst>
-    <p:sldLayoutId xmlns:r="http://schemas.openxmlformats.org/officeDocument/2006/relationships" id="2147483649" r:id="R95c7e8cca22843b5"/>
+    <p:sldLayoutId xmlns:r="http://schemas.openxmlformats.org/officeDocument/2006/relationships" id="2147483649" r:id="Ra9f69782bed045a7"/>
   </p:sldLayoutIdLst>
   <p:txStyles>
     <p:titleStyle>
@@ -1627,7 +1627,7 @@
           <p:cNvPr id="7" name="cover-kicker">
             <a:extLst xmlns:a="http://schemas.openxmlformats.org/drawingml/2006/main">
               <a:ext uri="{FF2B5EF4-FFF2-40B4-BE49-F238E27FC236}">
-                <a16:creationId xmlns:a16="http://schemas.microsoft.com/office/drawing/2014/main" id="{4B7B93E2-6442-4270-AE4F-B64538F39974}"/>
+                <a16:creationId xmlns:a16="http://schemas.microsoft.com/office/drawing/2014/main" id="{44EDAB85-9CA0-41FA-AFAE-4F4DC911EC5A}"/>
               </a:ext>
             </a:extLst>
           </p:cNvPr>
@@ -1683,7 +1683,7 @@
           <p:cNvPr id="2" name="cover-title">
             <a:extLst xmlns:a="http://schemas.openxmlformats.org/drawingml/2006/main">
               <a:ext uri="{FF2B5EF4-FFF2-40B4-BE49-F238E27FC236}">
-                <a16:creationId xmlns:a16="http://schemas.microsoft.com/office/drawing/2014/main" id="{CD4A67E8-893A-4EB1-9204-B81B03D1816C}"/>
+                <a16:creationId xmlns:a16="http://schemas.microsoft.com/office/drawing/2014/main" id="{DA85B106-9B37-4F8E-A495-623AB6786401}"/>
               </a:ext>
             </a:extLst>
           </p:cNvPr>
@@ -1762,7 +1762,7 @@
           <p:cNvPr id="3" name="cover-subtitle">
             <a:extLst xmlns:a="http://schemas.openxmlformats.org/drawingml/2006/main">
               <a:ext uri="{FF2B5EF4-FFF2-40B4-BE49-F238E27FC236}">
-                <a16:creationId xmlns:a16="http://schemas.microsoft.com/office/drawing/2014/main" id="{2664A089-42F5-44B7-831E-8FD64B314969}"/>
+                <a16:creationId xmlns:a16="http://schemas.microsoft.com/office/drawing/2014/main" id="{6D59CBBF-992D-410E-95BC-C357D04D404E}"/>
               </a:ext>
             </a:extLst>
           </p:cNvPr>
@@ -1818,7 +1818,7 @@
           <p:cNvPr id="4" name="cover-image-frame">
             <a:extLst xmlns:a="http://schemas.openxmlformats.org/drawingml/2006/main">
               <a:ext uri="{FF2B5EF4-FFF2-40B4-BE49-F238E27FC236}">
-                <a16:creationId xmlns:a16="http://schemas.microsoft.com/office/drawing/2014/main" id="{B554C5A4-C2B8-4CFF-9A43-5C8F4917F7C2}"/>
+                <a16:creationId xmlns:a16="http://schemas.microsoft.com/office/drawing/2014/main" id="{060A676C-439E-46D5-A3A3-5FD0A1BE01CC}"/>
               </a:ext>
             </a:extLst>
           </p:cNvPr>
@@ -1857,7 +1857,7 @@
           <p:nvPr/>
         </p:nvPicPr>
         <p:blipFill>
-          <a:blip xmlns:r="http://schemas.openxmlformats.org/officeDocument/2006/relationships" xmlns:a="http://schemas.openxmlformats.org/drawingml/2006/main" r:embed="Rbe76d691cd0e4aac"/>
+          <a:blip xmlns:r="http://schemas.openxmlformats.org/officeDocument/2006/relationships" xmlns:a="http://schemas.openxmlformats.org/drawingml/2006/main" r:embed="R31596e66177f49b0"/>
           <a:stretch xmlns:a="http://schemas.openxmlformats.org/drawingml/2006/main"/>
         </p:blipFill>
         <p:spPr>
@@ -1877,7 +1877,7 @@
           <p:cNvPr id="6" name="cover-status">
             <a:extLst xmlns:a="http://schemas.openxmlformats.org/drawingml/2006/main">
               <a:ext uri="{FF2B5EF4-FFF2-40B4-BE49-F238E27FC236}">
-                <a16:creationId xmlns:a16="http://schemas.microsoft.com/office/drawing/2014/main" id="{15AAC152-9414-47E5-B35E-5D2E9FCC4838}"/>
+                <a16:creationId xmlns:a16="http://schemas.microsoft.com/office/drawing/2014/main" id="{B644A593-264A-4732-9205-8CE43D05F4AE}"/>
               </a:ext>
             </a:extLst>
           </p:cNvPr>
@@ -1931,7 +1931,7 @@
     </p:spTree>
     <p:extLst>
       <p:ext uri="{BB962C8B-B14F-4D97-AF65-F5344CB8AC3E}">
-        <p14:creationId xmlns:p14="http://schemas.microsoft.com/office/powerpoint/2010/main" val="1706827009"/>
+        <p14:creationId xmlns:p14="http://schemas.microsoft.com/office/powerpoint/2010/main" val="2066008530"/>
       </p:ext>
     </p:extLst>
   </p:cSld>
@@ -1962,7 +1962,7 @@
           <p:cNvPr id="9" name="title-2">
             <a:extLst xmlns:a="http://schemas.openxmlformats.org/drawingml/2006/main">
               <a:ext uri="{FF2B5EF4-FFF2-40B4-BE49-F238E27FC236}">
-                <a16:creationId xmlns:a16="http://schemas.microsoft.com/office/drawing/2014/main" id="{A1283ABD-A432-4E85-8769-9450E8AAAD10}"/>
+                <a16:creationId xmlns:a16="http://schemas.microsoft.com/office/drawing/2014/main" id="{6A59B239-41D3-4BB4-B2D8-0A6CAEDFA5AF}"/>
               </a:ext>
             </a:extLst>
           </p:cNvPr>
@@ -2018,7 +2018,7 @@
           <p:cNvPr id="2" name="page-2">
             <a:extLst xmlns:a="http://schemas.openxmlformats.org/drawingml/2006/main">
               <a:ext uri="{FF2B5EF4-FFF2-40B4-BE49-F238E27FC236}">
-                <a16:creationId xmlns:a16="http://schemas.microsoft.com/office/drawing/2014/main" id="{A27105BC-7324-4AA9-A9D8-90E2F185D9E1}"/>
+                <a16:creationId xmlns:a16="http://schemas.microsoft.com/office/drawing/2014/main" id="{F9FF8748-5551-47C4-9A91-0E56D91BF357}"/>
               </a:ext>
             </a:extLst>
           </p:cNvPr>
@@ -2074,7 +2074,7 @@
           <p:cNvPr id="3" name="before-label">
             <a:extLst xmlns:a="http://schemas.openxmlformats.org/drawingml/2006/main">
               <a:ext uri="{FF2B5EF4-FFF2-40B4-BE49-F238E27FC236}">
-                <a16:creationId xmlns:a16="http://schemas.microsoft.com/office/drawing/2014/main" id="{B45CADA3-BAB2-40F8-BC44-CFDCD51AA752}"/>
+                <a16:creationId xmlns:a16="http://schemas.microsoft.com/office/drawing/2014/main" id="{A09A24D7-4AC2-4228-81FD-3A703C3FA71C}"/>
               </a:ext>
             </a:extLst>
           </p:cNvPr>
@@ -2130,7 +2130,7 @@
           <p:cNvPr id="4" name="after-label">
             <a:extLst xmlns:a="http://schemas.openxmlformats.org/drawingml/2006/main">
               <a:ext uri="{FF2B5EF4-FFF2-40B4-BE49-F238E27FC236}">
-                <a16:creationId xmlns:a16="http://schemas.microsoft.com/office/drawing/2014/main" id="{3164679E-B971-43CC-8418-CD44429943B5}"/>
+                <a16:creationId xmlns:a16="http://schemas.microsoft.com/office/drawing/2014/main" id="{8EF9A651-1A04-435C-B43C-0EAEA97A7FA5}"/>
               </a:ext>
             </a:extLst>
           </p:cNvPr>
@@ -2190,7 +2190,7 @@
           <p:nvPr/>
         </p:nvPicPr>
         <p:blipFill>
-          <a:blip xmlns:r="http://schemas.openxmlformats.org/officeDocument/2006/relationships" xmlns:a="http://schemas.openxmlformats.org/drawingml/2006/main" r:embed="R73321c643e4d4662"/>
+          <a:blip xmlns:r="http://schemas.openxmlformats.org/officeDocument/2006/relationships" xmlns:a="http://schemas.openxmlformats.org/drawingml/2006/main" r:embed="R99b197b1fd4542b4"/>
           <a:stretch xmlns:a="http://schemas.openxmlformats.org/drawingml/2006/main"/>
         </p:blipFill>
         <p:spPr>
@@ -2214,7 +2214,7 @@
           <p:nvPr/>
         </p:nvPicPr>
         <p:blipFill>
-          <a:blip xmlns:r="http://schemas.openxmlformats.org/officeDocument/2006/relationships" xmlns:a="http://schemas.openxmlformats.org/drawingml/2006/main" r:embed="R9d0db0d874a24d4f"/>
+          <a:blip xmlns:r="http://schemas.openxmlformats.org/officeDocument/2006/relationships" xmlns:a="http://schemas.openxmlformats.org/drawingml/2006/main" r:embed="R9be2001d20fa478f"/>
           <a:stretch xmlns:a="http://schemas.openxmlformats.org/drawingml/2006/main"/>
         </p:blipFill>
         <p:spPr>
@@ -2234,7 +2234,7 @@
           <p:cNvPr id="7" name="before-copy">
             <a:extLst xmlns:a="http://schemas.openxmlformats.org/drawingml/2006/main">
               <a:ext uri="{FF2B5EF4-FFF2-40B4-BE49-F238E27FC236}">
-                <a16:creationId xmlns:a16="http://schemas.microsoft.com/office/drawing/2014/main" id="{C4066924-24C7-4FEA-8B6B-E52E75A6FA92}"/>
+                <a16:creationId xmlns:a16="http://schemas.microsoft.com/office/drawing/2014/main" id="{C96CEB9B-4BD4-487B-8DA6-9C8B7927EDDF}"/>
               </a:ext>
             </a:extLst>
           </p:cNvPr>
@@ -2290,7 +2290,7 @@
           <p:cNvPr id="8" name="after-copy">
             <a:extLst xmlns:a="http://schemas.openxmlformats.org/drawingml/2006/main">
               <a:ext uri="{FF2B5EF4-FFF2-40B4-BE49-F238E27FC236}">
-                <a16:creationId xmlns:a16="http://schemas.microsoft.com/office/drawing/2014/main" id="{D8F642DD-110A-44B0-AB46-C6DBAF828DF2}"/>
+                <a16:creationId xmlns:a16="http://schemas.microsoft.com/office/drawing/2014/main" id="{FEEEEFC7-DF75-4EF0-8F32-8422A1F3ADD5}"/>
               </a:ext>
             </a:extLst>
           </p:cNvPr>
@@ -2344,7 +2344,7 @@
     </p:spTree>
     <p:extLst>
       <p:ext uri="{BB962C8B-B14F-4D97-AF65-F5344CB8AC3E}">
-        <p14:creationId xmlns:p14="http://schemas.microsoft.com/office/powerpoint/2010/main" val="430419967"/>
+        <p14:creationId xmlns:p14="http://schemas.microsoft.com/office/powerpoint/2010/main" val="492909890"/>
       </p:ext>
     </p:extLst>
   </p:cSld>
@@ -2375,7 +2375,7 @@
           <p:cNvPr id="15" name="title-3">
             <a:extLst xmlns:a="http://schemas.openxmlformats.org/drawingml/2006/main">
               <a:ext uri="{FF2B5EF4-FFF2-40B4-BE49-F238E27FC236}">
-                <a16:creationId xmlns:a16="http://schemas.microsoft.com/office/drawing/2014/main" id="{75B0F050-EE6B-405E-A8FB-6143546661FE}"/>
+                <a16:creationId xmlns:a16="http://schemas.microsoft.com/office/drawing/2014/main" id="{F6C5915F-2FB4-4731-B205-801CB87AA208}"/>
               </a:ext>
             </a:extLst>
           </p:cNvPr>
@@ -2431,7 +2431,7 @@
           <p:cNvPr id="2" name="page-3">
             <a:extLst xmlns:a="http://schemas.openxmlformats.org/drawingml/2006/main">
               <a:ext uri="{FF2B5EF4-FFF2-40B4-BE49-F238E27FC236}">
-                <a16:creationId xmlns:a16="http://schemas.microsoft.com/office/drawing/2014/main" id="{7BD68930-1D90-4E70-8434-7E1146E69B72}"/>
+                <a16:creationId xmlns:a16="http://schemas.microsoft.com/office/drawing/2014/main" id="{3C42D8C1-17AE-4548-8901-E0BCC987E90F}"/>
               </a:ext>
             </a:extLst>
           </p:cNvPr>
@@ -2487,7 +2487,7 @@
           <p:cNvPr id="3" name="state-0">
             <a:extLst xmlns:a="http://schemas.openxmlformats.org/drawingml/2006/main">
               <a:ext uri="{FF2B5EF4-FFF2-40B4-BE49-F238E27FC236}">
-                <a16:creationId xmlns:a16="http://schemas.microsoft.com/office/drawing/2014/main" id="{0BEEDC12-5BF6-4506-9389-0B6D328AA036}"/>
+                <a16:creationId xmlns:a16="http://schemas.microsoft.com/office/drawing/2014/main" id="{73229EC2-C3E1-4467-9BBD-4E9DC2404E98}"/>
               </a:ext>
             </a:extLst>
           </p:cNvPr>
@@ -2522,7 +2522,7 @@
           <p:cNvPr id="4" name="state-label-0">
             <a:extLst xmlns:a="http://schemas.openxmlformats.org/drawingml/2006/main">
               <a:ext uri="{FF2B5EF4-FFF2-40B4-BE49-F238E27FC236}">
-                <a16:creationId xmlns:a16="http://schemas.microsoft.com/office/drawing/2014/main" id="{4E5D7712-E169-41E6-8C93-56D3FA538880}"/>
+                <a16:creationId xmlns:a16="http://schemas.microsoft.com/office/drawing/2014/main" id="{C151347E-3165-472E-B8B6-58920F392CC1}"/>
               </a:ext>
             </a:extLst>
           </p:cNvPr>
@@ -2578,7 +2578,7 @@
           <p:cNvPr id="5" name="state-detail-0">
             <a:extLst xmlns:a="http://schemas.openxmlformats.org/drawingml/2006/main">
               <a:ext uri="{FF2B5EF4-FFF2-40B4-BE49-F238E27FC236}">
-                <a16:creationId xmlns:a16="http://schemas.microsoft.com/office/drawing/2014/main" id="{9CC6A1E6-7539-4D38-A178-7E3965CF8D7F}"/>
+                <a16:creationId xmlns:a16="http://schemas.microsoft.com/office/drawing/2014/main" id="{D7B65244-CE02-444D-B93B-05A7DA6D1681}"/>
               </a:ext>
             </a:extLst>
           </p:cNvPr>
@@ -2634,7 +2634,7 @@
           <p:cNvPr id="6" name="state-1">
             <a:extLst xmlns:a="http://schemas.openxmlformats.org/drawingml/2006/main">
               <a:ext uri="{FF2B5EF4-FFF2-40B4-BE49-F238E27FC236}">
-                <a16:creationId xmlns:a16="http://schemas.microsoft.com/office/drawing/2014/main" id="{3A2B37F0-680C-4C4A-87AC-71C6F649439E}"/>
+                <a16:creationId xmlns:a16="http://schemas.microsoft.com/office/drawing/2014/main" id="{928C2664-C3CE-416F-B60F-6EDDEBAC5D76}"/>
               </a:ext>
             </a:extLst>
           </p:cNvPr>
@@ -2669,7 +2669,7 @@
           <p:cNvPr id="7" name="state-label-1">
             <a:extLst xmlns:a="http://schemas.openxmlformats.org/drawingml/2006/main">
               <a:ext uri="{FF2B5EF4-FFF2-40B4-BE49-F238E27FC236}">
-                <a16:creationId xmlns:a16="http://schemas.microsoft.com/office/drawing/2014/main" id="{6DD98BBE-53C5-452F-B8C7-081631B85979}"/>
+                <a16:creationId xmlns:a16="http://schemas.microsoft.com/office/drawing/2014/main" id="{6F3C2DD6-5F12-44A7-8EC7-D188FC3BB4DA}"/>
               </a:ext>
             </a:extLst>
           </p:cNvPr>
@@ -2725,7 +2725,7 @@
           <p:cNvPr id="8" name="state-detail-1">
             <a:extLst xmlns:a="http://schemas.openxmlformats.org/drawingml/2006/main">
               <a:ext uri="{FF2B5EF4-FFF2-40B4-BE49-F238E27FC236}">
-                <a16:creationId xmlns:a16="http://schemas.microsoft.com/office/drawing/2014/main" id="{8E51167F-478E-4FD4-B3E6-91D1925B7BC6}"/>
+                <a16:creationId xmlns:a16="http://schemas.microsoft.com/office/drawing/2014/main" id="{5384EB28-58A7-49A7-8A28-C3C171040B90}"/>
               </a:ext>
             </a:extLst>
           </p:cNvPr>
@@ -2781,7 +2781,7 @@
           <p:cNvPr id="9" name="state-2">
             <a:extLst xmlns:a="http://schemas.openxmlformats.org/drawingml/2006/main">
               <a:ext uri="{FF2B5EF4-FFF2-40B4-BE49-F238E27FC236}">
-                <a16:creationId xmlns:a16="http://schemas.microsoft.com/office/drawing/2014/main" id="{508A98F1-E253-4DF6-87E5-C765A653FE57}"/>
+                <a16:creationId xmlns:a16="http://schemas.microsoft.com/office/drawing/2014/main" id="{506E73F2-8B24-4E8D-AF4B-88C3C850B03F}"/>
               </a:ext>
             </a:extLst>
           </p:cNvPr>
@@ -2816,7 +2816,7 @@
           <p:cNvPr id="10" name="state-label-2">
             <a:extLst xmlns:a="http://schemas.openxmlformats.org/drawingml/2006/main">
               <a:ext uri="{FF2B5EF4-FFF2-40B4-BE49-F238E27FC236}">
-                <a16:creationId xmlns:a16="http://schemas.microsoft.com/office/drawing/2014/main" id="{03E5AF0B-B361-4F1B-888C-390D535E7848}"/>
+                <a16:creationId xmlns:a16="http://schemas.microsoft.com/office/drawing/2014/main" id="{C7BDEA3B-C56B-4F1F-9CDF-0C9DD8602C9F}"/>
               </a:ext>
             </a:extLst>
           </p:cNvPr>
@@ -2872,7 +2872,7 @@
           <p:cNvPr id="11" name="state-detail-2">
             <a:extLst xmlns:a="http://schemas.openxmlformats.org/drawingml/2006/main">
               <a:ext uri="{FF2B5EF4-FFF2-40B4-BE49-F238E27FC236}">
-                <a16:creationId xmlns:a16="http://schemas.microsoft.com/office/drawing/2014/main" id="{C5B1CAF8-47B3-4E01-A1C3-78BFB4F5F308}"/>
+                <a16:creationId xmlns:a16="http://schemas.microsoft.com/office/drawing/2014/main" id="{C14F4E4C-8FC2-43BF-8DBC-4A077E3140AB}"/>
               </a:ext>
             </a:extLst>
           </p:cNvPr>
@@ -2928,7 +2928,7 @@
           <p:cNvPr id="12" name="state-3">
             <a:extLst xmlns:a="http://schemas.openxmlformats.org/drawingml/2006/main">
               <a:ext uri="{FF2B5EF4-FFF2-40B4-BE49-F238E27FC236}">
-                <a16:creationId xmlns:a16="http://schemas.microsoft.com/office/drawing/2014/main" id="{835489CD-574C-4B2D-B382-FA54F6C9742A}"/>
+                <a16:creationId xmlns:a16="http://schemas.microsoft.com/office/drawing/2014/main" id="{5F24A556-ED89-450A-BF58-FA0CFD3E7EE4}"/>
               </a:ext>
             </a:extLst>
           </p:cNvPr>
@@ -2963,7 +2963,7 @@
           <p:cNvPr id="13" name="state-label-3">
             <a:extLst xmlns:a="http://schemas.openxmlformats.org/drawingml/2006/main">
               <a:ext uri="{FF2B5EF4-FFF2-40B4-BE49-F238E27FC236}">
-                <a16:creationId xmlns:a16="http://schemas.microsoft.com/office/drawing/2014/main" id="{0770E9D6-A9C5-4992-9EAB-ABF33EE58428}"/>
+                <a16:creationId xmlns:a16="http://schemas.microsoft.com/office/drawing/2014/main" id="{EEC98F29-3D47-44BF-9EEF-2D62B957D582}"/>
               </a:ext>
             </a:extLst>
           </p:cNvPr>
@@ -3019,7 +3019,7 @@
           <p:cNvPr id="14" name="state-detail-3">
             <a:extLst xmlns:a="http://schemas.openxmlformats.org/drawingml/2006/main">
               <a:ext uri="{FF2B5EF4-FFF2-40B4-BE49-F238E27FC236}">
-                <a16:creationId xmlns:a16="http://schemas.microsoft.com/office/drawing/2014/main" id="{D96A8BC2-60FE-47A2-9EEA-873F9533715B}"/>
+                <a16:creationId xmlns:a16="http://schemas.microsoft.com/office/drawing/2014/main" id="{2D4A5D7D-B9F1-4594-99E5-82E82C9446D5}"/>
               </a:ext>
             </a:extLst>
           </p:cNvPr>
@@ -3073,7 +3073,7 @@
     </p:spTree>
     <p:extLst>
       <p:ext uri="{BB962C8B-B14F-4D97-AF65-F5344CB8AC3E}">
-        <p14:creationId xmlns:p14="http://schemas.microsoft.com/office/powerpoint/2010/main" val="1726701621"/>
+        <p14:creationId xmlns:p14="http://schemas.microsoft.com/office/powerpoint/2010/main" val="1678163203"/>
       </p:ext>
     </p:extLst>
   </p:cSld>
@@ -3104,7 +3104,7 @@
           <p:cNvPr id="11" name="title-4">
             <a:extLst xmlns:a="http://schemas.openxmlformats.org/drawingml/2006/main">
               <a:ext uri="{FF2B5EF4-FFF2-40B4-BE49-F238E27FC236}">
-                <a16:creationId xmlns:a16="http://schemas.microsoft.com/office/drawing/2014/main" id="{A94BB092-25C0-41AC-A3EC-796817B2E124}"/>
+                <a16:creationId xmlns:a16="http://schemas.microsoft.com/office/drawing/2014/main" id="{937FDF77-4814-4777-B99D-0D4F677D8284}"/>
               </a:ext>
             </a:extLst>
           </p:cNvPr>
@@ -3150,7 +3150,7 @@
                 <a:ea typeface="Malgun Gothic"/>
                 <a:cs typeface="Malgun Gothic"/>
               </a:rPr>
-              <a:t>작업 버튼과 Footer를 별도 영역으로 분리했습니다</a:t>
+              <a:t>작업 버튼은 떨어뜨리고 탐색 버튼은 계속 보이게 했습니다</a:t>
             </a:r>
           </a:p>
         </p:txBody>
@@ -3160,7 +3160,7 @@
           <p:cNvPr id="2" name="page-4">
             <a:extLst xmlns:a="http://schemas.openxmlformats.org/drawingml/2006/main">
               <a:ext uri="{FF2B5EF4-FFF2-40B4-BE49-F238E27FC236}">
-                <a16:creationId xmlns:a16="http://schemas.microsoft.com/office/drawing/2014/main" id="{3129D753-EEFC-4FFB-A7DD-D71ADCFE576E}"/>
+                <a16:creationId xmlns:a16="http://schemas.microsoft.com/office/drawing/2014/main" id="{8FAEFE5B-0EB6-414A-980E-EBFA15D1C767}"/>
               </a:ext>
             </a:extLst>
           </p:cNvPr>
@@ -3220,7 +3220,7 @@
           <p:nvPr/>
         </p:nvPicPr>
         <p:blipFill>
-          <a:blip xmlns:r="http://schemas.openxmlformats.org/officeDocument/2006/relationships" xmlns:a="http://schemas.openxmlformats.org/drawingml/2006/main" r:embed="R844661b7a9fc46a5"/>
+          <a:blip xmlns:r="http://schemas.openxmlformats.org/officeDocument/2006/relationships" xmlns:a="http://schemas.openxmlformats.org/drawingml/2006/main" r:embed="R5de5d359253b4595"/>
           <a:stretch xmlns:a="http://schemas.openxmlformats.org/drawingml/2006/main"/>
         </p:blipFill>
         <p:spPr>
@@ -3240,7 +3240,7 @@
           <p:cNvPr id="4" name="mobile-fact-1">
             <a:extLst xmlns:a="http://schemas.openxmlformats.org/drawingml/2006/main">
               <a:ext uri="{FF2B5EF4-FFF2-40B4-BE49-F238E27FC236}">
-                <a16:creationId xmlns:a16="http://schemas.microsoft.com/office/drawing/2014/main" id="{15C9C83B-D3F8-4456-8C5F-CBC306A688E7}"/>
+                <a16:creationId xmlns:a16="http://schemas.microsoft.com/office/drawing/2014/main" id="{A4DBB530-6B45-4AC2-AAA1-A2938A6FB20F}"/>
               </a:ext>
             </a:extLst>
           </p:cNvPr>
@@ -3296,7 +3296,7 @@
           <p:cNvPr id="5" name="mobile-desc-1">
             <a:extLst xmlns:a="http://schemas.openxmlformats.org/drawingml/2006/main">
               <a:ext uri="{FF2B5EF4-FFF2-40B4-BE49-F238E27FC236}">
-                <a16:creationId xmlns:a16="http://schemas.microsoft.com/office/drawing/2014/main" id="{738E5E57-66FA-4596-9CAE-6DED76A0752B}"/>
+                <a16:creationId xmlns:a16="http://schemas.microsoft.com/office/drawing/2014/main" id="{1B402E6C-4059-4129-83BC-C4BBAC234E93}"/>
               </a:ext>
             </a:extLst>
           </p:cNvPr>
@@ -3342,7 +3342,7 @@
                 <a:ea typeface="Malgun Gothic"/>
                 <a:cs typeface="Malgun Gothic"/>
               </a:rPr>
-              <a:t>카드 아래 답장 작업 영역</a:t>
+              <a:t>답장·좋아요·더 보기 사이 간격</a:t>
             </a:r>
           </a:p>
         </p:txBody>
@@ -3352,7 +3352,7 @@
           <p:cNvPr id="6" name="mobile-fact-2">
             <a:extLst xmlns:a="http://schemas.openxmlformats.org/drawingml/2006/main">
               <a:ext uri="{FF2B5EF4-FFF2-40B4-BE49-F238E27FC236}">
-                <a16:creationId xmlns:a16="http://schemas.microsoft.com/office/drawing/2014/main" id="{9CBB2B0B-B879-4EAA-B56C-3DC917E757F8}"/>
+                <a16:creationId xmlns:a16="http://schemas.microsoft.com/office/drawing/2014/main" id="{26EE0772-1C59-400A-9F8D-EA6EB6AE3071}"/>
               </a:ext>
             </a:extLst>
           </p:cNvPr>
@@ -3398,7 +3398,7 @@
                 <a:ea typeface="Malgun Gothic"/>
                 <a:cs typeface="Malgun Gothic"/>
               </a:rPr>
-              <a:t>1px</a:t>
+              <a:t>40px</a:t>
             </a:r>
           </a:p>
         </p:txBody>
@@ -3408,7 +3408,7 @@
           <p:cNvPr id="7" name="mobile-desc-2">
             <a:extLst xmlns:a="http://schemas.openxmlformats.org/drawingml/2006/main">
               <a:ext uri="{FF2B5EF4-FFF2-40B4-BE49-F238E27FC236}">
-                <a16:creationId xmlns:a16="http://schemas.microsoft.com/office/drawing/2014/main" id="{833FCFD6-EFE7-4BDF-9FA5-654341881078}"/>
+                <a16:creationId xmlns:a16="http://schemas.microsoft.com/office/drawing/2014/main" id="{2F045A5A-5F22-4D47-AC9A-895C89505237}"/>
               </a:ext>
             </a:extLst>
           </p:cNvPr>
@@ -3420,7 +3420,7 @@
         <p:spPr>
           <a:xfrm xmlns:a="http://schemas.openxmlformats.org/drawingml/2006/main">
             <a:off x="7124700" y="3009900"/>
-            <a:ext cx="3714750" cy="419100"/>
+            <a:ext cx="4095750" cy="419100"/>
           </a:xfrm>
           <a:prstGeom xmlns:a="http://schemas.openxmlformats.org/drawingml/2006/main" prst="rect">
             <a:avLst/>
@@ -3436,7 +3436,7 @@
           <a:lstStyle xmlns:a="http://schemas.openxmlformats.org/drawingml/2006/main"/>
           <a:p xmlns:a="http://schemas.openxmlformats.org/drawingml/2006/main">
             <a:pPr algn="l">
-              <a:defRPr sz="1800" b="0">
+              <a:defRPr sz="1650" b="0">
                 <a:solidFill>
                   <a:srgbClr val="52647D"/>
                 </a:solidFill>
@@ -3446,7 +3446,7 @@
               </a:defRPr>
             </a:pPr>
             <a:r>
-              <a:rPr sz="1800" b="0">
+              <a:rPr sz="1650" b="0">
                 <a:solidFill>
                   <a:srgbClr val="52647D"/>
                 </a:solidFill>
@@ -3454,7 +3454,7 @@
                 <a:ea typeface="Malgun Gothic"/>
                 <a:cs typeface="Malgun Gothic"/>
               </a:rPr>
-              <a:t>카드·버튼 오른쪽 선 차이</a:t>
+              <a:t>목록 복귀 후 유지되는 탐색 버튼</a:t>
             </a:r>
           </a:p>
         </p:txBody>
@@ -3464,7 +3464,7 @@
           <p:cNvPr id="8" name="mobile-fact-3">
             <a:extLst xmlns:a="http://schemas.openxmlformats.org/drawingml/2006/main">
               <a:ext uri="{FF2B5EF4-FFF2-40B4-BE49-F238E27FC236}">
-                <a16:creationId xmlns:a16="http://schemas.microsoft.com/office/drawing/2014/main" id="{BA9E087C-4DBE-434A-8A2C-EDB518CFD0C5}"/>
+                <a16:creationId xmlns:a16="http://schemas.microsoft.com/office/drawing/2014/main" id="{B9C2971F-DEB0-4423-B997-CD3769D3AC3A}"/>
               </a:ext>
             </a:extLst>
           </p:cNvPr>
@@ -3520,7 +3520,7 @@
           <p:cNvPr id="9" name="mobile-desc-3">
             <a:extLst xmlns:a="http://schemas.openxmlformats.org/drawingml/2006/main">
               <a:ext uri="{FF2B5EF4-FFF2-40B4-BE49-F238E27FC236}">
-                <a16:creationId xmlns:a16="http://schemas.microsoft.com/office/drawing/2014/main" id="{109EBE79-AA01-4765-9F11-0E4AF7F8BB28}"/>
+                <a16:creationId xmlns:a16="http://schemas.microsoft.com/office/drawing/2014/main" id="{665229CE-59FF-4903-B5D7-82145E7ABF86}"/>
               </a:ext>
             </a:extLst>
           </p:cNvPr>
@@ -3576,7 +3576,7 @@
           <p:cNvPr id="10" name="mobile-foot">
             <a:extLst xmlns:a="http://schemas.openxmlformats.org/drawingml/2006/main">
               <a:ext uri="{FF2B5EF4-FFF2-40B4-BE49-F238E27FC236}">
-                <a16:creationId xmlns:a16="http://schemas.microsoft.com/office/drawing/2014/main" id="{7FBADA9F-BA90-43A1-841A-4AA87EE07104}"/>
+                <a16:creationId xmlns:a16="http://schemas.microsoft.com/office/drawing/2014/main" id="{3C407D7C-F146-4A98-85FD-3C106C567A36}"/>
               </a:ext>
             </a:extLst>
           </p:cNvPr>
@@ -3622,7 +3622,7 @@
                 <a:ea typeface="Malgun Gothic"/>
                 <a:cs typeface="Malgun Gothic"/>
               </a:rPr>
-              <a:t>중복 구분선 제거 · 비로그인 답장 비활성 · 모바일 넘침 0px</a:t>
+              <a:t>버튼 겹침 0px · 비로그인 답장 비활성 · 모바일 넘침 0px</a:t>
             </a:r>
           </a:p>
         </p:txBody>
@@ -3630,7 +3630,7 @@
     </p:spTree>
     <p:extLst>
       <p:ext uri="{BB962C8B-B14F-4D97-AF65-F5344CB8AC3E}">
-        <p14:creationId xmlns:p14="http://schemas.microsoft.com/office/powerpoint/2010/main" val="122365680"/>
+        <p14:creationId xmlns:p14="http://schemas.microsoft.com/office/powerpoint/2010/main" val="584293047"/>
       </p:ext>
     </p:extLst>
   </p:cSld>
@@ -3661,7 +3661,7 @@
           <p:cNvPr id="20" name="title-5">
             <a:extLst xmlns:a="http://schemas.openxmlformats.org/drawingml/2006/main">
               <a:ext uri="{FF2B5EF4-FFF2-40B4-BE49-F238E27FC236}">
-                <a16:creationId xmlns:a16="http://schemas.microsoft.com/office/drawing/2014/main" id="{D9F1C426-603E-4E77-A1F0-62AAC17DD675}"/>
+                <a16:creationId xmlns:a16="http://schemas.microsoft.com/office/drawing/2014/main" id="{D1B6AF8B-1C0C-4B24-92DC-C11CC8D01406}"/>
               </a:ext>
             </a:extLst>
           </p:cNvPr>
@@ -3717,7 +3717,7 @@
           <p:cNvPr id="2" name="page-5">
             <a:extLst xmlns:a="http://schemas.openxmlformats.org/drawingml/2006/main">
               <a:ext uri="{FF2B5EF4-FFF2-40B4-BE49-F238E27FC236}">
-                <a16:creationId xmlns:a16="http://schemas.microsoft.com/office/drawing/2014/main" id="{23F6A1F1-7E1F-462F-9621-A96BA6FF8180}"/>
+                <a16:creationId xmlns:a16="http://schemas.microsoft.com/office/drawing/2014/main" id="{3F19CAC8-CBF2-4689-922E-BA12F5FCF3AD}"/>
               </a:ext>
             </a:extLst>
           </p:cNvPr>
@@ -3773,7 +3773,7 @@
           <p:cNvPr id="3" name="arrow-0">
             <a:extLst xmlns:a="http://schemas.openxmlformats.org/drawingml/2006/main">
               <a:ext uri="{FF2B5EF4-FFF2-40B4-BE49-F238E27FC236}">
-                <a16:creationId xmlns:a16="http://schemas.microsoft.com/office/drawing/2014/main" id="{AB83CF44-8E5E-4759-832C-417E6F527F77}"/>
+                <a16:creationId xmlns:a16="http://schemas.microsoft.com/office/drawing/2014/main" id="{ABC06285-81F8-440B-AD21-8024515BF4A0}"/>
               </a:ext>
             </a:extLst>
           </p:cNvPr>
@@ -3829,7 +3829,7 @@
           <p:cNvPr id="4" name="phase-0">
             <a:extLst xmlns:a="http://schemas.openxmlformats.org/drawingml/2006/main">
               <a:ext uri="{FF2B5EF4-FFF2-40B4-BE49-F238E27FC236}">
-                <a16:creationId xmlns:a16="http://schemas.microsoft.com/office/drawing/2014/main" id="{7B8FD691-1520-43AB-BA99-FEBC32BC54AA}"/>
+                <a16:creationId xmlns:a16="http://schemas.microsoft.com/office/drawing/2014/main" id="{D38288E8-BEF8-4BB5-BAD1-26E914DCBCAC}"/>
               </a:ext>
             </a:extLst>
           </p:cNvPr>
@@ -3864,7 +3864,7 @@
           <p:cNvPr id="5" name="phase-label-0">
             <a:extLst xmlns:a="http://schemas.openxmlformats.org/drawingml/2006/main">
               <a:ext uri="{FF2B5EF4-FFF2-40B4-BE49-F238E27FC236}">
-                <a16:creationId xmlns:a16="http://schemas.microsoft.com/office/drawing/2014/main" id="{F995D299-D9DE-4620-B3F9-20A651318EBF}"/>
+                <a16:creationId xmlns:a16="http://schemas.microsoft.com/office/drawing/2014/main" id="{DACDA921-067D-41BF-B612-FE53F42CC73D}"/>
               </a:ext>
             </a:extLst>
           </p:cNvPr>
@@ -3943,7 +3943,7 @@
           <p:cNvPr id="6" name="phase-http-0">
             <a:extLst xmlns:a="http://schemas.openxmlformats.org/drawingml/2006/main">
               <a:ext uri="{FF2B5EF4-FFF2-40B4-BE49-F238E27FC236}">
-                <a16:creationId xmlns:a16="http://schemas.microsoft.com/office/drawing/2014/main" id="{AAECC66E-49BA-49BE-8D6F-814C0CB2BC1F}"/>
+                <a16:creationId xmlns:a16="http://schemas.microsoft.com/office/drawing/2014/main" id="{17639F4F-2A06-48A4-8464-D9D42F5FA1AD}"/>
               </a:ext>
             </a:extLst>
           </p:cNvPr>
@@ -3999,7 +3999,7 @@
           <p:cNvPr id="7" name="arrow-1">
             <a:extLst xmlns:a="http://schemas.openxmlformats.org/drawingml/2006/main">
               <a:ext uri="{FF2B5EF4-FFF2-40B4-BE49-F238E27FC236}">
-                <a16:creationId xmlns:a16="http://schemas.microsoft.com/office/drawing/2014/main" id="{5C3DD1B8-0BA2-4AA5-AE2B-A8A1B11208C3}"/>
+                <a16:creationId xmlns:a16="http://schemas.microsoft.com/office/drawing/2014/main" id="{A7B400B7-72C0-4E3A-A45F-F20DA4BF3712}"/>
               </a:ext>
             </a:extLst>
           </p:cNvPr>
@@ -4055,7 +4055,7 @@
           <p:cNvPr id="8" name="phase-1">
             <a:extLst xmlns:a="http://schemas.openxmlformats.org/drawingml/2006/main">
               <a:ext uri="{FF2B5EF4-FFF2-40B4-BE49-F238E27FC236}">
-                <a16:creationId xmlns:a16="http://schemas.microsoft.com/office/drawing/2014/main" id="{04F0BD8A-CC9B-47B5-8142-71D1D19857D4}"/>
+                <a16:creationId xmlns:a16="http://schemas.microsoft.com/office/drawing/2014/main" id="{DF3C7E49-D298-47CC-B57A-2A22DFBF1C0C}"/>
               </a:ext>
             </a:extLst>
           </p:cNvPr>
@@ -4090,7 +4090,7 @@
           <p:cNvPr id="9" name="phase-label-1">
             <a:extLst xmlns:a="http://schemas.openxmlformats.org/drawingml/2006/main">
               <a:ext uri="{FF2B5EF4-FFF2-40B4-BE49-F238E27FC236}">
-                <a16:creationId xmlns:a16="http://schemas.microsoft.com/office/drawing/2014/main" id="{A580E82A-444F-4B6C-BBDB-BC56DBFF3B5D}"/>
+                <a16:creationId xmlns:a16="http://schemas.microsoft.com/office/drawing/2014/main" id="{8049972A-C486-4A24-912D-E5AD1805CE52}"/>
               </a:ext>
             </a:extLst>
           </p:cNvPr>
@@ -4169,7 +4169,7 @@
           <p:cNvPr id="10" name="phase-http-1">
             <a:extLst xmlns:a="http://schemas.openxmlformats.org/drawingml/2006/main">
               <a:ext uri="{FF2B5EF4-FFF2-40B4-BE49-F238E27FC236}">
-                <a16:creationId xmlns:a16="http://schemas.microsoft.com/office/drawing/2014/main" id="{C82E3898-C652-4870-AD21-16B0C2BE347F}"/>
+                <a16:creationId xmlns:a16="http://schemas.microsoft.com/office/drawing/2014/main" id="{F2B2DB35-82A8-49D9-A387-D0561CBD1A9A}"/>
               </a:ext>
             </a:extLst>
           </p:cNvPr>
@@ -4225,7 +4225,7 @@
           <p:cNvPr id="11" name="arrow-2">
             <a:extLst xmlns:a="http://schemas.openxmlformats.org/drawingml/2006/main">
               <a:ext uri="{FF2B5EF4-FFF2-40B4-BE49-F238E27FC236}">
-                <a16:creationId xmlns:a16="http://schemas.microsoft.com/office/drawing/2014/main" id="{D0B1051D-001D-485F-B0B8-962CC4580FC1}"/>
+                <a16:creationId xmlns:a16="http://schemas.microsoft.com/office/drawing/2014/main" id="{CC0CB8DC-05FE-40F6-A51B-91224C5B2CEB}"/>
               </a:ext>
             </a:extLst>
           </p:cNvPr>
@@ -4281,7 +4281,7 @@
           <p:cNvPr id="12" name="phase-2">
             <a:extLst xmlns:a="http://schemas.openxmlformats.org/drawingml/2006/main">
               <a:ext uri="{FF2B5EF4-FFF2-40B4-BE49-F238E27FC236}">
-                <a16:creationId xmlns:a16="http://schemas.microsoft.com/office/drawing/2014/main" id="{709BF6E1-758D-48E1-A1B0-17B6D4CBE4FA}"/>
+                <a16:creationId xmlns:a16="http://schemas.microsoft.com/office/drawing/2014/main" id="{B1E525E3-C2F8-4653-B0F3-AA403872DD26}"/>
               </a:ext>
             </a:extLst>
           </p:cNvPr>
@@ -4316,7 +4316,7 @@
           <p:cNvPr id="13" name="phase-label-2">
             <a:extLst xmlns:a="http://schemas.openxmlformats.org/drawingml/2006/main">
               <a:ext uri="{FF2B5EF4-FFF2-40B4-BE49-F238E27FC236}">
-                <a16:creationId xmlns:a16="http://schemas.microsoft.com/office/drawing/2014/main" id="{5B3B237C-267C-4280-8F0C-F238E8027E2A}"/>
+                <a16:creationId xmlns:a16="http://schemas.microsoft.com/office/drawing/2014/main" id="{115C5B96-982B-4611-881C-EFAB365DBA28}"/>
               </a:ext>
             </a:extLst>
           </p:cNvPr>
@@ -4395,7 +4395,7 @@
           <p:cNvPr id="14" name="phase-http-2">
             <a:extLst xmlns:a="http://schemas.openxmlformats.org/drawingml/2006/main">
               <a:ext uri="{FF2B5EF4-FFF2-40B4-BE49-F238E27FC236}">
-                <a16:creationId xmlns:a16="http://schemas.microsoft.com/office/drawing/2014/main" id="{D8B27D83-C915-4520-82DA-3AF234744CE4}"/>
+                <a16:creationId xmlns:a16="http://schemas.microsoft.com/office/drawing/2014/main" id="{7250EC67-5488-4F70-8CC5-39184EDE462A}"/>
               </a:ext>
             </a:extLst>
           </p:cNvPr>
@@ -4451,7 +4451,7 @@
           <p:cNvPr id="15" name="phase-3">
             <a:extLst xmlns:a="http://schemas.openxmlformats.org/drawingml/2006/main">
               <a:ext uri="{FF2B5EF4-FFF2-40B4-BE49-F238E27FC236}">
-                <a16:creationId xmlns:a16="http://schemas.microsoft.com/office/drawing/2014/main" id="{78828B45-037A-4A7D-ADB8-2CDB9BAA9FDE}"/>
+                <a16:creationId xmlns:a16="http://schemas.microsoft.com/office/drawing/2014/main" id="{4F036147-723D-4040-A1A0-86DA7B45AF99}"/>
               </a:ext>
             </a:extLst>
           </p:cNvPr>
@@ -4486,7 +4486,7 @@
           <p:cNvPr id="16" name="phase-label-3">
             <a:extLst xmlns:a="http://schemas.openxmlformats.org/drawingml/2006/main">
               <a:ext uri="{FF2B5EF4-FFF2-40B4-BE49-F238E27FC236}">
-                <a16:creationId xmlns:a16="http://schemas.microsoft.com/office/drawing/2014/main" id="{A111AD34-6EAC-4873-85E5-EC1A3821F84A}"/>
+                <a16:creationId xmlns:a16="http://schemas.microsoft.com/office/drawing/2014/main" id="{97A16CCC-330F-444B-AF36-07CF9CA33BEA}"/>
               </a:ext>
             </a:extLst>
           </p:cNvPr>
@@ -4565,7 +4565,7 @@
           <p:cNvPr id="17" name="phase-http-3">
             <a:extLst xmlns:a="http://schemas.openxmlformats.org/drawingml/2006/main">
               <a:ext uri="{FF2B5EF4-FFF2-40B4-BE49-F238E27FC236}">
-                <a16:creationId xmlns:a16="http://schemas.microsoft.com/office/drawing/2014/main" id="{6C409C6D-D26C-463B-B2CA-7E96D252AAF6}"/>
+                <a16:creationId xmlns:a16="http://schemas.microsoft.com/office/drawing/2014/main" id="{17812BFD-34FB-495A-936B-F2DBD2CCA81D}"/>
               </a:ext>
             </a:extLst>
           </p:cNvPr>
@@ -4621,7 +4621,7 @@
           <p:cNvPr id="18" name="integrity-count">
             <a:extLst xmlns:a="http://schemas.openxmlformats.org/drawingml/2006/main">
               <a:ext uri="{FF2B5EF4-FFF2-40B4-BE49-F238E27FC236}">
-                <a16:creationId xmlns:a16="http://schemas.microsoft.com/office/drawing/2014/main" id="{82827E20-F3D1-4539-8348-6F7134CDB650}"/>
+                <a16:creationId xmlns:a16="http://schemas.microsoft.com/office/drawing/2014/main" id="{57F3C0F3-0B0A-4480-9AA3-46FC971FB350}"/>
               </a:ext>
             </a:extLst>
           </p:cNvPr>
@@ -4677,7 +4677,7 @@
           <p:cNvPr id="19" name="integrity-hash">
             <a:extLst xmlns:a="http://schemas.openxmlformats.org/drawingml/2006/main">
               <a:ext uri="{FF2B5EF4-FFF2-40B4-BE49-F238E27FC236}">
-                <a16:creationId xmlns:a16="http://schemas.microsoft.com/office/drawing/2014/main" id="{F62C0DBE-98A4-44FA-BCCF-1D2C224A6349}"/>
+                <a16:creationId xmlns:a16="http://schemas.microsoft.com/office/drawing/2014/main" id="{AF3F3645-4198-4430-9952-A189A4221480}"/>
               </a:ext>
             </a:extLst>
           </p:cNvPr>
@@ -4731,7 +4731,7 @@
     </p:spTree>
     <p:extLst>
       <p:ext uri="{BB962C8B-B14F-4D97-AF65-F5344CB8AC3E}">
-        <p14:creationId xmlns:p14="http://schemas.microsoft.com/office/powerpoint/2010/main" val="646802830"/>
+        <p14:creationId xmlns:p14="http://schemas.microsoft.com/office/powerpoint/2010/main" val="1268514586"/>
       </p:ext>
     </p:extLst>
   </p:cSld>
@@ -4762,7 +4762,7 @@
           <p:cNvPr id="16" name="title-6">
             <a:extLst xmlns:a="http://schemas.openxmlformats.org/drawingml/2006/main">
               <a:ext uri="{FF2B5EF4-FFF2-40B4-BE49-F238E27FC236}">
-                <a16:creationId xmlns:a16="http://schemas.microsoft.com/office/drawing/2014/main" id="{7664DB93-0890-4CD0-BD39-20B103397E5B}"/>
+                <a16:creationId xmlns:a16="http://schemas.microsoft.com/office/drawing/2014/main" id="{AC38669B-900D-41E8-AC8C-EF54389AE298}"/>
               </a:ext>
             </a:extLst>
           </p:cNvPr>
@@ -4818,7 +4818,7 @@
           <p:cNvPr id="2" name="page-6">
             <a:extLst xmlns:a="http://schemas.openxmlformats.org/drawingml/2006/main">
               <a:ext uri="{FF2B5EF4-FFF2-40B4-BE49-F238E27FC236}">
-                <a16:creationId xmlns:a16="http://schemas.microsoft.com/office/drawing/2014/main" id="{3F3A5760-3F2F-457F-ABB9-7B9E4EF27D5F}"/>
+                <a16:creationId xmlns:a16="http://schemas.microsoft.com/office/drawing/2014/main" id="{945FD937-88D4-42B1-AE27-AF3D2DBF76FC}"/>
               </a:ext>
             </a:extLst>
           </p:cNvPr>
@@ -4874,7 +4874,7 @@
           <p:cNvPr id="3" name="flow-arrow-1">
             <a:extLst xmlns:a="http://schemas.openxmlformats.org/drawingml/2006/main">
               <a:ext uri="{FF2B5EF4-FFF2-40B4-BE49-F238E27FC236}">
-                <a16:creationId xmlns:a16="http://schemas.microsoft.com/office/drawing/2014/main" id="{4D7A4765-56DD-4DBF-AAA8-B068FC4C526F}"/>
+                <a16:creationId xmlns:a16="http://schemas.microsoft.com/office/drawing/2014/main" id="{D09F5280-E891-44FB-B111-8F0DC003EB18}"/>
               </a:ext>
             </a:extLst>
           </p:cNvPr>
@@ -4930,7 +4930,7 @@
           <p:cNvPr id="4" name="flow-arrow-2">
             <a:extLst xmlns:a="http://schemas.openxmlformats.org/drawingml/2006/main">
               <a:ext uri="{FF2B5EF4-FFF2-40B4-BE49-F238E27FC236}">
-                <a16:creationId xmlns:a16="http://schemas.microsoft.com/office/drawing/2014/main" id="{75C0061E-10B5-4ECC-A97F-E90FF44C661F}"/>
+                <a16:creationId xmlns:a16="http://schemas.microsoft.com/office/drawing/2014/main" id="{259D4B19-0273-4C67-BAF5-A1FDD7AF0DD4}"/>
               </a:ext>
             </a:extLst>
           </p:cNvPr>
@@ -4986,7 +4986,7 @@
           <p:cNvPr id="5" name="flarum-core">
             <a:extLst xmlns:a="http://schemas.openxmlformats.org/drawingml/2006/main">
               <a:ext uri="{FF2B5EF4-FFF2-40B4-BE49-F238E27FC236}">
-                <a16:creationId xmlns:a16="http://schemas.microsoft.com/office/drawing/2014/main" id="{67F19C25-F757-4A5E-8A6F-69650BABCB80}"/>
+                <a16:creationId xmlns:a16="http://schemas.microsoft.com/office/drawing/2014/main" id="{11C0B420-47CA-4289-9252-11A7A229851F}"/>
               </a:ext>
             </a:extLst>
           </p:cNvPr>
@@ -5021,7 +5021,7 @@
           <p:cNvPr id="6" name="theme-extension">
             <a:extLst xmlns:a="http://schemas.openxmlformats.org/drawingml/2006/main">
               <a:ext uri="{FF2B5EF4-FFF2-40B4-BE49-F238E27FC236}">
-                <a16:creationId xmlns:a16="http://schemas.microsoft.com/office/drawing/2014/main" id="{B833FFDA-1BB0-450B-B2F8-0963868ED475}"/>
+                <a16:creationId xmlns:a16="http://schemas.microsoft.com/office/drawing/2014/main" id="{8731385E-A661-445B-8CF4-37759F934AB0}"/>
               </a:ext>
             </a:extLst>
           </p:cNvPr>
@@ -5056,7 +5056,7 @@
           <p:cNvPr id="7" name="community-ui">
             <a:extLst xmlns:a="http://schemas.openxmlformats.org/drawingml/2006/main">
               <a:ext uri="{FF2B5EF4-FFF2-40B4-BE49-F238E27FC236}">
-                <a16:creationId xmlns:a16="http://schemas.microsoft.com/office/drawing/2014/main" id="{ED714F1C-07CD-49DA-A70D-0CDE790DC00D}"/>
+                <a16:creationId xmlns:a16="http://schemas.microsoft.com/office/drawing/2014/main" id="{E9CB076B-8C14-4EE5-B93B-A1F523DEBA05}"/>
               </a:ext>
             </a:extLst>
           </p:cNvPr>
@@ -5091,7 +5091,7 @@
           <p:cNvPr id="8" name="flarum-core-title">
             <a:extLst xmlns:a="http://schemas.openxmlformats.org/drawingml/2006/main">
               <a:ext uri="{FF2B5EF4-FFF2-40B4-BE49-F238E27FC236}">
-                <a16:creationId xmlns:a16="http://schemas.microsoft.com/office/drawing/2014/main" id="{19738C16-A9C1-4AE6-BB29-0820BE5E755D}"/>
+                <a16:creationId xmlns:a16="http://schemas.microsoft.com/office/drawing/2014/main" id="{CE978517-FE5E-4BE7-8429-29189AAF4B8B}"/>
               </a:ext>
             </a:extLst>
           </p:cNvPr>
@@ -5147,7 +5147,7 @@
           <p:cNvPr id="9" name="flarum-core-copy">
             <a:extLst xmlns:a="http://schemas.openxmlformats.org/drawingml/2006/main">
               <a:ext uri="{FF2B5EF4-FFF2-40B4-BE49-F238E27FC236}">
-                <a16:creationId xmlns:a16="http://schemas.microsoft.com/office/drawing/2014/main" id="{9B4AF3F7-E82F-4BD2-959E-CE6247FA041B}"/>
+                <a16:creationId xmlns:a16="http://schemas.microsoft.com/office/drawing/2014/main" id="{55C89E07-5A36-400A-95B8-587A38D1CD29}"/>
               </a:ext>
             </a:extLst>
           </p:cNvPr>
@@ -5203,7 +5203,7 @@
           <p:cNvPr id="10" name="theme-title">
             <a:extLst xmlns:a="http://schemas.openxmlformats.org/drawingml/2006/main">
               <a:ext uri="{FF2B5EF4-FFF2-40B4-BE49-F238E27FC236}">
-                <a16:creationId xmlns:a16="http://schemas.microsoft.com/office/drawing/2014/main" id="{D0688116-870D-40B4-9B55-AEB2C58FFA45}"/>
+                <a16:creationId xmlns:a16="http://schemas.microsoft.com/office/drawing/2014/main" id="{FFC9188F-3C95-4CA6-A5FB-6645E2FFD1C9}"/>
               </a:ext>
             </a:extLst>
           </p:cNvPr>
@@ -5282,7 +5282,7 @@
           <p:cNvPr id="11" name="theme-copy">
             <a:extLst xmlns:a="http://schemas.openxmlformats.org/drawingml/2006/main">
               <a:ext uri="{FF2B5EF4-FFF2-40B4-BE49-F238E27FC236}">
-                <a16:creationId xmlns:a16="http://schemas.microsoft.com/office/drawing/2014/main" id="{64116E7C-269E-4C5D-8134-0C8223544F8C}"/>
+                <a16:creationId xmlns:a16="http://schemas.microsoft.com/office/drawing/2014/main" id="{1B94DDC6-6F1C-4829-AD58-D275A164D1F5}"/>
               </a:ext>
             </a:extLst>
           </p:cNvPr>
@@ -5338,7 +5338,7 @@
           <p:cNvPr id="12" name="ui-title">
             <a:extLst xmlns:a="http://schemas.openxmlformats.org/drawingml/2006/main">
               <a:ext uri="{FF2B5EF4-FFF2-40B4-BE49-F238E27FC236}">
-                <a16:creationId xmlns:a16="http://schemas.microsoft.com/office/drawing/2014/main" id="{D029147F-6E28-4610-AC1E-F747C2A21AEC}"/>
+                <a16:creationId xmlns:a16="http://schemas.microsoft.com/office/drawing/2014/main" id="{ECD4990E-1485-4FB7-B2D0-71545F94EC0F}"/>
               </a:ext>
             </a:extLst>
           </p:cNvPr>
@@ -5394,7 +5394,7 @@
           <p:cNvPr id="13" name="ui-copy">
             <a:extLst xmlns:a="http://schemas.openxmlformats.org/drawingml/2006/main">
               <a:ext uri="{FF2B5EF4-FFF2-40B4-BE49-F238E27FC236}">
-                <a16:creationId xmlns:a16="http://schemas.microsoft.com/office/drawing/2014/main" id="{65DA998A-74FA-476A-96F4-4E5182B0832E}"/>
+                <a16:creationId xmlns:a16="http://schemas.microsoft.com/office/drawing/2014/main" id="{8891AB65-BCFF-4CB8-A7D3-90EE12641EB9}"/>
               </a:ext>
             </a:extLst>
           </p:cNvPr>
@@ -5450,7 +5450,7 @@
           <p:cNvPr id="14" name="rollback-strip">
             <a:extLst xmlns:a="http://schemas.openxmlformats.org/drawingml/2006/main">
               <a:ext uri="{FF2B5EF4-FFF2-40B4-BE49-F238E27FC236}">
-                <a16:creationId xmlns:a16="http://schemas.microsoft.com/office/drawing/2014/main" id="{1F45A8B5-6E2F-4440-AFDD-EB9F32979E3A}"/>
+                <a16:creationId xmlns:a16="http://schemas.microsoft.com/office/drawing/2014/main" id="{0EFD781E-6AB5-4642-BF06-25570255AB65}"/>
               </a:ext>
             </a:extLst>
           </p:cNvPr>
@@ -5485,7 +5485,7 @@
           <p:cNvPr id="15" name="rollback-copy">
             <a:extLst xmlns:a="http://schemas.openxmlformats.org/drawingml/2006/main">
               <a:ext uri="{FF2B5EF4-FFF2-40B4-BE49-F238E27FC236}">
-                <a16:creationId xmlns:a16="http://schemas.microsoft.com/office/drawing/2014/main" id="{6036D89C-F74E-4AB0-8A3D-0B2034F9C622}"/>
+                <a16:creationId xmlns:a16="http://schemas.microsoft.com/office/drawing/2014/main" id="{462E9009-C284-4BAD-ABA0-787961CB2511}"/>
               </a:ext>
             </a:extLst>
           </p:cNvPr>
@@ -5539,7 +5539,7 @@
     </p:spTree>
     <p:extLst>
       <p:ext uri="{BB962C8B-B14F-4D97-AF65-F5344CB8AC3E}">
-        <p14:creationId xmlns:p14="http://schemas.microsoft.com/office/powerpoint/2010/main" val="1478164979"/>
+        <p14:creationId xmlns:p14="http://schemas.microsoft.com/office/powerpoint/2010/main" val="980475301"/>
       </p:ext>
     </p:extLst>
   </p:cSld>
@@ -5570,7 +5570,7 @@
           <p:cNvPr id="8" name="close-kicker">
             <a:extLst xmlns:a="http://schemas.openxmlformats.org/drawingml/2006/main">
               <a:ext uri="{FF2B5EF4-FFF2-40B4-BE49-F238E27FC236}">
-                <a16:creationId xmlns:a16="http://schemas.microsoft.com/office/drawing/2014/main" id="{FECF0E5B-C068-4021-9581-CC58CA474BD4}"/>
+                <a16:creationId xmlns:a16="http://schemas.microsoft.com/office/drawing/2014/main" id="{E2BF843F-1DDF-4428-96EC-6644D6813039}"/>
               </a:ext>
             </a:extLst>
           </p:cNvPr>
@@ -5626,7 +5626,7 @@
           <p:cNvPr id="2" name="close-title">
             <a:extLst xmlns:a="http://schemas.openxmlformats.org/drawingml/2006/main">
               <a:ext uri="{FF2B5EF4-FFF2-40B4-BE49-F238E27FC236}">
-                <a16:creationId xmlns:a16="http://schemas.microsoft.com/office/drawing/2014/main" id="{F9FE3DB6-675F-44C2-9E8A-DADE365136AE}"/>
+                <a16:creationId xmlns:a16="http://schemas.microsoft.com/office/drawing/2014/main" id="{925F3904-3DD4-441B-A5A3-D0C71D5A2271}"/>
               </a:ext>
             </a:extLst>
           </p:cNvPr>
@@ -5705,7 +5705,7 @@
           <p:cNvPr id="3" name="close-detail">
             <a:extLst xmlns:a="http://schemas.openxmlformats.org/drawingml/2006/main">
               <a:ext uri="{FF2B5EF4-FFF2-40B4-BE49-F238E27FC236}">
-                <a16:creationId xmlns:a16="http://schemas.microsoft.com/office/drawing/2014/main" id="{A1CAB914-18CF-4BE4-B5D7-88DA13335A84}"/>
+                <a16:creationId xmlns:a16="http://schemas.microsoft.com/office/drawing/2014/main" id="{9DFF5793-B944-4C8A-8771-FA3B995FCB1A}"/>
               </a:ext>
             </a:extLst>
           </p:cNvPr>
@@ -5784,7 +5784,7 @@
           <p:cNvPr id="4" name="close-status">
             <a:extLst xmlns:a="http://schemas.openxmlformats.org/drawingml/2006/main">
               <a:ext uri="{FF2B5EF4-FFF2-40B4-BE49-F238E27FC236}">
-                <a16:creationId xmlns:a16="http://schemas.microsoft.com/office/drawing/2014/main" id="{886A65CC-C403-48BE-A859-BA55364CBFC9}"/>
+                <a16:creationId xmlns:a16="http://schemas.microsoft.com/office/drawing/2014/main" id="{231CBF65-AF9A-4D93-B6C5-34E713F266F9}"/>
               </a:ext>
             </a:extLst>
           </p:cNvPr>
@@ -5819,7 +5819,7 @@
           <p:cNvPr id="5" name="close-go">
             <a:extLst xmlns:a="http://schemas.openxmlformats.org/drawingml/2006/main">
               <a:ext uri="{FF2B5EF4-FFF2-40B4-BE49-F238E27FC236}">
-                <a16:creationId xmlns:a16="http://schemas.microsoft.com/office/drawing/2014/main" id="{98678C02-5A3E-469A-941D-A45818F462B0}"/>
+                <a16:creationId xmlns:a16="http://schemas.microsoft.com/office/drawing/2014/main" id="{FDA05F06-79D5-41CC-820B-3B150EE34498}"/>
               </a:ext>
             </a:extLst>
           </p:cNvPr>
@@ -5875,7 +5875,7 @@
           <p:cNvPr id="6" name="close-condition">
             <a:extLst xmlns:a="http://schemas.openxmlformats.org/drawingml/2006/main">
               <a:ext uri="{FF2B5EF4-FFF2-40B4-BE49-F238E27FC236}">
-                <a16:creationId xmlns:a16="http://schemas.microsoft.com/office/drawing/2014/main" id="{7EB563E0-4F3A-44D9-A34D-A42189E14DE9}"/>
+                <a16:creationId xmlns:a16="http://schemas.microsoft.com/office/drawing/2014/main" id="{CF9BE8CB-4091-4CEC-937A-7F1A78C80104}"/>
               </a:ext>
             </a:extLst>
           </p:cNvPr>
@@ -5931,7 +5931,7 @@
           <p:cNvPr id="7" name="close-next">
             <a:extLst xmlns:a="http://schemas.openxmlformats.org/drawingml/2006/main">
               <a:ext uri="{FF2B5EF4-FFF2-40B4-BE49-F238E27FC236}">
-                <a16:creationId xmlns:a16="http://schemas.microsoft.com/office/drawing/2014/main" id="{276483CC-135F-45D4-8AF0-EF992BAF1C5D}"/>
+                <a16:creationId xmlns:a16="http://schemas.microsoft.com/office/drawing/2014/main" id="{616D2B61-FC20-4EE1-8114-BB98206AB142}"/>
               </a:ext>
             </a:extLst>
           </p:cNvPr>
@@ -5985,7 +5985,7 @@
     </p:spTree>
     <p:extLst>
       <p:ext uri="{BB962C8B-B14F-4D97-AF65-F5344CB8AC3E}">
-        <p14:creationId xmlns:p14="http://schemas.microsoft.com/office/powerpoint/2010/main" val="380533456"/>
+        <p14:creationId xmlns:p14="http://schemas.microsoft.com/office/powerpoint/2010/main" val="1288316793"/>
       </p:ext>
     </p:extLst>
   </p:cSld>

--- a/output/presentation/techflow-community-ui-modernization.pptx
+++ b/output/presentation/techflow-community-ui-modernization.pptx
@@ -2,19 +2,19 @@
 <file path=ppt/presentation.xml><?xml version="1.0" encoding="utf-8"?>
 <p:presentation xmlns:p="http://schemas.openxmlformats.org/presentationml/2006/main">
   <p:sldMasterIdLst>
-    <p:sldMasterId xmlns:r="http://schemas.openxmlformats.org/officeDocument/2006/relationships" id="2147483648" r:id="R8128d4a5547b40a3"/>
+    <p:sldMasterId xmlns:r="http://schemas.openxmlformats.org/officeDocument/2006/relationships" id="2147483648" r:id="R63f5159414f044da"/>
   </p:sldMasterIdLst>
   <p:notesMasterIdLst>
-    <p:notesMasterId xmlns:r="http://schemas.openxmlformats.org/officeDocument/2006/relationships" r:id="Rfe3d9586424b4b53"/>
+    <p:notesMasterId xmlns:r="http://schemas.openxmlformats.org/officeDocument/2006/relationships" r:id="R59709cfb86b8475e"/>
   </p:notesMasterIdLst>
   <p:sldIdLst>
-    <p:sldId xmlns:r="http://schemas.openxmlformats.org/officeDocument/2006/relationships" id="256" r:id="Re0db7bc1f14c4b6c"/>
-    <p:sldId xmlns:r="http://schemas.openxmlformats.org/officeDocument/2006/relationships" id="257" r:id="R2f51b9001dc345ad"/>
-    <p:sldId xmlns:r="http://schemas.openxmlformats.org/officeDocument/2006/relationships" id="258" r:id="R9cf8cc73950b4cfe"/>
-    <p:sldId xmlns:r="http://schemas.openxmlformats.org/officeDocument/2006/relationships" id="259" r:id="Ra38110e758634e27"/>
-    <p:sldId xmlns:r="http://schemas.openxmlformats.org/officeDocument/2006/relationships" id="260" r:id="R98c792ba31af484a"/>
-    <p:sldId xmlns:r="http://schemas.openxmlformats.org/officeDocument/2006/relationships" id="261" r:id="R2f4cc16b75fb4165"/>
-    <p:sldId xmlns:r="http://schemas.openxmlformats.org/officeDocument/2006/relationships" id="262" r:id="R3ec9014c327e46d4"/>
+    <p:sldId xmlns:r="http://schemas.openxmlformats.org/officeDocument/2006/relationships" id="256" r:id="R2ed5839423144767"/>
+    <p:sldId xmlns:r="http://schemas.openxmlformats.org/officeDocument/2006/relationships" id="257" r:id="R8efa73b4c9c44bc1"/>
+    <p:sldId xmlns:r="http://schemas.openxmlformats.org/officeDocument/2006/relationships" id="258" r:id="R38cfa703736f49fc"/>
+    <p:sldId xmlns:r="http://schemas.openxmlformats.org/officeDocument/2006/relationships" id="259" r:id="R3311dc320ebd4e58"/>
+    <p:sldId xmlns:r="http://schemas.openxmlformats.org/officeDocument/2006/relationships" id="260" r:id="Rb8741886a49e4f82"/>
+    <p:sldId xmlns:r="http://schemas.openxmlformats.org/officeDocument/2006/relationships" id="261" r:id="R764583b11a50492e"/>
+    <p:sldId xmlns:r="http://schemas.openxmlformats.org/officeDocument/2006/relationships" id="262" r:id="Rbca3b61c68164cef"/>
   </p:sldIdLst>
   <p:sldSz cx="12192000" cy="6858000"/>
   <p:notesSz cx="6858000" cy="9144000"/>
@@ -1076,7 +1076,7 @@
   </p:cSld>
   <p:clrMap bg1="lt1" tx1="dk1" bg2="lt2" tx2="dk2" accent1="accent1" accent2="accent2" accent3="accent3" accent4="accent4" accent5="accent5" accent6="accent6" hlink="hlink" folHlink="folHlink"/>
   <p:sldLayoutIdLst>
-    <p:sldLayoutId xmlns:r="http://schemas.openxmlformats.org/officeDocument/2006/relationships" id="2147483649" r:id="Ra9f69782bed045a7"/>
+    <p:sldLayoutId xmlns:r="http://schemas.openxmlformats.org/officeDocument/2006/relationships" id="2147483649" r:id="R3fc987c2950d44c0"/>
   </p:sldLayoutIdLst>
   <p:txStyles>
     <p:titleStyle>
@@ -1627,7 +1627,7 @@
           <p:cNvPr id="7" name="cover-kicker">
             <a:extLst xmlns:a="http://schemas.openxmlformats.org/drawingml/2006/main">
               <a:ext uri="{FF2B5EF4-FFF2-40B4-BE49-F238E27FC236}">
-                <a16:creationId xmlns:a16="http://schemas.microsoft.com/office/drawing/2014/main" id="{44EDAB85-9CA0-41FA-AFAE-4F4DC911EC5A}"/>
+                <a16:creationId xmlns:a16="http://schemas.microsoft.com/office/drawing/2014/main" id="{9A0330E9-194B-41BF-900F-382221BFDA2C}"/>
               </a:ext>
             </a:extLst>
           </p:cNvPr>
@@ -1683,7 +1683,7 @@
           <p:cNvPr id="2" name="cover-title">
             <a:extLst xmlns:a="http://schemas.openxmlformats.org/drawingml/2006/main">
               <a:ext uri="{FF2B5EF4-FFF2-40B4-BE49-F238E27FC236}">
-                <a16:creationId xmlns:a16="http://schemas.microsoft.com/office/drawing/2014/main" id="{DA85B106-9B37-4F8E-A495-623AB6786401}"/>
+                <a16:creationId xmlns:a16="http://schemas.microsoft.com/office/drawing/2014/main" id="{5C3EF223-1C80-4B80-8A67-B072F639CC13}"/>
               </a:ext>
             </a:extLst>
           </p:cNvPr>
@@ -1762,7 +1762,7 @@
           <p:cNvPr id="3" name="cover-subtitle">
             <a:extLst xmlns:a="http://schemas.openxmlformats.org/drawingml/2006/main">
               <a:ext uri="{FF2B5EF4-FFF2-40B4-BE49-F238E27FC236}">
-                <a16:creationId xmlns:a16="http://schemas.microsoft.com/office/drawing/2014/main" id="{6D59CBBF-992D-410E-95BC-C357D04D404E}"/>
+                <a16:creationId xmlns:a16="http://schemas.microsoft.com/office/drawing/2014/main" id="{99EAC020-E76E-4FAC-B818-E35BCD4E0220}"/>
               </a:ext>
             </a:extLst>
           </p:cNvPr>
@@ -1818,7 +1818,7 @@
           <p:cNvPr id="4" name="cover-image-frame">
             <a:extLst xmlns:a="http://schemas.openxmlformats.org/drawingml/2006/main">
               <a:ext uri="{FF2B5EF4-FFF2-40B4-BE49-F238E27FC236}">
-                <a16:creationId xmlns:a16="http://schemas.microsoft.com/office/drawing/2014/main" id="{060A676C-439E-46D5-A3A3-5FD0A1BE01CC}"/>
+                <a16:creationId xmlns:a16="http://schemas.microsoft.com/office/drawing/2014/main" id="{37A6AF82-4E2F-418A-A181-A925EFC82146}"/>
               </a:ext>
             </a:extLst>
           </p:cNvPr>
@@ -1857,7 +1857,7 @@
           <p:nvPr/>
         </p:nvPicPr>
         <p:blipFill>
-          <a:blip xmlns:r="http://schemas.openxmlformats.org/officeDocument/2006/relationships" xmlns:a="http://schemas.openxmlformats.org/drawingml/2006/main" r:embed="R31596e66177f49b0"/>
+          <a:blip xmlns:r="http://schemas.openxmlformats.org/officeDocument/2006/relationships" xmlns:a="http://schemas.openxmlformats.org/drawingml/2006/main" r:embed="R2a6aaa6d64804e2e"/>
           <a:stretch xmlns:a="http://schemas.openxmlformats.org/drawingml/2006/main"/>
         </p:blipFill>
         <p:spPr>
@@ -1877,7 +1877,7 @@
           <p:cNvPr id="6" name="cover-status">
             <a:extLst xmlns:a="http://schemas.openxmlformats.org/drawingml/2006/main">
               <a:ext uri="{FF2B5EF4-FFF2-40B4-BE49-F238E27FC236}">
-                <a16:creationId xmlns:a16="http://schemas.microsoft.com/office/drawing/2014/main" id="{B644A593-264A-4732-9205-8CE43D05F4AE}"/>
+                <a16:creationId xmlns:a16="http://schemas.microsoft.com/office/drawing/2014/main" id="{BBB26A31-C85C-4988-9466-F9DFE076D620}"/>
               </a:ext>
             </a:extLst>
           </p:cNvPr>
@@ -1931,7 +1931,7 @@
     </p:spTree>
     <p:extLst>
       <p:ext uri="{BB962C8B-B14F-4D97-AF65-F5344CB8AC3E}">
-        <p14:creationId xmlns:p14="http://schemas.microsoft.com/office/powerpoint/2010/main" val="2066008530"/>
+        <p14:creationId xmlns:p14="http://schemas.microsoft.com/office/powerpoint/2010/main" val="1334252184"/>
       </p:ext>
     </p:extLst>
   </p:cSld>
@@ -1962,7 +1962,7 @@
           <p:cNvPr id="9" name="title-2">
             <a:extLst xmlns:a="http://schemas.openxmlformats.org/drawingml/2006/main">
               <a:ext uri="{FF2B5EF4-FFF2-40B4-BE49-F238E27FC236}">
-                <a16:creationId xmlns:a16="http://schemas.microsoft.com/office/drawing/2014/main" id="{6A59B239-41D3-4BB4-B2D8-0A6CAEDFA5AF}"/>
+                <a16:creationId xmlns:a16="http://schemas.microsoft.com/office/drawing/2014/main" id="{AAE7FBF0-B623-42D1-A660-797511A7D590}"/>
               </a:ext>
             </a:extLst>
           </p:cNvPr>
@@ -2018,7 +2018,7 @@
           <p:cNvPr id="2" name="page-2">
             <a:extLst xmlns:a="http://schemas.openxmlformats.org/drawingml/2006/main">
               <a:ext uri="{FF2B5EF4-FFF2-40B4-BE49-F238E27FC236}">
-                <a16:creationId xmlns:a16="http://schemas.microsoft.com/office/drawing/2014/main" id="{F9FF8748-5551-47C4-9A91-0E56D91BF357}"/>
+                <a16:creationId xmlns:a16="http://schemas.microsoft.com/office/drawing/2014/main" id="{2E245F03-5874-4D4A-8C6F-F1FC99DA4F1F}"/>
               </a:ext>
             </a:extLst>
           </p:cNvPr>
@@ -2074,7 +2074,7 @@
           <p:cNvPr id="3" name="before-label">
             <a:extLst xmlns:a="http://schemas.openxmlformats.org/drawingml/2006/main">
               <a:ext uri="{FF2B5EF4-FFF2-40B4-BE49-F238E27FC236}">
-                <a16:creationId xmlns:a16="http://schemas.microsoft.com/office/drawing/2014/main" id="{A09A24D7-4AC2-4228-81FD-3A703C3FA71C}"/>
+                <a16:creationId xmlns:a16="http://schemas.microsoft.com/office/drawing/2014/main" id="{1F06B2F5-44AF-4478-B429-35EB24128898}"/>
               </a:ext>
             </a:extLst>
           </p:cNvPr>
@@ -2130,7 +2130,7 @@
           <p:cNvPr id="4" name="after-label">
             <a:extLst xmlns:a="http://schemas.openxmlformats.org/drawingml/2006/main">
               <a:ext uri="{FF2B5EF4-FFF2-40B4-BE49-F238E27FC236}">
-                <a16:creationId xmlns:a16="http://schemas.microsoft.com/office/drawing/2014/main" id="{8EF9A651-1A04-435C-B43C-0EAEA97A7FA5}"/>
+                <a16:creationId xmlns:a16="http://schemas.microsoft.com/office/drawing/2014/main" id="{2F0674CE-3350-40F7-8EE0-CDBBBFD4B92A}"/>
               </a:ext>
             </a:extLst>
           </p:cNvPr>
@@ -2190,7 +2190,7 @@
           <p:nvPr/>
         </p:nvPicPr>
         <p:blipFill>
-          <a:blip xmlns:r="http://schemas.openxmlformats.org/officeDocument/2006/relationships" xmlns:a="http://schemas.openxmlformats.org/drawingml/2006/main" r:embed="R99b197b1fd4542b4"/>
+          <a:blip xmlns:r="http://schemas.openxmlformats.org/officeDocument/2006/relationships" xmlns:a="http://schemas.openxmlformats.org/drawingml/2006/main" r:embed="Rda24966d90cc4e86"/>
           <a:stretch xmlns:a="http://schemas.openxmlformats.org/drawingml/2006/main"/>
         </p:blipFill>
         <p:spPr>
@@ -2214,7 +2214,7 @@
           <p:nvPr/>
         </p:nvPicPr>
         <p:blipFill>
-          <a:blip xmlns:r="http://schemas.openxmlformats.org/officeDocument/2006/relationships" xmlns:a="http://schemas.openxmlformats.org/drawingml/2006/main" r:embed="R9be2001d20fa478f"/>
+          <a:blip xmlns:r="http://schemas.openxmlformats.org/officeDocument/2006/relationships" xmlns:a="http://schemas.openxmlformats.org/drawingml/2006/main" r:embed="R232ccd0b8f634497"/>
           <a:stretch xmlns:a="http://schemas.openxmlformats.org/drawingml/2006/main"/>
         </p:blipFill>
         <p:spPr>
@@ -2234,7 +2234,7 @@
           <p:cNvPr id="7" name="before-copy">
             <a:extLst xmlns:a="http://schemas.openxmlformats.org/drawingml/2006/main">
               <a:ext uri="{FF2B5EF4-FFF2-40B4-BE49-F238E27FC236}">
-                <a16:creationId xmlns:a16="http://schemas.microsoft.com/office/drawing/2014/main" id="{C96CEB9B-4BD4-487B-8DA6-9C8B7927EDDF}"/>
+                <a16:creationId xmlns:a16="http://schemas.microsoft.com/office/drawing/2014/main" id="{F756C01D-01B0-42F5-A256-886EC1D02734}"/>
               </a:ext>
             </a:extLst>
           </p:cNvPr>
@@ -2290,7 +2290,7 @@
           <p:cNvPr id="8" name="after-copy">
             <a:extLst xmlns:a="http://schemas.openxmlformats.org/drawingml/2006/main">
               <a:ext uri="{FF2B5EF4-FFF2-40B4-BE49-F238E27FC236}">
-                <a16:creationId xmlns:a16="http://schemas.microsoft.com/office/drawing/2014/main" id="{FEEEEFC7-DF75-4EF0-8F32-8422A1F3ADD5}"/>
+                <a16:creationId xmlns:a16="http://schemas.microsoft.com/office/drawing/2014/main" id="{6CA01D67-31E7-45FC-B9F8-6B3B2D200B6F}"/>
               </a:ext>
             </a:extLst>
           </p:cNvPr>
@@ -2344,7 +2344,7 @@
     </p:spTree>
     <p:extLst>
       <p:ext uri="{BB962C8B-B14F-4D97-AF65-F5344CB8AC3E}">
-        <p14:creationId xmlns:p14="http://schemas.microsoft.com/office/powerpoint/2010/main" val="492909890"/>
+        <p14:creationId xmlns:p14="http://schemas.microsoft.com/office/powerpoint/2010/main" val="1819236491"/>
       </p:ext>
     </p:extLst>
   </p:cSld>
@@ -2375,7 +2375,7 @@
           <p:cNvPr id="15" name="title-3">
             <a:extLst xmlns:a="http://schemas.openxmlformats.org/drawingml/2006/main">
               <a:ext uri="{FF2B5EF4-FFF2-40B4-BE49-F238E27FC236}">
-                <a16:creationId xmlns:a16="http://schemas.microsoft.com/office/drawing/2014/main" id="{F6C5915F-2FB4-4731-B205-801CB87AA208}"/>
+                <a16:creationId xmlns:a16="http://schemas.microsoft.com/office/drawing/2014/main" id="{1E60B0A9-B532-4E78-BC8D-E3B4B4CA5664}"/>
               </a:ext>
             </a:extLst>
           </p:cNvPr>
@@ -2431,7 +2431,7 @@
           <p:cNvPr id="2" name="page-3">
             <a:extLst xmlns:a="http://schemas.openxmlformats.org/drawingml/2006/main">
               <a:ext uri="{FF2B5EF4-FFF2-40B4-BE49-F238E27FC236}">
-                <a16:creationId xmlns:a16="http://schemas.microsoft.com/office/drawing/2014/main" id="{3C42D8C1-17AE-4548-8901-E0BCC987E90F}"/>
+                <a16:creationId xmlns:a16="http://schemas.microsoft.com/office/drawing/2014/main" id="{5A9959C5-72AA-4C9B-A89D-81E4A4D3BA00}"/>
               </a:ext>
             </a:extLst>
           </p:cNvPr>
@@ -2487,7 +2487,7 @@
           <p:cNvPr id="3" name="state-0">
             <a:extLst xmlns:a="http://schemas.openxmlformats.org/drawingml/2006/main">
               <a:ext uri="{FF2B5EF4-FFF2-40B4-BE49-F238E27FC236}">
-                <a16:creationId xmlns:a16="http://schemas.microsoft.com/office/drawing/2014/main" id="{73229EC2-C3E1-4467-9BBD-4E9DC2404E98}"/>
+                <a16:creationId xmlns:a16="http://schemas.microsoft.com/office/drawing/2014/main" id="{57CAD589-C0C6-4592-911E-9EE5C5158512}"/>
               </a:ext>
             </a:extLst>
           </p:cNvPr>
@@ -2522,7 +2522,7 @@
           <p:cNvPr id="4" name="state-label-0">
             <a:extLst xmlns:a="http://schemas.openxmlformats.org/drawingml/2006/main">
               <a:ext uri="{FF2B5EF4-FFF2-40B4-BE49-F238E27FC236}">
-                <a16:creationId xmlns:a16="http://schemas.microsoft.com/office/drawing/2014/main" id="{C151347E-3165-472E-B8B6-58920F392CC1}"/>
+                <a16:creationId xmlns:a16="http://schemas.microsoft.com/office/drawing/2014/main" id="{A3E27905-1425-4068-A3FF-6607390BDE80}"/>
               </a:ext>
             </a:extLst>
           </p:cNvPr>
@@ -2578,7 +2578,7 @@
           <p:cNvPr id="5" name="state-detail-0">
             <a:extLst xmlns:a="http://schemas.openxmlformats.org/drawingml/2006/main">
               <a:ext uri="{FF2B5EF4-FFF2-40B4-BE49-F238E27FC236}">
-                <a16:creationId xmlns:a16="http://schemas.microsoft.com/office/drawing/2014/main" id="{D7B65244-CE02-444D-B93B-05A7DA6D1681}"/>
+                <a16:creationId xmlns:a16="http://schemas.microsoft.com/office/drawing/2014/main" id="{34CD7B58-91E0-4D8D-B493-800D34FE5528}"/>
               </a:ext>
             </a:extLst>
           </p:cNvPr>
@@ -2634,7 +2634,7 @@
           <p:cNvPr id="6" name="state-1">
             <a:extLst xmlns:a="http://schemas.openxmlformats.org/drawingml/2006/main">
               <a:ext uri="{FF2B5EF4-FFF2-40B4-BE49-F238E27FC236}">
-                <a16:creationId xmlns:a16="http://schemas.microsoft.com/office/drawing/2014/main" id="{928C2664-C3CE-416F-B60F-6EDDEBAC5D76}"/>
+                <a16:creationId xmlns:a16="http://schemas.microsoft.com/office/drawing/2014/main" id="{A9CFA82E-8849-4D6E-958F-1453392D7585}"/>
               </a:ext>
             </a:extLst>
           </p:cNvPr>
@@ -2669,7 +2669,7 @@
           <p:cNvPr id="7" name="state-label-1">
             <a:extLst xmlns:a="http://schemas.openxmlformats.org/drawingml/2006/main">
               <a:ext uri="{FF2B5EF4-FFF2-40B4-BE49-F238E27FC236}">
-                <a16:creationId xmlns:a16="http://schemas.microsoft.com/office/drawing/2014/main" id="{6F3C2DD6-5F12-44A7-8EC7-D188FC3BB4DA}"/>
+                <a16:creationId xmlns:a16="http://schemas.microsoft.com/office/drawing/2014/main" id="{791F9B0F-844A-4EF0-AFB7-CB09925D3978}"/>
               </a:ext>
             </a:extLst>
           </p:cNvPr>
@@ -2725,7 +2725,7 @@
           <p:cNvPr id="8" name="state-detail-1">
             <a:extLst xmlns:a="http://schemas.openxmlformats.org/drawingml/2006/main">
               <a:ext uri="{FF2B5EF4-FFF2-40B4-BE49-F238E27FC236}">
-                <a16:creationId xmlns:a16="http://schemas.microsoft.com/office/drawing/2014/main" id="{5384EB28-58A7-49A7-8A28-C3C171040B90}"/>
+                <a16:creationId xmlns:a16="http://schemas.microsoft.com/office/drawing/2014/main" id="{6AA105AB-7F98-45F5-92B7-5087B2E891F8}"/>
               </a:ext>
             </a:extLst>
           </p:cNvPr>
@@ -2781,7 +2781,7 @@
           <p:cNvPr id="9" name="state-2">
             <a:extLst xmlns:a="http://schemas.openxmlformats.org/drawingml/2006/main">
               <a:ext uri="{FF2B5EF4-FFF2-40B4-BE49-F238E27FC236}">
-                <a16:creationId xmlns:a16="http://schemas.microsoft.com/office/drawing/2014/main" id="{506E73F2-8B24-4E8D-AF4B-88C3C850B03F}"/>
+                <a16:creationId xmlns:a16="http://schemas.microsoft.com/office/drawing/2014/main" id="{ACAF8D84-CDD2-4653-BF24-0BC3BB0E23A1}"/>
               </a:ext>
             </a:extLst>
           </p:cNvPr>
@@ -2816,7 +2816,7 @@
           <p:cNvPr id="10" name="state-label-2">
             <a:extLst xmlns:a="http://schemas.openxmlformats.org/drawingml/2006/main">
               <a:ext uri="{FF2B5EF4-FFF2-40B4-BE49-F238E27FC236}">
-                <a16:creationId xmlns:a16="http://schemas.microsoft.com/office/drawing/2014/main" id="{C7BDEA3B-C56B-4F1F-9CDF-0C9DD8602C9F}"/>
+                <a16:creationId xmlns:a16="http://schemas.microsoft.com/office/drawing/2014/main" id="{359CE64C-822B-476B-A748-875B02591BC3}"/>
               </a:ext>
             </a:extLst>
           </p:cNvPr>
@@ -2872,7 +2872,7 @@
           <p:cNvPr id="11" name="state-detail-2">
             <a:extLst xmlns:a="http://schemas.openxmlformats.org/drawingml/2006/main">
               <a:ext uri="{FF2B5EF4-FFF2-40B4-BE49-F238E27FC236}">
-                <a16:creationId xmlns:a16="http://schemas.microsoft.com/office/drawing/2014/main" id="{C14F4E4C-8FC2-43BF-8DBC-4A077E3140AB}"/>
+                <a16:creationId xmlns:a16="http://schemas.microsoft.com/office/drawing/2014/main" id="{536D55E2-72EE-423E-B2BC-1EE041456B7C}"/>
               </a:ext>
             </a:extLst>
           </p:cNvPr>
@@ -2928,7 +2928,7 @@
           <p:cNvPr id="12" name="state-3">
             <a:extLst xmlns:a="http://schemas.openxmlformats.org/drawingml/2006/main">
               <a:ext uri="{FF2B5EF4-FFF2-40B4-BE49-F238E27FC236}">
-                <a16:creationId xmlns:a16="http://schemas.microsoft.com/office/drawing/2014/main" id="{5F24A556-ED89-450A-BF58-FA0CFD3E7EE4}"/>
+                <a16:creationId xmlns:a16="http://schemas.microsoft.com/office/drawing/2014/main" id="{D3213105-5BB4-487B-B406-C4B1611364D4}"/>
               </a:ext>
             </a:extLst>
           </p:cNvPr>
@@ -2963,7 +2963,7 @@
           <p:cNvPr id="13" name="state-label-3">
             <a:extLst xmlns:a="http://schemas.openxmlformats.org/drawingml/2006/main">
               <a:ext uri="{FF2B5EF4-FFF2-40B4-BE49-F238E27FC236}">
-                <a16:creationId xmlns:a16="http://schemas.microsoft.com/office/drawing/2014/main" id="{EEC98F29-3D47-44BF-9EEF-2D62B957D582}"/>
+                <a16:creationId xmlns:a16="http://schemas.microsoft.com/office/drawing/2014/main" id="{4E434153-1BFC-4569-92E2-1DCF32082D4B}"/>
               </a:ext>
             </a:extLst>
           </p:cNvPr>
@@ -3019,7 +3019,7 @@
           <p:cNvPr id="14" name="state-detail-3">
             <a:extLst xmlns:a="http://schemas.openxmlformats.org/drawingml/2006/main">
               <a:ext uri="{FF2B5EF4-FFF2-40B4-BE49-F238E27FC236}">
-                <a16:creationId xmlns:a16="http://schemas.microsoft.com/office/drawing/2014/main" id="{2D4A5D7D-B9F1-4594-99E5-82E82C9446D5}"/>
+                <a16:creationId xmlns:a16="http://schemas.microsoft.com/office/drawing/2014/main" id="{EB78D490-5192-4072-9704-7E2E9DE47080}"/>
               </a:ext>
             </a:extLst>
           </p:cNvPr>
@@ -3073,7 +3073,7 @@
     </p:spTree>
     <p:extLst>
       <p:ext uri="{BB962C8B-B14F-4D97-AF65-F5344CB8AC3E}">
-        <p14:creationId xmlns:p14="http://schemas.microsoft.com/office/powerpoint/2010/main" val="1678163203"/>
+        <p14:creationId xmlns:p14="http://schemas.microsoft.com/office/powerpoint/2010/main" val="1852196506"/>
       </p:ext>
     </p:extLst>
   </p:cSld>
@@ -3101,10 +3101,10 @@
       </p:grpSpPr>
       <p:sp>
         <p:nvSpPr>
-          <p:cNvPr id="11" name="title-4">
-            <a:extLst xmlns:a="http://schemas.openxmlformats.org/drawingml/2006/main">
-              <a:ext uri="{FF2B5EF4-FFF2-40B4-BE49-F238E27FC236}">
-                <a16:creationId xmlns:a16="http://schemas.microsoft.com/office/drawing/2014/main" id="{937FDF77-4814-4777-B99D-0D4F677D8284}"/>
+          <p:cNvPr id="9" name="title-4">
+            <a:extLst xmlns:a="http://schemas.openxmlformats.org/drawingml/2006/main">
+              <a:ext uri="{FF2B5EF4-FFF2-40B4-BE49-F238E27FC236}">
+                <a16:creationId xmlns:a16="http://schemas.microsoft.com/office/drawing/2014/main" id="{4197E63D-EBA8-4DBD-89CD-B3B7A219E96B}"/>
               </a:ext>
             </a:extLst>
           </p:cNvPr>
@@ -3150,7 +3150,7 @@
                 <a:ea typeface="Malgun Gothic"/>
                 <a:cs typeface="Malgun Gothic"/>
               </a:rPr>
-              <a:t>작업 버튼은 떨어뜨리고 탐색 버튼은 계속 보이게 했습니다</a:t>
+              <a:t>작업 버튼과 모든 대화상자를 하나의 규칙으로 통일했습니다</a:t>
             </a:r>
           </a:p>
         </p:txBody>
@@ -3160,7 +3160,7 @@
           <p:cNvPr id="2" name="page-4">
             <a:extLst xmlns:a="http://schemas.openxmlformats.org/drawingml/2006/main">
               <a:ext uri="{FF2B5EF4-FFF2-40B4-BE49-F238E27FC236}">
-                <a16:creationId xmlns:a16="http://schemas.microsoft.com/office/drawing/2014/main" id="{8FAEFE5B-0EB6-414A-980E-EBFA15D1C767}"/>
+                <a16:creationId xmlns:a16="http://schemas.microsoft.com/office/drawing/2014/main" id="{406615AA-9F33-4722-BFB7-2FB208495211}"/>
               </a:ext>
             </a:extLst>
           </p:cNvPr>
@@ -3213,46 +3213,70 @@
       </p:sp>
       <p:pic>
         <p:nvPicPr>
-          <p:cNvPr id="13" name=""/>
+          <p:cNvPr id="11" name=""/>
           <p:cNvPicPr>
             <a:picLocks xmlns:a="http://schemas.openxmlformats.org/drawingml/2006/main" noChangeAspect="1"/>
           </p:cNvPicPr>
           <p:nvPr/>
         </p:nvPicPr>
         <p:blipFill>
-          <a:blip xmlns:r="http://schemas.openxmlformats.org/officeDocument/2006/relationships" xmlns:a="http://schemas.openxmlformats.org/drawingml/2006/main" r:embed="R5de5d359253b4595"/>
+          <a:blip xmlns:r="http://schemas.openxmlformats.org/officeDocument/2006/relationships" xmlns:a="http://schemas.openxmlformats.org/drawingml/2006/main" r:embed="R98ba1873fb5b475a"/>
           <a:stretch xmlns:a="http://schemas.openxmlformats.org/drawingml/2006/main"/>
         </p:blipFill>
         <p:spPr>
           <a:xfrm xmlns:a="http://schemas.openxmlformats.org/drawingml/2006/main">
-            <a:off x="1151821" y="1295400"/>
-            <a:ext cx="2287408" cy="4953000"/>
+            <a:off x="765801" y="1333500"/>
+            <a:ext cx="1935499" cy="4191000"/>
           </a:xfrm>
           <a:prstGeom xmlns:a="http://schemas.openxmlformats.org/drawingml/2006/main" prst="roundRect">
             <a:avLst>
-              <a:gd name="adj" fmla="val 3636"/>
+              <a:gd name="adj" fmla="val 4615"/>
             </a:avLst>
           </a:prstGeom>
         </p:spPr>
       </p:pic>
-      <p:sp>
-        <p:nvSpPr>
-          <p:cNvPr id="4" name="mobile-fact-1">
-            <a:extLst xmlns:a="http://schemas.openxmlformats.org/drawingml/2006/main">
-              <a:ext uri="{FF2B5EF4-FFF2-40B4-BE49-F238E27FC236}">
-                <a16:creationId xmlns:a16="http://schemas.microsoft.com/office/drawing/2014/main" id="{A4DBB530-6B45-4AC2-AAA1-A2938A6FB20F}"/>
-              </a:ext>
-            </a:extLst>
-          </p:cNvPr>
-          <p:cNvSpPr>
-            <a:spLocks xmlns:a="http://schemas.openxmlformats.org/drawingml/2006/main" noGrp="1"/>
-          </p:cNvSpPr>
-          <p:nvPr/>
-        </p:nvSpPr>
-        <p:spPr>
-          <a:xfrm xmlns:a="http://schemas.openxmlformats.org/drawingml/2006/main">
-            <a:off x="4953000" y="1695450"/>
-            <a:ext cx="2000250" cy="666750"/>
+      <p:pic>
+        <p:nvPicPr>
+          <p:cNvPr id="12" name=""/>
+          <p:cNvPicPr>
+            <a:picLocks xmlns:a="http://schemas.openxmlformats.org/drawingml/2006/main" noChangeAspect="1"/>
+          </p:cNvPicPr>
+          <p:nvPr/>
+        </p:nvPicPr>
+        <p:blipFill>
+          <a:blip xmlns:r="http://schemas.openxmlformats.org/officeDocument/2006/relationships" xmlns:a="http://schemas.openxmlformats.org/drawingml/2006/main" r:embed="R205796cb37364575"/>
+          <a:stretch xmlns:a="http://schemas.openxmlformats.org/drawingml/2006/main"/>
+        </p:blipFill>
+        <p:spPr>
+          <a:xfrm xmlns:a="http://schemas.openxmlformats.org/drawingml/2006/main">
+            <a:off x="4126584" y="1333500"/>
+            <a:ext cx="6358183" cy="3333750"/>
+          </a:xfrm>
+          <a:prstGeom xmlns:a="http://schemas.openxmlformats.org/drawingml/2006/main" prst="roundRect">
+            <a:avLst>
+              <a:gd name="adj" fmla="val 3429"/>
+            </a:avLst>
+          </a:prstGeom>
+        </p:spPr>
+      </p:pic>
+      <p:sp>
+        <p:nvSpPr>
+          <p:cNvPr id="5" name="action-caption">
+            <a:extLst xmlns:a="http://schemas.openxmlformats.org/drawingml/2006/main">
+              <a:ext uri="{FF2B5EF4-FFF2-40B4-BE49-F238E27FC236}">
+                <a16:creationId xmlns:a16="http://schemas.microsoft.com/office/drawing/2014/main" id="{3DB66824-5EDC-41B0-8371-B275FD603386}"/>
+              </a:ext>
+            </a:extLst>
+          </p:cNvPr>
+          <p:cNvSpPr>
+            <a:spLocks xmlns:a="http://schemas.openxmlformats.org/drawingml/2006/main" noGrp="1"/>
+          </p:cNvSpPr>
+          <p:nvPr/>
+        </p:nvSpPr>
+        <p:spPr>
+          <a:xfrm xmlns:a="http://schemas.openxmlformats.org/drawingml/2006/main">
+            <a:off x="476250" y="5657850"/>
+            <a:ext cx="2514600" cy="342900"/>
           </a:xfrm>
           <a:prstGeom xmlns:a="http://schemas.openxmlformats.org/drawingml/2006/main" prst="rect">
             <a:avLst/>
@@ -3267,8 +3291,8 @@
           <a:bodyPr xmlns:a="http://schemas.openxmlformats.org/drawingml/2006/main"/>
           <a:lstStyle xmlns:a="http://schemas.openxmlformats.org/drawingml/2006/main"/>
           <a:p xmlns:a="http://schemas.openxmlformats.org/drawingml/2006/main">
-            <a:pPr algn="l">
-              <a:defRPr sz="3900" b="1">
+            <a:pPr algn="ctr">
+              <a:defRPr sz="1500" b="1">
                 <a:solidFill>
                   <a:srgbClr val="155EEF"/>
                 </a:solidFill>
@@ -3278,7 +3302,7 @@
               </a:defRPr>
             </a:pPr>
             <a:r>
-              <a:rPr sz="3900" b="1">
+              <a:rPr sz="1500" b="1">
                 <a:solidFill>
                   <a:srgbClr val="155EEF"/>
                 </a:solidFill>
@@ -3286,29 +3310,64 @@
                 <a:ea typeface="Malgun Gothic"/>
                 <a:cs typeface="Malgun Gothic"/>
               </a:rPr>
-              <a:t>8px</a:t>
-            </a:r>
-          </a:p>
-        </p:txBody>
-      </p:sp>
-      <p:sp>
-        <p:nvSpPr>
-          <p:cNvPr id="5" name="mobile-desc-1">
-            <a:extLst xmlns:a="http://schemas.openxmlformats.org/drawingml/2006/main">
-              <a:ext uri="{FF2B5EF4-FFF2-40B4-BE49-F238E27FC236}">
-                <a16:creationId xmlns:a16="http://schemas.microsoft.com/office/drawing/2014/main" id="{1B402E6C-4059-4129-83BC-C4BBAC234E93}"/>
-              </a:ext>
-            </a:extLst>
-          </p:cNvPr>
-          <p:cNvSpPr>
-            <a:spLocks xmlns:a="http://schemas.openxmlformats.org/drawingml/2006/main" noGrp="1"/>
-          </p:cNvSpPr>
-          <p:nvPr/>
-        </p:nvSpPr>
-        <p:spPr>
-          <a:xfrm xmlns:a="http://schemas.openxmlformats.org/drawingml/2006/main">
-            <a:off x="7124700" y="1847850"/>
-            <a:ext cx="4095750" cy="419100"/>
+              <a:t>아이콘 + 한글 텍스트</a:t>
+            </a:r>
+          </a:p>
+        </p:txBody>
+      </p:sp>
+      <p:sp>
+        <p:nvSpPr>
+          <p:cNvPr id="6" name="dialog-result">
+            <a:extLst xmlns:a="http://schemas.openxmlformats.org/drawingml/2006/main">
+              <a:ext uri="{FF2B5EF4-FFF2-40B4-BE49-F238E27FC236}">
+                <a16:creationId xmlns:a16="http://schemas.microsoft.com/office/drawing/2014/main" id="{052FED85-C454-4CEB-9F77-B5AE09388D72}"/>
+              </a:ext>
+            </a:extLst>
+          </p:cNvPr>
+          <p:cNvSpPr>
+            <a:spLocks xmlns:a="http://schemas.openxmlformats.org/drawingml/2006/main" noGrp="1"/>
+          </p:cNvSpPr>
+          <p:nvPr/>
+        </p:nvSpPr>
+        <p:spPr>
+          <a:xfrm xmlns:a="http://schemas.openxmlformats.org/drawingml/2006/main">
+            <a:off x="3295650" y="4953000"/>
+            <a:ext cx="8020050" cy="1009650"/>
+          </a:xfrm>
+          <a:prstGeom xmlns:a="http://schemas.openxmlformats.org/drawingml/2006/main" prst="roundRect">
+            <a:avLst>
+              <a:gd name="adj" fmla="val 7547"/>
+            </a:avLst>
+          </a:prstGeom>
+          <a:solidFill xmlns:a="http://schemas.openxmlformats.org/drawingml/2006/main">
+            <a:srgbClr val="EAF2FF"/>
+          </a:solidFill>
+          <a:ln xmlns:a="http://schemas.openxmlformats.org/drawingml/2006/main" w="9525">
+            <a:solidFill>
+              <a:srgbClr val="155EEF"/>
+            </a:solidFill>
+            <a:prstDash val="solid"/>
+          </a:ln>
+        </p:spPr>
+      </p:sp>
+      <p:sp>
+        <p:nvSpPr>
+          <p:cNvPr id="7" name="dialog-result-main">
+            <a:extLst xmlns:a="http://schemas.openxmlformats.org/drawingml/2006/main">
+              <a:ext uri="{FF2B5EF4-FFF2-40B4-BE49-F238E27FC236}">
+                <a16:creationId xmlns:a16="http://schemas.microsoft.com/office/drawing/2014/main" id="{21BD42FA-C9C8-4384-B66A-B343B9D15AC8}"/>
+              </a:ext>
+            </a:extLst>
+          </p:cNvPr>
+          <p:cNvSpPr>
+            <a:spLocks xmlns:a="http://schemas.openxmlformats.org/drawingml/2006/main" noGrp="1"/>
+          </p:cNvSpPr>
+          <p:nvPr/>
+        </p:nvSpPr>
+        <p:spPr>
+          <a:xfrm xmlns:a="http://schemas.openxmlformats.org/drawingml/2006/main">
+            <a:off x="3600450" y="5143500"/>
+            <a:ext cx="7410450" cy="361950"/>
           </a:xfrm>
           <a:prstGeom xmlns:a="http://schemas.openxmlformats.org/drawingml/2006/main" prst="rect">
             <a:avLst/>
@@ -3323,48 +3382,48 @@
           <a:bodyPr xmlns:a="http://schemas.openxmlformats.org/drawingml/2006/main"/>
           <a:lstStyle xmlns:a="http://schemas.openxmlformats.org/drawingml/2006/main"/>
           <a:p xmlns:a="http://schemas.openxmlformats.org/drawingml/2006/main">
-            <a:pPr algn="l">
-              <a:defRPr sz="1650" b="0">
-                <a:solidFill>
-                  <a:srgbClr val="52647D"/>
-                </a:solidFill>
-                <a:latin typeface="Malgun Gothic"/>
-                <a:ea typeface="Malgun Gothic"/>
-                <a:cs typeface="Malgun Gothic"/>
-              </a:defRPr>
-            </a:pPr>
-            <a:r>
-              <a:rPr sz="1650" b="0">
-                <a:solidFill>
-                  <a:srgbClr val="52647D"/>
-                </a:solidFill>
-                <a:latin typeface="Malgun Gothic"/>
-                <a:ea typeface="Malgun Gothic"/>
-                <a:cs typeface="Malgun Gothic"/>
-              </a:rPr>
-              <a:t>답장·좋아요·더 보기 사이 간격</a:t>
-            </a:r>
-          </a:p>
-        </p:txBody>
-      </p:sp>
-      <p:sp>
-        <p:nvSpPr>
-          <p:cNvPr id="6" name="mobile-fact-2">
-            <a:extLst xmlns:a="http://schemas.openxmlformats.org/drawingml/2006/main">
-              <a:ext uri="{FF2B5EF4-FFF2-40B4-BE49-F238E27FC236}">
-                <a16:creationId xmlns:a16="http://schemas.microsoft.com/office/drawing/2014/main" id="{26EE0772-1C59-400A-9F8D-EA6EB6AE3071}"/>
-              </a:ext>
-            </a:extLst>
-          </p:cNvPr>
-          <p:cNvSpPr>
-            <a:spLocks xmlns:a="http://schemas.openxmlformats.org/drawingml/2006/main" noGrp="1"/>
-          </p:cNvSpPr>
-          <p:nvPr/>
-        </p:nvSpPr>
-        <p:spPr>
-          <a:xfrm xmlns:a="http://schemas.openxmlformats.org/drawingml/2006/main">
-            <a:off x="4953000" y="2857500"/>
-            <a:ext cx="2000250" cy="666750"/>
+            <a:pPr algn="ctr">
+              <a:defRPr sz="1650" b="1">
+                <a:solidFill>
+                  <a:srgbClr val="15253E"/>
+                </a:solidFill>
+                <a:latin typeface="Malgun Gothic"/>
+                <a:ea typeface="Malgun Gothic"/>
+                <a:cs typeface="Malgun Gothic"/>
+              </a:defRPr>
+            </a:pPr>
+            <a:r>
+              <a:rPr sz="1650" b="1">
+                <a:solidFill>
+                  <a:srgbClr val="15253E"/>
+                </a:solidFill>
+                <a:latin typeface="Malgun Gothic"/>
+                <a:ea typeface="Malgun Gothic"/>
+                <a:cs typeface="Malgun Gothic"/>
+              </a:rPr>
+              <a:t>공통 Modal 규칙 · 부드러운 2px 포커스 · 직접 노출 영문 0건</a:t>
+            </a:r>
+          </a:p>
+        </p:txBody>
+      </p:sp>
+      <p:sp>
+        <p:nvSpPr>
+          <p:cNvPr id="8" name="dialog-result-sub">
+            <a:extLst xmlns:a="http://schemas.openxmlformats.org/drawingml/2006/main">
+              <a:ext uri="{FF2B5EF4-FFF2-40B4-BE49-F238E27FC236}">
+                <a16:creationId xmlns:a16="http://schemas.microsoft.com/office/drawing/2014/main" id="{A5679E24-0552-485A-87D3-3F7E1BC429F5}"/>
+              </a:ext>
+            </a:extLst>
+          </p:cNvPr>
+          <p:cNvSpPr>
+            <a:spLocks xmlns:a="http://schemas.openxmlformats.org/drawingml/2006/main" noGrp="1"/>
+          </p:cNvSpPr>
+          <p:nvPr/>
+        </p:nvSpPr>
+        <p:spPr>
+          <a:xfrm xmlns:a="http://schemas.openxmlformats.org/drawingml/2006/main">
+            <a:off x="3600450" y="5524500"/>
+            <a:ext cx="7410450" cy="285750"/>
           </a:xfrm>
           <a:prstGeom xmlns:a="http://schemas.openxmlformats.org/drawingml/2006/main" prst="rect">
             <a:avLst/>
@@ -3379,8 +3438,8 @@
           <a:bodyPr xmlns:a="http://schemas.openxmlformats.org/drawingml/2006/main"/>
           <a:lstStyle xmlns:a="http://schemas.openxmlformats.org/drawingml/2006/main"/>
           <a:p xmlns:a="http://schemas.openxmlformats.org/drawingml/2006/main">
-            <a:pPr algn="l">
-              <a:defRPr sz="3900" b="1">
+            <a:pPr algn="ctr">
+              <a:defRPr sz="1425" b="0">
                 <a:solidFill>
                   <a:srgbClr val="155EEF"/>
                 </a:solidFill>
@@ -3390,7 +3449,7 @@
               </a:defRPr>
             </a:pPr>
             <a:r>
-              <a:rPr sz="3900" b="1">
+              <a:rPr sz="1425" b="0">
                 <a:solidFill>
                   <a:srgbClr val="155EEF"/>
                 </a:solidFill>
@@ -3398,231 +3457,7 @@
                 <a:ea typeface="Malgun Gothic"/>
                 <a:cs typeface="Malgun Gothic"/>
               </a:rPr>
-              <a:t>40px</a:t>
-            </a:r>
-          </a:p>
-        </p:txBody>
-      </p:sp>
-      <p:sp>
-        <p:nvSpPr>
-          <p:cNvPr id="7" name="mobile-desc-2">
-            <a:extLst xmlns:a="http://schemas.openxmlformats.org/drawingml/2006/main">
-              <a:ext uri="{FF2B5EF4-FFF2-40B4-BE49-F238E27FC236}">
-                <a16:creationId xmlns:a16="http://schemas.microsoft.com/office/drawing/2014/main" id="{2F045A5A-5F22-4D47-AC9A-895C89505237}"/>
-              </a:ext>
-            </a:extLst>
-          </p:cNvPr>
-          <p:cNvSpPr>
-            <a:spLocks xmlns:a="http://schemas.openxmlformats.org/drawingml/2006/main" noGrp="1"/>
-          </p:cNvSpPr>
-          <p:nvPr/>
-        </p:nvSpPr>
-        <p:spPr>
-          <a:xfrm xmlns:a="http://schemas.openxmlformats.org/drawingml/2006/main">
-            <a:off x="7124700" y="3009900"/>
-            <a:ext cx="4095750" cy="419100"/>
-          </a:xfrm>
-          <a:prstGeom xmlns:a="http://schemas.openxmlformats.org/drawingml/2006/main" prst="rect">
-            <a:avLst/>
-          </a:prstGeom>
-          <a:noFill xmlns:a="http://schemas.openxmlformats.org/drawingml/2006/main"/>
-          <a:ln xmlns:a="http://schemas.openxmlformats.org/drawingml/2006/main" w="0">
-            <a:noFill/>
-            <a:prstDash val="solid"/>
-          </a:ln>
-        </p:spPr>
-        <p:txBody>
-          <a:bodyPr xmlns:a="http://schemas.openxmlformats.org/drawingml/2006/main"/>
-          <a:lstStyle xmlns:a="http://schemas.openxmlformats.org/drawingml/2006/main"/>
-          <a:p xmlns:a="http://schemas.openxmlformats.org/drawingml/2006/main">
-            <a:pPr algn="l">
-              <a:defRPr sz="1650" b="0">
-                <a:solidFill>
-                  <a:srgbClr val="52647D"/>
-                </a:solidFill>
-                <a:latin typeface="Malgun Gothic"/>
-                <a:ea typeface="Malgun Gothic"/>
-                <a:cs typeface="Malgun Gothic"/>
-              </a:defRPr>
-            </a:pPr>
-            <a:r>
-              <a:rPr sz="1650" b="0">
-                <a:solidFill>
-                  <a:srgbClr val="52647D"/>
-                </a:solidFill>
-                <a:latin typeface="Malgun Gothic"/>
-                <a:ea typeface="Malgun Gothic"/>
-                <a:cs typeface="Malgun Gothic"/>
-              </a:rPr>
-              <a:t>목록 복귀 후 유지되는 탐색 버튼</a:t>
-            </a:r>
-          </a:p>
-        </p:txBody>
-      </p:sp>
-      <p:sp>
-        <p:nvSpPr>
-          <p:cNvPr id="8" name="mobile-fact-3">
-            <a:extLst xmlns:a="http://schemas.openxmlformats.org/drawingml/2006/main">
-              <a:ext uri="{FF2B5EF4-FFF2-40B4-BE49-F238E27FC236}">
-                <a16:creationId xmlns:a16="http://schemas.microsoft.com/office/drawing/2014/main" id="{B9C2971F-DEB0-4423-B997-CD3769D3AC3A}"/>
-              </a:ext>
-            </a:extLst>
-          </p:cNvPr>
-          <p:cNvSpPr>
-            <a:spLocks xmlns:a="http://schemas.openxmlformats.org/drawingml/2006/main" noGrp="1"/>
-          </p:cNvSpPr>
-          <p:nvPr/>
-        </p:nvSpPr>
-        <p:spPr>
-          <a:xfrm xmlns:a="http://schemas.openxmlformats.org/drawingml/2006/main">
-            <a:off x="4762500" y="4019550"/>
-            <a:ext cx="2333625" cy="666750"/>
-          </a:xfrm>
-          <a:prstGeom xmlns:a="http://schemas.openxmlformats.org/drawingml/2006/main" prst="rect">
-            <a:avLst/>
-          </a:prstGeom>
-          <a:noFill xmlns:a="http://schemas.openxmlformats.org/drawingml/2006/main"/>
-          <a:ln xmlns:a="http://schemas.openxmlformats.org/drawingml/2006/main" w="0">
-            <a:noFill/>
-            <a:prstDash val="solid"/>
-          </a:ln>
-        </p:spPr>
-        <p:txBody>
-          <a:bodyPr xmlns:a="http://schemas.openxmlformats.org/drawingml/2006/main"/>
-          <a:lstStyle xmlns:a="http://schemas.openxmlformats.org/drawingml/2006/main"/>
-          <a:p xmlns:a="http://schemas.openxmlformats.org/drawingml/2006/main">
-            <a:pPr algn="l">
-              <a:defRPr sz="3600" b="1">
-                <a:solidFill>
-                  <a:srgbClr val="078248"/>
-                </a:solidFill>
-                <a:latin typeface="Malgun Gothic"/>
-                <a:ea typeface="Malgun Gothic"/>
-                <a:cs typeface="Malgun Gothic"/>
-              </a:defRPr>
-            </a:pPr>
-            <a:r>
-              <a:rPr sz="3600" b="1">
-                <a:solidFill>
-                  <a:srgbClr val="078248"/>
-                </a:solidFill>
-                <a:latin typeface="Malgun Gothic"/>
-                <a:ea typeface="Malgun Gothic"/>
-                <a:cs typeface="Malgun Gothic"/>
-              </a:rPr>
-              <a:t>38/36px</a:t>
-            </a:r>
-          </a:p>
-        </p:txBody>
-      </p:sp>
-      <p:sp>
-        <p:nvSpPr>
-          <p:cNvPr id="9" name="mobile-desc-3">
-            <a:extLst xmlns:a="http://schemas.openxmlformats.org/drawingml/2006/main">
-              <a:ext uri="{FF2B5EF4-FFF2-40B4-BE49-F238E27FC236}">
-                <a16:creationId xmlns:a16="http://schemas.microsoft.com/office/drawing/2014/main" id="{665229CE-59FF-4903-B5D7-82145E7ABF86}"/>
-              </a:ext>
-            </a:extLst>
-          </p:cNvPr>
-          <p:cNvSpPr>
-            <a:spLocks xmlns:a="http://schemas.openxmlformats.org/drawingml/2006/main" noGrp="1"/>
-          </p:cNvSpPr>
-          <p:nvPr/>
-        </p:nvSpPr>
-        <p:spPr>
-          <a:xfrm xmlns:a="http://schemas.openxmlformats.org/drawingml/2006/main">
-            <a:off x="7124700" y="4171950"/>
-            <a:ext cx="4095750" cy="419100"/>
-          </a:xfrm>
-          <a:prstGeom xmlns:a="http://schemas.openxmlformats.org/drawingml/2006/main" prst="rect">
-            <a:avLst/>
-          </a:prstGeom>
-          <a:noFill xmlns:a="http://schemas.openxmlformats.org/drawingml/2006/main"/>
-          <a:ln xmlns:a="http://schemas.openxmlformats.org/drawingml/2006/main" w="0">
-            <a:noFill/>
-            <a:prstDash val="solid"/>
-          </a:ln>
-        </p:spPr>
-        <p:txBody>
-          <a:bodyPr xmlns:a="http://schemas.openxmlformats.org/drawingml/2006/main"/>
-          <a:lstStyle xmlns:a="http://schemas.openxmlformats.org/drawingml/2006/main"/>
-          <a:p xmlns:a="http://schemas.openxmlformats.org/drawingml/2006/main">
-            <a:pPr algn="l">
-              <a:defRPr sz="1650" b="0">
-                <a:solidFill>
-                  <a:srgbClr val="52647D"/>
-                </a:solidFill>
-                <a:latin typeface="Malgun Gothic"/>
-                <a:ea typeface="Malgun Gothic"/>
-                <a:cs typeface="Malgun Gothic"/>
-              </a:defRPr>
-            </a:pPr>
-            <a:r>
-              <a:rPr sz="1650" b="0">
-                <a:solidFill>
-                  <a:srgbClr val="52647D"/>
-                </a:solidFill>
-                <a:latin typeface="Malgun Gothic"/>
-                <a:ea typeface="Malgun Gothic"/>
-                <a:cs typeface="Malgun Gothic"/>
-              </a:rPr>
-              <a:t>Desktop/Mobile Footer 아이콘</a:t>
-            </a:r>
-          </a:p>
-        </p:txBody>
-      </p:sp>
-      <p:sp>
-        <p:nvSpPr>
-          <p:cNvPr id="10" name="mobile-foot">
-            <a:extLst xmlns:a="http://schemas.openxmlformats.org/drawingml/2006/main">
-              <a:ext uri="{FF2B5EF4-FFF2-40B4-BE49-F238E27FC236}">
-                <a16:creationId xmlns:a16="http://schemas.microsoft.com/office/drawing/2014/main" id="{3C407D7C-F146-4A98-85FD-3C106C567A36}"/>
-              </a:ext>
-            </a:extLst>
-          </p:cNvPr>
-          <p:cNvSpPr>
-            <a:spLocks xmlns:a="http://schemas.openxmlformats.org/drawingml/2006/main" noGrp="1"/>
-          </p:cNvSpPr>
-          <p:nvPr/>
-        </p:nvSpPr>
-        <p:spPr>
-          <a:xfrm xmlns:a="http://schemas.openxmlformats.org/drawingml/2006/main">
-            <a:off x="4762500" y="5391150"/>
-            <a:ext cx="6477000" cy="495300"/>
-          </a:xfrm>
-          <a:prstGeom xmlns:a="http://schemas.openxmlformats.org/drawingml/2006/main" prst="rect">
-            <a:avLst/>
-          </a:prstGeom>
-          <a:noFill xmlns:a="http://schemas.openxmlformats.org/drawingml/2006/main"/>
-          <a:ln xmlns:a="http://schemas.openxmlformats.org/drawingml/2006/main" w="0">
-            <a:noFill/>
-            <a:prstDash val="solid"/>
-          </a:ln>
-        </p:spPr>
-        <p:txBody>
-          <a:bodyPr xmlns:a="http://schemas.openxmlformats.org/drawingml/2006/main"/>
-          <a:lstStyle xmlns:a="http://schemas.openxmlformats.org/drawingml/2006/main"/>
-          <a:p xmlns:a="http://schemas.openxmlformats.org/drawingml/2006/main">
-            <a:pPr algn="l">
-              <a:defRPr sz="1575" b="1">
-                <a:solidFill>
-                  <a:srgbClr val="15253E"/>
-                </a:solidFill>
-                <a:latin typeface="Malgun Gothic"/>
-                <a:ea typeface="Malgun Gothic"/>
-                <a:cs typeface="Malgun Gothic"/>
-              </a:defRPr>
-            </a:pPr>
-            <a:r>
-              <a:rPr sz="1575" b="1">
-                <a:solidFill>
-                  <a:srgbClr val="15253E"/>
-                </a:solidFill>
-                <a:latin typeface="Malgun Gothic"/>
-                <a:ea typeface="Malgun Gothic"/>
-                <a:cs typeface="Malgun Gothic"/>
-              </a:rPr>
-              <a:t>버튼 겹침 0px · 비로그인 답장 비활성 · 모바일 넘침 0px</a:t>
+              <a:t>주 태그를 선택하세요 · 확인 · 태그 필수 조건 무시</a:t>
             </a:r>
           </a:p>
         </p:txBody>
@@ -3630,7 +3465,7 @@
     </p:spTree>
     <p:extLst>
       <p:ext uri="{BB962C8B-B14F-4D97-AF65-F5344CB8AC3E}">
-        <p14:creationId xmlns:p14="http://schemas.microsoft.com/office/powerpoint/2010/main" val="584293047"/>
+        <p14:creationId xmlns:p14="http://schemas.microsoft.com/office/powerpoint/2010/main" val="2023916020"/>
       </p:ext>
     </p:extLst>
   </p:cSld>
@@ -3661,7 +3496,7 @@
           <p:cNvPr id="20" name="title-5">
             <a:extLst xmlns:a="http://schemas.openxmlformats.org/drawingml/2006/main">
               <a:ext uri="{FF2B5EF4-FFF2-40B4-BE49-F238E27FC236}">
-                <a16:creationId xmlns:a16="http://schemas.microsoft.com/office/drawing/2014/main" id="{D1B6AF8B-1C0C-4B24-92DC-C11CC8D01406}"/>
+                <a16:creationId xmlns:a16="http://schemas.microsoft.com/office/drawing/2014/main" id="{A827BEE6-EF16-4EC6-83A5-B081DB12D7BF}"/>
               </a:ext>
             </a:extLst>
           </p:cNvPr>
@@ -3717,7 +3552,7 @@
           <p:cNvPr id="2" name="page-5">
             <a:extLst xmlns:a="http://schemas.openxmlformats.org/drawingml/2006/main">
               <a:ext uri="{FF2B5EF4-FFF2-40B4-BE49-F238E27FC236}">
-                <a16:creationId xmlns:a16="http://schemas.microsoft.com/office/drawing/2014/main" id="{3F19CAC8-CBF2-4689-922E-BA12F5FCF3AD}"/>
+                <a16:creationId xmlns:a16="http://schemas.microsoft.com/office/drawing/2014/main" id="{4E8A351A-3305-4526-A34A-AEE14420E81D}"/>
               </a:ext>
             </a:extLst>
           </p:cNvPr>
@@ -3773,7 +3608,7 @@
           <p:cNvPr id="3" name="arrow-0">
             <a:extLst xmlns:a="http://schemas.openxmlformats.org/drawingml/2006/main">
               <a:ext uri="{FF2B5EF4-FFF2-40B4-BE49-F238E27FC236}">
-                <a16:creationId xmlns:a16="http://schemas.microsoft.com/office/drawing/2014/main" id="{ABC06285-81F8-440B-AD21-8024515BF4A0}"/>
+                <a16:creationId xmlns:a16="http://schemas.microsoft.com/office/drawing/2014/main" id="{8A607230-B73B-4ADA-A152-470E02FC3BC6}"/>
               </a:ext>
             </a:extLst>
           </p:cNvPr>
@@ -3829,7 +3664,7 @@
           <p:cNvPr id="4" name="phase-0">
             <a:extLst xmlns:a="http://schemas.openxmlformats.org/drawingml/2006/main">
               <a:ext uri="{FF2B5EF4-FFF2-40B4-BE49-F238E27FC236}">
-                <a16:creationId xmlns:a16="http://schemas.microsoft.com/office/drawing/2014/main" id="{D38288E8-BEF8-4BB5-BAD1-26E914DCBCAC}"/>
+                <a16:creationId xmlns:a16="http://schemas.microsoft.com/office/drawing/2014/main" id="{F3E22324-5277-4268-B04E-E9A95EABB961}"/>
               </a:ext>
             </a:extLst>
           </p:cNvPr>
@@ -3864,7 +3699,7 @@
           <p:cNvPr id="5" name="phase-label-0">
             <a:extLst xmlns:a="http://schemas.openxmlformats.org/drawingml/2006/main">
               <a:ext uri="{FF2B5EF4-FFF2-40B4-BE49-F238E27FC236}">
-                <a16:creationId xmlns:a16="http://schemas.microsoft.com/office/drawing/2014/main" id="{DACDA921-067D-41BF-B612-FE53F42CC73D}"/>
+                <a16:creationId xmlns:a16="http://schemas.microsoft.com/office/drawing/2014/main" id="{8764A4DD-1A4C-423E-AFE7-768110298643}"/>
               </a:ext>
             </a:extLst>
           </p:cNvPr>
@@ -3943,7 +3778,7 @@
           <p:cNvPr id="6" name="phase-http-0">
             <a:extLst xmlns:a="http://schemas.openxmlformats.org/drawingml/2006/main">
               <a:ext uri="{FF2B5EF4-FFF2-40B4-BE49-F238E27FC236}">
-                <a16:creationId xmlns:a16="http://schemas.microsoft.com/office/drawing/2014/main" id="{17639F4F-2A06-48A4-8464-D9D42F5FA1AD}"/>
+                <a16:creationId xmlns:a16="http://schemas.microsoft.com/office/drawing/2014/main" id="{059663F0-9670-4C4A-9725-58A5EC8B3780}"/>
               </a:ext>
             </a:extLst>
           </p:cNvPr>
@@ -3999,7 +3834,7 @@
           <p:cNvPr id="7" name="arrow-1">
             <a:extLst xmlns:a="http://schemas.openxmlformats.org/drawingml/2006/main">
               <a:ext uri="{FF2B5EF4-FFF2-40B4-BE49-F238E27FC236}">
-                <a16:creationId xmlns:a16="http://schemas.microsoft.com/office/drawing/2014/main" id="{A7B400B7-72C0-4E3A-A45F-F20DA4BF3712}"/>
+                <a16:creationId xmlns:a16="http://schemas.microsoft.com/office/drawing/2014/main" id="{F40D6FF0-E434-444A-9D5E-36D73662D10F}"/>
               </a:ext>
             </a:extLst>
           </p:cNvPr>
@@ -4055,7 +3890,7 @@
           <p:cNvPr id="8" name="phase-1">
             <a:extLst xmlns:a="http://schemas.openxmlformats.org/drawingml/2006/main">
               <a:ext uri="{FF2B5EF4-FFF2-40B4-BE49-F238E27FC236}">
-                <a16:creationId xmlns:a16="http://schemas.microsoft.com/office/drawing/2014/main" id="{DF3C7E49-D298-47CC-B57A-2A22DFBF1C0C}"/>
+                <a16:creationId xmlns:a16="http://schemas.microsoft.com/office/drawing/2014/main" id="{E831896B-299B-4DA8-B2A6-0A0F2112F013}"/>
               </a:ext>
             </a:extLst>
           </p:cNvPr>
@@ -4090,7 +3925,7 @@
           <p:cNvPr id="9" name="phase-label-1">
             <a:extLst xmlns:a="http://schemas.openxmlformats.org/drawingml/2006/main">
               <a:ext uri="{FF2B5EF4-FFF2-40B4-BE49-F238E27FC236}">
-                <a16:creationId xmlns:a16="http://schemas.microsoft.com/office/drawing/2014/main" id="{8049972A-C486-4A24-912D-E5AD1805CE52}"/>
+                <a16:creationId xmlns:a16="http://schemas.microsoft.com/office/drawing/2014/main" id="{2A25CA8C-8E31-44F6-835B-A7C6A34EC5F8}"/>
               </a:ext>
             </a:extLst>
           </p:cNvPr>
@@ -4169,7 +4004,7 @@
           <p:cNvPr id="10" name="phase-http-1">
             <a:extLst xmlns:a="http://schemas.openxmlformats.org/drawingml/2006/main">
               <a:ext uri="{FF2B5EF4-FFF2-40B4-BE49-F238E27FC236}">
-                <a16:creationId xmlns:a16="http://schemas.microsoft.com/office/drawing/2014/main" id="{F2B2DB35-82A8-49D9-A387-D0561CBD1A9A}"/>
+                <a16:creationId xmlns:a16="http://schemas.microsoft.com/office/drawing/2014/main" id="{42F0219D-18FF-48CE-A7C9-903D16F63ECD}"/>
               </a:ext>
             </a:extLst>
           </p:cNvPr>
@@ -4225,7 +4060,7 @@
           <p:cNvPr id="11" name="arrow-2">
             <a:extLst xmlns:a="http://schemas.openxmlformats.org/drawingml/2006/main">
               <a:ext uri="{FF2B5EF4-FFF2-40B4-BE49-F238E27FC236}">
-                <a16:creationId xmlns:a16="http://schemas.microsoft.com/office/drawing/2014/main" id="{CC0CB8DC-05FE-40F6-A51B-91224C5B2CEB}"/>
+                <a16:creationId xmlns:a16="http://schemas.microsoft.com/office/drawing/2014/main" id="{C6A8E69F-F51E-4D1E-9972-B6B99DBB2304}"/>
               </a:ext>
             </a:extLst>
           </p:cNvPr>
@@ -4281,7 +4116,7 @@
           <p:cNvPr id="12" name="phase-2">
             <a:extLst xmlns:a="http://schemas.openxmlformats.org/drawingml/2006/main">
               <a:ext uri="{FF2B5EF4-FFF2-40B4-BE49-F238E27FC236}">
-                <a16:creationId xmlns:a16="http://schemas.microsoft.com/office/drawing/2014/main" id="{B1E525E3-C2F8-4653-B0F3-AA403872DD26}"/>
+                <a16:creationId xmlns:a16="http://schemas.microsoft.com/office/drawing/2014/main" id="{666E4653-406A-4B2D-A016-A89CD4868A14}"/>
               </a:ext>
             </a:extLst>
           </p:cNvPr>
@@ -4316,7 +4151,7 @@
           <p:cNvPr id="13" name="phase-label-2">
             <a:extLst xmlns:a="http://schemas.openxmlformats.org/drawingml/2006/main">
               <a:ext uri="{FF2B5EF4-FFF2-40B4-BE49-F238E27FC236}">
-                <a16:creationId xmlns:a16="http://schemas.microsoft.com/office/drawing/2014/main" id="{115C5B96-982B-4611-881C-EFAB365DBA28}"/>
+                <a16:creationId xmlns:a16="http://schemas.microsoft.com/office/drawing/2014/main" id="{2E29B1C9-CAF5-45FD-BB2E-A6F186F9645A}"/>
               </a:ext>
             </a:extLst>
           </p:cNvPr>
@@ -4395,7 +4230,7 @@
           <p:cNvPr id="14" name="phase-http-2">
             <a:extLst xmlns:a="http://schemas.openxmlformats.org/drawingml/2006/main">
               <a:ext uri="{FF2B5EF4-FFF2-40B4-BE49-F238E27FC236}">
-                <a16:creationId xmlns:a16="http://schemas.microsoft.com/office/drawing/2014/main" id="{7250EC67-5488-4F70-8CC5-39184EDE462A}"/>
+                <a16:creationId xmlns:a16="http://schemas.microsoft.com/office/drawing/2014/main" id="{F72E48DA-384C-4F99-AD0E-D44472F0788A}"/>
               </a:ext>
             </a:extLst>
           </p:cNvPr>
@@ -4451,7 +4286,7 @@
           <p:cNvPr id="15" name="phase-3">
             <a:extLst xmlns:a="http://schemas.openxmlformats.org/drawingml/2006/main">
               <a:ext uri="{FF2B5EF4-FFF2-40B4-BE49-F238E27FC236}">
-                <a16:creationId xmlns:a16="http://schemas.microsoft.com/office/drawing/2014/main" id="{4F036147-723D-4040-A1A0-86DA7B45AF99}"/>
+                <a16:creationId xmlns:a16="http://schemas.microsoft.com/office/drawing/2014/main" id="{5996659E-382E-43D6-94B8-6103B53978CF}"/>
               </a:ext>
             </a:extLst>
           </p:cNvPr>
@@ -4486,7 +4321,7 @@
           <p:cNvPr id="16" name="phase-label-3">
             <a:extLst xmlns:a="http://schemas.openxmlformats.org/drawingml/2006/main">
               <a:ext uri="{FF2B5EF4-FFF2-40B4-BE49-F238E27FC236}">
-                <a16:creationId xmlns:a16="http://schemas.microsoft.com/office/drawing/2014/main" id="{97A16CCC-330F-444B-AF36-07CF9CA33BEA}"/>
+                <a16:creationId xmlns:a16="http://schemas.microsoft.com/office/drawing/2014/main" id="{A8E2967B-4120-4593-BEEA-8F54C80FFC40}"/>
               </a:ext>
             </a:extLst>
           </p:cNvPr>
@@ -4565,7 +4400,7 @@
           <p:cNvPr id="17" name="phase-http-3">
             <a:extLst xmlns:a="http://schemas.openxmlformats.org/drawingml/2006/main">
               <a:ext uri="{FF2B5EF4-FFF2-40B4-BE49-F238E27FC236}">
-                <a16:creationId xmlns:a16="http://schemas.microsoft.com/office/drawing/2014/main" id="{17812BFD-34FB-495A-936B-F2DBD2CCA81D}"/>
+                <a16:creationId xmlns:a16="http://schemas.microsoft.com/office/drawing/2014/main" id="{538B1D0B-CFAA-4D09-A6A1-AF7B4097B38C}"/>
               </a:ext>
             </a:extLst>
           </p:cNvPr>
@@ -4621,7 +4456,7 @@
           <p:cNvPr id="18" name="integrity-count">
             <a:extLst xmlns:a="http://schemas.openxmlformats.org/drawingml/2006/main">
               <a:ext uri="{FF2B5EF4-FFF2-40B4-BE49-F238E27FC236}">
-                <a16:creationId xmlns:a16="http://schemas.microsoft.com/office/drawing/2014/main" id="{57F3C0F3-0B0A-4480-9AA3-46FC971FB350}"/>
+                <a16:creationId xmlns:a16="http://schemas.microsoft.com/office/drawing/2014/main" id="{9957927D-04B2-4E02-B1DA-252E11D745EC}"/>
               </a:ext>
             </a:extLst>
           </p:cNvPr>
@@ -4677,7 +4512,7 @@
           <p:cNvPr id="19" name="integrity-hash">
             <a:extLst xmlns:a="http://schemas.openxmlformats.org/drawingml/2006/main">
               <a:ext uri="{FF2B5EF4-FFF2-40B4-BE49-F238E27FC236}">
-                <a16:creationId xmlns:a16="http://schemas.microsoft.com/office/drawing/2014/main" id="{AF3F3645-4198-4430-9952-A189A4221480}"/>
+                <a16:creationId xmlns:a16="http://schemas.microsoft.com/office/drawing/2014/main" id="{74B6285A-3866-4C37-A782-337B266D8BBC}"/>
               </a:ext>
             </a:extLst>
           </p:cNvPr>
@@ -4731,7 +4566,7 @@
     </p:spTree>
     <p:extLst>
       <p:ext uri="{BB962C8B-B14F-4D97-AF65-F5344CB8AC3E}">
-        <p14:creationId xmlns:p14="http://schemas.microsoft.com/office/powerpoint/2010/main" val="1268514586"/>
+        <p14:creationId xmlns:p14="http://schemas.microsoft.com/office/powerpoint/2010/main" val="235273009"/>
       </p:ext>
     </p:extLst>
   </p:cSld>
@@ -4762,7 +4597,7 @@
           <p:cNvPr id="16" name="title-6">
             <a:extLst xmlns:a="http://schemas.openxmlformats.org/drawingml/2006/main">
               <a:ext uri="{FF2B5EF4-FFF2-40B4-BE49-F238E27FC236}">
-                <a16:creationId xmlns:a16="http://schemas.microsoft.com/office/drawing/2014/main" id="{AC38669B-900D-41E8-AC8C-EF54389AE298}"/>
+                <a16:creationId xmlns:a16="http://schemas.microsoft.com/office/drawing/2014/main" id="{CD17D921-236E-4583-A1E5-6BF9476487DC}"/>
               </a:ext>
             </a:extLst>
           </p:cNvPr>
@@ -4818,7 +4653,7 @@
           <p:cNvPr id="2" name="page-6">
             <a:extLst xmlns:a="http://schemas.openxmlformats.org/drawingml/2006/main">
               <a:ext uri="{FF2B5EF4-FFF2-40B4-BE49-F238E27FC236}">
-                <a16:creationId xmlns:a16="http://schemas.microsoft.com/office/drawing/2014/main" id="{945FD937-88D4-42B1-AE27-AF3D2DBF76FC}"/>
+                <a16:creationId xmlns:a16="http://schemas.microsoft.com/office/drawing/2014/main" id="{2717AD13-19BB-4E6E-80F1-1AC20DB12A81}"/>
               </a:ext>
             </a:extLst>
           </p:cNvPr>
@@ -4874,7 +4709,7 @@
           <p:cNvPr id="3" name="flow-arrow-1">
             <a:extLst xmlns:a="http://schemas.openxmlformats.org/drawingml/2006/main">
               <a:ext uri="{FF2B5EF4-FFF2-40B4-BE49-F238E27FC236}">
-                <a16:creationId xmlns:a16="http://schemas.microsoft.com/office/drawing/2014/main" id="{D09F5280-E891-44FB-B111-8F0DC003EB18}"/>
+                <a16:creationId xmlns:a16="http://schemas.microsoft.com/office/drawing/2014/main" id="{68E81AD3-4E3E-4CCD-862A-6200847E0D17}"/>
               </a:ext>
             </a:extLst>
           </p:cNvPr>
@@ -4930,7 +4765,7 @@
           <p:cNvPr id="4" name="flow-arrow-2">
             <a:extLst xmlns:a="http://schemas.openxmlformats.org/drawingml/2006/main">
               <a:ext uri="{FF2B5EF4-FFF2-40B4-BE49-F238E27FC236}">
-                <a16:creationId xmlns:a16="http://schemas.microsoft.com/office/drawing/2014/main" id="{259D4B19-0273-4C67-BAF5-A1FDD7AF0DD4}"/>
+                <a16:creationId xmlns:a16="http://schemas.microsoft.com/office/drawing/2014/main" id="{D212B3A2-3BB6-4E4D-9C2B-F149AF2B4271}"/>
               </a:ext>
             </a:extLst>
           </p:cNvPr>
@@ -4986,7 +4821,7 @@
           <p:cNvPr id="5" name="flarum-core">
             <a:extLst xmlns:a="http://schemas.openxmlformats.org/drawingml/2006/main">
               <a:ext uri="{FF2B5EF4-FFF2-40B4-BE49-F238E27FC236}">
-                <a16:creationId xmlns:a16="http://schemas.microsoft.com/office/drawing/2014/main" id="{11C0B420-47CA-4289-9252-11A7A229851F}"/>
+                <a16:creationId xmlns:a16="http://schemas.microsoft.com/office/drawing/2014/main" id="{CC1EA035-E6BA-4C38-8CB0-E5516334F8CB}"/>
               </a:ext>
             </a:extLst>
           </p:cNvPr>
@@ -5021,7 +4856,7 @@
           <p:cNvPr id="6" name="theme-extension">
             <a:extLst xmlns:a="http://schemas.openxmlformats.org/drawingml/2006/main">
               <a:ext uri="{FF2B5EF4-FFF2-40B4-BE49-F238E27FC236}">
-                <a16:creationId xmlns:a16="http://schemas.microsoft.com/office/drawing/2014/main" id="{8731385E-A661-445B-8CF4-37759F934AB0}"/>
+                <a16:creationId xmlns:a16="http://schemas.microsoft.com/office/drawing/2014/main" id="{8E88C630-CB04-478C-B83D-7DE5CA486198}"/>
               </a:ext>
             </a:extLst>
           </p:cNvPr>
@@ -5056,7 +4891,7 @@
           <p:cNvPr id="7" name="community-ui">
             <a:extLst xmlns:a="http://schemas.openxmlformats.org/drawingml/2006/main">
               <a:ext uri="{FF2B5EF4-FFF2-40B4-BE49-F238E27FC236}">
-                <a16:creationId xmlns:a16="http://schemas.microsoft.com/office/drawing/2014/main" id="{E9CB076B-8C14-4EE5-B93B-A1F523DEBA05}"/>
+                <a16:creationId xmlns:a16="http://schemas.microsoft.com/office/drawing/2014/main" id="{6F660ACE-894B-455B-9298-11593D969F49}"/>
               </a:ext>
             </a:extLst>
           </p:cNvPr>
@@ -5091,7 +4926,7 @@
           <p:cNvPr id="8" name="flarum-core-title">
             <a:extLst xmlns:a="http://schemas.openxmlformats.org/drawingml/2006/main">
               <a:ext uri="{FF2B5EF4-FFF2-40B4-BE49-F238E27FC236}">
-                <a16:creationId xmlns:a16="http://schemas.microsoft.com/office/drawing/2014/main" id="{CE978517-FE5E-4BE7-8429-29189AAF4B8B}"/>
+                <a16:creationId xmlns:a16="http://schemas.microsoft.com/office/drawing/2014/main" id="{2DBD51BA-CAD3-485F-BECF-67CBD312FD44}"/>
               </a:ext>
             </a:extLst>
           </p:cNvPr>
@@ -5147,7 +4982,7 @@
           <p:cNvPr id="9" name="flarum-core-copy">
             <a:extLst xmlns:a="http://schemas.openxmlformats.org/drawingml/2006/main">
               <a:ext uri="{FF2B5EF4-FFF2-40B4-BE49-F238E27FC236}">
-                <a16:creationId xmlns:a16="http://schemas.microsoft.com/office/drawing/2014/main" id="{55C89E07-5A36-400A-95B8-587A38D1CD29}"/>
+                <a16:creationId xmlns:a16="http://schemas.microsoft.com/office/drawing/2014/main" id="{4F1FFFCB-1C64-4ADE-9C67-456429C461DD}"/>
               </a:ext>
             </a:extLst>
           </p:cNvPr>
@@ -5203,7 +5038,7 @@
           <p:cNvPr id="10" name="theme-title">
             <a:extLst xmlns:a="http://schemas.openxmlformats.org/drawingml/2006/main">
               <a:ext uri="{FF2B5EF4-FFF2-40B4-BE49-F238E27FC236}">
-                <a16:creationId xmlns:a16="http://schemas.microsoft.com/office/drawing/2014/main" id="{FFC9188F-3C95-4CA6-A5FB-6645E2FFD1C9}"/>
+                <a16:creationId xmlns:a16="http://schemas.microsoft.com/office/drawing/2014/main" id="{DD5C054A-5F2E-4372-9784-D265E47CE0E2}"/>
               </a:ext>
             </a:extLst>
           </p:cNvPr>
@@ -5282,7 +5117,7 @@
           <p:cNvPr id="11" name="theme-copy">
             <a:extLst xmlns:a="http://schemas.openxmlformats.org/drawingml/2006/main">
               <a:ext uri="{FF2B5EF4-FFF2-40B4-BE49-F238E27FC236}">
-                <a16:creationId xmlns:a16="http://schemas.microsoft.com/office/drawing/2014/main" id="{1B94DDC6-6F1C-4829-AD58-D275A164D1F5}"/>
+                <a16:creationId xmlns:a16="http://schemas.microsoft.com/office/drawing/2014/main" id="{BEDE3014-D2BE-438A-9F56-CD7B5443A1FF}"/>
               </a:ext>
             </a:extLst>
           </p:cNvPr>
@@ -5338,7 +5173,7 @@
           <p:cNvPr id="12" name="ui-title">
             <a:extLst xmlns:a="http://schemas.openxmlformats.org/drawingml/2006/main">
               <a:ext uri="{FF2B5EF4-FFF2-40B4-BE49-F238E27FC236}">
-                <a16:creationId xmlns:a16="http://schemas.microsoft.com/office/drawing/2014/main" id="{ECD4990E-1485-4FB7-B2D0-71545F94EC0F}"/>
+                <a16:creationId xmlns:a16="http://schemas.microsoft.com/office/drawing/2014/main" id="{56C50E4A-F60D-44AC-AC40-C9CD8C302789}"/>
               </a:ext>
             </a:extLst>
           </p:cNvPr>
@@ -5394,7 +5229,7 @@
           <p:cNvPr id="13" name="ui-copy">
             <a:extLst xmlns:a="http://schemas.openxmlformats.org/drawingml/2006/main">
               <a:ext uri="{FF2B5EF4-FFF2-40B4-BE49-F238E27FC236}">
-                <a16:creationId xmlns:a16="http://schemas.microsoft.com/office/drawing/2014/main" id="{8891AB65-BCFF-4CB8-A7D3-90EE12641EB9}"/>
+                <a16:creationId xmlns:a16="http://schemas.microsoft.com/office/drawing/2014/main" id="{5AC27F5C-3594-4CE6-AC3D-5EFB0129448F}"/>
               </a:ext>
             </a:extLst>
           </p:cNvPr>
@@ -5450,7 +5285,7 @@
           <p:cNvPr id="14" name="rollback-strip">
             <a:extLst xmlns:a="http://schemas.openxmlformats.org/drawingml/2006/main">
               <a:ext uri="{FF2B5EF4-FFF2-40B4-BE49-F238E27FC236}">
-                <a16:creationId xmlns:a16="http://schemas.microsoft.com/office/drawing/2014/main" id="{0EFD781E-6AB5-4642-BF06-25570255AB65}"/>
+                <a16:creationId xmlns:a16="http://schemas.microsoft.com/office/drawing/2014/main" id="{1CD8FE47-156F-4E20-976A-2120C57EFC15}"/>
               </a:ext>
             </a:extLst>
           </p:cNvPr>
@@ -5485,7 +5320,7 @@
           <p:cNvPr id="15" name="rollback-copy">
             <a:extLst xmlns:a="http://schemas.openxmlformats.org/drawingml/2006/main">
               <a:ext uri="{FF2B5EF4-FFF2-40B4-BE49-F238E27FC236}">
-                <a16:creationId xmlns:a16="http://schemas.microsoft.com/office/drawing/2014/main" id="{462E9009-C284-4BAD-ABA0-787961CB2511}"/>
+                <a16:creationId xmlns:a16="http://schemas.microsoft.com/office/drawing/2014/main" id="{D03DDD19-9BF2-4BAC-A671-739544967030}"/>
               </a:ext>
             </a:extLst>
           </p:cNvPr>
@@ -5539,7 +5374,7 @@
     </p:spTree>
     <p:extLst>
       <p:ext uri="{BB962C8B-B14F-4D97-AF65-F5344CB8AC3E}">
-        <p14:creationId xmlns:p14="http://schemas.microsoft.com/office/powerpoint/2010/main" val="980475301"/>
+        <p14:creationId xmlns:p14="http://schemas.microsoft.com/office/powerpoint/2010/main" val="2121724432"/>
       </p:ext>
     </p:extLst>
   </p:cSld>
@@ -5570,7 +5405,7 @@
           <p:cNvPr id="8" name="close-kicker">
             <a:extLst xmlns:a="http://schemas.openxmlformats.org/drawingml/2006/main">
               <a:ext uri="{FF2B5EF4-FFF2-40B4-BE49-F238E27FC236}">
-                <a16:creationId xmlns:a16="http://schemas.microsoft.com/office/drawing/2014/main" id="{E2BF843F-1DDF-4428-96EC-6644D6813039}"/>
+                <a16:creationId xmlns:a16="http://schemas.microsoft.com/office/drawing/2014/main" id="{8CA69341-39F5-4424-9E74-10D4B2A24799}"/>
               </a:ext>
             </a:extLst>
           </p:cNvPr>
@@ -5626,7 +5461,7 @@
           <p:cNvPr id="2" name="close-title">
             <a:extLst xmlns:a="http://schemas.openxmlformats.org/drawingml/2006/main">
               <a:ext uri="{FF2B5EF4-FFF2-40B4-BE49-F238E27FC236}">
-                <a16:creationId xmlns:a16="http://schemas.microsoft.com/office/drawing/2014/main" id="{925F3904-3DD4-441B-A5A3-D0C71D5A2271}"/>
+                <a16:creationId xmlns:a16="http://schemas.microsoft.com/office/drawing/2014/main" id="{630B9264-99FB-4553-B0DA-A5B93A02E19E}"/>
               </a:ext>
             </a:extLst>
           </p:cNvPr>
@@ -5705,7 +5540,7 @@
           <p:cNvPr id="3" name="close-detail">
             <a:extLst xmlns:a="http://schemas.openxmlformats.org/drawingml/2006/main">
               <a:ext uri="{FF2B5EF4-FFF2-40B4-BE49-F238E27FC236}">
-                <a16:creationId xmlns:a16="http://schemas.microsoft.com/office/drawing/2014/main" id="{9DFF5793-B944-4C8A-8771-FA3B995FCB1A}"/>
+                <a16:creationId xmlns:a16="http://schemas.microsoft.com/office/drawing/2014/main" id="{7E015A5F-C808-4462-BDF8-C73F87C9E014}"/>
               </a:ext>
             </a:extLst>
           </p:cNvPr>
@@ -5717,7 +5552,7 @@
         <p:spPr>
           <a:xfrm xmlns:a="http://schemas.openxmlformats.org/drawingml/2006/main">
             <a:off x="457200" y="4019550"/>
-            <a:ext cx="7239000" cy="876300"/>
+            <a:ext cx="7620000" cy="876300"/>
           </a:xfrm>
           <a:prstGeom xmlns:a="http://schemas.openxmlformats.org/drawingml/2006/main" prst="rect">
             <a:avLst/>
@@ -5733,7 +5568,7 @@
           <a:lstStyle xmlns:a="http://schemas.openxmlformats.org/drawingml/2006/main"/>
           <a:p xmlns:a="http://schemas.openxmlformats.org/drawingml/2006/main">
             <a:pPr algn="l">
-              <a:defRPr sz="2100" b="0">
+              <a:defRPr sz="1950" b="0">
                 <a:solidFill>
                   <a:srgbClr val="52647D"/>
                 </a:solidFill>
@@ -5743,7 +5578,7 @@
               </a:defRPr>
             </a:pPr>
             <a:r>
-              <a:rPr sz="2100" b="0">
+              <a:rPr sz="1950" b="0">
                 <a:solidFill>
                   <a:srgbClr val="52647D"/>
                 </a:solidFill>
@@ -5751,12 +5586,12 @@
                 <a:ea typeface="Malgun Gothic"/>
                 <a:cs typeface="Malgun Gothic"/>
               </a:rPr>
-              <a:t>WSL 전체 주기 PASS · 한글 원문 키 0건</a:t>
+              <a:t>WSL 전체 주기 PASS · 한글 원문 키·태그창 직접 영문 0건</a:t>
             </a:r>
           </a:p>
           <a:p xmlns:a="http://schemas.openxmlformats.org/drawingml/2006/main">
             <a:pPr algn="l">
-              <a:defRPr sz="2100" b="0">
+              <a:defRPr sz="1950" b="0">
                 <a:solidFill>
                   <a:srgbClr val="52647D"/>
                 </a:solidFill>
@@ -5766,7 +5601,7 @@
               </a:defRPr>
             </a:pPr>
             <a:r>
-              <a:rPr sz="2100" b="0">
+              <a:rPr sz="1950" b="0">
                 <a:solidFill>
                   <a:srgbClr val="52647D"/>
                 </a:solidFill>
@@ -5784,7 +5619,7 @@
           <p:cNvPr id="4" name="close-status">
             <a:extLst xmlns:a="http://schemas.openxmlformats.org/drawingml/2006/main">
               <a:ext uri="{FF2B5EF4-FFF2-40B4-BE49-F238E27FC236}">
-                <a16:creationId xmlns:a16="http://schemas.microsoft.com/office/drawing/2014/main" id="{231CBF65-AF9A-4D93-B6C5-34E713F266F9}"/>
+                <a16:creationId xmlns:a16="http://schemas.microsoft.com/office/drawing/2014/main" id="{2AFC6CCE-08D5-447C-A3B6-1A1E4705779C}"/>
               </a:ext>
             </a:extLst>
           </p:cNvPr>
@@ -5819,7 +5654,7 @@
           <p:cNvPr id="5" name="close-go">
             <a:extLst xmlns:a="http://schemas.openxmlformats.org/drawingml/2006/main">
               <a:ext uri="{FF2B5EF4-FFF2-40B4-BE49-F238E27FC236}">
-                <a16:creationId xmlns:a16="http://schemas.microsoft.com/office/drawing/2014/main" id="{FDA05F06-79D5-41CC-820B-3B150EE34498}"/>
+                <a16:creationId xmlns:a16="http://schemas.microsoft.com/office/drawing/2014/main" id="{FFB74B2E-0CBE-4BA4-AD42-B5EC6E5C35E9}"/>
               </a:ext>
             </a:extLst>
           </p:cNvPr>
@@ -5875,7 +5710,7 @@
           <p:cNvPr id="6" name="close-condition">
             <a:extLst xmlns:a="http://schemas.openxmlformats.org/drawingml/2006/main">
               <a:ext uri="{FF2B5EF4-FFF2-40B4-BE49-F238E27FC236}">
-                <a16:creationId xmlns:a16="http://schemas.microsoft.com/office/drawing/2014/main" id="{CF9BE8CB-4091-4CEC-937A-7F1A78C80104}"/>
+                <a16:creationId xmlns:a16="http://schemas.microsoft.com/office/drawing/2014/main" id="{924BB059-8384-4F19-BFA4-518B514ACEE6}"/>
               </a:ext>
             </a:extLst>
           </p:cNvPr>
@@ -5931,7 +5766,7 @@
           <p:cNvPr id="7" name="close-next">
             <a:extLst xmlns:a="http://schemas.openxmlformats.org/drawingml/2006/main">
               <a:ext uri="{FF2B5EF4-FFF2-40B4-BE49-F238E27FC236}">
-                <a16:creationId xmlns:a16="http://schemas.microsoft.com/office/drawing/2014/main" id="{616D2B61-FC20-4EE1-8114-BB98206AB142}"/>
+                <a16:creationId xmlns:a16="http://schemas.microsoft.com/office/drawing/2014/main" id="{40DC4ADD-D86C-4F28-9243-D1C64FBFDA63}"/>
               </a:ext>
             </a:extLst>
           </p:cNvPr>
@@ -5985,7 +5820,7 @@
     </p:spTree>
     <p:extLst>
       <p:ext uri="{BB962C8B-B14F-4D97-AF65-F5344CB8AC3E}">
-        <p14:creationId xmlns:p14="http://schemas.microsoft.com/office/powerpoint/2010/main" val="1288316793"/>
+        <p14:creationId xmlns:p14="http://schemas.microsoft.com/office/powerpoint/2010/main" val="1167452779"/>
       </p:ext>
     </p:extLst>
   </p:cSld>

--- a/output/presentation/techflow-community-ui-modernization.pptx
+++ b/output/presentation/techflow-community-ui-modernization.pptx
@@ -2,19 +2,19 @@
 <file path=ppt/presentation.xml><?xml version="1.0" encoding="utf-8"?>
 <p:presentation xmlns:p="http://schemas.openxmlformats.org/presentationml/2006/main">
   <p:sldMasterIdLst>
-    <p:sldMasterId xmlns:r="http://schemas.openxmlformats.org/officeDocument/2006/relationships" id="2147483648" r:id="R63f5159414f044da"/>
+    <p:sldMasterId xmlns:r="http://schemas.openxmlformats.org/officeDocument/2006/relationships" id="2147483648" r:id="Rc0d988195a3644a5"/>
   </p:sldMasterIdLst>
   <p:notesMasterIdLst>
-    <p:notesMasterId xmlns:r="http://schemas.openxmlformats.org/officeDocument/2006/relationships" r:id="R59709cfb86b8475e"/>
+    <p:notesMasterId xmlns:r="http://schemas.openxmlformats.org/officeDocument/2006/relationships" r:id="R72e0ae21a94d4ff3"/>
   </p:notesMasterIdLst>
   <p:sldIdLst>
-    <p:sldId xmlns:r="http://schemas.openxmlformats.org/officeDocument/2006/relationships" id="256" r:id="R2ed5839423144767"/>
-    <p:sldId xmlns:r="http://schemas.openxmlformats.org/officeDocument/2006/relationships" id="257" r:id="R8efa73b4c9c44bc1"/>
-    <p:sldId xmlns:r="http://schemas.openxmlformats.org/officeDocument/2006/relationships" id="258" r:id="R38cfa703736f49fc"/>
-    <p:sldId xmlns:r="http://schemas.openxmlformats.org/officeDocument/2006/relationships" id="259" r:id="R3311dc320ebd4e58"/>
-    <p:sldId xmlns:r="http://schemas.openxmlformats.org/officeDocument/2006/relationships" id="260" r:id="Rb8741886a49e4f82"/>
-    <p:sldId xmlns:r="http://schemas.openxmlformats.org/officeDocument/2006/relationships" id="261" r:id="R764583b11a50492e"/>
-    <p:sldId xmlns:r="http://schemas.openxmlformats.org/officeDocument/2006/relationships" id="262" r:id="Rbca3b61c68164cef"/>
+    <p:sldId xmlns:r="http://schemas.openxmlformats.org/officeDocument/2006/relationships" id="256" r:id="Rc8f372eff89a4818"/>
+    <p:sldId xmlns:r="http://schemas.openxmlformats.org/officeDocument/2006/relationships" id="257" r:id="R62201f65e6d24a1b"/>
+    <p:sldId xmlns:r="http://schemas.openxmlformats.org/officeDocument/2006/relationships" id="258" r:id="R8040683f2f20426b"/>
+    <p:sldId xmlns:r="http://schemas.openxmlformats.org/officeDocument/2006/relationships" id="259" r:id="R19c899b3d5e7439e"/>
+    <p:sldId xmlns:r="http://schemas.openxmlformats.org/officeDocument/2006/relationships" id="260" r:id="R83829bfcdbef4fc7"/>
+    <p:sldId xmlns:r="http://schemas.openxmlformats.org/officeDocument/2006/relationships" id="261" r:id="Raed0476c194f4957"/>
+    <p:sldId xmlns:r="http://schemas.openxmlformats.org/officeDocument/2006/relationships" id="262" r:id="Rc1f7e4ccf3e64586"/>
   </p:sldIdLst>
   <p:sldSz cx="12192000" cy="6858000"/>
   <p:notesSz cx="6858000" cy="9144000"/>
@@ -1076,7 +1076,7 @@
   </p:cSld>
   <p:clrMap bg1="lt1" tx1="dk1" bg2="lt2" tx2="dk2" accent1="accent1" accent2="accent2" accent3="accent3" accent4="accent4" accent5="accent5" accent6="accent6" hlink="hlink" folHlink="folHlink"/>
   <p:sldLayoutIdLst>
-    <p:sldLayoutId xmlns:r="http://schemas.openxmlformats.org/officeDocument/2006/relationships" id="2147483649" r:id="R3fc987c2950d44c0"/>
+    <p:sldLayoutId xmlns:r="http://schemas.openxmlformats.org/officeDocument/2006/relationships" id="2147483649" r:id="Rf4019821811d487b"/>
   </p:sldLayoutIdLst>
   <p:txStyles>
     <p:titleStyle>
@@ -1627,7 +1627,7 @@
           <p:cNvPr id="7" name="cover-kicker">
             <a:extLst xmlns:a="http://schemas.openxmlformats.org/drawingml/2006/main">
               <a:ext uri="{FF2B5EF4-FFF2-40B4-BE49-F238E27FC236}">
-                <a16:creationId xmlns:a16="http://schemas.microsoft.com/office/drawing/2014/main" id="{9A0330E9-194B-41BF-900F-382221BFDA2C}"/>
+                <a16:creationId xmlns:a16="http://schemas.microsoft.com/office/drawing/2014/main" id="{89236714-0AB6-4A3F-AF94-C38E94BA8323}"/>
               </a:ext>
             </a:extLst>
           </p:cNvPr>
@@ -1683,7 +1683,7 @@
           <p:cNvPr id="2" name="cover-title">
             <a:extLst xmlns:a="http://schemas.openxmlformats.org/drawingml/2006/main">
               <a:ext uri="{FF2B5EF4-FFF2-40B4-BE49-F238E27FC236}">
-                <a16:creationId xmlns:a16="http://schemas.microsoft.com/office/drawing/2014/main" id="{5C3EF223-1C80-4B80-8A67-B072F639CC13}"/>
+                <a16:creationId xmlns:a16="http://schemas.microsoft.com/office/drawing/2014/main" id="{093F1E17-CC02-4DDE-BE01-5919D1E396E9}"/>
               </a:ext>
             </a:extLst>
           </p:cNvPr>
@@ -1762,7 +1762,7 @@
           <p:cNvPr id="3" name="cover-subtitle">
             <a:extLst xmlns:a="http://schemas.openxmlformats.org/drawingml/2006/main">
               <a:ext uri="{FF2B5EF4-FFF2-40B4-BE49-F238E27FC236}">
-                <a16:creationId xmlns:a16="http://schemas.microsoft.com/office/drawing/2014/main" id="{99EAC020-E76E-4FAC-B818-E35BCD4E0220}"/>
+                <a16:creationId xmlns:a16="http://schemas.microsoft.com/office/drawing/2014/main" id="{045E7CE8-F81D-441E-B434-C3C09F062738}"/>
               </a:ext>
             </a:extLst>
           </p:cNvPr>
@@ -1818,7 +1818,7 @@
           <p:cNvPr id="4" name="cover-image-frame">
             <a:extLst xmlns:a="http://schemas.openxmlformats.org/drawingml/2006/main">
               <a:ext uri="{FF2B5EF4-FFF2-40B4-BE49-F238E27FC236}">
-                <a16:creationId xmlns:a16="http://schemas.microsoft.com/office/drawing/2014/main" id="{37A6AF82-4E2F-418A-A181-A925EFC82146}"/>
+                <a16:creationId xmlns:a16="http://schemas.microsoft.com/office/drawing/2014/main" id="{CF976083-51F8-43B6-94D6-F6472C9AAF8D}"/>
               </a:ext>
             </a:extLst>
           </p:cNvPr>
@@ -1857,7 +1857,7 @@
           <p:nvPr/>
         </p:nvPicPr>
         <p:blipFill>
-          <a:blip xmlns:r="http://schemas.openxmlformats.org/officeDocument/2006/relationships" xmlns:a="http://schemas.openxmlformats.org/drawingml/2006/main" r:embed="R2a6aaa6d64804e2e"/>
+          <a:blip xmlns:r="http://schemas.openxmlformats.org/officeDocument/2006/relationships" xmlns:a="http://schemas.openxmlformats.org/drawingml/2006/main" r:embed="Rf4304e88270543cd"/>
           <a:stretch xmlns:a="http://schemas.openxmlformats.org/drawingml/2006/main"/>
         </p:blipFill>
         <p:spPr>
@@ -1877,7 +1877,7 @@
           <p:cNvPr id="6" name="cover-status">
             <a:extLst xmlns:a="http://schemas.openxmlformats.org/drawingml/2006/main">
               <a:ext uri="{FF2B5EF4-FFF2-40B4-BE49-F238E27FC236}">
-                <a16:creationId xmlns:a16="http://schemas.microsoft.com/office/drawing/2014/main" id="{BBB26A31-C85C-4988-9466-F9DFE076D620}"/>
+                <a16:creationId xmlns:a16="http://schemas.microsoft.com/office/drawing/2014/main" id="{55440247-EC20-42B7-ABB5-542434C6E6ED}"/>
               </a:ext>
             </a:extLst>
           </p:cNvPr>
@@ -1931,7 +1931,7 @@
     </p:spTree>
     <p:extLst>
       <p:ext uri="{BB962C8B-B14F-4D97-AF65-F5344CB8AC3E}">
-        <p14:creationId xmlns:p14="http://schemas.microsoft.com/office/powerpoint/2010/main" val="1334252184"/>
+        <p14:creationId xmlns:p14="http://schemas.microsoft.com/office/powerpoint/2010/main" val="1302101851"/>
       </p:ext>
     </p:extLst>
   </p:cSld>
@@ -1962,7 +1962,7 @@
           <p:cNvPr id="9" name="title-2">
             <a:extLst xmlns:a="http://schemas.openxmlformats.org/drawingml/2006/main">
               <a:ext uri="{FF2B5EF4-FFF2-40B4-BE49-F238E27FC236}">
-                <a16:creationId xmlns:a16="http://schemas.microsoft.com/office/drawing/2014/main" id="{AAE7FBF0-B623-42D1-A660-797511A7D590}"/>
+                <a16:creationId xmlns:a16="http://schemas.microsoft.com/office/drawing/2014/main" id="{4E691F33-6092-4279-A3E6-B5478F8807C2}"/>
               </a:ext>
             </a:extLst>
           </p:cNvPr>
@@ -2018,7 +2018,7 @@
           <p:cNvPr id="2" name="page-2">
             <a:extLst xmlns:a="http://schemas.openxmlformats.org/drawingml/2006/main">
               <a:ext uri="{FF2B5EF4-FFF2-40B4-BE49-F238E27FC236}">
-                <a16:creationId xmlns:a16="http://schemas.microsoft.com/office/drawing/2014/main" id="{2E245F03-5874-4D4A-8C6F-F1FC99DA4F1F}"/>
+                <a16:creationId xmlns:a16="http://schemas.microsoft.com/office/drawing/2014/main" id="{0C9D4D5C-3285-4133-A13A-8DCAA5A43559}"/>
               </a:ext>
             </a:extLst>
           </p:cNvPr>
@@ -2074,7 +2074,7 @@
           <p:cNvPr id="3" name="before-label">
             <a:extLst xmlns:a="http://schemas.openxmlformats.org/drawingml/2006/main">
               <a:ext uri="{FF2B5EF4-FFF2-40B4-BE49-F238E27FC236}">
-                <a16:creationId xmlns:a16="http://schemas.microsoft.com/office/drawing/2014/main" id="{1F06B2F5-44AF-4478-B429-35EB24128898}"/>
+                <a16:creationId xmlns:a16="http://schemas.microsoft.com/office/drawing/2014/main" id="{F279BF4C-C64F-49BD-8CC3-CC12F60A2D4F}"/>
               </a:ext>
             </a:extLst>
           </p:cNvPr>
@@ -2130,7 +2130,7 @@
           <p:cNvPr id="4" name="after-label">
             <a:extLst xmlns:a="http://schemas.openxmlformats.org/drawingml/2006/main">
               <a:ext uri="{FF2B5EF4-FFF2-40B4-BE49-F238E27FC236}">
-                <a16:creationId xmlns:a16="http://schemas.microsoft.com/office/drawing/2014/main" id="{2F0674CE-3350-40F7-8EE0-CDBBBFD4B92A}"/>
+                <a16:creationId xmlns:a16="http://schemas.microsoft.com/office/drawing/2014/main" id="{E4E0EF3C-AF36-4162-838B-B8041CBA8582}"/>
               </a:ext>
             </a:extLst>
           </p:cNvPr>
@@ -2190,7 +2190,7 @@
           <p:nvPr/>
         </p:nvPicPr>
         <p:blipFill>
-          <a:blip xmlns:r="http://schemas.openxmlformats.org/officeDocument/2006/relationships" xmlns:a="http://schemas.openxmlformats.org/drawingml/2006/main" r:embed="Rda24966d90cc4e86"/>
+          <a:blip xmlns:r="http://schemas.openxmlformats.org/officeDocument/2006/relationships" xmlns:a="http://schemas.openxmlformats.org/drawingml/2006/main" r:embed="R8549177db408426f"/>
           <a:stretch xmlns:a="http://schemas.openxmlformats.org/drawingml/2006/main"/>
         </p:blipFill>
         <p:spPr>
@@ -2214,7 +2214,7 @@
           <p:nvPr/>
         </p:nvPicPr>
         <p:blipFill>
-          <a:blip xmlns:r="http://schemas.openxmlformats.org/officeDocument/2006/relationships" xmlns:a="http://schemas.openxmlformats.org/drawingml/2006/main" r:embed="R232ccd0b8f634497"/>
+          <a:blip xmlns:r="http://schemas.openxmlformats.org/officeDocument/2006/relationships" xmlns:a="http://schemas.openxmlformats.org/drawingml/2006/main" r:embed="R63279a64ff7a4ae0"/>
           <a:stretch xmlns:a="http://schemas.openxmlformats.org/drawingml/2006/main"/>
         </p:blipFill>
         <p:spPr>
@@ -2234,7 +2234,7 @@
           <p:cNvPr id="7" name="before-copy">
             <a:extLst xmlns:a="http://schemas.openxmlformats.org/drawingml/2006/main">
               <a:ext uri="{FF2B5EF4-FFF2-40B4-BE49-F238E27FC236}">
-                <a16:creationId xmlns:a16="http://schemas.microsoft.com/office/drawing/2014/main" id="{F756C01D-01B0-42F5-A256-886EC1D02734}"/>
+                <a16:creationId xmlns:a16="http://schemas.microsoft.com/office/drawing/2014/main" id="{3E4A58A1-5B50-471F-967F-950C23CE715D}"/>
               </a:ext>
             </a:extLst>
           </p:cNvPr>
@@ -2290,7 +2290,7 @@
           <p:cNvPr id="8" name="after-copy">
             <a:extLst xmlns:a="http://schemas.openxmlformats.org/drawingml/2006/main">
               <a:ext uri="{FF2B5EF4-FFF2-40B4-BE49-F238E27FC236}">
-                <a16:creationId xmlns:a16="http://schemas.microsoft.com/office/drawing/2014/main" id="{6CA01D67-31E7-45FC-B9F8-6B3B2D200B6F}"/>
+                <a16:creationId xmlns:a16="http://schemas.microsoft.com/office/drawing/2014/main" id="{1D933CC1-BF5D-4207-B0A2-1212A2C89698}"/>
               </a:ext>
             </a:extLst>
           </p:cNvPr>
@@ -2344,7 +2344,7 @@
     </p:spTree>
     <p:extLst>
       <p:ext uri="{BB962C8B-B14F-4D97-AF65-F5344CB8AC3E}">
-        <p14:creationId xmlns:p14="http://schemas.microsoft.com/office/powerpoint/2010/main" val="1819236491"/>
+        <p14:creationId xmlns:p14="http://schemas.microsoft.com/office/powerpoint/2010/main" val="1303207477"/>
       </p:ext>
     </p:extLst>
   </p:cSld>
@@ -2375,7 +2375,7 @@
           <p:cNvPr id="15" name="title-3">
             <a:extLst xmlns:a="http://schemas.openxmlformats.org/drawingml/2006/main">
               <a:ext uri="{FF2B5EF4-FFF2-40B4-BE49-F238E27FC236}">
-                <a16:creationId xmlns:a16="http://schemas.microsoft.com/office/drawing/2014/main" id="{1E60B0A9-B532-4E78-BC8D-E3B4B4CA5664}"/>
+                <a16:creationId xmlns:a16="http://schemas.microsoft.com/office/drawing/2014/main" id="{6894AE7C-5CD3-4602-8DC6-0DA9312BD01F}"/>
               </a:ext>
             </a:extLst>
           </p:cNvPr>
@@ -2431,7 +2431,7 @@
           <p:cNvPr id="2" name="page-3">
             <a:extLst xmlns:a="http://schemas.openxmlformats.org/drawingml/2006/main">
               <a:ext uri="{FF2B5EF4-FFF2-40B4-BE49-F238E27FC236}">
-                <a16:creationId xmlns:a16="http://schemas.microsoft.com/office/drawing/2014/main" id="{5A9959C5-72AA-4C9B-A89D-81E4A4D3BA00}"/>
+                <a16:creationId xmlns:a16="http://schemas.microsoft.com/office/drawing/2014/main" id="{8E1AEBC3-BAB2-4450-BE54-9547E45348AF}"/>
               </a:ext>
             </a:extLst>
           </p:cNvPr>
@@ -2487,7 +2487,7 @@
           <p:cNvPr id="3" name="state-0">
             <a:extLst xmlns:a="http://schemas.openxmlformats.org/drawingml/2006/main">
               <a:ext uri="{FF2B5EF4-FFF2-40B4-BE49-F238E27FC236}">
-                <a16:creationId xmlns:a16="http://schemas.microsoft.com/office/drawing/2014/main" id="{57CAD589-C0C6-4592-911E-9EE5C5158512}"/>
+                <a16:creationId xmlns:a16="http://schemas.microsoft.com/office/drawing/2014/main" id="{4E7D9AFC-B356-44D4-852B-3740370E3FF4}"/>
               </a:ext>
             </a:extLst>
           </p:cNvPr>
@@ -2522,7 +2522,7 @@
           <p:cNvPr id="4" name="state-label-0">
             <a:extLst xmlns:a="http://schemas.openxmlformats.org/drawingml/2006/main">
               <a:ext uri="{FF2B5EF4-FFF2-40B4-BE49-F238E27FC236}">
-                <a16:creationId xmlns:a16="http://schemas.microsoft.com/office/drawing/2014/main" id="{A3E27905-1425-4068-A3FF-6607390BDE80}"/>
+                <a16:creationId xmlns:a16="http://schemas.microsoft.com/office/drawing/2014/main" id="{8611ACB7-AB69-4D66-A2D4-32486A9F99EE}"/>
               </a:ext>
             </a:extLst>
           </p:cNvPr>
@@ -2578,7 +2578,7 @@
           <p:cNvPr id="5" name="state-detail-0">
             <a:extLst xmlns:a="http://schemas.openxmlformats.org/drawingml/2006/main">
               <a:ext uri="{FF2B5EF4-FFF2-40B4-BE49-F238E27FC236}">
-                <a16:creationId xmlns:a16="http://schemas.microsoft.com/office/drawing/2014/main" id="{34CD7B58-91E0-4D8D-B493-800D34FE5528}"/>
+                <a16:creationId xmlns:a16="http://schemas.microsoft.com/office/drawing/2014/main" id="{251FDE4E-9182-46E2-AA34-2DB915732901}"/>
               </a:ext>
             </a:extLst>
           </p:cNvPr>
@@ -2634,7 +2634,7 @@
           <p:cNvPr id="6" name="state-1">
             <a:extLst xmlns:a="http://schemas.openxmlformats.org/drawingml/2006/main">
               <a:ext uri="{FF2B5EF4-FFF2-40B4-BE49-F238E27FC236}">
-                <a16:creationId xmlns:a16="http://schemas.microsoft.com/office/drawing/2014/main" id="{A9CFA82E-8849-4D6E-958F-1453392D7585}"/>
+                <a16:creationId xmlns:a16="http://schemas.microsoft.com/office/drawing/2014/main" id="{C2CA9BFD-DAF2-4AA8-8936-64BCAB233B86}"/>
               </a:ext>
             </a:extLst>
           </p:cNvPr>
@@ -2669,7 +2669,7 @@
           <p:cNvPr id="7" name="state-label-1">
             <a:extLst xmlns:a="http://schemas.openxmlformats.org/drawingml/2006/main">
               <a:ext uri="{FF2B5EF4-FFF2-40B4-BE49-F238E27FC236}">
-                <a16:creationId xmlns:a16="http://schemas.microsoft.com/office/drawing/2014/main" id="{791F9B0F-844A-4EF0-AFB7-CB09925D3978}"/>
+                <a16:creationId xmlns:a16="http://schemas.microsoft.com/office/drawing/2014/main" id="{BF7E1CE0-6342-410A-9DE4-7E8F9A592637}"/>
               </a:ext>
             </a:extLst>
           </p:cNvPr>
@@ -2725,7 +2725,7 @@
           <p:cNvPr id="8" name="state-detail-1">
             <a:extLst xmlns:a="http://schemas.openxmlformats.org/drawingml/2006/main">
               <a:ext uri="{FF2B5EF4-FFF2-40B4-BE49-F238E27FC236}">
-                <a16:creationId xmlns:a16="http://schemas.microsoft.com/office/drawing/2014/main" id="{6AA105AB-7F98-45F5-92B7-5087B2E891F8}"/>
+                <a16:creationId xmlns:a16="http://schemas.microsoft.com/office/drawing/2014/main" id="{81C36728-84D0-4454-96B1-54E9609E787A}"/>
               </a:ext>
             </a:extLst>
           </p:cNvPr>
@@ -2781,7 +2781,7 @@
           <p:cNvPr id="9" name="state-2">
             <a:extLst xmlns:a="http://schemas.openxmlformats.org/drawingml/2006/main">
               <a:ext uri="{FF2B5EF4-FFF2-40B4-BE49-F238E27FC236}">
-                <a16:creationId xmlns:a16="http://schemas.microsoft.com/office/drawing/2014/main" id="{ACAF8D84-CDD2-4653-BF24-0BC3BB0E23A1}"/>
+                <a16:creationId xmlns:a16="http://schemas.microsoft.com/office/drawing/2014/main" id="{5963426B-4971-46C0-92AC-A464220599BD}"/>
               </a:ext>
             </a:extLst>
           </p:cNvPr>
@@ -2816,7 +2816,7 @@
           <p:cNvPr id="10" name="state-label-2">
             <a:extLst xmlns:a="http://schemas.openxmlformats.org/drawingml/2006/main">
               <a:ext uri="{FF2B5EF4-FFF2-40B4-BE49-F238E27FC236}">
-                <a16:creationId xmlns:a16="http://schemas.microsoft.com/office/drawing/2014/main" id="{359CE64C-822B-476B-A748-875B02591BC3}"/>
+                <a16:creationId xmlns:a16="http://schemas.microsoft.com/office/drawing/2014/main" id="{94BF00C6-5489-4CFC-B61D-9B55FB0C719B}"/>
               </a:ext>
             </a:extLst>
           </p:cNvPr>
@@ -2872,7 +2872,7 @@
           <p:cNvPr id="11" name="state-detail-2">
             <a:extLst xmlns:a="http://schemas.openxmlformats.org/drawingml/2006/main">
               <a:ext uri="{FF2B5EF4-FFF2-40B4-BE49-F238E27FC236}">
-                <a16:creationId xmlns:a16="http://schemas.microsoft.com/office/drawing/2014/main" id="{536D55E2-72EE-423E-B2BC-1EE041456B7C}"/>
+                <a16:creationId xmlns:a16="http://schemas.microsoft.com/office/drawing/2014/main" id="{7225CE58-C3BE-41DF-B7DA-3C85F335DE7C}"/>
               </a:ext>
             </a:extLst>
           </p:cNvPr>
@@ -2928,7 +2928,7 @@
           <p:cNvPr id="12" name="state-3">
             <a:extLst xmlns:a="http://schemas.openxmlformats.org/drawingml/2006/main">
               <a:ext uri="{FF2B5EF4-FFF2-40B4-BE49-F238E27FC236}">
-                <a16:creationId xmlns:a16="http://schemas.microsoft.com/office/drawing/2014/main" id="{D3213105-5BB4-487B-B406-C4B1611364D4}"/>
+                <a16:creationId xmlns:a16="http://schemas.microsoft.com/office/drawing/2014/main" id="{4E776035-6EA3-4633-80CD-27C2442038D3}"/>
               </a:ext>
             </a:extLst>
           </p:cNvPr>
@@ -2963,7 +2963,7 @@
           <p:cNvPr id="13" name="state-label-3">
             <a:extLst xmlns:a="http://schemas.openxmlformats.org/drawingml/2006/main">
               <a:ext uri="{FF2B5EF4-FFF2-40B4-BE49-F238E27FC236}">
-                <a16:creationId xmlns:a16="http://schemas.microsoft.com/office/drawing/2014/main" id="{4E434153-1BFC-4569-92E2-1DCF32082D4B}"/>
+                <a16:creationId xmlns:a16="http://schemas.microsoft.com/office/drawing/2014/main" id="{7C06D5E9-4A97-4783-8177-1D841DD509B7}"/>
               </a:ext>
             </a:extLst>
           </p:cNvPr>
@@ -3019,7 +3019,7 @@
           <p:cNvPr id="14" name="state-detail-3">
             <a:extLst xmlns:a="http://schemas.openxmlformats.org/drawingml/2006/main">
               <a:ext uri="{FF2B5EF4-FFF2-40B4-BE49-F238E27FC236}">
-                <a16:creationId xmlns:a16="http://schemas.microsoft.com/office/drawing/2014/main" id="{EB78D490-5192-4072-9704-7E2E9DE47080}"/>
+                <a16:creationId xmlns:a16="http://schemas.microsoft.com/office/drawing/2014/main" id="{1F6C50AE-AF25-4EE3-A1B5-FFE4D1785D3C}"/>
               </a:ext>
             </a:extLst>
           </p:cNvPr>
@@ -3073,7 +3073,7 @@
     </p:spTree>
     <p:extLst>
       <p:ext uri="{BB962C8B-B14F-4D97-AF65-F5344CB8AC3E}">
-        <p14:creationId xmlns:p14="http://schemas.microsoft.com/office/powerpoint/2010/main" val="1852196506"/>
+        <p14:creationId xmlns:p14="http://schemas.microsoft.com/office/powerpoint/2010/main" val="5660928"/>
       </p:ext>
     </p:extLst>
   </p:cSld>
@@ -3104,7 +3104,7 @@
           <p:cNvPr id="9" name="title-4">
             <a:extLst xmlns:a="http://schemas.openxmlformats.org/drawingml/2006/main">
               <a:ext uri="{FF2B5EF4-FFF2-40B4-BE49-F238E27FC236}">
-                <a16:creationId xmlns:a16="http://schemas.microsoft.com/office/drawing/2014/main" id="{4197E63D-EBA8-4DBD-89CD-B3B7A219E96B}"/>
+                <a16:creationId xmlns:a16="http://schemas.microsoft.com/office/drawing/2014/main" id="{6DFF9F94-464C-40BC-8C4B-D9C6BB33B065}"/>
               </a:ext>
             </a:extLst>
           </p:cNvPr>
@@ -3150,7 +3150,7 @@
                 <a:ea typeface="Malgun Gothic"/>
                 <a:cs typeface="Malgun Gothic"/>
               </a:rPr>
-              <a:t>작업 버튼과 모든 대화상자를 하나의 규칙으로 통일했습니다</a:t>
+              <a:t>본문 길이에 관계없이 버튼 간격을 하나로 맞췄습니다</a:t>
             </a:r>
           </a:p>
         </p:txBody>
@@ -3160,7 +3160,7 @@
           <p:cNvPr id="2" name="page-4">
             <a:extLst xmlns:a="http://schemas.openxmlformats.org/drawingml/2006/main">
               <a:ext uri="{FF2B5EF4-FFF2-40B4-BE49-F238E27FC236}">
-                <a16:creationId xmlns:a16="http://schemas.microsoft.com/office/drawing/2014/main" id="{406615AA-9F33-4722-BFB7-2FB208495211}"/>
+                <a16:creationId xmlns:a16="http://schemas.microsoft.com/office/drawing/2014/main" id="{0C4D56AD-2D82-4FF2-8342-0C22C4301265}"/>
               </a:ext>
             </a:extLst>
           </p:cNvPr>
@@ -3220,13 +3220,13 @@
           <p:nvPr/>
         </p:nvPicPr>
         <p:blipFill>
-          <a:blip xmlns:r="http://schemas.openxmlformats.org/officeDocument/2006/relationships" xmlns:a="http://schemas.openxmlformats.org/drawingml/2006/main" r:embed="R98ba1873fb5b475a"/>
+          <a:blip xmlns:r="http://schemas.openxmlformats.org/officeDocument/2006/relationships" xmlns:a="http://schemas.openxmlformats.org/drawingml/2006/main" r:embed="Rfe1773950d6644db"/>
           <a:stretch xmlns:a="http://schemas.openxmlformats.org/drawingml/2006/main"/>
         </p:blipFill>
         <p:spPr>
           <a:xfrm xmlns:a="http://schemas.openxmlformats.org/drawingml/2006/main">
-            <a:off x="765801" y="1333500"/>
-            <a:ext cx="1935499" cy="4191000"/>
+            <a:off x="765250" y="1333500"/>
+            <a:ext cx="1936600" cy="4191000"/>
           </a:xfrm>
           <a:prstGeom xmlns:a="http://schemas.openxmlformats.org/drawingml/2006/main" prst="roundRect">
             <a:avLst>
@@ -3244,7 +3244,7 @@
           <p:nvPr/>
         </p:nvPicPr>
         <p:blipFill>
-          <a:blip xmlns:r="http://schemas.openxmlformats.org/officeDocument/2006/relationships" xmlns:a="http://schemas.openxmlformats.org/drawingml/2006/main" r:embed="R205796cb37364575"/>
+          <a:blip xmlns:r="http://schemas.openxmlformats.org/officeDocument/2006/relationships" xmlns:a="http://schemas.openxmlformats.org/drawingml/2006/main" r:embed="R2a7de5b405cb46cf"/>
           <a:stretch xmlns:a="http://schemas.openxmlformats.org/drawingml/2006/main"/>
         </p:blipFill>
         <p:spPr>
@@ -3264,19 +3264,19 @@
           <p:cNvPr id="5" name="action-caption">
             <a:extLst xmlns:a="http://schemas.openxmlformats.org/drawingml/2006/main">
               <a:ext uri="{FF2B5EF4-FFF2-40B4-BE49-F238E27FC236}">
-                <a16:creationId xmlns:a16="http://schemas.microsoft.com/office/drawing/2014/main" id="{3DB66824-5EDC-41B0-8371-B275FD603386}"/>
-              </a:ext>
-            </a:extLst>
-          </p:cNvPr>
-          <p:cNvSpPr>
-            <a:spLocks xmlns:a="http://schemas.openxmlformats.org/drawingml/2006/main" noGrp="1"/>
-          </p:cNvSpPr>
-          <p:nvPr/>
-        </p:nvSpPr>
-        <p:spPr>
-          <a:xfrm xmlns:a="http://schemas.openxmlformats.org/drawingml/2006/main">
-            <a:off x="476250" y="5657850"/>
-            <a:ext cx="2514600" cy="342900"/>
+                <a16:creationId xmlns:a16="http://schemas.microsoft.com/office/drawing/2014/main" id="{30336A73-88DF-4522-80F1-993E83530297}"/>
+              </a:ext>
+            </a:extLst>
+          </p:cNvPr>
+          <p:cNvSpPr>
+            <a:spLocks xmlns:a="http://schemas.openxmlformats.org/drawingml/2006/main" noGrp="1"/>
+          </p:cNvSpPr>
+          <p:nvPr/>
+        </p:nvSpPr>
+        <p:spPr>
+          <a:xfrm xmlns:a="http://schemas.openxmlformats.org/drawingml/2006/main">
+            <a:off x="400050" y="5657850"/>
+            <a:ext cx="2667000" cy="342900"/>
           </a:xfrm>
           <a:prstGeom xmlns:a="http://schemas.openxmlformats.org/drawingml/2006/main" prst="rect">
             <a:avLst/>
@@ -3292,7 +3292,7 @@
           <a:lstStyle xmlns:a="http://schemas.openxmlformats.org/drawingml/2006/main"/>
           <a:p xmlns:a="http://schemas.openxmlformats.org/drawingml/2006/main">
             <a:pPr algn="ctr">
-              <a:defRPr sz="1500" b="1">
+              <a:defRPr sz="1425" b="1">
                 <a:solidFill>
                   <a:srgbClr val="155EEF"/>
                 </a:solidFill>
@@ -3302,7 +3302,7 @@
               </a:defRPr>
             </a:pPr>
             <a:r>
-              <a:rPr sz="1500" b="1">
+              <a:rPr sz="1425" b="1">
                 <a:solidFill>
                   <a:srgbClr val="155EEF"/>
                 </a:solidFill>
@@ -3310,7 +3310,7 @@
                 <a:ea typeface="Malgun Gothic"/>
                 <a:cs typeface="Malgun Gothic"/>
               </a:rPr>
-              <a:t>아이콘 + 한글 텍스트</a:t>
+              <a:t>카드-버튼 8px · 편차 0px</a:t>
             </a:r>
           </a:p>
         </p:txBody>
@@ -3320,7 +3320,7 @@
           <p:cNvPr id="6" name="dialog-result">
             <a:extLst xmlns:a="http://schemas.openxmlformats.org/drawingml/2006/main">
               <a:ext uri="{FF2B5EF4-FFF2-40B4-BE49-F238E27FC236}">
-                <a16:creationId xmlns:a16="http://schemas.microsoft.com/office/drawing/2014/main" id="{052FED85-C454-4CEB-9F77-B5AE09388D72}"/>
+                <a16:creationId xmlns:a16="http://schemas.microsoft.com/office/drawing/2014/main" id="{5E804B92-D611-4E16-AA81-96FE25F4CB67}"/>
               </a:ext>
             </a:extLst>
           </p:cNvPr>
@@ -3355,7 +3355,7 @@
           <p:cNvPr id="7" name="dialog-result-main">
             <a:extLst xmlns:a="http://schemas.openxmlformats.org/drawingml/2006/main">
               <a:ext uri="{FF2B5EF4-FFF2-40B4-BE49-F238E27FC236}">
-                <a16:creationId xmlns:a16="http://schemas.microsoft.com/office/drawing/2014/main" id="{21BD42FA-C9C8-4384-B66A-B343B9D15AC8}"/>
+                <a16:creationId xmlns:a16="http://schemas.microsoft.com/office/drawing/2014/main" id="{622E5BB9-259B-4EF5-9231-D0A0E55A5C77}"/>
               </a:ext>
             </a:extLst>
           </p:cNvPr>
@@ -3411,7 +3411,7 @@
           <p:cNvPr id="8" name="dialog-result-sub">
             <a:extLst xmlns:a="http://schemas.openxmlformats.org/drawingml/2006/main">
               <a:ext uri="{FF2B5EF4-FFF2-40B4-BE49-F238E27FC236}">
-                <a16:creationId xmlns:a16="http://schemas.microsoft.com/office/drawing/2014/main" id="{A5679E24-0552-485A-87D3-3F7E1BC429F5}"/>
+                <a16:creationId xmlns:a16="http://schemas.microsoft.com/office/drawing/2014/main" id="{D89B86C4-0F99-4D94-AEBD-7046F0964D05}"/>
               </a:ext>
             </a:extLst>
           </p:cNvPr>
@@ -3465,7 +3465,7 @@
     </p:spTree>
     <p:extLst>
       <p:ext uri="{BB962C8B-B14F-4D97-AF65-F5344CB8AC3E}">
-        <p14:creationId xmlns:p14="http://schemas.microsoft.com/office/powerpoint/2010/main" val="2023916020"/>
+        <p14:creationId xmlns:p14="http://schemas.microsoft.com/office/powerpoint/2010/main" val="1621135961"/>
       </p:ext>
     </p:extLst>
   </p:cSld>
@@ -3496,7 +3496,7 @@
           <p:cNvPr id="20" name="title-5">
             <a:extLst xmlns:a="http://schemas.openxmlformats.org/drawingml/2006/main">
               <a:ext uri="{FF2B5EF4-FFF2-40B4-BE49-F238E27FC236}">
-                <a16:creationId xmlns:a16="http://schemas.microsoft.com/office/drawing/2014/main" id="{A827BEE6-EF16-4EC6-83A5-B081DB12D7BF}"/>
+                <a16:creationId xmlns:a16="http://schemas.microsoft.com/office/drawing/2014/main" id="{48F7F697-A79F-47B5-AE93-14A5306D5A26}"/>
               </a:ext>
             </a:extLst>
           </p:cNvPr>
@@ -3552,7 +3552,7 @@
           <p:cNvPr id="2" name="page-5">
             <a:extLst xmlns:a="http://schemas.openxmlformats.org/drawingml/2006/main">
               <a:ext uri="{FF2B5EF4-FFF2-40B4-BE49-F238E27FC236}">
-                <a16:creationId xmlns:a16="http://schemas.microsoft.com/office/drawing/2014/main" id="{4E8A351A-3305-4526-A34A-AEE14420E81D}"/>
+                <a16:creationId xmlns:a16="http://schemas.microsoft.com/office/drawing/2014/main" id="{4E527D26-0A6C-4C9B-B810-D6858391FE6A}"/>
               </a:ext>
             </a:extLst>
           </p:cNvPr>
@@ -3608,7 +3608,7 @@
           <p:cNvPr id="3" name="arrow-0">
             <a:extLst xmlns:a="http://schemas.openxmlformats.org/drawingml/2006/main">
               <a:ext uri="{FF2B5EF4-FFF2-40B4-BE49-F238E27FC236}">
-                <a16:creationId xmlns:a16="http://schemas.microsoft.com/office/drawing/2014/main" id="{8A607230-B73B-4ADA-A152-470E02FC3BC6}"/>
+                <a16:creationId xmlns:a16="http://schemas.microsoft.com/office/drawing/2014/main" id="{EC26496B-E329-428F-99E8-C7D19D8500F9}"/>
               </a:ext>
             </a:extLst>
           </p:cNvPr>
@@ -3664,7 +3664,7 @@
           <p:cNvPr id="4" name="phase-0">
             <a:extLst xmlns:a="http://schemas.openxmlformats.org/drawingml/2006/main">
               <a:ext uri="{FF2B5EF4-FFF2-40B4-BE49-F238E27FC236}">
-                <a16:creationId xmlns:a16="http://schemas.microsoft.com/office/drawing/2014/main" id="{F3E22324-5277-4268-B04E-E9A95EABB961}"/>
+                <a16:creationId xmlns:a16="http://schemas.microsoft.com/office/drawing/2014/main" id="{AA6AD0D9-FC38-459E-9749-629440DA6935}"/>
               </a:ext>
             </a:extLst>
           </p:cNvPr>
@@ -3699,7 +3699,7 @@
           <p:cNvPr id="5" name="phase-label-0">
             <a:extLst xmlns:a="http://schemas.openxmlformats.org/drawingml/2006/main">
               <a:ext uri="{FF2B5EF4-FFF2-40B4-BE49-F238E27FC236}">
-                <a16:creationId xmlns:a16="http://schemas.microsoft.com/office/drawing/2014/main" id="{8764A4DD-1A4C-423E-AFE7-768110298643}"/>
+                <a16:creationId xmlns:a16="http://schemas.microsoft.com/office/drawing/2014/main" id="{9EAAFB8B-6F22-4467-8DD9-063F83326D18}"/>
               </a:ext>
             </a:extLst>
           </p:cNvPr>
@@ -3778,7 +3778,7 @@
           <p:cNvPr id="6" name="phase-http-0">
             <a:extLst xmlns:a="http://schemas.openxmlformats.org/drawingml/2006/main">
               <a:ext uri="{FF2B5EF4-FFF2-40B4-BE49-F238E27FC236}">
-                <a16:creationId xmlns:a16="http://schemas.microsoft.com/office/drawing/2014/main" id="{059663F0-9670-4C4A-9725-58A5EC8B3780}"/>
+                <a16:creationId xmlns:a16="http://schemas.microsoft.com/office/drawing/2014/main" id="{D9952694-8907-4F45-BE36-7465AC63FF12}"/>
               </a:ext>
             </a:extLst>
           </p:cNvPr>
@@ -3834,7 +3834,7 @@
           <p:cNvPr id="7" name="arrow-1">
             <a:extLst xmlns:a="http://schemas.openxmlformats.org/drawingml/2006/main">
               <a:ext uri="{FF2B5EF4-FFF2-40B4-BE49-F238E27FC236}">
-                <a16:creationId xmlns:a16="http://schemas.microsoft.com/office/drawing/2014/main" id="{F40D6FF0-E434-444A-9D5E-36D73662D10F}"/>
+                <a16:creationId xmlns:a16="http://schemas.microsoft.com/office/drawing/2014/main" id="{C4E39895-FE74-456B-A41B-FAC3A72797E9}"/>
               </a:ext>
             </a:extLst>
           </p:cNvPr>
@@ -3890,7 +3890,7 @@
           <p:cNvPr id="8" name="phase-1">
             <a:extLst xmlns:a="http://schemas.openxmlformats.org/drawingml/2006/main">
               <a:ext uri="{FF2B5EF4-FFF2-40B4-BE49-F238E27FC236}">
-                <a16:creationId xmlns:a16="http://schemas.microsoft.com/office/drawing/2014/main" id="{E831896B-299B-4DA8-B2A6-0A0F2112F013}"/>
+                <a16:creationId xmlns:a16="http://schemas.microsoft.com/office/drawing/2014/main" id="{373E729E-666D-41A5-947A-82286B139F0A}"/>
               </a:ext>
             </a:extLst>
           </p:cNvPr>
@@ -3925,7 +3925,7 @@
           <p:cNvPr id="9" name="phase-label-1">
             <a:extLst xmlns:a="http://schemas.openxmlformats.org/drawingml/2006/main">
               <a:ext uri="{FF2B5EF4-FFF2-40B4-BE49-F238E27FC236}">
-                <a16:creationId xmlns:a16="http://schemas.microsoft.com/office/drawing/2014/main" id="{2A25CA8C-8E31-44F6-835B-A7C6A34EC5F8}"/>
+                <a16:creationId xmlns:a16="http://schemas.microsoft.com/office/drawing/2014/main" id="{745C082C-C0C7-4F7D-8370-6BA73333F97A}"/>
               </a:ext>
             </a:extLst>
           </p:cNvPr>
@@ -4004,7 +4004,7 @@
           <p:cNvPr id="10" name="phase-http-1">
             <a:extLst xmlns:a="http://schemas.openxmlformats.org/drawingml/2006/main">
               <a:ext uri="{FF2B5EF4-FFF2-40B4-BE49-F238E27FC236}">
-                <a16:creationId xmlns:a16="http://schemas.microsoft.com/office/drawing/2014/main" id="{42F0219D-18FF-48CE-A7C9-903D16F63ECD}"/>
+                <a16:creationId xmlns:a16="http://schemas.microsoft.com/office/drawing/2014/main" id="{3219249F-4ED9-4858-85B1-FF398D9BC627}"/>
               </a:ext>
             </a:extLst>
           </p:cNvPr>
@@ -4060,7 +4060,7 @@
           <p:cNvPr id="11" name="arrow-2">
             <a:extLst xmlns:a="http://schemas.openxmlformats.org/drawingml/2006/main">
               <a:ext uri="{FF2B5EF4-FFF2-40B4-BE49-F238E27FC236}">
-                <a16:creationId xmlns:a16="http://schemas.microsoft.com/office/drawing/2014/main" id="{C6A8E69F-F51E-4D1E-9972-B6B99DBB2304}"/>
+                <a16:creationId xmlns:a16="http://schemas.microsoft.com/office/drawing/2014/main" id="{646EBE54-26BD-4D19-8420-87C714FA2FF3}"/>
               </a:ext>
             </a:extLst>
           </p:cNvPr>
@@ -4116,7 +4116,7 @@
           <p:cNvPr id="12" name="phase-2">
             <a:extLst xmlns:a="http://schemas.openxmlformats.org/drawingml/2006/main">
               <a:ext uri="{FF2B5EF4-FFF2-40B4-BE49-F238E27FC236}">
-                <a16:creationId xmlns:a16="http://schemas.microsoft.com/office/drawing/2014/main" id="{666E4653-406A-4B2D-A016-A89CD4868A14}"/>
+                <a16:creationId xmlns:a16="http://schemas.microsoft.com/office/drawing/2014/main" id="{9E8FAF97-DBEE-449F-AA78-F18759332B16}"/>
               </a:ext>
             </a:extLst>
           </p:cNvPr>
@@ -4151,7 +4151,7 @@
           <p:cNvPr id="13" name="phase-label-2">
             <a:extLst xmlns:a="http://schemas.openxmlformats.org/drawingml/2006/main">
               <a:ext uri="{FF2B5EF4-FFF2-40B4-BE49-F238E27FC236}">
-                <a16:creationId xmlns:a16="http://schemas.microsoft.com/office/drawing/2014/main" id="{2E29B1C9-CAF5-45FD-BB2E-A6F186F9645A}"/>
+                <a16:creationId xmlns:a16="http://schemas.microsoft.com/office/drawing/2014/main" id="{27FD62BE-B6F0-4D10-B342-6EC748C683DE}"/>
               </a:ext>
             </a:extLst>
           </p:cNvPr>
@@ -4230,7 +4230,7 @@
           <p:cNvPr id="14" name="phase-http-2">
             <a:extLst xmlns:a="http://schemas.openxmlformats.org/drawingml/2006/main">
               <a:ext uri="{FF2B5EF4-FFF2-40B4-BE49-F238E27FC236}">
-                <a16:creationId xmlns:a16="http://schemas.microsoft.com/office/drawing/2014/main" id="{F72E48DA-384C-4F99-AD0E-D44472F0788A}"/>
+                <a16:creationId xmlns:a16="http://schemas.microsoft.com/office/drawing/2014/main" id="{AC6DF358-246A-48EE-9451-7B8A4377DD37}"/>
               </a:ext>
             </a:extLst>
           </p:cNvPr>
@@ -4286,7 +4286,7 @@
           <p:cNvPr id="15" name="phase-3">
             <a:extLst xmlns:a="http://schemas.openxmlformats.org/drawingml/2006/main">
               <a:ext uri="{FF2B5EF4-FFF2-40B4-BE49-F238E27FC236}">
-                <a16:creationId xmlns:a16="http://schemas.microsoft.com/office/drawing/2014/main" id="{5996659E-382E-43D6-94B8-6103B53978CF}"/>
+                <a16:creationId xmlns:a16="http://schemas.microsoft.com/office/drawing/2014/main" id="{D3D0E64C-2846-4666-96D9-3B5C015F856D}"/>
               </a:ext>
             </a:extLst>
           </p:cNvPr>
@@ -4321,7 +4321,7 @@
           <p:cNvPr id="16" name="phase-label-3">
             <a:extLst xmlns:a="http://schemas.openxmlformats.org/drawingml/2006/main">
               <a:ext uri="{FF2B5EF4-FFF2-40B4-BE49-F238E27FC236}">
-                <a16:creationId xmlns:a16="http://schemas.microsoft.com/office/drawing/2014/main" id="{A8E2967B-4120-4593-BEEA-8F54C80FFC40}"/>
+                <a16:creationId xmlns:a16="http://schemas.microsoft.com/office/drawing/2014/main" id="{6B9B20BC-189D-4D8C-A8B9-6FC353148CC9}"/>
               </a:ext>
             </a:extLst>
           </p:cNvPr>
@@ -4400,7 +4400,7 @@
           <p:cNvPr id="17" name="phase-http-3">
             <a:extLst xmlns:a="http://schemas.openxmlformats.org/drawingml/2006/main">
               <a:ext uri="{FF2B5EF4-FFF2-40B4-BE49-F238E27FC236}">
-                <a16:creationId xmlns:a16="http://schemas.microsoft.com/office/drawing/2014/main" id="{538B1D0B-CFAA-4D09-A6A1-AF7B4097B38C}"/>
+                <a16:creationId xmlns:a16="http://schemas.microsoft.com/office/drawing/2014/main" id="{7392F7B4-E294-4110-AA80-F329B078FECE}"/>
               </a:ext>
             </a:extLst>
           </p:cNvPr>
@@ -4456,7 +4456,7 @@
           <p:cNvPr id="18" name="integrity-count">
             <a:extLst xmlns:a="http://schemas.openxmlformats.org/drawingml/2006/main">
               <a:ext uri="{FF2B5EF4-FFF2-40B4-BE49-F238E27FC236}">
-                <a16:creationId xmlns:a16="http://schemas.microsoft.com/office/drawing/2014/main" id="{9957927D-04B2-4E02-B1DA-252E11D745EC}"/>
+                <a16:creationId xmlns:a16="http://schemas.microsoft.com/office/drawing/2014/main" id="{5EE17571-DA01-4AF6-BC41-05750E1EF947}"/>
               </a:ext>
             </a:extLst>
           </p:cNvPr>
@@ -4512,7 +4512,7 @@
           <p:cNvPr id="19" name="integrity-hash">
             <a:extLst xmlns:a="http://schemas.openxmlformats.org/drawingml/2006/main">
               <a:ext uri="{FF2B5EF4-FFF2-40B4-BE49-F238E27FC236}">
-                <a16:creationId xmlns:a16="http://schemas.microsoft.com/office/drawing/2014/main" id="{74B6285A-3866-4C37-A782-337B266D8BBC}"/>
+                <a16:creationId xmlns:a16="http://schemas.microsoft.com/office/drawing/2014/main" id="{50DFC8A0-8BC3-476A-90A1-3562E5E4D870}"/>
               </a:ext>
             </a:extLst>
           </p:cNvPr>
@@ -4566,7 +4566,7 @@
     </p:spTree>
     <p:extLst>
       <p:ext uri="{BB962C8B-B14F-4D97-AF65-F5344CB8AC3E}">
-        <p14:creationId xmlns:p14="http://schemas.microsoft.com/office/powerpoint/2010/main" val="235273009"/>
+        <p14:creationId xmlns:p14="http://schemas.microsoft.com/office/powerpoint/2010/main" val="125908174"/>
       </p:ext>
     </p:extLst>
   </p:cSld>
@@ -4597,7 +4597,7 @@
           <p:cNvPr id="16" name="title-6">
             <a:extLst xmlns:a="http://schemas.openxmlformats.org/drawingml/2006/main">
               <a:ext uri="{FF2B5EF4-FFF2-40B4-BE49-F238E27FC236}">
-                <a16:creationId xmlns:a16="http://schemas.microsoft.com/office/drawing/2014/main" id="{CD17D921-236E-4583-A1E5-6BF9476487DC}"/>
+                <a16:creationId xmlns:a16="http://schemas.microsoft.com/office/drawing/2014/main" id="{60A90985-E927-49E8-9269-CB7D931F54D6}"/>
               </a:ext>
             </a:extLst>
           </p:cNvPr>
@@ -4653,7 +4653,7 @@
           <p:cNvPr id="2" name="page-6">
             <a:extLst xmlns:a="http://schemas.openxmlformats.org/drawingml/2006/main">
               <a:ext uri="{FF2B5EF4-FFF2-40B4-BE49-F238E27FC236}">
-                <a16:creationId xmlns:a16="http://schemas.microsoft.com/office/drawing/2014/main" id="{2717AD13-19BB-4E6E-80F1-1AC20DB12A81}"/>
+                <a16:creationId xmlns:a16="http://schemas.microsoft.com/office/drawing/2014/main" id="{AF53184C-5AAB-4E1A-B3C2-F99FFD5AAD9F}"/>
               </a:ext>
             </a:extLst>
           </p:cNvPr>
@@ -4709,7 +4709,7 @@
           <p:cNvPr id="3" name="flow-arrow-1">
             <a:extLst xmlns:a="http://schemas.openxmlformats.org/drawingml/2006/main">
               <a:ext uri="{FF2B5EF4-FFF2-40B4-BE49-F238E27FC236}">
-                <a16:creationId xmlns:a16="http://schemas.microsoft.com/office/drawing/2014/main" id="{68E81AD3-4E3E-4CCD-862A-6200847E0D17}"/>
+                <a16:creationId xmlns:a16="http://schemas.microsoft.com/office/drawing/2014/main" id="{5E1AFF46-1BE9-4803-ABF1-3521D77BDDB0}"/>
               </a:ext>
             </a:extLst>
           </p:cNvPr>
@@ -4765,7 +4765,7 @@
           <p:cNvPr id="4" name="flow-arrow-2">
             <a:extLst xmlns:a="http://schemas.openxmlformats.org/drawingml/2006/main">
               <a:ext uri="{FF2B5EF4-FFF2-40B4-BE49-F238E27FC236}">
-                <a16:creationId xmlns:a16="http://schemas.microsoft.com/office/drawing/2014/main" id="{D212B3A2-3BB6-4E4D-9C2B-F149AF2B4271}"/>
+                <a16:creationId xmlns:a16="http://schemas.microsoft.com/office/drawing/2014/main" id="{0BF67D34-9ECA-41D7-894E-319E1CE51AFF}"/>
               </a:ext>
             </a:extLst>
           </p:cNvPr>
@@ -4821,7 +4821,7 @@
           <p:cNvPr id="5" name="flarum-core">
             <a:extLst xmlns:a="http://schemas.openxmlformats.org/drawingml/2006/main">
               <a:ext uri="{FF2B5EF4-FFF2-40B4-BE49-F238E27FC236}">
-                <a16:creationId xmlns:a16="http://schemas.microsoft.com/office/drawing/2014/main" id="{CC1EA035-E6BA-4C38-8CB0-E5516334F8CB}"/>
+                <a16:creationId xmlns:a16="http://schemas.microsoft.com/office/drawing/2014/main" id="{5545B7A1-5A0E-480A-8730-AA358C219344}"/>
               </a:ext>
             </a:extLst>
           </p:cNvPr>
@@ -4856,7 +4856,7 @@
           <p:cNvPr id="6" name="theme-extension">
             <a:extLst xmlns:a="http://schemas.openxmlformats.org/drawingml/2006/main">
               <a:ext uri="{FF2B5EF4-FFF2-40B4-BE49-F238E27FC236}">
-                <a16:creationId xmlns:a16="http://schemas.microsoft.com/office/drawing/2014/main" id="{8E88C630-CB04-478C-B83D-7DE5CA486198}"/>
+                <a16:creationId xmlns:a16="http://schemas.microsoft.com/office/drawing/2014/main" id="{C37B8D77-FD23-4B55-8A0A-213D1949D27C}"/>
               </a:ext>
             </a:extLst>
           </p:cNvPr>
@@ -4891,7 +4891,7 @@
           <p:cNvPr id="7" name="community-ui">
             <a:extLst xmlns:a="http://schemas.openxmlformats.org/drawingml/2006/main">
               <a:ext uri="{FF2B5EF4-FFF2-40B4-BE49-F238E27FC236}">
-                <a16:creationId xmlns:a16="http://schemas.microsoft.com/office/drawing/2014/main" id="{6F660ACE-894B-455B-9298-11593D969F49}"/>
+                <a16:creationId xmlns:a16="http://schemas.microsoft.com/office/drawing/2014/main" id="{064B7CE1-9CE8-4BF3-9528-3AC899765839}"/>
               </a:ext>
             </a:extLst>
           </p:cNvPr>
@@ -4926,7 +4926,7 @@
           <p:cNvPr id="8" name="flarum-core-title">
             <a:extLst xmlns:a="http://schemas.openxmlformats.org/drawingml/2006/main">
               <a:ext uri="{FF2B5EF4-FFF2-40B4-BE49-F238E27FC236}">
-                <a16:creationId xmlns:a16="http://schemas.microsoft.com/office/drawing/2014/main" id="{2DBD51BA-CAD3-485F-BECF-67CBD312FD44}"/>
+                <a16:creationId xmlns:a16="http://schemas.microsoft.com/office/drawing/2014/main" id="{83D799F2-ADEA-4897-B423-06235AC08FB6}"/>
               </a:ext>
             </a:extLst>
           </p:cNvPr>
@@ -4982,7 +4982,7 @@
           <p:cNvPr id="9" name="flarum-core-copy">
             <a:extLst xmlns:a="http://schemas.openxmlformats.org/drawingml/2006/main">
               <a:ext uri="{FF2B5EF4-FFF2-40B4-BE49-F238E27FC236}">
-                <a16:creationId xmlns:a16="http://schemas.microsoft.com/office/drawing/2014/main" id="{4F1FFFCB-1C64-4ADE-9C67-456429C461DD}"/>
+                <a16:creationId xmlns:a16="http://schemas.microsoft.com/office/drawing/2014/main" id="{8C76BEB7-1C90-410F-94B1-C518E2F53CDD}"/>
               </a:ext>
             </a:extLst>
           </p:cNvPr>
@@ -5038,7 +5038,7 @@
           <p:cNvPr id="10" name="theme-title">
             <a:extLst xmlns:a="http://schemas.openxmlformats.org/drawingml/2006/main">
               <a:ext uri="{FF2B5EF4-FFF2-40B4-BE49-F238E27FC236}">
-                <a16:creationId xmlns:a16="http://schemas.microsoft.com/office/drawing/2014/main" id="{DD5C054A-5F2E-4372-9784-D265E47CE0E2}"/>
+                <a16:creationId xmlns:a16="http://schemas.microsoft.com/office/drawing/2014/main" id="{CC2B24DF-4893-4894-8224-83E4812EFCC6}"/>
               </a:ext>
             </a:extLst>
           </p:cNvPr>
@@ -5117,7 +5117,7 @@
           <p:cNvPr id="11" name="theme-copy">
             <a:extLst xmlns:a="http://schemas.openxmlformats.org/drawingml/2006/main">
               <a:ext uri="{FF2B5EF4-FFF2-40B4-BE49-F238E27FC236}">
-                <a16:creationId xmlns:a16="http://schemas.microsoft.com/office/drawing/2014/main" id="{BEDE3014-D2BE-438A-9F56-CD7B5443A1FF}"/>
+                <a16:creationId xmlns:a16="http://schemas.microsoft.com/office/drawing/2014/main" id="{BC5FDA8E-6FF9-42E8-87F3-6B6357599800}"/>
               </a:ext>
             </a:extLst>
           </p:cNvPr>
@@ -5173,7 +5173,7 @@
           <p:cNvPr id="12" name="ui-title">
             <a:extLst xmlns:a="http://schemas.openxmlformats.org/drawingml/2006/main">
               <a:ext uri="{FF2B5EF4-FFF2-40B4-BE49-F238E27FC236}">
-                <a16:creationId xmlns:a16="http://schemas.microsoft.com/office/drawing/2014/main" id="{56C50E4A-F60D-44AC-AC40-C9CD8C302789}"/>
+                <a16:creationId xmlns:a16="http://schemas.microsoft.com/office/drawing/2014/main" id="{32FF16C4-F187-467F-84CE-814A63FAF073}"/>
               </a:ext>
             </a:extLst>
           </p:cNvPr>
@@ -5229,7 +5229,7 @@
           <p:cNvPr id="13" name="ui-copy">
             <a:extLst xmlns:a="http://schemas.openxmlformats.org/drawingml/2006/main">
               <a:ext uri="{FF2B5EF4-FFF2-40B4-BE49-F238E27FC236}">
-                <a16:creationId xmlns:a16="http://schemas.microsoft.com/office/drawing/2014/main" id="{5AC27F5C-3594-4CE6-AC3D-5EFB0129448F}"/>
+                <a16:creationId xmlns:a16="http://schemas.microsoft.com/office/drawing/2014/main" id="{1026BF07-AB27-4E3C-896C-129AAC534F0D}"/>
               </a:ext>
             </a:extLst>
           </p:cNvPr>
@@ -5285,7 +5285,7 @@
           <p:cNvPr id="14" name="rollback-strip">
             <a:extLst xmlns:a="http://schemas.openxmlformats.org/drawingml/2006/main">
               <a:ext uri="{FF2B5EF4-FFF2-40B4-BE49-F238E27FC236}">
-                <a16:creationId xmlns:a16="http://schemas.microsoft.com/office/drawing/2014/main" id="{1CD8FE47-156F-4E20-976A-2120C57EFC15}"/>
+                <a16:creationId xmlns:a16="http://schemas.microsoft.com/office/drawing/2014/main" id="{F3CAD643-596B-443D-AE7E-F1E1FCEF9ACA}"/>
               </a:ext>
             </a:extLst>
           </p:cNvPr>
@@ -5320,7 +5320,7 @@
           <p:cNvPr id="15" name="rollback-copy">
             <a:extLst xmlns:a="http://schemas.openxmlformats.org/drawingml/2006/main">
               <a:ext uri="{FF2B5EF4-FFF2-40B4-BE49-F238E27FC236}">
-                <a16:creationId xmlns:a16="http://schemas.microsoft.com/office/drawing/2014/main" id="{D03DDD19-9BF2-4BAC-A671-739544967030}"/>
+                <a16:creationId xmlns:a16="http://schemas.microsoft.com/office/drawing/2014/main" id="{5375730A-252B-458D-9FB8-0C6F283BA0E8}"/>
               </a:ext>
             </a:extLst>
           </p:cNvPr>
@@ -5374,7 +5374,7 @@
     </p:spTree>
     <p:extLst>
       <p:ext uri="{BB962C8B-B14F-4D97-AF65-F5344CB8AC3E}">
-        <p14:creationId xmlns:p14="http://schemas.microsoft.com/office/powerpoint/2010/main" val="2121724432"/>
+        <p14:creationId xmlns:p14="http://schemas.microsoft.com/office/powerpoint/2010/main" val="902393509"/>
       </p:ext>
     </p:extLst>
   </p:cSld>
@@ -5405,7 +5405,7 @@
           <p:cNvPr id="8" name="close-kicker">
             <a:extLst xmlns:a="http://schemas.openxmlformats.org/drawingml/2006/main">
               <a:ext uri="{FF2B5EF4-FFF2-40B4-BE49-F238E27FC236}">
-                <a16:creationId xmlns:a16="http://schemas.microsoft.com/office/drawing/2014/main" id="{8CA69341-39F5-4424-9E74-10D4B2A24799}"/>
+                <a16:creationId xmlns:a16="http://schemas.microsoft.com/office/drawing/2014/main" id="{C34BF6FC-107E-47AE-A1D9-34F8DA8C77B4}"/>
               </a:ext>
             </a:extLst>
           </p:cNvPr>
@@ -5461,7 +5461,7 @@
           <p:cNvPr id="2" name="close-title">
             <a:extLst xmlns:a="http://schemas.openxmlformats.org/drawingml/2006/main">
               <a:ext uri="{FF2B5EF4-FFF2-40B4-BE49-F238E27FC236}">
-                <a16:creationId xmlns:a16="http://schemas.microsoft.com/office/drawing/2014/main" id="{630B9264-99FB-4553-B0DA-A5B93A02E19E}"/>
+                <a16:creationId xmlns:a16="http://schemas.microsoft.com/office/drawing/2014/main" id="{7702A505-CF55-4E2B-997D-AD97669D02D9}"/>
               </a:ext>
             </a:extLst>
           </p:cNvPr>
@@ -5540,7 +5540,7 @@
           <p:cNvPr id="3" name="close-detail">
             <a:extLst xmlns:a="http://schemas.openxmlformats.org/drawingml/2006/main">
               <a:ext uri="{FF2B5EF4-FFF2-40B4-BE49-F238E27FC236}">
-                <a16:creationId xmlns:a16="http://schemas.microsoft.com/office/drawing/2014/main" id="{7E015A5F-C808-4462-BDF8-C73F87C9E014}"/>
+                <a16:creationId xmlns:a16="http://schemas.microsoft.com/office/drawing/2014/main" id="{9201F0BC-9321-4618-9717-2C359901B3EA}"/>
               </a:ext>
             </a:extLst>
           </p:cNvPr>
@@ -5619,7 +5619,7 @@
           <p:cNvPr id="4" name="close-status">
             <a:extLst xmlns:a="http://schemas.openxmlformats.org/drawingml/2006/main">
               <a:ext uri="{FF2B5EF4-FFF2-40B4-BE49-F238E27FC236}">
-                <a16:creationId xmlns:a16="http://schemas.microsoft.com/office/drawing/2014/main" id="{2AFC6CCE-08D5-447C-A3B6-1A1E4705779C}"/>
+                <a16:creationId xmlns:a16="http://schemas.microsoft.com/office/drawing/2014/main" id="{B69D7650-8F72-440A-A35D-F375736F8CE6}"/>
               </a:ext>
             </a:extLst>
           </p:cNvPr>
@@ -5654,7 +5654,7 @@
           <p:cNvPr id="5" name="close-go">
             <a:extLst xmlns:a="http://schemas.openxmlformats.org/drawingml/2006/main">
               <a:ext uri="{FF2B5EF4-FFF2-40B4-BE49-F238E27FC236}">
-                <a16:creationId xmlns:a16="http://schemas.microsoft.com/office/drawing/2014/main" id="{FFB74B2E-0CBE-4BA4-AD42-B5EC6E5C35E9}"/>
+                <a16:creationId xmlns:a16="http://schemas.microsoft.com/office/drawing/2014/main" id="{D22D7C7A-3B4D-4B7F-8D88-8BDE2729BCEC}"/>
               </a:ext>
             </a:extLst>
           </p:cNvPr>
@@ -5710,7 +5710,7 @@
           <p:cNvPr id="6" name="close-condition">
             <a:extLst xmlns:a="http://schemas.openxmlformats.org/drawingml/2006/main">
               <a:ext uri="{FF2B5EF4-FFF2-40B4-BE49-F238E27FC236}">
-                <a16:creationId xmlns:a16="http://schemas.microsoft.com/office/drawing/2014/main" id="{924BB059-8384-4F19-BFA4-518B514ACEE6}"/>
+                <a16:creationId xmlns:a16="http://schemas.microsoft.com/office/drawing/2014/main" id="{A9DB6BD3-70D3-4FF4-87A5-0B977B396F10}"/>
               </a:ext>
             </a:extLst>
           </p:cNvPr>
@@ -5766,7 +5766,7 @@
           <p:cNvPr id="7" name="close-next">
             <a:extLst xmlns:a="http://schemas.openxmlformats.org/drawingml/2006/main">
               <a:ext uri="{FF2B5EF4-FFF2-40B4-BE49-F238E27FC236}">
-                <a16:creationId xmlns:a16="http://schemas.microsoft.com/office/drawing/2014/main" id="{40DC4ADD-D86C-4F28-9243-D1C64FBFDA63}"/>
+                <a16:creationId xmlns:a16="http://schemas.microsoft.com/office/drawing/2014/main" id="{5B9A3FB3-E1F1-4632-A39D-408F7F2602B2}"/>
               </a:ext>
             </a:extLst>
           </p:cNvPr>
@@ -5820,7 +5820,7 @@
     </p:spTree>
     <p:extLst>
       <p:ext uri="{BB962C8B-B14F-4D97-AF65-F5344CB8AC3E}">
-        <p14:creationId xmlns:p14="http://schemas.microsoft.com/office/powerpoint/2010/main" val="1167452779"/>
+        <p14:creationId xmlns:p14="http://schemas.microsoft.com/office/powerpoint/2010/main" val="522318426"/>
       </p:ext>
     </p:extLst>
   </p:cSld>

--- a/output/presentation/techflow-community-ui-modernization.pptx
+++ b/output/presentation/techflow-community-ui-modernization.pptx
@@ -2,19 +2,20 @@
 <file path=ppt/presentation.xml><?xml version="1.0" encoding="utf-8"?>
 <p:presentation xmlns:p="http://schemas.openxmlformats.org/presentationml/2006/main">
   <p:sldMasterIdLst>
-    <p:sldMasterId xmlns:r="http://schemas.openxmlformats.org/officeDocument/2006/relationships" id="2147483648" r:id="Rc0d988195a3644a5"/>
+    <p:sldMasterId xmlns:r="http://schemas.openxmlformats.org/officeDocument/2006/relationships" id="2147483648" r:id="R2249c91de94c4718"/>
   </p:sldMasterIdLst>
   <p:notesMasterIdLst>
-    <p:notesMasterId xmlns:r="http://schemas.openxmlformats.org/officeDocument/2006/relationships" r:id="R72e0ae21a94d4ff3"/>
+    <p:notesMasterId xmlns:r="http://schemas.openxmlformats.org/officeDocument/2006/relationships" r:id="Ra372d30adc4f467c"/>
   </p:notesMasterIdLst>
   <p:sldIdLst>
-    <p:sldId xmlns:r="http://schemas.openxmlformats.org/officeDocument/2006/relationships" id="256" r:id="Rc8f372eff89a4818"/>
-    <p:sldId xmlns:r="http://schemas.openxmlformats.org/officeDocument/2006/relationships" id="257" r:id="R62201f65e6d24a1b"/>
-    <p:sldId xmlns:r="http://schemas.openxmlformats.org/officeDocument/2006/relationships" id="258" r:id="R8040683f2f20426b"/>
-    <p:sldId xmlns:r="http://schemas.openxmlformats.org/officeDocument/2006/relationships" id="259" r:id="R19c899b3d5e7439e"/>
-    <p:sldId xmlns:r="http://schemas.openxmlformats.org/officeDocument/2006/relationships" id="260" r:id="R83829bfcdbef4fc7"/>
-    <p:sldId xmlns:r="http://schemas.openxmlformats.org/officeDocument/2006/relationships" id="261" r:id="Raed0476c194f4957"/>
-    <p:sldId xmlns:r="http://schemas.openxmlformats.org/officeDocument/2006/relationships" id="262" r:id="Rc1f7e4ccf3e64586"/>
+    <p:sldId xmlns:r="http://schemas.openxmlformats.org/officeDocument/2006/relationships" id="256" r:id="R59d7cb2e865b4b27"/>
+    <p:sldId xmlns:r="http://schemas.openxmlformats.org/officeDocument/2006/relationships" id="257" r:id="R7d1440888b1540c9"/>
+    <p:sldId xmlns:r="http://schemas.openxmlformats.org/officeDocument/2006/relationships" id="258" r:id="R834efade9b5440bb"/>
+    <p:sldId xmlns:r="http://schemas.openxmlformats.org/officeDocument/2006/relationships" id="259" r:id="Rc344c68fd97a4b66"/>
+    <p:sldId xmlns:r="http://schemas.openxmlformats.org/officeDocument/2006/relationships" id="260" r:id="R73a08b6dc04140eb"/>
+    <p:sldId xmlns:r="http://schemas.openxmlformats.org/officeDocument/2006/relationships" id="261" r:id="Ra434022808fd4667"/>
+    <p:sldId xmlns:r="http://schemas.openxmlformats.org/officeDocument/2006/relationships" id="262" r:id="R0e5b4aab3b25432d"/>
+    <p:sldId xmlns:r="http://schemas.openxmlformats.org/officeDocument/2006/relationships" id="263" r:id="Ra31f8c43250a490b"/>
   </p:sldIdLst>
   <p:sldSz cx="12192000" cy="6858000"/>
   <p:notesSz cx="6858000" cy="9144000"/>
@@ -1038,6 +1039,96 @@
 </p:notes>
 </file>
 
+<file path=ppt/notesSlides/notesSlide8.xml><?xml version="1.0" encoding="utf-8"?>
+<p:notes xmlns:p="http://schemas.openxmlformats.org/presentationml/2006/main">
+  <p:cSld>
+    <p:spTree>
+      <p:nvGrpSpPr>
+        <p:cNvPr id="1" name=""/>
+        <p:cNvGrpSpPr/>
+        <p:nvPr/>
+      </p:nvGrpSpPr>
+      <p:grpSpPr>
+        <a:xfrm xmlns:a="http://schemas.openxmlformats.org/drawingml/2006/main"/>
+      </p:grpSpPr>
+      <p:sp>
+        <p:nvSpPr>
+          <p:cNvPr id="2" name="Slide Image Placeholder 1"/>
+          <p:cNvSpPr>
+            <a:spLocks xmlns:a="http://schemas.openxmlformats.org/drawingml/2006/main" noGrp="1"/>
+          </p:cNvSpPr>
+          <p:nvPr>
+            <p:ph type="sldImg" idx="0"/>
+          </p:nvPr>
+        </p:nvSpPr>
+        <p:spPr/>
+      </p:sp>
+      <p:sp>
+        <p:nvSpPr>
+          <p:cNvPr id="3" name="Notes Placeholder 2"/>
+          <p:cNvSpPr>
+            <a:spLocks xmlns:a="http://schemas.openxmlformats.org/drawingml/2006/main" noGrp="1"/>
+          </p:cNvSpPr>
+          <p:nvPr>
+            <p:ph type="body" idx="1"/>
+          </p:nvPr>
+        </p:nvSpPr>
+        <p:spPr/>
+        <p:txBody>
+          <a:bodyPr xmlns:a="http://schemas.openxmlformats.org/drawingml/2006/main"/>
+          <a:lstStyle xmlns:a="http://schemas.openxmlformats.org/drawingml/2006/main"/>
+          <a:p xmlns:a="http://schemas.openxmlformats.org/drawingml/2006/main">
+            <a:r>
+              <a:t>[Sources]</a:t>
+            </a:r>
+          </a:p>
+          <a:p xmlns:a="http://schemas.openxmlformats.org/drawingml/2006/main">
+            <a:r>
+              <a:t>- docs/reports/issue-73-community-ui-validation.md</a:t>
+            </a:r>
+          </a:p>
+          <a:p xmlns:a="http://schemas.openxmlformats.org/drawingml/2006/main">
+            <a:r>
+              <a:t>- docs/evidence/issue-73/community-theme-validation.json</a:t>
+            </a:r>
+          </a:p>
+          <a:p xmlns:a="http://schemas.openxmlformats.org/drawingml/2006/main">
+            <a:r>
+              <a:t>- docs/plans/issue-73-community-ui-modernization.md</a:t>
+            </a:r>
+          </a:p>
+          <a:p xmlns:a="http://schemas.openxmlformats.org/drawingml/2006/main">
+            <a:r>
+              <a:t>- docs/runbooks/community-theme-rollout-rollback.md</a:t>
+            </a:r>
+          </a:p>
+        </p:txBody>
+      </p:sp>
+      <p:sp>
+        <p:nvSpPr>
+          <p:cNvPr id="4" name="Slide Number Placeholder 3"/>
+          <p:cNvSpPr>
+            <a:spLocks xmlns:a="http://schemas.openxmlformats.org/drawingml/2006/main" noGrp="1"/>
+          </p:cNvSpPr>
+          <p:nvPr>
+            <p:ph type="sldNum" idx="5"/>
+          </p:nvPr>
+        </p:nvSpPr>
+        <p:spPr/>
+        <p:txBody>
+          <a:bodyPr xmlns:a="http://schemas.openxmlformats.org/drawingml/2006/main"/>
+          <a:lstStyle xmlns:a="http://schemas.openxmlformats.org/drawingml/2006/main"/>
+          <a:p xmlns:a="http://schemas.openxmlformats.org/drawingml/2006/main"/>
+        </p:txBody>
+      </p:sp>
+    </p:spTree>
+  </p:cSld>
+  <p:clrMapOvr>
+    <a:masterClrMapping xmlns:a="http://schemas.openxmlformats.org/drawingml/2006/main"/>
+  </p:clrMapOvr>
+</p:notes>
+</file>
+
 <file path=ppt/slideLayouts/slideLayout1.xml><?xml version="1.0" encoding="utf-8"?>
 <p:sldLayout xmlns:p="http://schemas.openxmlformats.org/presentationml/2006/main" type="title">
   <p:cSld name="Title Slide">
@@ -1076,7 +1167,7 @@
   </p:cSld>
   <p:clrMap bg1="lt1" tx1="dk1" bg2="lt2" tx2="dk2" accent1="accent1" accent2="accent2" accent3="accent3" accent4="accent4" accent5="accent5" accent6="accent6" hlink="hlink" folHlink="folHlink"/>
   <p:sldLayoutIdLst>
-    <p:sldLayoutId xmlns:r="http://schemas.openxmlformats.org/officeDocument/2006/relationships" id="2147483649" r:id="Rf4019821811d487b"/>
+    <p:sldLayoutId xmlns:r="http://schemas.openxmlformats.org/officeDocument/2006/relationships" id="2147483649" r:id="Rd33a35e15ba44d26"/>
   </p:sldLayoutIdLst>
   <p:txStyles>
     <p:titleStyle>
@@ -1627,7 +1718,7 @@
           <p:cNvPr id="7" name="cover-kicker">
             <a:extLst xmlns:a="http://schemas.openxmlformats.org/drawingml/2006/main">
               <a:ext uri="{FF2B5EF4-FFF2-40B4-BE49-F238E27FC236}">
-                <a16:creationId xmlns:a16="http://schemas.microsoft.com/office/drawing/2014/main" id="{89236714-0AB6-4A3F-AF94-C38E94BA8323}"/>
+                <a16:creationId xmlns:a16="http://schemas.microsoft.com/office/drawing/2014/main" id="{EA28F31F-48A4-4EAA-A5AB-984238044BE1}"/>
               </a:ext>
             </a:extLst>
           </p:cNvPr>
@@ -1683,7 +1774,7 @@
           <p:cNvPr id="2" name="cover-title">
             <a:extLst xmlns:a="http://schemas.openxmlformats.org/drawingml/2006/main">
               <a:ext uri="{FF2B5EF4-FFF2-40B4-BE49-F238E27FC236}">
-                <a16:creationId xmlns:a16="http://schemas.microsoft.com/office/drawing/2014/main" id="{093F1E17-CC02-4DDE-BE01-5919D1E396E9}"/>
+                <a16:creationId xmlns:a16="http://schemas.microsoft.com/office/drawing/2014/main" id="{AC38D8EA-556D-4E19-9373-999A5CFEA394}"/>
               </a:ext>
             </a:extLst>
           </p:cNvPr>
@@ -1762,7 +1853,7 @@
           <p:cNvPr id="3" name="cover-subtitle">
             <a:extLst xmlns:a="http://schemas.openxmlformats.org/drawingml/2006/main">
               <a:ext uri="{FF2B5EF4-FFF2-40B4-BE49-F238E27FC236}">
-                <a16:creationId xmlns:a16="http://schemas.microsoft.com/office/drawing/2014/main" id="{045E7CE8-F81D-441E-B434-C3C09F062738}"/>
+                <a16:creationId xmlns:a16="http://schemas.microsoft.com/office/drawing/2014/main" id="{FE5FDCE8-FD06-4B45-8C0D-AAD47D24E672}"/>
               </a:ext>
             </a:extLst>
           </p:cNvPr>
@@ -1818,7 +1909,7 @@
           <p:cNvPr id="4" name="cover-image-frame">
             <a:extLst xmlns:a="http://schemas.openxmlformats.org/drawingml/2006/main">
               <a:ext uri="{FF2B5EF4-FFF2-40B4-BE49-F238E27FC236}">
-                <a16:creationId xmlns:a16="http://schemas.microsoft.com/office/drawing/2014/main" id="{CF976083-51F8-43B6-94D6-F6472C9AAF8D}"/>
+                <a16:creationId xmlns:a16="http://schemas.microsoft.com/office/drawing/2014/main" id="{AA2838ED-043E-4EDE-9BEF-65EE8A40445F}"/>
               </a:ext>
             </a:extLst>
           </p:cNvPr>
@@ -1857,13 +1948,13 @@
           <p:nvPr/>
         </p:nvPicPr>
         <p:blipFill>
-          <a:blip xmlns:r="http://schemas.openxmlformats.org/officeDocument/2006/relationships" xmlns:a="http://schemas.openxmlformats.org/drawingml/2006/main" r:embed="Rf4304e88270543cd"/>
+          <a:blip xmlns:r="http://schemas.openxmlformats.org/officeDocument/2006/relationships" xmlns:a="http://schemas.openxmlformats.org/drawingml/2006/main" r:embed="R17eba5e6d73c4cfa"/>
           <a:stretch xmlns:a="http://schemas.openxmlformats.org/drawingml/2006/main"/>
         </p:blipFill>
         <p:spPr>
           <a:xfrm xmlns:a="http://schemas.openxmlformats.org/drawingml/2006/main">
-            <a:off x="6438900" y="1631683"/>
-            <a:ext cx="5048250" cy="3156485"/>
+            <a:off x="6438900" y="1632347"/>
+            <a:ext cx="5048250" cy="3155156"/>
           </a:xfrm>
           <a:prstGeom xmlns:a="http://schemas.openxmlformats.org/drawingml/2006/main" prst="roundRect">
             <a:avLst>
@@ -1877,7 +1968,7 @@
           <p:cNvPr id="6" name="cover-status">
             <a:extLst xmlns:a="http://schemas.openxmlformats.org/drawingml/2006/main">
               <a:ext uri="{FF2B5EF4-FFF2-40B4-BE49-F238E27FC236}">
-                <a16:creationId xmlns:a16="http://schemas.microsoft.com/office/drawing/2014/main" id="{55440247-EC20-42B7-ABB5-542434C6E6ED}"/>
+                <a16:creationId xmlns:a16="http://schemas.microsoft.com/office/drawing/2014/main" id="{3ABA49B2-2460-4A09-8C44-69F4387885B7}"/>
               </a:ext>
             </a:extLst>
           </p:cNvPr>
@@ -1931,7 +2022,7 @@
     </p:spTree>
     <p:extLst>
       <p:ext uri="{BB962C8B-B14F-4D97-AF65-F5344CB8AC3E}">
-        <p14:creationId xmlns:p14="http://schemas.microsoft.com/office/powerpoint/2010/main" val="1302101851"/>
+        <p14:creationId xmlns:p14="http://schemas.microsoft.com/office/powerpoint/2010/main" val="159873576"/>
       </p:ext>
     </p:extLst>
   </p:cSld>
@@ -1962,7 +2053,7 @@
           <p:cNvPr id="9" name="title-2">
             <a:extLst xmlns:a="http://schemas.openxmlformats.org/drawingml/2006/main">
               <a:ext uri="{FF2B5EF4-FFF2-40B4-BE49-F238E27FC236}">
-                <a16:creationId xmlns:a16="http://schemas.microsoft.com/office/drawing/2014/main" id="{4E691F33-6092-4279-A3E6-B5478F8807C2}"/>
+                <a16:creationId xmlns:a16="http://schemas.microsoft.com/office/drawing/2014/main" id="{624C129A-A9CA-41FC-84FC-FCF3D153985D}"/>
               </a:ext>
             </a:extLst>
           </p:cNvPr>
@@ -2018,7 +2109,7 @@
           <p:cNvPr id="2" name="page-2">
             <a:extLst xmlns:a="http://schemas.openxmlformats.org/drawingml/2006/main">
               <a:ext uri="{FF2B5EF4-FFF2-40B4-BE49-F238E27FC236}">
-                <a16:creationId xmlns:a16="http://schemas.microsoft.com/office/drawing/2014/main" id="{0C9D4D5C-3285-4133-A13A-8DCAA5A43559}"/>
+                <a16:creationId xmlns:a16="http://schemas.microsoft.com/office/drawing/2014/main" id="{52FBA979-9324-4642-BAC8-8A3791E5953C}"/>
               </a:ext>
             </a:extLst>
           </p:cNvPr>
@@ -2074,7 +2165,7 @@
           <p:cNvPr id="3" name="before-label">
             <a:extLst xmlns:a="http://schemas.openxmlformats.org/drawingml/2006/main">
               <a:ext uri="{FF2B5EF4-FFF2-40B4-BE49-F238E27FC236}">
-                <a16:creationId xmlns:a16="http://schemas.microsoft.com/office/drawing/2014/main" id="{F279BF4C-C64F-49BD-8CC3-CC12F60A2D4F}"/>
+                <a16:creationId xmlns:a16="http://schemas.microsoft.com/office/drawing/2014/main" id="{1AE99113-5BBF-469F-A457-AC7DFEE547BB}"/>
               </a:ext>
             </a:extLst>
           </p:cNvPr>
@@ -2130,7 +2221,7 @@
           <p:cNvPr id="4" name="after-label">
             <a:extLst xmlns:a="http://schemas.openxmlformats.org/drawingml/2006/main">
               <a:ext uri="{FF2B5EF4-FFF2-40B4-BE49-F238E27FC236}">
-                <a16:creationId xmlns:a16="http://schemas.microsoft.com/office/drawing/2014/main" id="{E4E0EF3C-AF36-4162-838B-B8041CBA8582}"/>
+                <a16:creationId xmlns:a16="http://schemas.microsoft.com/office/drawing/2014/main" id="{6AD6548B-C0CB-4B68-8EC8-FDD40718B74B}"/>
               </a:ext>
             </a:extLst>
           </p:cNvPr>
@@ -2190,7 +2281,7 @@
           <p:nvPr/>
         </p:nvPicPr>
         <p:blipFill>
-          <a:blip xmlns:r="http://schemas.openxmlformats.org/officeDocument/2006/relationships" xmlns:a="http://schemas.openxmlformats.org/drawingml/2006/main" r:embed="R8549177db408426f"/>
+          <a:blip xmlns:r="http://schemas.openxmlformats.org/officeDocument/2006/relationships" xmlns:a="http://schemas.openxmlformats.org/drawingml/2006/main" r:embed="R0fdb935ae4cc47bc"/>
           <a:stretch xmlns:a="http://schemas.openxmlformats.org/drawingml/2006/main"/>
         </p:blipFill>
         <p:spPr>
@@ -2214,13 +2305,13 @@
           <p:nvPr/>
         </p:nvPicPr>
         <p:blipFill>
-          <a:blip xmlns:r="http://schemas.openxmlformats.org/officeDocument/2006/relationships" xmlns:a="http://schemas.openxmlformats.org/drawingml/2006/main" r:embed="R63279a64ff7a4ae0"/>
+          <a:blip xmlns:r="http://schemas.openxmlformats.org/officeDocument/2006/relationships" xmlns:a="http://schemas.openxmlformats.org/drawingml/2006/main" r:embed="R30666c339bca4aa3"/>
           <a:stretch xmlns:a="http://schemas.openxmlformats.org/drawingml/2006/main"/>
         </p:blipFill>
         <p:spPr>
           <a:xfrm xmlns:a="http://schemas.openxmlformats.org/drawingml/2006/main">
-            <a:off x="6362700" y="1582854"/>
-            <a:ext cx="5143500" cy="3216041"/>
+            <a:off x="6362700" y="1583531"/>
+            <a:ext cx="5143500" cy="3214688"/>
           </a:xfrm>
           <a:prstGeom xmlns:a="http://schemas.openxmlformats.org/drawingml/2006/main" prst="roundRect">
             <a:avLst>
@@ -2234,7 +2325,7 @@
           <p:cNvPr id="7" name="before-copy">
             <a:extLst xmlns:a="http://schemas.openxmlformats.org/drawingml/2006/main">
               <a:ext uri="{FF2B5EF4-FFF2-40B4-BE49-F238E27FC236}">
-                <a16:creationId xmlns:a16="http://schemas.microsoft.com/office/drawing/2014/main" id="{3E4A58A1-5B50-471F-967F-950C23CE715D}"/>
+                <a16:creationId xmlns:a16="http://schemas.microsoft.com/office/drawing/2014/main" id="{596D4AE4-EC1C-4A2B-AAFD-DAB15D7CFB79}"/>
               </a:ext>
             </a:extLst>
           </p:cNvPr>
@@ -2290,7 +2381,7 @@
           <p:cNvPr id="8" name="after-copy">
             <a:extLst xmlns:a="http://schemas.openxmlformats.org/drawingml/2006/main">
               <a:ext uri="{FF2B5EF4-FFF2-40B4-BE49-F238E27FC236}">
-                <a16:creationId xmlns:a16="http://schemas.microsoft.com/office/drawing/2014/main" id="{1D933CC1-BF5D-4207-B0A2-1212A2C89698}"/>
+                <a16:creationId xmlns:a16="http://schemas.microsoft.com/office/drawing/2014/main" id="{3BBB677B-C723-41F7-B66F-7E51972CE4AC}"/>
               </a:ext>
             </a:extLst>
           </p:cNvPr>
@@ -2344,7 +2435,7 @@
     </p:spTree>
     <p:extLst>
       <p:ext uri="{BB962C8B-B14F-4D97-AF65-F5344CB8AC3E}">
-        <p14:creationId xmlns:p14="http://schemas.microsoft.com/office/powerpoint/2010/main" val="1303207477"/>
+        <p14:creationId xmlns:p14="http://schemas.microsoft.com/office/powerpoint/2010/main" val="673266305"/>
       </p:ext>
     </p:extLst>
   </p:cSld>
@@ -2375,7 +2466,7 @@
           <p:cNvPr id="15" name="title-3">
             <a:extLst xmlns:a="http://schemas.openxmlformats.org/drawingml/2006/main">
               <a:ext uri="{FF2B5EF4-FFF2-40B4-BE49-F238E27FC236}">
-                <a16:creationId xmlns:a16="http://schemas.microsoft.com/office/drawing/2014/main" id="{6894AE7C-5CD3-4602-8DC6-0DA9312BD01F}"/>
+                <a16:creationId xmlns:a16="http://schemas.microsoft.com/office/drawing/2014/main" id="{D8F15D1D-EB18-4F6E-93D6-349708858ED5}"/>
               </a:ext>
             </a:extLst>
           </p:cNvPr>
@@ -2431,7 +2522,7 @@
           <p:cNvPr id="2" name="page-3">
             <a:extLst xmlns:a="http://schemas.openxmlformats.org/drawingml/2006/main">
               <a:ext uri="{FF2B5EF4-FFF2-40B4-BE49-F238E27FC236}">
-                <a16:creationId xmlns:a16="http://schemas.microsoft.com/office/drawing/2014/main" id="{8E1AEBC3-BAB2-4450-BE54-9547E45348AF}"/>
+                <a16:creationId xmlns:a16="http://schemas.microsoft.com/office/drawing/2014/main" id="{D3E2338A-2FE4-4651-AB5C-9FC53A388FAF}"/>
               </a:ext>
             </a:extLst>
           </p:cNvPr>
@@ -2487,7 +2578,7 @@
           <p:cNvPr id="3" name="state-0">
             <a:extLst xmlns:a="http://schemas.openxmlformats.org/drawingml/2006/main">
               <a:ext uri="{FF2B5EF4-FFF2-40B4-BE49-F238E27FC236}">
-                <a16:creationId xmlns:a16="http://schemas.microsoft.com/office/drawing/2014/main" id="{4E7D9AFC-B356-44D4-852B-3740370E3FF4}"/>
+                <a16:creationId xmlns:a16="http://schemas.microsoft.com/office/drawing/2014/main" id="{AD36A0EB-7B60-4EBC-9179-A4320395EC66}"/>
               </a:ext>
             </a:extLst>
           </p:cNvPr>
@@ -2522,7 +2613,7 @@
           <p:cNvPr id="4" name="state-label-0">
             <a:extLst xmlns:a="http://schemas.openxmlformats.org/drawingml/2006/main">
               <a:ext uri="{FF2B5EF4-FFF2-40B4-BE49-F238E27FC236}">
-                <a16:creationId xmlns:a16="http://schemas.microsoft.com/office/drawing/2014/main" id="{8611ACB7-AB69-4D66-A2D4-32486A9F99EE}"/>
+                <a16:creationId xmlns:a16="http://schemas.microsoft.com/office/drawing/2014/main" id="{A603C445-B8B9-45A9-A5D8-A77DBC9CA40D}"/>
               </a:ext>
             </a:extLst>
           </p:cNvPr>
@@ -2578,7 +2669,7 @@
           <p:cNvPr id="5" name="state-detail-0">
             <a:extLst xmlns:a="http://schemas.openxmlformats.org/drawingml/2006/main">
               <a:ext uri="{FF2B5EF4-FFF2-40B4-BE49-F238E27FC236}">
-                <a16:creationId xmlns:a16="http://schemas.microsoft.com/office/drawing/2014/main" id="{251FDE4E-9182-46E2-AA34-2DB915732901}"/>
+                <a16:creationId xmlns:a16="http://schemas.microsoft.com/office/drawing/2014/main" id="{E275ED53-AFF2-4A20-AB4D-BD23F353185B}"/>
               </a:ext>
             </a:extLst>
           </p:cNvPr>
@@ -2634,7 +2725,7 @@
           <p:cNvPr id="6" name="state-1">
             <a:extLst xmlns:a="http://schemas.openxmlformats.org/drawingml/2006/main">
               <a:ext uri="{FF2B5EF4-FFF2-40B4-BE49-F238E27FC236}">
-                <a16:creationId xmlns:a16="http://schemas.microsoft.com/office/drawing/2014/main" id="{C2CA9BFD-DAF2-4AA8-8936-64BCAB233B86}"/>
+                <a16:creationId xmlns:a16="http://schemas.microsoft.com/office/drawing/2014/main" id="{49D9B92D-9E05-4B95-B98B-A61C731CF097}"/>
               </a:ext>
             </a:extLst>
           </p:cNvPr>
@@ -2669,7 +2760,7 @@
           <p:cNvPr id="7" name="state-label-1">
             <a:extLst xmlns:a="http://schemas.openxmlformats.org/drawingml/2006/main">
               <a:ext uri="{FF2B5EF4-FFF2-40B4-BE49-F238E27FC236}">
-                <a16:creationId xmlns:a16="http://schemas.microsoft.com/office/drawing/2014/main" id="{BF7E1CE0-6342-410A-9DE4-7E8F9A592637}"/>
+                <a16:creationId xmlns:a16="http://schemas.microsoft.com/office/drawing/2014/main" id="{A29728F8-8D49-47CE-A122-347A791D7205}"/>
               </a:ext>
             </a:extLst>
           </p:cNvPr>
@@ -2725,7 +2816,7 @@
           <p:cNvPr id="8" name="state-detail-1">
             <a:extLst xmlns:a="http://schemas.openxmlformats.org/drawingml/2006/main">
               <a:ext uri="{FF2B5EF4-FFF2-40B4-BE49-F238E27FC236}">
-                <a16:creationId xmlns:a16="http://schemas.microsoft.com/office/drawing/2014/main" id="{81C36728-84D0-4454-96B1-54E9609E787A}"/>
+                <a16:creationId xmlns:a16="http://schemas.microsoft.com/office/drawing/2014/main" id="{0B028B3D-9F3A-4E22-B7D2-925A15FC170E}"/>
               </a:ext>
             </a:extLst>
           </p:cNvPr>
@@ -2781,7 +2872,7 @@
           <p:cNvPr id="9" name="state-2">
             <a:extLst xmlns:a="http://schemas.openxmlformats.org/drawingml/2006/main">
               <a:ext uri="{FF2B5EF4-FFF2-40B4-BE49-F238E27FC236}">
-                <a16:creationId xmlns:a16="http://schemas.microsoft.com/office/drawing/2014/main" id="{5963426B-4971-46C0-92AC-A464220599BD}"/>
+                <a16:creationId xmlns:a16="http://schemas.microsoft.com/office/drawing/2014/main" id="{5E97731B-3E08-4FCE-8DD4-6A8FD7AD8F45}"/>
               </a:ext>
             </a:extLst>
           </p:cNvPr>
@@ -2816,7 +2907,7 @@
           <p:cNvPr id="10" name="state-label-2">
             <a:extLst xmlns:a="http://schemas.openxmlformats.org/drawingml/2006/main">
               <a:ext uri="{FF2B5EF4-FFF2-40B4-BE49-F238E27FC236}">
-                <a16:creationId xmlns:a16="http://schemas.microsoft.com/office/drawing/2014/main" id="{94BF00C6-5489-4CFC-B61D-9B55FB0C719B}"/>
+                <a16:creationId xmlns:a16="http://schemas.microsoft.com/office/drawing/2014/main" id="{EED740E0-8C52-48AD-A8C1-BAC00B3B450D}"/>
               </a:ext>
             </a:extLst>
           </p:cNvPr>
@@ -2872,7 +2963,7 @@
           <p:cNvPr id="11" name="state-detail-2">
             <a:extLst xmlns:a="http://schemas.openxmlformats.org/drawingml/2006/main">
               <a:ext uri="{FF2B5EF4-FFF2-40B4-BE49-F238E27FC236}">
-                <a16:creationId xmlns:a16="http://schemas.microsoft.com/office/drawing/2014/main" id="{7225CE58-C3BE-41DF-B7DA-3C85F335DE7C}"/>
+                <a16:creationId xmlns:a16="http://schemas.microsoft.com/office/drawing/2014/main" id="{9E32C771-F098-4D27-8F1B-CAE0525007E8}"/>
               </a:ext>
             </a:extLst>
           </p:cNvPr>
@@ -2928,7 +3019,7 @@
           <p:cNvPr id="12" name="state-3">
             <a:extLst xmlns:a="http://schemas.openxmlformats.org/drawingml/2006/main">
               <a:ext uri="{FF2B5EF4-FFF2-40B4-BE49-F238E27FC236}">
-                <a16:creationId xmlns:a16="http://schemas.microsoft.com/office/drawing/2014/main" id="{4E776035-6EA3-4633-80CD-27C2442038D3}"/>
+                <a16:creationId xmlns:a16="http://schemas.microsoft.com/office/drawing/2014/main" id="{A6DFFEA8-6EFD-48A8-AAB5-EDBA2158C91E}"/>
               </a:ext>
             </a:extLst>
           </p:cNvPr>
@@ -2963,7 +3054,7 @@
           <p:cNvPr id="13" name="state-label-3">
             <a:extLst xmlns:a="http://schemas.openxmlformats.org/drawingml/2006/main">
               <a:ext uri="{FF2B5EF4-FFF2-40B4-BE49-F238E27FC236}">
-                <a16:creationId xmlns:a16="http://schemas.microsoft.com/office/drawing/2014/main" id="{7C06D5E9-4A97-4783-8177-1D841DD509B7}"/>
+                <a16:creationId xmlns:a16="http://schemas.microsoft.com/office/drawing/2014/main" id="{3F67467E-37DF-4FA0-B7AE-61C63BEDF4D3}"/>
               </a:ext>
             </a:extLst>
           </p:cNvPr>
@@ -3019,7 +3110,7 @@
           <p:cNvPr id="14" name="state-detail-3">
             <a:extLst xmlns:a="http://schemas.openxmlformats.org/drawingml/2006/main">
               <a:ext uri="{FF2B5EF4-FFF2-40B4-BE49-F238E27FC236}">
-                <a16:creationId xmlns:a16="http://schemas.microsoft.com/office/drawing/2014/main" id="{1F6C50AE-AF25-4EE3-A1B5-FFE4D1785D3C}"/>
+                <a16:creationId xmlns:a16="http://schemas.microsoft.com/office/drawing/2014/main" id="{96F0AD84-0932-4D8F-A410-C318364E2060}"/>
               </a:ext>
             </a:extLst>
           </p:cNvPr>
@@ -3073,7 +3164,7 @@
     </p:spTree>
     <p:extLst>
       <p:ext uri="{BB962C8B-B14F-4D97-AF65-F5344CB8AC3E}">
-        <p14:creationId xmlns:p14="http://schemas.microsoft.com/office/powerpoint/2010/main" val="5660928"/>
+        <p14:creationId xmlns:p14="http://schemas.microsoft.com/office/powerpoint/2010/main" val="479000186"/>
       </p:ext>
     </p:extLst>
   </p:cSld>
@@ -3104,7 +3195,7 @@
           <p:cNvPr id="9" name="title-4">
             <a:extLst xmlns:a="http://schemas.openxmlformats.org/drawingml/2006/main">
               <a:ext uri="{FF2B5EF4-FFF2-40B4-BE49-F238E27FC236}">
-                <a16:creationId xmlns:a16="http://schemas.microsoft.com/office/drawing/2014/main" id="{6DFF9F94-464C-40BC-8C4B-D9C6BB33B065}"/>
+                <a16:creationId xmlns:a16="http://schemas.microsoft.com/office/drawing/2014/main" id="{F61DC087-68A1-4F56-B1C2-B89BC5DA631E}"/>
               </a:ext>
             </a:extLst>
           </p:cNvPr>
@@ -3160,7 +3251,7 @@
           <p:cNvPr id="2" name="page-4">
             <a:extLst xmlns:a="http://schemas.openxmlformats.org/drawingml/2006/main">
               <a:ext uri="{FF2B5EF4-FFF2-40B4-BE49-F238E27FC236}">
-                <a16:creationId xmlns:a16="http://schemas.microsoft.com/office/drawing/2014/main" id="{0C4D56AD-2D82-4FF2-8342-0C22C4301265}"/>
+                <a16:creationId xmlns:a16="http://schemas.microsoft.com/office/drawing/2014/main" id="{4427C92C-FC22-4B0E-BF92-DB42AABBEBEA}"/>
               </a:ext>
             </a:extLst>
           </p:cNvPr>
@@ -3220,7 +3311,7 @@
           <p:nvPr/>
         </p:nvPicPr>
         <p:blipFill>
-          <a:blip xmlns:r="http://schemas.openxmlformats.org/officeDocument/2006/relationships" xmlns:a="http://schemas.openxmlformats.org/drawingml/2006/main" r:embed="Rfe1773950d6644db"/>
+          <a:blip xmlns:r="http://schemas.openxmlformats.org/officeDocument/2006/relationships" xmlns:a="http://schemas.openxmlformats.org/drawingml/2006/main" r:embed="R3f9b3303f4e34131"/>
           <a:stretch xmlns:a="http://schemas.openxmlformats.org/drawingml/2006/main"/>
         </p:blipFill>
         <p:spPr>
@@ -3244,7 +3335,7 @@
           <p:nvPr/>
         </p:nvPicPr>
         <p:blipFill>
-          <a:blip xmlns:r="http://schemas.openxmlformats.org/officeDocument/2006/relationships" xmlns:a="http://schemas.openxmlformats.org/drawingml/2006/main" r:embed="R2a7de5b405cb46cf"/>
+          <a:blip xmlns:r="http://schemas.openxmlformats.org/officeDocument/2006/relationships" xmlns:a="http://schemas.openxmlformats.org/drawingml/2006/main" r:embed="R8d4b001ef665408b"/>
           <a:stretch xmlns:a="http://schemas.openxmlformats.org/drawingml/2006/main"/>
         </p:blipFill>
         <p:spPr>
@@ -3264,7 +3355,7 @@
           <p:cNvPr id="5" name="action-caption">
             <a:extLst xmlns:a="http://schemas.openxmlformats.org/drawingml/2006/main">
               <a:ext uri="{FF2B5EF4-FFF2-40B4-BE49-F238E27FC236}">
-                <a16:creationId xmlns:a16="http://schemas.microsoft.com/office/drawing/2014/main" id="{30336A73-88DF-4522-80F1-993E83530297}"/>
+                <a16:creationId xmlns:a16="http://schemas.microsoft.com/office/drawing/2014/main" id="{C0B5F925-BF6C-4D47-BE3B-BF57B752173C}"/>
               </a:ext>
             </a:extLst>
           </p:cNvPr>
@@ -3320,7 +3411,7 @@
           <p:cNvPr id="6" name="dialog-result">
             <a:extLst xmlns:a="http://schemas.openxmlformats.org/drawingml/2006/main">
               <a:ext uri="{FF2B5EF4-FFF2-40B4-BE49-F238E27FC236}">
-                <a16:creationId xmlns:a16="http://schemas.microsoft.com/office/drawing/2014/main" id="{5E804B92-D611-4E16-AA81-96FE25F4CB67}"/>
+                <a16:creationId xmlns:a16="http://schemas.microsoft.com/office/drawing/2014/main" id="{05B8748A-B9C3-438B-8856-EBFC824357C1}"/>
               </a:ext>
             </a:extLst>
           </p:cNvPr>
@@ -3355,7 +3446,7 @@
           <p:cNvPr id="7" name="dialog-result-main">
             <a:extLst xmlns:a="http://schemas.openxmlformats.org/drawingml/2006/main">
               <a:ext uri="{FF2B5EF4-FFF2-40B4-BE49-F238E27FC236}">
-                <a16:creationId xmlns:a16="http://schemas.microsoft.com/office/drawing/2014/main" id="{622E5BB9-259B-4EF5-9231-D0A0E55A5C77}"/>
+                <a16:creationId xmlns:a16="http://schemas.microsoft.com/office/drawing/2014/main" id="{EF591584-1900-4FD1-97DF-7E8F08BB65ED}"/>
               </a:ext>
             </a:extLst>
           </p:cNvPr>
@@ -3411,7 +3502,7 @@
           <p:cNvPr id="8" name="dialog-result-sub">
             <a:extLst xmlns:a="http://schemas.openxmlformats.org/drawingml/2006/main">
               <a:ext uri="{FF2B5EF4-FFF2-40B4-BE49-F238E27FC236}">
-                <a16:creationId xmlns:a16="http://schemas.microsoft.com/office/drawing/2014/main" id="{D89B86C4-0F99-4D94-AEBD-7046F0964D05}"/>
+                <a16:creationId xmlns:a16="http://schemas.microsoft.com/office/drawing/2014/main" id="{26A7B8F6-9E47-4666-889B-D833C8252A06}"/>
               </a:ext>
             </a:extLst>
           </p:cNvPr>
@@ -3465,7 +3556,7 @@
     </p:spTree>
     <p:extLst>
       <p:ext uri="{BB962C8B-B14F-4D97-AF65-F5344CB8AC3E}">
-        <p14:creationId xmlns:p14="http://schemas.microsoft.com/office/powerpoint/2010/main" val="1621135961"/>
+        <p14:creationId xmlns:p14="http://schemas.microsoft.com/office/powerpoint/2010/main" val="1969041538"/>
       </p:ext>
     </p:extLst>
   </p:cSld>
@@ -3493,10 +3584,10 @@
       </p:grpSpPr>
       <p:sp>
         <p:nvSpPr>
-          <p:cNvPr id="20" name="title-5">
-            <a:extLst xmlns:a="http://schemas.openxmlformats.org/drawingml/2006/main">
-              <a:ext uri="{FF2B5EF4-FFF2-40B4-BE49-F238E27FC236}">
-                <a16:creationId xmlns:a16="http://schemas.microsoft.com/office/drawing/2014/main" id="{48F7F697-A79F-47B5-AE93-14A5306D5A26}"/>
+          <p:cNvPr id="11" name="title-5">
+            <a:extLst xmlns:a="http://schemas.openxmlformats.org/drawingml/2006/main">
+              <a:ext uri="{FF2B5EF4-FFF2-40B4-BE49-F238E27FC236}">
+                <a16:creationId xmlns:a16="http://schemas.microsoft.com/office/drawing/2014/main" id="{15B4B5EF-39AC-41BD-860C-4B8A8FDBAAA7}"/>
               </a:ext>
             </a:extLst>
           </p:cNvPr>
@@ -3542,7 +3633,7 @@
                 <a:ea typeface="Malgun Gothic"/>
                 <a:cs typeface="Malgun Gothic"/>
               </a:rPr>
-              <a:t>활성화와 롤백에도 콘텐츠는 그대로였습니다</a:t>
+              <a:t>데스크톱 버튼을 정리하고 프로필을 통일했습니다</a:t>
             </a:r>
           </a:p>
         </p:txBody>
@@ -3552,7 +3643,7 @@
           <p:cNvPr id="2" name="page-5">
             <a:extLst xmlns:a="http://schemas.openxmlformats.org/drawingml/2006/main">
               <a:ext uri="{FF2B5EF4-FFF2-40B4-BE49-F238E27FC236}">
-                <a16:creationId xmlns:a16="http://schemas.microsoft.com/office/drawing/2014/main" id="{4E527D26-0A6C-4C9B-B810-D6858391FE6A}"/>
+                <a16:creationId xmlns:a16="http://schemas.microsoft.com/office/drawing/2014/main" id="{E85E0CD4-3FBE-4910-B306-0119C668BAFC}"/>
               </a:ext>
             </a:extLst>
           </p:cNvPr>
@@ -3603,310 +3694,52 @@
           </a:p>
         </p:txBody>
       </p:sp>
-      <p:sp>
-        <p:nvSpPr>
-          <p:cNvPr id="3" name="arrow-0">
-            <a:extLst xmlns:a="http://schemas.openxmlformats.org/drawingml/2006/main">
-              <a:ext uri="{FF2B5EF4-FFF2-40B4-BE49-F238E27FC236}">
-                <a16:creationId xmlns:a16="http://schemas.microsoft.com/office/drawing/2014/main" id="{EC26496B-E329-428F-99E8-C7D19D8500F9}"/>
-              </a:ext>
-            </a:extLst>
-          </p:cNvPr>
-          <p:cNvSpPr>
-            <a:spLocks xmlns:a="http://schemas.openxmlformats.org/drawingml/2006/main" noGrp="1"/>
-          </p:cNvSpPr>
-          <p:nvPr/>
-        </p:nvSpPr>
-        <p:spPr>
-          <a:xfrm xmlns:a="http://schemas.openxmlformats.org/drawingml/2006/main">
-            <a:off x="2876550" y="2809875"/>
-            <a:ext cx="552450" cy="495300"/>
-          </a:xfrm>
-          <a:prstGeom xmlns:a="http://schemas.openxmlformats.org/drawingml/2006/main" prst="rect">
-            <a:avLst/>
-          </a:prstGeom>
-          <a:noFill xmlns:a="http://schemas.openxmlformats.org/drawingml/2006/main"/>
-          <a:ln xmlns:a="http://schemas.openxmlformats.org/drawingml/2006/main" w="0">
-            <a:noFill/>
-            <a:prstDash val="solid"/>
-          </a:ln>
-        </p:spPr>
-        <p:txBody>
-          <a:bodyPr xmlns:a="http://schemas.openxmlformats.org/drawingml/2006/main"/>
-          <a:lstStyle xmlns:a="http://schemas.openxmlformats.org/drawingml/2006/main"/>
-          <a:p xmlns:a="http://schemas.openxmlformats.org/drawingml/2006/main">
-            <a:pPr algn="ctr">
-              <a:defRPr sz="2400" b="1">
-                <a:solidFill>
-                  <a:srgbClr val="52647D"/>
-                </a:solidFill>
-                <a:latin typeface="Malgun Gothic"/>
-                <a:ea typeface="Malgun Gothic"/>
-                <a:cs typeface="Malgun Gothic"/>
-              </a:defRPr>
-            </a:pPr>
-            <a:r>
-              <a:rPr sz="2400" b="1">
-                <a:solidFill>
-                  <a:srgbClr val="52647D"/>
-                </a:solidFill>
-                <a:latin typeface="Malgun Gothic"/>
-                <a:ea typeface="Malgun Gothic"/>
-                <a:cs typeface="Malgun Gothic"/>
-              </a:rPr>
-              <a:t>→</a:t>
-            </a:r>
-          </a:p>
-        </p:txBody>
-      </p:sp>
-      <p:sp>
-        <p:nvSpPr>
-          <p:cNvPr id="4" name="phase-0">
-            <a:extLst xmlns:a="http://schemas.openxmlformats.org/drawingml/2006/main">
-              <a:ext uri="{FF2B5EF4-FFF2-40B4-BE49-F238E27FC236}">
-                <a16:creationId xmlns:a16="http://schemas.microsoft.com/office/drawing/2014/main" id="{AA6AD0D9-FC38-459E-9749-629440DA6935}"/>
-              </a:ext>
-            </a:extLst>
-          </p:cNvPr>
-          <p:cNvSpPr>
-            <a:spLocks xmlns:a="http://schemas.openxmlformats.org/drawingml/2006/main" noGrp="1"/>
-          </p:cNvSpPr>
-          <p:nvPr/>
-        </p:nvSpPr>
-        <p:spPr>
-          <a:xfrm xmlns:a="http://schemas.openxmlformats.org/drawingml/2006/main">
-            <a:off x="666750" y="2247900"/>
-            <a:ext cx="2171700" cy="1562100"/>
+      <p:pic>
+        <p:nvPicPr>
+          <p:cNvPr id="13" name=""/>
+          <p:cNvPicPr>
+            <a:picLocks xmlns:a="http://schemas.openxmlformats.org/drawingml/2006/main" noChangeAspect="1"/>
+          </p:cNvPicPr>
+          <p:nvPr/>
+        </p:nvPicPr>
+        <p:blipFill>
+          <a:blip xmlns:r="http://schemas.openxmlformats.org/officeDocument/2006/relationships" xmlns:a="http://schemas.openxmlformats.org/drawingml/2006/main" r:embed="R38f2a52255ae421c"/>
+          <a:stretch xmlns:a="http://schemas.openxmlformats.org/drawingml/2006/main"/>
+        </p:blipFill>
+        <p:spPr>
+          <a:xfrm xmlns:a="http://schemas.openxmlformats.org/drawingml/2006/main">
+            <a:off x="457200" y="1314450"/>
+            <a:ext cx="7239000" cy="4524375"/>
           </a:xfrm>
           <a:prstGeom xmlns:a="http://schemas.openxmlformats.org/drawingml/2006/main" prst="roundRect">
             <a:avLst>
-              <a:gd name="adj" fmla="val 4878"/>
+              <a:gd name="adj" fmla="val 2526"/>
             </a:avLst>
           </a:prstGeom>
-          <a:solidFill xmlns:a="http://schemas.openxmlformats.org/drawingml/2006/main">
-            <a:srgbClr val="F3F7FC"/>
-          </a:solidFill>
-          <a:ln xmlns:a="http://schemas.openxmlformats.org/drawingml/2006/main" w="9525">
-            <a:solidFill>
-              <a:srgbClr val="D5E1F1"/>
-            </a:solidFill>
-            <a:prstDash val="solid"/>
-          </a:ln>
-        </p:spPr>
-      </p:sp>
-      <p:sp>
-        <p:nvSpPr>
-          <p:cNvPr id="5" name="phase-label-0">
-            <a:extLst xmlns:a="http://schemas.openxmlformats.org/drawingml/2006/main">
-              <a:ext uri="{FF2B5EF4-FFF2-40B4-BE49-F238E27FC236}">
-                <a16:creationId xmlns:a16="http://schemas.microsoft.com/office/drawing/2014/main" id="{9EAAFB8B-6F22-4467-8DD9-063F83326D18}"/>
-              </a:ext>
-            </a:extLst>
-          </p:cNvPr>
-          <p:cNvSpPr>
-            <a:spLocks xmlns:a="http://schemas.openxmlformats.org/drawingml/2006/main" noGrp="1"/>
-          </p:cNvSpPr>
-          <p:nvPr/>
-        </p:nvSpPr>
-        <p:spPr>
-          <a:xfrm xmlns:a="http://schemas.openxmlformats.org/drawingml/2006/main">
-            <a:off x="857250" y="2552700"/>
-            <a:ext cx="1790700" cy="704850"/>
-          </a:xfrm>
-          <a:prstGeom xmlns:a="http://schemas.openxmlformats.org/drawingml/2006/main" prst="rect">
-            <a:avLst/>
-          </a:prstGeom>
-          <a:noFill xmlns:a="http://schemas.openxmlformats.org/drawingml/2006/main"/>
-          <a:ln xmlns:a="http://schemas.openxmlformats.org/drawingml/2006/main" w="0">
-            <a:noFill/>
-            <a:prstDash val="solid"/>
-          </a:ln>
-        </p:spPr>
-        <p:txBody>
-          <a:bodyPr xmlns:a="http://schemas.openxmlformats.org/drawingml/2006/main"/>
-          <a:lstStyle xmlns:a="http://schemas.openxmlformats.org/drawingml/2006/main"/>
-          <a:p xmlns:a="http://schemas.openxmlformats.org/drawingml/2006/main">
-            <a:pPr algn="ctr">
-              <a:defRPr sz="1950" b="1">
-                <a:solidFill>
-                  <a:srgbClr val="15253E"/>
-                </a:solidFill>
-                <a:latin typeface="Malgun Gothic"/>
-                <a:ea typeface="Malgun Gothic"/>
-                <a:cs typeface="Malgun Gothic"/>
-              </a:defRPr>
-            </a:pPr>
-            <a:r>
-              <a:rPr sz="1950" b="1">
-                <a:solidFill>
-                  <a:srgbClr val="15253E"/>
-                </a:solidFill>
-                <a:latin typeface="Malgun Gothic"/>
-                <a:ea typeface="Malgun Gothic"/>
-                <a:cs typeface="Malgun Gothic"/>
-              </a:rPr>
-              <a:t>기준선</a:t>
-            </a:r>
-          </a:p>
-          <a:p xmlns:a="http://schemas.openxmlformats.org/drawingml/2006/main">
-            <a:pPr algn="ctr">
-              <a:defRPr sz="1950" b="1">
-                <a:solidFill>
-                  <a:srgbClr val="15253E"/>
-                </a:solidFill>
-                <a:latin typeface="Malgun Gothic"/>
-                <a:ea typeface="Malgun Gothic"/>
-                <a:cs typeface="Malgun Gothic"/>
-              </a:defRPr>
-            </a:pPr>
-            <a:r>
-              <a:rPr sz="1950" b="1">
-                <a:solidFill>
-                  <a:srgbClr val="15253E"/>
-                </a:solidFill>
-                <a:latin typeface="Malgun Gothic"/>
-                <a:ea typeface="Malgun Gothic"/>
-                <a:cs typeface="Malgun Gothic"/>
-              </a:rPr>
-              <a:t>Disabled</a:t>
-            </a:r>
-          </a:p>
-        </p:txBody>
-      </p:sp>
-      <p:sp>
-        <p:nvSpPr>
-          <p:cNvPr id="6" name="phase-http-0">
-            <a:extLst xmlns:a="http://schemas.openxmlformats.org/drawingml/2006/main">
-              <a:ext uri="{FF2B5EF4-FFF2-40B4-BE49-F238E27FC236}">
-                <a16:creationId xmlns:a16="http://schemas.microsoft.com/office/drawing/2014/main" id="{D9952694-8907-4F45-BE36-7465AC63FF12}"/>
-              </a:ext>
-            </a:extLst>
-          </p:cNvPr>
-          <p:cNvSpPr>
-            <a:spLocks xmlns:a="http://schemas.openxmlformats.org/drawingml/2006/main" noGrp="1"/>
-          </p:cNvSpPr>
-          <p:nvPr/>
-        </p:nvSpPr>
-        <p:spPr>
-          <a:xfrm xmlns:a="http://schemas.openxmlformats.org/drawingml/2006/main">
-            <a:off x="857250" y="3333750"/>
-            <a:ext cx="1790700" cy="285750"/>
-          </a:xfrm>
-          <a:prstGeom xmlns:a="http://schemas.openxmlformats.org/drawingml/2006/main" prst="rect">
-            <a:avLst/>
-          </a:prstGeom>
-          <a:noFill xmlns:a="http://schemas.openxmlformats.org/drawingml/2006/main"/>
-          <a:ln xmlns:a="http://schemas.openxmlformats.org/drawingml/2006/main" w="0">
-            <a:noFill/>
-            <a:prstDash val="solid"/>
-          </a:ln>
-        </p:spPr>
-        <p:txBody>
-          <a:bodyPr xmlns:a="http://schemas.openxmlformats.org/drawingml/2006/main"/>
-          <a:lstStyle xmlns:a="http://schemas.openxmlformats.org/drawingml/2006/main"/>
-          <a:p xmlns:a="http://schemas.openxmlformats.org/drawingml/2006/main">
-            <a:pPr algn="ctr">
-              <a:defRPr sz="1350" b="0">
-                <a:solidFill>
-                  <a:srgbClr val="52647D"/>
-                </a:solidFill>
-                <a:latin typeface="Malgun Gothic"/>
-                <a:ea typeface="Malgun Gothic"/>
-                <a:cs typeface="Malgun Gothic"/>
-              </a:defRPr>
-            </a:pPr>
-            <a:r>
-              <a:rPr sz="1350" b="0">
-                <a:solidFill>
-                  <a:srgbClr val="52647D"/>
-                </a:solidFill>
-                <a:latin typeface="Malgun Gothic"/>
-                <a:ea typeface="Malgun Gothic"/>
-                <a:cs typeface="Malgun Gothic"/>
-              </a:rPr>
-              <a:t>HTTP 200</a:t>
-            </a:r>
-          </a:p>
-        </p:txBody>
-      </p:sp>
-      <p:sp>
-        <p:nvSpPr>
-          <p:cNvPr id="7" name="arrow-1">
-            <a:extLst xmlns:a="http://schemas.openxmlformats.org/drawingml/2006/main">
-              <a:ext uri="{FF2B5EF4-FFF2-40B4-BE49-F238E27FC236}">
-                <a16:creationId xmlns:a16="http://schemas.microsoft.com/office/drawing/2014/main" id="{C4E39895-FE74-456B-A41B-FAC3A72797E9}"/>
-              </a:ext>
-            </a:extLst>
-          </p:cNvPr>
-          <p:cNvSpPr>
-            <a:spLocks xmlns:a="http://schemas.openxmlformats.org/drawingml/2006/main" noGrp="1"/>
-          </p:cNvSpPr>
-          <p:nvPr/>
-        </p:nvSpPr>
-        <p:spPr>
-          <a:xfrm xmlns:a="http://schemas.openxmlformats.org/drawingml/2006/main">
-            <a:off x="5686425" y="2809875"/>
-            <a:ext cx="552450" cy="495300"/>
-          </a:xfrm>
-          <a:prstGeom xmlns:a="http://schemas.openxmlformats.org/drawingml/2006/main" prst="rect">
-            <a:avLst/>
-          </a:prstGeom>
-          <a:noFill xmlns:a="http://schemas.openxmlformats.org/drawingml/2006/main"/>
-          <a:ln xmlns:a="http://schemas.openxmlformats.org/drawingml/2006/main" w="0">
-            <a:noFill/>
-            <a:prstDash val="solid"/>
-          </a:ln>
-        </p:spPr>
-        <p:txBody>
-          <a:bodyPr xmlns:a="http://schemas.openxmlformats.org/drawingml/2006/main"/>
-          <a:lstStyle xmlns:a="http://schemas.openxmlformats.org/drawingml/2006/main"/>
-          <a:p xmlns:a="http://schemas.openxmlformats.org/drawingml/2006/main">
-            <a:pPr algn="ctr">
-              <a:defRPr sz="2400" b="1">
-                <a:solidFill>
-                  <a:srgbClr val="52647D"/>
-                </a:solidFill>
-                <a:latin typeface="Malgun Gothic"/>
-                <a:ea typeface="Malgun Gothic"/>
-                <a:cs typeface="Malgun Gothic"/>
-              </a:defRPr>
-            </a:pPr>
-            <a:r>
-              <a:rPr sz="2400" b="1">
-                <a:solidFill>
-                  <a:srgbClr val="52647D"/>
-                </a:solidFill>
-                <a:latin typeface="Malgun Gothic"/>
-                <a:ea typeface="Malgun Gothic"/>
-                <a:cs typeface="Malgun Gothic"/>
-              </a:rPr>
-              <a:t>→</a:t>
-            </a:r>
-          </a:p>
-        </p:txBody>
-      </p:sp>
-      <p:sp>
-        <p:nvSpPr>
-          <p:cNvPr id="8" name="phase-1">
-            <a:extLst xmlns:a="http://schemas.openxmlformats.org/drawingml/2006/main">
-              <a:ext uri="{FF2B5EF4-FFF2-40B4-BE49-F238E27FC236}">
-                <a16:creationId xmlns:a16="http://schemas.microsoft.com/office/drawing/2014/main" id="{373E729E-666D-41A5-947A-82286B139F0A}"/>
-              </a:ext>
-            </a:extLst>
-          </p:cNvPr>
-          <p:cNvSpPr>
-            <a:spLocks xmlns:a="http://schemas.openxmlformats.org/drawingml/2006/main" noGrp="1"/>
-          </p:cNvSpPr>
-          <p:nvPr/>
-        </p:nvSpPr>
-        <p:spPr>
-          <a:xfrm xmlns:a="http://schemas.openxmlformats.org/drawingml/2006/main">
-            <a:off x="3476625" y="2247900"/>
-            <a:ext cx="2171700" cy="1562100"/>
+        </p:spPr>
+      </p:pic>
+      <p:sp>
+        <p:nvSpPr>
+          <p:cNvPr id="4" name="profile-result">
+            <a:extLst xmlns:a="http://schemas.openxmlformats.org/drawingml/2006/main">
+              <a:ext uri="{FF2B5EF4-FFF2-40B4-BE49-F238E27FC236}">
+                <a16:creationId xmlns:a16="http://schemas.microsoft.com/office/drawing/2014/main" id="{F2315AED-2B85-41E1-A5D8-A0DDEE6A5244}"/>
+              </a:ext>
+            </a:extLst>
+          </p:cNvPr>
+          <p:cNvSpPr>
+            <a:spLocks xmlns:a="http://schemas.openxmlformats.org/drawingml/2006/main" noGrp="1"/>
+          </p:cNvSpPr>
+          <p:nvPr/>
+        </p:nvSpPr>
+        <p:spPr>
+          <a:xfrm xmlns:a="http://schemas.openxmlformats.org/drawingml/2006/main">
+            <a:off x="8096250" y="1485900"/>
+            <a:ext cx="3333750" cy="1790700"/>
           </a:xfrm>
           <a:prstGeom xmlns:a="http://schemas.openxmlformats.org/drawingml/2006/main" prst="roundRect">
             <a:avLst>
-              <a:gd name="adj" fmla="val 4878"/>
+              <a:gd name="adj" fmla="val 4255"/>
             </a:avLst>
           </a:prstGeom>
           <a:solidFill xmlns:a="http://schemas.openxmlformats.org/drawingml/2006/main">
@@ -3922,22 +3755,22 @@
       </p:sp>
       <p:sp>
         <p:nvSpPr>
-          <p:cNvPr id="9" name="phase-label-1">
-            <a:extLst xmlns:a="http://schemas.openxmlformats.org/drawingml/2006/main">
-              <a:ext uri="{FF2B5EF4-FFF2-40B4-BE49-F238E27FC236}">
-                <a16:creationId xmlns:a16="http://schemas.microsoft.com/office/drawing/2014/main" id="{745C082C-C0C7-4F7D-8370-6BA73333F97A}"/>
-              </a:ext>
-            </a:extLst>
-          </p:cNvPr>
-          <p:cNvSpPr>
-            <a:spLocks xmlns:a="http://schemas.openxmlformats.org/drawingml/2006/main" noGrp="1"/>
-          </p:cNvSpPr>
-          <p:nvPr/>
-        </p:nvSpPr>
-        <p:spPr>
-          <a:xfrm xmlns:a="http://schemas.openxmlformats.org/drawingml/2006/main">
-            <a:off x="3667125" y="2552700"/>
-            <a:ext cx="1790700" cy="704850"/>
+          <p:cNvPr id="5" name="profile-title">
+            <a:extLst xmlns:a="http://schemas.openxmlformats.org/drawingml/2006/main">
+              <a:ext uri="{FF2B5EF4-FFF2-40B4-BE49-F238E27FC236}">
+                <a16:creationId xmlns:a16="http://schemas.microsoft.com/office/drawing/2014/main" id="{F20E61C3-61BF-46BF-8C05-62259B784B9C}"/>
+              </a:ext>
+            </a:extLst>
+          </p:cNvPr>
+          <p:cNvSpPr>
+            <a:spLocks xmlns:a="http://schemas.openxmlformats.org/drawingml/2006/main" noGrp="1"/>
+          </p:cNvSpPr>
+          <p:nvPr/>
+        </p:nvSpPr>
+        <p:spPr>
+          <a:xfrm xmlns:a="http://schemas.openxmlformats.org/drawingml/2006/main">
+            <a:off x="8382000" y="1752600"/>
+            <a:ext cx="2762250" cy="361950"/>
           </a:xfrm>
           <a:prstGeom xmlns:a="http://schemas.openxmlformats.org/drawingml/2006/main" prst="rect">
             <a:avLst/>
@@ -3953,7 +3786,7 @@
           <a:lstStyle xmlns:a="http://schemas.openxmlformats.org/drawingml/2006/main"/>
           <a:p xmlns:a="http://schemas.openxmlformats.org/drawingml/2006/main">
             <a:pPr algn="ctr">
-              <a:defRPr sz="1950" b="1">
+              <a:defRPr sz="2025" b="1">
                 <a:solidFill>
                   <a:srgbClr val="155EEF"/>
                 </a:solidFill>
@@ -3963,7 +3796,7 @@
               </a:defRPr>
             </a:pPr>
             <a:r>
-              <a:rPr sz="1950" b="1">
+              <a:rPr sz="2025" b="1">
                 <a:solidFill>
                   <a:srgbClr val="155EEF"/>
                 </a:solidFill>
@@ -3971,52 +3804,29 @@
                 <a:ea typeface="Malgun Gothic"/>
                 <a:cs typeface="Malgun Gothic"/>
               </a:rPr>
-              <a:t>활성화</a:t>
-            </a:r>
-          </a:p>
-          <a:p xmlns:a="http://schemas.openxmlformats.org/drawingml/2006/main">
-            <a:pPr algn="ctr">
-              <a:defRPr sz="1950" b="1">
-                <a:solidFill>
-                  <a:srgbClr val="155EEF"/>
-                </a:solidFill>
-                <a:latin typeface="Malgun Gothic"/>
-                <a:ea typeface="Malgun Gothic"/>
-                <a:cs typeface="Malgun Gothic"/>
-              </a:defRPr>
-            </a:pPr>
-            <a:r>
-              <a:rPr sz="1950" b="1">
-                <a:solidFill>
-                  <a:srgbClr val="155EEF"/>
-                </a:solidFill>
-                <a:latin typeface="Malgun Gothic"/>
-                <a:ea typeface="Malgun Gothic"/>
-                <a:cs typeface="Malgun Gothic"/>
-              </a:rPr>
-              <a:t>Enabled</a:t>
-            </a:r>
-          </a:p>
-        </p:txBody>
-      </p:sp>
-      <p:sp>
-        <p:nvSpPr>
-          <p:cNvPr id="10" name="phase-http-1">
-            <a:extLst xmlns:a="http://schemas.openxmlformats.org/drawingml/2006/main">
-              <a:ext uri="{FF2B5EF4-FFF2-40B4-BE49-F238E27FC236}">
-                <a16:creationId xmlns:a16="http://schemas.microsoft.com/office/drawing/2014/main" id="{3219249F-4ED9-4858-85B1-FF398D9BC627}"/>
-              </a:ext>
-            </a:extLst>
-          </p:cNvPr>
-          <p:cNvSpPr>
-            <a:spLocks xmlns:a="http://schemas.openxmlformats.org/drawingml/2006/main" noGrp="1"/>
-          </p:cNvSpPr>
-          <p:nvPr/>
-        </p:nvSpPr>
-        <p:spPr>
-          <a:xfrm xmlns:a="http://schemas.openxmlformats.org/drawingml/2006/main">
-            <a:off x="3667125" y="3333750"/>
-            <a:ext cx="1790700" cy="285750"/>
+              <a:t>프로필 화면</a:t>
+            </a:r>
+          </a:p>
+        </p:txBody>
+      </p:sp>
+      <p:sp>
+        <p:nvSpPr>
+          <p:cNvPr id="6" name="profile-copy">
+            <a:extLst xmlns:a="http://schemas.openxmlformats.org/drawingml/2006/main">
+              <a:ext uri="{FF2B5EF4-FFF2-40B4-BE49-F238E27FC236}">
+                <a16:creationId xmlns:a16="http://schemas.microsoft.com/office/drawing/2014/main" id="{5DB761A4-0783-41E0-9D9F-1C0C49EB7A01}"/>
+              </a:ext>
+            </a:extLst>
+          </p:cNvPr>
+          <p:cNvSpPr>
+            <a:spLocks xmlns:a="http://schemas.openxmlformats.org/drawingml/2006/main" noGrp="1"/>
+          </p:cNvSpPr>
+          <p:nvPr/>
+        </p:nvSpPr>
+        <p:spPr>
+          <a:xfrm xmlns:a="http://schemas.openxmlformats.org/drawingml/2006/main">
+            <a:off x="8382000" y="2247900"/>
+            <a:ext cx="2762250" cy="838200"/>
           </a:xfrm>
           <a:prstGeom xmlns:a="http://schemas.openxmlformats.org/drawingml/2006/main" prst="rect">
             <a:avLst/>
@@ -4032,47 +3842,128 @@
           <a:lstStyle xmlns:a="http://schemas.openxmlformats.org/drawingml/2006/main"/>
           <a:p xmlns:a="http://schemas.openxmlformats.org/drawingml/2006/main">
             <a:pPr algn="ctr">
-              <a:defRPr sz="1350" b="0">
-                <a:solidFill>
-                  <a:srgbClr val="52647D"/>
-                </a:solidFill>
-                <a:latin typeface="Malgun Gothic"/>
-                <a:ea typeface="Malgun Gothic"/>
-                <a:cs typeface="Malgun Gothic"/>
-              </a:defRPr>
-            </a:pPr>
-            <a:r>
-              <a:rPr sz="1350" b="0">
-                <a:solidFill>
-                  <a:srgbClr val="52647D"/>
-                </a:solidFill>
-                <a:latin typeface="Malgun Gothic"/>
-                <a:ea typeface="Malgun Gothic"/>
-                <a:cs typeface="Malgun Gothic"/>
-              </a:rPr>
-              <a:t>HTTP 200</a:t>
-            </a:r>
-          </a:p>
-        </p:txBody>
-      </p:sp>
-      <p:sp>
-        <p:nvSpPr>
-          <p:cNvPr id="11" name="arrow-2">
-            <a:extLst xmlns:a="http://schemas.openxmlformats.org/drawingml/2006/main">
-              <a:ext uri="{FF2B5EF4-FFF2-40B4-BE49-F238E27FC236}">
-                <a16:creationId xmlns:a16="http://schemas.microsoft.com/office/drawing/2014/main" id="{646EBE54-26BD-4D19-8420-87C714FA2FF3}"/>
-              </a:ext>
-            </a:extLst>
-          </p:cNvPr>
-          <p:cNvSpPr>
-            <a:spLocks xmlns:a="http://schemas.openxmlformats.org/drawingml/2006/main" noGrp="1"/>
-          </p:cNvSpPr>
-          <p:nvPr/>
-        </p:nvSpPr>
-        <p:spPr>
-          <a:xfrm xmlns:a="http://schemas.openxmlformats.org/drawingml/2006/main">
-            <a:off x="8496300" y="2809875"/>
-            <a:ext cx="552450" cy="495300"/>
+              <a:defRPr sz="1500" b="0">
+                <a:solidFill>
+                  <a:srgbClr val="15253E"/>
+                </a:solidFill>
+                <a:latin typeface="Malgun Gothic"/>
+                <a:ea typeface="Malgun Gothic"/>
+                <a:cs typeface="Malgun Gothic"/>
+              </a:defRPr>
+            </a:pPr>
+            <a:r>
+              <a:rPr sz="1500" b="0">
+                <a:solidFill>
+                  <a:srgbClr val="15253E"/>
+                </a:solidFill>
+                <a:latin typeface="Malgun Gothic"/>
+                <a:ea typeface="Malgun Gothic"/>
+                <a:cs typeface="Malgun Gothic"/>
+              </a:rPr>
+              <a:t>165px 블루 Hero</a:t>
+            </a:r>
+          </a:p>
+          <a:p xmlns:a="http://schemas.openxmlformats.org/drawingml/2006/main">
+            <a:pPr algn="ctr">
+              <a:defRPr sz="1500" b="0">
+                <a:solidFill>
+                  <a:srgbClr val="15253E"/>
+                </a:solidFill>
+                <a:latin typeface="Malgun Gothic"/>
+                <a:ea typeface="Malgun Gothic"/>
+                <a:cs typeface="Malgun Gothic"/>
+              </a:defRPr>
+            </a:pPr>
+            <a:r>
+              <a:rPr sz="1500" b="0">
+                <a:solidFill>
+                  <a:srgbClr val="15253E"/>
+                </a:solidFill>
+                <a:latin typeface="Malgun Gothic"/>
+                <a:ea typeface="Malgun Gothic"/>
+                <a:cs typeface="Malgun Gothic"/>
+              </a:rPr>
+              <a:t>96px 아바타</a:t>
+            </a:r>
+          </a:p>
+          <a:p xmlns:a="http://schemas.openxmlformats.org/drawingml/2006/main">
+            <a:pPr algn="ctr">
+              <a:defRPr sz="1500" b="0">
+                <a:solidFill>
+                  <a:srgbClr val="15253E"/>
+                </a:solidFill>
+                <a:latin typeface="Malgun Gothic"/>
+                <a:ea typeface="Malgun Gothic"/>
+                <a:cs typeface="Malgun Gothic"/>
+              </a:defRPr>
+            </a:pPr>
+            <a:r>
+              <a:rPr sz="1500" b="0">
+                <a:solidFill>
+                  <a:srgbClr val="15253E"/>
+                </a:solidFill>
+                <a:latin typeface="Malgun Gothic"/>
+                <a:ea typeface="Malgun Gothic"/>
+                <a:cs typeface="Malgun Gothic"/>
+              </a:rPr>
+              <a:t>240px 메뉴 · 780px 콘텐츠</a:t>
+            </a:r>
+          </a:p>
+        </p:txBody>
+      </p:sp>
+      <p:sp>
+        <p:nvSpPr>
+          <p:cNvPr id="7" name="navigation-result">
+            <a:extLst xmlns:a="http://schemas.openxmlformats.org/drawingml/2006/main">
+              <a:ext uri="{FF2B5EF4-FFF2-40B4-BE49-F238E27FC236}">
+                <a16:creationId xmlns:a16="http://schemas.microsoft.com/office/drawing/2014/main" id="{2257FE94-6B17-44D6-9670-E774B0CFBBC8}"/>
+              </a:ext>
+            </a:extLst>
+          </p:cNvPr>
+          <p:cNvSpPr>
+            <a:spLocks xmlns:a="http://schemas.openxmlformats.org/drawingml/2006/main" noGrp="1"/>
+          </p:cNvSpPr>
+          <p:nvPr/>
+        </p:nvSpPr>
+        <p:spPr>
+          <a:xfrm xmlns:a="http://schemas.openxmlformats.org/drawingml/2006/main">
+            <a:off x="8096250" y="3600450"/>
+            <a:ext cx="3333750" cy="1790700"/>
+          </a:xfrm>
+          <a:prstGeom xmlns:a="http://schemas.openxmlformats.org/drawingml/2006/main" prst="roundRect">
+            <a:avLst>
+              <a:gd name="adj" fmla="val 4255"/>
+            </a:avLst>
+          </a:prstGeom>
+          <a:solidFill xmlns:a="http://schemas.openxmlformats.org/drawingml/2006/main">
+            <a:srgbClr val="EAFAF2"/>
+          </a:solidFill>
+          <a:ln xmlns:a="http://schemas.openxmlformats.org/drawingml/2006/main" w="9525">
+            <a:solidFill>
+              <a:srgbClr val="86D2AA"/>
+            </a:solidFill>
+            <a:prstDash val="solid"/>
+          </a:ln>
+        </p:spPr>
+      </p:sp>
+      <p:sp>
+        <p:nvSpPr>
+          <p:cNvPr id="8" name="navigation-title">
+            <a:extLst xmlns:a="http://schemas.openxmlformats.org/drawingml/2006/main">
+              <a:ext uri="{FF2B5EF4-FFF2-40B4-BE49-F238E27FC236}">
+                <a16:creationId xmlns:a16="http://schemas.microsoft.com/office/drawing/2014/main" id="{46964870-783A-46F5-A4D8-7731A9E8F348}"/>
+              </a:ext>
+            </a:extLst>
+          </p:cNvPr>
+          <p:cNvSpPr>
+            <a:spLocks xmlns:a="http://schemas.openxmlformats.org/drawingml/2006/main" noGrp="1"/>
+          </p:cNvSpPr>
+          <p:nvPr/>
+        </p:nvSpPr>
+        <p:spPr>
+          <a:xfrm xmlns:a="http://schemas.openxmlformats.org/drawingml/2006/main">
+            <a:off x="8382000" y="3867150"/>
+            <a:ext cx="2762250" cy="361950"/>
           </a:xfrm>
           <a:prstGeom xmlns:a="http://schemas.openxmlformats.org/drawingml/2006/main" prst="rect">
             <a:avLst/>
@@ -4088,82 +3979,47 @@
           <a:lstStyle xmlns:a="http://schemas.openxmlformats.org/drawingml/2006/main"/>
           <a:p xmlns:a="http://schemas.openxmlformats.org/drawingml/2006/main">
             <a:pPr algn="ctr">
-              <a:defRPr sz="2400" b="1">
-                <a:solidFill>
-                  <a:srgbClr val="52647D"/>
-                </a:solidFill>
-                <a:latin typeface="Malgun Gothic"/>
-                <a:ea typeface="Malgun Gothic"/>
-                <a:cs typeface="Malgun Gothic"/>
-              </a:defRPr>
-            </a:pPr>
-            <a:r>
-              <a:rPr sz="2400" b="1">
-                <a:solidFill>
-                  <a:srgbClr val="52647D"/>
-                </a:solidFill>
-                <a:latin typeface="Malgun Gothic"/>
-                <a:ea typeface="Malgun Gothic"/>
-                <a:cs typeface="Malgun Gothic"/>
-              </a:rPr>
-              <a:t>→</a:t>
-            </a:r>
-          </a:p>
-        </p:txBody>
-      </p:sp>
-      <p:sp>
-        <p:nvSpPr>
-          <p:cNvPr id="12" name="phase-2">
-            <a:extLst xmlns:a="http://schemas.openxmlformats.org/drawingml/2006/main">
-              <a:ext uri="{FF2B5EF4-FFF2-40B4-BE49-F238E27FC236}">
-                <a16:creationId xmlns:a16="http://schemas.microsoft.com/office/drawing/2014/main" id="{9E8FAF97-DBEE-449F-AA78-F18759332B16}"/>
-              </a:ext>
-            </a:extLst>
-          </p:cNvPr>
-          <p:cNvSpPr>
-            <a:spLocks xmlns:a="http://schemas.openxmlformats.org/drawingml/2006/main" noGrp="1"/>
-          </p:cNvSpPr>
-          <p:nvPr/>
-        </p:nvSpPr>
-        <p:spPr>
-          <a:xfrm xmlns:a="http://schemas.openxmlformats.org/drawingml/2006/main">
-            <a:off x="6286500" y="2247900"/>
-            <a:ext cx="2171700" cy="1562100"/>
-          </a:xfrm>
-          <a:prstGeom xmlns:a="http://schemas.openxmlformats.org/drawingml/2006/main" prst="roundRect">
-            <a:avLst>
-              <a:gd name="adj" fmla="val 4878"/>
-            </a:avLst>
-          </a:prstGeom>
-          <a:solidFill xmlns:a="http://schemas.openxmlformats.org/drawingml/2006/main">
-            <a:srgbClr val="F3F7FC"/>
-          </a:solidFill>
-          <a:ln xmlns:a="http://schemas.openxmlformats.org/drawingml/2006/main" w="9525">
-            <a:solidFill>
-              <a:srgbClr val="D5E1F1"/>
-            </a:solidFill>
-            <a:prstDash val="solid"/>
-          </a:ln>
-        </p:spPr>
-      </p:sp>
-      <p:sp>
-        <p:nvSpPr>
-          <p:cNvPr id="13" name="phase-label-2">
-            <a:extLst xmlns:a="http://schemas.openxmlformats.org/drawingml/2006/main">
-              <a:ext uri="{FF2B5EF4-FFF2-40B4-BE49-F238E27FC236}">
-                <a16:creationId xmlns:a16="http://schemas.microsoft.com/office/drawing/2014/main" id="{27FD62BE-B6F0-4D10-B342-6EC748C683DE}"/>
-              </a:ext>
-            </a:extLst>
-          </p:cNvPr>
-          <p:cNvSpPr>
-            <a:spLocks xmlns:a="http://schemas.openxmlformats.org/drawingml/2006/main" noGrp="1"/>
-          </p:cNvSpPr>
-          <p:nvPr/>
-        </p:nvSpPr>
-        <p:spPr>
-          <a:xfrm xmlns:a="http://schemas.openxmlformats.org/drawingml/2006/main">
-            <a:off x="6477000" y="2552700"/>
-            <a:ext cx="1790700" cy="704850"/>
+              <a:defRPr sz="2025" b="1">
+                <a:solidFill>
+                  <a:srgbClr val="078248"/>
+                </a:solidFill>
+                <a:latin typeface="Malgun Gothic"/>
+                <a:ea typeface="Malgun Gothic"/>
+                <a:cs typeface="Malgun Gothic"/>
+              </a:defRPr>
+            </a:pPr>
+            <a:r>
+              <a:rPr sz="2025" b="1">
+                <a:solidFill>
+                  <a:srgbClr val="078248"/>
+                </a:solidFill>
+                <a:latin typeface="Malgun Gothic"/>
+                <a:ea typeface="Malgun Gothic"/>
+                <a:cs typeface="Malgun Gothic"/>
+              </a:rPr>
+              <a:t>홈 탐색</a:t>
+            </a:r>
+          </a:p>
+        </p:txBody>
+      </p:sp>
+      <p:sp>
+        <p:nvSpPr>
+          <p:cNvPr id="9" name="navigation-copy">
+            <a:extLst xmlns:a="http://schemas.openxmlformats.org/drawingml/2006/main">
+              <a:ext uri="{FF2B5EF4-FFF2-40B4-BE49-F238E27FC236}">
+                <a16:creationId xmlns:a16="http://schemas.microsoft.com/office/drawing/2014/main" id="{347909D2-6157-4120-AFAB-F89F76764F7E}"/>
+              </a:ext>
+            </a:extLst>
+          </p:cNvPr>
+          <p:cNvSpPr>
+            <a:spLocks xmlns:a="http://schemas.openxmlformats.org/drawingml/2006/main" noGrp="1"/>
+          </p:cNvSpPr>
+          <p:nvPr/>
+        </p:nvSpPr>
+        <p:spPr>
+          <a:xfrm xmlns:a="http://schemas.openxmlformats.org/drawingml/2006/main">
+            <a:off x="8382000" y="4362450"/>
+            <a:ext cx="2762250" cy="838200"/>
           </a:xfrm>
           <a:prstGeom xmlns:a="http://schemas.openxmlformats.org/drawingml/2006/main" prst="rect">
             <a:avLst/>
@@ -4179,7 +4035,7 @@
           <a:lstStyle xmlns:a="http://schemas.openxmlformats.org/drawingml/2006/main"/>
           <a:p xmlns:a="http://schemas.openxmlformats.org/drawingml/2006/main">
             <a:pPr algn="ctr">
-              <a:defRPr sz="1950" b="1">
+              <a:defRPr sz="1500" b="0">
                 <a:solidFill>
                   <a:srgbClr val="15253E"/>
                 </a:solidFill>
@@ -4189,7 +4045,7 @@
               </a:defRPr>
             </a:pPr>
             <a:r>
-              <a:rPr sz="1950" b="1">
+              <a:rPr sz="1500" b="0">
                 <a:solidFill>
                   <a:srgbClr val="15253E"/>
                 </a:solidFill>
@@ -4197,12 +4053,12 @@
                 <a:ea typeface="Malgun Gothic"/>
                 <a:cs typeface="Malgun Gothic"/>
               </a:rPr>
-              <a:t>롤백</a:t>
+              <a:t>Desktop 중복 버튼 제거</a:t>
             </a:r>
           </a:p>
           <a:p xmlns:a="http://schemas.openxmlformats.org/drawingml/2006/main">
             <a:pPr algn="ctr">
-              <a:defRPr sz="1950" b="1">
+              <a:defRPr sz="1500" b="0">
                 <a:solidFill>
                   <a:srgbClr val="15253E"/>
                 </a:solidFill>
@@ -4212,7 +4068,7 @@
               </a:defRPr>
             </a:pPr>
             <a:r>
-              <a:rPr sz="1950" b="1">
+              <a:rPr sz="1500" b="0">
                 <a:solidFill>
                   <a:srgbClr val="15253E"/>
                 </a:solidFill>
@@ -4220,29 +4076,52 @@
                 <a:ea typeface="Malgun Gothic"/>
                 <a:cs typeface="Malgun Gothic"/>
               </a:rPr>
-              <a:t>Disabled</a:t>
-            </a:r>
-          </a:p>
-        </p:txBody>
-      </p:sp>
-      <p:sp>
-        <p:nvSpPr>
-          <p:cNvPr id="14" name="phase-http-2">
-            <a:extLst xmlns:a="http://schemas.openxmlformats.org/drawingml/2006/main">
-              <a:ext uri="{FF2B5EF4-FFF2-40B4-BE49-F238E27FC236}">
-                <a16:creationId xmlns:a16="http://schemas.microsoft.com/office/drawing/2014/main" id="{AC6DF358-246A-48EE-9451-7B8A4377DD37}"/>
-              </a:ext>
-            </a:extLst>
-          </p:cNvPr>
-          <p:cNvSpPr>
-            <a:spLocks xmlns:a="http://schemas.openxmlformats.org/drawingml/2006/main" noGrp="1"/>
-          </p:cNvSpPr>
-          <p:nvPr/>
-        </p:nvSpPr>
-        <p:spPr>
-          <a:xfrm xmlns:a="http://schemas.openxmlformats.org/drawingml/2006/main">
-            <a:off x="6477000" y="3333750"/>
-            <a:ext cx="1790700" cy="285750"/>
+              <a:t>Mobile 40x46px 버튼</a:t>
+            </a:r>
+          </a:p>
+          <a:p xmlns:a="http://schemas.openxmlformats.org/drawingml/2006/main">
+            <a:pPr algn="ctr">
+              <a:defRPr sz="1500" b="0">
+                <a:solidFill>
+                  <a:srgbClr val="15253E"/>
+                </a:solidFill>
+                <a:latin typeface="Malgun Gothic"/>
+                <a:ea typeface="Malgun Gothic"/>
+                <a:cs typeface="Malgun Gothic"/>
+              </a:defRPr>
+            </a:pPr>
+            <a:r>
+              <a:rPr sz="1500" b="0">
+                <a:solidFill>
+                  <a:srgbClr val="15253E"/>
+                </a:solidFill>
+                <a:latin typeface="Malgun Gothic"/>
+                <a:ea typeface="Malgun Gothic"/>
+                <a:cs typeface="Malgun Gothic"/>
+              </a:rPr>
+              <a:t>270px 서랍 동작 유지</a:t>
+            </a:r>
+          </a:p>
+        </p:txBody>
+      </p:sp>
+      <p:sp>
+        <p:nvSpPr>
+          <p:cNvPr id="10" name="profile-locale">
+            <a:extLst xmlns:a="http://schemas.openxmlformats.org/drawingml/2006/main">
+              <a:ext uri="{FF2B5EF4-FFF2-40B4-BE49-F238E27FC236}">
+                <a16:creationId xmlns:a16="http://schemas.microsoft.com/office/drawing/2014/main" id="{61A9A6BD-8E2C-4894-93A0-DEE7AB1A8EB9}"/>
+              </a:ext>
+            </a:extLst>
+          </p:cNvPr>
+          <p:cNvSpPr>
+            <a:spLocks xmlns:a="http://schemas.openxmlformats.org/drawingml/2006/main" noGrp="1"/>
+          </p:cNvSpPr>
+          <p:nvPr/>
+        </p:nvSpPr>
+        <p:spPr>
+          <a:xfrm xmlns:a="http://schemas.openxmlformats.org/drawingml/2006/main">
+            <a:off x="476250" y="5962650"/>
+            <a:ext cx="10668000" cy="323850"/>
           </a:xfrm>
           <a:prstGeom xmlns:a="http://schemas.openxmlformats.org/drawingml/2006/main" prst="rect">
             <a:avLst/>
@@ -4258,98 +4137,7 @@
           <a:lstStyle xmlns:a="http://schemas.openxmlformats.org/drawingml/2006/main"/>
           <a:p xmlns:a="http://schemas.openxmlformats.org/drawingml/2006/main">
             <a:pPr algn="ctr">
-              <a:defRPr sz="1350" b="0">
-                <a:solidFill>
-                  <a:srgbClr val="52647D"/>
-                </a:solidFill>
-                <a:latin typeface="Malgun Gothic"/>
-                <a:ea typeface="Malgun Gothic"/>
-                <a:cs typeface="Malgun Gothic"/>
-              </a:defRPr>
-            </a:pPr>
-            <a:r>
-              <a:rPr sz="1350" b="0">
-                <a:solidFill>
-                  <a:srgbClr val="52647D"/>
-                </a:solidFill>
-                <a:latin typeface="Malgun Gothic"/>
-                <a:ea typeface="Malgun Gothic"/>
-                <a:cs typeface="Malgun Gothic"/>
-              </a:rPr>
-              <a:t>HTTP 200</a:t>
-            </a:r>
-          </a:p>
-        </p:txBody>
-      </p:sp>
-      <p:sp>
-        <p:nvSpPr>
-          <p:cNvPr id="15" name="phase-3">
-            <a:extLst xmlns:a="http://schemas.openxmlformats.org/drawingml/2006/main">
-              <a:ext uri="{FF2B5EF4-FFF2-40B4-BE49-F238E27FC236}">
-                <a16:creationId xmlns:a16="http://schemas.microsoft.com/office/drawing/2014/main" id="{D3D0E64C-2846-4666-96D9-3B5C015F856D}"/>
-              </a:ext>
-            </a:extLst>
-          </p:cNvPr>
-          <p:cNvSpPr>
-            <a:spLocks xmlns:a="http://schemas.openxmlformats.org/drawingml/2006/main" noGrp="1"/>
-          </p:cNvSpPr>
-          <p:nvPr/>
-        </p:nvSpPr>
-        <p:spPr>
-          <a:xfrm xmlns:a="http://schemas.openxmlformats.org/drawingml/2006/main">
-            <a:off x="9096375" y="2247900"/>
-            <a:ext cx="2171700" cy="1562100"/>
-          </a:xfrm>
-          <a:prstGeom xmlns:a="http://schemas.openxmlformats.org/drawingml/2006/main" prst="roundRect">
-            <a:avLst>
-              <a:gd name="adj" fmla="val 4878"/>
-            </a:avLst>
-          </a:prstGeom>
-          <a:solidFill xmlns:a="http://schemas.openxmlformats.org/drawingml/2006/main">
-            <a:srgbClr val="EAF2FF"/>
-          </a:solidFill>
-          <a:ln xmlns:a="http://schemas.openxmlformats.org/drawingml/2006/main" w="9525">
-            <a:solidFill>
-              <a:srgbClr val="155EEF"/>
-            </a:solidFill>
-            <a:prstDash val="solid"/>
-          </a:ln>
-        </p:spPr>
-      </p:sp>
-      <p:sp>
-        <p:nvSpPr>
-          <p:cNvPr id="16" name="phase-label-3">
-            <a:extLst xmlns:a="http://schemas.openxmlformats.org/drawingml/2006/main">
-              <a:ext uri="{FF2B5EF4-FFF2-40B4-BE49-F238E27FC236}">
-                <a16:creationId xmlns:a16="http://schemas.microsoft.com/office/drawing/2014/main" id="{6B9B20BC-189D-4D8C-A8B9-6FC353148CC9}"/>
-              </a:ext>
-            </a:extLst>
-          </p:cNvPr>
-          <p:cNvSpPr>
-            <a:spLocks xmlns:a="http://schemas.openxmlformats.org/drawingml/2006/main" noGrp="1"/>
-          </p:cNvSpPr>
-          <p:nvPr/>
-        </p:nvSpPr>
-        <p:spPr>
-          <a:xfrm xmlns:a="http://schemas.openxmlformats.org/drawingml/2006/main">
-            <a:off x="9286875" y="2552700"/>
-            <a:ext cx="1790700" cy="704850"/>
-          </a:xfrm>
-          <a:prstGeom xmlns:a="http://schemas.openxmlformats.org/drawingml/2006/main" prst="rect">
-            <a:avLst/>
-          </a:prstGeom>
-          <a:noFill xmlns:a="http://schemas.openxmlformats.org/drawingml/2006/main"/>
-          <a:ln xmlns:a="http://schemas.openxmlformats.org/drawingml/2006/main" w="0">
-            <a:noFill/>
-            <a:prstDash val="solid"/>
-          </a:ln>
-        </p:spPr>
-        <p:txBody>
-          <a:bodyPr xmlns:a="http://schemas.openxmlformats.org/drawingml/2006/main"/>
-          <a:lstStyle xmlns:a="http://schemas.openxmlformats.org/drawingml/2006/main"/>
-          <a:p xmlns:a="http://schemas.openxmlformats.org/drawingml/2006/main">
-            <a:pPr algn="ctr">
-              <a:defRPr sz="1950" b="1">
+              <a:defRPr sz="1500" b="1">
                 <a:solidFill>
                   <a:srgbClr val="155EEF"/>
                 </a:solidFill>
@@ -4359,7 +4147,7 @@
               </a:defRPr>
             </a:pPr>
             <a:r>
-              <a:rPr sz="1950" b="1">
+              <a:rPr sz="1500" b="1">
                 <a:solidFill>
                   <a:srgbClr val="155EEF"/>
                 </a:solidFill>
@@ -4367,198 +4155,7 @@
                 <a:ea typeface="Malgun Gothic"/>
                 <a:cs typeface="Malgun Gothic"/>
               </a:rPr>
-              <a:t>최종</a:t>
-            </a:r>
-          </a:p>
-          <a:p xmlns:a="http://schemas.openxmlformats.org/drawingml/2006/main">
-            <a:pPr algn="ctr">
-              <a:defRPr sz="1950" b="1">
-                <a:solidFill>
-                  <a:srgbClr val="155EEF"/>
-                </a:solidFill>
-                <a:latin typeface="Malgun Gothic"/>
-                <a:ea typeface="Malgun Gothic"/>
-                <a:cs typeface="Malgun Gothic"/>
-              </a:defRPr>
-            </a:pPr>
-            <a:r>
-              <a:rPr sz="1950" b="1">
-                <a:solidFill>
-                  <a:srgbClr val="155EEF"/>
-                </a:solidFill>
-                <a:latin typeface="Malgun Gothic"/>
-                <a:ea typeface="Malgun Gothic"/>
-                <a:cs typeface="Malgun Gothic"/>
-              </a:rPr>
-              <a:t>Enabled</a:t>
-            </a:r>
-          </a:p>
-        </p:txBody>
-      </p:sp>
-      <p:sp>
-        <p:nvSpPr>
-          <p:cNvPr id="17" name="phase-http-3">
-            <a:extLst xmlns:a="http://schemas.openxmlformats.org/drawingml/2006/main">
-              <a:ext uri="{FF2B5EF4-FFF2-40B4-BE49-F238E27FC236}">
-                <a16:creationId xmlns:a16="http://schemas.microsoft.com/office/drawing/2014/main" id="{7392F7B4-E294-4110-AA80-F329B078FECE}"/>
-              </a:ext>
-            </a:extLst>
-          </p:cNvPr>
-          <p:cNvSpPr>
-            <a:spLocks xmlns:a="http://schemas.openxmlformats.org/drawingml/2006/main" noGrp="1"/>
-          </p:cNvSpPr>
-          <p:nvPr/>
-        </p:nvSpPr>
-        <p:spPr>
-          <a:xfrm xmlns:a="http://schemas.openxmlformats.org/drawingml/2006/main">
-            <a:off x="9286875" y="3333750"/>
-            <a:ext cx="1790700" cy="285750"/>
-          </a:xfrm>
-          <a:prstGeom xmlns:a="http://schemas.openxmlformats.org/drawingml/2006/main" prst="rect">
-            <a:avLst/>
-          </a:prstGeom>
-          <a:noFill xmlns:a="http://schemas.openxmlformats.org/drawingml/2006/main"/>
-          <a:ln xmlns:a="http://schemas.openxmlformats.org/drawingml/2006/main" w="0">
-            <a:noFill/>
-            <a:prstDash val="solid"/>
-          </a:ln>
-        </p:spPr>
-        <p:txBody>
-          <a:bodyPr xmlns:a="http://schemas.openxmlformats.org/drawingml/2006/main"/>
-          <a:lstStyle xmlns:a="http://schemas.openxmlformats.org/drawingml/2006/main"/>
-          <a:p xmlns:a="http://schemas.openxmlformats.org/drawingml/2006/main">
-            <a:pPr algn="ctr">
-              <a:defRPr sz="1350" b="0">
-                <a:solidFill>
-                  <a:srgbClr val="52647D"/>
-                </a:solidFill>
-                <a:latin typeface="Malgun Gothic"/>
-                <a:ea typeface="Malgun Gothic"/>
-                <a:cs typeface="Malgun Gothic"/>
-              </a:defRPr>
-            </a:pPr>
-            <a:r>
-              <a:rPr sz="1350" b="0">
-                <a:solidFill>
-                  <a:srgbClr val="52647D"/>
-                </a:solidFill>
-                <a:latin typeface="Malgun Gothic"/>
-                <a:ea typeface="Malgun Gothic"/>
-                <a:cs typeface="Malgun Gothic"/>
-              </a:rPr>
-              <a:t>HTTP 200</a:t>
-            </a:r>
-          </a:p>
-        </p:txBody>
-      </p:sp>
-      <p:sp>
-        <p:nvSpPr>
-          <p:cNvPr id="18" name="integrity-count">
-            <a:extLst xmlns:a="http://schemas.openxmlformats.org/drawingml/2006/main">
-              <a:ext uri="{FF2B5EF4-FFF2-40B4-BE49-F238E27FC236}">
-                <a16:creationId xmlns:a16="http://schemas.microsoft.com/office/drawing/2014/main" id="{5EE17571-DA01-4AF6-BC41-05750E1EF947}"/>
-              </a:ext>
-            </a:extLst>
-          </p:cNvPr>
-          <p:cNvSpPr>
-            <a:spLocks xmlns:a="http://schemas.openxmlformats.org/drawingml/2006/main" noGrp="1"/>
-          </p:cNvSpPr>
-          <p:nvPr/>
-        </p:nvSpPr>
-        <p:spPr>
-          <a:xfrm xmlns:a="http://schemas.openxmlformats.org/drawingml/2006/main">
-            <a:off x="857250" y="4552950"/>
-            <a:ext cx="10477500" cy="552450"/>
-          </a:xfrm>
-          <a:prstGeom xmlns:a="http://schemas.openxmlformats.org/drawingml/2006/main" prst="rect">
-            <a:avLst/>
-          </a:prstGeom>
-          <a:noFill xmlns:a="http://schemas.openxmlformats.org/drawingml/2006/main"/>
-          <a:ln xmlns:a="http://schemas.openxmlformats.org/drawingml/2006/main" w="0">
-            <a:noFill/>
-            <a:prstDash val="solid"/>
-          </a:ln>
-        </p:spPr>
-        <p:txBody>
-          <a:bodyPr xmlns:a="http://schemas.openxmlformats.org/drawingml/2006/main"/>
-          <a:lstStyle xmlns:a="http://schemas.openxmlformats.org/drawingml/2006/main"/>
-          <a:p xmlns:a="http://schemas.openxmlformats.org/drawingml/2006/main">
-            <a:pPr algn="ctr">
-              <a:defRPr sz="2400" b="1">
-                <a:solidFill>
-                  <a:srgbClr val="15253E"/>
-                </a:solidFill>
-                <a:latin typeface="Malgun Gothic"/>
-                <a:ea typeface="Malgun Gothic"/>
-                <a:cs typeface="Malgun Gothic"/>
-              </a:defRPr>
-            </a:pPr>
-            <a:r>
-              <a:rPr sz="2400" b="1">
-                <a:solidFill>
-                  <a:srgbClr val="15253E"/>
-                </a:solidFill>
-                <a:latin typeface="Malgun Gothic"/>
-                <a:ea typeface="Malgun Gothic"/>
-                <a:cs typeface="Malgun Gothic"/>
-              </a:rPr>
-              <a:t>39 users · 117 discussions · 305 posts</a:t>
-            </a:r>
-          </a:p>
-        </p:txBody>
-      </p:sp>
-      <p:sp>
-        <p:nvSpPr>
-          <p:cNvPr id="19" name="integrity-hash">
-            <a:extLst xmlns:a="http://schemas.openxmlformats.org/drawingml/2006/main">
-              <a:ext uri="{FF2B5EF4-FFF2-40B4-BE49-F238E27FC236}">
-                <a16:creationId xmlns:a16="http://schemas.microsoft.com/office/drawing/2014/main" id="{50DFC8A0-8BC3-476A-90A1-3562E5E4D870}"/>
-              </a:ext>
-            </a:extLst>
-          </p:cNvPr>
-          <p:cNvSpPr>
-            <a:spLocks xmlns:a="http://schemas.openxmlformats.org/drawingml/2006/main" noGrp="1"/>
-          </p:cNvSpPr>
-          <p:nvPr/>
-        </p:nvSpPr>
-        <p:spPr>
-          <a:xfrm xmlns:a="http://schemas.openxmlformats.org/drawingml/2006/main">
-            <a:off x="857250" y="5238750"/>
-            <a:ext cx="10477500" cy="457200"/>
-          </a:xfrm>
-          <a:prstGeom xmlns:a="http://schemas.openxmlformats.org/drawingml/2006/main" prst="rect">
-            <a:avLst/>
-          </a:prstGeom>
-          <a:noFill xmlns:a="http://schemas.openxmlformats.org/drawingml/2006/main"/>
-          <a:ln xmlns:a="http://schemas.openxmlformats.org/drawingml/2006/main" w="0">
-            <a:noFill/>
-            <a:prstDash val="solid"/>
-          </a:ln>
-        </p:spPr>
-        <p:txBody>
-          <a:bodyPr xmlns:a="http://schemas.openxmlformats.org/drawingml/2006/main"/>
-          <a:lstStyle xmlns:a="http://schemas.openxmlformats.org/drawingml/2006/main"/>
-          <a:p xmlns:a="http://schemas.openxmlformats.org/drawingml/2006/main">
-            <a:pPr algn="ctr">
-              <a:defRPr sz="1800" b="0">
-                <a:solidFill>
-                  <a:srgbClr val="078248"/>
-                </a:solidFill>
-                <a:latin typeface="Malgun Gothic"/>
-                <a:ea typeface="Malgun Gothic"/>
-                <a:cs typeface="Malgun Gothic"/>
-              </a:defRPr>
-            </a:pPr>
-            <a:r>
-              <a:rPr sz="1800" b="0">
-                <a:solidFill>
-                  <a:srgbClr val="078248"/>
-                </a:solidFill>
-                <a:latin typeface="Malgun Gothic"/>
-                <a:ea typeface="Malgun Gothic"/>
-                <a:cs typeface="Malgun Gothic"/>
-              </a:rPr>
-              <a:t>콘텐츠 SHA-256 동일 · 첨부 SHA-256 동일 · 정적 계약 8/8</a:t>
+              <a:t>좋아요 · 내 미디어 · 보안 · 해결 답변</a:t>
             </a:r>
           </a:p>
         </p:txBody>
@@ -4566,7 +4163,7 @@
     </p:spTree>
     <p:extLst>
       <p:ext uri="{BB962C8B-B14F-4D97-AF65-F5344CB8AC3E}">
-        <p14:creationId xmlns:p14="http://schemas.microsoft.com/office/powerpoint/2010/main" val="125908174"/>
+        <p14:creationId xmlns:p14="http://schemas.microsoft.com/office/powerpoint/2010/main" val="1966110520"/>
       </p:ext>
     </p:extLst>
   </p:cSld>
@@ -4594,10 +4191,10 @@
       </p:grpSpPr>
       <p:sp>
         <p:nvSpPr>
-          <p:cNvPr id="16" name="title-6">
-            <a:extLst xmlns:a="http://schemas.openxmlformats.org/drawingml/2006/main">
-              <a:ext uri="{FF2B5EF4-FFF2-40B4-BE49-F238E27FC236}">
-                <a16:creationId xmlns:a16="http://schemas.microsoft.com/office/drawing/2014/main" id="{60A90985-E927-49E8-9269-CB7D931F54D6}"/>
+          <p:cNvPr id="20" name="title-6">
+            <a:extLst xmlns:a="http://schemas.openxmlformats.org/drawingml/2006/main">
+              <a:ext uri="{FF2B5EF4-FFF2-40B4-BE49-F238E27FC236}">
+                <a16:creationId xmlns:a16="http://schemas.microsoft.com/office/drawing/2014/main" id="{A1988E7D-4FE9-4900-8EFF-3040E5D0CEDA}"/>
               </a:ext>
             </a:extLst>
           </p:cNvPr>
@@ -4643,7 +4240,7 @@
                 <a:ea typeface="Malgun Gothic"/>
                 <a:cs typeface="Malgun Gothic"/>
               </a:rPr>
-              <a:t>Flarum Core를 건드리지 않아 롤백은 확장 하나로 끝납니다</a:t>
+              <a:t>활성화와 롤백에도 콘텐츠는 그대로였습니다</a:t>
             </a:r>
           </a:p>
         </p:txBody>
@@ -4653,7 +4250,7 @@
           <p:cNvPr id="2" name="page-6">
             <a:extLst xmlns:a="http://schemas.openxmlformats.org/drawingml/2006/main">
               <a:ext uri="{FF2B5EF4-FFF2-40B4-BE49-F238E27FC236}">
-                <a16:creationId xmlns:a16="http://schemas.microsoft.com/office/drawing/2014/main" id="{AF53184C-5AAB-4E1A-B3C2-F99FFD5AAD9F}"/>
+                <a16:creationId xmlns:a16="http://schemas.microsoft.com/office/drawing/2014/main" id="{BE3DDE7B-FA52-43C9-AAE2-8928904D0FEC}"/>
               </a:ext>
             </a:extLst>
           </p:cNvPr>
@@ -4706,22 +4303,22 @@
       </p:sp>
       <p:sp>
         <p:nvSpPr>
-          <p:cNvPr id="3" name="flow-arrow-1">
-            <a:extLst xmlns:a="http://schemas.openxmlformats.org/drawingml/2006/main">
-              <a:ext uri="{FF2B5EF4-FFF2-40B4-BE49-F238E27FC236}">
-                <a16:creationId xmlns:a16="http://schemas.microsoft.com/office/drawing/2014/main" id="{5E1AFF46-1BE9-4803-ABF1-3521D77BDDB0}"/>
-              </a:ext>
-            </a:extLst>
-          </p:cNvPr>
-          <p:cNvSpPr>
-            <a:spLocks xmlns:a="http://schemas.openxmlformats.org/drawingml/2006/main" noGrp="1"/>
-          </p:cNvSpPr>
-          <p:nvPr/>
-        </p:nvSpPr>
-        <p:spPr>
-          <a:xfrm xmlns:a="http://schemas.openxmlformats.org/drawingml/2006/main">
-            <a:off x="3848100" y="2724150"/>
-            <a:ext cx="762000" cy="476250"/>
+          <p:cNvPr id="3" name="arrow-0">
+            <a:extLst xmlns:a="http://schemas.openxmlformats.org/drawingml/2006/main">
+              <a:ext uri="{FF2B5EF4-FFF2-40B4-BE49-F238E27FC236}">
+                <a16:creationId xmlns:a16="http://schemas.microsoft.com/office/drawing/2014/main" id="{7B834A7A-209D-4491-899C-10F6F9E68B2E}"/>
+              </a:ext>
+            </a:extLst>
+          </p:cNvPr>
+          <p:cNvSpPr>
+            <a:spLocks xmlns:a="http://schemas.openxmlformats.org/drawingml/2006/main" noGrp="1"/>
+          </p:cNvSpPr>
+          <p:nvPr/>
+        </p:nvSpPr>
+        <p:spPr>
+          <a:xfrm xmlns:a="http://schemas.openxmlformats.org/drawingml/2006/main">
+            <a:off x="2876550" y="2809875"/>
+            <a:ext cx="552450" cy="495300"/>
           </a:xfrm>
           <a:prstGeom xmlns:a="http://schemas.openxmlformats.org/drawingml/2006/main" prst="rect">
             <a:avLst/>
@@ -4737,7 +4334,7 @@
           <a:lstStyle xmlns:a="http://schemas.openxmlformats.org/drawingml/2006/main"/>
           <a:p xmlns:a="http://schemas.openxmlformats.org/drawingml/2006/main">
             <a:pPr algn="ctr">
-              <a:defRPr sz="2700" b="1">
+              <a:defRPr sz="2400" b="1">
                 <a:solidFill>
                   <a:srgbClr val="52647D"/>
                 </a:solidFill>
@@ -4747,7 +4344,7 @@
               </a:defRPr>
             </a:pPr>
             <a:r>
-              <a:rPr sz="2700" b="1">
+              <a:rPr sz="2400" b="1">
                 <a:solidFill>
                   <a:srgbClr val="52647D"/>
                 </a:solidFill>
@@ -4762,82 +4359,26 @@
       </p:sp>
       <p:sp>
         <p:nvSpPr>
-          <p:cNvPr id="4" name="flow-arrow-2">
-            <a:extLst xmlns:a="http://schemas.openxmlformats.org/drawingml/2006/main">
-              <a:ext uri="{FF2B5EF4-FFF2-40B4-BE49-F238E27FC236}">
-                <a16:creationId xmlns:a16="http://schemas.microsoft.com/office/drawing/2014/main" id="{0BF67D34-9ECA-41D7-894E-319E1CE51AFF}"/>
-              </a:ext>
-            </a:extLst>
-          </p:cNvPr>
-          <p:cNvSpPr>
-            <a:spLocks xmlns:a="http://schemas.openxmlformats.org/drawingml/2006/main" noGrp="1"/>
-          </p:cNvSpPr>
-          <p:nvPr/>
-        </p:nvSpPr>
-        <p:spPr>
-          <a:xfrm xmlns:a="http://schemas.openxmlformats.org/drawingml/2006/main">
-            <a:off x="7581900" y="2724150"/>
-            <a:ext cx="762000" cy="476250"/>
-          </a:xfrm>
-          <a:prstGeom xmlns:a="http://schemas.openxmlformats.org/drawingml/2006/main" prst="rect">
-            <a:avLst/>
-          </a:prstGeom>
-          <a:noFill xmlns:a="http://schemas.openxmlformats.org/drawingml/2006/main"/>
-          <a:ln xmlns:a="http://schemas.openxmlformats.org/drawingml/2006/main" w="0">
-            <a:noFill/>
-            <a:prstDash val="solid"/>
-          </a:ln>
-        </p:spPr>
-        <p:txBody>
-          <a:bodyPr xmlns:a="http://schemas.openxmlformats.org/drawingml/2006/main"/>
-          <a:lstStyle xmlns:a="http://schemas.openxmlformats.org/drawingml/2006/main"/>
-          <a:p xmlns:a="http://schemas.openxmlformats.org/drawingml/2006/main">
-            <a:pPr algn="ctr">
-              <a:defRPr sz="2700" b="1">
-                <a:solidFill>
-                  <a:srgbClr val="52647D"/>
-                </a:solidFill>
-                <a:latin typeface="Malgun Gothic"/>
-                <a:ea typeface="Malgun Gothic"/>
-                <a:cs typeface="Malgun Gothic"/>
-              </a:defRPr>
-            </a:pPr>
-            <a:r>
-              <a:rPr sz="2700" b="1">
-                <a:solidFill>
-                  <a:srgbClr val="52647D"/>
-                </a:solidFill>
-                <a:latin typeface="Malgun Gothic"/>
-                <a:ea typeface="Malgun Gothic"/>
-                <a:cs typeface="Malgun Gothic"/>
-              </a:rPr>
-              <a:t>→</a:t>
-            </a:r>
-          </a:p>
-        </p:txBody>
-      </p:sp>
-      <p:sp>
-        <p:nvSpPr>
-          <p:cNvPr id="5" name="flarum-core">
-            <a:extLst xmlns:a="http://schemas.openxmlformats.org/drawingml/2006/main">
-              <a:ext uri="{FF2B5EF4-FFF2-40B4-BE49-F238E27FC236}">
-                <a16:creationId xmlns:a16="http://schemas.microsoft.com/office/drawing/2014/main" id="{5545B7A1-5A0E-480A-8730-AA358C219344}"/>
-              </a:ext>
-            </a:extLst>
-          </p:cNvPr>
-          <p:cNvSpPr>
-            <a:spLocks xmlns:a="http://schemas.openxmlformats.org/drawingml/2006/main" noGrp="1"/>
-          </p:cNvSpPr>
-          <p:nvPr/>
-        </p:nvSpPr>
-        <p:spPr>
-          <a:xfrm xmlns:a="http://schemas.openxmlformats.org/drawingml/2006/main">
-            <a:off x="666750" y="2076450"/>
-            <a:ext cx="3143250" cy="1809750"/>
+          <p:cNvPr id="4" name="phase-0">
+            <a:extLst xmlns:a="http://schemas.openxmlformats.org/drawingml/2006/main">
+              <a:ext uri="{FF2B5EF4-FFF2-40B4-BE49-F238E27FC236}">
+                <a16:creationId xmlns:a16="http://schemas.microsoft.com/office/drawing/2014/main" id="{739F78CD-D657-4918-A9FA-4B164DC81EF7}"/>
+              </a:ext>
+            </a:extLst>
+          </p:cNvPr>
+          <p:cNvSpPr>
+            <a:spLocks xmlns:a="http://schemas.openxmlformats.org/drawingml/2006/main" noGrp="1"/>
+          </p:cNvSpPr>
+          <p:nvPr/>
+        </p:nvSpPr>
+        <p:spPr>
+          <a:xfrm xmlns:a="http://schemas.openxmlformats.org/drawingml/2006/main">
+            <a:off x="666750" y="2247900"/>
+            <a:ext cx="2171700" cy="1562100"/>
           </a:xfrm>
           <a:prstGeom xmlns:a="http://schemas.openxmlformats.org/drawingml/2006/main" prst="roundRect">
             <a:avLst>
-              <a:gd name="adj" fmla="val 4211"/>
+              <a:gd name="adj" fmla="val 4878"/>
             </a:avLst>
           </a:prstGeom>
           <a:solidFill xmlns:a="http://schemas.openxmlformats.org/drawingml/2006/main">
@@ -4853,26 +4394,217 @@
       </p:sp>
       <p:sp>
         <p:nvSpPr>
-          <p:cNvPr id="6" name="theme-extension">
-            <a:extLst xmlns:a="http://schemas.openxmlformats.org/drawingml/2006/main">
-              <a:ext uri="{FF2B5EF4-FFF2-40B4-BE49-F238E27FC236}">
-                <a16:creationId xmlns:a16="http://schemas.microsoft.com/office/drawing/2014/main" id="{C37B8D77-FD23-4B55-8A0A-213D1949D27C}"/>
-              </a:ext>
-            </a:extLst>
-          </p:cNvPr>
-          <p:cNvSpPr>
-            <a:spLocks xmlns:a="http://schemas.openxmlformats.org/drawingml/2006/main" noGrp="1"/>
-          </p:cNvSpPr>
-          <p:nvPr/>
-        </p:nvSpPr>
-        <p:spPr>
-          <a:xfrm xmlns:a="http://schemas.openxmlformats.org/drawingml/2006/main">
-            <a:off x="4572000" y="2076450"/>
-            <a:ext cx="2971800" cy="1809750"/>
+          <p:cNvPr id="5" name="phase-label-0">
+            <a:extLst xmlns:a="http://schemas.openxmlformats.org/drawingml/2006/main">
+              <a:ext uri="{FF2B5EF4-FFF2-40B4-BE49-F238E27FC236}">
+                <a16:creationId xmlns:a16="http://schemas.microsoft.com/office/drawing/2014/main" id="{63AECE67-3CC4-4DA1-AF5E-C93DC0D47574}"/>
+              </a:ext>
+            </a:extLst>
+          </p:cNvPr>
+          <p:cNvSpPr>
+            <a:spLocks xmlns:a="http://schemas.openxmlformats.org/drawingml/2006/main" noGrp="1"/>
+          </p:cNvSpPr>
+          <p:nvPr/>
+        </p:nvSpPr>
+        <p:spPr>
+          <a:xfrm xmlns:a="http://schemas.openxmlformats.org/drawingml/2006/main">
+            <a:off x="857250" y="2552700"/>
+            <a:ext cx="1790700" cy="704850"/>
+          </a:xfrm>
+          <a:prstGeom xmlns:a="http://schemas.openxmlformats.org/drawingml/2006/main" prst="rect">
+            <a:avLst/>
+          </a:prstGeom>
+          <a:noFill xmlns:a="http://schemas.openxmlformats.org/drawingml/2006/main"/>
+          <a:ln xmlns:a="http://schemas.openxmlformats.org/drawingml/2006/main" w="0">
+            <a:noFill/>
+            <a:prstDash val="solid"/>
+          </a:ln>
+        </p:spPr>
+        <p:txBody>
+          <a:bodyPr xmlns:a="http://schemas.openxmlformats.org/drawingml/2006/main"/>
+          <a:lstStyle xmlns:a="http://schemas.openxmlformats.org/drawingml/2006/main"/>
+          <a:p xmlns:a="http://schemas.openxmlformats.org/drawingml/2006/main">
+            <a:pPr algn="ctr">
+              <a:defRPr sz="1950" b="1">
+                <a:solidFill>
+                  <a:srgbClr val="15253E"/>
+                </a:solidFill>
+                <a:latin typeface="Malgun Gothic"/>
+                <a:ea typeface="Malgun Gothic"/>
+                <a:cs typeface="Malgun Gothic"/>
+              </a:defRPr>
+            </a:pPr>
+            <a:r>
+              <a:rPr sz="1950" b="1">
+                <a:solidFill>
+                  <a:srgbClr val="15253E"/>
+                </a:solidFill>
+                <a:latin typeface="Malgun Gothic"/>
+                <a:ea typeface="Malgun Gothic"/>
+                <a:cs typeface="Malgun Gothic"/>
+              </a:rPr>
+              <a:t>기준선</a:t>
+            </a:r>
+          </a:p>
+          <a:p xmlns:a="http://schemas.openxmlformats.org/drawingml/2006/main">
+            <a:pPr algn="ctr">
+              <a:defRPr sz="1950" b="1">
+                <a:solidFill>
+                  <a:srgbClr val="15253E"/>
+                </a:solidFill>
+                <a:latin typeface="Malgun Gothic"/>
+                <a:ea typeface="Malgun Gothic"/>
+                <a:cs typeface="Malgun Gothic"/>
+              </a:defRPr>
+            </a:pPr>
+            <a:r>
+              <a:rPr sz="1950" b="1">
+                <a:solidFill>
+                  <a:srgbClr val="15253E"/>
+                </a:solidFill>
+                <a:latin typeface="Malgun Gothic"/>
+                <a:ea typeface="Malgun Gothic"/>
+                <a:cs typeface="Malgun Gothic"/>
+              </a:rPr>
+              <a:t>Disabled</a:t>
+            </a:r>
+          </a:p>
+        </p:txBody>
+      </p:sp>
+      <p:sp>
+        <p:nvSpPr>
+          <p:cNvPr id="6" name="phase-http-0">
+            <a:extLst xmlns:a="http://schemas.openxmlformats.org/drawingml/2006/main">
+              <a:ext uri="{FF2B5EF4-FFF2-40B4-BE49-F238E27FC236}">
+                <a16:creationId xmlns:a16="http://schemas.microsoft.com/office/drawing/2014/main" id="{3411BCDF-FFDB-4D8F-ABD4-9DF41B03F7D6}"/>
+              </a:ext>
+            </a:extLst>
+          </p:cNvPr>
+          <p:cNvSpPr>
+            <a:spLocks xmlns:a="http://schemas.openxmlformats.org/drawingml/2006/main" noGrp="1"/>
+          </p:cNvSpPr>
+          <p:nvPr/>
+        </p:nvSpPr>
+        <p:spPr>
+          <a:xfrm xmlns:a="http://schemas.openxmlformats.org/drawingml/2006/main">
+            <a:off x="857250" y="3333750"/>
+            <a:ext cx="1790700" cy="285750"/>
+          </a:xfrm>
+          <a:prstGeom xmlns:a="http://schemas.openxmlformats.org/drawingml/2006/main" prst="rect">
+            <a:avLst/>
+          </a:prstGeom>
+          <a:noFill xmlns:a="http://schemas.openxmlformats.org/drawingml/2006/main"/>
+          <a:ln xmlns:a="http://schemas.openxmlformats.org/drawingml/2006/main" w="0">
+            <a:noFill/>
+            <a:prstDash val="solid"/>
+          </a:ln>
+        </p:spPr>
+        <p:txBody>
+          <a:bodyPr xmlns:a="http://schemas.openxmlformats.org/drawingml/2006/main"/>
+          <a:lstStyle xmlns:a="http://schemas.openxmlformats.org/drawingml/2006/main"/>
+          <a:p xmlns:a="http://schemas.openxmlformats.org/drawingml/2006/main">
+            <a:pPr algn="ctr">
+              <a:defRPr sz="1350" b="0">
+                <a:solidFill>
+                  <a:srgbClr val="52647D"/>
+                </a:solidFill>
+                <a:latin typeface="Malgun Gothic"/>
+                <a:ea typeface="Malgun Gothic"/>
+                <a:cs typeface="Malgun Gothic"/>
+              </a:defRPr>
+            </a:pPr>
+            <a:r>
+              <a:rPr sz="1350" b="0">
+                <a:solidFill>
+                  <a:srgbClr val="52647D"/>
+                </a:solidFill>
+                <a:latin typeface="Malgun Gothic"/>
+                <a:ea typeface="Malgun Gothic"/>
+                <a:cs typeface="Malgun Gothic"/>
+              </a:rPr>
+              <a:t>HTTP 200</a:t>
+            </a:r>
+          </a:p>
+        </p:txBody>
+      </p:sp>
+      <p:sp>
+        <p:nvSpPr>
+          <p:cNvPr id="7" name="arrow-1">
+            <a:extLst xmlns:a="http://schemas.openxmlformats.org/drawingml/2006/main">
+              <a:ext uri="{FF2B5EF4-FFF2-40B4-BE49-F238E27FC236}">
+                <a16:creationId xmlns:a16="http://schemas.microsoft.com/office/drawing/2014/main" id="{5C52BED4-5B33-4F1F-8B4C-1420869A3755}"/>
+              </a:ext>
+            </a:extLst>
+          </p:cNvPr>
+          <p:cNvSpPr>
+            <a:spLocks xmlns:a="http://schemas.openxmlformats.org/drawingml/2006/main" noGrp="1"/>
+          </p:cNvSpPr>
+          <p:nvPr/>
+        </p:nvSpPr>
+        <p:spPr>
+          <a:xfrm xmlns:a="http://schemas.openxmlformats.org/drawingml/2006/main">
+            <a:off x="5686425" y="2809875"/>
+            <a:ext cx="552450" cy="495300"/>
+          </a:xfrm>
+          <a:prstGeom xmlns:a="http://schemas.openxmlformats.org/drawingml/2006/main" prst="rect">
+            <a:avLst/>
+          </a:prstGeom>
+          <a:noFill xmlns:a="http://schemas.openxmlformats.org/drawingml/2006/main"/>
+          <a:ln xmlns:a="http://schemas.openxmlformats.org/drawingml/2006/main" w="0">
+            <a:noFill/>
+            <a:prstDash val="solid"/>
+          </a:ln>
+        </p:spPr>
+        <p:txBody>
+          <a:bodyPr xmlns:a="http://schemas.openxmlformats.org/drawingml/2006/main"/>
+          <a:lstStyle xmlns:a="http://schemas.openxmlformats.org/drawingml/2006/main"/>
+          <a:p xmlns:a="http://schemas.openxmlformats.org/drawingml/2006/main">
+            <a:pPr algn="ctr">
+              <a:defRPr sz="2400" b="1">
+                <a:solidFill>
+                  <a:srgbClr val="52647D"/>
+                </a:solidFill>
+                <a:latin typeface="Malgun Gothic"/>
+                <a:ea typeface="Malgun Gothic"/>
+                <a:cs typeface="Malgun Gothic"/>
+              </a:defRPr>
+            </a:pPr>
+            <a:r>
+              <a:rPr sz="2400" b="1">
+                <a:solidFill>
+                  <a:srgbClr val="52647D"/>
+                </a:solidFill>
+                <a:latin typeface="Malgun Gothic"/>
+                <a:ea typeface="Malgun Gothic"/>
+                <a:cs typeface="Malgun Gothic"/>
+              </a:rPr>
+              <a:t>→</a:t>
+            </a:r>
+          </a:p>
+        </p:txBody>
+      </p:sp>
+      <p:sp>
+        <p:nvSpPr>
+          <p:cNvPr id="8" name="phase-1">
+            <a:extLst xmlns:a="http://schemas.openxmlformats.org/drawingml/2006/main">
+              <a:ext uri="{FF2B5EF4-FFF2-40B4-BE49-F238E27FC236}">
+                <a16:creationId xmlns:a16="http://schemas.microsoft.com/office/drawing/2014/main" id="{CCC5DC3E-EAAF-47A7-BE20-81A03A0A0384}"/>
+              </a:ext>
+            </a:extLst>
+          </p:cNvPr>
+          <p:cNvSpPr>
+            <a:spLocks xmlns:a="http://schemas.openxmlformats.org/drawingml/2006/main" noGrp="1"/>
+          </p:cNvSpPr>
+          <p:nvPr/>
+        </p:nvSpPr>
+        <p:spPr>
+          <a:xfrm xmlns:a="http://schemas.openxmlformats.org/drawingml/2006/main">
+            <a:off x="3476625" y="2247900"/>
+            <a:ext cx="2171700" cy="1562100"/>
           </a:xfrm>
           <a:prstGeom xmlns:a="http://schemas.openxmlformats.org/drawingml/2006/main" prst="roundRect">
             <a:avLst>
-              <a:gd name="adj" fmla="val 4211"/>
+              <a:gd name="adj" fmla="val 4878"/>
             </a:avLst>
           </a:prstGeom>
           <a:solidFill xmlns:a="http://schemas.openxmlformats.org/drawingml/2006/main">
@@ -4888,34 +4620,225 @@
       </p:sp>
       <p:sp>
         <p:nvSpPr>
-          <p:cNvPr id="7" name="community-ui">
-            <a:extLst xmlns:a="http://schemas.openxmlformats.org/drawingml/2006/main">
-              <a:ext uri="{FF2B5EF4-FFF2-40B4-BE49-F238E27FC236}">
-                <a16:creationId xmlns:a16="http://schemas.microsoft.com/office/drawing/2014/main" id="{064B7CE1-9CE8-4BF3-9528-3AC899765839}"/>
-              </a:ext>
-            </a:extLst>
-          </p:cNvPr>
-          <p:cNvSpPr>
-            <a:spLocks xmlns:a="http://schemas.openxmlformats.org/drawingml/2006/main" noGrp="1"/>
-          </p:cNvSpPr>
-          <p:nvPr/>
-        </p:nvSpPr>
-        <p:spPr>
-          <a:xfrm xmlns:a="http://schemas.openxmlformats.org/drawingml/2006/main">
-            <a:off x="8305800" y="2076450"/>
-            <a:ext cx="3143250" cy="1809750"/>
+          <p:cNvPr id="9" name="phase-label-1">
+            <a:extLst xmlns:a="http://schemas.openxmlformats.org/drawingml/2006/main">
+              <a:ext uri="{FF2B5EF4-FFF2-40B4-BE49-F238E27FC236}">
+                <a16:creationId xmlns:a16="http://schemas.microsoft.com/office/drawing/2014/main" id="{703B871E-E432-4AAB-8D50-6BCBAF062755}"/>
+              </a:ext>
+            </a:extLst>
+          </p:cNvPr>
+          <p:cNvSpPr>
+            <a:spLocks xmlns:a="http://schemas.openxmlformats.org/drawingml/2006/main" noGrp="1"/>
+          </p:cNvSpPr>
+          <p:nvPr/>
+        </p:nvSpPr>
+        <p:spPr>
+          <a:xfrm xmlns:a="http://schemas.openxmlformats.org/drawingml/2006/main">
+            <a:off x="3667125" y="2552700"/>
+            <a:ext cx="1790700" cy="704850"/>
+          </a:xfrm>
+          <a:prstGeom xmlns:a="http://schemas.openxmlformats.org/drawingml/2006/main" prst="rect">
+            <a:avLst/>
+          </a:prstGeom>
+          <a:noFill xmlns:a="http://schemas.openxmlformats.org/drawingml/2006/main"/>
+          <a:ln xmlns:a="http://schemas.openxmlformats.org/drawingml/2006/main" w="0">
+            <a:noFill/>
+            <a:prstDash val="solid"/>
+          </a:ln>
+        </p:spPr>
+        <p:txBody>
+          <a:bodyPr xmlns:a="http://schemas.openxmlformats.org/drawingml/2006/main"/>
+          <a:lstStyle xmlns:a="http://schemas.openxmlformats.org/drawingml/2006/main"/>
+          <a:p xmlns:a="http://schemas.openxmlformats.org/drawingml/2006/main">
+            <a:pPr algn="ctr">
+              <a:defRPr sz="1950" b="1">
+                <a:solidFill>
+                  <a:srgbClr val="155EEF"/>
+                </a:solidFill>
+                <a:latin typeface="Malgun Gothic"/>
+                <a:ea typeface="Malgun Gothic"/>
+                <a:cs typeface="Malgun Gothic"/>
+              </a:defRPr>
+            </a:pPr>
+            <a:r>
+              <a:rPr sz="1950" b="1">
+                <a:solidFill>
+                  <a:srgbClr val="155EEF"/>
+                </a:solidFill>
+                <a:latin typeface="Malgun Gothic"/>
+                <a:ea typeface="Malgun Gothic"/>
+                <a:cs typeface="Malgun Gothic"/>
+              </a:rPr>
+              <a:t>활성화</a:t>
+            </a:r>
+          </a:p>
+          <a:p xmlns:a="http://schemas.openxmlformats.org/drawingml/2006/main">
+            <a:pPr algn="ctr">
+              <a:defRPr sz="1950" b="1">
+                <a:solidFill>
+                  <a:srgbClr val="155EEF"/>
+                </a:solidFill>
+                <a:latin typeface="Malgun Gothic"/>
+                <a:ea typeface="Malgun Gothic"/>
+                <a:cs typeface="Malgun Gothic"/>
+              </a:defRPr>
+            </a:pPr>
+            <a:r>
+              <a:rPr sz="1950" b="1">
+                <a:solidFill>
+                  <a:srgbClr val="155EEF"/>
+                </a:solidFill>
+                <a:latin typeface="Malgun Gothic"/>
+                <a:ea typeface="Malgun Gothic"/>
+                <a:cs typeface="Malgun Gothic"/>
+              </a:rPr>
+              <a:t>Enabled</a:t>
+            </a:r>
+          </a:p>
+        </p:txBody>
+      </p:sp>
+      <p:sp>
+        <p:nvSpPr>
+          <p:cNvPr id="10" name="phase-http-1">
+            <a:extLst xmlns:a="http://schemas.openxmlformats.org/drawingml/2006/main">
+              <a:ext uri="{FF2B5EF4-FFF2-40B4-BE49-F238E27FC236}">
+                <a16:creationId xmlns:a16="http://schemas.microsoft.com/office/drawing/2014/main" id="{AE3959C6-3A52-4DCF-821D-D827B0664350}"/>
+              </a:ext>
+            </a:extLst>
+          </p:cNvPr>
+          <p:cNvSpPr>
+            <a:spLocks xmlns:a="http://schemas.openxmlformats.org/drawingml/2006/main" noGrp="1"/>
+          </p:cNvSpPr>
+          <p:nvPr/>
+        </p:nvSpPr>
+        <p:spPr>
+          <a:xfrm xmlns:a="http://schemas.openxmlformats.org/drawingml/2006/main">
+            <a:off x="3667125" y="3333750"/>
+            <a:ext cx="1790700" cy="285750"/>
+          </a:xfrm>
+          <a:prstGeom xmlns:a="http://schemas.openxmlformats.org/drawingml/2006/main" prst="rect">
+            <a:avLst/>
+          </a:prstGeom>
+          <a:noFill xmlns:a="http://schemas.openxmlformats.org/drawingml/2006/main"/>
+          <a:ln xmlns:a="http://schemas.openxmlformats.org/drawingml/2006/main" w="0">
+            <a:noFill/>
+            <a:prstDash val="solid"/>
+          </a:ln>
+        </p:spPr>
+        <p:txBody>
+          <a:bodyPr xmlns:a="http://schemas.openxmlformats.org/drawingml/2006/main"/>
+          <a:lstStyle xmlns:a="http://schemas.openxmlformats.org/drawingml/2006/main"/>
+          <a:p xmlns:a="http://schemas.openxmlformats.org/drawingml/2006/main">
+            <a:pPr algn="ctr">
+              <a:defRPr sz="1350" b="0">
+                <a:solidFill>
+                  <a:srgbClr val="52647D"/>
+                </a:solidFill>
+                <a:latin typeface="Malgun Gothic"/>
+                <a:ea typeface="Malgun Gothic"/>
+                <a:cs typeface="Malgun Gothic"/>
+              </a:defRPr>
+            </a:pPr>
+            <a:r>
+              <a:rPr sz="1350" b="0">
+                <a:solidFill>
+                  <a:srgbClr val="52647D"/>
+                </a:solidFill>
+                <a:latin typeface="Malgun Gothic"/>
+                <a:ea typeface="Malgun Gothic"/>
+                <a:cs typeface="Malgun Gothic"/>
+              </a:rPr>
+              <a:t>HTTP 200</a:t>
+            </a:r>
+          </a:p>
+        </p:txBody>
+      </p:sp>
+      <p:sp>
+        <p:nvSpPr>
+          <p:cNvPr id="11" name="arrow-2">
+            <a:extLst xmlns:a="http://schemas.openxmlformats.org/drawingml/2006/main">
+              <a:ext uri="{FF2B5EF4-FFF2-40B4-BE49-F238E27FC236}">
+                <a16:creationId xmlns:a16="http://schemas.microsoft.com/office/drawing/2014/main" id="{EBB4EFA8-8837-4DC7-B490-F0FDBE819CC2}"/>
+              </a:ext>
+            </a:extLst>
+          </p:cNvPr>
+          <p:cNvSpPr>
+            <a:spLocks xmlns:a="http://schemas.openxmlformats.org/drawingml/2006/main" noGrp="1"/>
+          </p:cNvSpPr>
+          <p:nvPr/>
+        </p:nvSpPr>
+        <p:spPr>
+          <a:xfrm xmlns:a="http://schemas.openxmlformats.org/drawingml/2006/main">
+            <a:off x="8496300" y="2809875"/>
+            <a:ext cx="552450" cy="495300"/>
+          </a:xfrm>
+          <a:prstGeom xmlns:a="http://schemas.openxmlformats.org/drawingml/2006/main" prst="rect">
+            <a:avLst/>
+          </a:prstGeom>
+          <a:noFill xmlns:a="http://schemas.openxmlformats.org/drawingml/2006/main"/>
+          <a:ln xmlns:a="http://schemas.openxmlformats.org/drawingml/2006/main" w="0">
+            <a:noFill/>
+            <a:prstDash val="solid"/>
+          </a:ln>
+        </p:spPr>
+        <p:txBody>
+          <a:bodyPr xmlns:a="http://schemas.openxmlformats.org/drawingml/2006/main"/>
+          <a:lstStyle xmlns:a="http://schemas.openxmlformats.org/drawingml/2006/main"/>
+          <a:p xmlns:a="http://schemas.openxmlformats.org/drawingml/2006/main">
+            <a:pPr algn="ctr">
+              <a:defRPr sz="2400" b="1">
+                <a:solidFill>
+                  <a:srgbClr val="52647D"/>
+                </a:solidFill>
+                <a:latin typeface="Malgun Gothic"/>
+                <a:ea typeface="Malgun Gothic"/>
+                <a:cs typeface="Malgun Gothic"/>
+              </a:defRPr>
+            </a:pPr>
+            <a:r>
+              <a:rPr sz="2400" b="1">
+                <a:solidFill>
+                  <a:srgbClr val="52647D"/>
+                </a:solidFill>
+                <a:latin typeface="Malgun Gothic"/>
+                <a:ea typeface="Malgun Gothic"/>
+                <a:cs typeface="Malgun Gothic"/>
+              </a:rPr>
+              <a:t>→</a:t>
+            </a:r>
+          </a:p>
+        </p:txBody>
+      </p:sp>
+      <p:sp>
+        <p:nvSpPr>
+          <p:cNvPr id="12" name="phase-2">
+            <a:extLst xmlns:a="http://schemas.openxmlformats.org/drawingml/2006/main">
+              <a:ext uri="{FF2B5EF4-FFF2-40B4-BE49-F238E27FC236}">
+                <a16:creationId xmlns:a16="http://schemas.microsoft.com/office/drawing/2014/main" id="{30B14935-D9F6-49E4-9FFA-35C561CA1787}"/>
+              </a:ext>
+            </a:extLst>
+          </p:cNvPr>
+          <p:cNvSpPr>
+            <a:spLocks xmlns:a="http://schemas.openxmlformats.org/drawingml/2006/main" noGrp="1"/>
+          </p:cNvSpPr>
+          <p:nvPr/>
+        </p:nvSpPr>
+        <p:spPr>
+          <a:xfrm xmlns:a="http://schemas.openxmlformats.org/drawingml/2006/main">
+            <a:off x="6286500" y="2247900"/>
+            <a:ext cx="2171700" cy="1562100"/>
           </a:xfrm>
           <a:prstGeom xmlns:a="http://schemas.openxmlformats.org/drawingml/2006/main" prst="roundRect">
             <a:avLst>
-              <a:gd name="adj" fmla="val 4211"/>
+              <a:gd name="adj" fmla="val 4878"/>
             </a:avLst>
           </a:prstGeom>
           <a:solidFill xmlns:a="http://schemas.openxmlformats.org/drawingml/2006/main">
-            <a:srgbClr val="EAFAF2"/>
+            <a:srgbClr val="F3F7FC"/>
           </a:solidFill>
           <a:ln xmlns:a="http://schemas.openxmlformats.org/drawingml/2006/main" w="9525">
             <a:solidFill>
-              <a:srgbClr val="86D2AA"/>
+              <a:srgbClr val="D5E1F1"/>
             </a:solidFill>
             <a:prstDash val="solid"/>
           </a:ln>
@@ -4923,22 +4846,22 @@
       </p:sp>
       <p:sp>
         <p:nvSpPr>
-          <p:cNvPr id="8" name="flarum-core-title">
-            <a:extLst xmlns:a="http://schemas.openxmlformats.org/drawingml/2006/main">
-              <a:ext uri="{FF2B5EF4-FFF2-40B4-BE49-F238E27FC236}">
-                <a16:creationId xmlns:a16="http://schemas.microsoft.com/office/drawing/2014/main" id="{83D799F2-ADEA-4897-B423-06235AC08FB6}"/>
-              </a:ext>
-            </a:extLst>
-          </p:cNvPr>
-          <p:cNvSpPr>
-            <a:spLocks xmlns:a="http://schemas.openxmlformats.org/drawingml/2006/main" noGrp="1"/>
-          </p:cNvSpPr>
-          <p:nvPr/>
-        </p:nvSpPr>
-        <p:spPr>
-          <a:xfrm xmlns:a="http://schemas.openxmlformats.org/drawingml/2006/main">
-            <a:off x="933450" y="2533650"/>
-            <a:ext cx="2609850" cy="457200"/>
+          <p:cNvPr id="13" name="phase-label-2">
+            <a:extLst xmlns:a="http://schemas.openxmlformats.org/drawingml/2006/main">
+              <a:ext uri="{FF2B5EF4-FFF2-40B4-BE49-F238E27FC236}">
+                <a16:creationId xmlns:a16="http://schemas.microsoft.com/office/drawing/2014/main" id="{F84B927D-9C32-4480-B1CA-A2BEFFF6BD2C}"/>
+              </a:ext>
+            </a:extLst>
+          </p:cNvPr>
+          <p:cNvSpPr>
+            <a:spLocks xmlns:a="http://schemas.openxmlformats.org/drawingml/2006/main" noGrp="1"/>
+          </p:cNvSpPr>
+          <p:nvPr/>
+        </p:nvSpPr>
+        <p:spPr>
+          <a:xfrm xmlns:a="http://schemas.openxmlformats.org/drawingml/2006/main">
+            <a:off x="6477000" y="2552700"/>
+            <a:ext cx="1790700" cy="704850"/>
           </a:xfrm>
           <a:prstGeom xmlns:a="http://schemas.openxmlformats.org/drawingml/2006/main" prst="rect">
             <a:avLst/>
@@ -4954,7 +4877,7 @@
           <a:lstStyle xmlns:a="http://schemas.openxmlformats.org/drawingml/2006/main"/>
           <a:p xmlns:a="http://schemas.openxmlformats.org/drawingml/2006/main">
             <a:pPr algn="ctr">
-              <a:defRPr sz="2250" b="1">
+              <a:defRPr sz="1950" b="1">
                 <a:solidFill>
                   <a:srgbClr val="15253E"/>
                 </a:solidFill>
@@ -4964,7 +4887,7 @@
               </a:defRPr>
             </a:pPr>
             <a:r>
-              <a:rPr sz="2250" b="1">
+              <a:rPr sz="1950" b="1">
                 <a:solidFill>
                   <a:srgbClr val="15253E"/>
                 </a:solidFill>
@@ -4972,29 +4895,52 @@
                 <a:ea typeface="Malgun Gothic"/>
                 <a:cs typeface="Malgun Gothic"/>
               </a:rPr>
-              <a:t>Flarum 1.8.18</a:t>
-            </a:r>
-          </a:p>
-        </p:txBody>
-      </p:sp>
-      <p:sp>
-        <p:nvSpPr>
-          <p:cNvPr id="9" name="flarum-core-copy">
-            <a:extLst xmlns:a="http://schemas.openxmlformats.org/drawingml/2006/main">
-              <a:ext uri="{FF2B5EF4-FFF2-40B4-BE49-F238E27FC236}">
-                <a16:creationId xmlns:a16="http://schemas.microsoft.com/office/drawing/2014/main" id="{8C76BEB7-1C90-410F-94B1-C518E2F53CDD}"/>
-              </a:ext>
-            </a:extLst>
-          </p:cNvPr>
-          <p:cNvSpPr>
-            <a:spLocks xmlns:a="http://schemas.openxmlformats.org/drawingml/2006/main" noGrp="1"/>
-          </p:cNvSpPr>
-          <p:nvPr/>
-        </p:nvSpPr>
-        <p:spPr>
-          <a:xfrm xmlns:a="http://schemas.openxmlformats.org/drawingml/2006/main">
-            <a:off x="933450" y="3105150"/>
-            <a:ext cx="2609850" cy="323850"/>
+              <a:t>롤백</a:t>
+            </a:r>
+          </a:p>
+          <a:p xmlns:a="http://schemas.openxmlformats.org/drawingml/2006/main">
+            <a:pPr algn="ctr">
+              <a:defRPr sz="1950" b="1">
+                <a:solidFill>
+                  <a:srgbClr val="15253E"/>
+                </a:solidFill>
+                <a:latin typeface="Malgun Gothic"/>
+                <a:ea typeface="Malgun Gothic"/>
+                <a:cs typeface="Malgun Gothic"/>
+              </a:defRPr>
+            </a:pPr>
+            <a:r>
+              <a:rPr sz="1950" b="1">
+                <a:solidFill>
+                  <a:srgbClr val="15253E"/>
+                </a:solidFill>
+                <a:latin typeface="Malgun Gothic"/>
+                <a:ea typeface="Malgun Gothic"/>
+                <a:cs typeface="Malgun Gothic"/>
+              </a:rPr>
+              <a:t>Disabled</a:t>
+            </a:r>
+          </a:p>
+        </p:txBody>
+      </p:sp>
+      <p:sp>
+        <p:nvSpPr>
+          <p:cNvPr id="14" name="phase-http-2">
+            <a:extLst xmlns:a="http://schemas.openxmlformats.org/drawingml/2006/main">
+              <a:ext uri="{FF2B5EF4-FFF2-40B4-BE49-F238E27FC236}">
+                <a16:creationId xmlns:a16="http://schemas.microsoft.com/office/drawing/2014/main" id="{03579DE4-BE81-4564-8731-4EC8DE467A0F}"/>
+              </a:ext>
+            </a:extLst>
+          </p:cNvPr>
+          <p:cNvSpPr>
+            <a:spLocks xmlns:a="http://schemas.openxmlformats.org/drawingml/2006/main" noGrp="1"/>
+          </p:cNvSpPr>
+          <p:nvPr/>
+        </p:nvSpPr>
+        <p:spPr>
+          <a:xfrm xmlns:a="http://schemas.openxmlformats.org/drawingml/2006/main">
+            <a:off x="6477000" y="3333750"/>
+            <a:ext cx="1790700" cy="285750"/>
           </a:xfrm>
           <a:prstGeom xmlns:a="http://schemas.openxmlformats.org/drawingml/2006/main" prst="rect">
             <a:avLst/>
@@ -5010,7 +4956,7 @@
           <a:lstStyle xmlns:a="http://schemas.openxmlformats.org/drawingml/2006/main"/>
           <a:p xmlns:a="http://schemas.openxmlformats.org/drawingml/2006/main">
             <a:pPr algn="ctr">
-              <a:defRPr sz="1500" b="0">
+              <a:defRPr sz="1350" b="0">
                 <a:solidFill>
                   <a:srgbClr val="52647D"/>
                 </a:solidFill>
@@ -5020,7 +4966,7 @@
               </a:defRPr>
             </a:pPr>
             <a:r>
-              <a:rPr sz="1500" b="0">
+              <a:rPr sz="1350" b="0">
                 <a:solidFill>
                   <a:srgbClr val="52647D"/>
                 </a:solidFill>
@@ -5028,29 +4974,64 @@
                 <a:ea typeface="Malgun Gothic"/>
                 <a:cs typeface="Malgun Gothic"/>
               </a:rPr>
-              <a:t>라우팅 · 권한 · 검색 · 작성</a:t>
-            </a:r>
-          </a:p>
-        </p:txBody>
-      </p:sp>
-      <p:sp>
-        <p:nvSpPr>
-          <p:cNvPr id="10" name="theme-title">
-            <a:extLst xmlns:a="http://schemas.openxmlformats.org/drawingml/2006/main">
-              <a:ext uri="{FF2B5EF4-FFF2-40B4-BE49-F238E27FC236}">
-                <a16:creationId xmlns:a16="http://schemas.microsoft.com/office/drawing/2014/main" id="{CC2B24DF-4893-4894-8224-83E4812EFCC6}"/>
-              </a:ext>
-            </a:extLst>
-          </p:cNvPr>
-          <p:cNvSpPr>
-            <a:spLocks xmlns:a="http://schemas.openxmlformats.org/drawingml/2006/main" noGrp="1"/>
-          </p:cNvSpPr>
-          <p:nvPr/>
-        </p:nvSpPr>
-        <p:spPr>
-          <a:xfrm xmlns:a="http://schemas.openxmlformats.org/drawingml/2006/main">
-            <a:off x="4819650" y="2362200"/>
-            <a:ext cx="2476500" cy="742950"/>
+              <a:t>HTTP 200</a:t>
+            </a:r>
+          </a:p>
+        </p:txBody>
+      </p:sp>
+      <p:sp>
+        <p:nvSpPr>
+          <p:cNvPr id="15" name="phase-3">
+            <a:extLst xmlns:a="http://schemas.openxmlformats.org/drawingml/2006/main">
+              <a:ext uri="{FF2B5EF4-FFF2-40B4-BE49-F238E27FC236}">
+                <a16:creationId xmlns:a16="http://schemas.microsoft.com/office/drawing/2014/main" id="{B1D3BD30-83E1-498D-B0C3-D6998089D16E}"/>
+              </a:ext>
+            </a:extLst>
+          </p:cNvPr>
+          <p:cNvSpPr>
+            <a:spLocks xmlns:a="http://schemas.openxmlformats.org/drawingml/2006/main" noGrp="1"/>
+          </p:cNvSpPr>
+          <p:nvPr/>
+        </p:nvSpPr>
+        <p:spPr>
+          <a:xfrm xmlns:a="http://schemas.openxmlformats.org/drawingml/2006/main">
+            <a:off x="9096375" y="2247900"/>
+            <a:ext cx="2171700" cy="1562100"/>
+          </a:xfrm>
+          <a:prstGeom xmlns:a="http://schemas.openxmlformats.org/drawingml/2006/main" prst="roundRect">
+            <a:avLst>
+              <a:gd name="adj" fmla="val 4878"/>
+            </a:avLst>
+          </a:prstGeom>
+          <a:solidFill xmlns:a="http://schemas.openxmlformats.org/drawingml/2006/main">
+            <a:srgbClr val="EAF2FF"/>
+          </a:solidFill>
+          <a:ln xmlns:a="http://schemas.openxmlformats.org/drawingml/2006/main" w="9525">
+            <a:solidFill>
+              <a:srgbClr val="155EEF"/>
+            </a:solidFill>
+            <a:prstDash val="solid"/>
+          </a:ln>
+        </p:spPr>
+      </p:sp>
+      <p:sp>
+        <p:nvSpPr>
+          <p:cNvPr id="16" name="phase-label-3">
+            <a:extLst xmlns:a="http://schemas.openxmlformats.org/drawingml/2006/main">
+              <a:ext uri="{FF2B5EF4-FFF2-40B4-BE49-F238E27FC236}">
+                <a16:creationId xmlns:a16="http://schemas.microsoft.com/office/drawing/2014/main" id="{2E4B63B9-05DD-4586-92E2-218CE46B8CF6}"/>
+              </a:ext>
+            </a:extLst>
+          </p:cNvPr>
+          <p:cNvSpPr>
+            <a:spLocks xmlns:a="http://schemas.openxmlformats.org/drawingml/2006/main" noGrp="1"/>
+          </p:cNvSpPr>
+          <p:nvPr/>
+        </p:nvSpPr>
+        <p:spPr>
+          <a:xfrm xmlns:a="http://schemas.openxmlformats.org/drawingml/2006/main">
+            <a:off x="9286875" y="2552700"/>
+            <a:ext cx="1790700" cy="704850"/>
           </a:xfrm>
           <a:prstGeom xmlns:a="http://schemas.openxmlformats.org/drawingml/2006/main" prst="rect">
             <a:avLst/>
@@ -5066,7 +5047,7 @@
           <a:lstStyle xmlns:a="http://schemas.openxmlformats.org/drawingml/2006/main"/>
           <a:p xmlns:a="http://schemas.openxmlformats.org/drawingml/2006/main">
             <a:pPr algn="ctr">
-              <a:defRPr sz="2175" b="1">
+              <a:defRPr sz="1950" b="1">
                 <a:solidFill>
                   <a:srgbClr val="155EEF"/>
                 </a:solidFill>
@@ -5076,7 +5057,7 @@
               </a:defRPr>
             </a:pPr>
             <a:r>
-              <a:rPr sz="2175" b="1">
+              <a:rPr sz="1950" b="1">
                 <a:solidFill>
                   <a:srgbClr val="155EEF"/>
                 </a:solidFill>
@@ -5084,12 +5065,12 @@
                 <a:ea typeface="Malgun Gothic"/>
                 <a:cs typeface="Malgun Gothic"/>
               </a:rPr>
-              <a:t>ABLESTACK</a:t>
+              <a:t>최종</a:t>
             </a:r>
           </a:p>
           <a:p xmlns:a="http://schemas.openxmlformats.org/drawingml/2006/main">
             <a:pPr algn="ctr">
-              <a:defRPr sz="2175" b="1">
+              <a:defRPr sz="1950" b="1">
                 <a:solidFill>
                   <a:srgbClr val="155EEF"/>
                 </a:solidFill>
@@ -5099,7 +5080,7 @@
               </a:defRPr>
             </a:pPr>
             <a:r>
-              <a:rPr sz="2175" b="1">
+              <a:rPr sz="1950" b="1">
                 <a:solidFill>
                   <a:srgbClr val="155EEF"/>
                 </a:solidFill>
@@ -5107,29 +5088,29 @@
                 <a:ea typeface="Malgun Gothic"/>
                 <a:cs typeface="Malgun Gothic"/>
               </a:rPr>
-              <a:t>Theme</a:t>
-            </a:r>
-          </a:p>
-        </p:txBody>
-      </p:sp>
-      <p:sp>
-        <p:nvSpPr>
-          <p:cNvPr id="11" name="theme-copy">
-            <a:extLst xmlns:a="http://schemas.openxmlformats.org/drawingml/2006/main">
-              <a:ext uri="{FF2B5EF4-FFF2-40B4-BE49-F238E27FC236}">
-                <a16:creationId xmlns:a16="http://schemas.microsoft.com/office/drawing/2014/main" id="{BC5FDA8E-6FF9-42E8-87F3-6B6357599800}"/>
-              </a:ext>
-            </a:extLst>
-          </p:cNvPr>
-          <p:cNvSpPr>
-            <a:spLocks xmlns:a="http://schemas.openxmlformats.org/drawingml/2006/main" noGrp="1"/>
-          </p:cNvSpPr>
-          <p:nvPr/>
-        </p:nvSpPr>
-        <p:spPr>
-          <a:xfrm xmlns:a="http://schemas.openxmlformats.org/drawingml/2006/main">
-            <a:off x="4819650" y="3257550"/>
-            <a:ext cx="2476500" cy="323850"/>
+              <a:t>Enabled</a:t>
+            </a:r>
+          </a:p>
+        </p:txBody>
+      </p:sp>
+      <p:sp>
+        <p:nvSpPr>
+          <p:cNvPr id="17" name="phase-http-3">
+            <a:extLst xmlns:a="http://schemas.openxmlformats.org/drawingml/2006/main">
+              <a:ext uri="{FF2B5EF4-FFF2-40B4-BE49-F238E27FC236}">
+                <a16:creationId xmlns:a16="http://schemas.microsoft.com/office/drawing/2014/main" id="{B2993C25-3261-4B34-90FD-48CACC67BAA0}"/>
+              </a:ext>
+            </a:extLst>
+          </p:cNvPr>
+          <p:cNvSpPr>
+            <a:spLocks xmlns:a="http://schemas.openxmlformats.org/drawingml/2006/main" noGrp="1"/>
+          </p:cNvSpPr>
+          <p:nvPr/>
+        </p:nvSpPr>
+        <p:spPr>
+          <a:xfrm xmlns:a="http://schemas.openxmlformats.org/drawingml/2006/main">
+            <a:off x="9286875" y="3333750"/>
+            <a:ext cx="1790700" cy="285750"/>
           </a:xfrm>
           <a:prstGeom xmlns:a="http://schemas.openxmlformats.org/drawingml/2006/main" prst="rect">
             <a:avLst/>
@@ -5163,29 +5144,29 @@
                 <a:ea typeface="Malgun Gothic"/>
                 <a:cs typeface="Malgun Gothic"/>
               </a:rPr>
-              <a:t>LESS · 한글 Cache · 상태 표시</a:t>
-            </a:r>
-          </a:p>
-        </p:txBody>
-      </p:sp>
-      <p:sp>
-        <p:nvSpPr>
-          <p:cNvPr id="12" name="ui-title">
-            <a:extLst xmlns:a="http://schemas.openxmlformats.org/drawingml/2006/main">
-              <a:ext uri="{FF2B5EF4-FFF2-40B4-BE49-F238E27FC236}">
-                <a16:creationId xmlns:a16="http://schemas.microsoft.com/office/drawing/2014/main" id="{32FF16C4-F187-467F-84CE-814A63FAF073}"/>
-              </a:ext>
-            </a:extLst>
-          </p:cNvPr>
-          <p:cNvSpPr>
-            <a:spLocks xmlns:a="http://schemas.openxmlformats.org/drawingml/2006/main" noGrp="1"/>
-          </p:cNvSpPr>
-          <p:nvPr/>
-        </p:nvSpPr>
-        <p:spPr>
-          <a:xfrm xmlns:a="http://schemas.openxmlformats.org/drawingml/2006/main">
-            <a:off x="8572500" y="2533650"/>
-            <a:ext cx="2609850" cy="457200"/>
+              <a:t>HTTP 200</a:t>
+            </a:r>
+          </a:p>
+        </p:txBody>
+      </p:sp>
+      <p:sp>
+        <p:nvSpPr>
+          <p:cNvPr id="18" name="integrity-count">
+            <a:extLst xmlns:a="http://schemas.openxmlformats.org/drawingml/2006/main">
+              <a:ext uri="{FF2B5EF4-FFF2-40B4-BE49-F238E27FC236}">
+                <a16:creationId xmlns:a16="http://schemas.microsoft.com/office/drawing/2014/main" id="{7D531B41-66A5-4441-97A2-88436706648C}"/>
+              </a:ext>
+            </a:extLst>
+          </p:cNvPr>
+          <p:cNvSpPr>
+            <a:spLocks xmlns:a="http://schemas.openxmlformats.org/drawingml/2006/main" noGrp="1"/>
+          </p:cNvSpPr>
+          <p:nvPr/>
+        </p:nvSpPr>
+        <p:spPr>
+          <a:xfrm xmlns:a="http://schemas.openxmlformats.org/drawingml/2006/main">
+            <a:off x="857250" y="4552950"/>
+            <a:ext cx="10477500" cy="552450"/>
           </a:xfrm>
           <a:prstGeom xmlns:a="http://schemas.openxmlformats.org/drawingml/2006/main" prst="rect">
             <a:avLst/>
@@ -5201,47 +5182,47 @@
           <a:lstStyle xmlns:a="http://schemas.openxmlformats.org/drawingml/2006/main"/>
           <a:p xmlns:a="http://schemas.openxmlformats.org/drawingml/2006/main">
             <a:pPr algn="ctr">
-              <a:defRPr sz="2250" b="1">
-                <a:solidFill>
-                  <a:srgbClr val="078248"/>
-                </a:solidFill>
-                <a:latin typeface="Malgun Gothic"/>
-                <a:ea typeface="Malgun Gothic"/>
-                <a:cs typeface="Malgun Gothic"/>
-              </a:defRPr>
-            </a:pPr>
-            <a:r>
-              <a:rPr sz="2250" b="1">
-                <a:solidFill>
-                  <a:srgbClr val="078248"/>
-                </a:solidFill>
-                <a:latin typeface="Malgun Gothic"/>
-                <a:ea typeface="Malgun Gothic"/>
-                <a:cs typeface="Malgun Gothic"/>
-              </a:rPr>
-              <a:t>Community UI</a:t>
-            </a:r>
-          </a:p>
-        </p:txBody>
-      </p:sp>
-      <p:sp>
-        <p:nvSpPr>
-          <p:cNvPr id="13" name="ui-copy">
-            <a:extLst xmlns:a="http://schemas.openxmlformats.org/drawingml/2006/main">
-              <a:ext uri="{FF2B5EF4-FFF2-40B4-BE49-F238E27FC236}">
-                <a16:creationId xmlns:a16="http://schemas.microsoft.com/office/drawing/2014/main" id="{1026BF07-AB27-4E3C-896C-129AAC534F0D}"/>
-              </a:ext>
-            </a:extLst>
-          </p:cNvPr>
-          <p:cNvSpPr>
-            <a:spLocks xmlns:a="http://schemas.openxmlformats.org/drawingml/2006/main" noGrp="1"/>
-          </p:cNvSpPr>
-          <p:nvPr/>
-        </p:nvSpPr>
-        <p:spPr>
-          <a:xfrm xmlns:a="http://schemas.openxmlformats.org/drawingml/2006/main">
-            <a:off x="8572500" y="3105150"/>
-            <a:ext cx="2609850" cy="323850"/>
+              <a:defRPr sz="2400" b="1">
+                <a:solidFill>
+                  <a:srgbClr val="15253E"/>
+                </a:solidFill>
+                <a:latin typeface="Malgun Gothic"/>
+                <a:ea typeface="Malgun Gothic"/>
+                <a:cs typeface="Malgun Gothic"/>
+              </a:defRPr>
+            </a:pPr>
+            <a:r>
+              <a:rPr sz="2400" b="1">
+                <a:solidFill>
+                  <a:srgbClr val="15253E"/>
+                </a:solidFill>
+                <a:latin typeface="Malgun Gothic"/>
+                <a:ea typeface="Malgun Gothic"/>
+                <a:cs typeface="Malgun Gothic"/>
+              </a:rPr>
+              <a:t>39 users · 117 discussions · 305 posts</a:t>
+            </a:r>
+          </a:p>
+        </p:txBody>
+      </p:sp>
+      <p:sp>
+        <p:nvSpPr>
+          <p:cNvPr id="19" name="integrity-hash">
+            <a:extLst xmlns:a="http://schemas.openxmlformats.org/drawingml/2006/main">
+              <a:ext uri="{FF2B5EF4-FFF2-40B4-BE49-F238E27FC236}">
+                <a16:creationId xmlns:a16="http://schemas.microsoft.com/office/drawing/2014/main" id="{CFB67921-C80E-4482-BC13-B3C78F46F4D4}"/>
+              </a:ext>
+            </a:extLst>
+          </p:cNvPr>
+          <p:cNvSpPr>
+            <a:spLocks xmlns:a="http://schemas.openxmlformats.org/drawingml/2006/main" noGrp="1"/>
+          </p:cNvSpPr>
+          <p:nvPr/>
+        </p:nvSpPr>
+        <p:spPr>
+          <a:xfrm xmlns:a="http://schemas.openxmlformats.org/drawingml/2006/main">
+            <a:off x="857250" y="5238750"/>
+            <a:ext cx="10477500" cy="457200"/>
           </a:xfrm>
           <a:prstGeom xmlns:a="http://schemas.openxmlformats.org/drawingml/2006/main" prst="rect">
             <a:avLst/>
@@ -5257,116 +5238,25 @@
           <a:lstStyle xmlns:a="http://schemas.openxmlformats.org/drawingml/2006/main"/>
           <a:p xmlns:a="http://schemas.openxmlformats.org/drawingml/2006/main">
             <a:pPr algn="ctr">
-              <a:defRPr sz="1500" b="0">
-                <a:solidFill>
-                  <a:srgbClr val="52647D"/>
-                </a:solidFill>
-                <a:latin typeface="Malgun Gothic"/>
-                <a:ea typeface="Malgun Gothic"/>
-                <a:cs typeface="Malgun Gothic"/>
-              </a:defRPr>
-            </a:pPr>
-            <a:r>
-              <a:rPr sz="1500" b="0">
-                <a:solidFill>
-                  <a:srgbClr val="52647D"/>
-                </a:solidFill>
-                <a:latin typeface="Malgun Gothic"/>
-                <a:ea typeface="Malgun Gothic"/>
-                <a:cs typeface="Malgun Gothic"/>
-              </a:rPr>
-              <a:t>Desktop · Mobile · Accessibility</a:t>
-            </a:r>
-          </a:p>
-        </p:txBody>
-      </p:sp>
-      <p:sp>
-        <p:nvSpPr>
-          <p:cNvPr id="14" name="rollback-strip">
-            <a:extLst xmlns:a="http://schemas.openxmlformats.org/drawingml/2006/main">
-              <a:ext uri="{FF2B5EF4-FFF2-40B4-BE49-F238E27FC236}">
-                <a16:creationId xmlns:a16="http://schemas.microsoft.com/office/drawing/2014/main" id="{F3CAD643-596B-443D-AE7E-F1E1FCEF9ACA}"/>
-              </a:ext>
-            </a:extLst>
-          </p:cNvPr>
-          <p:cNvSpPr>
-            <a:spLocks xmlns:a="http://schemas.openxmlformats.org/drawingml/2006/main" noGrp="1"/>
-          </p:cNvSpPr>
-          <p:nvPr/>
-        </p:nvSpPr>
-        <p:spPr>
-          <a:xfrm xmlns:a="http://schemas.openxmlformats.org/drawingml/2006/main">
-            <a:off x="2381250" y="4781550"/>
-            <a:ext cx="7429500" cy="838200"/>
-          </a:xfrm>
-          <a:prstGeom xmlns:a="http://schemas.openxmlformats.org/drawingml/2006/main" prst="roundRect">
-            <a:avLst>
-              <a:gd name="adj" fmla="val 9091"/>
-            </a:avLst>
-          </a:prstGeom>
-          <a:solidFill xmlns:a="http://schemas.openxmlformats.org/drawingml/2006/main">
-            <a:srgbClr val="FFF6DF"/>
-          </a:solidFill>
-          <a:ln xmlns:a="http://schemas.openxmlformats.org/drawingml/2006/main" w="9525">
-            <a:solidFill>
-              <a:srgbClr val="E4B955"/>
-            </a:solidFill>
-            <a:prstDash val="solid"/>
-          </a:ln>
-        </p:spPr>
-      </p:sp>
-      <p:sp>
-        <p:nvSpPr>
-          <p:cNvPr id="15" name="rollback-copy">
-            <a:extLst xmlns:a="http://schemas.openxmlformats.org/drawingml/2006/main">
-              <a:ext uri="{FF2B5EF4-FFF2-40B4-BE49-F238E27FC236}">
-                <a16:creationId xmlns:a16="http://schemas.microsoft.com/office/drawing/2014/main" id="{5375730A-252B-458D-9FB8-0C6F283BA0E8}"/>
-              </a:ext>
-            </a:extLst>
-          </p:cNvPr>
-          <p:cNvSpPr>
-            <a:spLocks xmlns:a="http://schemas.openxmlformats.org/drawingml/2006/main" noGrp="1"/>
-          </p:cNvSpPr>
-          <p:nvPr/>
-        </p:nvSpPr>
-        <p:spPr>
-          <a:xfrm xmlns:a="http://schemas.openxmlformats.org/drawingml/2006/main">
-            <a:off x="2686050" y="4991100"/>
-            <a:ext cx="6819900" cy="400050"/>
-          </a:xfrm>
-          <a:prstGeom xmlns:a="http://schemas.openxmlformats.org/drawingml/2006/main" prst="rect">
-            <a:avLst/>
-          </a:prstGeom>
-          <a:noFill xmlns:a="http://schemas.openxmlformats.org/drawingml/2006/main"/>
-          <a:ln xmlns:a="http://schemas.openxmlformats.org/drawingml/2006/main" w="0">
-            <a:noFill/>
-            <a:prstDash val="solid"/>
-          </a:ln>
-        </p:spPr>
-        <p:txBody>
-          <a:bodyPr xmlns:a="http://schemas.openxmlformats.org/drawingml/2006/main"/>
-          <a:lstStyle xmlns:a="http://schemas.openxmlformats.org/drawingml/2006/main"/>
-          <a:p xmlns:a="http://schemas.openxmlformats.org/drawingml/2006/main">
-            <a:pPr algn="ctr">
-              <a:defRPr sz="1950" b="1">
-                <a:solidFill>
-                  <a:srgbClr val="9A6700"/>
-                </a:solidFill>
-                <a:latin typeface="Malgun Gothic"/>
-                <a:ea typeface="Malgun Gothic"/>
-                <a:cs typeface="Malgun Gothic"/>
-              </a:defRPr>
-            </a:pPr>
-            <a:r>
-              <a:rPr sz="1950" b="1">
-                <a:solidFill>
-                  <a:srgbClr val="9A6700"/>
-                </a:solidFill>
-                <a:latin typeface="Malgun Gothic"/>
-                <a:ea typeface="Malgun Gothic"/>
-                <a:cs typeface="Malgun Gothic"/>
-              </a:rPr>
-              <a:t>장애 시 extension:disable → 기본 Flarum UI 복귀</a:t>
+              <a:defRPr sz="1800" b="0">
+                <a:solidFill>
+                  <a:srgbClr val="078248"/>
+                </a:solidFill>
+                <a:latin typeface="Malgun Gothic"/>
+                <a:ea typeface="Malgun Gothic"/>
+                <a:cs typeface="Malgun Gothic"/>
+              </a:defRPr>
+            </a:pPr>
+            <a:r>
+              <a:rPr sz="1800" b="0">
+                <a:solidFill>
+                  <a:srgbClr val="078248"/>
+                </a:solidFill>
+                <a:latin typeface="Malgun Gothic"/>
+                <a:ea typeface="Malgun Gothic"/>
+                <a:cs typeface="Malgun Gothic"/>
+              </a:rPr>
+              <a:t>콘텐츠 SHA-256 동일 · 첨부 SHA-256 동일 · 정적 계약 8/8</a:t>
             </a:r>
           </a:p>
         </p:txBody>
@@ -5374,7 +5264,7 @@
     </p:spTree>
     <p:extLst>
       <p:ext uri="{BB962C8B-B14F-4D97-AF65-F5344CB8AC3E}">
-        <p14:creationId xmlns:p14="http://schemas.microsoft.com/office/powerpoint/2010/main" val="902393509"/>
+        <p14:creationId xmlns:p14="http://schemas.microsoft.com/office/powerpoint/2010/main" val="224538138"/>
       </p:ext>
     </p:extLst>
   </p:cSld>
@@ -5402,22 +5292,22 @@
       </p:grpSpPr>
       <p:sp>
         <p:nvSpPr>
-          <p:cNvPr id="8" name="close-kicker">
-            <a:extLst xmlns:a="http://schemas.openxmlformats.org/drawingml/2006/main">
-              <a:ext uri="{FF2B5EF4-FFF2-40B4-BE49-F238E27FC236}">
-                <a16:creationId xmlns:a16="http://schemas.microsoft.com/office/drawing/2014/main" id="{C34BF6FC-107E-47AE-A1D9-34F8DA8C77B4}"/>
-              </a:ext>
-            </a:extLst>
-          </p:cNvPr>
-          <p:cNvSpPr>
-            <a:spLocks xmlns:a="http://schemas.openxmlformats.org/drawingml/2006/main" noGrp="1"/>
-          </p:cNvSpPr>
-          <p:nvPr/>
-        </p:nvSpPr>
-        <p:spPr>
-          <a:xfrm xmlns:a="http://schemas.openxmlformats.org/drawingml/2006/main">
-            <a:off x="457200" y="400050"/>
-            <a:ext cx="6191250" cy="342900"/>
+          <p:cNvPr id="16" name="title-7">
+            <a:extLst xmlns:a="http://schemas.openxmlformats.org/drawingml/2006/main">
+              <a:ext uri="{FF2B5EF4-FFF2-40B4-BE49-F238E27FC236}">
+                <a16:creationId xmlns:a16="http://schemas.microsoft.com/office/drawing/2014/main" id="{B1E5F8CB-12E8-414B-A782-7921D9DB98E9}"/>
+              </a:ext>
+            </a:extLst>
+          </p:cNvPr>
+          <p:cNvSpPr>
+            <a:spLocks xmlns:a="http://schemas.openxmlformats.org/drawingml/2006/main" noGrp="1"/>
+          </p:cNvSpPr>
+          <p:nvPr/>
+        </p:nvSpPr>
+        <p:spPr>
+          <a:xfrm xmlns:a="http://schemas.openxmlformats.org/drawingml/2006/main">
+            <a:off x="457200" y="342900"/>
+            <a:ext cx="10572750" cy="685800"/>
           </a:xfrm>
           <a:prstGeom xmlns:a="http://schemas.openxmlformats.org/drawingml/2006/main" prst="rect">
             <a:avLst/>
@@ -5433,47 +5323,47 @@
           <a:lstStyle xmlns:a="http://schemas.openxmlformats.org/drawingml/2006/main"/>
           <a:p xmlns:a="http://schemas.openxmlformats.org/drawingml/2006/main">
             <a:pPr algn="l">
-              <a:defRPr sz="1500" b="1">
-                <a:solidFill>
-                  <a:srgbClr val="52647D"/>
-                </a:solidFill>
-                <a:latin typeface="Malgun Gothic"/>
-                <a:ea typeface="Malgun Gothic"/>
-                <a:cs typeface="Malgun Gothic"/>
-              </a:defRPr>
-            </a:pPr>
-            <a:r>
-              <a:rPr sz="1500" b="1">
-                <a:solidFill>
-                  <a:srgbClr val="52647D"/>
-                </a:solidFill>
-                <a:latin typeface="Malgun Gothic"/>
-                <a:ea typeface="Malgun Gothic"/>
-                <a:cs typeface="Malgun Gothic"/>
-              </a:rPr>
-              <a:t>ISSUE #73 · IMPLEMENTATION COMPLETE</a:t>
-            </a:r>
-          </a:p>
-        </p:txBody>
-      </p:sp>
-      <p:sp>
-        <p:nvSpPr>
-          <p:cNvPr id="2" name="close-title">
-            <a:extLst xmlns:a="http://schemas.openxmlformats.org/drawingml/2006/main">
-              <a:ext uri="{FF2B5EF4-FFF2-40B4-BE49-F238E27FC236}">
-                <a16:creationId xmlns:a16="http://schemas.microsoft.com/office/drawing/2014/main" id="{7702A505-CF55-4E2B-997D-AD97669D02D9}"/>
-              </a:ext>
-            </a:extLst>
-          </p:cNvPr>
-          <p:cNvSpPr>
-            <a:spLocks xmlns:a="http://schemas.openxmlformats.org/drawingml/2006/main" noGrp="1"/>
-          </p:cNvSpPr>
-          <p:nvPr/>
-        </p:nvSpPr>
-        <p:spPr>
-          <a:xfrm xmlns:a="http://schemas.openxmlformats.org/drawingml/2006/main">
-            <a:off x="457200" y="1600200"/>
-            <a:ext cx="6667500" cy="1714500"/>
+              <a:defRPr sz="3000" b="1">
+                <a:solidFill>
+                  <a:srgbClr val="15253E"/>
+                </a:solidFill>
+                <a:latin typeface="Malgun Gothic"/>
+                <a:ea typeface="Malgun Gothic"/>
+                <a:cs typeface="Malgun Gothic"/>
+              </a:defRPr>
+            </a:pPr>
+            <a:r>
+              <a:rPr sz="3000" b="1">
+                <a:solidFill>
+                  <a:srgbClr val="15253E"/>
+                </a:solidFill>
+                <a:latin typeface="Malgun Gothic"/>
+                <a:ea typeface="Malgun Gothic"/>
+                <a:cs typeface="Malgun Gothic"/>
+              </a:rPr>
+              <a:t>Flarum Core를 건드리지 않아 롤백은 확장 하나로 끝납니다</a:t>
+            </a:r>
+          </a:p>
+        </p:txBody>
+      </p:sp>
+      <p:sp>
+        <p:nvSpPr>
+          <p:cNvPr id="2" name="page-7">
+            <a:extLst xmlns:a="http://schemas.openxmlformats.org/drawingml/2006/main">
+              <a:ext uri="{FF2B5EF4-FFF2-40B4-BE49-F238E27FC236}">
+                <a16:creationId xmlns:a16="http://schemas.microsoft.com/office/drawing/2014/main" id="{A3276DCC-0352-4CE1-B01D-E79903100583}"/>
+              </a:ext>
+            </a:extLst>
+          </p:cNvPr>
+          <p:cNvSpPr>
+            <a:spLocks xmlns:a="http://schemas.openxmlformats.org/drawingml/2006/main" noGrp="1"/>
+          </p:cNvSpPr>
+          <p:nvPr/>
+        </p:nvSpPr>
+        <p:spPr>
+          <a:xfrm xmlns:a="http://schemas.openxmlformats.org/drawingml/2006/main">
+            <a:off x="11163300" y="6286500"/>
+            <a:ext cx="571500" cy="228600"/>
           </a:xfrm>
           <a:prstGeom xmlns:a="http://schemas.openxmlformats.org/drawingml/2006/main" prst="rect">
             <a:avLst/>
@@ -5488,71 +5378,48 @@
           <a:bodyPr xmlns:a="http://schemas.openxmlformats.org/drawingml/2006/main"/>
           <a:lstStyle xmlns:a="http://schemas.openxmlformats.org/drawingml/2006/main"/>
           <a:p xmlns:a="http://schemas.openxmlformats.org/drawingml/2006/main">
-            <a:pPr algn="l">
-              <a:defRPr sz="4800" b="1">
-                <a:solidFill>
-                  <a:srgbClr val="15253E"/>
-                </a:solidFill>
-                <a:latin typeface="Malgun Gothic"/>
-                <a:ea typeface="Malgun Gothic"/>
-                <a:cs typeface="Malgun Gothic"/>
-              </a:defRPr>
-            </a:pPr>
-            <a:r>
-              <a:rPr sz="4800" b="1">
-                <a:solidFill>
-                  <a:srgbClr val="15253E"/>
-                </a:solidFill>
-                <a:latin typeface="Malgun Gothic"/>
-                <a:ea typeface="Malgun Gothic"/>
-                <a:cs typeface="Malgun Gothic"/>
-              </a:rPr>
-              <a:t>운영 적용만</a:t>
-            </a:r>
-          </a:p>
-          <a:p xmlns:a="http://schemas.openxmlformats.org/drawingml/2006/main">
-            <a:pPr algn="l">
-              <a:defRPr sz="4800" b="1">
-                <a:solidFill>
-                  <a:srgbClr val="15253E"/>
-                </a:solidFill>
-                <a:latin typeface="Malgun Gothic"/>
-                <a:ea typeface="Malgun Gothic"/>
-                <a:cs typeface="Malgun Gothic"/>
-              </a:defRPr>
-            </a:pPr>
-            <a:r>
-              <a:rPr sz="4800" b="1">
-                <a:solidFill>
-                  <a:srgbClr val="15253E"/>
-                </a:solidFill>
-                <a:latin typeface="Malgun Gothic"/>
-                <a:ea typeface="Malgun Gothic"/>
-                <a:cs typeface="Malgun Gothic"/>
-              </a:rPr>
-              <a:t>승인하면 됩니다</a:t>
-            </a:r>
-          </a:p>
-        </p:txBody>
-      </p:sp>
-      <p:sp>
-        <p:nvSpPr>
-          <p:cNvPr id="3" name="close-detail">
-            <a:extLst xmlns:a="http://schemas.openxmlformats.org/drawingml/2006/main">
-              <a:ext uri="{FF2B5EF4-FFF2-40B4-BE49-F238E27FC236}">
-                <a16:creationId xmlns:a16="http://schemas.microsoft.com/office/drawing/2014/main" id="{9201F0BC-9321-4618-9717-2C359901B3EA}"/>
-              </a:ext>
-            </a:extLst>
-          </p:cNvPr>
-          <p:cNvSpPr>
-            <a:spLocks xmlns:a="http://schemas.openxmlformats.org/drawingml/2006/main" noGrp="1"/>
-          </p:cNvSpPr>
-          <p:nvPr/>
-        </p:nvSpPr>
-        <p:spPr>
-          <a:xfrm xmlns:a="http://schemas.openxmlformats.org/drawingml/2006/main">
-            <a:off x="457200" y="4019550"/>
-            <a:ext cx="7620000" cy="876300"/>
+            <a:pPr algn="r">
+              <a:defRPr sz="1200" b="0">
+                <a:solidFill>
+                  <a:srgbClr val="52647D"/>
+                </a:solidFill>
+                <a:latin typeface="Malgun Gothic"/>
+                <a:ea typeface="Malgun Gothic"/>
+                <a:cs typeface="Malgun Gothic"/>
+              </a:defRPr>
+            </a:pPr>
+            <a:r>
+              <a:rPr sz="1200" b="0">
+                <a:solidFill>
+                  <a:srgbClr val="52647D"/>
+                </a:solidFill>
+                <a:latin typeface="Malgun Gothic"/>
+                <a:ea typeface="Malgun Gothic"/>
+                <a:cs typeface="Malgun Gothic"/>
+              </a:rPr>
+              <a:t>07</a:t>
+            </a:r>
+          </a:p>
+        </p:txBody>
+      </p:sp>
+      <p:sp>
+        <p:nvSpPr>
+          <p:cNvPr id="3" name="flow-arrow-1">
+            <a:extLst xmlns:a="http://schemas.openxmlformats.org/drawingml/2006/main">
+              <a:ext uri="{FF2B5EF4-FFF2-40B4-BE49-F238E27FC236}">
+                <a16:creationId xmlns:a16="http://schemas.microsoft.com/office/drawing/2014/main" id="{F33C0C86-C636-49E7-9EF3-AD3434C40404}"/>
+              </a:ext>
+            </a:extLst>
+          </p:cNvPr>
+          <p:cNvSpPr>
+            <a:spLocks xmlns:a="http://schemas.openxmlformats.org/drawingml/2006/main" noGrp="1"/>
+          </p:cNvSpPr>
+          <p:nvPr/>
+        </p:nvSpPr>
+        <p:spPr>
+          <a:xfrm xmlns:a="http://schemas.openxmlformats.org/drawingml/2006/main">
+            <a:off x="3848100" y="2724150"/>
+            <a:ext cx="762000" cy="476250"/>
           </a:xfrm>
           <a:prstGeom xmlns:a="http://schemas.openxmlformats.org/drawingml/2006/main" prst="rect">
             <a:avLst/>
@@ -5567,8 +5434,8 @@
           <a:bodyPr xmlns:a="http://schemas.openxmlformats.org/drawingml/2006/main"/>
           <a:lstStyle xmlns:a="http://schemas.openxmlformats.org/drawingml/2006/main"/>
           <a:p xmlns:a="http://schemas.openxmlformats.org/drawingml/2006/main">
-            <a:pPr algn="l">
-              <a:defRPr sz="1950" b="0">
+            <a:pPr algn="ctr">
+              <a:defRPr sz="2700" b="1">
                 <a:solidFill>
                   <a:srgbClr val="52647D"/>
                 </a:solidFill>
@@ -5578,7 +5445,7 @@
               </a:defRPr>
             </a:pPr>
             <a:r>
-              <a:rPr sz="1950" b="0">
+              <a:rPr sz="2700" b="1">
                 <a:solidFill>
                   <a:srgbClr val="52647D"/>
                 </a:solidFill>
@@ -5586,12 +5453,45 @@
                 <a:ea typeface="Malgun Gothic"/>
                 <a:cs typeface="Malgun Gothic"/>
               </a:rPr>
-              <a:t>WSL 전체 주기 PASS · 한글 원문 키·태그창 직접 영문 0건</a:t>
-            </a:r>
-          </a:p>
-          <a:p xmlns:a="http://schemas.openxmlformats.org/drawingml/2006/main">
-            <a:pPr algn="l">
-              <a:defRPr sz="1950" b="0">
+              <a:t>→</a:t>
+            </a:r>
+          </a:p>
+        </p:txBody>
+      </p:sp>
+      <p:sp>
+        <p:nvSpPr>
+          <p:cNvPr id="4" name="flow-arrow-2">
+            <a:extLst xmlns:a="http://schemas.openxmlformats.org/drawingml/2006/main">
+              <a:ext uri="{FF2B5EF4-FFF2-40B4-BE49-F238E27FC236}">
+                <a16:creationId xmlns:a16="http://schemas.microsoft.com/office/drawing/2014/main" id="{35F70949-AD48-4799-9CD4-E06EF4FA6024}"/>
+              </a:ext>
+            </a:extLst>
+          </p:cNvPr>
+          <p:cNvSpPr>
+            <a:spLocks xmlns:a="http://schemas.openxmlformats.org/drawingml/2006/main" noGrp="1"/>
+          </p:cNvSpPr>
+          <p:nvPr/>
+        </p:nvSpPr>
+        <p:spPr>
+          <a:xfrm xmlns:a="http://schemas.openxmlformats.org/drawingml/2006/main">
+            <a:off x="7581900" y="2724150"/>
+            <a:ext cx="762000" cy="476250"/>
+          </a:xfrm>
+          <a:prstGeom xmlns:a="http://schemas.openxmlformats.org/drawingml/2006/main" prst="rect">
+            <a:avLst/>
+          </a:prstGeom>
+          <a:noFill xmlns:a="http://schemas.openxmlformats.org/drawingml/2006/main"/>
+          <a:ln xmlns:a="http://schemas.openxmlformats.org/drawingml/2006/main" w="0">
+            <a:noFill/>
+            <a:prstDash val="solid"/>
+          </a:ln>
+        </p:spPr>
+        <p:txBody>
+          <a:bodyPr xmlns:a="http://schemas.openxmlformats.org/drawingml/2006/main"/>
+          <a:lstStyle xmlns:a="http://schemas.openxmlformats.org/drawingml/2006/main"/>
+          <a:p xmlns:a="http://schemas.openxmlformats.org/drawingml/2006/main">
+            <a:pPr algn="ctr">
+              <a:defRPr sz="2700" b="1">
                 <a:solidFill>
                   <a:srgbClr val="52647D"/>
                 </a:solidFill>
@@ -5601,7 +5501,7 @@
               </a:defRPr>
             </a:pPr>
             <a:r>
-              <a:rPr sz="1950" b="0">
+              <a:rPr sz="2700" b="1">
                 <a:solidFill>
                   <a:srgbClr val="52647D"/>
                 </a:solidFill>
@@ -5609,33 +5509,68 @@
                 <a:ea typeface="Malgun Gothic"/>
                 <a:cs typeface="Malgun Gothic"/>
               </a:rPr>
-              <a:t>Core·Vendor·DB·운영 Community 변경 없음</a:t>
-            </a:r>
-          </a:p>
-        </p:txBody>
-      </p:sp>
-      <p:sp>
-        <p:nvSpPr>
-          <p:cNvPr id="4" name="close-status">
-            <a:extLst xmlns:a="http://schemas.openxmlformats.org/drawingml/2006/main">
-              <a:ext uri="{FF2B5EF4-FFF2-40B4-BE49-F238E27FC236}">
-                <a16:creationId xmlns:a16="http://schemas.microsoft.com/office/drawing/2014/main" id="{B69D7650-8F72-440A-A35D-F375736F8CE6}"/>
-              </a:ext>
-            </a:extLst>
-          </p:cNvPr>
-          <p:cNvSpPr>
-            <a:spLocks xmlns:a="http://schemas.openxmlformats.org/drawingml/2006/main" noGrp="1"/>
-          </p:cNvSpPr>
-          <p:nvPr/>
-        </p:nvSpPr>
-        <p:spPr>
-          <a:xfrm xmlns:a="http://schemas.openxmlformats.org/drawingml/2006/main">
-            <a:off x="8572500" y="1657350"/>
-            <a:ext cx="2952750" cy="2952750"/>
+              <a:t>→</a:t>
+            </a:r>
+          </a:p>
+        </p:txBody>
+      </p:sp>
+      <p:sp>
+        <p:nvSpPr>
+          <p:cNvPr id="5" name="flarum-core">
+            <a:extLst xmlns:a="http://schemas.openxmlformats.org/drawingml/2006/main">
+              <a:ext uri="{FF2B5EF4-FFF2-40B4-BE49-F238E27FC236}">
+                <a16:creationId xmlns:a16="http://schemas.microsoft.com/office/drawing/2014/main" id="{2D23B9C7-BD3C-4600-BA89-78668692D407}"/>
+              </a:ext>
+            </a:extLst>
+          </p:cNvPr>
+          <p:cNvSpPr>
+            <a:spLocks xmlns:a="http://schemas.openxmlformats.org/drawingml/2006/main" noGrp="1"/>
+          </p:cNvSpPr>
+          <p:nvPr/>
+        </p:nvSpPr>
+        <p:spPr>
+          <a:xfrm xmlns:a="http://schemas.openxmlformats.org/drawingml/2006/main">
+            <a:off x="666750" y="2076450"/>
+            <a:ext cx="3143250" cy="1809750"/>
           </a:xfrm>
           <a:prstGeom xmlns:a="http://schemas.openxmlformats.org/drawingml/2006/main" prst="roundRect">
             <a:avLst>
-              <a:gd name="adj" fmla="val 2581"/>
+              <a:gd name="adj" fmla="val 4211"/>
+            </a:avLst>
+          </a:prstGeom>
+          <a:solidFill xmlns:a="http://schemas.openxmlformats.org/drawingml/2006/main">
+            <a:srgbClr val="F3F7FC"/>
+          </a:solidFill>
+          <a:ln xmlns:a="http://schemas.openxmlformats.org/drawingml/2006/main" w="9525">
+            <a:solidFill>
+              <a:srgbClr val="D5E1F1"/>
+            </a:solidFill>
+            <a:prstDash val="solid"/>
+          </a:ln>
+        </p:spPr>
+      </p:sp>
+      <p:sp>
+        <p:nvSpPr>
+          <p:cNvPr id="6" name="theme-extension">
+            <a:extLst xmlns:a="http://schemas.openxmlformats.org/drawingml/2006/main">
+              <a:ext uri="{FF2B5EF4-FFF2-40B4-BE49-F238E27FC236}">
+                <a16:creationId xmlns:a16="http://schemas.microsoft.com/office/drawing/2014/main" id="{66F5027A-7FA7-413F-B51E-8043D0948B2C}"/>
+              </a:ext>
+            </a:extLst>
+          </p:cNvPr>
+          <p:cNvSpPr>
+            <a:spLocks xmlns:a="http://schemas.openxmlformats.org/drawingml/2006/main" noGrp="1"/>
+          </p:cNvSpPr>
+          <p:nvPr/>
+        </p:nvSpPr>
+        <p:spPr>
+          <a:xfrm xmlns:a="http://schemas.openxmlformats.org/drawingml/2006/main">
+            <a:off x="4572000" y="2076450"/>
+            <a:ext cx="2971800" cy="1809750"/>
+          </a:xfrm>
+          <a:prstGeom xmlns:a="http://schemas.openxmlformats.org/drawingml/2006/main" prst="roundRect">
+            <a:avLst>
+              <a:gd name="adj" fmla="val 4211"/>
             </a:avLst>
           </a:prstGeom>
           <a:solidFill xmlns:a="http://schemas.openxmlformats.org/drawingml/2006/main">
@@ -5651,22 +5586,57 @@
       </p:sp>
       <p:sp>
         <p:nvSpPr>
-          <p:cNvPr id="5" name="close-go">
-            <a:extLst xmlns:a="http://schemas.openxmlformats.org/drawingml/2006/main">
-              <a:ext uri="{FF2B5EF4-FFF2-40B4-BE49-F238E27FC236}">
-                <a16:creationId xmlns:a16="http://schemas.microsoft.com/office/drawing/2014/main" id="{D22D7C7A-3B4D-4B7F-8D88-8BDE2729BCEC}"/>
-              </a:ext>
-            </a:extLst>
-          </p:cNvPr>
-          <p:cNvSpPr>
-            <a:spLocks xmlns:a="http://schemas.openxmlformats.org/drawingml/2006/main" noGrp="1"/>
-          </p:cNvSpPr>
-          <p:nvPr/>
-        </p:nvSpPr>
-        <p:spPr>
-          <a:xfrm xmlns:a="http://schemas.openxmlformats.org/drawingml/2006/main">
-            <a:off x="8896350" y="2305050"/>
-            <a:ext cx="2305050" cy="895350"/>
+          <p:cNvPr id="7" name="community-ui">
+            <a:extLst xmlns:a="http://schemas.openxmlformats.org/drawingml/2006/main">
+              <a:ext uri="{FF2B5EF4-FFF2-40B4-BE49-F238E27FC236}">
+                <a16:creationId xmlns:a16="http://schemas.microsoft.com/office/drawing/2014/main" id="{E7F3E4DE-3896-4972-B8F1-AF6C18CFFA99}"/>
+              </a:ext>
+            </a:extLst>
+          </p:cNvPr>
+          <p:cNvSpPr>
+            <a:spLocks xmlns:a="http://schemas.openxmlformats.org/drawingml/2006/main" noGrp="1"/>
+          </p:cNvSpPr>
+          <p:nvPr/>
+        </p:nvSpPr>
+        <p:spPr>
+          <a:xfrm xmlns:a="http://schemas.openxmlformats.org/drawingml/2006/main">
+            <a:off x="8305800" y="2076450"/>
+            <a:ext cx="3143250" cy="1809750"/>
+          </a:xfrm>
+          <a:prstGeom xmlns:a="http://schemas.openxmlformats.org/drawingml/2006/main" prst="roundRect">
+            <a:avLst>
+              <a:gd name="adj" fmla="val 4211"/>
+            </a:avLst>
+          </a:prstGeom>
+          <a:solidFill xmlns:a="http://schemas.openxmlformats.org/drawingml/2006/main">
+            <a:srgbClr val="EAFAF2"/>
+          </a:solidFill>
+          <a:ln xmlns:a="http://schemas.openxmlformats.org/drawingml/2006/main" w="9525">
+            <a:solidFill>
+              <a:srgbClr val="86D2AA"/>
+            </a:solidFill>
+            <a:prstDash val="solid"/>
+          </a:ln>
+        </p:spPr>
+      </p:sp>
+      <p:sp>
+        <p:nvSpPr>
+          <p:cNvPr id="8" name="flarum-core-title">
+            <a:extLst xmlns:a="http://schemas.openxmlformats.org/drawingml/2006/main">
+              <a:ext uri="{FF2B5EF4-FFF2-40B4-BE49-F238E27FC236}">
+                <a16:creationId xmlns:a16="http://schemas.microsoft.com/office/drawing/2014/main" id="{0136A85B-5961-4FFA-8B8D-5B294E1A0C1F}"/>
+              </a:ext>
+            </a:extLst>
+          </p:cNvPr>
+          <p:cNvSpPr>
+            <a:spLocks xmlns:a="http://schemas.openxmlformats.org/drawingml/2006/main" noGrp="1"/>
+          </p:cNvSpPr>
+          <p:nvPr/>
+        </p:nvSpPr>
+        <p:spPr>
+          <a:xfrm xmlns:a="http://schemas.openxmlformats.org/drawingml/2006/main">
+            <a:off x="933450" y="2533650"/>
+            <a:ext cx="2609850" cy="457200"/>
           </a:xfrm>
           <a:prstGeom xmlns:a="http://schemas.openxmlformats.org/drawingml/2006/main" prst="rect">
             <a:avLst/>
@@ -5682,47 +5652,47 @@
           <a:lstStyle xmlns:a="http://schemas.openxmlformats.org/drawingml/2006/main"/>
           <a:p xmlns:a="http://schemas.openxmlformats.org/drawingml/2006/main">
             <a:pPr algn="ctr">
-              <a:defRPr sz="5100" b="1">
-                <a:solidFill>
-                  <a:srgbClr val="155EEF"/>
-                </a:solidFill>
-                <a:latin typeface="Malgun Gothic"/>
-                <a:ea typeface="Malgun Gothic"/>
-                <a:cs typeface="Malgun Gothic"/>
-              </a:defRPr>
-            </a:pPr>
-            <a:r>
-              <a:rPr sz="5100" b="1">
-                <a:solidFill>
-                  <a:srgbClr val="155EEF"/>
-                </a:solidFill>
-                <a:latin typeface="Malgun Gothic"/>
-                <a:ea typeface="Malgun Gothic"/>
-                <a:cs typeface="Malgun Gothic"/>
-              </a:rPr>
-              <a:t>GO</a:t>
-            </a:r>
-          </a:p>
-        </p:txBody>
-      </p:sp>
-      <p:sp>
-        <p:nvSpPr>
-          <p:cNvPr id="6" name="close-condition">
-            <a:extLst xmlns:a="http://schemas.openxmlformats.org/drawingml/2006/main">
-              <a:ext uri="{FF2B5EF4-FFF2-40B4-BE49-F238E27FC236}">
-                <a16:creationId xmlns:a16="http://schemas.microsoft.com/office/drawing/2014/main" id="{A9DB6BD3-70D3-4FF4-87A5-0B977B396F10}"/>
-              </a:ext>
-            </a:extLst>
-          </p:cNvPr>
-          <p:cNvSpPr>
-            <a:spLocks xmlns:a="http://schemas.openxmlformats.org/drawingml/2006/main" noGrp="1"/>
-          </p:cNvSpPr>
-          <p:nvPr/>
-        </p:nvSpPr>
-        <p:spPr>
-          <a:xfrm xmlns:a="http://schemas.openxmlformats.org/drawingml/2006/main">
-            <a:off x="8877300" y="3390900"/>
-            <a:ext cx="2343150" cy="533400"/>
+              <a:defRPr sz="2250" b="1">
+                <a:solidFill>
+                  <a:srgbClr val="15253E"/>
+                </a:solidFill>
+                <a:latin typeface="Malgun Gothic"/>
+                <a:ea typeface="Malgun Gothic"/>
+                <a:cs typeface="Malgun Gothic"/>
+              </a:defRPr>
+            </a:pPr>
+            <a:r>
+              <a:rPr sz="2250" b="1">
+                <a:solidFill>
+                  <a:srgbClr val="15253E"/>
+                </a:solidFill>
+                <a:latin typeface="Malgun Gothic"/>
+                <a:ea typeface="Malgun Gothic"/>
+                <a:cs typeface="Malgun Gothic"/>
+              </a:rPr>
+              <a:t>Flarum 1.8.18</a:t>
+            </a:r>
+          </a:p>
+        </p:txBody>
+      </p:sp>
+      <p:sp>
+        <p:nvSpPr>
+          <p:cNvPr id="9" name="flarum-core-copy">
+            <a:extLst xmlns:a="http://schemas.openxmlformats.org/drawingml/2006/main">
+              <a:ext uri="{FF2B5EF4-FFF2-40B4-BE49-F238E27FC236}">
+                <a16:creationId xmlns:a16="http://schemas.microsoft.com/office/drawing/2014/main" id="{E7DB7EDB-905C-43D0-890F-80D3946E2991}"/>
+              </a:ext>
+            </a:extLst>
+          </p:cNvPr>
+          <p:cNvSpPr>
+            <a:spLocks xmlns:a="http://schemas.openxmlformats.org/drawingml/2006/main" noGrp="1"/>
+          </p:cNvSpPr>
+          <p:nvPr/>
+        </p:nvSpPr>
+        <p:spPr>
+          <a:xfrm xmlns:a="http://schemas.openxmlformats.org/drawingml/2006/main">
+            <a:off x="933450" y="3105150"/>
+            <a:ext cx="2609850" cy="323850"/>
           </a:xfrm>
           <a:prstGeom xmlns:a="http://schemas.openxmlformats.org/drawingml/2006/main" prst="rect">
             <a:avLst/>
@@ -5738,47 +5708,47 @@
           <a:lstStyle xmlns:a="http://schemas.openxmlformats.org/drawingml/2006/main"/>
           <a:p xmlns:a="http://schemas.openxmlformats.org/drawingml/2006/main">
             <a:pPr algn="ctr">
-              <a:defRPr sz="1650" b="1">
-                <a:solidFill>
-                  <a:srgbClr val="15253E"/>
-                </a:solidFill>
-                <a:latin typeface="Malgun Gothic"/>
-                <a:ea typeface="Malgun Gothic"/>
-                <a:cs typeface="Malgun Gothic"/>
-              </a:defRPr>
-            </a:pPr>
-            <a:r>
-              <a:rPr sz="1650" b="1">
-                <a:solidFill>
-                  <a:srgbClr val="15253E"/>
-                </a:solidFill>
-                <a:latin typeface="Malgun Gothic"/>
-                <a:ea typeface="Malgun Gothic"/>
-                <a:cs typeface="Malgun Gothic"/>
-              </a:rPr>
-              <a:t>운영 반영 승인 대기</a:t>
-            </a:r>
-          </a:p>
-        </p:txBody>
-      </p:sp>
-      <p:sp>
-        <p:nvSpPr>
-          <p:cNvPr id="7" name="close-next">
-            <a:extLst xmlns:a="http://schemas.openxmlformats.org/drawingml/2006/main">
-              <a:ext uri="{FF2B5EF4-FFF2-40B4-BE49-F238E27FC236}">
-                <a16:creationId xmlns:a16="http://schemas.microsoft.com/office/drawing/2014/main" id="{5B9A3FB3-E1F1-4632-A39D-408F7F2602B2}"/>
-              </a:ext>
-            </a:extLst>
-          </p:cNvPr>
-          <p:cNvSpPr>
-            <a:spLocks xmlns:a="http://schemas.openxmlformats.org/drawingml/2006/main" noGrp="1"/>
-          </p:cNvSpPr>
-          <p:nvPr/>
-        </p:nvSpPr>
-        <p:spPr>
-          <a:xfrm xmlns:a="http://schemas.openxmlformats.org/drawingml/2006/main">
-            <a:off x="457200" y="5562600"/>
-            <a:ext cx="10668000" cy="457200"/>
+              <a:defRPr sz="1500" b="0">
+                <a:solidFill>
+                  <a:srgbClr val="52647D"/>
+                </a:solidFill>
+                <a:latin typeface="Malgun Gothic"/>
+                <a:ea typeface="Malgun Gothic"/>
+                <a:cs typeface="Malgun Gothic"/>
+              </a:defRPr>
+            </a:pPr>
+            <a:r>
+              <a:rPr sz="1500" b="0">
+                <a:solidFill>
+                  <a:srgbClr val="52647D"/>
+                </a:solidFill>
+                <a:latin typeface="Malgun Gothic"/>
+                <a:ea typeface="Malgun Gothic"/>
+                <a:cs typeface="Malgun Gothic"/>
+              </a:rPr>
+              <a:t>라우팅 · 권한 · 검색 · 작성</a:t>
+            </a:r>
+          </a:p>
+        </p:txBody>
+      </p:sp>
+      <p:sp>
+        <p:nvSpPr>
+          <p:cNvPr id="10" name="theme-title">
+            <a:extLst xmlns:a="http://schemas.openxmlformats.org/drawingml/2006/main">
+              <a:ext uri="{FF2B5EF4-FFF2-40B4-BE49-F238E27FC236}">
+                <a16:creationId xmlns:a16="http://schemas.microsoft.com/office/drawing/2014/main" id="{DBD93488-5F1B-4674-80CA-8AF64A4024CD}"/>
+              </a:ext>
+            </a:extLst>
+          </p:cNvPr>
+          <p:cNvSpPr>
+            <a:spLocks xmlns:a="http://schemas.openxmlformats.org/drawingml/2006/main" noGrp="1"/>
+          </p:cNvSpPr>
+          <p:nvPr/>
+        </p:nvSpPr>
+        <p:spPr>
+          <a:xfrm xmlns:a="http://schemas.openxmlformats.org/drawingml/2006/main">
+            <a:off x="4819650" y="2362200"/>
+            <a:ext cx="2476500" cy="742950"/>
           </a:xfrm>
           <a:prstGeom xmlns:a="http://schemas.openxmlformats.org/drawingml/2006/main" prst="rect">
             <a:avLst/>
@@ -5793,8 +5763,143 @@
           <a:bodyPr xmlns:a="http://schemas.openxmlformats.org/drawingml/2006/main"/>
           <a:lstStyle xmlns:a="http://schemas.openxmlformats.org/drawingml/2006/main"/>
           <a:p xmlns:a="http://schemas.openxmlformats.org/drawingml/2006/main">
-            <a:pPr algn="l">
-              <a:defRPr sz="1725" b="1">
+            <a:pPr algn="ctr">
+              <a:defRPr sz="2175" b="1">
+                <a:solidFill>
+                  <a:srgbClr val="155EEF"/>
+                </a:solidFill>
+                <a:latin typeface="Malgun Gothic"/>
+                <a:ea typeface="Malgun Gothic"/>
+                <a:cs typeface="Malgun Gothic"/>
+              </a:defRPr>
+            </a:pPr>
+            <a:r>
+              <a:rPr sz="2175" b="1">
+                <a:solidFill>
+                  <a:srgbClr val="155EEF"/>
+                </a:solidFill>
+                <a:latin typeface="Malgun Gothic"/>
+                <a:ea typeface="Malgun Gothic"/>
+                <a:cs typeface="Malgun Gothic"/>
+              </a:rPr>
+              <a:t>ABLESTACK</a:t>
+            </a:r>
+          </a:p>
+          <a:p xmlns:a="http://schemas.openxmlformats.org/drawingml/2006/main">
+            <a:pPr algn="ctr">
+              <a:defRPr sz="2175" b="1">
+                <a:solidFill>
+                  <a:srgbClr val="155EEF"/>
+                </a:solidFill>
+                <a:latin typeface="Malgun Gothic"/>
+                <a:ea typeface="Malgun Gothic"/>
+                <a:cs typeface="Malgun Gothic"/>
+              </a:defRPr>
+            </a:pPr>
+            <a:r>
+              <a:rPr sz="2175" b="1">
+                <a:solidFill>
+                  <a:srgbClr val="155EEF"/>
+                </a:solidFill>
+                <a:latin typeface="Malgun Gothic"/>
+                <a:ea typeface="Malgun Gothic"/>
+                <a:cs typeface="Malgun Gothic"/>
+              </a:rPr>
+              <a:t>Theme</a:t>
+            </a:r>
+          </a:p>
+        </p:txBody>
+      </p:sp>
+      <p:sp>
+        <p:nvSpPr>
+          <p:cNvPr id="11" name="theme-copy">
+            <a:extLst xmlns:a="http://schemas.openxmlformats.org/drawingml/2006/main">
+              <a:ext uri="{FF2B5EF4-FFF2-40B4-BE49-F238E27FC236}">
+                <a16:creationId xmlns:a16="http://schemas.microsoft.com/office/drawing/2014/main" id="{C8B03E0C-FD83-420F-AF7B-3F7089B47394}"/>
+              </a:ext>
+            </a:extLst>
+          </p:cNvPr>
+          <p:cNvSpPr>
+            <a:spLocks xmlns:a="http://schemas.openxmlformats.org/drawingml/2006/main" noGrp="1"/>
+          </p:cNvSpPr>
+          <p:nvPr/>
+        </p:nvSpPr>
+        <p:spPr>
+          <a:xfrm xmlns:a="http://schemas.openxmlformats.org/drawingml/2006/main">
+            <a:off x="4819650" y="3257550"/>
+            <a:ext cx="2476500" cy="323850"/>
+          </a:xfrm>
+          <a:prstGeom xmlns:a="http://schemas.openxmlformats.org/drawingml/2006/main" prst="rect">
+            <a:avLst/>
+          </a:prstGeom>
+          <a:noFill xmlns:a="http://schemas.openxmlformats.org/drawingml/2006/main"/>
+          <a:ln xmlns:a="http://schemas.openxmlformats.org/drawingml/2006/main" w="0">
+            <a:noFill/>
+            <a:prstDash val="solid"/>
+          </a:ln>
+        </p:spPr>
+        <p:txBody>
+          <a:bodyPr xmlns:a="http://schemas.openxmlformats.org/drawingml/2006/main"/>
+          <a:lstStyle xmlns:a="http://schemas.openxmlformats.org/drawingml/2006/main"/>
+          <a:p xmlns:a="http://schemas.openxmlformats.org/drawingml/2006/main">
+            <a:pPr algn="ctr">
+              <a:defRPr sz="1350" b="0">
+                <a:solidFill>
+                  <a:srgbClr val="52647D"/>
+                </a:solidFill>
+                <a:latin typeface="Malgun Gothic"/>
+                <a:ea typeface="Malgun Gothic"/>
+                <a:cs typeface="Malgun Gothic"/>
+              </a:defRPr>
+            </a:pPr>
+            <a:r>
+              <a:rPr sz="1350" b="0">
+                <a:solidFill>
+                  <a:srgbClr val="52647D"/>
+                </a:solidFill>
+                <a:latin typeface="Malgun Gothic"/>
+                <a:ea typeface="Malgun Gothic"/>
+                <a:cs typeface="Malgun Gothic"/>
+              </a:rPr>
+              <a:t>LESS · 한글 Cache · 상태 표시</a:t>
+            </a:r>
+          </a:p>
+        </p:txBody>
+      </p:sp>
+      <p:sp>
+        <p:nvSpPr>
+          <p:cNvPr id="12" name="ui-title">
+            <a:extLst xmlns:a="http://schemas.openxmlformats.org/drawingml/2006/main">
+              <a:ext uri="{FF2B5EF4-FFF2-40B4-BE49-F238E27FC236}">
+                <a16:creationId xmlns:a16="http://schemas.microsoft.com/office/drawing/2014/main" id="{37B98FC2-7DDE-45BF-B2BF-AA8E8A3D4DE8}"/>
+              </a:ext>
+            </a:extLst>
+          </p:cNvPr>
+          <p:cNvSpPr>
+            <a:spLocks xmlns:a="http://schemas.openxmlformats.org/drawingml/2006/main" noGrp="1"/>
+          </p:cNvSpPr>
+          <p:nvPr/>
+        </p:nvSpPr>
+        <p:spPr>
+          <a:xfrm xmlns:a="http://schemas.openxmlformats.org/drawingml/2006/main">
+            <a:off x="8572500" y="2533650"/>
+            <a:ext cx="2609850" cy="457200"/>
+          </a:xfrm>
+          <a:prstGeom xmlns:a="http://schemas.openxmlformats.org/drawingml/2006/main" prst="rect">
+            <a:avLst/>
+          </a:prstGeom>
+          <a:noFill xmlns:a="http://schemas.openxmlformats.org/drawingml/2006/main"/>
+          <a:ln xmlns:a="http://schemas.openxmlformats.org/drawingml/2006/main" w="0">
+            <a:noFill/>
+            <a:prstDash val="solid"/>
+          </a:ln>
+        </p:spPr>
+        <p:txBody>
+          <a:bodyPr xmlns:a="http://schemas.openxmlformats.org/drawingml/2006/main"/>
+          <a:lstStyle xmlns:a="http://schemas.openxmlformats.org/drawingml/2006/main"/>
+          <a:p xmlns:a="http://schemas.openxmlformats.org/drawingml/2006/main">
+            <a:pPr algn="ctr">
+              <a:defRPr sz="2250" b="1">
                 <a:solidFill>
                   <a:srgbClr val="078248"/>
                 </a:solidFill>
@@ -5804,7 +5909,7 @@
               </a:defRPr>
             </a:pPr>
             <a:r>
-              <a:rPr sz="1725" b="1">
+              <a:rPr sz="2250" b="1">
                 <a:solidFill>
                   <a:srgbClr val="078248"/>
                 </a:solidFill>
@@ -5812,7 +5917,154 @@
                 <a:ea typeface="Malgun Gothic"/>
                 <a:cs typeface="Malgun Gothic"/>
               </a:rPr>
-              <a:t>다음: 백업 → 테마 적용 → Desktop/Mobile Smoke → 해시 비교</a:t>
+              <a:t>Community UI</a:t>
+            </a:r>
+          </a:p>
+        </p:txBody>
+      </p:sp>
+      <p:sp>
+        <p:nvSpPr>
+          <p:cNvPr id="13" name="ui-copy">
+            <a:extLst xmlns:a="http://schemas.openxmlformats.org/drawingml/2006/main">
+              <a:ext uri="{FF2B5EF4-FFF2-40B4-BE49-F238E27FC236}">
+                <a16:creationId xmlns:a16="http://schemas.microsoft.com/office/drawing/2014/main" id="{3B149A4F-0659-480B-9329-13D669118779}"/>
+              </a:ext>
+            </a:extLst>
+          </p:cNvPr>
+          <p:cNvSpPr>
+            <a:spLocks xmlns:a="http://schemas.openxmlformats.org/drawingml/2006/main" noGrp="1"/>
+          </p:cNvSpPr>
+          <p:nvPr/>
+        </p:nvSpPr>
+        <p:spPr>
+          <a:xfrm xmlns:a="http://schemas.openxmlformats.org/drawingml/2006/main">
+            <a:off x="8572500" y="3105150"/>
+            <a:ext cx="2609850" cy="323850"/>
+          </a:xfrm>
+          <a:prstGeom xmlns:a="http://schemas.openxmlformats.org/drawingml/2006/main" prst="rect">
+            <a:avLst/>
+          </a:prstGeom>
+          <a:noFill xmlns:a="http://schemas.openxmlformats.org/drawingml/2006/main"/>
+          <a:ln xmlns:a="http://schemas.openxmlformats.org/drawingml/2006/main" w="0">
+            <a:noFill/>
+            <a:prstDash val="solid"/>
+          </a:ln>
+        </p:spPr>
+        <p:txBody>
+          <a:bodyPr xmlns:a="http://schemas.openxmlformats.org/drawingml/2006/main"/>
+          <a:lstStyle xmlns:a="http://schemas.openxmlformats.org/drawingml/2006/main"/>
+          <a:p xmlns:a="http://schemas.openxmlformats.org/drawingml/2006/main">
+            <a:pPr algn="ctr">
+              <a:defRPr sz="1500" b="0">
+                <a:solidFill>
+                  <a:srgbClr val="52647D"/>
+                </a:solidFill>
+                <a:latin typeface="Malgun Gothic"/>
+                <a:ea typeface="Malgun Gothic"/>
+                <a:cs typeface="Malgun Gothic"/>
+              </a:defRPr>
+            </a:pPr>
+            <a:r>
+              <a:rPr sz="1500" b="0">
+                <a:solidFill>
+                  <a:srgbClr val="52647D"/>
+                </a:solidFill>
+                <a:latin typeface="Malgun Gothic"/>
+                <a:ea typeface="Malgun Gothic"/>
+                <a:cs typeface="Malgun Gothic"/>
+              </a:rPr>
+              <a:t>Desktop · Mobile · Accessibility</a:t>
+            </a:r>
+          </a:p>
+        </p:txBody>
+      </p:sp>
+      <p:sp>
+        <p:nvSpPr>
+          <p:cNvPr id="14" name="rollback-strip">
+            <a:extLst xmlns:a="http://schemas.openxmlformats.org/drawingml/2006/main">
+              <a:ext uri="{FF2B5EF4-FFF2-40B4-BE49-F238E27FC236}">
+                <a16:creationId xmlns:a16="http://schemas.microsoft.com/office/drawing/2014/main" id="{1329660C-7BA4-47F6-B431-662F73A2D12C}"/>
+              </a:ext>
+            </a:extLst>
+          </p:cNvPr>
+          <p:cNvSpPr>
+            <a:spLocks xmlns:a="http://schemas.openxmlformats.org/drawingml/2006/main" noGrp="1"/>
+          </p:cNvSpPr>
+          <p:nvPr/>
+        </p:nvSpPr>
+        <p:spPr>
+          <a:xfrm xmlns:a="http://schemas.openxmlformats.org/drawingml/2006/main">
+            <a:off x="2381250" y="4781550"/>
+            <a:ext cx="7429500" cy="838200"/>
+          </a:xfrm>
+          <a:prstGeom xmlns:a="http://schemas.openxmlformats.org/drawingml/2006/main" prst="roundRect">
+            <a:avLst>
+              <a:gd name="adj" fmla="val 9091"/>
+            </a:avLst>
+          </a:prstGeom>
+          <a:solidFill xmlns:a="http://schemas.openxmlformats.org/drawingml/2006/main">
+            <a:srgbClr val="FFF6DF"/>
+          </a:solidFill>
+          <a:ln xmlns:a="http://schemas.openxmlformats.org/drawingml/2006/main" w="9525">
+            <a:solidFill>
+              <a:srgbClr val="E4B955"/>
+            </a:solidFill>
+            <a:prstDash val="solid"/>
+          </a:ln>
+        </p:spPr>
+      </p:sp>
+      <p:sp>
+        <p:nvSpPr>
+          <p:cNvPr id="15" name="rollback-copy">
+            <a:extLst xmlns:a="http://schemas.openxmlformats.org/drawingml/2006/main">
+              <a:ext uri="{FF2B5EF4-FFF2-40B4-BE49-F238E27FC236}">
+                <a16:creationId xmlns:a16="http://schemas.microsoft.com/office/drawing/2014/main" id="{29AD88B8-B664-4F55-9D04-7AE25E4B8A59}"/>
+              </a:ext>
+            </a:extLst>
+          </p:cNvPr>
+          <p:cNvSpPr>
+            <a:spLocks xmlns:a="http://schemas.openxmlformats.org/drawingml/2006/main" noGrp="1"/>
+          </p:cNvSpPr>
+          <p:nvPr/>
+        </p:nvSpPr>
+        <p:spPr>
+          <a:xfrm xmlns:a="http://schemas.openxmlformats.org/drawingml/2006/main">
+            <a:off x="2686050" y="4991100"/>
+            <a:ext cx="6819900" cy="400050"/>
+          </a:xfrm>
+          <a:prstGeom xmlns:a="http://schemas.openxmlformats.org/drawingml/2006/main" prst="rect">
+            <a:avLst/>
+          </a:prstGeom>
+          <a:noFill xmlns:a="http://schemas.openxmlformats.org/drawingml/2006/main"/>
+          <a:ln xmlns:a="http://schemas.openxmlformats.org/drawingml/2006/main" w="0">
+            <a:noFill/>
+            <a:prstDash val="solid"/>
+          </a:ln>
+        </p:spPr>
+        <p:txBody>
+          <a:bodyPr xmlns:a="http://schemas.openxmlformats.org/drawingml/2006/main"/>
+          <a:lstStyle xmlns:a="http://schemas.openxmlformats.org/drawingml/2006/main"/>
+          <a:p xmlns:a="http://schemas.openxmlformats.org/drawingml/2006/main">
+            <a:pPr algn="ctr">
+              <a:defRPr sz="1950" b="1">
+                <a:solidFill>
+                  <a:srgbClr val="9A6700"/>
+                </a:solidFill>
+                <a:latin typeface="Malgun Gothic"/>
+                <a:ea typeface="Malgun Gothic"/>
+                <a:cs typeface="Malgun Gothic"/>
+              </a:defRPr>
+            </a:pPr>
+            <a:r>
+              <a:rPr sz="1950" b="1">
+                <a:solidFill>
+                  <a:srgbClr val="9A6700"/>
+                </a:solidFill>
+                <a:latin typeface="Malgun Gothic"/>
+                <a:ea typeface="Malgun Gothic"/>
+                <a:cs typeface="Malgun Gothic"/>
+              </a:rPr>
+              <a:t>장애 시 extension:disable → 기본 Flarum UI 복귀</a:t>
             </a:r>
           </a:p>
         </p:txBody>
@@ -5820,7 +6072,453 @@
     </p:spTree>
     <p:extLst>
       <p:ext uri="{BB962C8B-B14F-4D97-AF65-F5344CB8AC3E}">
-        <p14:creationId xmlns:p14="http://schemas.microsoft.com/office/powerpoint/2010/main" val="522318426"/>
+        <p14:creationId xmlns:p14="http://schemas.microsoft.com/office/powerpoint/2010/main" val="1960291864"/>
+      </p:ext>
+    </p:extLst>
+  </p:cSld>
+</p:sld>
+</file>
+
+<file path=ppt/slides/slide8.xml><?xml version="1.0" encoding="utf-8"?>
+<p:sld xmlns:p="http://schemas.openxmlformats.org/presentationml/2006/main">
+  <p:cSld>
+    <p:bg>
+      <p:bgPr>
+        <a:solidFill xmlns:a="http://schemas.openxmlformats.org/drawingml/2006/main">
+          <a:srgbClr val="FFFFFF"/>
+        </a:solidFill>
+      </p:bgPr>
+    </p:bg>
+    <p:spTree>
+      <p:nvGrpSpPr>
+        <p:cNvPr id="1" name=""/>
+        <p:cNvGrpSpPr/>
+        <p:nvPr/>
+      </p:nvGrpSpPr>
+      <p:grpSpPr>
+        <a:xfrm xmlns:a="http://schemas.openxmlformats.org/drawingml/2006/main"/>
+      </p:grpSpPr>
+      <p:sp>
+        <p:nvSpPr>
+          <p:cNvPr id="8" name="close-kicker">
+            <a:extLst xmlns:a="http://schemas.openxmlformats.org/drawingml/2006/main">
+              <a:ext uri="{FF2B5EF4-FFF2-40B4-BE49-F238E27FC236}">
+                <a16:creationId xmlns:a16="http://schemas.microsoft.com/office/drawing/2014/main" id="{CA02A572-4AC9-4737-B75D-10EC7C22C06C}"/>
+              </a:ext>
+            </a:extLst>
+          </p:cNvPr>
+          <p:cNvSpPr>
+            <a:spLocks xmlns:a="http://schemas.openxmlformats.org/drawingml/2006/main" noGrp="1"/>
+          </p:cNvSpPr>
+          <p:nvPr/>
+        </p:nvSpPr>
+        <p:spPr>
+          <a:xfrm xmlns:a="http://schemas.openxmlformats.org/drawingml/2006/main">
+            <a:off x="457200" y="400050"/>
+            <a:ext cx="6191250" cy="342900"/>
+          </a:xfrm>
+          <a:prstGeom xmlns:a="http://schemas.openxmlformats.org/drawingml/2006/main" prst="rect">
+            <a:avLst/>
+          </a:prstGeom>
+          <a:noFill xmlns:a="http://schemas.openxmlformats.org/drawingml/2006/main"/>
+          <a:ln xmlns:a="http://schemas.openxmlformats.org/drawingml/2006/main" w="0">
+            <a:noFill/>
+            <a:prstDash val="solid"/>
+          </a:ln>
+        </p:spPr>
+        <p:txBody>
+          <a:bodyPr xmlns:a="http://schemas.openxmlformats.org/drawingml/2006/main"/>
+          <a:lstStyle xmlns:a="http://schemas.openxmlformats.org/drawingml/2006/main"/>
+          <a:p xmlns:a="http://schemas.openxmlformats.org/drawingml/2006/main">
+            <a:pPr algn="l">
+              <a:defRPr sz="1500" b="1">
+                <a:solidFill>
+                  <a:srgbClr val="52647D"/>
+                </a:solidFill>
+                <a:latin typeface="Malgun Gothic"/>
+                <a:ea typeface="Malgun Gothic"/>
+                <a:cs typeface="Malgun Gothic"/>
+              </a:defRPr>
+            </a:pPr>
+            <a:r>
+              <a:rPr sz="1500" b="1">
+                <a:solidFill>
+                  <a:srgbClr val="52647D"/>
+                </a:solidFill>
+                <a:latin typeface="Malgun Gothic"/>
+                <a:ea typeface="Malgun Gothic"/>
+                <a:cs typeface="Malgun Gothic"/>
+              </a:rPr>
+              <a:t>ISSUE #73 · IMPLEMENTATION COMPLETE</a:t>
+            </a:r>
+          </a:p>
+        </p:txBody>
+      </p:sp>
+      <p:sp>
+        <p:nvSpPr>
+          <p:cNvPr id="2" name="close-title">
+            <a:extLst xmlns:a="http://schemas.openxmlformats.org/drawingml/2006/main">
+              <a:ext uri="{FF2B5EF4-FFF2-40B4-BE49-F238E27FC236}">
+                <a16:creationId xmlns:a16="http://schemas.microsoft.com/office/drawing/2014/main" id="{F5C154A0-B755-42E9-9F79-7921475EF0CD}"/>
+              </a:ext>
+            </a:extLst>
+          </p:cNvPr>
+          <p:cNvSpPr>
+            <a:spLocks xmlns:a="http://schemas.openxmlformats.org/drawingml/2006/main" noGrp="1"/>
+          </p:cNvSpPr>
+          <p:nvPr/>
+        </p:nvSpPr>
+        <p:spPr>
+          <a:xfrm xmlns:a="http://schemas.openxmlformats.org/drawingml/2006/main">
+            <a:off x="457200" y="1600200"/>
+            <a:ext cx="6667500" cy="1714500"/>
+          </a:xfrm>
+          <a:prstGeom xmlns:a="http://schemas.openxmlformats.org/drawingml/2006/main" prst="rect">
+            <a:avLst/>
+          </a:prstGeom>
+          <a:noFill xmlns:a="http://schemas.openxmlformats.org/drawingml/2006/main"/>
+          <a:ln xmlns:a="http://schemas.openxmlformats.org/drawingml/2006/main" w="0">
+            <a:noFill/>
+            <a:prstDash val="solid"/>
+          </a:ln>
+        </p:spPr>
+        <p:txBody>
+          <a:bodyPr xmlns:a="http://schemas.openxmlformats.org/drawingml/2006/main"/>
+          <a:lstStyle xmlns:a="http://schemas.openxmlformats.org/drawingml/2006/main"/>
+          <a:p xmlns:a="http://schemas.openxmlformats.org/drawingml/2006/main">
+            <a:pPr algn="l">
+              <a:defRPr sz="4800" b="1">
+                <a:solidFill>
+                  <a:srgbClr val="15253E"/>
+                </a:solidFill>
+                <a:latin typeface="Malgun Gothic"/>
+                <a:ea typeface="Malgun Gothic"/>
+                <a:cs typeface="Malgun Gothic"/>
+              </a:defRPr>
+            </a:pPr>
+            <a:r>
+              <a:rPr sz="4800" b="1">
+                <a:solidFill>
+                  <a:srgbClr val="15253E"/>
+                </a:solidFill>
+                <a:latin typeface="Malgun Gothic"/>
+                <a:ea typeface="Malgun Gothic"/>
+                <a:cs typeface="Malgun Gothic"/>
+              </a:rPr>
+              <a:t>운영 적용만</a:t>
+            </a:r>
+          </a:p>
+          <a:p xmlns:a="http://schemas.openxmlformats.org/drawingml/2006/main">
+            <a:pPr algn="l">
+              <a:defRPr sz="4800" b="1">
+                <a:solidFill>
+                  <a:srgbClr val="15253E"/>
+                </a:solidFill>
+                <a:latin typeface="Malgun Gothic"/>
+                <a:ea typeface="Malgun Gothic"/>
+                <a:cs typeface="Malgun Gothic"/>
+              </a:defRPr>
+            </a:pPr>
+            <a:r>
+              <a:rPr sz="4800" b="1">
+                <a:solidFill>
+                  <a:srgbClr val="15253E"/>
+                </a:solidFill>
+                <a:latin typeface="Malgun Gothic"/>
+                <a:ea typeface="Malgun Gothic"/>
+                <a:cs typeface="Malgun Gothic"/>
+              </a:rPr>
+              <a:t>승인하면 됩니다</a:t>
+            </a:r>
+          </a:p>
+        </p:txBody>
+      </p:sp>
+      <p:sp>
+        <p:nvSpPr>
+          <p:cNvPr id="3" name="close-detail">
+            <a:extLst xmlns:a="http://schemas.openxmlformats.org/drawingml/2006/main">
+              <a:ext uri="{FF2B5EF4-FFF2-40B4-BE49-F238E27FC236}">
+                <a16:creationId xmlns:a16="http://schemas.microsoft.com/office/drawing/2014/main" id="{3D772DBD-5B75-4245-9BF5-B2A8A3AB8069}"/>
+              </a:ext>
+            </a:extLst>
+          </p:cNvPr>
+          <p:cNvSpPr>
+            <a:spLocks xmlns:a="http://schemas.openxmlformats.org/drawingml/2006/main" noGrp="1"/>
+          </p:cNvSpPr>
+          <p:nvPr/>
+        </p:nvSpPr>
+        <p:spPr>
+          <a:xfrm xmlns:a="http://schemas.openxmlformats.org/drawingml/2006/main">
+            <a:off x="457200" y="4019550"/>
+            <a:ext cx="7620000" cy="876300"/>
+          </a:xfrm>
+          <a:prstGeom xmlns:a="http://schemas.openxmlformats.org/drawingml/2006/main" prst="rect">
+            <a:avLst/>
+          </a:prstGeom>
+          <a:noFill xmlns:a="http://schemas.openxmlformats.org/drawingml/2006/main"/>
+          <a:ln xmlns:a="http://schemas.openxmlformats.org/drawingml/2006/main" w="0">
+            <a:noFill/>
+            <a:prstDash val="solid"/>
+          </a:ln>
+        </p:spPr>
+        <p:txBody>
+          <a:bodyPr xmlns:a="http://schemas.openxmlformats.org/drawingml/2006/main"/>
+          <a:lstStyle xmlns:a="http://schemas.openxmlformats.org/drawingml/2006/main"/>
+          <a:p xmlns:a="http://schemas.openxmlformats.org/drawingml/2006/main">
+            <a:pPr algn="l">
+              <a:defRPr sz="1950" b="0">
+                <a:solidFill>
+                  <a:srgbClr val="52647D"/>
+                </a:solidFill>
+                <a:latin typeface="Malgun Gothic"/>
+                <a:ea typeface="Malgun Gothic"/>
+                <a:cs typeface="Malgun Gothic"/>
+              </a:defRPr>
+            </a:pPr>
+            <a:r>
+              <a:rPr sz="1950" b="0">
+                <a:solidFill>
+                  <a:srgbClr val="52647D"/>
+                </a:solidFill>
+                <a:latin typeface="Malgun Gothic"/>
+                <a:ea typeface="Malgun Gothic"/>
+                <a:cs typeface="Malgun Gothic"/>
+              </a:rPr>
+              <a:t>WSL 전체 주기 PASS · 태그·프로필 직접 영문 0건</a:t>
+            </a:r>
+          </a:p>
+          <a:p xmlns:a="http://schemas.openxmlformats.org/drawingml/2006/main">
+            <a:pPr algn="l">
+              <a:defRPr sz="1950" b="0">
+                <a:solidFill>
+                  <a:srgbClr val="52647D"/>
+                </a:solidFill>
+                <a:latin typeface="Malgun Gothic"/>
+                <a:ea typeface="Malgun Gothic"/>
+                <a:cs typeface="Malgun Gothic"/>
+              </a:defRPr>
+            </a:pPr>
+            <a:r>
+              <a:rPr sz="1950" b="0">
+                <a:solidFill>
+                  <a:srgbClr val="52647D"/>
+                </a:solidFill>
+                <a:latin typeface="Malgun Gothic"/>
+                <a:ea typeface="Malgun Gothic"/>
+                <a:cs typeface="Malgun Gothic"/>
+              </a:rPr>
+              <a:t>Core·Vendor·DB·운영 Community 변경 없음</a:t>
+            </a:r>
+          </a:p>
+        </p:txBody>
+      </p:sp>
+      <p:sp>
+        <p:nvSpPr>
+          <p:cNvPr id="4" name="close-status">
+            <a:extLst xmlns:a="http://schemas.openxmlformats.org/drawingml/2006/main">
+              <a:ext uri="{FF2B5EF4-FFF2-40B4-BE49-F238E27FC236}">
+                <a16:creationId xmlns:a16="http://schemas.microsoft.com/office/drawing/2014/main" id="{3160D9BC-7118-4FD3-AAD9-2144E7A4C4D7}"/>
+              </a:ext>
+            </a:extLst>
+          </p:cNvPr>
+          <p:cNvSpPr>
+            <a:spLocks xmlns:a="http://schemas.openxmlformats.org/drawingml/2006/main" noGrp="1"/>
+          </p:cNvSpPr>
+          <p:nvPr/>
+        </p:nvSpPr>
+        <p:spPr>
+          <a:xfrm xmlns:a="http://schemas.openxmlformats.org/drawingml/2006/main">
+            <a:off x="8572500" y="1657350"/>
+            <a:ext cx="2952750" cy="2952750"/>
+          </a:xfrm>
+          <a:prstGeom xmlns:a="http://schemas.openxmlformats.org/drawingml/2006/main" prst="roundRect">
+            <a:avLst>
+              <a:gd name="adj" fmla="val 2581"/>
+            </a:avLst>
+          </a:prstGeom>
+          <a:solidFill xmlns:a="http://schemas.openxmlformats.org/drawingml/2006/main">
+            <a:srgbClr val="EAF2FF"/>
+          </a:solidFill>
+          <a:ln xmlns:a="http://schemas.openxmlformats.org/drawingml/2006/main" w="9525">
+            <a:solidFill>
+              <a:srgbClr val="155EEF"/>
+            </a:solidFill>
+            <a:prstDash val="solid"/>
+          </a:ln>
+        </p:spPr>
+      </p:sp>
+      <p:sp>
+        <p:nvSpPr>
+          <p:cNvPr id="5" name="close-go">
+            <a:extLst xmlns:a="http://schemas.openxmlformats.org/drawingml/2006/main">
+              <a:ext uri="{FF2B5EF4-FFF2-40B4-BE49-F238E27FC236}">
+                <a16:creationId xmlns:a16="http://schemas.microsoft.com/office/drawing/2014/main" id="{29CF402C-9E70-4B3D-8FED-4FBB431FACD2}"/>
+              </a:ext>
+            </a:extLst>
+          </p:cNvPr>
+          <p:cNvSpPr>
+            <a:spLocks xmlns:a="http://schemas.openxmlformats.org/drawingml/2006/main" noGrp="1"/>
+          </p:cNvSpPr>
+          <p:nvPr/>
+        </p:nvSpPr>
+        <p:spPr>
+          <a:xfrm xmlns:a="http://schemas.openxmlformats.org/drawingml/2006/main">
+            <a:off x="8896350" y="2305050"/>
+            <a:ext cx="2305050" cy="895350"/>
+          </a:xfrm>
+          <a:prstGeom xmlns:a="http://schemas.openxmlformats.org/drawingml/2006/main" prst="rect">
+            <a:avLst/>
+          </a:prstGeom>
+          <a:noFill xmlns:a="http://schemas.openxmlformats.org/drawingml/2006/main"/>
+          <a:ln xmlns:a="http://schemas.openxmlformats.org/drawingml/2006/main" w="0">
+            <a:noFill/>
+            <a:prstDash val="solid"/>
+          </a:ln>
+        </p:spPr>
+        <p:txBody>
+          <a:bodyPr xmlns:a="http://schemas.openxmlformats.org/drawingml/2006/main"/>
+          <a:lstStyle xmlns:a="http://schemas.openxmlformats.org/drawingml/2006/main"/>
+          <a:p xmlns:a="http://schemas.openxmlformats.org/drawingml/2006/main">
+            <a:pPr algn="ctr">
+              <a:defRPr sz="5100" b="1">
+                <a:solidFill>
+                  <a:srgbClr val="155EEF"/>
+                </a:solidFill>
+                <a:latin typeface="Malgun Gothic"/>
+                <a:ea typeface="Malgun Gothic"/>
+                <a:cs typeface="Malgun Gothic"/>
+              </a:defRPr>
+            </a:pPr>
+            <a:r>
+              <a:rPr sz="5100" b="1">
+                <a:solidFill>
+                  <a:srgbClr val="155EEF"/>
+                </a:solidFill>
+                <a:latin typeface="Malgun Gothic"/>
+                <a:ea typeface="Malgun Gothic"/>
+                <a:cs typeface="Malgun Gothic"/>
+              </a:rPr>
+              <a:t>GO</a:t>
+            </a:r>
+          </a:p>
+        </p:txBody>
+      </p:sp>
+      <p:sp>
+        <p:nvSpPr>
+          <p:cNvPr id="6" name="close-condition">
+            <a:extLst xmlns:a="http://schemas.openxmlformats.org/drawingml/2006/main">
+              <a:ext uri="{FF2B5EF4-FFF2-40B4-BE49-F238E27FC236}">
+                <a16:creationId xmlns:a16="http://schemas.microsoft.com/office/drawing/2014/main" id="{150AAE78-1296-4BC4-BA13-17A897DFABDF}"/>
+              </a:ext>
+            </a:extLst>
+          </p:cNvPr>
+          <p:cNvSpPr>
+            <a:spLocks xmlns:a="http://schemas.openxmlformats.org/drawingml/2006/main" noGrp="1"/>
+          </p:cNvSpPr>
+          <p:nvPr/>
+        </p:nvSpPr>
+        <p:spPr>
+          <a:xfrm xmlns:a="http://schemas.openxmlformats.org/drawingml/2006/main">
+            <a:off x="8877300" y="3390900"/>
+            <a:ext cx="2343150" cy="533400"/>
+          </a:xfrm>
+          <a:prstGeom xmlns:a="http://schemas.openxmlformats.org/drawingml/2006/main" prst="rect">
+            <a:avLst/>
+          </a:prstGeom>
+          <a:noFill xmlns:a="http://schemas.openxmlformats.org/drawingml/2006/main"/>
+          <a:ln xmlns:a="http://schemas.openxmlformats.org/drawingml/2006/main" w="0">
+            <a:noFill/>
+            <a:prstDash val="solid"/>
+          </a:ln>
+        </p:spPr>
+        <p:txBody>
+          <a:bodyPr xmlns:a="http://schemas.openxmlformats.org/drawingml/2006/main"/>
+          <a:lstStyle xmlns:a="http://schemas.openxmlformats.org/drawingml/2006/main"/>
+          <a:p xmlns:a="http://schemas.openxmlformats.org/drawingml/2006/main">
+            <a:pPr algn="ctr">
+              <a:defRPr sz="1650" b="1">
+                <a:solidFill>
+                  <a:srgbClr val="15253E"/>
+                </a:solidFill>
+                <a:latin typeface="Malgun Gothic"/>
+                <a:ea typeface="Malgun Gothic"/>
+                <a:cs typeface="Malgun Gothic"/>
+              </a:defRPr>
+            </a:pPr>
+            <a:r>
+              <a:rPr sz="1650" b="1">
+                <a:solidFill>
+                  <a:srgbClr val="15253E"/>
+                </a:solidFill>
+                <a:latin typeface="Malgun Gothic"/>
+                <a:ea typeface="Malgun Gothic"/>
+                <a:cs typeface="Malgun Gothic"/>
+              </a:rPr>
+              <a:t>운영 반영 승인 대기</a:t>
+            </a:r>
+          </a:p>
+        </p:txBody>
+      </p:sp>
+      <p:sp>
+        <p:nvSpPr>
+          <p:cNvPr id="7" name="close-next">
+            <a:extLst xmlns:a="http://schemas.openxmlformats.org/drawingml/2006/main">
+              <a:ext uri="{FF2B5EF4-FFF2-40B4-BE49-F238E27FC236}">
+                <a16:creationId xmlns:a16="http://schemas.microsoft.com/office/drawing/2014/main" id="{7FF57361-4F99-46E5-8A10-2C2F456C0F78}"/>
+              </a:ext>
+            </a:extLst>
+          </p:cNvPr>
+          <p:cNvSpPr>
+            <a:spLocks xmlns:a="http://schemas.openxmlformats.org/drawingml/2006/main" noGrp="1"/>
+          </p:cNvSpPr>
+          <p:nvPr/>
+        </p:nvSpPr>
+        <p:spPr>
+          <a:xfrm xmlns:a="http://schemas.openxmlformats.org/drawingml/2006/main">
+            <a:off x="457200" y="5562600"/>
+            <a:ext cx="10668000" cy="457200"/>
+          </a:xfrm>
+          <a:prstGeom xmlns:a="http://schemas.openxmlformats.org/drawingml/2006/main" prst="rect">
+            <a:avLst/>
+          </a:prstGeom>
+          <a:noFill xmlns:a="http://schemas.openxmlformats.org/drawingml/2006/main"/>
+          <a:ln xmlns:a="http://schemas.openxmlformats.org/drawingml/2006/main" w="0">
+            <a:noFill/>
+            <a:prstDash val="solid"/>
+          </a:ln>
+        </p:spPr>
+        <p:txBody>
+          <a:bodyPr xmlns:a="http://schemas.openxmlformats.org/drawingml/2006/main"/>
+          <a:lstStyle xmlns:a="http://schemas.openxmlformats.org/drawingml/2006/main"/>
+          <a:p xmlns:a="http://schemas.openxmlformats.org/drawingml/2006/main">
+            <a:pPr algn="l">
+              <a:defRPr sz="1725" b="1">
+                <a:solidFill>
+                  <a:srgbClr val="078248"/>
+                </a:solidFill>
+                <a:latin typeface="Malgun Gothic"/>
+                <a:ea typeface="Malgun Gothic"/>
+                <a:cs typeface="Malgun Gothic"/>
+              </a:defRPr>
+            </a:pPr>
+            <a:r>
+              <a:rPr sz="1725" b="1">
+                <a:solidFill>
+                  <a:srgbClr val="078248"/>
+                </a:solidFill>
+                <a:latin typeface="Malgun Gothic"/>
+                <a:ea typeface="Malgun Gothic"/>
+                <a:cs typeface="Malgun Gothic"/>
+              </a:rPr>
+              <a:t>다음: 백업 → 테마 적용 → Desktop/Mobile Smoke → 해시 비교</a:t>
+            </a:r>
+          </a:p>
+        </p:txBody>
+      </p:sp>
+    </p:spTree>
+    <p:extLst>
+      <p:ext uri="{BB962C8B-B14F-4D97-AF65-F5344CB8AC3E}">
+        <p14:creationId xmlns:p14="http://schemas.microsoft.com/office/powerpoint/2010/main" val="674511522"/>
       </p:ext>
     </p:extLst>
   </p:cSld>

--- a/output/presentation/techflow-community-ui-modernization.pptx
+++ b/output/presentation/techflow-community-ui-modernization.pptx
@@ -2,20 +2,21 @@
 <file path=ppt/presentation.xml><?xml version="1.0" encoding="utf-8"?>
 <p:presentation xmlns:p="http://schemas.openxmlformats.org/presentationml/2006/main">
   <p:sldMasterIdLst>
-    <p:sldMasterId xmlns:r="http://schemas.openxmlformats.org/officeDocument/2006/relationships" id="2147483648" r:id="R2249c91de94c4718"/>
+    <p:sldMasterId xmlns:r="http://schemas.openxmlformats.org/officeDocument/2006/relationships" id="2147483648" r:id="R894d45997f10424e"/>
   </p:sldMasterIdLst>
   <p:notesMasterIdLst>
-    <p:notesMasterId xmlns:r="http://schemas.openxmlformats.org/officeDocument/2006/relationships" r:id="Ra372d30adc4f467c"/>
+    <p:notesMasterId xmlns:r="http://schemas.openxmlformats.org/officeDocument/2006/relationships" r:id="Rc7128d46a0ab4c8e"/>
   </p:notesMasterIdLst>
   <p:sldIdLst>
-    <p:sldId xmlns:r="http://schemas.openxmlformats.org/officeDocument/2006/relationships" id="256" r:id="R59d7cb2e865b4b27"/>
-    <p:sldId xmlns:r="http://schemas.openxmlformats.org/officeDocument/2006/relationships" id="257" r:id="R7d1440888b1540c9"/>
-    <p:sldId xmlns:r="http://schemas.openxmlformats.org/officeDocument/2006/relationships" id="258" r:id="R834efade9b5440bb"/>
-    <p:sldId xmlns:r="http://schemas.openxmlformats.org/officeDocument/2006/relationships" id="259" r:id="Rc344c68fd97a4b66"/>
-    <p:sldId xmlns:r="http://schemas.openxmlformats.org/officeDocument/2006/relationships" id="260" r:id="R73a08b6dc04140eb"/>
-    <p:sldId xmlns:r="http://schemas.openxmlformats.org/officeDocument/2006/relationships" id="261" r:id="Ra434022808fd4667"/>
-    <p:sldId xmlns:r="http://schemas.openxmlformats.org/officeDocument/2006/relationships" id="262" r:id="R0e5b4aab3b25432d"/>
-    <p:sldId xmlns:r="http://schemas.openxmlformats.org/officeDocument/2006/relationships" id="263" r:id="Ra31f8c43250a490b"/>
+    <p:sldId xmlns:r="http://schemas.openxmlformats.org/officeDocument/2006/relationships" id="256" r:id="Rc5274dc3e8cf48cb"/>
+    <p:sldId xmlns:r="http://schemas.openxmlformats.org/officeDocument/2006/relationships" id="257" r:id="Rfdc76ce7e69649bb"/>
+    <p:sldId xmlns:r="http://schemas.openxmlformats.org/officeDocument/2006/relationships" id="258" r:id="Rf7e2f125ed02421c"/>
+    <p:sldId xmlns:r="http://schemas.openxmlformats.org/officeDocument/2006/relationships" id="259" r:id="R99de6d26c24d46c0"/>
+    <p:sldId xmlns:r="http://schemas.openxmlformats.org/officeDocument/2006/relationships" id="260" r:id="R0bbdcdd0611f4c7d"/>
+    <p:sldId xmlns:r="http://schemas.openxmlformats.org/officeDocument/2006/relationships" id="261" r:id="R41357c59c7594ee4"/>
+    <p:sldId xmlns:r="http://schemas.openxmlformats.org/officeDocument/2006/relationships" id="262" r:id="R0456d80c45ea4e59"/>
+    <p:sldId xmlns:r="http://schemas.openxmlformats.org/officeDocument/2006/relationships" id="263" r:id="R3c0c84b5f23f43bd"/>
+    <p:sldId xmlns:r="http://schemas.openxmlformats.org/officeDocument/2006/relationships" id="264" r:id="Rcf30438fe9df4305"/>
   </p:sldIdLst>
   <p:sldSz cx="12192000" cy="6858000"/>
   <p:notesSz cx="6858000" cy="9144000"/>
@@ -1129,6 +1130,96 @@
 </p:notes>
 </file>
 
+<file path=ppt/notesSlides/notesSlide9.xml><?xml version="1.0" encoding="utf-8"?>
+<p:notes xmlns:p="http://schemas.openxmlformats.org/presentationml/2006/main">
+  <p:cSld>
+    <p:spTree>
+      <p:nvGrpSpPr>
+        <p:cNvPr id="1" name=""/>
+        <p:cNvGrpSpPr/>
+        <p:nvPr/>
+      </p:nvGrpSpPr>
+      <p:grpSpPr>
+        <a:xfrm xmlns:a="http://schemas.openxmlformats.org/drawingml/2006/main"/>
+      </p:grpSpPr>
+      <p:sp>
+        <p:nvSpPr>
+          <p:cNvPr id="2" name="Slide Image Placeholder 1"/>
+          <p:cNvSpPr>
+            <a:spLocks xmlns:a="http://schemas.openxmlformats.org/drawingml/2006/main" noGrp="1"/>
+          </p:cNvSpPr>
+          <p:nvPr>
+            <p:ph type="sldImg" idx="0"/>
+          </p:nvPr>
+        </p:nvSpPr>
+        <p:spPr/>
+      </p:sp>
+      <p:sp>
+        <p:nvSpPr>
+          <p:cNvPr id="3" name="Notes Placeholder 2"/>
+          <p:cNvSpPr>
+            <a:spLocks xmlns:a="http://schemas.openxmlformats.org/drawingml/2006/main" noGrp="1"/>
+          </p:cNvSpPr>
+          <p:nvPr>
+            <p:ph type="body" idx="1"/>
+          </p:nvPr>
+        </p:nvSpPr>
+        <p:spPr/>
+        <p:txBody>
+          <a:bodyPr xmlns:a="http://schemas.openxmlformats.org/drawingml/2006/main"/>
+          <a:lstStyle xmlns:a="http://schemas.openxmlformats.org/drawingml/2006/main"/>
+          <a:p xmlns:a="http://schemas.openxmlformats.org/drawingml/2006/main">
+            <a:r>
+              <a:t>[Sources]</a:t>
+            </a:r>
+          </a:p>
+          <a:p xmlns:a="http://schemas.openxmlformats.org/drawingml/2006/main">
+            <a:r>
+              <a:t>- docs/reports/issue-73-community-ui-validation.md</a:t>
+            </a:r>
+          </a:p>
+          <a:p xmlns:a="http://schemas.openxmlformats.org/drawingml/2006/main">
+            <a:r>
+              <a:t>- docs/evidence/issue-73/community-theme-validation.json</a:t>
+            </a:r>
+          </a:p>
+          <a:p xmlns:a="http://schemas.openxmlformats.org/drawingml/2006/main">
+            <a:r>
+              <a:t>- docs/plans/issue-73-community-ui-modernization.md</a:t>
+            </a:r>
+          </a:p>
+          <a:p xmlns:a="http://schemas.openxmlformats.org/drawingml/2006/main">
+            <a:r>
+              <a:t>- docs/runbooks/community-theme-rollout-rollback.md</a:t>
+            </a:r>
+          </a:p>
+        </p:txBody>
+      </p:sp>
+      <p:sp>
+        <p:nvSpPr>
+          <p:cNvPr id="4" name="Slide Number Placeholder 3"/>
+          <p:cNvSpPr>
+            <a:spLocks xmlns:a="http://schemas.openxmlformats.org/drawingml/2006/main" noGrp="1"/>
+          </p:cNvSpPr>
+          <p:nvPr>
+            <p:ph type="sldNum" idx="5"/>
+          </p:nvPr>
+        </p:nvSpPr>
+        <p:spPr/>
+        <p:txBody>
+          <a:bodyPr xmlns:a="http://schemas.openxmlformats.org/drawingml/2006/main"/>
+          <a:lstStyle xmlns:a="http://schemas.openxmlformats.org/drawingml/2006/main"/>
+          <a:p xmlns:a="http://schemas.openxmlformats.org/drawingml/2006/main"/>
+        </p:txBody>
+      </p:sp>
+    </p:spTree>
+  </p:cSld>
+  <p:clrMapOvr>
+    <a:masterClrMapping xmlns:a="http://schemas.openxmlformats.org/drawingml/2006/main"/>
+  </p:clrMapOvr>
+</p:notes>
+</file>
+
 <file path=ppt/slideLayouts/slideLayout1.xml><?xml version="1.0" encoding="utf-8"?>
 <p:sldLayout xmlns:p="http://schemas.openxmlformats.org/presentationml/2006/main" type="title">
   <p:cSld name="Title Slide">
@@ -1167,7 +1258,7 @@
   </p:cSld>
   <p:clrMap bg1="lt1" tx1="dk1" bg2="lt2" tx2="dk2" accent1="accent1" accent2="accent2" accent3="accent3" accent4="accent4" accent5="accent5" accent6="accent6" hlink="hlink" folHlink="folHlink"/>
   <p:sldLayoutIdLst>
-    <p:sldLayoutId xmlns:r="http://schemas.openxmlformats.org/officeDocument/2006/relationships" id="2147483649" r:id="Rd33a35e15ba44d26"/>
+    <p:sldLayoutId xmlns:r="http://schemas.openxmlformats.org/officeDocument/2006/relationships" id="2147483649" r:id="R82bcf45673dc4b11"/>
   </p:sldLayoutIdLst>
   <p:txStyles>
     <p:titleStyle>
@@ -1746,6 +1837,7 @@
           <a:lstStyle xmlns:a="http://schemas.openxmlformats.org/drawingml/2006/main"/>
           <a:p xmlns:a="http://schemas.openxmlformats.org/drawingml/2006/main">
             <a:pPr algn="l">
+              <a:buNone/>
               <a:defRPr sz="1500" b="1">
                 <a:solidFill>
                   <a:srgbClr val="52647D"/>
@@ -1802,6 +1894,7 @@
           <a:lstStyle xmlns:a="http://schemas.openxmlformats.org/drawingml/2006/main"/>
           <a:p xmlns:a="http://schemas.openxmlformats.org/drawingml/2006/main">
             <a:pPr algn="l">
+              <a:buNone/>
               <a:defRPr sz="4650" b="1">
                 <a:solidFill>
                   <a:srgbClr val="15253E"/>
@@ -1825,6 +1918,7 @@
           </a:p>
           <a:p xmlns:a="http://schemas.openxmlformats.org/drawingml/2006/main">
             <a:pPr algn="l">
+              <a:buNone/>
               <a:defRPr sz="4650" b="1">
                 <a:solidFill>
                   <a:srgbClr val="15253E"/>
@@ -1881,6 +1975,7 @@
           <a:lstStyle xmlns:a="http://schemas.openxmlformats.org/drawingml/2006/main"/>
           <a:p xmlns:a="http://schemas.openxmlformats.org/drawingml/2006/main">
             <a:pPr algn="l">
+              <a:buNone/>
               <a:defRPr sz="1950" b="0">
                 <a:solidFill>
                   <a:srgbClr val="52647D"/>
@@ -1941,14 +2036,14 @@
       </p:sp>
       <p:pic>
         <p:nvPicPr>
-          <p:cNvPr id="11" name=""/>
+          <p:cNvPr id="13" name=""/>
           <p:cNvPicPr>
             <a:picLocks xmlns:a="http://schemas.openxmlformats.org/drawingml/2006/main" noChangeAspect="1"/>
           </p:cNvPicPr>
           <p:nvPr/>
         </p:nvPicPr>
         <p:blipFill>
-          <a:blip xmlns:r="http://schemas.openxmlformats.org/officeDocument/2006/relationships" xmlns:a="http://schemas.openxmlformats.org/drawingml/2006/main" r:embed="R17eba5e6d73c4cfa"/>
+          <a:blip xmlns:r="http://schemas.openxmlformats.org/officeDocument/2006/relationships" xmlns:a="http://schemas.openxmlformats.org/drawingml/2006/main" r:embed="R86b7ad43cb194650"/>
           <a:stretch xmlns:a="http://schemas.openxmlformats.org/drawingml/2006/main"/>
         </p:blipFill>
         <p:spPr>
@@ -1996,6 +2091,7 @@
           <a:lstStyle xmlns:a="http://schemas.openxmlformats.org/drawingml/2006/main"/>
           <a:p xmlns:a="http://schemas.openxmlformats.org/drawingml/2006/main">
             <a:pPr algn="l">
+              <a:buNone/>
               <a:defRPr sz="1800" b="1">
                 <a:solidFill>
                   <a:srgbClr val="155EEF"/>
@@ -2081,6 +2177,7 @@
           <a:lstStyle xmlns:a="http://schemas.openxmlformats.org/drawingml/2006/main"/>
           <a:p xmlns:a="http://schemas.openxmlformats.org/drawingml/2006/main">
             <a:pPr algn="l">
+              <a:buNone/>
               <a:defRPr sz="3000" b="1">
                 <a:solidFill>
                   <a:srgbClr val="15253E"/>
@@ -2137,6 +2234,7 @@
           <a:lstStyle xmlns:a="http://schemas.openxmlformats.org/drawingml/2006/main"/>
           <a:p xmlns:a="http://schemas.openxmlformats.org/drawingml/2006/main">
             <a:pPr algn="r">
+              <a:buNone/>
               <a:defRPr sz="1200" b="0">
                 <a:solidFill>
                   <a:srgbClr val="52647D"/>
@@ -2193,6 +2291,7 @@
           <a:lstStyle xmlns:a="http://schemas.openxmlformats.org/drawingml/2006/main"/>
           <a:p xmlns:a="http://schemas.openxmlformats.org/drawingml/2006/main">
             <a:pPr algn="l">
+              <a:buNone/>
               <a:defRPr sz="1500" b="1">
                 <a:solidFill>
                   <a:srgbClr val="52647D"/>
@@ -2249,6 +2348,7 @@
           <a:lstStyle xmlns:a="http://schemas.openxmlformats.org/drawingml/2006/main"/>
           <a:p xmlns:a="http://schemas.openxmlformats.org/drawingml/2006/main">
             <a:pPr algn="l">
+              <a:buNone/>
               <a:defRPr sz="1500" b="1">
                 <a:solidFill>
                   <a:srgbClr val="155EEF"/>
@@ -2274,14 +2374,14 @@
       </p:sp>
       <p:pic>
         <p:nvPicPr>
-          <p:cNvPr id="13" name=""/>
+          <p:cNvPr id="16" name=""/>
           <p:cNvPicPr>
             <a:picLocks xmlns:a="http://schemas.openxmlformats.org/drawingml/2006/main" noChangeAspect="1"/>
           </p:cNvPicPr>
           <p:nvPr/>
         </p:nvPicPr>
         <p:blipFill>
-          <a:blip xmlns:r="http://schemas.openxmlformats.org/officeDocument/2006/relationships" xmlns:a="http://schemas.openxmlformats.org/drawingml/2006/main" r:embed="R0fdb935ae4cc47bc"/>
+          <a:blip xmlns:r="http://schemas.openxmlformats.org/officeDocument/2006/relationships" xmlns:a="http://schemas.openxmlformats.org/drawingml/2006/main" r:embed="R182a1840f8c044ed"/>
           <a:stretch xmlns:a="http://schemas.openxmlformats.org/drawingml/2006/main"/>
         </p:blipFill>
         <p:spPr>
@@ -2298,14 +2398,14 @@
       </p:pic>
       <p:pic>
         <p:nvPicPr>
-          <p:cNvPr id="14" name=""/>
+          <p:cNvPr id="17" name=""/>
           <p:cNvPicPr>
             <a:picLocks xmlns:a="http://schemas.openxmlformats.org/drawingml/2006/main" noChangeAspect="1"/>
           </p:cNvPicPr>
           <p:nvPr/>
         </p:nvPicPr>
         <p:blipFill>
-          <a:blip xmlns:r="http://schemas.openxmlformats.org/officeDocument/2006/relationships" xmlns:a="http://schemas.openxmlformats.org/drawingml/2006/main" r:embed="R30666c339bca4aa3"/>
+          <a:blip xmlns:r="http://schemas.openxmlformats.org/officeDocument/2006/relationships" xmlns:a="http://schemas.openxmlformats.org/drawingml/2006/main" r:embed="Rabaf519f2f47432c"/>
           <a:stretch xmlns:a="http://schemas.openxmlformats.org/drawingml/2006/main"/>
         </p:blipFill>
         <p:spPr>
@@ -2353,6 +2453,7 @@
           <a:lstStyle xmlns:a="http://schemas.openxmlformats.org/drawingml/2006/main"/>
           <a:p xmlns:a="http://schemas.openxmlformats.org/drawingml/2006/main">
             <a:pPr algn="ctr">
+              <a:buNone/>
               <a:defRPr sz="1650" b="0">
                 <a:solidFill>
                   <a:srgbClr val="52647D"/>
@@ -2409,6 +2510,7 @@
           <a:lstStyle xmlns:a="http://schemas.openxmlformats.org/drawingml/2006/main"/>
           <a:p xmlns:a="http://schemas.openxmlformats.org/drawingml/2006/main">
             <a:pPr algn="ctr">
+              <a:buNone/>
               <a:defRPr sz="1425" b="1">
                 <a:solidFill>
                   <a:srgbClr val="15253E"/>
@@ -2494,6 +2596,7 @@
           <a:lstStyle xmlns:a="http://schemas.openxmlformats.org/drawingml/2006/main"/>
           <a:p xmlns:a="http://schemas.openxmlformats.org/drawingml/2006/main">
             <a:pPr algn="l">
+              <a:buNone/>
               <a:defRPr sz="3000" b="1">
                 <a:solidFill>
                   <a:srgbClr val="15253E"/>
@@ -2550,6 +2653,7 @@
           <a:lstStyle xmlns:a="http://schemas.openxmlformats.org/drawingml/2006/main"/>
           <a:p xmlns:a="http://schemas.openxmlformats.org/drawingml/2006/main">
             <a:pPr algn="r">
+              <a:buNone/>
               <a:defRPr sz="1200" b="0">
                 <a:solidFill>
                   <a:srgbClr val="52647D"/>
@@ -2641,6 +2745,7 @@
           <a:lstStyle xmlns:a="http://schemas.openxmlformats.org/drawingml/2006/main"/>
           <a:p xmlns:a="http://schemas.openxmlformats.org/drawingml/2006/main">
             <a:pPr algn="l">
+              <a:buNone/>
               <a:defRPr sz="1950" b="1">
                 <a:solidFill>
                   <a:srgbClr val="15253E"/>
@@ -2697,6 +2802,7 @@
           <a:lstStyle xmlns:a="http://schemas.openxmlformats.org/drawingml/2006/main"/>
           <a:p xmlns:a="http://schemas.openxmlformats.org/drawingml/2006/main">
             <a:pPr algn="l">
+              <a:buNone/>
               <a:defRPr sz="1650" b="0">
                 <a:solidFill>
                   <a:srgbClr val="15253E"/>
@@ -2788,6 +2894,7 @@
           <a:lstStyle xmlns:a="http://schemas.openxmlformats.org/drawingml/2006/main"/>
           <a:p xmlns:a="http://schemas.openxmlformats.org/drawingml/2006/main">
             <a:pPr algn="l">
+              <a:buNone/>
               <a:defRPr sz="1950" b="1">
                 <a:solidFill>
                   <a:srgbClr val="155EEF"/>
@@ -2844,6 +2951,7 @@
           <a:lstStyle xmlns:a="http://schemas.openxmlformats.org/drawingml/2006/main"/>
           <a:p xmlns:a="http://schemas.openxmlformats.org/drawingml/2006/main">
             <a:pPr algn="l">
+              <a:buNone/>
               <a:defRPr sz="1650" b="0">
                 <a:solidFill>
                   <a:srgbClr val="15253E"/>
@@ -2935,6 +3043,7 @@
           <a:lstStyle xmlns:a="http://schemas.openxmlformats.org/drawingml/2006/main"/>
           <a:p xmlns:a="http://schemas.openxmlformats.org/drawingml/2006/main">
             <a:pPr algn="l">
+              <a:buNone/>
               <a:defRPr sz="1950" b="1">
                 <a:solidFill>
                   <a:srgbClr val="9A6700"/>
@@ -2991,6 +3100,7 @@
           <a:lstStyle xmlns:a="http://schemas.openxmlformats.org/drawingml/2006/main"/>
           <a:p xmlns:a="http://schemas.openxmlformats.org/drawingml/2006/main">
             <a:pPr algn="l">
+              <a:buNone/>
               <a:defRPr sz="1650" b="0">
                 <a:solidFill>
                   <a:srgbClr val="15253E"/>
@@ -3082,6 +3192,7 @@
           <a:lstStyle xmlns:a="http://schemas.openxmlformats.org/drawingml/2006/main"/>
           <a:p xmlns:a="http://schemas.openxmlformats.org/drawingml/2006/main">
             <a:pPr algn="l">
+              <a:buNone/>
               <a:defRPr sz="1950" b="1">
                 <a:solidFill>
                   <a:srgbClr val="078248"/>
@@ -3138,6 +3249,7 @@
           <a:lstStyle xmlns:a="http://schemas.openxmlformats.org/drawingml/2006/main"/>
           <a:p xmlns:a="http://schemas.openxmlformats.org/drawingml/2006/main">
             <a:pPr algn="l">
+              <a:buNone/>
               <a:defRPr sz="1650" b="0">
                 <a:solidFill>
                   <a:srgbClr val="15253E"/>
@@ -3223,6 +3335,7 @@
           <a:lstStyle xmlns:a="http://schemas.openxmlformats.org/drawingml/2006/main"/>
           <a:p xmlns:a="http://schemas.openxmlformats.org/drawingml/2006/main">
             <a:pPr algn="l">
+              <a:buNone/>
               <a:defRPr sz="3000" b="1">
                 <a:solidFill>
                   <a:srgbClr val="15253E"/>
@@ -3279,6 +3392,7 @@
           <a:lstStyle xmlns:a="http://schemas.openxmlformats.org/drawingml/2006/main"/>
           <a:p xmlns:a="http://schemas.openxmlformats.org/drawingml/2006/main">
             <a:pPr algn="r">
+              <a:buNone/>
               <a:defRPr sz="1200" b="0">
                 <a:solidFill>
                   <a:srgbClr val="52647D"/>
@@ -3304,14 +3418,14 @@
       </p:sp>
       <p:pic>
         <p:nvPicPr>
-          <p:cNvPr id="11" name=""/>
+          <p:cNvPr id="14" name=""/>
           <p:cNvPicPr>
             <a:picLocks xmlns:a="http://schemas.openxmlformats.org/drawingml/2006/main" noChangeAspect="1"/>
           </p:cNvPicPr>
           <p:nvPr/>
         </p:nvPicPr>
         <p:blipFill>
-          <a:blip xmlns:r="http://schemas.openxmlformats.org/officeDocument/2006/relationships" xmlns:a="http://schemas.openxmlformats.org/drawingml/2006/main" r:embed="R3f9b3303f4e34131"/>
+          <a:blip xmlns:r="http://schemas.openxmlformats.org/officeDocument/2006/relationships" xmlns:a="http://schemas.openxmlformats.org/drawingml/2006/main" r:embed="Rbdb73b5e996c4930"/>
           <a:stretch xmlns:a="http://schemas.openxmlformats.org/drawingml/2006/main"/>
         </p:blipFill>
         <p:spPr>
@@ -3328,14 +3442,14 @@
       </p:pic>
       <p:pic>
         <p:nvPicPr>
-          <p:cNvPr id="12" name=""/>
+          <p:cNvPr id="15" name=""/>
           <p:cNvPicPr>
             <a:picLocks xmlns:a="http://schemas.openxmlformats.org/drawingml/2006/main" noChangeAspect="1"/>
           </p:cNvPicPr>
           <p:nvPr/>
         </p:nvPicPr>
         <p:blipFill>
-          <a:blip xmlns:r="http://schemas.openxmlformats.org/officeDocument/2006/relationships" xmlns:a="http://schemas.openxmlformats.org/drawingml/2006/main" r:embed="R8d4b001ef665408b"/>
+          <a:blip xmlns:r="http://schemas.openxmlformats.org/officeDocument/2006/relationships" xmlns:a="http://schemas.openxmlformats.org/drawingml/2006/main" r:embed="R86147cbd289d40c0"/>
           <a:stretch xmlns:a="http://schemas.openxmlformats.org/drawingml/2006/main"/>
         </p:blipFill>
         <p:spPr>
@@ -3383,6 +3497,7 @@
           <a:lstStyle xmlns:a="http://schemas.openxmlformats.org/drawingml/2006/main"/>
           <a:p xmlns:a="http://schemas.openxmlformats.org/drawingml/2006/main">
             <a:pPr algn="ctr">
+              <a:buNone/>
               <a:defRPr sz="1425" b="1">
                 <a:solidFill>
                   <a:srgbClr val="155EEF"/>
@@ -3474,6 +3589,7 @@
           <a:lstStyle xmlns:a="http://schemas.openxmlformats.org/drawingml/2006/main"/>
           <a:p xmlns:a="http://schemas.openxmlformats.org/drawingml/2006/main">
             <a:pPr algn="ctr">
+              <a:buNone/>
               <a:defRPr sz="1650" b="1">
                 <a:solidFill>
                   <a:srgbClr val="15253E"/>
@@ -3530,6 +3646,7 @@
           <a:lstStyle xmlns:a="http://schemas.openxmlformats.org/drawingml/2006/main"/>
           <a:p xmlns:a="http://schemas.openxmlformats.org/drawingml/2006/main">
             <a:pPr algn="ctr">
+              <a:buNone/>
               <a:defRPr sz="1425" b="0">
                 <a:solidFill>
                   <a:srgbClr val="155EEF"/>
@@ -3615,6 +3732,7 @@
           <a:lstStyle xmlns:a="http://schemas.openxmlformats.org/drawingml/2006/main"/>
           <a:p xmlns:a="http://schemas.openxmlformats.org/drawingml/2006/main">
             <a:pPr algn="l">
+              <a:buNone/>
               <a:defRPr sz="3000" b="1">
                 <a:solidFill>
                   <a:srgbClr val="15253E"/>
@@ -3671,6 +3789,7 @@
           <a:lstStyle xmlns:a="http://schemas.openxmlformats.org/drawingml/2006/main"/>
           <a:p xmlns:a="http://schemas.openxmlformats.org/drawingml/2006/main">
             <a:pPr algn="r">
+              <a:buNone/>
               <a:defRPr sz="1200" b="0">
                 <a:solidFill>
                   <a:srgbClr val="52647D"/>
@@ -3696,14 +3815,14 @@
       </p:sp>
       <p:pic>
         <p:nvPicPr>
-          <p:cNvPr id="13" name=""/>
+          <p:cNvPr id="15" name=""/>
           <p:cNvPicPr>
             <a:picLocks xmlns:a="http://schemas.openxmlformats.org/drawingml/2006/main" noChangeAspect="1"/>
           </p:cNvPicPr>
           <p:nvPr/>
         </p:nvPicPr>
         <p:blipFill>
-          <a:blip xmlns:r="http://schemas.openxmlformats.org/officeDocument/2006/relationships" xmlns:a="http://schemas.openxmlformats.org/drawingml/2006/main" r:embed="R38f2a52255ae421c"/>
+          <a:blip xmlns:r="http://schemas.openxmlformats.org/officeDocument/2006/relationships" xmlns:a="http://schemas.openxmlformats.org/drawingml/2006/main" r:embed="Rf345b42927a94ffa"/>
           <a:stretch xmlns:a="http://schemas.openxmlformats.org/drawingml/2006/main"/>
         </p:blipFill>
         <p:spPr>
@@ -3786,6 +3905,7 @@
           <a:lstStyle xmlns:a="http://schemas.openxmlformats.org/drawingml/2006/main"/>
           <a:p xmlns:a="http://schemas.openxmlformats.org/drawingml/2006/main">
             <a:pPr algn="ctr">
+              <a:buNone/>
               <a:defRPr sz="2025" b="1">
                 <a:solidFill>
                   <a:srgbClr val="155EEF"/>
@@ -3842,6 +3962,7 @@
           <a:lstStyle xmlns:a="http://schemas.openxmlformats.org/drawingml/2006/main"/>
           <a:p xmlns:a="http://schemas.openxmlformats.org/drawingml/2006/main">
             <a:pPr algn="ctr">
+              <a:buNone/>
               <a:defRPr sz="1500" b="0">
                 <a:solidFill>
                   <a:srgbClr val="15253E"/>
@@ -3865,6 +3986,7 @@
           </a:p>
           <a:p xmlns:a="http://schemas.openxmlformats.org/drawingml/2006/main">
             <a:pPr algn="ctr">
+              <a:buNone/>
               <a:defRPr sz="1500" b="0">
                 <a:solidFill>
                   <a:srgbClr val="15253E"/>
@@ -3888,6 +4010,7 @@
           </a:p>
           <a:p xmlns:a="http://schemas.openxmlformats.org/drawingml/2006/main">
             <a:pPr algn="ctr">
+              <a:buNone/>
               <a:defRPr sz="1500" b="0">
                 <a:solidFill>
                   <a:srgbClr val="15253E"/>
@@ -3979,6 +4102,7 @@
           <a:lstStyle xmlns:a="http://schemas.openxmlformats.org/drawingml/2006/main"/>
           <a:p xmlns:a="http://schemas.openxmlformats.org/drawingml/2006/main">
             <a:pPr algn="ctr">
+              <a:buNone/>
               <a:defRPr sz="2025" b="1">
                 <a:solidFill>
                   <a:srgbClr val="078248"/>
@@ -4035,6 +4159,7 @@
           <a:lstStyle xmlns:a="http://schemas.openxmlformats.org/drawingml/2006/main"/>
           <a:p xmlns:a="http://schemas.openxmlformats.org/drawingml/2006/main">
             <a:pPr algn="ctr">
+              <a:buNone/>
               <a:defRPr sz="1500" b="0">
                 <a:solidFill>
                   <a:srgbClr val="15253E"/>
@@ -4058,6 +4183,7 @@
           </a:p>
           <a:p xmlns:a="http://schemas.openxmlformats.org/drawingml/2006/main">
             <a:pPr algn="ctr">
+              <a:buNone/>
               <a:defRPr sz="1500" b="0">
                 <a:solidFill>
                   <a:srgbClr val="15253E"/>
@@ -4081,6 +4207,7 @@
           </a:p>
           <a:p xmlns:a="http://schemas.openxmlformats.org/drawingml/2006/main">
             <a:pPr algn="ctr">
+              <a:buNone/>
               <a:defRPr sz="1500" b="0">
                 <a:solidFill>
                   <a:srgbClr val="15253E"/>
@@ -4137,6 +4264,7 @@
           <a:lstStyle xmlns:a="http://schemas.openxmlformats.org/drawingml/2006/main"/>
           <a:p xmlns:a="http://schemas.openxmlformats.org/drawingml/2006/main">
             <a:pPr algn="ctr">
+              <a:buNone/>
               <a:defRPr sz="1500" b="1">
                 <a:solidFill>
                   <a:srgbClr val="155EEF"/>
@@ -4191,10 +4319,10 @@
       </p:grpSpPr>
       <p:sp>
         <p:nvSpPr>
-          <p:cNvPr id="20" name="title-6">
-            <a:extLst xmlns:a="http://schemas.openxmlformats.org/drawingml/2006/main">
-              <a:ext uri="{FF2B5EF4-FFF2-40B4-BE49-F238E27FC236}">
-                <a16:creationId xmlns:a16="http://schemas.microsoft.com/office/drawing/2014/main" id="{A1988E7D-4FE9-4900-8EFF-3040E5D0CEDA}"/>
+          <p:cNvPr id="11" name="title-5">
+            <a:extLst xmlns:a="http://schemas.openxmlformats.org/drawingml/2006/main">
+              <a:ext uri="{FF2B5EF4-FFF2-40B4-BE49-F238E27FC236}">
+                <a16:creationId xmlns:a16="http://schemas.microsoft.com/office/drawing/2014/main" id="{15B4B5EF-39AC-41BD-860C-4B8A8FDBAAA7}"/>
               </a:ext>
             </a:extLst>
           </p:cNvPr>
@@ -4222,6 +4350,7 @@
           <a:lstStyle xmlns:a="http://schemas.openxmlformats.org/drawingml/2006/main"/>
           <a:p xmlns:a="http://schemas.openxmlformats.org/drawingml/2006/main">
             <a:pPr algn="l">
+              <a:buNone/>
               <a:defRPr sz="3000" b="1">
                 <a:solidFill>
                   <a:srgbClr val="15253E"/>
@@ -4240,17 +4369,17 @@
                 <a:ea typeface="Malgun Gothic"/>
                 <a:cs typeface="Malgun Gothic"/>
               </a:rPr>
-              <a:t>활성화와 롤백에도 콘텐츠는 그대로였습니다</a:t>
-            </a:r>
-          </a:p>
-        </p:txBody>
-      </p:sp>
-      <p:sp>
-        <p:nvSpPr>
-          <p:cNvPr id="2" name="page-6">
-            <a:extLst xmlns:a="http://schemas.openxmlformats.org/drawingml/2006/main">
-              <a:ext uri="{FF2B5EF4-FFF2-40B4-BE49-F238E27FC236}">
-                <a16:creationId xmlns:a16="http://schemas.microsoft.com/office/drawing/2014/main" id="{BE3DDE7B-FA52-43C9-AAE2-8928904D0FEC}"/>
+              <a:t>더보기 메뉴와 설정·보안 화면을 같은 체계로 맞췄습니다</a:t>
+            </a:r>
+          </a:p>
+        </p:txBody>
+      </p:sp>
+      <p:sp>
+        <p:nvSpPr>
+          <p:cNvPr id="2" name="page-5">
+            <a:extLst xmlns:a="http://schemas.openxmlformats.org/drawingml/2006/main">
+              <a:ext uri="{FF2B5EF4-FFF2-40B4-BE49-F238E27FC236}">
+                <a16:creationId xmlns:a16="http://schemas.microsoft.com/office/drawing/2014/main" id="{E85E0CD4-3FBE-4910-B306-0119C668BAFC}"/>
               </a:ext>
             </a:extLst>
           </p:cNvPr>
@@ -4278,6 +4407,7 @@
           <a:lstStyle xmlns:a="http://schemas.openxmlformats.org/drawingml/2006/main"/>
           <a:p xmlns:a="http://schemas.openxmlformats.org/drawingml/2006/main">
             <a:pPr algn="r">
+              <a:buNone/>
               <a:defRPr sz="1200" b="0">
                 <a:solidFill>
                   <a:srgbClr val="52647D"/>
@@ -4301,310 +4431,50 @@
           </a:p>
         </p:txBody>
       </p:sp>
-      <p:sp>
-        <p:nvSpPr>
-          <p:cNvPr id="3" name="arrow-0">
-            <a:extLst xmlns:a="http://schemas.openxmlformats.org/drawingml/2006/main">
-              <a:ext uri="{FF2B5EF4-FFF2-40B4-BE49-F238E27FC236}">
-                <a16:creationId xmlns:a16="http://schemas.microsoft.com/office/drawing/2014/main" id="{7B834A7A-209D-4491-899C-10F6F9E68B2E}"/>
-              </a:ext>
-            </a:extLst>
-          </p:cNvPr>
-          <p:cNvSpPr>
-            <a:spLocks xmlns:a="http://schemas.openxmlformats.org/drawingml/2006/main" noGrp="1"/>
-          </p:cNvSpPr>
-          <p:nvPr/>
-        </p:nvSpPr>
-        <p:spPr>
-          <a:xfrm xmlns:a="http://schemas.openxmlformats.org/drawingml/2006/main">
-            <a:off x="2876550" y="2809875"/>
-            <a:ext cx="552450" cy="495300"/>
-          </a:xfrm>
-          <a:prstGeom xmlns:a="http://schemas.openxmlformats.org/drawingml/2006/main" prst="rect">
-            <a:avLst/>
-          </a:prstGeom>
-          <a:noFill xmlns:a="http://schemas.openxmlformats.org/drawingml/2006/main"/>
-          <a:ln xmlns:a="http://schemas.openxmlformats.org/drawingml/2006/main" w="0">
-            <a:noFill/>
-            <a:prstDash val="solid"/>
-          </a:ln>
-        </p:spPr>
-        <p:txBody>
-          <a:bodyPr xmlns:a="http://schemas.openxmlformats.org/drawingml/2006/main"/>
-          <a:lstStyle xmlns:a="http://schemas.openxmlformats.org/drawingml/2006/main"/>
-          <a:p xmlns:a="http://schemas.openxmlformats.org/drawingml/2006/main">
-            <a:pPr algn="ctr">
-              <a:defRPr sz="2400" b="1">
-                <a:solidFill>
-                  <a:srgbClr val="52647D"/>
-                </a:solidFill>
-                <a:latin typeface="Malgun Gothic"/>
-                <a:ea typeface="Malgun Gothic"/>
-                <a:cs typeface="Malgun Gothic"/>
-              </a:defRPr>
-            </a:pPr>
-            <a:r>
-              <a:rPr sz="2400" b="1">
-                <a:solidFill>
-                  <a:srgbClr val="52647D"/>
-                </a:solidFill>
-                <a:latin typeface="Malgun Gothic"/>
-                <a:ea typeface="Malgun Gothic"/>
-                <a:cs typeface="Malgun Gothic"/>
-              </a:rPr>
-              <a:t>→</a:t>
-            </a:r>
-          </a:p>
-        </p:txBody>
-      </p:sp>
-      <p:sp>
-        <p:nvSpPr>
-          <p:cNvPr id="4" name="phase-0">
-            <a:extLst xmlns:a="http://schemas.openxmlformats.org/drawingml/2006/main">
-              <a:ext uri="{FF2B5EF4-FFF2-40B4-BE49-F238E27FC236}">
-                <a16:creationId xmlns:a16="http://schemas.microsoft.com/office/drawing/2014/main" id="{739F78CD-D657-4918-A9FA-4B164DC81EF7}"/>
-              </a:ext>
-            </a:extLst>
-          </p:cNvPr>
-          <p:cNvSpPr>
-            <a:spLocks xmlns:a="http://schemas.openxmlformats.org/drawingml/2006/main" noGrp="1"/>
-          </p:cNvSpPr>
-          <p:nvPr/>
-        </p:nvSpPr>
-        <p:spPr>
-          <a:xfrm xmlns:a="http://schemas.openxmlformats.org/drawingml/2006/main">
-            <a:off x="666750" y="2247900"/>
-            <a:ext cx="2171700" cy="1562100"/>
+      <p:pic>
+        <p:nvPicPr>
+          <p:cNvPr id="15" name=""/>
+          <p:cNvPicPr>
+            <a:picLocks xmlns:a="http://schemas.openxmlformats.org/drawingml/2006/main" noChangeAspect="1"/>
+          </p:cNvPicPr>
+          <p:nvPr/>
+        </p:nvPicPr>
+        <p:blipFill>
+          <a:blip xmlns:r="http://schemas.openxmlformats.org/officeDocument/2006/relationships" xmlns:a="http://schemas.openxmlformats.org/drawingml/2006/main" r:embed="R8955379a17b1478e"/>
+          <a:stretch xmlns:a="http://schemas.openxmlformats.org/drawingml/2006/main"/>
+        </p:blipFill>
+        <p:spPr>
+          <a:xfrm xmlns:a="http://schemas.openxmlformats.org/drawingml/2006/main" flipH="0" flipV="0">
+            <a:off x="457200" y="1314450"/>
+            <a:ext cx="7239000" cy="4524375"/>
+          </a:xfrm>
+          <a:prstGeom xmlns:a="http://schemas.openxmlformats.org/drawingml/2006/main" prst="roundRect">
+            <a:avLst/>
+          </a:prstGeom>
+        </p:spPr>
+      </p:pic>
+      <p:sp>
+        <p:nvSpPr>
+          <p:cNvPr id="4" name="profile-result">
+            <a:extLst xmlns:a="http://schemas.openxmlformats.org/drawingml/2006/main">
+              <a:ext uri="{FF2B5EF4-FFF2-40B4-BE49-F238E27FC236}">
+                <a16:creationId xmlns:a16="http://schemas.microsoft.com/office/drawing/2014/main" id="{F2315AED-2B85-41E1-A5D8-A0DDEE6A5244}"/>
+              </a:ext>
+            </a:extLst>
+          </p:cNvPr>
+          <p:cNvSpPr>
+            <a:spLocks xmlns:a="http://schemas.openxmlformats.org/drawingml/2006/main" noGrp="1"/>
+          </p:cNvSpPr>
+          <p:nvPr/>
+        </p:nvSpPr>
+        <p:spPr>
+          <a:xfrm xmlns:a="http://schemas.openxmlformats.org/drawingml/2006/main">
+            <a:off x="8096250" y="1485900"/>
+            <a:ext cx="3333750" cy="1790700"/>
           </a:xfrm>
           <a:prstGeom xmlns:a="http://schemas.openxmlformats.org/drawingml/2006/main" prst="roundRect">
             <a:avLst>
-              <a:gd name="adj" fmla="val 4878"/>
-            </a:avLst>
-          </a:prstGeom>
-          <a:solidFill xmlns:a="http://schemas.openxmlformats.org/drawingml/2006/main">
-            <a:srgbClr val="F3F7FC"/>
-          </a:solidFill>
-          <a:ln xmlns:a="http://schemas.openxmlformats.org/drawingml/2006/main" w="9525">
-            <a:solidFill>
-              <a:srgbClr val="D5E1F1"/>
-            </a:solidFill>
-            <a:prstDash val="solid"/>
-          </a:ln>
-        </p:spPr>
-      </p:sp>
-      <p:sp>
-        <p:nvSpPr>
-          <p:cNvPr id="5" name="phase-label-0">
-            <a:extLst xmlns:a="http://schemas.openxmlformats.org/drawingml/2006/main">
-              <a:ext uri="{FF2B5EF4-FFF2-40B4-BE49-F238E27FC236}">
-                <a16:creationId xmlns:a16="http://schemas.microsoft.com/office/drawing/2014/main" id="{63AECE67-3CC4-4DA1-AF5E-C93DC0D47574}"/>
-              </a:ext>
-            </a:extLst>
-          </p:cNvPr>
-          <p:cNvSpPr>
-            <a:spLocks xmlns:a="http://schemas.openxmlformats.org/drawingml/2006/main" noGrp="1"/>
-          </p:cNvSpPr>
-          <p:nvPr/>
-        </p:nvSpPr>
-        <p:spPr>
-          <a:xfrm xmlns:a="http://schemas.openxmlformats.org/drawingml/2006/main">
-            <a:off x="857250" y="2552700"/>
-            <a:ext cx="1790700" cy="704850"/>
-          </a:xfrm>
-          <a:prstGeom xmlns:a="http://schemas.openxmlformats.org/drawingml/2006/main" prst="rect">
-            <a:avLst/>
-          </a:prstGeom>
-          <a:noFill xmlns:a="http://schemas.openxmlformats.org/drawingml/2006/main"/>
-          <a:ln xmlns:a="http://schemas.openxmlformats.org/drawingml/2006/main" w="0">
-            <a:noFill/>
-            <a:prstDash val="solid"/>
-          </a:ln>
-        </p:spPr>
-        <p:txBody>
-          <a:bodyPr xmlns:a="http://schemas.openxmlformats.org/drawingml/2006/main"/>
-          <a:lstStyle xmlns:a="http://schemas.openxmlformats.org/drawingml/2006/main"/>
-          <a:p xmlns:a="http://schemas.openxmlformats.org/drawingml/2006/main">
-            <a:pPr algn="ctr">
-              <a:defRPr sz="1950" b="1">
-                <a:solidFill>
-                  <a:srgbClr val="15253E"/>
-                </a:solidFill>
-                <a:latin typeface="Malgun Gothic"/>
-                <a:ea typeface="Malgun Gothic"/>
-                <a:cs typeface="Malgun Gothic"/>
-              </a:defRPr>
-            </a:pPr>
-            <a:r>
-              <a:rPr sz="1950" b="1">
-                <a:solidFill>
-                  <a:srgbClr val="15253E"/>
-                </a:solidFill>
-                <a:latin typeface="Malgun Gothic"/>
-                <a:ea typeface="Malgun Gothic"/>
-                <a:cs typeface="Malgun Gothic"/>
-              </a:rPr>
-              <a:t>기준선</a:t>
-            </a:r>
-          </a:p>
-          <a:p xmlns:a="http://schemas.openxmlformats.org/drawingml/2006/main">
-            <a:pPr algn="ctr">
-              <a:defRPr sz="1950" b="1">
-                <a:solidFill>
-                  <a:srgbClr val="15253E"/>
-                </a:solidFill>
-                <a:latin typeface="Malgun Gothic"/>
-                <a:ea typeface="Malgun Gothic"/>
-                <a:cs typeface="Malgun Gothic"/>
-              </a:defRPr>
-            </a:pPr>
-            <a:r>
-              <a:rPr sz="1950" b="1">
-                <a:solidFill>
-                  <a:srgbClr val="15253E"/>
-                </a:solidFill>
-                <a:latin typeface="Malgun Gothic"/>
-                <a:ea typeface="Malgun Gothic"/>
-                <a:cs typeface="Malgun Gothic"/>
-              </a:rPr>
-              <a:t>Disabled</a:t>
-            </a:r>
-          </a:p>
-        </p:txBody>
-      </p:sp>
-      <p:sp>
-        <p:nvSpPr>
-          <p:cNvPr id="6" name="phase-http-0">
-            <a:extLst xmlns:a="http://schemas.openxmlformats.org/drawingml/2006/main">
-              <a:ext uri="{FF2B5EF4-FFF2-40B4-BE49-F238E27FC236}">
-                <a16:creationId xmlns:a16="http://schemas.microsoft.com/office/drawing/2014/main" id="{3411BCDF-FFDB-4D8F-ABD4-9DF41B03F7D6}"/>
-              </a:ext>
-            </a:extLst>
-          </p:cNvPr>
-          <p:cNvSpPr>
-            <a:spLocks xmlns:a="http://schemas.openxmlformats.org/drawingml/2006/main" noGrp="1"/>
-          </p:cNvSpPr>
-          <p:nvPr/>
-        </p:nvSpPr>
-        <p:spPr>
-          <a:xfrm xmlns:a="http://schemas.openxmlformats.org/drawingml/2006/main">
-            <a:off x="857250" y="3333750"/>
-            <a:ext cx="1790700" cy="285750"/>
-          </a:xfrm>
-          <a:prstGeom xmlns:a="http://schemas.openxmlformats.org/drawingml/2006/main" prst="rect">
-            <a:avLst/>
-          </a:prstGeom>
-          <a:noFill xmlns:a="http://schemas.openxmlformats.org/drawingml/2006/main"/>
-          <a:ln xmlns:a="http://schemas.openxmlformats.org/drawingml/2006/main" w="0">
-            <a:noFill/>
-            <a:prstDash val="solid"/>
-          </a:ln>
-        </p:spPr>
-        <p:txBody>
-          <a:bodyPr xmlns:a="http://schemas.openxmlformats.org/drawingml/2006/main"/>
-          <a:lstStyle xmlns:a="http://schemas.openxmlformats.org/drawingml/2006/main"/>
-          <a:p xmlns:a="http://schemas.openxmlformats.org/drawingml/2006/main">
-            <a:pPr algn="ctr">
-              <a:defRPr sz="1350" b="0">
-                <a:solidFill>
-                  <a:srgbClr val="52647D"/>
-                </a:solidFill>
-                <a:latin typeface="Malgun Gothic"/>
-                <a:ea typeface="Malgun Gothic"/>
-                <a:cs typeface="Malgun Gothic"/>
-              </a:defRPr>
-            </a:pPr>
-            <a:r>
-              <a:rPr sz="1350" b="0">
-                <a:solidFill>
-                  <a:srgbClr val="52647D"/>
-                </a:solidFill>
-                <a:latin typeface="Malgun Gothic"/>
-                <a:ea typeface="Malgun Gothic"/>
-                <a:cs typeface="Malgun Gothic"/>
-              </a:rPr>
-              <a:t>HTTP 200</a:t>
-            </a:r>
-          </a:p>
-        </p:txBody>
-      </p:sp>
-      <p:sp>
-        <p:nvSpPr>
-          <p:cNvPr id="7" name="arrow-1">
-            <a:extLst xmlns:a="http://schemas.openxmlformats.org/drawingml/2006/main">
-              <a:ext uri="{FF2B5EF4-FFF2-40B4-BE49-F238E27FC236}">
-                <a16:creationId xmlns:a16="http://schemas.microsoft.com/office/drawing/2014/main" id="{5C52BED4-5B33-4F1F-8B4C-1420869A3755}"/>
-              </a:ext>
-            </a:extLst>
-          </p:cNvPr>
-          <p:cNvSpPr>
-            <a:spLocks xmlns:a="http://schemas.openxmlformats.org/drawingml/2006/main" noGrp="1"/>
-          </p:cNvSpPr>
-          <p:nvPr/>
-        </p:nvSpPr>
-        <p:spPr>
-          <a:xfrm xmlns:a="http://schemas.openxmlformats.org/drawingml/2006/main">
-            <a:off x="5686425" y="2809875"/>
-            <a:ext cx="552450" cy="495300"/>
-          </a:xfrm>
-          <a:prstGeom xmlns:a="http://schemas.openxmlformats.org/drawingml/2006/main" prst="rect">
-            <a:avLst/>
-          </a:prstGeom>
-          <a:noFill xmlns:a="http://schemas.openxmlformats.org/drawingml/2006/main"/>
-          <a:ln xmlns:a="http://schemas.openxmlformats.org/drawingml/2006/main" w="0">
-            <a:noFill/>
-            <a:prstDash val="solid"/>
-          </a:ln>
-        </p:spPr>
-        <p:txBody>
-          <a:bodyPr xmlns:a="http://schemas.openxmlformats.org/drawingml/2006/main"/>
-          <a:lstStyle xmlns:a="http://schemas.openxmlformats.org/drawingml/2006/main"/>
-          <a:p xmlns:a="http://schemas.openxmlformats.org/drawingml/2006/main">
-            <a:pPr algn="ctr">
-              <a:defRPr sz="2400" b="1">
-                <a:solidFill>
-                  <a:srgbClr val="52647D"/>
-                </a:solidFill>
-                <a:latin typeface="Malgun Gothic"/>
-                <a:ea typeface="Malgun Gothic"/>
-                <a:cs typeface="Malgun Gothic"/>
-              </a:defRPr>
-            </a:pPr>
-            <a:r>
-              <a:rPr sz="2400" b="1">
-                <a:solidFill>
-                  <a:srgbClr val="52647D"/>
-                </a:solidFill>
-                <a:latin typeface="Malgun Gothic"/>
-                <a:ea typeface="Malgun Gothic"/>
-                <a:cs typeface="Malgun Gothic"/>
-              </a:rPr>
-              <a:t>→</a:t>
-            </a:r>
-          </a:p>
-        </p:txBody>
-      </p:sp>
-      <p:sp>
-        <p:nvSpPr>
-          <p:cNvPr id="8" name="phase-1">
-            <a:extLst xmlns:a="http://schemas.openxmlformats.org/drawingml/2006/main">
-              <a:ext uri="{FF2B5EF4-FFF2-40B4-BE49-F238E27FC236}">
-                <a16:creationId xmlns:a16="http://schemas.microsoft.com/office/drawing/2014/main" id="{CCC5DC3E-EAAF-47A7-BE20-81A03A0A0384}"/>
-              </a:ext>
-            </a:extLst>
-          </p:cNvPr>
-          <p:cNvSpPr>
-            <a:spLocks xmlns:a="http://schemas.openxmlformats.org/drawingml/2006/main" noGrp="1"/>
-          </p:cNvSpPr>
-          <p:nvPr/>
-        </p:nvSpPr>
-        <p:spPr>
-          <a:xfrm xmlns:a="http://schemas.openxmlformats.org/drawingml/2006/main">
-            <a:off x="3476625" y="2247900"/>
-            <a:ext cx="2171700" cy="1562100"/>
-          </a:xfrm>
-          <a:prstGeom xmlns:a="http://schemas.openxmlformats.org/drawingml/2006/main" prst="roundRect">
-            <a:avLst>
-              <a:gd name="adj" fmla="val 4878"/>
+              <a:gd name="adj" fmla="val 4255"/>
             </a:avLst>
           </a:prstGeom>
           <a:solidFill xmlns:a="http://schemas.openxmlformats.org/drawingml/2006/main">
@@ -4620,22 +4490,22 @@
       </p:sp>
       <p:sp>
         <p:nvSpPr>
-          <p:cNvPr id="9" name="phase-label-1">
-            <a:extLst xmlns:a="http://schemas.openxmlformats.org/drawingml/2006/main">
-              <a:ext uri="{FF2B5EF4-FFF2-40B4-BE49-F238E27FC236}">
-                <a16:creationId xmlns:a16="http://schemas.microsoft.com/office/drawing/2014/main" id="{703B871E-E432-4AAB-8D50-6BCBAF062755}"/>
-              </a:ext>
-            </a:extLst>
-          </p:cNvPr>
-          <p:cNvSpPr>
-            <a:spLocks xmlns:a="http://schemas.openxmlformats.org/drawingml/2006/main" noGrp="1"/>
-          </p:cNvSpPr>
-          <p:nvPr/>
-        </p:nvSpPr>
-        <p:spPr>
-          <a:xfrm xmlns:a="http://schemas.openxmlformats.org/drawingml/2006/main">
-            <a:off x="3667125" y="2552700"/>
-            <a:ext cx="1790700" cy="704850"/>
+          <p:cNvPr id="5" name="profile-title">
+            <a:extLst xmlns:a="http://schemas.openxmlformats.org/drawingml/2006/main">
+              <a:ext uri="{FF2B5EF4-FFF2-40B4-BE49-F238E27FC236}">
+                <a16:creationId xmlns:a16="http://schemas.microsoft.com/office/drawing/2014/main" id="{F20E61C3-61BF-46BF-8C05-62259B784B9C}"/>
+              </a:ext>
+            </a:extLst>
+          </p:cNvPr>
+          <p:cNvSpPr>
+            <a:spLocks xmlns:a="http://schemas.openxmlformats.org/drawingml/2006/main" noGrp="1"/>
+          </p:cNvSpPr>
+          <p:nvPr/>
+        </p:nvSpPr>
+        <p:spPr>
+          <a:xfrm xmlns:a="http://schemas.openxmlformats.org/drawingml/2006/main">
+            <a:off x="8382000" y="1752600"/>
+            <a:ext cx="2762250" cy="361950"/>
           </a:xfrm>
           <a:prstGeom xmlns:a="http://schemas.openxmlformats.org/drawingml/2006/main" prst="rect">
             <a:avLst/>
@@ -4651,7 +4521,8 @@
           <a:lstStyle xmlns:a="http://schemas.openxmlformats.org/drawingml/2006/main"/>
           <a:p xmlns:a="http://schemas.openxmlformats.org/drawingml/2006/main">
             <a:pPr algn="ctr">
-              <a:defRPr sz="1950" b="1">
+              <a:buNone/>
+              <a:defRPr sz="2025" b="1">
                 <a:solidFill>
                   <a:srgbClr val="155EEF"/>
                 </a:solidFill>
@@ -4661,7 +4532,7 @@
               </a:defRPr>
             </a:pPr>
             <a:r>
-              <a:rPr sz="1950" b="1">
+              <a:rPr sz="2025" b="1">
                 <a:solidFill>
                   <a:srgbClr val="155EEF"/>
                 </a:solidFill>
@@ -4669,52 +4540,29 @@
                 <a:ea typeface="Malgun Gothic"/>
                 <a:cs typeface="Malgun Gothic"/>
               </a:rPr>
-              <a:t>활성화</a:t>
-            </a:r>
-          </a:p>
-          <a:p xmlns:a="http://schemas.openxmlformats.org/drawingml/2006/main">
-            <a:pPr algn="ctr">
-              <a:defRPr sz="1950" b="1">
-                <a:solidFill>
-                  <a:srgbClr val="155EEF"/>
-                </a:solidFill>
-                <a:latin typeface="Malgun Gothic"/>
-                <a:ea typeface="Malgun Gothic"/>
-                <a:cs typeface="Malgun Gothic"/>
-              </a:defRPr>
-            </a:pPr>
-            <a:r>
-              <a:rPr sz="1950" b="1">
-                <a:solidFill>
-                  <a:srgbClr val="155EEF"/>
-                </a:solidFill>
-                <a:latin typeface="Malgun Gothic"/>
-                <a:ea typeface="Malgun Gothic"/>
-                <a:cs typeface="Malgun Gothic"/>
-              </a:rPr>
-              <a:t>Enabled</a:t>
-            </a:r>
-          </a:p>
-        </p:txBody>
-      </p:sp>
-      <p:sp>
-        <p:nvSpPr>
-          <p:cNvPr id="10" name="phase-http-1">
-            <a:extLst xmlns:a="http://schemas.openxmlformats.org/drawingml/2006/main">
-              <a:ext uri="{FF2B5EF4-FFF2-40B4-BE49-F238E27FC236}">
-                <a16:creationId xmlns:a16="http://schemas.microsoft.com/office/drawing/2014/main" id="{AE3959C6-3A52-4DCF-821D-D827B0664350}"/>
-              </a:ext>
-            </a:extLst>
-          </p:cNvPr>
-          <p:cNvSpPr>
-            <a:spLocks xmlns:a="http://schemas.openxmlformats.org/drawingml/2006/main" noGrp="1"/>
-          </p:cNvSpPr>
-          <p:nvPr/>
-        </p:nvSpPr>
-        <p:spPr>
-          <a:xfrm xmlns:a="http://schemas.openxmlformats.org/drawingml/2006/main">
-            <a:off x="3667125" y="3333750"/>
-            <a:ext cx="1790700" cy="285750"/>
+              <a:t>설정 화면</a:t>
+            </a:r>
+          </a:p>
+        </p:txBody>
+      </p:sp>
+      <p:sp>
+        <p:nvSpPr>
+          <p:cNvPr id="6" name="profile-copy">
+            <a:extLst xmlns:a="http://schemas.openxmlformats.org/drawingml/2006/main">
+              <a:ext uri="{FF2B5EF4-FFF2-40B4-BE49-F238E27FC236}">
+                <a16:creationId xmlns:a16="http://schemas.microsoft.com/office/drawing/2014/main" id="{5DB761A4-0783-41E0-9D9F-1C0C49EB7A01}"/>
+              </a:ext>
+            </a:extLst>
+          </p:cNvPr>
+          <p:cNvSpPr>
+            <a:spLocks xmlns:a="http://schemas.openxmlformats.org/drawingml/2006/main" noGrp="1"/>
+          </p:cNvSpPr>
+          <p:nvPr/>
+        </p:nvSpPr>
+        <p:spPr>
+          <a:xfrm xmlns:a="http://schemas.openxmlformats.org/drawingml/2006/main">
+            <a:off x="8382000" y="2247900"/>
+            <a:ext cx="2762250" cy="838200"/>
           </a:xfrm>
           <a:prstGeom xmlns:a="http://schemas.openxmlformats.org/drawingml/2006/main" prst="rect">
             <a:avLst/>
@@ -4730,47 +4578,131 @@
           <a:lstStyle xmlns:a="http://schemas.openxmlformats.org/drawingml/2006/main"/>
           <a:p xmlns:a="http://schemas.openxmlformats.org/drawingml/2006/main">
             <a:pPr algn="ctr">
-              <a:defRPr sz="1350" b="0">
-                <a:solidFill>
-                  <a:srgbClr val="52647D"/>
-                </a:solidFill>
-                <a:latin typeface="Malgun Gothic"/>
-                <a:ea typeface="Malgun Gothic"/>
-                <a:cs typeface="Malgun Gothic"/>
-              </a:defRPr>
-            </a:pPr>
-            <a:r>
-              <a:rPr sz="1350" b="0">
-                <a:solidFill>
-                  <a:srgbClr val="52647D"/>
-                </a:solidFill>
-                <a:latin typeface="Malgun Gothic"/>
-                <a:ea typeface="Malgun Gothic"/>
-                <a:cs typeface="Malgun Gothic"/>
-              </a:rPr>
-              <a:t>HTTP 200</a:t>
-            </a:r>
-          </a:p>
-        </p:txBody>
-      </p:sp>
-      <p:sp>
-        <p:nvSpPr>
-          <p:cNvPr id="11" name="arrow-2">
-            <a:extLst xmlns:a="http://schemas.openxmlformats.org/drawingml/2006/main">
-              <a:ext uri="{FF2B5EF4-FFF2-40B4-BE49-F238E27FC236}">
-                <a16:creationId xmlns:a16="http://schemas.microsoft.com/office/drawing/2014/main" id="{EBB4EFA8-8837-4DC7-B490-F0FDBE819CC2}"/>
-              </a:ext>
-            </a:extLst>
-          </p:cNvPr>
-          <p:cNvSpPr>
-            <a:spLocks xmlns:a="http://schemas.openxmlformats.org/drawingml/2006/main" noGrp="1"/>
-          </p:cNvSpPr>
-          <p:nvPr/>
-        </p:nvSpPr>
-        <p:spPr>
-          <a:xfrm xmlns:a="http://schemas.openxmlformats.org/drawingml/2006/main">
-            <a:off x="8496300" y="2809875"/>
-            <a:ext cx="552450" cy="495300"/>
+              <a:buNone/>
+              <a:defRPr sz="1500" b="0">
+                <a:solidFill>
+                  <a:srgbClr val="15253E"/>
+                </a:solidFill>
+                <a:latin typeface="Malgun Gothic"/>
+                <a:ea typeface="Malgun Gothic"/>
+                <a:cs typeface="Malgun Gothic"/>
+              </a:defRPr>
+            </a:pPr>
+            <a:r>
+              <a:rPr sz="1500" b="0">
+                <a:solidFill>
+                  <a:srgbClr val="15253E"/>
+                </a:solidFill>
+                <a:latin typeface="Malgun Gothic"/>
+                <a:ea typeface="Malgun Gothic"/>
+                <a:cs typeface="Malgun Gothic"/>
+              </a:rPr>
+              <a:t>카드·버튼·알림 표 통일</a:t>
+            </a:r>
+          </a:p>
+          <a:p xmlns:a="http://schemas.openxmlformats.org/drawingml/2006/main">
+            <a:pPr algn="ctr">
+              <a:buNone/>
+              <a:defRPr sz="1500" b="0">
+                <a:solidFill>
+                  <a:srgbClr val="15253E"/>
+                </a:solidFill>
+                <a:latin typeface="Malgun Gothic"/>
+                <a:ea typeface="Malgun Gothic"/>
+                <a:cs typeface="Malgun Gothic"/>
+              </a:defRPr>
+            </a:pPr>
+            <a:r>
+              <a:rPr sz="1500" b="0">
+                <a:solidFill>
+                  <a:srgbClr val="15253E"/>
+                </a:solidFill>
+                <a:latin typeface="Malgun Gothic"/>
+                <a:ea typeface="Malgun Gothic"/>
+                <a:cs typeface="Malgun Gothic"/>
+              </a:rPr>
+              <a:t>직접 노출 영문 0건</a:t>
+            </a:r>
+          </a:p>
+          <a:p xmlns:a="http://schemas.openxmlformats.org/drawingml/2006/main">
+            <a:pPr algn="ctr">
+              <a:buNone/>
+              <a:defRPr sz="1500" b="0">
+                <a:solidFill>
+                  <a:srgbClr val="15253E"/>
+                </a:solidFill>
+                <a:latin typeface="Malgun Gothic"/>
+                <a:ea typeface="Malgun Gothic"/>
+                <a:cs typeface="Malgun Gothic"/>
+              </a:defRPr>
+            </a:pPr>
+            <a:r>
+              <a:rPr sz="1500" b="0">
+                <a:solidFill>
+                  <a:srgbClr val="15253E"/>
+                </a:solidFill>
+                <a:latin typeface="Malgun Gothic"/>
+                <a:ea typeface="Malgun Gothic"/>
+                <a:cs typeface="Malgun Gothic"/>
+              </a:rPr>
+              <a:t>모바일 표 302px</a:t>
+            </a:r>
+          </a:p>
+        </p:txBody>
+      </p:sp>
+      <p:sp>
+        <p:nvSpPr>
+          <p:cNvPr id="7" name="navigation-result">
+            <a:extLst xmlns:a="http://schemas.openxmlformats.org/drawingml/2006/main">
+              <a:ext uri="{FF2B5EF4-FFF2-40B4-BE49-F238E27FC236}">
+                <a16:creationId xmlns:a16="http://schemas.microsoft.com/office/drawing/2014/main" id="{2257FE94-6B17-44D6-9670-E774B0CFBBC8}"/>
+              </a:ext>
+            </a:extLst>
+          </p:cNvPr>
+          <p:cNvSpPr>
+            <a:spLocks xmlns:a="http://schemas.openxmlformats.org/drawingml/2006/main" noGrp="1"/>
+          </p:cNvSpPr>
+          <p:nvPr/>
+        </p:nvSpPr>
+        <p:spPr>
+          <a:xfrm xmlns:a="http://schemas.openxmlformats.org/drawingml/2006/main">
+            <a:off x="8096250" y="3600450"/>
+            <a:ext cx="3333750" cy="1790700"/>
+          </a:xfrm>
+          <a:prstGeom xmlns:a="http://schemas.openxmlformats.org/drawingml/2006/main" prst="roundRect">
+            <a:avLst>
+              <a:gd name="adj" fmla="val 4255"/>
+            </a:avLst>
+          </a:prstGeom>
+          <a:solidFill xmlns:a="http://schemas.openxmlformats.org/drawingml/2006/main">
+            <a:srgbClr val="EAFAF2"/>
+          </a:solidFill>
+          <a:ln xmlns:a="http://schemas.openxmlformats.org/drawingml/2006/main" w="9525">
+            <a:solidFill>
+              <a:srgbClr val="86D2AA"/>
+            </a:solidFill>
+            <a:prstDash val="solid"/>
+          </a:ln>
+        </p:spPr>
+      </p:sp>
+      <p:sp>
+        <p:nvSpPr>
+          <p:cNvPr id="8" name="navigation-title">
+            <a:extLst xmlns:a="http://schemas.openxmlformats.org/drawingml/2006/main">
+              <a:ext uri="{FF2B5EF4-FFF2-40B4-BE49-F238E27FC236}">
+                <a16:creationId xmlns:a16="http://schemas.microsoft.com/office/drawing/2014/main" id="{46964870-783A-46F5-A4D8-7731A9E8F348}"/>
+              </a:ext>
+            </a:extLst>
+          </p:cNvPr>
+          <p:cNvSpPr>
+            <a:spLocks xmlns:a="http://schemas.openxmlformats.org/drawingml/2006/main" noGrp="1"/>
+          </p:cNvSpPr>
+          <p:nvPr/>
+        </p:nvSpPr>
+        <p:spPr>
+          <a:xfrm xmlns:a="http://schemas.openxmlformats.org/drawingml/2006/main">
+            <a:off x="8382000" y="3867150"/>
+            <a:ext cx="2762250" cy="361950"/>
           </a:xfrm>
           <a:prstGeom xmlns:a="http://schemas.openxmlformats.org/drawingml/2006/main" prst="rect">
             <a:avLst/>
@@ -4786,82 +4718,48 @@
           <a:lstStyle xmlns:a="http://schemas.openxmlformats.org/drawingml/2006/main"/>
           <a:p xmlns:a="http://schemas.openxmlformats.org/drawingml/2006/main">
             <a:pPr algn="ctr">
-              <a:defRPr sz="2400" b="1">
-                <a:solidFill>
-                  <a:srgbClr val="52647D"/>
-                </a:solidFill>
-                <a:latin typeface="Malgun Gothic"/>
-                <a:ea typeface="Malgun Gothic"/>
-                <a:cs typeface="Malgun Gothic"/>
-              </a:defRPr>
-            </a:pPr>
-            <a:r>
-              <a:rPr sz="2400" b="1">
-                <a:solidFill>
-                  <a:srgbClr val="52647D"/>
-                </a:solidFill>
-                <a:latin typeface="Malgun Gothic"/>
-                <a:ea typeface="Malgun Gothic"/>
-                <a:cs typeface="Malgun Gothic"/>
-              </a:rPr>
-              <a:t>→</a:t>
-            </a:r>
-          </a:p>
-        </p:txBody>
-      </p:sp>
-      <p:sp>
-        <p:nvSpPr>
-          <p:cNvPr id="12" name="phase-2">
-            <a:extLst xmlns:a="http://schemas.openxmlformats.org/drawingml/2006/main">
-              <a:ext uri="{FF2B5EF4-FFF2-40B4-BE49-F238E27FC236}">
-                <a16:creationId xmlns:a16="http://schemas.microsoft.com/office/drawing/2014/main" id="{30B14935-D9F6-49E4-9FFA-35C561CA1787}"/>
-              </a:ext>
-            </a:extLst>
-          </p:cNvPr>
-          <p:cNvSpPr>
-            <a:spLocks xmlns:a="http://schemas.openxmlformats.org/drawingml/2006/main" noGrp="1"/>
-          </p:cNvSpPr>
-          <p:nvPr/>
-        </p:nvSpPr>
-        <p:spPr>
-          <a:xfrm xmlns:a="http://schemas.openxmlformats.org/drawingml/2006/main">
-            <a:off x="6286500" y="2247900"/>
-            <a:ext cx="2171700" cy="1562100"/>
-          </a:xfrm>
-          <a:prstGeom xmlns:a="http://schemas.openxmlformats.org/drawingml/2006/main" prst="roundRect">
-            <a:avLst>
-              <a:gd name="adj" fmla="val 4878"/>
-            </a:avLst>
-          </a:prstGeom>
-          <a:solidFill xmlns:a="http://schemas.openxmlformats.org/drawingml/2006/main">
-            <a:srgbClr val="F3F7FC"/>
-          </a:solidFill>
-          <a:ln xmlns:a="http://schemas.openxmlformats.org/drawingml/2006/main" w="9525">
-            <a:solidFill>
-              <a:srgbClr val="D5E1F1"/>
-            </a:solidFill>
-            <a:prstDash val="solid"/>
-          </a:ln>
-        </p:spPr>
-      </p:sp>
-      <p:sp>
-        <p:nvSpPr>
-          <p:cNvPr id="13" name="phase-label-2">
-            <a:extLst xmlns:a="http://schemas.openxmlformats.org/drawingml/2006/main">
-              <a:ext uri="{FF2B5EF4-FFF2-40B4-BE49-F238E27FC236}">
-                <a16:creationId xmlns:a16="http://schemas.microsoft.com/office/drawing/2014/main" id="{F84B927D-9C32-4480-B1CA-A2BEFFF6BD2C}"/>
-              </a:ext>
-            </a:extLst>
-          </p:cNvPr>
-          <p:cNvSpPr>
-            <a:spLocks xmlns:a="http://schemas.openxmlformats.org/drawingml/2006/main" noGrp="1"/>
-          </p:cNvSpPr>
-          <p:nvPr/>
-        </p:nvSpPr>
-        <p:spPr>
-          <a:xfrm xmlns:a="http://schemas.openxmlformats.org/drawingml/2006/main">
-            <a:off x="6477000" y="2552700"/>
-            <a:ext cx="1790700" cy="704850"/>
+              <a:buNone/>
+              <a:defRPr sz="2025" b="1">
+                <a:solidFill>
+                  <a:srgbClr val="078248"/>
+                </a:solidFill>
+                <a:latin typeface="Malgun Gothic"/>
+                <a:ea typeface="Malgun Gothic"/>
+                <a:cs typeface="Malgun Gothic"/>
+              </a:defRPr>
+            </a:pPr>
+            <a:r>
+              <a:rPr sz="2025" b="1">
+                <a:solidFill>
+                  <a:srgbClr val="078248"/>
+                </a:solidFill>
+                <a:latin typeface="Malgun Gothic"/>
+                <a:ea typeface="Malgun Gothic"/>
+                <a:cs typeface="Malgun Gothic"/>
+              </a:rPr>
+              <a:t>목록·보안</a:t>
+            </a:r>
+          </a:p>
+        </p:txBody>
+      </p:sp>
+      <p:sp>
+        <p:nvSpPr>
+          <p:cNvPr id="9" name="navigation-copy">
+            <a:extLst xmlns:a="http://schemas.openxmlformats.org/drawingml/2006/main">
+              <a:ext uri="{FF2B5EF4-FFF2-40B4-BE49-F238E27FC236}">
+                <a16:creationId xmlns:a16="http://schemas.microsoft.com/office/drawing/2014/main" id="{347909D2-6157-4120-AFAB-F89F76764F7E}"/>
+              </a:ext>
+            </a:extLst>
+          </p:cNvPr>
+          <p:cNvSpPr>
+            <a:spLocks xmlns:a="http://schemas.openxmlformats.org/drawingml/2006/main" noGrp="1"/>
+          </p:cNvSpPr>
+          <p:nvPr/>
+        </p:nvSpPr>
+        <p:spPr>
+          <a:xfrm xmlns:a="http://schemas.openxmlformats.org/drawingml/2006/main">
+            <a:off x="8382000" y="4362450"/>
+            <a:ext cx="2762250" cy="838200"/>
           </a:xfrm>
           <a:prstGeom xmlns:a="http://schemas.openxmlformats.org/drawingml/2006/main" prst="rect">
             <a:avLst/>
@@ -4877,7 +4775,8 @@
           <a:lstStyle xmlns:a="http://schemas.openxmlformats.org/drawingml/2006/main"/>
           <a:p xmlns:a="http://schemas.openxmlformats.org/drawingml/2006/main">
             <a:pPr algn="ctr">
-              <a:defRPr sz="1950" b="1">
+              <a:buNone/>
+              <a:defRPr sz="1500" b="0">
                 <a:solidFill>
                   <a:srgbClr val="15253E"/>
                 </a:solidFill>
@@ -4887,7 +4786,7 @@
               </a:defRPr>
             </a:pPr>
             <a:r>
-              <a:rPr sz="1950" b="1">
+              <a:rPr sz="1500" b="0">
                 <a:solidFill>
                   <a:srgbClr val="15253E"/>
                 </a:solidFill>
@@ -4895,12 +4794,13 @@
                 <a:ea typeface="Malgun Gothic"/>
                 <a:cs typeface="Malgun Gothic"/>
               </a:rPr>
-              <a:t>롤백</a:t>
+              <a:t>더보기 상시 표시</a:t>
             </a:r>
           </a:p>
           <a:p xmlns:a="http://schemas.openxmlformats.org/drawingml/2006/main">
             <a:pPr algn="ctr">
-              <a:defRPr sz="1950" b="1">
+              <a:buNone/>
+              <a:defRPr sz="1500" b="0">
                 <a:solidFill>
                   <a:srgbClr val="15253E"/>
                 </a:solidFill>
@@ -4910,7 +4810,7 @@
               </a:defRPr>
             </a:pPr>
             <a:r>
-              <a:rPr sz="1950" b="1">
+              <a:rPr sz="1500" b="0">
                 <a:solidFill>
                   <a:srgbClr val="15253E"/>
                 </a:solidFill>
@@ -4918,29 +4818,53 @@
                 <a:ea typeface="Malgun Gothic"/>
                 <a:cs typeface="Malgun Gothic"/>
               </a:rPr>
-              <a:t>Disabled</a:t>
-            </a:r>
-          </a:p>
-        </p:txBody>
-      </p:sp>
-      <p:sp>
-        <p:nvSpPr>
-          <p:cNvPr id="14" name="phase-http-2">
-            <a:extLst xmlns:a="http://schemas.openxmlformats.org/drawingml/2006/main">
-              <a:ext uri="{FF2B5EF4-FFF2-40B4-BE49-F238E27FC236}">
-                <a16:creationId xmlns:a16="http://schemas.microsoft.com/office/drawing/2014/main" id="{03579DE4-BE81-4564-8731-4EC8DE467A0F}"/>
-              </a:ext>
-            </a:extLst>
-          </p:cNvPr>
-          <p:cNvSpPr>
-            <a:spLocks xmlns:a="http://schemas.openxmlformats.org/drawingml/2006/main" noGrp="1"/>
-          </p:cNvSpPr>
-          <p:nvPr/>
-        </p:nvSpPr>
-        <p:spPr>
-          <a:xfrm xmlns:a="http://schemas.openxmlformats.org/drawingml/2006/main">
-            <a:off x="6477000" y="3333750"/>
-            <a:ext cx="1790700" cy="285750"/>
+              <a:t>중앙 오차 0px · 메뉴 1080</a:t>
+            </a:r>
+          </a:p>
+          <a:p xmlns:a="http://schemas.openxmlformats.org/drawingml/2006/main">
+            <a:pPr algn="ctr">
+              <a:buNone/>
+              <a:defRPr sz="1500" b="0">
+                <a:solidFill>
+                  <a:srgbClr val="15253E"/>
+                </a:solidFill>
+                <a:latin typeface="Malgun Gothic"/>
+                <a:ea typeface="Malgun Gothic"/>
+                <a:cs typeface="Malgun Gothic"/>
+              </a:defRPr>
+            </a:pPr>
+            <a:r>
+              <a:rPr sz="1500" b="0">
+                <a:solidFill>
+                  <a:srgbClr val="15253E"/>
+                </a:solidFill>
+                <a:latin typeface="Malgun Gothic"/>
+                <a:ea typeface="Malgun Gothic"/>
+                <a:cs typeface="Malgun Gothic"/>
+              </a:rPr>
+              <a:t>세션·토큰 카드 통일</a:t>
+            </a:r>
+          </a:p>
+        </p:txBody>
+      </p:sp>
+      <p:sp>
+        <p:nvSpPr>
+          <p:cNvPr id="10" name="profile-locale">
+            <a:extLst xmlns:a="http://schemas.openxmlformats.org/drawingml/2006/main">
+              <a:ext uri="{FF2B5EF4-FFF2-40B4-BE49-F238E27FC236}">
+                <a16:creationId xmlns:a16="http://schemas.microsoft.com/office/drawing/2014/main" id="{61A9A6BD-8E2C-4894-93A0-DEE7AB1A8EB9}"/>
+              </a:ext>
+            </a:extLst>
+          </p:cNvPr>
+          <p:cNvSpPr>
+            <a:spLocks xmlns:a="http://schemas.openxmlformats.org/drawingml/2006/main" noGrp="1"/>
+          </p:cNvSpPr>
+          <p:nvPr/>
+        </p:nvSpPr>
+        <p:spPr>
+          <a:xfrm xmlns:a="http://schemas.openxmlformats.org/drawingml/2006/main">
+            <a:off x="476250" y="5962650"/>
+            <a:ext cx="10668000" cy="323850"/>
           </a:xfrm>
           <a:prstGeom xmlns:a="http://schemas.openxmlformats.org/drawingml/2006/main" prst="rect">
             <a:avLst/>
@@ -4956,98 +4880,8 @@
           <a:lstStyle xmlns:a="http://schemas.openxmlformats.org/drawingml/2006/main"/>
           <a:p xmlns:a="http://schemas.openxmlformats.org/drawingml/2006/main">
             <a:pPr algn="ctr">
-              <a:defRPr sz="1350" b="0">
-                <a:solidFill>
-                  <a:srgbClr val="52647D"/>
-                </a:solidFill>
-                <a:latin typeface="Malgun Gothic"/>
-                <a:ea typeface="Malgun Gothic"/>
-                <a:cs typeface="Malgun Gothic"/>
-              </a:defRPr>
-            </a:pPr>
-            <a:r>
-              <a:rPr sz="1350" b="0">
-                <a:solidFill>
-                  <a:srgbClr val="52647D"/>
-                </a:solidFill>
-                <a:latin typeface="Malgun Gothic"/>
-                <a:ea typeface="Malgun Gothic"/>
-                <a:cs typeface="Malgun Gothic"/>
-              </a:rPr>
-              <a:t>HTTP 200</a:t>
-            </a:r>
-          </a:p>
-        </p:txBody>
-      </p:sp>
-      <p:sp>
-        <p:nvSpPr>
-          <p:cNvPr id="15" name="phase-3">
-            <a:extLst xmlns:a="http://schemas.openxmlformats.org/drawingml/2006/main">
-              <a:ext uri="{FF2B5EF4-FFF2-40B4-BE49-F238E27FC236}">
-                <a16:creationId xmlns:a16="http://schemas.microsoft.com/office/drawing/2014/main" id="{B1D3BD30-83E1-498D-B0C3-D6998089D16E}"/>
-              </a:ext>
-            </a:extLst>
-          </p:cNvPr>
-          <p:cNvSpPr>
-            <a:spLocks xmlns:a="http://schemas.openxmlformats.org/drawingml/2006/main" noGrp="1"/>
-          </p:cNvSpPr>
-          <p:nvPr/>
-        </p:nvSpPr>
-        <p:spPr>
-          <a:xfrm xmlns:a="http://schemas.openxmlformats.org/drawingml/2006/main">
-            <a:off x="9096375" y="2247900"/>
-            <a:ext cx="2171700" cy="1562100"/>
-          </a:xfrm>
-          <a:prstGeom xmlns:a="http://schemas.openxmlformats.org/drawingml/2006/main" prst="roundRect">
-            <a:avLst>
-              <a:gd name="adj" fmla="val 4878"/>
-            </a:avLst>
-          </a:prstGeom>
-          <a:solidFill xmlns:a="http://schemas.openxmlformats.org/drawingml/2006/main">
-            <a:srgbClr val="EAF2FF"/>
-          </a:solidFill>
-          <a:ln xmlns:a="http://schemas.openxmlformats.org/drawingml/2006/main" w="9525">
-            <a:solidFill>
-              <a:srgbClr val="155EEF"/>
-            </a:solidFill>
-            <a:prstDash val="solid"/>
-          </a:ln>
-        </p:spPr>
-      </p:sp>
-      <p:sp>
-        <p:nvSpPr>
-          <p:cNvPr id="16" name="phase-label-3">
-            <a:extLst xmlns:a="http://schemas.openxmlformats.org/drawingml/2006/main">
-              <a:ext uri="{FF2B5EF4-FFF2-40B4-BE49-F238E27FC236}">
-                <a16:creationId xmlns:a16="http://schemas.microsoft.com/office/drawing/2014/main" id="{2E4B63B9-05DD-4586-92E2-218CE46B8CF6}"/>
-              </a:ext>
-            </a:extLst>
-          </p:cNvPr>
-          <p:cNvSpPr>
-            <a:spLocks xmlns:a="http://schemas.openxmlformats.org/drawingml/2006/main" noGrp="1"/>
-          </p:cNvSpPr>
-          <p:nvPr/>
-        </p:nvSpPr>
-        <p:spPr>
-          <a:xfrm xmlns:a="http://schemas.openxmlformats.org/drawingml/2006/main">
-            <a:off x="9286875" y="2552700"/>
-            <a:ext cx="1790700" cy="704850"/>
-          </a:xfrm>
-          <a:prstGeom xmlns:a="http://schemas.openxmlformats.org/drawingml/2006/main" prst="rect">
-            <a:avLst/>
-          </a:prstGeom>
-          <a:noFill xmlns:a="http://schemas.openxmlformats.org/drawingml/2006/main"/>
-          <a:ln xmlns:a="http://schemas.openxmlformats.org/drawingml/2006/main" w="0">
-            <a:noFill/>
-            <a:prstDash val="solid"/>
-          </a:ln>
-        </p:spPr>
-        <p:txBody>
-          <a:bodyPr xmlns:a="http://schemas.openxmlformats.org/drawingml/2006/main"/>
-          <a:lstStyle xmlns:a="http://schemas.openxmlformats.org/drawingml/2006/main"/>
-          <a:p xmlns:a="http://schemas.openxmlformats.org/drawingml/2006/main">
-            <a:pPr algn="ctr">
-              <a:defRPr sz="1950" b="1">
+              <a:buNone/>
+              <a:defRPr sz="1500" b="1">
                 <a:solidFill>
                   <a:srgbClr val="155EEF"/>
                 </a:solidFill>
@@ -5057,7 +4891,7 @@
               </a:defRPr>
             </a:pPr>
             <a:r>
-              <a:rPr sz="1950" b="1">
+              <a:rPr sz="1500" b="1">
                 <a:solidFill>
                   <a:srgbClr val="155EEF"/>
                 </a:solidFill>
@@ -5065,198 +4899,7 @@
                 <a:ea typeface="Malgun Gothic"/>
                 <a:cs typeface="Malgun Gothic"/>
               </a:rPr>
-              <a:t>최종</a:t>
-            </a:r>
-          </a:p>
-          <a:p xmlns:a="http://schemas.openxmlformats.org/drawingml/2006/main">
-            <a:pPr algn="ctr">
-              <a:defRPr sz="1950" b="1">
-                <a:solidFill>
-                  <a:srgbClr val="155EEF"/>
-                </a:solidFill>
-                <a:latin typeface="Malgun Gothic"/>
-                <a:ea typeface="Malgun Gothic"/>
-                <a:cs typeface="Malgun Gothic"/>
-              </a:defRPr>
-            </a:pPr>
-            <a:r>
-              <a:rPr sz="1950" b="1">
-                <a:solidFill>
-                  <a:srgbClr val="155EEF"/>
-                </a:solidFill>
-                <a:latin typeface="Malgun Gothic"/>
-                <a:ea typeface="Malgun Gothic"/>
-                <a:cs typeface="Malgun Gothic"/>
-              </a:rPr>
-              <a:t>Enabled</a:t>
-            </a:r>
-          </a:p>
-        </p:txBody>
-      </p:sp>
-      <p:sp>
-        <p:nvSpPr>
-          <p:cNvPr id="17" name="phase-http-3">
-            <a:extLst xmlns:a="http://schemas.openxmlformats.org/drawingml/2006/main">
-              <a:ext uri="{FF2B5EF4-FFF2-40B4-BE49-F238E27FC236}">
-                <a16:creationId xmlns:a16="http://schemas.microsoft.com/office/drawing/2014/main" id="{B2993C25-3261-4B34-90FD-48CACC67BAA0}"/>
-              </a:ext>
-            </a:extLst>
-          </p:cNvPr>
-          <p:cNvSpPr>
-            <a:spLocks xmlns:a="http://schemas.openxmlformats.org/drawingml/2006/main" noGrp="1"/>
-          </p:cNvSpPr>
-          <p:nvPr/>
-        </p:nvSpPr>
-        <p:spPr>
-          <a:xfrm xmlns:a="http://schemas.openxmlformats.org/drawingml/2006/main">
-            <a:off x="9286875" y="3333750"/>
-            <a:ext cx="1790700" cy="285750"/>
-          </a:xfrm>
-          <a:prstGeom xmlns:a="http://schemas.openxmlformats.org/drawingml/2006/main" prst="rect">
-            <a:avLst/>
-          </a:prstGeom>
-          <a:noFill xmlns:a="http://schemas.openxmlformats.org/drawingml/2006/main"/>
-          <a:ln xmlns:a="http://schemas.openxmlformats.org/drawingml/2006/main" w="0">
-            <a:noFill/>
-            <a:prstDash val="solid"/>
-          </a:ln>
-        </p:spPr>
-        <p:txBody>
-          <a:bodyPr xmlns:a="http://schemas.openxmlformats.org/drawingml/2006/main"/>
-          <a:lstStyle xmlns:a="http://schemas.openxmlformats.org/drawingml/2006/main"/>
-          <a:p xmlns:a="http://schemas.openxmlformats.org/drawingml/2006/main">
-            <a:pPr algn="ctr">
-              <a:defRPr sz="1350" b="0">
-                <a:solidFill>
-                  <a:srgbClr val="52647D"/>
-                </a:solidFill>
-                <a:latin typeface="Malgun Gothic"/>
-                <a:ea typeface="Malgun Gothic"/>
-                <a:cs typeface="Malgun Gothic"/>
-              </a:defRPr>
-            </a:pPr>
-            <a:r>
-              <a:rPr sz="1350" b="0">
-                <a:solidFill>
-                  <a:srgbClr val="52647D"/>
-                </a:solidFill>
-                <a:latin typeface="Malgun Gothic"/>
-                <a:ea typeface="Malgun Gothic"/>
-                <a:cs typeface="Malgun Gothic"/>
-              </a:rPr>
-              <a:t>HTTP 200</a:t>
-            </a:r>
-          </a:p>
-        </p:txBody>
-      </p:sp>
-      <p:sp>
-        <p:nvSpPr>
-          <p:cNvPr id="18" name="integrity-count">
-            <a:extLst xmlns:a="http://schemas.openxmlformats.org/drawingml/2006/main">
-              <a:ext uri="{FF2B5EF4-FFF2-40B4-BE49-F238E27FC236}">
-                <a16:creationId xmlns:a16="http://schemas.microsoft.com/office/drawing/2014/main" id="{7D531B41-66A5-4441-97A2-88436706648C}"/>
-              </a:ext>
-            </a:extLst>
-          </p:cNvPr>
-          <p:cNvSpPr>
-            <a:spLocks xmlns:a="http://schemas.openxmlformats.org/drawingml/2006/main" noGrp="1"/>
-          </p:cNvSpPr>
-          <p:nvPr/>
-        </p:nvSpPr>
-        <p:spPr>
-          <a:xfrm xmlns:a="http://schemas.openxmlformats.org/drawingml/2006/main">
-            <a:off x="857250" y="4552950"/>
-            <a:ext cx="10477500" cy="552450"/>
-          </a:xfrm>
-          <a:prstGeom xmlns:a="http://schemas.openxmlformats.org/drawingml/2006/main" prst="rect">
-            <a:avLst/>
-          </a:prstGeom>
-          <a:noFill xmlns:a="http://schemas.openxmlformats.org/drawingml/2006/main"/>
-          <a:ln xmlns:a="http://schemas.openxmlformats.org/drawingml/2006/main" w="0">
-            <a:noFill/>
-            <a:prstDash val="solid"/>
-          </a:ln>
-        </p:spPr>
-        <p:txBody>
-          <a:bodyPr xmlns:a="http://schemas.openxmlformats.org/drawingml/2006/main"/>
-          <a:lstStyle xmlns:a="http://schemas.openxmlformats.org/drawingml/2006/main"/>
-          <a:p xmlns:a="http://schemas.openxmlformats.org/drawingml/2006/main">
-            <a:pPr algn="ctr">
-              <a:defRPr sz="2400" b="1">
-                <a:solidFill>
-                  <a:srgbClr val="15253E"/>
-                </a:solidFill>
-                <a:latin typeface="Malgun Gothic"/>
-                <a:ea typeface="Malgun Gothic"/>
-                <a:cs typeface="Malgun Gothic"/>
-              </a:defRPr>
-            </a:pPr>
-            <a:r>
-              <a:rPr sz="2400" b="1">
-                <a:solidFill>
-                  <a:srgbClr val="15253E"/>
-                </a:solidFill>
-                <a:latin typeface="Malgun Gothic"/>
-                <a:ea typeface="Malgun Gothic"/>
-                <a:cs typeface="Malgun Gothic"/>
-              </a:rPr>
-              <a:t>39 users · 117 discussions · 305 posts</a:t>
-            </a:r>
-          </a:p>
-        </p:txBody>
-      </p:sp>
-      <p:sp>
-        <p:nvSpPr>
-          <p:cNvPr id="19" name="integrity-hash">
-            <a:extLst xmlns:a="http://schemas.openxmlformats.org/drawingml/2006/main">
-              <a:ext uri="{FF2B5EF4-FFF2-40B4-BE49-F238E27FC236}">
-                <a16:creationId xmlns:a16="http://schemas.microsoft.com/office/drawing/2014/main" id="{CFB67921-C80E-4482-BC13-B3C78F46F4D4}"/>
-              </a:ext>
-            </a:extLst>
-          </p:cNvPr>
-          <p:cNvSpPr>
-            <a:spLocks xmlns:a="http://schemas.openxmlformats.org/drawingml/2006/main" noGrp="1"/>
-          </p:cNvSpPr>
-          <p:nvPr/>
-        </p:nvSpPr>
-        <p:spPr>
-          <a:xfrm xmlns:a="http://schemas.openxmlformats.org/drawingml/2006/main">
-            <a:off x="857250" y="5238750"/>
-            <a:ext cx="10477500" cy="457200"/>
-          </a:xfrm>
-          <a:prstGeom xmlns:a="http://schemas.openxmlformats.org/drawingml/2006/main" prst="rect">
-            <a:avLst/>
-          </a:prstGeom>
-          <a:noFill xmlns:a="http://schemas.openxmlformats.org/drawingml/2006/main"/>
-          <a:ln xmlns:a="http://schemas.openxmlformats.org/drawingml/2006/main" w="0">
-            <a:noFill/>
-            <a:prstDash val="solid"/>
-          </a:ln>
-        </p:spPr>
-        <p:txBody>
-          <a:bodyPr xmlns:a="http://schemas.openxmlformats.org/drawingml/2006/main"/>
-          <a:lstStyle xmlns:a="http://schemas.openxmlformats.org/drawingml/2006/main"/>
-          <a:p xmlns:a="http://schemas.openxmlformats.org/drawingml/2006/main">
-            <a:pPr algn="ctr">
-              <a:defRPr sz="1800" b="0">
-                <a:solidFill>
-                  <a:srgbClr val="078248"/>
-                </a:solidFill>
-                <a:latin typeface="Malgun Gothic"/>
-                <a:ea typeface="Malgun Gothic"/>
-                <a:cs typeface="Malgun Gothic"/>
-              </a:defRPr>
-            </a:pPr>
-            <a:r>
-              <a:rPr sz="1800" b="0">
-                <a:solidFill>
-                  <a:srgbClr val="078248"/>
-                </a:solidFill>
-                <a:latin typeface="Malgun Gothic"/>
-                <a:ea typeface="Malgun Gothic"/>
-                <a:cs typeface="Malgun Gothic"/>
-              </a:rPr>
-              <a:t>콘텐츠 SHA-256 동일 · 첨부 SHA-256 동일 · 정적 계약 8/8</a:t>
+              <a:t>해결 답변 알림 · 새 토큰 · 검색 정보 설정까지 한글</a:t>
             </a:r>
           </a:p>
         </p:txBody>
@@ -5264,7 +4907,7 @@
     </p:spTree>
     <p:extLst>
       <p:ext uri="{BB962C8B-B14F-4D97-AF65-F5344CB8AC3E}">
-        <p14:creationId xmlns:p14="http://schemas.microsoft.com/office/powerpoint/2010/main" val="224538138"/>
+        <p14:creationId xmlns:p14="http://schemas.microsoft.com/office/powerpoint/2010/main" val="1966110520"/>
       </p:ext>
     </p:extLst>
   </p:cSld>
@@ -5292,10 +4935,10 @@
       </p:grpSpPr>
       <p:sp>
         <p:nvSpPr>
-          <p:cNvPr id="16" name="title-7">
-            <a:extLst xmlns:a="http://schemas.openxmlformats.org/drawingml/2006/main">
-              <a:ext uri="{FF2B5EF4-FFF2-40B4-BE49-F238E27FC236}">
-                <a16:creationId xmlns:a16="http://schemas.microsoft.com/office/drawing/2014/main" id="{B1E5F8CB-12E8-414B-A782-7921D9DB98E9}"/>
+          <p:cNvPr id="20" name="title-6">
+            <a:extLst xmlns:a="http://schemas.openxmlformats.org/drawingml/2006/main">
+              <a:ext uri="{FF2B5EF4-FFF2-40B4-BE49-F238E27FC236}">
+                <a16:creationId xmlns:a16="http://schemas.microsoft.com/office/drawing/2014/main" id="{A1988E7D-4FE9-4900-8EFF-3040E5D0CEDA}"/>
               </a:ext>
             </a:extLst>
           </p:cNvPr>
@@ -5323,6 +4966,7 @@
           <a:lstStyle xmlns:a="http://schemas.openxmlformats.org/drawingml/2006/main"/>
           <a:p xmlns:a="http://schemas.openxmlformats.org/drawingml/2006/main">
             <a:pPr algn="l">
+              <a:buNone/>
               <a:defRPr sz="3000" b="1">
                 <a:solidFill>
                   <a:srgbClr val="15253E"/>
@@ -5341,17 +4985,17 @@
                 <a:ea typeface="Malgun Gothic"/>
                 <a:cs typeface="Malgun Gothic"/>
               </a:rPr>
-              <a:t>Flarum Core를 건드리지 않아 롤백은 확장 하나로 끝납니다</a:t>
-            </a:r>
-          </a:p>
-        </p:txBody>
-      </p:sp>
-      <p:sp>
-        <p:nvSpPr>
-          <p:cNvPr id="2" name="page-7">
-            <a:extLst xmlns:a="http://schemas.openxmlformats.org/drawingml/2006/main">
-              <a:ext uri="{FF2B5EF4-FFF2-40B4-BE49-F238E27FC236}">
-                <a16:creationId xmlns:a16="http://schemas.microsoft.com/office/drawing/2014/main" id="{A3276DCC-0352-4CE1-B01D-E79903100583}"/>
+              <a:t>활성화와 롤백에도 콘텐츠는 그대로였습니다</a:t>
+            </a:r>
+          </a:p>
+        </p:txBody>
+      </p:sp>
+      <p:sp>
+        <p:nvSpPr>
+          <p:cNvPr id="2" name="page-6">
+            <a:extLst xmlns:a="http://schemas.openxmlformats.org/drawingml/2006/main">
+              <a:ext uri="{FF2B5EF4-FFF2-40B4-BE49-F238E27FC236}">
+                <a16:creationId xmlns:a16="http://schemas.microsoft.com/office/drawing/2014/main" id="{BE3DDE7B-FA52-43C9-AAE2-8928904D0FEC}"/>
               </a:ext>
             </a:extLst>
           </p:cNvPr>
@@ -5379,6 +5023,7 @@
           <a:lstStyle xmlns:a="http://schemas.openxmlformats.org/drawingml/2006/main"/>
           <a:p xmlns:a="http://schemas.openxmlformats.org/drawingml/2006/main">
             <a:pPr algn="r">
+              <a:buNone/>
               <a:defRPr sz="1200" b="0">
                 <a:solidFill>
                   <a:srgbClr val="52647D"/>
@@ -5404,22 +5049,22 @@
       </p:sp>
       <p:sp>
         <p:nvSpPr>
-          <p:cNvPr id="3" name="flow-arrow-1">
-            <a:extLst xmlns:a="http://schemas.openxmlformats.org/drawingml/2006/main">
-              <a:ext uri="{FF2B5EF4-FFF2-40B4-BE49-F238E27FC236}">
-                <a16:creationId xmlns:a16="http://schemas.microsoft.com/office/drawing/2014/main" id="{F33C0C86-C636-49E7-9EF3-AD3434C40404}"/>
-              </a:ext>
-            </a:extLst>
-          </p:cNvPr>
-          <p:cNvSpPr>
-            <a:spLocks xmlns:a="http://schemas.openxmlformats.org/drawingml/2006/main" noGrp="1"/>
-          </p:cNvSpPr>
-          <p:nvPr/>
-        </p:nvSpPr>
-        <p:spPr>
-          <a:xfrm xmlns:a="http://schemas.openxmlformats.org/drawingml/2006/main">
-            <a:off x="3848100" y="2724150"/>
-            <a:ext cx="762000" cy="476250"/>
+          <p:cNvPr id="3" name="arrow-0">
+            <a:extLst xmlns:a="http://schemas.openxmlformats.org/drawingml/2006/main">
+              <a:ext uri="{FF2B5EF4-FFF2-40B4-BE49-F238E27FC236}">
+                <a16:creationId xmlns:a16="http://schemas.microsoft.com/office/drawing/2014/main" id="{7B834A7A-209D-4491-899C-10F6F9E68B2E}"/>
+              </a:ext>
+            </a:extLst>
+          </p:cNvPr>
+          <p:cNvSpPr>
+            <a:spLocks xmlns:a="http://schemas.openxmlformats.org/drawingml/2006/main" noGrp="1"/>
+          </p:cNvSpPr>
+          <p:nvPr/>
+        </p:nvSpPr>
+        <p:spPr>
+          <a:xfrm xmlns:a="http://schemas.openxmlformats.org/drawingml/2006/main">
+            <a:off x="2876550" y="2809875"/>
+            <a:ext cx="552450" cy="495300"/>
           </a:xfrm>
           <a:prstGeom xmlns:a="http://schemas.openxmlformats.org/drawingml/2006/main" prst="rect">
             <a:avLst/>
@@ -5435,7 +5080,8 @@
           <a:lstStyle xmlns:a="http://schemas.openxmlformats.org/drawingml/2006/main"/>
           <a:p xmlns:a="http://schemas.openxmlformats.org/drawingml/2006/main">
             <a:pPr algn="ctr">
-              <a:defRPr sz="2700" b="1">
+              <a:buNone/>
+              <a:defRPr sz="2400" b="1">
                 <a:solidFill>
                   <a:srgbClr val="52647D"/>
                 </a:solidFill>
@@ -5445,7 +5091,7 @@
               </a:defRPr>
             </a:pPr>
             <a:r>
-              <a:rPr sz="2700" b="1">
+              <a:rPr sz="2400" b="1">
                 <a:solidFill>
                   <a:srgbClr val="52647D"/>
                 </a:solidFill>
@@ -5460,82 +5106,26 @@
       </p:sp>
       <p:sp>
         <p:nvSpPr>
-          <p:cNvPr id="4" name="flow-arrow-2">
-            <a:extLst xmlns:a="http://schemas.openxmlformats.org/drawingml/2006/main">
-              <a:ext uri="{FF2B5EF4-FFF2-40B4-BE49-F238E27FC236}">
-                <a16:creationId xmlns:a16="http://schemas.microsoft.com/office/drawing/2014/main" id="{35F70949-AD48-4799-9CD4-E06EF4FA6024}"/>
-              </a:ext>
-            </a:extLst>
-          </p:cNvPr>
-          <p:cNvSpPr>
-            <a:spLocks xmlns:a="http://schemas.openxmlformats.org/drawingml/2006/main" noGrp="1"/>
-          </p:cNvSpPr>
-          <p:nvPr/>
-        </p:nvSpPr>
-        <p:spPr>
-          <a:xfrm xmlns:a="http://schemas.openxmlformats.org/drawingml/2006/main">
-            <a:off x="7581900" y="2724150"/>
-            <a:ext cx="762000" cy="476250"/>
-          </a:xfrm>
-          <a:prstGeom xmlns:a="http://schemas.openxmlformats.org/drawingml/2006/main" prst="rect">
-            <a:avLst/>
-          </a:prstGeom>
-          <a:noFill xmlns:a="http://schemas.openxmlformats.org/drawingml/2006/main"/>
-          <a:ln xmlns:a="http://schemas.openxmlformats.org/drawingml/2006/main" w="0">
-            <a:noFill/>
-            <a:prstDash val="solid"/>
-          </a:ln>
-        </p:spPr>
-        <p:txBody>
-          <a:bodyPr xmlns:a="http://schemas.openxmlformats.org/drawingml/2006/main"/>
-          <a:lstStyle xmlns:a="http://schemas.openxmlformats.org/drawingml/2006/main"/>
-          <a:p xmlns:a="http://schemas.openxmlformats.org/drawingml/2006/main">
-            <a:pPr algn="ctr">
-              <a:defRPr sz="2700" b="1">
-                <a:solidFill>
-                  <a:srgbClr val="52647D"/>
-                </a:solidFill>
-                <a:latin typeface="Malgun Gothic"/>
-                <a:ea typeface="Malgun Gothic"/>
-                <a:cs typeface="Malgun Gothic"/>
-              </a:defRPr>
-            </a:pPr>
-            <a:r>
-              <a:rPr sz="2700" b="1">
-                <a:solidFill>
-                  <a:srgbClr val="52647D"/>
-                </a:solidFill>
-                <a:latin typeface="Malgun Gothic"/>
-                <a:ea typeface="Malgun Gothic"/>
-                <a:cs typeface="Malgun Gothic"/>
-              </a:rPr>
-              <a:t>→</a:t>
-            </a:r>
-          </a:p>
-        </p:txBody>
-      </p:sp>
-      <p:sp>
-        <p:nvSpPr>
-          <p:cNvPr id="5" name="flarum-core">
-            <a:extLst xmlns:a="http://schemas.openxmlformats.org/drawingml/2006/main">
-              <a:ext uri="{FF2B5EF4-FFF2-40B4-BE49-F238E27FC236}">
-                <a16:creationId xmlns:a16="http://schemas.microsoft.com/office/drawing/2014/main" id="{2D23B9C7-BD3C-4600-BA89-78668692D407}"/>
-              </a:ext>
-            </a:extLst>
-          </p:cNvPr>
-          <p:cNvSpPr>
-            <a:spLocks xmlns:a="http://schemas.openxmlformats.org/drawingml/2006/main" noGrp="1"/>
-          </p:cNvSpPr>
-          <p:nvPr/>
-        </p:nvSpPr>
-        <p:spPr>
-          <a:xfrm xmlns:a="http://schemas.openxmlformats.org/drawingml/2006/main">
-            <a:off x="666750" y="2076450"/>
-            <a:ext cx="3143250" cy="1809750"/>
+          <p:cNvPr id="4" name="phase-0">
+            <a:extLst xmlns:a="http://schemas.openxmlformats.org/drawingml/2006/main">
+              <a:ext uri="{FF2B5EF4-FFF2-40B4-BE49-F238E27FC236}">
+                <a16:creationId xmlns:a16="http://schemas.microsoft.com/office/drawing/2014/main" id="{739F78CD-D657-4918-A9FA-4B164DC81EF7}"/>
+              </a:ext>
+            </a:extLst>
+          </p:cNvPr>
+          <p:cNvSpPr>
+            <a:spLocks xmlns:a="http://schemas.openxmlformats.org/drawingml/2006/main" noGrp="1"/>
+          </p:cNvSpPr>
+          <p:nvPr/>
+        </p:nvSpPr>
+        <p:spPr>
+          <a:xfrm xmlns:a="http://schemas.openxmlformats.org/drawingml/2006/main">
+            <a:off x="666750" y="2247900"/>
+            <a:ext cx="2171700" cy="1562100"/>
           </a:xfrm>
           <a:prstGeom xmlns:a="http://schemas.openxmlformats.org/drawingml/2006/main" prst="roundRect">
             <a:avLst>
-              <a:gd name="adj" fmla="val 4211"/>
+              <a:gd name="adj" fmla="val 4878"/>
             </a:avLst>
           </a:prstGeom>
           <a:solidFill xmlns:a="http://schemas.openxmlformats.org/drawingml/2006/main">
@@ -5551,26 +5141,221 @@
       </p:sp>
       <p:sp>
         <p:nvSpPr>
-          <p:cNvPr id="6" name="theme-extension">
-            <a:extLst xmlns:a="http://schemas.openxmlformats.org/drawingml/2006/main">
-              <a:ext uri="{FF2B5EF4-FFF2-40B4-BE49-F238E27FC236}">
-                <a16:creationId xmlns:a16="http://schemas.microsoft.com/office/drawing/2014/main" id="{66F5027A-7FA7-413F-B51E-8043D0948B2C}"/>
-              </a:ext>
-            </a:extLst>
-          </p:cNvPr>
-          <p:cNvSpPr>
-            <a:spLocks xmlns:a="http://schemas.openxmlformats.org/drawingml/2006/main" noGrp="1"/>
-          </p:cNvSpPr>
-          <p:nvPr/>
-        </p:nvSpPr>
-        <p:spPr>
-          <a:xfrm xmlns:a="http://schemas.openxmlformats.org/drawingml/2006/main">
-            <a:off x="4572000" y="2076450"/>
-            <a:ext cx="2971800" cy="1809750"/>
+          <p:cNvPr id="5" name="phase-label-0">
+            <a:extLst xmlns:a="http://schemas.openxmlformats.org/drawingml/2006/main">
+              <a:ext uri="{FF2B5EF4-FFF2-40B4-BE49-F238E27FC236}">
+                <a16:creationId xmlns:a16="http://schemas.microsoft.com/office/drawing/2014/main" id="{63AECE67-3CC4-4DA1-AF5E-C93DC0D47574}"/>
+              </a:ext>
+            </a:extLst>
+          </p:cNvPr>
+          <p:cNvSpPr>
+            <a:spLocks xmlns:a="http://schemas.openxmlformats.org/drawingml/2006/main" noGrp="1"/>
+          </p:cNvSpPr>
+          <p:nvPr/>
+        </p:nvSpPr>
+        <p:spPr>
+          <a:xfrm xmlns:a="http://schemas.openxmlformats.org/drawingml/2006/main">
+            <a:off x="857250" y="2552700"/>
+            <a:ext cx="1790700" cy="704850"/>
+          </a:xfrm>
+          <a:prstGeom xmlns:a="http://schemas.openxmlformats.org/drawingml/2006/main" prst="rect">
+            <a:avLst/>
+          </a:prstGeom>
+          <a:noFill xmlns:a="http://schemas.openxmlformats.org/drawingml/2006/main"/>
+          <a:ln xmlns:a="http://schemas.openxmlformats.org/drawingml/2006/main" w="0">
+            <a:noFill/>
+            <a:prstDash val="solid"/>
+          </a:ln>
+        </p:spPr>
+        <p:txBody>
+          <a:bodyPr xmlns:a="http://schemas.openxmlformats.org/drawingml/2006/main"/>
+          <a:lstStyle xmlns:a="http://schemas.openxmlformats.org/drawingml/2006/main"/>
+          <a:p xmlns:a="http://schemas.openxmlformats.org/drawingml/2006/main">
+            <a:pPr algn="ctr">
+              <a:buNone/>
+              <a:defRPr sz="1950" b="1">
+                <a:solidFill>
+                  <a:srgbClr val="15253E"/>
+                </a:solidFill>
+                <a:latin typeface="Malgun Gothic"/>
+                <a:ea typeface="Malgun Gothic"/>
+                <a:cs typeface="Malgun Gothic"/>
+              </a:defRPr>
+            </a:pPr>
+            <a:r>
+              <a:rPr sz="1950" b="1">
+                <a:solidFill>
+                  <a:srgbClr val="15253E"/>
+                </a:solidFill>
+                <a:latin typeface="Malgun Gothic"/>
+                <a:ea typeface="Malgun Gothic"/>
+                <a:cs typeface="Malgun Gothic"/>
+              </a:rPr>
+              <a:t>기준선</a:t>
+            </a:r>
+          </a:p>
+          <a:p xmlns:a="http://schemas.openxmlformats.org/drawingml/2006/main">
+            <a:pPr algn="ctr">
+              <a:buNone/>
+              <a:defRPr sz="1950" b="1">
+                <a:solidFill>
+                  <a:srgbClr val="15253E"/>
+                </a:solidFill>
+                <a:latin typeface="Malgun Gothic"/>
+                <a:ea typeface="Malgun Gothic"/>
+                <a:cs typeface="Malgun Gothic"/>
+              </a:defRPr>
+            </a:pPr>
+            <a:r>
+              <a:rPr sz="1950" b="1">
+                <a:solidFill>
+                  <a:srgbClr val="15253E"/>
+                </a:solidFill>
+                <a:latin typeface="Malgun Gothic"/>
+                <a:ea typeface="Malgun Gothic"/>
+                <a:cs typeface="Malgun Gothic"/>
+              </a:rPr>
+              <a:t>Disabled</a:t>
+            </a:r>
+          </a:p>
+        </p:txBody>
+      </p:sp>
+      <p:sp>
+        <p:nvSpPr>
+          <p:cNvPr id="6" name="phase-http-0">
+            <a:extLst xmlns:a="http://schemas.openxmlformats.org/drawingml/2006/main">
+              <a:ext uri="{FF2B5EF4-FFF2-40B4-BE49-F238E27FC236}">
+                <a16:creationId xmlns:a16="http://schemas.microsoft.com/office/drawing/2014/main" id="{3411BCDF-FFDB-4D8F-ABD4-9DF41B03F7D6}"/>
+              </a:ext>
+            </a:extLst>
+          </p:cNvPr>
+          <p:cNvSpPr>
+            <a:spLocks xmlns:a="http://schemas.openxmlformats.org/drawingml/2006/main" noGrp="1"/>
+          </p:cNvSpPr>
+          <p:nvPr/>
+        </p:nvSpPr>
+        <p:spPr>
+          <a:xfrm xmlns:a="http://schemas.openxmlformats.org/drawingml/2006/main">
+            <a:off x="857250" y="3333750"/>
+            <a:ext cx="1790700" cy="285750"/>
+          </a:xfrm>
+          <a:prstGeom xmlns:a="http://schemas.openxmlformats.org/drawingml/2006/main" prst="rect">
+            <a:avLst/>
+          </a:prstGeom>
+          <a:noFill xmlns:a="http://schemas.openxmlformats.org/drawingml/2006/main"/>
+          <a:ln xmlns:a="http://schemas.openxmlformats.org/drawingml/2006/main" w="0">
+            <a:noFill/>
+            <a:prstDash val="solid"/>
+          </a:ln>
+        </p:spPr>
+        <p:txBody>
+          <a:bodyPr xmlns:a="http://schemas.openxmlformats.org/drawingml/2006/main"/>
+          <a:lstStyle xmlns:a="http://schemas.openxmlformats.org/drawingml/2006/main"/>
+          <a:p xmlns:a="http://schemas.openxmlformats.org/drawingml/2006/main">
+            <a:pPr algn="ctr">
+              <a:buNone/>
+              <a:defRPr sz="1350" b="0">
+                <a:solidFill>
+                  <a:srgbClr val="52647D"/>
+                </a:solidFill>
+                <a:latin typeface="Malgun Gothic"/>
+                <a:ea typeface="Malgun Gothic"/>
+                <a:cs typeface="Malgun Gothic"/>
+              </a:defRPr>
+            </a:pPr>
+            <a:r>
+              <a:rPr sz="1350" b="0">
+                <a:solidFill>
+                  <a:srgbClr val="52647D"/>
+                </a:solidFill>
+                <a:latin typeface="Malgun Gothic"/>
+                <a:ea typeface="Malgun Gothic"/>
+                <a:cs typeface="Malgun Gothic"/>
+              </a:rPr>
+              <a:t>HTTP 200</a:t>
+            </a:r>
+          </a:p>
+        </p:txBody>
+      </p:sp>
+      <p:sp>
+        <p:nvSpPr>
+          <p:cNvPr id="7" name="arrow-1">
+            <a:extLst xmlns:a="http://schemas.openxmlformats.org/drawingml/2006/main">
+              <a:ext uri="{FF2B5EF4-FFF2-40B4-BE49-F238E27FC236}">
+                <a16:creationId xmlns:a16="http://schemas.microsoft.com/office/drawing/2014/main" id="{5C52BED4-5B33-4F1F-8B4C-1420869A3755}"/>
+              </a:ext>
+            </a:extLst>
+          </p:cNvPr>
+          <p:cNvSpPr>
+            <a:spLocks xmlns:a="http://schemas.openxmlformats.org/drawingml/2006/main" noGrp="1"/>
+          </p:cNvSpPr>
+          <p:nvPr/>
+        </p:nvSpPr>
+        <p:spPr>
+          <a:xfrm xmlns:a="http://schemas.openxmlformats.org/drawingml/2006/main">
+            <a:off x="5686425" y="2809875"/>
+            <a:ext cx="552450" cy="495300"/>
+          </a:xfrm>
+          <a:prstGeom xmlns:a="http://schemas.openxmlformats.org/drawingml/2006/main" prst="rect">
+            <a:avLst/>
+          </a:prstGeom>
+          <a:noFill xmlns:a="http://schemas.openxmlformats.org/drawingml/2006/main"/>
+          <a:ln xmlns:a="http://schemas.openxmlformats.org/drawingml/2006/main" w="0">
+            <a:noFill/>
+            <a:prstDash val="solid"/>
+          </a:ln>
+        </p:spPr>
+        <p:txBody>
+          <a:bodyPr xmlns:a="http://schemas.openxmlformats.org/drawingml/2006/main"/>
+          <a:lstStyle xmlns:a="http://schemas.openxmlformats.org/drawingml/2006/main"/>
+          <a:p xmlns:a="http://schemas.openxmlformats.org/drawingml/2006/main">
+            <a:pPr algn="ctr">
+              <a:buNone/>
+              <a:defRPr sz="2400" b="1">
+                <a:solidFill>
+                  <a:srgbClr val="52647D"/>
+                </a:solidFill>
+                <a:latin typeface="Malgun Gothic"/>
+                <a:ea typeface="Malgun Gothic"/>
+                <a:cs typeface="Malgun Gothic"/>
+              </a:defRPr>
+            </a:pPr>
+            <a:r>
+              <a:rPr sz="2400" b="1">
+                <a:solidFill>
+                  <a:srgbClr val="52647D"/>
+                </a:solidFill>
+                <a:latin typeface="Malgun Gothic"/>
+                <a:ea typeface="Malgun Gothic"/>
+                <a:cs typeface="Malgun Gothic"/>
+              </a:rPr>
+              <a:t>→</a:t>
+            </a:r>
+          </a:p>
+        </p:txBody>
+      </p:sp>
+      <p:sp>
+        <p:nvSpPr>
+          <p:cNvPr id="8" name="phase-1">
+            <a:extLst xmlns:a="http://schemas.openxmlformats.org/drawingml/2006/main">
+              <a:ext uri="{FF2B5EF4-FFF2-40B4-BE49-F238E27FC236}">
+                <a16:creationId xmlns:a16="http://schemas.microsoft.com/office/drawing/2014/main" id="{CCC5DC3E-EAAF-47A7-BE20-81A03A0A0384}"/>
+              </a:ext>
+            </a:extLst>
+          </p:cNvPr>
+          <p:cNvSpPr>
+            <a:spLocks xmlns:a="http://schemas.openxmlformats.org/drawingml/2006/main" noGrp="1"/>
+          </p:cNvSpPr>
+          <p:nvPr/>
+        </p:nvSpPr>
+        <p:spPr>
+          <a:xfrm xmlns:a="http://schemas.openxmlformats.org/drawingml/2006/main">
+            <a:off x="3476625" y="2247900"/>
+            <a:ext cx="2171700" cy="1562100"/>
           </a:xfrm>
           <a:prstGeom xmlns:a="http://schemas.openxmlformats.org/drawingml/2006/main" prst="roundRect">
             <a:avLst>
-              <a:gd name="adj" fmla="val 4211"/>
+              <a:gd name="adj" fmla="val 4878"/>
             </a:avLst>
           </a:prstGeom>
           <a:solidFill xmlns:a="http://schemas.openxmlformats.org/drawingml/2006/main">
@@ -5586,34 +5371,229 @@
       </p:sp>
       <p:sp>
         <p:nvSpPr>
-          <p:cNvPr id="7" name="community-ui">
-            <a:extLst xmlns:a="http://schemas.openxmlformats.org/drawingml/2006/main">
-              <a:ext uri="{FF2B5EF4-FFF2-40B4-BE49-F238E27FC236}">
-                <a16:creationId xmlns:a16="http://schemas.microsoft.com/office/drawing/2014/main" id="{E7F3E4DE-3896-4972-B8F1-AF6C18CFFA99}"/>
-              </a:ext>
-            </a:extLst>
-          </p:cNvPr>
-          <p:cNvSpPr>
-            <a:spLocks xmlns:a="http://schemas.openxmlformats.org/drawingml/2006/main" noGrp="1"/>
-          </p:cNvSpPr>
-          <p:nvPr/>
-        </p:nvSpPr>
-        <p:spPr>
-          <a:xfrm xmlns:a="http://schemas.openxmlformats.org/drawingml/2006/main">
-            <a:off x="8305800" y="2076450"/>
-            <a:ext cx="3143250" cy="1809750"/>
+          <p:cNvPr id="9" name="phase-label-1">
+            <a:extLst xmlns:a="http://schemas.openxmlformats.org/drawingml/2006/main">
+              <a:ext uri="{FF2B5EF4-FFF2-40B4-BE49-F238E27FC236}">
+                <a16:creationId xmlns:a16="http://schemas.microsoft.com/office/drawing/2014/main" id="{703B871E-E432-4AAB-8D50-6BCBAF062755}"/>
+              </a:ext>
+            </a:extLst>
+          </p:cNvPr>
+          <p:cNvSpPr>
+            <a:spLocks xmlns:a="http://schemas.openxmlformats.org/drawingml/2006/main" noGrp="1"/>
+          </p:cNvSpPr>
+          <p:nvPr/>
+        </p:nvSpPr>
+        <p:spPr>
+          <a:xfrm xmlns:a="http://schemas.openxmlformats.org/drawingml/2006/main">
+            <a:off x="3667125" y="2552700"/>
+            <a:ext cx="1790700" cy="704850"/>
+          </a:xfrm>
+          <a:prstGeom xmlns:a="http://schemas.openxmlformats.org/drawingml/2006/main" prst="rect">
+            <a:avLst/>
+          </a:prstGeom>
+          <a:noFill xmlns:a="http://schemas.openxmlformats.org/drawingml/2006/main"/>
+          <a:ln xmlns:a="http://schemas.openxmlformats.org/drawingml/2006/main" w="0">
+            <a:noFill/>
+            <a:prstDash val="solid"/>
+          </a:ln>
+        </p:spPr>
+        <p:txBody>
+          <a:bodyPr xmlns:a="http://schemas.openxmlformats.org/drawingml/2006/main"/>
+          <a:lstStyle xmlns:a="http://schemas.openxmlformats.org/drawingml/2006/main"/>
+          <a:p xmlns:a="http://schemas.openxmlformats.org/drawingml/2006/main">
+            <a:pPr algn="ctr">
+              <a:buNone/>
+              <a:defRPr sz="1950" b="1">
+                <a:solidFill>
+                  <a:srgbClr val="155EEF"/>
+                </a:solidFill>
+                <a:latin typeface="Malgun Gothic"/>
+                <a:ea typeface="Malgun Gothic"/>
+                <a:cs typeface="Malgun Gothic"/>
+              </a:defRPr>
+            </a:pPr>
+            <a:r>
+              <a:rPr sz="1950" b="1">
+                <a:solidFill>
+                  <a:srgbClr val="155EEF"/>
+                </a:solidFill>
+                <a:latin typeface="Malgun Gothic"/>
+                <a:ea typeface="Malgun Gothic"/>
+                <a:cs typeface="Malgun Gothic"/>
+              </a:rPr>
+              <a:t>활성화</a:t>
+            </a:r>
+          </a:p>
+          <a:p xmlns:a="http://schemas.openxmlformats.org/drawingml/2006/main">
+            <a:pPr algn="ctr">
+              <a:buNone/>
+              <a:defRPr sz="1950" b="1">
+                <a:solidFill>
+                  <a:srgbClr val="155EEF"/>
+                </a:solidFill>
+                <a:latin typeface="Malgun Gothic"/>
+                <a:ea typeface="Malgun Gothic"/>
+                <a:cs typeface="Malgun Gothic"/>
+              </a:defRPr>
+            </a:pPr>
+            <a:r>
+              <a:rPr sz="1950" b="1">
+                <a:solidFill>
+                  <a:srgbClr val="155EEF"/>
+                </a:solidFill>
+                <a:latin typeface="Malgun Gothic"/>
+                <a:ea typeface="Malgun Gothic"/>
+                <a:cs typeface="Malgun Gothic"/>
+              </a:rPr>
+              <a:t>Enabled</a:t>
+            </a:r>
+          </a:p>
+        </p:txBody>
+      </p:sp>
+      <p:sp>
+        <p:nvSpPr>
+          <p:cNvPr id="10" name="phase-http-1">
+            <a:extLst xmlns:a="http://schemas.openxmlformats.org/drawingml/2006/main">
+              <a:ext uri="{FF2B5EF4-FFF2-40B4-BE49-F238E27FC236}">
+                <a16:creationId xmlns:a16="http://schemas.microsoft.com/office/drawing/2014/main" id="{AE3959C6-3A52-4DCF-821D-D827B0664350}"/>
+              </a:ext>
+            </a:extLst>
+          </p:cNvPr>
+          <p:cNvSpPr>
+            <a:spLocks xmlns:a="http://schemas.openxmlformats.org/drawingml/2006/main" noGrp="1"/>
+          </p:cNvSpPr>
+          <p:nvPr/>
+        </p:nvSpPr>
+        <p:spPr>
+          <a:xfrm xmlns:a="http://schemas.openxmlformats.org/drawingml/2006/main">
+            <a:off x="3667125" y="3333750"/>
+            <a:ext cx="1790700" cy="285750"/>
+          </a:xfrm>
+          <a:prstGeom xmlns:a="http://schemas.openxmlformats.org/drawingml/2006/main" prst="rect">
+            <a:avLst/>
+          </a:prstGeom>
+          <a:noFill xmlns:a="http://schemas.openxmlformats.org/drawingml/2006/main"/>
+          <a:ln xmlns:a="http://schemas.openxmlformats.org/drawingml/2006/main" w="0">
+            <a:noFill/>
+            <a:prstDash val="solid"/>
+          </a:ln>
+        </p:spPr>
+        <p:txBody>
+          <a:bodyPr xmlns:a="http://schemas.openxmlformats.org/drawingml/2006/main"/>
+          <a:lstStyle xmlns:a="http://schemas.openxmlformats.org/drawingml/2006/main"/>
+          <a:p xmlns:a="http://schemas.openxmlformats.org/drawingml/2006/main">
+            <a:pPr algn="ctr">
+              <a:buNone/>
+              <a:defRPr sz="1350" b="0">
+                <a:solidFill>
+                  <a:srgbClr val="52647D"/>
+                </a:solidFill>
+                <a:latin typeface="Malgun Gothic"/>
+                <a:ea typeface="Malgun Gothic"/>
+                <a:cs typeface="Malgun Gothic"/>
+              </a:defRPr>
+            </a:pPr>
+            <a:r>
+              <a:rPr sz="1350" b="0">
+                <a:solidFill>
+                  <a:srgbClr val="52647D"/>
+                </a:solidFill>
+                <a:latin typeface="Malgun Gothic"/>
+                <a:ea typeface="Malgun Gothic"/>
+                <a:cs typeface="Malgun Gothic"/>
+              </a:rPr>
+              <a:t>HTTP 200</a:t>
+            </a:r>
+          </a:p>
+        </p:txBody>
+      </p:sp>
+      <p:sp>
+        <p:nvSpPr>
+          <p:cNvPr id="11" name="arrow-2">
+            <a:extLst xmlns:a="http://schemas.openxmlformats.org/drawingml/2006/main">
+              <a:ext uri="{FF2B5EF4-FFF2-40B4-BE49-F238E27FC236}">
+                <a16:creationId xmlns:a16="http://schemas.microsoft.com/office/drawing/2014/main" id="{EBB4EFA8-8837-4DC7-B490-F0FDBE819CC2}"/>
+              </a:ext>
+            </a:extLst>
+          </p:cNvPr>
+          <p:cNvSpPr>
+            <a:spLocks xmlns:a="http://schemas.openxmlformats.org/drawingml/2006/main" noGrp="1"/>
+          </p:cNvSpPr>
+          <p:nvPr/>
+        </p:nvSpPr>
+        <p:spPr>
+          <a:xfrm xmlns:a="http://schemas.openxmlformats.org/drawingml/2006/main">
+            <a:off x="8496300" y="2809875"/>
+            <a:ext cx="552450" cy="495300"/>
+          </a:xfrm>
+          <a:prstGeom xmlns:a="http://schemas.openxmlformats.org/drawingml/2006/main" prst="rect">
+            <a:avLst/>
+          </a:prstGeom>
+          <a:noFill xmlns:a="http://schemas.openxmlformats.org/drawingml/2006/main"/>
+          <a:ln xmlns:a="http://schemas.openxmlformats.org/drawingml/2006/main" w="0">
+            <a:noFill/>
+            <a:prstDash val="solid"/>
+          </a:ln>
+        </p:spPr>
+        <p:txBody>
+          <a:bodyPr xmlns:a="http://schemas.openxmlformats.org/drawingml/2006/main"/>
+          <a:lstStyle xmlns:a="http://schemas.openxmlformats.org/drawingml/2006/main"/>
+          <a:p xmlns:a="http://schemas.openxmlformats.org/drawingml/2006/main">
+            <a:pPr algn="ctr">
+              <a:buNone/>
+              <a:defRPr sz="2400" b="1">
+                <a:solidFill>
+                  <a:srgbClr val="52647D"/>
+                </a:solidFill>
+                <a:latin typeface="Malgun Gothic"/>
+                <a:ea typeface="Malgun Gothic"/>
+                <a:cs typeface="Malgun Gothic"/>
+              </a:defRPr>
+            </a:pPr>
+            <a:r>
+              <a:rPr sz="2400" b="1">
+                <a:solidFill>
+                  <a:srgbClr val="52647D"/>
+                </a:solidFill>
+                <a:latin typeface="Malgun Gothic"/>
+                <a:ea typeface="Malgun Gothic"/>
+                <a:cs typeface="Malgun Gothic"/>
+              </a:rPr>
+              <a:t>→</a:t>
+            </a:r>
+          </a:p>
+        </p:txBody>
+      </p:sp>
+      <p:sp>
+        <p:nvSpPr>
+          <p:cNvPr id="12" name="phase-2">
+            <a:extLst xmlns:a="http://schemas.openxmlformats.org/drawingml/2006/main">
+              <a:ext uri="{FF2B5EF4-FFF2-40B4-BE49-F238E27FC236}">
+                <a16:creationId xmlns:a16="http://schemas.microsoft.com/office/drawing/2014/main" id="{30B14935-D9F6-49E4-9FFA-35C561CA1787}"/>
+              </a:ext>
+            </a:extLst>
+          </p:cNvPr>
+          <p:cNvSpPr>
+            <a:spLocks xmlns:a="http://schemas.openxmlformats.org/drawingml/2006/main" noGrp="1"/>
+          </p:cNvSpPr>
+          <p:nvPr/>
+        </p:nvSpPr>
+        <p:spPr>
+          <a:xfrm xmlns:a="http://schemas.openxmlformats.org/drawingml/2006/main">
+            <a:off x="6286500" y="2247900"/>
+            <a:ext cx="2171700" cy="1562100"/>
           </a:xfrm>
           <a:prstGeom xmlns:a="http://schemas.openxmlformats.org/drawingml/2006/main" prst="roundRect">
             <a:avLst>
-              <a:gd name="adj" fmla="val 4211"/>
+              <a:gd name="adj" fmla="val 4878"/>
             </a:avLst>
           </a:prstGeom>
           <a:solidFill xmlns:a="http://schemas.openxmlformats.org/drawingml/2006/main">
-            <a:srgbClr val="EAFAF2"/>
+            <a:srgbClr val="F3F7FC"/>
           </a:solidFill>
           <a:ln xmlns:a="http://schemas.openxmlformats.org/drawingml/2006/main" w="9525">
             <a:solidFill>
-              <a:srgbClr val="86D2AA"/>
+              <a:srgbClr val="D5E1F1"/>
             </a:solidFill>
             <a:prstDash val="solid"/>
           </a:ln>
@@ -5621,22 +5601,22 @@
       </p:sp>
       <p:sp>
         <p:nvSpPr>
-          <p:cNvPr id="8" name="flarum-core-title">
-            <a:extLst xmlns:a="http://schemas.openxmlformats.org/drawingml/2006/main">
-              <a:ext uri="{FF2B5EF4-FFF2-40B4-BE49-F238E27FC236}">
-                <a16:creationId xmlns:a16="http://schemas.microsoft.com/office/drawing/2014/main" id="{0136A85B-5961-4FFA-8B8D-5B294E1A0C1F}"/>
-              </a:ext>
-            </a:extLst>
-          </p:cNvPr>
-          <p:cNvSpPr>
-            <a:spLocks xmlns:a="http://schemas.openxmlformats.org/drawingml/2006/main" noGrp="1"/>
-          </p:cNvSpPr>
-          <p:nvPr/>
-        </p:nvSpPr>
-        <p:spPr>
-          <a:xfrm xmlns:a="http://schemas.openxmlformats.org/drawingml/2006/main">
-            <a:off x="933450" y="2533650"/>
-            <a:ext cx="2609850" cy="457200"/>
+          <p:cNvPr id="13" name="phase-label-2">
+            <a:extLst xmlns:a="http://schemas.openxmlformats.org/drawingml/2006/main">
+              <a:ext uri="{FF2B5EF4-FFF2-40B4-BE49-F238E27FC236}">
+                <a16:creationId xmlns:a16="http://schemas.microsoft.com/office/drawing/2014/main" id="{F84B927D-9C32-4480-B1CA-A2BEFFF6BD2C}"/>
+              </a:ext>
+            </a:extLst>
+          </p:cNvPr>
+          <p:cNvSpPr>
+            <a:spLocks xmlns:a="http://schemas.openxmlformats.org/drawingml/2006/main" noGrp="1"/>
+          </p:cNvSpPr>
+          <p:nvPr/>
+        </p:nvSpPr>
+        <p:spPr>
+          <a:xfrm xmlns:a="http://schemas.openxmlformats.org/drawingml/2006/main">
+            <a:off x="6477000" y="2552700"/>
+            <a:ext cx="1790700" cy="704850"/>
           </a:xfrm>
           <a:prstGeom xmlns:a="http://schemas.openxmlformats.org/drawingml/2006/main" prst="rect">
             <a:avLst/>
@@ -5652,7 +5632,8 @@
           <a:lstStyle xmlns:a="http://schemas.openxmlformats.org/drawingml/2006/main"/>
           <a:p xmlns:a="http://schemas.openxmlformats.org/drawingml/2006/main">
             <a:pPr algn="ctr">
-              <a:defRPr sz="2250" b="1">
+              <a:buNone/>
+              <a:defRPr sz="1950" b="1">
                 <a:solidFill>
                   <a:srgbClr val="15253E"/>
                 </a:solidFill>
@@ -5662,7 +5643,7 @@
               </a:defRPr>
             </a:pPr>
             <a:r>
-              <a:rPr sz="2250" b="1">
+              <a:rPr sz="1950" b="1">
                 <a:solidFill>
                   <a:srgbClr val="15253E"/>
                 </a:solidFill>
@@ -5670,29 +5651,53 @@
                 <a:ea typeface="Malgun Gothic"/>
                 <a:cs typeface="Malgun Gothic"/>
               </a:rPr>
-              <a:t>Flarum 1.8.18</a:t>
-            </a:r>
-          </a:p>
-        </p:txBody>
-      </p:sp>
-      <p:sp>
-        <p:nvSpPr>
-          <p:cNvPr id="9" name="flarum-core-copy">
-            <a:extLst xmlns:a="http://schemas.openxmlformats.org/drawingml/2006/main">
-              <a:ext uri="{FF2B5EF4-FFF2-40B4-BE49-F238E27FC236}">
-                <a16:creationId xmlns:a16="http://schemas.microsoft.com/office/drawing/2014/main" id="{E7DB7EDB-905C-43D0-890F-80D3946E2991}"/>
-              </a:ext>
-            </a:extLst>
-          </p:cNvPr>
-          <p:cNvSpPr>
-            <a:spLocks xmlns:a="http://schemas.openxmlformats.org/drawingml/2006/main" noGrp="1"/>
-          </p:cNvSpPr>
-          <p:nvPr/>
-        </p:nvSpPr>
-        <p:spPr>
-          <a:xfrm xmlns:a="http://schemas.openxmlformats.org/drawingml/2006/main">
-            <a:off x="933450" y="3105150"/>
-            <a:ext cx="2609850" cy="323850"/>
+              <a:t>롤백</a:t>
+            </a:r>
+          </a:p>
+          <a:p xmlns:a="http://schemas.openxmlformats.org/drawingml/2006/main">
+            <a:pPr algn="ctr">
+              <a:buNone/>
+              <a:defRPr sz="1950" b="1">
+                <a:solidFill>
+                  <a:srgbClr val="15253E"/>
+                </a:solidFill>
+                <a:latin typeface="Malgun Gothic"/>
+                <a:ea typeface="Malgun Gothic"/>
+                <a:cs typeface="Malgun Gothic"/>
+              </a:defRPr>
+            </a:pPr>
+            <a:r>
+              <a:rPr sz="1950" b="1">
+                <a:solidFill>
+                  <a:srgbClr val="15253E"/>
+                </a:solidFill>
+                <a:latin typeface="Malgun Gothic"/>
+                <a:ea typeface="Malgun Gothic"/>
+                <a:cs typeface="Malgun Gothic"/>
+              </a:rPr>
+              <a:t>Disabled</a:t>
+            </a:r>
+          </a:p>
+        </p:txBody>
+      </p:sp>
+      <p:sp>
+        <p:nvSpPr>
+          <p:cNvPr id="14" name="phase-http-2">
+            <a:extLst xmlns:a="http://schemas.openxmlformats.org/drawingml/2006/main">
+              <a:ext uri="{FF2B5EF4-FFF2-40B4-BE49-F238E27FC236}">
+                <a16:creationId xmlns:a16="http://schemas.microsoft.com/office/drawing/2014/main" id="{03579DE4-BE81-4564-8731-4EC8DE467A0F}"/>
+              </a:ext>
+            </a:extLst>
+          </p:cNvPr>
+          <p:cNvSpPr>
+            <a:spLocks xmlns:a="http://schemas.openxmlformats.org/drawingml/2006/main" noGrp="1"/>
+          </p:cNvSpPr>
+          <p:nvPr/>
+        </p:nvSpPr>
+        <p:spPr>
+          <a:xfrm xmlns:a="http://schemas.openxmlformats.org/drawingml/2006/main">
+            <a:off x="6477000" y="3333750"/>
+            <a:ext cx="1790700" cy="285750"/>
           </a:xfrm>
           <a:prstGeom xmlns:a="http://schemas.openxmlformats.org/drawingml/2006/main" prst="rect">
             <a:avLst/>
@@ -5708,7 +5713,8 @@
           <a:lstStyle xmlns:a="http://schemas.openxmlformats.org/drawingml/2006/main"/>
           <a:p xmlns:a="http://schemas.openxmlformats.org/drawingml/2006/main">
             <a:pPr algn="ctr">
-              <a:defRPr sz="1500" b="0">
+              <a:buNone/>
+              <a:defRPr sz="1350" b="0">
                 <a:solidFill>
                   <a:srgbClr val="52647D"/>
                 </a:solidFill>
@@ -5718,7 +5724,7 @@
               </a:defRPr>
             </a:pPr>
             <a:r>
-              <a:rPr sz="1500" b="0">
+              <a:rPr sz="1350" b="0">
                 <a:solidFill>
                   <a:srgbClr val="52647D"/>
                 </a:solidFill>
@@ -5726,29 +5732,64 @@
                 <a:ea typeface="Malgun Gothic"/>
                 <a:cs typeface="Malgun Gothic"/>
               </a:rPr>
-              <a:t>라우팅 · 권한 · 검색 · 작성</a:t>
-            </a:r>
-          </a:p>
-        </p:txBody>
-      </p:sp>
-      <p:sp>
-        <p:nvSpPr>
-          <p:cNvPr id="10" name="theme-title">
-            <a:extLst xmlns:a="http://schemas.openxmlformats.org/drawingml/2006/main">
-              <a:ext uri="{FF2B5EF4-FFF2-40B4-BE49-F238E27FC236}">
-                <a16:creationId xmlns:a16="http://schemas.microsoft.com/office/drawing/2014/main" id="{DBD93488-5F1B-4674-80CA-8AF64A4024CD}"/>
-              </a:ext>
-            </a:extLst>
-          </p:cNvPr>
-          <p:cNvSpPr>
-            <a:spLocks xmlns:a="http://schemas.openxmlformats.org/drawingml/2006/main" noGrp="1"/>
-          </p:cNvSpPr>
-          <p:nvPr/>
-        </p:nvSpPr>
-        <p:spPr>
-          <a:xfrm xmlns:a="http://schemas.openxmlformats.org/drawingml/2006/main">
-            <a:off x="4819650" y="2362200"/>
-            <a:ext cx="2476500" cy="742950"/>
+              <a:t>HTTP 200</a:t>
+            </a:r>
+          </a:p>
+        </p:txBody>
+      </p:sp>
+      <p:sp>
+        <p:nvSpPr>
+          <p:cNvPr id="15" name="phase-3">
+            <a:extLst xmlns:a="http://schemas.openxmlformats.org/drawingml/2006/main">
+              <a:ext uri="{FF2B5EF4-FFF2-40B4-BE49-F238E27FC236}">
+                <a16:creationId xmlns:a16="http://schemas.microsoft.com/office/drawing/2014/main" id="{B1D3BD30-83E1-498D-B0C3-D6998089D16E}"/>
+              </a:ext>
+            </a:extLst>
+          </p:cNvPr>
+          <p:cNvSpPr>
+            <a:spLocks xmlns:a="http://schemas.openxmlformats.org/drawingml/2006/main" noGrp="1"/>
+          </p:cNvSpPr>
+          <p:nvPr/>
+        </p:nvSpPr>
+        <p:spPr>
+          <a:xfrm xmlns:a="http://schemas.openxmlformats.org/drawingml/2006/main">
+            <a:off x="9096375" y="2247900"/>
+            <a:ext cx="2171700" cy="1562100"/>
+          </a:xfrm>
+          <a:prstGeom xmlns:a="http://schemas.openxmlformats.org/drawingml/2006/main" prst="roundRect">
+            <a:avLst>
+              <a:gd name="adj" fmla="val 4878"/>
+            </a:avLst>
+          </a:prstGeom>
+          <a:solidFill xmlns:a="http://schemas.openxmlformats.org/drawingml/2006/main">
+            <a:srgbClr val="EAF2FF"/>
+          </a:solidFill>
+          <a:ln xmlns:a="http://schemas.openxmlformats.org/drawingml/2006/main" w="9525">
+            <a:solidFill>
+              <a:srgbClr val="155EEF"/>
+            </a:solidFill>
+            <a:prstDash val="solid"/>
+          </a:ln>
+        </p:spPr>
+      </p:sp>
+      <p:sp>
+        <p:nvSpPr>
+          <p:cNvPr id="16" name="phase-label-3">
+            <a:extLst xmlns:a="http://schemas.openxmlformats.org/drawingml/2006/main">
+              <a:ext uri="{FF2B5EF4-FFF2-40B4-BE49-F238E27FC236}">
+                <a16:creationId xmlns:a16="http://schemas.microsoft.com/office/drawing/2014/main" id="{2E4B63B9-05DD-4586-92E2-218CE46B8CF6}"/>
+              </a:ext>
+            </a:extLst>
+          </p:cNvPr>
+          <p:cNvSpPr>
+            <a:spLocks xmlns:a="http://schemas.openxmlformats.org/drawingml/2006/main" noGrp="1"/>
+          </p:cNvSpPr>
+          <p:nvPr/>
+        </p:nvSpPr>
+        <p:spPr>
+          <a:xfrm xmlns:a="http://schemas.openxmlformats.org/drawingml/2006/main">
+            <a:off x="9286875" y="2552700"/>
+            <a:ext cx="1790700" cy="704850"/>
           </a:xfrm>
           <a:prstGeom xmlns:a="http://schemas.openxmlformats.org/drawingml/2006/main" prst="rect">
             <a:avLst/>
@@ -5764,7 +5805,8 @@
           <a:lstStyle xmlns:a="http://schemas.openxmlformats.org/drawingml/2006/main"/>
           <a:p xmlns:a="http://schemas.openxmlformats.org/drawingml/2006/main">
             <a:pPr algn="ctr">
-              <a:defRPr sz="2175" b="1">
+              <a:buNone/>
+              <a:defRPr sz="1950" b="1">
                 <a:solidFill>
                   <a:srgbClr val="155EEF"/>
                 </a:solidFill>
@@ -5774,7 +5816,7 @@
               </a:defRPr>
             </a:pPr>
             <a:r>
-              <a:rPr sz="2175" b="1">
+              <a:rPr sz="1950" b="1">
                 <a:solidFill>
                   <a:srgbClr val="155EEF"/>
                 </a:solidFill>
@@ -5782,12 +5824,13 @@
                 <a:ea typeface="Malgun Gothic"/>
                 <a:cs typeface="Malgun Gothic"/>
               </a:rPr>
-              <a:t>ABLESTACK</a:t>
+              <a:t>최종</a:t>
             </a:r>
           </a:p>
           <a:p xmlns:a="http://schemas.openxmlformats.org/drawingml/2006/main">
             <a:pPr algn="ctr">
-              <a:defRPr sz="2175" b="1">
+              <a:buNone/>
+              <a:defRPr sz="1950" b="1">
                 <a:solidFill>
                   <a:srgbClr val="155EEF"/>
                 </a:solidFill>
@@ -5797,7 +5840,7 @@
               </a:defRPr>
             </a:pPr>
             <a:r>
-              <a:rPr sz="2175" b="1">
+              <a:rPr sz="1950" b="1">
                 <a:solidFill>
                   <a:srgbClr val="155EEF"/>
                 </a:solidFill>
@@ -5805,29 +5848,29 @@
                 <a:ea typeface="Malgun Gothic"/>
                 <a:cs typeface="Malgun Gothic"/>
               </a:rPr>
-              <a:t>Theme</a:t>
-            </a:r>
-          </a:p>
-        </p:txBody>
-      </p:sp>
-      <p:sp>
-        <p:nvSpPr>
-          <p:cNvPr id="11" name="theme-copy">
-            <a:extLst xmlns:a="http://schemas.openxmlformats.org/drawingml/2006/main">
-              <a:ext uri="{FF2B5EF4-FFF2-40B4-BE49-F238E27FC236}">
-                <a16:creationId xmlns:a16="http://schemas.microsoft.com/office/drawing/2014/main" id="{C8B03E0C-FD83-420F-AF7B-3F7089B47394}"/>
-              </a:ext>
-            </a:extLst>
-          </p:cNvPr>
-          <p:cNvSpPr>
-            <a:spLocks xmlns:a="http://schemas.openxmlformats.org/drawingml/2006/main" noGrp="1"/>
-          </p:cNvSpPr>
-          <p:nvPr/>
-        </p:nvSpPr>
-        <p:spPr>
-          <a:xfrm xmlns:a="http://schemas.openxmlformats.org/drawingml/2006/main">
-            <a:off x="4819650" y="3257550"/>
-            <a:ext cx="2476500" cy="323850"/>
+              <a:t>Enabled</a:t>
+            </a:r>
+          </a:p>
+        </p:txBody>
+      </p:sp>
+      <p:sp>
+        <p:nvSpPr>
+          <p:cNvPr id="17" name="phase-http-3">
+            <a:extLst xmlns:a="http://schemas.openxmlformats.org/drawingml/2006/main">
+              <a:ext uri="{FF2B5EF4-FFF2-40B4-BE49-F238E27FC236}">
+                <a16:creationId xmlns:a16="http://schemas.microsoft.com/office/drawing/2014/main" id="{B2993C25-3261-4B34-90FD-48CACC67BAA0}"/>
+              </a:ext>
+            </a:extLst>
+          </p:cNvPr>
+          <p:cNvSpPr>
+            <a:spLocks xmlns:a="http://schemas.openxmlformats.org/drawingml/2006/main" noGrp="1"/>
+          </p:cNvSpPr>
+          <p:nvPr/>
+        </p:nvSpPr>
+        <p:spPr>
+          <a:xfrm xmlns:a="http://schemas.openxmlformats.org/drawingml/2006/main">
+            <a:off x="9286875" y="3333750"/>
+            <a:ext cx="1790700" cy="285750"/>
           </a:xfrm>
           <a:prstGeom xmlns:a="http://schemas.openxmlformats.org/drawingml/2006/main" prst="rect">
             <a:avLst/>
@@ -5843,6 +5886,7 @@
           <a:lstStyle xmlns:a="http://schemas.openxmlformats.org/drawingml/2006/main"/>
           <a:p xmlns:a="http://schemas.openxmlformats.org/drawingml/2006/main">
             <a:pPr algn="ctr">
+              <a:buNone/>
               <a:defRPr sz="1350" b="0">
                 <a:solidFill>
                   <a:srgbClr val="52647D"/>
@@ -5861,29 +5905,29 @@
                 <a:ea typeface="Malgun Gothic"/>
                 <a:cs typeface="Malgun Gothic"/>
               </a:rPr>
-              <a:t>LESS · 한글 Cache · 상태 표시</a:t>
-            </a:r>
-          </a:p>
-        </p:txBody>
-      </p:sp>
-      <p:sp>
-        <p:nvSpPr>
-          <p:cNvPr id="12" name="ui-title">
-            <a:extLst xmlns:a="http://schemas.openxmlformats.org/drawingml/2006/main">
-              <a:ext uri="{FF2B5EF4-FFF2-40B4-BE49-F238E27FC236}">
-                <a16:creationId xmlns:a16="http://schemas.microsoft.com/office/drawing/2014/main" id="{37B98FC2-7DDE-45BF-B2BF-AA8E8A3D4DE8}"/>
-              </a:ext>
-            </a:extLst>
-          </p:cNvPr>
-          <p:cNvSpPr>
-            <a:spLocks xmlns:a="http://schemas.openxmlformats.org/drawingml/2006/main" noGrp="1"/>
-          </p:cNvSpPr>
-          <p:nvPr/>
-        </p:nvSpPr>
-        <p:spPr>
-          <a:xfrm xmlns:a="http://schemas.openxmlformats.org/drawingml/2006/main">
-            <a:off x="8572500" y="2533650"/>
-            <a:ext cx="2609850" cy="457200"/>
+              <a:t>HTTP 200</a:t>
+            </a:r>
+          </a:p>
+        </p:txBody>
+      </p:sp>
+      <p:sp>
+        <p:nvSpPr>
+          <p:cNvPr id="18" name="integrity-count">
+            <a:extLst xmlns:a="http://schemas.openxmlformats.org/drawingml/2006/main">
+              <a:ext uri="{FF2B5EF4-FFF2-40B4-BE49-F238E27FC236}">
+                <a16:creationId xmlns:a16="http://schemas.microsoft.com/office/drawing/2014/main" id="{7D531B41-66A5-4441-97A2-88436706648C}"/>
+              </a:ext>
+            </a:extLst>
+          </p:cNvPr>
+          <p:cNvSpPr>
+            <a:spLocks xmlns:a="http://schemas.openxmlformats.org/drawingml/2006/main" noGrp="1"/>
+          </p:cNvSpPr>
+          <p:nvPr/>
+        </p:nvSpPr>
+        <p:spPr>
+          <a:xfrm xmlns:a="http://schemas.openxmlformats.org/drawingml/2006/main">
+            <a:off x="857250" y="4552950"/>
+            <a:ext cx="10477500" cy="552450"/>
           </a:xfrm>
           <a:prstGeom xmlns:a="http://schemas.openxmlformats.org/drawingml/2006/main" prst="rect">
             <a:avLst/>
@@ -5899,47 +5943,48 @@
           <a:lstStyle xmlns:a="http://schemas.openxmlformats.org/drawingml/2006/main"/>
           <a:p xmlns:a="http://schemas.openxmlformats.org/drawingml/2006/main">
             <a:pPr algn="ctr">
-              <a:defRPr sz="2250" b="1">
-                <a:solidFill>
-                  <a:srgbClr val="078248"/>
-                </a:solidFill>
-                <a:latin typeface="Malgun Gothic"/>
-                <a:ea typeface="Malgun Gothic"/>
-                <a:cs typeface="Malgun Gothic"/>
-              </a:defRPr>
-            </a:pPr>
-            <a:r>
-              <a:rPr sz="2250" b="1">
-                <a:solidFill>
-                  <a:srgbClr val="078248"/>
-                </a:solidFill>
-                <a:latin typeface="Malgun Gothic"/>
-                <a:ea typeface="Malgun Gothic"/>
-                <a:cs typeface="Malgun Gothic"/>
-              </a:rPr>
-              <a:t>Community UI</a:t>
-            </a:r>
-          </a:p>
-        </p:txBody>
-      </p:sp>
-      <p:sp>
-        <p:nvSpPr>
-          <p:cNvPr id="13" name="ui-copy">
-            <a:extLst xmlns:a="http://schemas.openxmlformats.org/drawingml/2006/main">
-              <a:ext uri="{FF2B5EF4-FFF2-40B4-BE49-F238E27FC236}">
-                <a16:creationId xmlns:a16="http://schemas.microsoft.com/office/drawing/2014/main" id="{3B149A4F-0659-480B-9329-13D669118779}"/>
-              </a:ext>
-            </a:extLst>
-          </p:cNvPr>
-          <p:cNvSpPr>
-            <a:spLocks xmlns:a="http://schemas.openxmlformats.org/drawingml/2006/main" noGrp="1"/>
-          </p:cNvSpPr>
-          <p:nvPr/>
-        </p:nvSpPr>
-        <p:spPr>
-          <a:xfrm xmlns:a="http://schemas.openxmlformats.org/drawingml/2006/main">
-            <a:off x="8572500" y="3105150"/>
-            <a:ext cx="2609850" cy="323850"/>
+              <a:buNone/>
+              <a:defRPr sz="2400" b="1">
+                <a:solidFill>
+                  <a:srgbClr val="15253E"/>
+                </a:solidFill>
+                <a:latin typeface="Malgun Gothic"/>
+                <a:ea typeface="Malgun Gothic"/>
+                <a:cs typeface="Malgun Gothic"/>
+              </a:defRPr>
+            </a:pPr>
+            <a:r>
+              <a:rPr sz="2400" b="1">
+                <a:solidFill>
+                  <a:srgbClr val="15253E"/>
+                </a:solidFill>
+                <a:latin typeface="Malgun Gothic"/>
+                <a:ea typeface="Malgun Gothic"/>
+                <a:cs typeface="Malgun Gothic"/>
+              </a:rPr>
+              <a:t>39 users · 117 discussions · 305 posts</a:t>
+            </a:r>
+          </a:p>
+        </p:txBody>
+      </p:sp>
+      <p:sp>
+        <p:nvSpPr>
+          <p:cNvPr id="19" name="integrity-hash">
+            <a:extLst xmlns:a="http://schemas.openxmlformats.org/drawingml/2006/main">
+              <a:ext uri="{FF2B5EF4-FFF2-40B4-BE49-F238E27FC236}">
+                <a16:creationId xmlns:a16="http://schemas.microsoft.com/office/drawing/2014/main" id="{CFB67921-C80E-4482-BC13-B3C78F46F4D4}"/>
+              </a:ext>
+            </a:extLst>
+          </p:cNvPr>
+          <p:cNvSpPr>
+            <a:spLocks xmlns:a="http://schemas.openxmlformats.org/drawingml/2006/main" noGrp="1"/>
+          </p:cNvSpPr>
+          <p:nvPr/>
+        </p:nvSpPr>
+        <p:spPr>
+          <a:xfrm xmlns:a="http://schemas.openxmlformats.org/drawingml/2006/main">
+            <a:off x="857250" y="5238750"/>
+            <a:ext cx="10477500" cy="457200"/>
           </a:xfrm>
           <a:prstGeom xmlns:a="http://schemas.openxmlformats.org/drawingml/2006/main" prst="rect">
             <a:avLst/>
@@ -5955,116 +6000,26 @@
           <a:lstStyle xmlns:a="http://schemas.openxmlformats.org/drawingml/2006/main"/>
           <a:p xmlns:a="http://schemas.openxmlformats.org/drawingml/2006/main">
             <a:pPr algn="ctr">
-              <a:defRPr sz="1500" b="0">
-                <a:solidFill>
-                  <a:srgbClr val="52647D"/>
-                </a:solidFill>
-                <a:latin typeface="Malgun Gothic"/>
-                <a:ea typeface="Malgun Gothic"/>
-                <a:cs typeface="Malgun Gothic"/>
-              </a:defRPr>
-            </a:pPr>
-            <a:r>
-              <a:rPr sz="1500" b="0">
-                <a:solidFill>
-                  <a:srgbClr val="52647D"/>
-                </a:solidFill>
-                <a:latin typeface="Malgun Gothic"/>
-                <a:ea typeface="Malgun Gothic"/>
-                <a:cs typeface="Malgun Gothic"/>
-              </a:rPr>
-              <a:t>Desktop · Mobile · Accessibility</a:t>
-            </a:r>
-          </a:p>
-        </p:txBody>
-      </p:sp>
-      <p:sp>
-        <p:nvSpPr>
-          <p:cNvPr id="14" name="rollback-strip">
-            <a:extLst xmlns:a="http://schemas.openxmlformats.org/drawingml/2006/main">
-              <a:ext uri="{FF2B5EF4-FFF2-40B4-BE49-F238E27FC236}">
-                <a16:creationId xmlns:a16="http://schemas.microsoft.com/office/drawing/2014/main" id="{1329660C-7BA4-47F6-B431-662F73A2D12C}"/>
-              </a:ext>
-            </a:extLst>
-          </p:cNvPr>
-          <p:cNvSpPr>
-            <a:spLocks xmlns:a="http://schemas.openxmlformats.org/drawingml/2006/main" noGrp="1"/>
-          </p:cNvSpPr>
-          <p:nvPr/>
-        </p:nvSpPr>
-        <p:spPr>
-          <a:xfrm xmlns:a="http://schemas.openxmlformats.org/drawingml/2006/main">
-            <a:off x="2381250" y="4781550"/>
-            <a:ext cx="7429500" cy="838200"/>
-          </a:xfrm>
-          <a:prstGeom xmlns:a="http://schemas.openxmlformats.org/drawingml/2006/main" prst="roundRect">
-            <a:avLst>
-              <a:gd name="adj" fmla="val 9091"/>
-            </a:avLst>
-          </a:prstGeom>
-          <a:solidFill xmlns:a="http://schemas.openxmlformats.org/drawingml/2006/main">
-            <a:srgbClr val="FFF6DF"/>
-          </a:solidFill>
-          <a:ln xmlns:a="http://schemas.openxmlformats.org/drawingml/2006/main" w="9525">
-            <a:solidFill>
-              <a:srgbClr val="E4B955"/>
-            </a:solidFill>
-            <a:prstDash val="solid"/>
-          </a:ln>
-        </p:spPr>
-      </p:sp>
-      <p:sp>
-        <p:nvSpPr>
-          <p:cNvPr id="15" name="rollback-copy">
-            <a:extLst xmlns:a="http://schemas.openxmlformats.org/drawingml/2006/main">
-              <a:ext uri="{FF2B5EF4-FFF2-40B4-BE49-F238E27FC236}">
-                <a16:creationId xmlns:a16="http://schemas.microsoft.com/office/drawing/2014/main" id="{29AD88B8-B664-4F55-9D04-7AE25E4B8A59}"/>
-              </a:ext>
-            </a:extLst>
-          </p:cNvPr>
-          <p:cNvSpPr>
-            <a:spLocks xmlns:a="http://schemas.openxmlformats.org/drawingml/2006/main" noGrp="1"/>
-          </p:cNvSpPr>
-          <p:nvPr/>
-        </p:nvSpPr>
-        <p:spPr>
-          <a:xfrm xmlns:a="http://schemas.openxmlformats.org/drawingml/2006/main">
-            <a:off x="2686050" y="4991100"/>
-            <a:ext cx="6819900" cy="400050"/>
-          </a:xfrm>
-          <a:prstGeom xmlns:a="http://schemas.openxmlformats.org/drawingml/2006/main" prst="rect">
-            <a:avLst/>
-          </a:prstGeom>
-          <a:noFill xmlns:a="http://schemas.openxmlformats.org/drawingml/2006/main"/>
-          <a:ln xmlns:a="http://schemas.openxmlformats.org/drawingml/2006/main" w="0">
-            <a:noFill/>
-            <a:prstDash val="solid"/>
-          </a:ln>
-        </p:spPr>
-        <p:txBody>
-          <a:bodyPr xmlns:a="http://schemas.openxmlformats.org/drawingml/2006/main"/>
-          <a:lstStyle xmlns:a="http://schemas.openxmlformats.org/drawingml/2006/main"/>
-          <a:p xmlns:a="http://schemas.openxmlformats.org/drawingml/2006/main">
-            <a:pPr algn="ctr">
-              <a:defRPr sz="1950" b="1">
-                <a:solidFill>
-                  <a:srgbClr val="9A6700"/>
-                </a:solidFill>
-                <a:latin typeface="Malgun Gothic"/>
-                <a:ea typeface="Malgun Gothic"/>
-                <a:cs typeface="Malgun Gothic"/>
-              </a:defRPr>
-            </a:pPr>
-            <a:r>
-              <a:rPr sz="1950" b="1">
-                <a:solidFill>
-                  <a:srgbClr val="9A6700"/>
-                </a:solidFill>
-                <a:latin typeface="Malgun Gothic"/>
-                <a:ea typeface="Malgun Gothic"/>
-                <a:cs typeface="Malgun Gothic"/>
-              </a:rPr>
-              <a:t>장애 시 extension:disable → 기본 Flarum UI 복귀</a:t>
+              <a:buNone/>
+              <a:defRPr sz="1800" b="0">
+                <a:solidFill>
+                  <a:srgbClr val="078248"/>
+                </a:solidFill>
+                <a:latin typeface="Malgun Gothic"/>
+                <a:ea typeface="Malgun Gothic"/>
+                <a:cs typeface="Malgun Gothic"/>
+              </a:defRPr>
+            </a:pPr>
+            <a:r>
+              <a:rPr sz="1800" b="0">
+                <a:solidFill>
+                  <a:srgbClr val="078248"/>
+                </a:solidFill>
+                <a:latin typeface="Malgun Gothic"/>
+                <a:ea typeface="Malgun Gothic"/>
+                <a:cs typeface="Malgun Gothic"/>
+              </a:rPr>
+              <a:t>콘텐츠 SHA-256 동일 · 첨부 SHA-256 동일 · 정적 계약 8/8</a:t>
             </a:r>
           </a:p>
         </p:txBody>
@@ -6072,7 +6027,7 @@
     </p:spTree>
     <p:extLst>
       <p:ext uri="{BB962C8B-B14F-4D97-AF65-F5344CB8AC3E}">
-        <p14:creationId xmlns:p14="http://schemas.microsoft.com/office/powerpoint/2010/main" val="1960291864"/>
+        <p14:creationId xmlns:p14="http://schemas.microsoft.com/office/powerpoint/2010/main" val="224538138"/>
       </p:ext>
     </p:extLst>
   </p:cSld>
@@ -6100,22 +6055,22 @@
       </p:grpSpPr>
       <p:sp>
         <p:nvSpPr>
-          <p:cNvPr id="8" name="close-kicker">
-            <a:extLst xmlns:a="http://schemas.openxmlformats.org/drawingml/2006/main">
-              <a:ext uri="{FF2B5EF4-FFF2-40B4-BE49-F238E27FC236}">
-                <a16:creationId xmlns:a16="http://schemas.microsoft.com/office/drawing/2014/main" id="{CA02A572-4AC9-4737-B75D-10EC7C22C06C}"/>
-              </a:ext>
-            </a:extLst>
-          </p:cNvPr>
-          <p:cNvSpPr>
-            <a:spLocks xmlns:a="http://schemas.openxmlformats.org/drawingml/2006/main" noGrp="1"/>
-          </p:cNvSpPr>
-          <p:nvPr/>
-        </p:nvSpPr>
-        <p:spPr>
-          <a:xfrm xmlns:a="http://schemas.openxmlformats.org/drawingml/2006/main">
-            <a:off x="457200" y="400050"/>
-            <a:ext cx="6191250" cy="342900"/>
+          <p:cNvPr id="16" name="title-7">
+            <a:extLst xmlns:a="http://schemas.openxmlformats.org/drawingml/2006/main">
+              <a:ext uri="{FF2B5EF4-FFF2-40B4-BE49-F238E27FC236}">
+                <a16:creationId xmlns:a16="http://schemas.microsoft.com/office/drawing/2014/main" id="{B1E5F8CB-12E8-414B-A782-7921D9DB98E9}"/>
+              </a:ext>
+            </a:extLst>
+          </p:cNvPr>
+          <p:cNvSpPr>
+            <a:spLocks xmlns:a="http://schemas.openxmlformats.org/drawingml/2006/main" noGrp="1"/>
+          </p:cNvSpPr>
+          <p:nvPr/>
+        </p:nvSpPr>
+        <p:spPr>
+          <a:xfrm xmlns:a="http://schemas.openxmlformats.org/drawingml/2006/main">
+            <a:off x="457200" y="342900"/>
+            <a:ext cx="10572750" cy="685800"/>
           </a:xfrm>
           <a:prstGeom xmlns:a="http://schemas.openxmlformats.org/drawingml/2006/main" prst="rect">
             <a:avLst/>
@@ -6131,47 +6086,48 @@
           <a:lstStyle xmlns:a="http://schemas.openxmlformats.org/drawingml/2006/main"/>
           <a:p xmlns:a="http://schemas.openxmlformats.org/drawingml/2006/main">
             <a:pPr algn="l">
-              <a:defRPr sz="1500" b="1">
-                <a:solidFill>
-                  <a:srgbClr val="52647D"/>
-                </a:solidFill>
-                <a:latin typeface="Malgun Gothic"/>
-                <a:ea typeface="Malgun Gothic"/>
-                <a:cs typeface="Malgun Gothic"/>
-              </a:defRPr>
-            </a:pPr>
-            <a:r>
-              <a:rPr sz="1500" b="1">
-                <a:solidFill>
-                  <a:srgbClr val="52647D"/>
-                </a:solidFill>
-                <a:latin typeface="Malgun Gothic"/>
-                <a:ea typeface="Malgun Gothic"/>
-                <a:cs typeface="Malgun Gothic"/>
-              </a:rPr>
-              <a:t>ISSUE #73 · IMPLEMENTATION COMPLETE</a:t>
-            </a:r>
-          </a:p>
-        </p:txBody>
-      </p:sp>
-      <p:sp>
-        <p:nvSpPr>
-          <p:cNvPr id="2" name="close-title">
-            <a:extLst xmlns:a="http://schemas.openxmlformats.org/drawingml/2006/main">
-              <a:ext uri="{FF2B5EF4-FFF2-40B4-BE49-F238E27FC236}">
-                <a16:creationId xmlns:a16="http://schemas.microsoft.com/office/drawing/2014/main" id="{F5C154A0-B755-42E9-9F79-7921475EF0CD}"/>
-              </a:ext>
-            </a:extLst>
-          </p:cNvPr>
-          <p:cNvSpPr>
-            <a:spLocks xmlns:a="http://schemas.openxmlformats.org/drawingml/2006/main" noGrp="1"/>
-          </p:cNvSpPr>
-          <p:nvPr/>
-        </p:nvSpPr>
-        <p:spPr>
-          <a:xfrm xmlns:a="http://schemas.openxmlformats.org/drawingml/2006/main">
-            <a:off x="457200" y="1600200"/>
-            <a:ext cx="6667500" cy="1714500"/>
+              <a:buNone/>
+              <a:defRPr sz="3000" b="1">
+                <a:solidFill>
+                  <a:srgbClr val="15253E"/>
+                </a:solidFill>
+                <a:latin typeface="Malgun Gothic"/>
+                <a:ea typeface="Malgun Gothic"/>
+                <a:cs typeface="Malgun Gothic"/>
+              </a:defRPr>
+            </a:pPr>
+            <a:r>
+              <a:rPr sz="3000" b="1">
+                <a:solidFill>
+                  <a:srgbClr val="15253E"/>
+                </a:solidFill>
+                <a:latin typeface="Malgun Gothic"/>
+                <a:ea typeface="Malgun Gothic"/>
+                <a:cs typeface="Malgun Gothic"/>
+              </a:rPr>
+              <a:t>Flarum Core를 건드리지 않아 롤백은 확장 하나로 끝납니다</a:t>
+            </a:r>
+          </a:p>
+        </p:txBody>
+      </p:sp>
+      <p:sp>
+        <p:nvSpPr>
+          <p:cNvPr id="2" name="page-7">
+            <a:extLst xmlns:a="http://schemas.openxmlformats.org/drawingml/2006/main">
+              <a:ext uri="{FF2B5EF4-FFF2-40B4-BE49-F238E27FC236}">
+                <a16:creationId xmlns:a16="http://schemas.microsoft.com/office/drawing/2014/main" id="{A3276DCC-0352-4CE1-B01D-E79903100583}"/>
+              </a:ext>
+            </a:extLst>
+          </p:cNvPr>
+          <p:cNvSpPr>
+            <a:spLocks xmlns:a="http://schemas.openxmlformats.org/drawingml/2006/main" noGrp="1"/>
+          </p:cNvSpPr>
+          <p:nvPr/>
+        </p:nvSpPr>
+        <p:spPr>
+          <a:xfrm xmlns:a="http://schemas.openxmlformats.org/drawingml/2006/main">
+            <a:off x="11163300" y="6286500"/>
+            <a:ext cx="571500" cy="228600"/>
           </a:xfrm>
           <a:prstGeom xmlns:a="http://schemas.openxmlformats.org/drawingml/2006/main" prst="rect">
             <a:avLst/>
@@ -6186,71 +6142,49 @@
           <a:bodyPr xmlns:a="http://schemas.openxmlformats.org/drawingml/2006/main"/>
           <a:lstStyle xmlns:a="http://schemas.openxmlformats.org/drawingml/2006/main"/>
           <a:p xmlns:a="http://schemas.openxmlformats.org/drawingml/2006/main">
-            <a:pPr algn="l">
-              <a:defRPr sz="4800" b="1">
-                <a:solidFill>
-                  <a:srgbClr val="15253E"/>
-                </a:solidFill>
-                <a:latin typeface="Malgun Gothic"/>
-                <a:ea typeface="Malgun Gothic"/>
-                <a:cs typeface="Malgun Gothic"/>
-              </a:defRPr>
-            </a:pPr>
-            <a:r>
-              <a:rPr sz="4800" b="1">
-                <a:solidFill>
-                  <a:srgbClr val="15253E"/>
-                </a:solidFill>
-                <a:latin typeface="Malgun Gothic"/>
-                <a:ea typeface="Malgun Gothic"/>
-                <a:cs typeface="Malgun Gothic"/>
-              </a:rPr>
-              <a:t>운영 적용만</a:t>
-            </a:r>
-          </a:p>
-          <a:p xmlns:a="http://schemas.openxmlformats.org/drawingml/2006/main">
-            <a:pPr algn="l">
-              <a:defRPr sz="4800" b="1">
-                <a:solidFill>
-                  <a:srgbClr val="15253E"/>
-                </a:solidFill>
-                <a:latin typeface="Malgun Gothic"/>
-                <a:ea typeface="Malgun Gothic"/>
-                <a:cs typeface="Malgun Gothic"/>
-              </a:defRPr>
-            </a:pPr>
-            <a:r>
-              <a:rPr sz="4800" b="1">
-                <a:solidFill>
-                  <a:srgbClr val="15253E"/>
-                </a:solidFill>
-                <a:latin typeface="Malgun Gothic"/>
-                <a:ea typeface="Malgun Gothic"/>
-                <a:cs typeface="Malgun Gothic"/>
-              </a:rPr>
-              <a:t>승인하면 됩니다</a:t>
-            </a:r>
-          </a:p>
-        </p:txBody>
-      </p:sp>
-      <p:sp>
-        <p:nvSpPr>
-          <p:cNvPr id="3" name="close-detail">
-            <a:extLst xmlns:a="http://schemas.openxmlformats.org/drawingml/2006/main">
-              <a:ext uri="{FF2B5EF4-FFF2-40B4-BE49-F238E27FC236}">
-                <a16:creationId xmlns:a16="http://schemas.microsoft.com/office/drawing/2014/main" id="{3D772DBD-5B75-4245-9BF5-B2A8A3AB8069}"/>
-              </a:ext>
-            </a:extLst>
-          </p:cNvPr>
-          <p:cNvSpPr>
-            <a:spLocks xmlns:a="http://schemas.openxmlformats.org/drawingml/2006/main" noGrp="1"/>
-          </p:cNvSpPr>
-          <p:nvPr/>
-        </p:nvSpPr>
-        <p:spPr>
-          <a:xfrm xmlns:a="http://schemas.openxmlformats.org/drawingml/2006/main">
-            <a:off x="457200" y="4019550"/>
-            <a:ext cx="7620000" cy="876300"/>
+            <a:pPr algn="r">
+              <a:buNone/>
+              <a:defRPr sz="1200" b="0">
+                <a:solidFill>
+                  <a:srgbClr val="52647D"/>
+                </a:solidFill>
+                <a:latin typeface="Malgun Gothic"/>
+                <a:ea typeface="Malgun Gothic"/>
+                <a:cs typeface="Malgun Gothic"/>
+              </a:defRPr>
+            </a:pPr>
+            <a:r>
+              <a:rPr sz="1200" b="0">
+                <a:solidFill>
+                  <a:srgbClr val="52647D"/>
+                </a:solidFill>
+                <a:latin typeface="Malgun Gothic"/>
+                <a:ea typeface="Malgun Gothic"/>
+                <a:cs typeface="Malgun Gothic"/>
+              </a:rPr>
+              <a:t>08</a:t>
+            </a:r>
+          </a:p>
+        </p:txBody>
+      </p:sp>
+      <p:sp>
+        <p:nvSpPr>
+          <p:cNvPr id="3" name="flow-arrow-1">
+            <a:extLst xmlns:a="http://schemas.openxmlformats.org/drawingml/2006/main">
+              <a:ext uri="{FF2B5EF4-FFF2-40B4-BE49-F238E27FC236}">
+                <a16:creationId xmlns:a16="http://schemas.microsoft.com/office/drawing/2014/main" id="{F33C0C86-C636-49E7-9EF3-AD3434C40404}"/>
+              </a:ext>
+            </a:extLst>
+          </p:cNvPr>
+          <p:cNvSpPr>
+            <a:spLocks xmlns:a="http://schemas.openxmlformats.org/drawingml/2006/main" noGrp="1"/>
+          </p:cNvSpPr>
+          <p:nvPr/>
+        </p:nvSpPr>
+        <p:spPr>
+          <a:xfrm xmlns:a="http://schemas.openxmlformats.org/drawingml/2006/main">
+            <a:off x="3848100" y="2724150"/>
+            <a:ext cx="762000" cy="476250"/>
           </a:xfrm>
           <a:prstGeom xmlns:a="http://schemas.openxmlformats.org/drawingml/2006/main" prst="rect">
             <a:avLst/>
@@ -6265,8 +6199,9 @@
           <a:bodyPr xmlns:a="http://schemas.openxmlformats.org/drawingml/2006/main"/>
           <a:lstStyle xmlns:a="http://schemas.openxmlformats.org/drawingml/2006/main"/>
           <a:p xmlns:a="http://schemas.openxmlformats.org/drawingml/2006/main">
-            <a:pPr algn="l">
-              <a:defRPr sz="1950" b="0">
+            <a:pPr algn="ctr">
+              <a:buNone/>
+              <a:defRPr sz="2700" b="1">
                 <a:solidFill>
                   <a:srgbClr val="52647D"/>
                 </a:solidFill>
@@ -6276,7 +6211,7 @@
               </a:defRPr>
             </a:pPr>
             <a:r>
-              <a:rPr sz="1950" b="0">
+              <a:rPr sz="2700" b="1">
                 <a:solidFill>
                   <a:srgbClr val="52647D"/>
                 </a:solidFill>
@@ -6284,12 +6219,46 @@
                 <a:ea typeface="Malgun Gothic"/>
                 <a:cs typeface="Malgun Gothic"/>
               </a:rPr>
-              <a:t>WSL 전체 주기 PASS · 태그·프로필 직접 영문 0건</a:t>
-            </a:r>
-          </a:p>
-          <a:p xmlns:a="http://schemas.openxmlformats.org/drawingml/2006/main">
-            <a:pPr algn="l">
-              <a:defRPr sz="1950" b="0">
+              <a:t>→</a:t>
+            </a:r>
+          </a:p>
+        </p:txBody>
+      </p:sp>
+      <p:sp>
+        <p:nvSpPr>
+          <p:cNvPr id="4" name="flow-arrow-2">
+            <a:extLst xmlns:a="http://schemas.openxmlformats.org/drawingml/2006/main">
+              <a:ext uri="{FF2B5EF4-FFF2-40B4-BE49-F238E27FC236}">
+                <a16:creationId xmlns:a16="http://schemas.microsoft.com/office/drawing/2014/main" id="{35F70949-AD48-4799-9CD4-E06EF4FA6024}"/>
+              </a:ext>
+            </a:extLst>
+          </p:cNvPr>
+          <p:cNvSpPr>
+            <a:spLocks xmlns:a="http://schemas.openxmlformats.org/drawingml/2006/main" noGrp="1"/>
+          </p:cNvSpPr>
+          <p:nvPr/>
+        </p:nvSpPr>
+        <p:spPr>
+          <a:xfrm xmlns:a="http://schemas.openxmlformats.org/drawingml/2006/main">
+            <a:off x="7581900" y="2724150"/>
+            <a:ext cx="762000" cy="476250"/>
+          </a:xfrm>
+          <a:prstGeom xmlns:a="http://schemas.openxmlformats.org/drawingml/2006/main" prst="rect">
+            <a:avLst/>
+          </a:prstGeom>
+          <a:noFill xmlns:a="http://schemas.openxmlformats.org/drawingml/2006/main"/>
+          <a:ln xmlns:a="http://schemas.openxmlformats.org/drawingml/2006/main" w="0">
+            <a:noFill/>
+            <a:prstDash val="solid"/>
+          </a:ln>
+        </p:spPr>
+        <p:txBody>
+          <a:bodyPr xmlns:a="http://schemas.openxmlformats.org/drawingml/2006/main"/>
+          <a:lstStyle xmlns:a="http://schemas.openxmlformats.org/drawingml/2006/main"/>
+          <a:p xmlns:a="http://schemas.openxmlformats.org/drawingml/2006/main">
+            <a:pPr algn="ctr">
+              <a:buNone/>
+              <a:defRPr sz="2700" b="1">
                 <a:solidFill>
                   <a:srgbClr val="52647D"/>
                 </a:solidFill>
@@ -6299,7 +6268,7 @@
               </a:defRPr>
             </a:pPr>
             <a:r>
-              <a:rPr sz="1950" b="0">
+              <a:rPr sz="2700" b="1">
                 <a:solidFill>
                   <a:srgbClr val="52647D"/>
                 </a:solidFill>
@@ -6307,33 +6276,68 @@
                 <a:ea typeface="Malgun Gothic"/>
                 <a:cs typeface="Malgun Gothic"/>
               </a:rPr>
-              <a:t>Core·Vendor·DB·운영 Community 변경 없음</a:t>
-            </a:r>
-          </a:p>
-        </p:txBody>
-      </p:sp>
-      <p:sp>
-        <p:nvSpPr>
-          <p:cNvPr id="4" name="close-status">
-            <a:extLst xmlns:a="http://schemas.openxmlformats.org/drawingml/2006/main">
-              <a:ext uri="{FF2B5EF4-FFF2-40B4-BE49-F238E27FC236}">
-                <a16:creationId xmlns:a16="http://schemas.microsoft.com/office/drawing/2014/main" id="{3160D9BC-7118-4FD3-AAD9-2144E7A4C4D7}"/>
-              </a:ext>
-            </a:extLst>
-          </p:cNvPr>
-          <p:cNvSpPr>
-            <a:spLocks xmlns:a="http://schemas.openxmlformats.org/drawingml/2006/main" noGrp="1"/>
-          </p:cNvSpPr>
-          <p:nvPr/>
-        </p:nvSpPr>
-        <p:spPr>
-          <a:xfrm xmlns:a="http://schemas.openxmlformats.org/drawingml/2006/main">
-            <a:off x="8572500" y="1657350"/>
-            <a:ext cx="2952750" cy="2952750"/>
+              <a:t>→</a:t>
+            </a:r>
+          </a:p>
+        </p:txBody>
+      </p:sp>
+      <p:sp>
+        <p:nvSpPr>
+          <p:cNvPr id="5" name="flarum-core">
+            <a:extLst xmlns:a="http://schemas.openxmlformats.org/drawingml/2006/main">
+              <a:ext uri="{FF2B5EF4-FFF2-40B4-BE49-F238E27FC236}">
+                <a16:creationId xmlns:a16="http://schemas.microsoft.com/office/drawing/2014/main" id="{2D23B9C7-BD3C-4600-BA89-78668692D407}"/>
+              </a:ext>
+            </a:extLst>
+          </p:cNvPr>
+          <p:cNvSpPr>
+            <a:spLocks xmlns:a="http://schemas.openxmlformats.org/drawingml/2006/main" noGrp="1"/>
+          </p:cNvSpPr>
+          <p:nvPr/>
+        </p:nvSpPr>
+        <p:spPr>
+          <a:xfrm xmlns:a="http://schemas.openxmlformats.org/drawingml/2006/main">
+            <a:off x="666750" y="2076450"/>
+            <a:ext cx="3143250" cy="1809750"/>
           </a:xfrm>
           <a:prstGeom xmlns:a="http://schemas.openxmlformats.org/drawingml/2006/main" prst="roundRect">
             <a:avLst>
-              <a:gd name="adj" fmla="val 2581"/>
+              <a:gd name="adj" fmla="val 4211"/>
+            </a:avLst>
+          </a:prstGeom>
+          <a:solidFill xmlns:a="http://schemas.openxmlformats.org/drawingml/2006/main">
+            <a:srgbClr val="F3F7FC"/>
+          </a:solidFill>
+          <a:ln xmlns:a="http://schemas.openxmlformats.org/drawingml/2006/main" w="9525">
+            <a:solidFill>
+              <a:srgbClr val="D5E1F1"/>
+            </a:solidFill>
+            <a:prstDash val="solid"/>
+          </a:ln>
+        </p:spPr>
+      </p:sp>
+      <p:sp>
+        <p:nvSpPr>
+          <p:cNvPr id="6" name="theme-extension">
+            <a:extLst xmlns:a="http://schemas.openxmlformats.org/drawingml/2006/main">
+              <a:ext uri="{FF2B5EF4-FFF2-40B4-BE49-F238E27FC236}">
+                <a16:creationId xmlns:a16="http://schemas.microsoft.com/office/drawing/2014/main" id="{66F5027A-7FA7-413F-B51E-8043D0948B2C}"/>
+              </a:ext>
+            </a:extLst>
+          </p:cNvPr>
+          <p:cNvSpPr>
+            <a:spLocks xmlns:a="http://schemas.openxmlformats.org/drawingml/2006/main" noGrp="1"/>
+          </p:cNvSpPr>
+          <p:nvPr/>
+        </p:nvSpPr>
+        <p:spPr>
+          <a:xfrm xmlns:a="http://schemas.openxmlformats.org/drawingml/2006/main">
+            <a:off x="4572000" y="2076450"/>
+            <a:ext cx="2971800" cy="1809750"/>
+          </a:xfrm>
+          <a:prstGeom xmlns:a="http://schemas.openxmlformats.org/drawingml/2006/main" prst="roundRect">
+            <a:avLst>
+              <a:gd name="adj" fmla="val 4211"/>
             </a:avLst>
           </a:prstGeom>
           <a:solidFill xmlns:a="http://schemas.openxmlformats.org/drawingml/2006/main">
@@ -6349,22 +6353,57 @@
       </p:sp>
       <p:sp>
         <p:nvSpPr>
-          <p:cNvPr id="5" name="close-go">
-            <a:extLst xmlns:a="http://schemas.openxmlformats.org/drawingml/2006/main">
-              <a:ext uri="{FF2B5EF4-FFF2-40B4-BE49-F238E27FC236}">
-                <a16:creationId xmlns:a16="http://schemas.microsoft.com/office/drawing/2014/main" id="{29CF402C-9E70-4B3D-8FED-4FBB431FACD2}"/>
-              </a:ext>
-            </a:extLst>
-          </p:cNvPr>
-          <p:cNvSpPr>
-            <a:spLocks xmlns:a="http://schemas.openxmlformats.org/drawingml/2006/main" noGrp="1"/>
-          </p:cNvSpPr>
-          <p:nvPr/>
-        </p:nvSpPr>
-        <p:spPr>
-          <a:xfrm xmlns:a="http://schemas.openxmlformats.org/drawingml/2006/main">
-            <a:off x="8896350" y="2305050"/>
-            <a:ext cx="2305050" cy="895350"/>
+          <p:cNvPr id="7" name="community-ui">
+            <a:extLst xmlns:a="http://schemas.openxmlformats.org/drawingml/2006/main">
+              <a:ext uri="{FF2B5EF4-FFF2-40B4-BE49-F238E27FC236}">
+                <a16:creationId xmlns:a16="http://schemas.microsoft.com/office/drawing/2014/main" id="{E7F3E4DE-3896-4972-B8F1-AF6C18CFFA99}"/>
+              </a:ext>
+            </a:extLst>
+          </p:cNvPr>
+          <p:cNvSpPr>
+            <a:spLocks xmlns:a="http://schemas.openxmlformats.org/drawingml/2006/main" noGrp="1"/>
+          </p:cNvSpPr>
+          <p:nvPr/>
+        </p:nvSpPr>
+        <p:spPr>
+          <a:xfrm xmlns:a="http://schemas.openxmlformats.org/drawingml/2006/main">
+            <a:off x="8305800" y="2076450"/>
+            <a:ext cx="3143250" cy="1809750"/>
+          </a:xfrm>
+          <a:prstGeom xmlns:a="http://schemas.openxmlformats.org/drawingml/2006/main" prst="roundRect">
+            <a:avLst>
+              <a:gd name="adj" fmla="val 4211"/>
+            </a:avLst>
+          </a:prstGeom>
+          <a:solidFill xmlns:a="http://schemas.openxmlformats.org/drawingml/2006/main">
+            <a:srgbClr val="EAFAF2"/>
+          </a:solidFill>
+          <a:ln xmlns:a="http://schemas.openxmlformats.org/drawingml/2006/main" w="9525">
+            <a:solidFill>
+              <a:srgbClr val="86D2AA"/>
+            </a:solidFill>
+            <a:prstDash val="solid"/>
+          </a:ln>
+        </p:spPr>
+      </p:sp>
+      <p:sp>
+        <p:nvSpPr>
+          <p:cNvPr id="8" name="flarum-core-title">
+            <a:extLst xmlns:a="http://schemas.openxmlformats.org/drawingml/2006/main">
+              <a:ext uri="{FF2B5EF4-FFF2-40B4-BE49-F238E27FC236}">
+                <a16:creationId xmlns:a16="http://schemas.microsoft.com/office/drawing/2014/main" id="{0136A85B-5961-4FFA-8B8D-5B294E1A0C1F}"/>
+              </a:ext>
+            </a:extLst>
+          </p:cNvPr>
+          <p:cNvSpPr>
+            <a:spLocks xmlns:a="http://schemas.openxmlformats.org/drawingml/2006/main" noGrp="1"/>
+          </p:cNvSpPr>
+          <p:nvPr/>
+        </p:nvSpPr>
+        <p:spPr>
+          <a:xfrm xmlns:a="http://schemas.openxmlformats.org/drawingml/2006/main">
+            <a:off x="933450" y="2533650"/>
+            <a:ext cx="2609850" cy="457200"/>
           </a:xfrm>
           <a:prstGeom xmlns:a="http://schemas.openxmlformats.org/drawingml/2006/main" prst="rect">
             <a:avLst/>
@@ -6380,47 +6419,48 @@
           <a:lstStyle xmlns:a="http://schemas.openxmlformats.org/drawingml/2006/main"/>
           <a:p xmlns:a="http://schemas.openxmlformats.org/drawingml/2006/main">
             <a:pPr algn="ctr">
-              <a:defRPr sz="5100" b="1">
-                <a:solidFill>
-                  <a:srgbClr val="155EEF"/>
-                </a:solidFill>
-                <a:latin typeface="Malgun Gothic"/>
-                <a:ea typeface="Malgun Gothic"/>
-                <a:cs typeface="Malgun Gothic"/>
-              </a:defRPr>
-            </a:pPr>
-            <a:r>
-              <a:rPr sz="5100" b="1">
-                <a:solidFill>
-                  <a:srgbClr val="155EEF"/>
-                </a:solidFill>
-                <a:latin typeface="Malgun Gothic"/>
-                <a:ea typeface="Malgun Gothic"/>
-                <a:cs typeface="Malgun Gothic"/>
-              </a:rPr>
-              <a:t>GO</a:t>
-            </a:r>
-          </a:p>
-        </p:txBody>
-      </p:sp>
-      <p:sp>
-        <p:nvSpPr>
-          <p:cNvPr id="6" name="close-condition">
-            <a:extLst xmlns:a="http://schemas.openxmlformats.org/drawingml/2006/main">
-              <a:ext uri="{FF2B5EF4-FFF2-40B4-BE49-F238E27FC236}">
-                <a16:creationId xmlns:a16="http://schemas.microsoft.com/office/drawing/2014/main" id="{150AAE78-1296-4BC4-BA13-17A897DFABDF}"/>
-              </a:ext>
-            </a:extLst>
-          </p:cNvPr>
-          <p:cNvSpPr>
-            <a:spLocks xmlns:a="http://schemas.openxmlformats.org/drawingml/2006/main" noGrp="1"/>
-          </p:cNvSpPr>
-          <p:nvPr/>
-        </p:nvSpPr>
-        <p:spPr>
-          <a:xfrm xmlns:a="http://schemas.openxmlformats.org/drawingml/2006/main">
-            <a:off x="8877300" y="3390900"/>
-            <a:ext cx="2343150" cy="533400"/>
+              <a:buNone/>
+              <a:defRPr sz="2250" b="1">
+                <a:solidFill>
+                  <a:srgbClr val="15253E"/>
+                </a:solidFill>
+                <a:latin typeface="Malgun Gothic"/>
+                <a:ea typeface="Malgun Gothic"/>
+                <a:cs typeface="Malgun Gothic"/>
+              </a:defRPr>
+            </a:pPr>
+            <a:r>
+              <a:rPr sz="2250" b="1">
+                <a:solidFill>
+                  <a:srgbClr val="15253E"/>
+                </a:solidFill>
+                <a:latin typeface="Malgun Gothic"/>
+                <a:ea typeface="Malgun Gothic"/>
+                <a:cs typeface="Malgun Gothic"/>
+              </a:rPr>
+              <a:t>Flarum 1.8.18</a:t>
+            </a:r>
+          </a:p>
+        </p:txBody>
+      </p:sp>
+      <p:sp>
+        <p:nvSpPr>
+          <p:cNvPr id="9" name="flarum-core-copy">
+            <a:extLst xmlns:a="http://schemas.openxmlformats.org/drawingml/2006/main">
+              <a:ext uri="{FF2B5EF4-FFF2-40B4-BE49-F238E27FC236}">
+                <a16:creationId xmlns:a16="http://schemas.microsoft.com/office/drawing/2014/main" id="{E7DB7EDB-905C-43D0-890F-80D3946E2991}"/>
+              </a:ext>
+            </a:extLst>
+          </p:cNvPr>
+          <p:cNvSpPr>
+            <a:spLocks xmlns:a="http://schemas.openxmlformats.org/drawingml/2006/main" noGrp="1"/>
+          </p:cNvSpPr>
+          <p:nvPr/>
+        </p:nvSpPr>
+        <p:spPr>
+          <a:xfrm xmlns:a="http://schemas.openxmlformats.org/drawingml/2006/main">
+            <a:off x="933450" y="3105150"/>
+            <a:ext cx="2609850" cy="323850"/>
           </a:xfrm>
           <a:prstGeom xmlns:a="http://schemas.openxmlformats.org/drawingml/2006/main" prst="rect">
             <a:avLst/>
@@ -6436,47 +6476,48 @@
           <a:lstStyle xmlns:a="http://schemas.openxmlformats.org/drawingml/2006/main"/>
           <a:p xmlns:a="http://schemas.openxmlformats.org/drawingml/2006/main">
             <a:pPr algn="ctr">
-              <a:defRPr sz="1650" b="1">
-                <a:solidFill>
-                  <a:srgbClr val="15253E"/>
-                </a:solidFill>
-                <a:latin typeface="Malgun Gothic"/>
-                <a:ea typeface="Malgun Gothic"/>
-                <a:cs typeface="Malgun Gothic"/>
-              </a:defRPr>
-            </a:pPr>
-            <a:r>
-              <a:rPr sz="1650" b="1">
-                <a:solidFill>
-                  <a:srgbClr val="15253E"/>
-                </a:solidFill>
-                <a:latin typeface="Malgun Gothic"/>
-                <a:ea typeface="Malgun Gothic"/>
-                <a:cs typeface="Malgun Gothic"/>
-              </a:rPr>
-              <a:t>운영 반영 승인 대기</a:t>
-            </a:r>
-          </a:p>
-        </p:txBody>
-      </p:sp>
-      <p:sp>
-        <p:nvSpPr>
-          <p:cNvPr id="7" name="close-next">
-            <a:extLst xmlns:a="http://schemas.openxmlformats.org/drawingml/2006/main">
-              <a:ext uri="{FF2B5EF4-FFF2-40B4-BE49-F238E27FC236}">
-                <a16:creationId xmlns:a16="http://schemas.microsoft.com/office/drawing/2014/main" id="{7FF57361-4F99-46E5-8A10-2C2F456C0F78}"/>
-              </a:ext>
-            </a:extLst>
-          </p:cNvPr>
-          <p:cNvSpPr>
-            <a:spLocks xmlns:a="http://schemas.openxmlformats.org/drawingml/2006/main" noGrp="1"/>
-          </p:cNvSpPr>
-          <p:nvPr/>
-        </p:nvSpPr>
-        <p:spPr>
-          <a:xfrm xmlns:a="http://schemas.openxmlformats.org/drawingml/2006/main">
-            <a:off x="457200" y="5562600"/>
-            <a:ext cx="10668000" cy="457200"/>
+              <a:buNone/>
+              <a:defRPr sz="1500" b="0">
+                <a:solidFill>
+                  <a:srgbClr val="52647D"/>
+                </a:solidFill>
+                <a:latin typeface="Malgun Gothic"/>
+                <a:ea typeface="Malgun Gothic"/>
+                <a:cs typeface="Malgun Gothic"/>
+              </a:defRPr>
+            </a:pPr>
+            <a:r>
+              <a:rPr sz="1500" b="0">
+                <a:solidFill>
+                  <a:srgbClr val="52647D"/>
+                </a:solidFill>
+                <a:latin typeface="Malgun Gothic"/>
+                <a:ea typeface="Malgun Gothic"/>
+                <a:cs typeface="Malgun Gothic"/>
+              </a:rPr>
+              <a:t>라우팅 · 권한 · 검색 · 작성</a:t>
+            </a:r>
+          </a:p>
+        </p:txBody>
+      </p:sp>
+      <p:sp>
+        <p:nvSpPr>
+          <p:cNvPr id="10" name="theme-title">
+            <a:extLst xmlns:a="http://schemas.openxmlformats.org/drawingml/2006/main">
+              <a:ext uri="{FF2B5EF4-FFF2-40B4-BE49-F238E27FC236}">
+                <a16:creationId xmlns:a16="http://schemas.microsoft.com/office/drawing/2014/main" id="{DBD93488-5F1B-4674-80CA-8AF64A4024CD}"/>
+              </a:ext>
+            </a:extLst>
+          </p:cNvPr>
+          <p:cNvSpPr>
+            <a:spLocks xmlns:a="http://schemas.openxmlformats.org/drawingml/2006/main" noGrp="1"/>
+          </p:cNvSpPr>
+          <p:nvPr/>
+        </p:nvSpPr>
+        <p:spPr>
+          <a:xfrm xmlns:a="http://schemas.openxmlformats.org/drawingml/2006/main">
+            <a:off x="4819650" y="2362200"/>
+            <a:ext cx="2476500" cy="742950"/>
           </a:xfrm>
           <a:prstGeom xmlns:a="http://schemas.openxmlformats.org/drawingml/2006/main" prst="rect">
             <a:avLst/>
@@ -6491,7 +6532,749 @@
           <a:bodyPr xmlns:a="http://schemas.openxmlformats.org/drawingml/2006/main"/>
           <a:lstStyle xmlns:a="http://schemas.openxmlformats.org/drawingml/2006/main"/>
           <a:p xmlns:a="http://schemas.openxmlformats.org/drawingml/2006/main">
+            <a:pPr algn="ctr">
+              <a:buNone/>
+              <a:defRPr sz="2175" b="1">
+                <a:solidFill>
+                  <a:srgbClr val="155EEF"/>
+                </a:solidFill>
+                <a:latin typeface="Malgun Gothic"/>
+                <a:ea typeface="Malgun Gothic"/>
+                <a:cs typeface="Malgun Gothic"/>
+              </a:defRPr>
+            </a:pPr>
+            <a:r>
+              <a:rPr sz="2175" b="1">
+                <a:solidFill>
+                  <a:srgbClr val="155EEF"/>
+                </a:solidFill>
+                <a:latin typeface="Malgun Gothic"/>
+                <a:ea typeface="Malgun Gothic"/>
+                <a:cs typeface="Malgun Gothic"/>
+              </a:rPr>
+              <a:t>ABLESTACK</a:t>
+            </a:r>
+          </a:p>
+          <a:p xmlns:a="http://schemas.openxmlformats.org/drawingml/2006/main">
+            <a:pPr algn="ctr">
+              <a:buNone/>
+              <a:defRPr sz="2175" b="1">
+                <a:solidFill>
+                  <a:srgbClr val="155EEF"/>
+                </a:solidFill>
+                <a:latin typeface="Malgun Gothic"/>
+                <a:ea typeface="Malgun Gothic"/>
+                <a:cs typeface="Malgun Gothic"/>
+              </a:defRPr>
+            </a:pPr>
+            <a:r>
+              <a:rPr sz="2175" b="1">
+                <a:solidFill>
+                  <a:srgbClr val="155EEF"/>
+                </a:solidFill>
+                <a:latin typeface="Malgun Gothic"/>
+                <a:ea typeface="Malgun Gothic"/>
+                <a:cs typeface="Malgun Gothic"/>
+              </a:rPr>
+              <a:t>Theme</a:t>
+            </a:r>
+          </a:p>
+        </p:txBody>
+      </p:sp>
+      <p:sp>
+        <p:nvSpPr>
+          <p:cNvPr id="11" name="theme-copy">
+            <a:extLst xmlns:a="http://schemas.openxmlformats.org/drawingml/2006/main">
+              <a:ext uri="{FF2B5EF4-FFF2-40B4-BE49-F238E27FC236}">
+                <a16:creationId xmlns:a16="http://schemas.microsoft.com/office/drawing/2014/main" id="{C8B03E0C-FD83-420F-AF7B-3F7089B47394}"/>
+              </a:ext>
+            </a:extLst>
+          </p:cNvPr>
+          <p:cNvSpPr>
+            <a:spLocks xmlns:a="http://schemas.openxmlformats.org/drawingml/2006/main" noGrp="1"/>
+          </p:cNvSpPr>
+          <p:nvPr/>
+        </p:nvSpPr>
+        <p:spPr>
+          <a:xfrm xmlns:a="http://schemas.openxmlformats.org/drawingml/2006/main">
+            <a:off x="4819650" y="3257550"/>
+            <a:ext cx="2476500" cy="323850"/>
+          </a:xfrm>
+          <a:prstGeom xmlns:a="http://schemas.openxmlformats.org/drawingml/2006/main" prst="rect">
+            <a:avLst/>
+          </a:prstGeom>
+          <a:noFill xmlns:a="http://schemas.openxmlformats.org/drawingml/2006/main"/>
+          <a:ln xmlns:a="http://schemas.openxmlformats.org/drawingml/2006/main" w="0">
+            <a:noFill/>
+            <a:prstDash val="solid"/>
+          </a:ln>
+        </p:spPr>
+        <p:txBody>
+          <a:bodyPr xmlns:a="http://schemas.openxmlformats.org/drawingml/2006/main"/>
+          <a:lstStyle xmlns:a="http://schemas.openxmlformats.org/drawingml/2006/main"/>
+          <a:p xmlns:a="http://schemas.openxmlformats.org/drawingml/2006/main">
+            <a:pPr algn="ctr">
+              <a:buNone/>
+              <a:defRPr sz="1350" b="0">
+                <a:solidFill>
+                  <a:srgbClr val="52647D"/>
+                </a:solidFill>
+                <a:latin typeface="Malgun Gothic"/>
+                <a:ea typeface="Malgun Gothic"/>
+                <a:cs typeface="Malgun Gothic"/>
+              </a:defRPr>
+            </a:pPr>
+            <a:r>
+              <a:rPr sz="1350" b="0">
+                <a:solidFill>
+                  <a:srgbClr val="52647D"/>
+                </a:solidFill>
+                <a:latin typeface="Malgun Gothic"/>
+                <a:ea typeface="Malgun Gothic"/>
+                <a:cs typeface="Malgun Gothic"/>
+              </a:rPr>
+              <a:t>LESS · 한글 Cache · 상태 표시</a:t>
+            </a:r>
+          </a:p>
+        </p:txBody>
+      </p:sp>
+      <p:sp>
+        <p:nvSpPr>
+          <p:cNvPr id="12" name="ui-title">
+            <a:extLst xmlns:a="http://schemas.openxmlformats.org/drawingml/2006/main">
+              <a:ext uri="{FF2B5EF4-FFF2-40B4-BE49-F238E27FC236}">
+                <a16:creationId xmlns:a16="http://schemas.microsoft.com/office/drawing/2014/main" id="{37B98FC2-7DDE-45BF-B2BF-AA8E8A3D4DE8}"/>
+              </a:ext>
+            </a:extLst>
+          </p:cNvPr>
+          <p:cNvSpPr>
+            <a:spLocks xmlns:a="http://schemas.openxmlformats.org/drawingml/2006/main" noGrp="1"/>
+          </p:cNvSpPr>
+          <p:nvPr/>
+        </p:nvSpPr>
+        <p:spPr>
+          <a:xfrm xmlns:a="http://schemas.openxmlformats.org/drawingml/2006/main">
+            <a:off x="8572500" y="2533650"/>
+            <a:ext cx="2609850" cy="457200"/>
+          </a:xfrm>
+          <a:prstGeom xmlns:a="http://schemas.openxmlformats.org/drawingml/2006/main" prst="rect">
+            <a:avLst/>
+          </a:prstGeom>
+          <a:noFill xmlns:a="http://schemas.openxmlformats.org/drawingml/2006/main"/>
+          <a:ln xmlns:a="http://schemas.openxmlformats.org/drawingml/2006/main" w="0">
+            <a:noFill/>
+            <a:prstDash val="solid"/>
+          </a:ln>
+        </p:spPr>
+        <p:txBody>
+          <a:bodyPr xmlns:a="http://schemas.openxmlformats.org/drawingml/2006/main"/>
+          <a:lstStyle xmlns:a="http://schemas.openxmlformats.org/drawingml/2006/main"/>
+          <a:p xmlns:a="http://schemas.openxmlformats.org/drawingml/2006/main">
+            <a:pPr algn="ctr">
+              <a:buNone/>
+              <a:defRPr sz="2250" b="1">
+                <a:solidFill>
+                  <a:srgbClr val="078248"/>
+                </a:solidFill>
+                <a:latin typeface="Malgun Gothic"/>
+                <a:ea typeface="Malgun Gothic"/>
+                <a:cs typeface="Malgun Gothic"/>
+              </a:defRPr>
+            </a:pPr>
+            <a:r>
+              <a:rPr sz="2250" b="1">
+                <a:solidFill>
+                  <a:srgbClr val="078248"/>
+                </a:solidFill>
+                <a:latin typeface="Malgun Gothic"/>
+                <a:ea typeface="Malgun Gothic"/>
+                <a:cs typeface="Malgun Gothic"/>
+              </a:rPr>
+              <a:t>Community UI</a:t>
+            </a:r>
+          </a:p>
+        </p:txBody>
+      </p:sp>
+      <p:sp>
+        <p:nvSpPr>
+          <p:cNvPr id="13" name="ui-copy">
+            <a:extLst xmlns:a="http://schemas.openxmlformats.org/drawingml/2006/main">
+              <a:ext uri="{FF2B5EF4-FFF2-40B4-BE49-F238E27FC236}">
+                <a16:creationId xmlns:a16="http://schemas.microsoft.com/office/drawing/2014/main" id="{3B149A4F-0659-480B-9329-13D669118779}"/>
+              </a:ext>
+            </a:extLst>
+          </p:cNvPr>
+          <p:cNvSpPr>
+            <a:spLocks xmlns:a="http://schemas.openxmlformats.org/drawingml/2006/main" noGrp="1"/>
+          </p:cNvSpPr>
+          <p:nvPr/>
+        </p:nvSpPr>
+        <p:spPr>
+          <a:xfrm xmlns:a="http://schemas.openxmlformats.org/drawingml/2006/main">
+            <a:off x="8572500" y="3105150"/>
+            <a:ext cx="2609850" cy="323850"/>
+          </a:xfrm>
+          <a:prstGeom xmlns:a="http://schemas.openxmlformats.org/drawingml/2006/main" prst="rect">
+            <a:avLst/>
+          </a:prstGeom>
+          <a:noFill xmlns:a="http://schemas.openxmlformats.org/drawingml/2006/main"/>
+          <a:ln xmlns:a="http://schemas.openxmlformats.org/drawingml/2006/main" w="0">
+            <a:noFill/>
+            <a:prstDash val="solid"/>
+          </a:ln>
+        </p:spPr>
+        <p:txBody>
+          <a:bodyPr xmlns:a="http://schemas.openxmlformats.org/drawingml/2006/main"/>
+          <a:lstStyle xmlns:a="http://schemas.openxmlformats.org/drawingml/2006/main"/>
+          <a:p xmlns:a="http://schemas.openxmlformats.org/drawingml/2006/main">
+            <a:pPr algn="ctr">
+              <a:buNone/>
+              <a:defRPr sz="1500" b="0">
+                <a:solidFill>
+                  <a:srgbClr val="52647D"/>
+                </a:solidFill>
+                <a:latin typeface="Malgun Gothic"/>
+                <a:ea typeface="Malgun Gothic"/>
+                <a:cs typeface="Malgun Gothic"/>
+              </a:defRPr>
+            </a:pPr>
+            <a:r>
+              <a:rPr sz="1500" b="0">
+                <a:solidFill>
+                  <a:srgbClr val="52647D"/>
+                </a:solidFill>
+                <a:latin typeface="Malgun Gothic"/>
+                <a:ea typeface="Malgun Gothic"/>
+                <a:cs typeface="Malgun Gothic"/>
+              </a:rPr>
+              <a:t>Desktop · Mobile · Accessibility</a:t>
+            </a:r>
+          </a:p>
+        </p:txBody>
+      </p:sp>
+      <p:sp>
+        <p:nvSpPr>
+          <p:cNvPr id="14" name="rollback-strip">
+            <a:extLst xmlns:a="http://schemas.openxmlformats.org/drawingml/2006/main">
+              <a:ext uri="{FF2B5EF4-FFF2-40B4-BE49-F238E27FC236}">
+                <a16:creationId xmlns:a16="http://schemas.microsoft.com/office/drawing/2014/main" id="{1329660C-7BA4-47F6-B431-662F73A2D12C}"/>
+              </a:ext>
+            </a:extLst>
+          </p:cNvPr>
+          <p:cNvSpPr>
+            <a:spLocks xmlns:a="http://schemas.openxmlformats.org/drawingml/2006/main" noGrp="1"/>
+          </p:cNvSpPr>
+          <p:nvPr/>
+        </p:nvSpPr>
+        <p:spPr>
+          <a:xfrm xmlns:a="http://schemas.openxmlformats.org/drawingml/2006/main">
+            <a:off x="2381250" y="4781550"/>
+            <a:ext cx="7429500" cy="838200"/>
+          </a:xfrm>
+          <a:prstGeom xmlns:a="http://schemas.openxmlformats.org/drawingml/2006/main" prst="roundRect">
+            <a:avLst>
+              <a:gd name="adj" fmla="val 9091"/>
+            </a:avLst>
+          </a:prstGeom>
+          <a:solidFill xmlns:a="http://schemas.openxmlformats.org/drawingml/2006/main">
+            <a:srgbClr val="FFF6DF"/>
+          </a:solidFill>
+          <a:ln xmlns:a="http://schemas.openxmlformats.org/drawingml/2006/main" w="9525">
+            <a:solidFill>
+              <a:srgbClr val="E4B955"/>
+            </a:solidFill>
+            <a:prstDash val="solid"/>
+          </a:ln>
+        </p:spPr>
+      </p:sp>
+      <p:sp>
+        <p:nvSpPr>
+          <p:cNvPr id="15" name="rollback-copy">
+            <a:extLst xmlns:a="http://schemas.openxmlformats.org/drawingml/2006/main">
+              <a:ext uri="{FF2B5EF4-FFF2-40B4-BE49-F238E27FC236}">
+                <a16:creationId xmlns:a16="http://schemas.microsoft.com/office/drawing/2014/main" id="{29AD88B8-B664-4F55-9D04-7AE25E4B8A59}"/>
+              </a:ext>
+            </a:extLst>
+          </p:cNvPr>
+          <p:cNvSpPr>
+            <a:spLocks xmlns:a="http://schemas.openxmlformats.org/drawingml/2006/main" noGrp="1"/>
+          </p:cNvSpPr>
+          <p:nvPr/>
+        </p:nvSpPr>
+        <p:spPr>
+          <a:xfrm xmlns:a="http://schemas.openxmlformats.org/drawingml/2006/main">
+            <a:off x="2686050" y="4991100"/>
+            <a:ext cx="6819900" cy="400050"/>
+          </a:xfrm>
+          <a:prstGeom xmlns:a="http://schemas.openxmlformats.org/drawingml/2006/main" prst="rect">
+            <a:avLst/>
+          </a:prstGeom>
+          <a:noFill xmlns:a="http://schemas.openxmlformats.org/drawingml/2006/main"/>
+          <a:ln xmlns:a="http://schemas.openxmlformats.org/drawingml/2006/main" w="0">
+            <a:noFill/>
+            <a:prstDash val="solid"/>
+          </a:ln>
+        </p:spPr>
+        <p:txBody>
+          <a:bodyPr xmlns:a="http://schemas.openxmlformats.org/drawingml/2006/main"/>
+          <a:lstStyle xmlns:a="http://schemas.openxmlformats.org/drawingml/2006/main"/>
+          <a:p xmlns:a="http://schemas.openxmlformats.org/drawingml/2006/main">
+            <a:pPr algn="ctr">
+              <a:buNone/>
+              <a:defRPr sz="1950" b="1">
+                <a:solidFill>
+                  <a:srgbClr val="9A6700"/>
+                </a:solidFill>
+                <a:latin typeface="Malgun Gothic"/>
+                <a:ea typeface="Malgun Gothic"/>
+                <a:cs typeface="Malgun Gothic"/>
+              </a:defRPr>
+            </a:pPr>
+            <a:r>
+              <a:rPr sz="1950" b="1">
+                <a:solidFill>
+                  <a:srgbClr val="9A6700"/>
+                </a:solidFill>
+                <a:latin typeface="Malgun Gothic"/>
+                <a:ea typeface="Malgun Gothic"/>
+                <a:cs typeface="Malgun Gothic"/>
+              </a:rPr>
+              <a:t>장애 시 extension:disable → 기본 Flarum UI 복귀</a:t>
+            </a:r>
+          </a:p>
+        </p:txBody>
+      </p:sp>
+    </p:spTree>
+    <p:extLst>
+      <p:ext uri="{BB962C8B-B14F-4D97-AF65-F5344CB8AC3E}">
+        <p14:creationId xmlns:p14="http://schemas.microsoft.com/office/powerpoint/2010/main" val="1960291864"/>
+      </p:ext>
+    </p:extLst>
+  </p:cSld>
+</p:sld>
+</file>
+
+<file path=ppt/slides/slide9.xml><?xml version="1.0" encoding="utf-8"?>
+<p:sld xmlns:p="http://schemas.openxmlformats.org/presentationml/2006/main">
+  <p:cSld>
+    <p:bg>
+      <p:bgPr>
+        <a:solidFill xmlns:a="http://schemas.openxmlformats.org/drawingml/2006/main">
+          <a:srgbClr val="FFFFFF"/>
+        </a:solidFill>
+      </p:bgPr>
+    </p:bg>
+    <p:spTree>
+      <p:nvGrpSpPr>
+        <p:cNvPr id="1" name=""/>
+        <p:cNvGrpSpPr/>
+        <p:nvPr/>
+      </p:nvGrpSpPr>
+      <p:grpSpPr>
+        <a:xfrm xmlns:a="http://schemas.openxmlformats.org/drawingml/2006/main"/>
+      </p:grpSpPr>
+      <p:sp>
+        <p:nvSpPr>
+          <p:cNvPr id="8" name="close-kicker">
+            <a:extLst xmlns:a="http://schemas.openxmlformats.org/drawingml/2006/main">
+              <a:ext uri="{FF2B5EF4-FFF2-40B4-BE49-F238E27FC236}">
+                <a16:creationId xmlns:a16="http://schemas.microsoft.com/office/drawing/2014/main" id="{CA02A572-4AC9-4737-B75D-10EC7C22C06C}"/>
+              </a:ext>
+            </a:extLst>
+          </p:cNvPr>
+          <p:cNvSpPr>
+            <a:spLocks xmlns:a="http://schemas.openxmlformats.org/drawingml/2006/main" noGrp="1"/>
+          </p:cNvSpPr>
+          <p:nvPr/>
+        </p:nvSpPr>
+        <p:spPr>
+          <a:xfrm xmlns:a="http://schemas.openxmlformats.org/drawingml/2006/main">
+            <a:off x="457200" y="400050"/>
+            <a:ext cx="6191250" cy="342900"/>
+          </a:xfrm>
+          <a:prstGeom xmlns:a="http://schemas.openxmlformats.org/drawingml/2006/main" prst="rect">
+            <a:avLst/>
+          </a:prstGeom>
+          <a:noFill xmlns:a="http://schemas.openxmlformats.org/drawingml/2006/main"/>
+          <a:ln xmlns:a="http://schemas.openxmlformats.org/drawingml/2006/main" w="0">
+            <a:noFill/>
+            <a:prstDash val="solid"/>
+          </a:ln>
+        </p:spPr>
+        <p:txBody>
+          <a:bodyPr xmlns:a="http://schemas.openxmlformats.org/drawingml/2006/main"/>
+          <a:lstStyle xmlns:a="http://schemas.openxmlformats.org/drawingml/2006/main"/>
+          <a:p xmlns:a="http://schemas.openxmlformats.org/drawingml/2006/main">
             <a:pPr algn="l">
+              <a:buNone/>
+              <a:defRPr sz="1500" b="1">
+                <a:solidFill>
+                  <a:srgbClr val="52647D"/>
+                </a:solidFill>
+                <a:latin typeface="Malgun Gothic"/>
+                <a:ea typeface="Malgun Gothic"/>
+                <a:cs typeface="Malgun Gothic"/>
+              </a:defRPr>
+            </a:pPr>
+            <a:r>
+              <a:rPr sz="1500" b="1">
+                <a:solidFill>
+                  <a:srgbClr val="52647D"/>
+                </a:solidFill>
+                <a:latin typeface="Malgun Gothic"/>
+                <a:ea typeface="Malgun Gothic"/>
+                <a:cs typeface="Malgun Gothic"/>
+              </a:rPr>
+              <a:t>ISSUE #73 · IMPLEMENTATION COMPLETE</a:t>
+            </a:r>
+          </a:p>
+        </p:txBody>
+      </p:sp>
+      <p:sp>
+        <p:nvSpPr>
+          <p:cNvPr id="2" name="close-title">
+            <a:extLst xmlns:a="http://schemas.openxmlformats.org/drawingml/2006/main">
+              <a:ext uri="{FF2B5EF4-FFF2-40B4-BE49-F238E27FC236}">
+                <a16:creationId xmlns:a16="http://schemas.microsoft.com/office/drawing/2014/main" id="{F5C154A0-B755-42E9-9F79-7921475EF0CD}"/>
+              </a:ext>
+            </a:extLst>
+          </p:cNvPr>
+          <p:cNvSpPr>
+            <a:spLocks xmlns:a="http://schemas.openxmlformats.org/drawingml/2006/main" noGrp="1"/>
+          </p:cNvSpPr>
+          <p:nvPr/>
+        </p:nvSpPr>
+        <p:spPr>
+          <a:xfrm xmlns:a="http://schemas.openxmlformats.org/drawingml/2006/main">
+            <a:off x="457200" y="1600200"/>
+            <a:ext cx="6667500" cy="1714500"/>
+          </a:xfrm>
+          <a:prstGeom xmlns:a="http://schemas.openxmlformats.org/drawingml/2006/main" prst="rect">
+            <a:avLst/>
+          </a:prstGeom>
+          <a:noFill xmlns:a="http://schemas.openxmlformats.org/drawingml/2006/main"/>
+          <a:ln xmlns:a="http://schemas.openxmlformats.org/drawingml/2006/main" w="0">
+            <a:noFill/>
+            <a:prstDash val="solid"/>
+          </a:ln>
+        </p:spPr>
+        <p:txBody>
+          <a:bodyPr xmlns:a="http://schemas.openxmlformats.org/drawingml/2006/main"/>
+          <a:lstStyle xmlns:a="http://schemas.openxmlformats.org/drawingml/2006/main"/>
+          <a:p xmlns:a="http://schemas.openxmlformats.org/drawingml/2006/main">
+            <a:pPr algn="l">
+              <a:buNone/>
+              <a:defRPr sz="4800" b="1">
+                <a:solidFill>
+                  <a:srgbClr val="15253E"/>
+                </a:solidFill>
+                <a:latin typeface="Malgun Gothic"/>
+                <a:ea typeface="Malgun Gothic"/>
+                <a:cs typeface="Malgun Gothic"/>
+              </a:defRPr>
+            </a:pPr>
+            <a:r>
+              <a:rPr sz="4800" b="1">
+                <a:solidFill>
+                  <a:srgbClr val="15253E"/>
+                </a:solidFill>
+                <a:latin typeface="Malgun Gothic"/>
+                <a:ea typeface="Malgun Gothic"/>
+                <a:cs typeface="Malgun Gothic"/>
+              </a:rPr>
+              <a:t>운영 적용만</a:t>
+            </a:r>
+          </a:p>
+          <a:p xmlns:a="http://schemas.openxmlformats.org/drawingml/2006/main">
+            <a:pPr algn="l">
+              <a:buNone/>
+              <a:defRPr sz="4800" b="1">
+                <a:solidFill>
+                  <a:srgbClr val="15253E"/>
+                </a:solidFill>
+                <a:latin typeface="Malgun Gothic"/>
+                <a:ea typeface="Malgun Gothic"/>
+                <a:cs typeface="Malgun Gothic"/>
+              </a:defRPr>
+            </a:pPr>
+            <a:r>
+              <a:rPr sz="4800" b="1">
+                <a:solidFill>
+                  <a:srgbClr val="15253E"/>
+                </a:solidFill>
+                <a:latin typeface="Malgun Gothic"/>
+                <a:ea typeface="Malgun Gothic"/>
+                <a:cs typeface="Malgun Gothic"/>
+              </a:rPr>
+              <a:t>승인하면 됩니다</a:t>
+            </a:r>
+          </a:p>
+        </p:txBody>
+      </p:sp>
+      <p:sp>
+        <p:nvSpPr>
+          <p:cNvPr id="3" name="close-detail">
+            <a:extLst xmlns:a="http://schemas.openxmlformats.org/drawingml/2006/main">
+              <a:ext uri="{FF2B5EF4-FFF2-40B4-BE49-F238E27FC236}">
+                <a16:creationId xmlns:a16="http://schemas.microsoft.com/office/drawing/2014/main" id="{3D772DBD-5B75-4245-9BF5-B2A8A3AB8069}"/>
+              </a:ext>
+            </a:extLst>
+          </p:cNvPr>
+          <p:cNvSpPr>
+            <a:spLocks xmlns:a="http://schemas.openxmlformats.org/drawingml/2006/main" noGrp="1"/>
+          </p:cNvSpPr>
+          <p:nvPr/>
+        </p:nvSpPr>
+        <p:spPr>
+          <a:xfrm xmlns:a="http://schemas.openxmlformats.org/drawingml/2006/main">
+            <a:off x="457200" y="4019550"/>
+            <a:ext cx="7620000" cy="876300"/>
+          </a:xfrm>
+          <a:prstGeom xmlns:a="http://schemas.openxmlformats.org/drawingml/2006/main" prst="rect">
+            <a:avLst/>
+          </a:prstGeom>
+          <a:noFill xmlns:a="http://schemas.openxmlformats.org/drawingml/2006/main"/>
+          <a:ln xmlns:a="http://schemas.openxmlformats.org/drawingml/2006/main" w="0">
+            <a:noFill/>
+            <a:prstDash val="solid"/>
+          </a:ln>
+        </p:spPr>
+        <p:txBody>
+          <a:bodyPr xmlns:a="http://schemas.openxmlformats.org/drawingml/2006/main"/>
+          <a:lstStyle xmlns:a="http://schemas.openxmlformats.org/drawingml/2006/main"/>
+          <a:p xmlns:a="http://schemas.openxmlformats.org/drawingml/2006/main">
+            <a:pPr algn="l">
+              <a:buNone/>
+              <a:defRPr sz="1950" b="0">
+                <a:solidFill>
+                  <a:srgbClr val="52647D"/>
+                </a:solidFill>
+                <a:latin typeface="Malgun Gothic"/>
+                <a:ea typeface="Malgun Gothic"/>
+                <a:cs typeface="Malgun Gothic"/>
+              </a:defRPr>
+            </a:pPr>
+            <a:r>
+              <a:rPr sz="1950" b="0">
+                <a:solidFill>
+                  <a:srgbClr val="52647D"/>
+                </a:solidFill>
+                <a:latin typeface="Malgun Gothic"/>
+                <a:ea typeface="Malgun Gothic"/>
+                <a:cs typeface="Malgun Gothic"/>
+              </a:rPr>
+              <a:t>WSL 전체 주기 PASS · 설정·보안 포함 직접 영문 0건</a:t>
+            </a:r>
+          </a:p>
+          <a:p xmlns:a="http://schemas.openxmlformats.org/drawingml/2006/main">
+            <a:pPr algn="l">
+              <a:buNone/>
+              <a:defRPr sz="1950" b="0">
+                <a:solidFill>
+                  <a:srgbClr val="52647D"/>
+                </a:solidFill>
+                <a:latin typeface="Malgun Gothic"/>
+                <a:ea typeface="Malgun Gothic"/>
+                <a:cs typeface="Malgun Gothic"/>
+              </a:defRPr>
+            </a:pPr>
+            <a:r>
+              <a:rPr sz="1950" b="0">
+                <a:solidFill>
+                  <a:srgbClr val="52647D"/>
+                </a:solidFill>
+                <a:latin typeface="Malgun Gothic"/>
+                <a:ea typeface="Malgun Gothic"/>
+                <a:cs typeface="Malgun Gothic"/>
+              </a:rPr>
+              <a:t>Core·Vendor·DB·운영 Community 변경 없음</a:t>
+            </a:r>
+          </a:p>
+        </p:txBody>
+      </p:sp>
+      <p:sp>
+        <p:nvSpPr>
+          <p:cNvPr id="4" name="close-status">
+            <a:extLst xmlns:a="http://schemas.openxmlformats.org/drawingml/2006/main">
+              <a:ext uri="{FF2B5EF4-FFF2-40B4-BE49-F238E27FC236}">
+                <a16:creationId xmlns:a16="http://schemas.microsoft.com/office/drawing/2014/main" id="{3160D9BC-7118-4FD3-AAD9-2144E7A4C4D7}"/>
+              </a:ext>
+            </a:extLst>
+          </p:cNvPr>
+          <p:cNvSpPr>
+            <a:spLocks xmlns:a="http://schemas.openxmlformats.org/drawingml/2006/main" noGrp="1"/>
+          </p:cNvSpPr>
+          <p:nvPr/>
+        </p:nvSpPr>
+        <p:spPr>
+          <a:xfrm xmlns:a="http://schemas.openxmlformats.org/drawingml/2006/main">
+            <a:off x="8572500" y="1657350"/>
+            <a:ext cx="2952750" cy="2952750"/>
+          </a:xfrm>
+          <a:prstGeom xmlns:a="http://schemas.openxmlformats.org/drawingml/2006/main" prst="roundRect">
+            <a:avLst>
+              <a:gd name="adj" fmla="val 2581"/>
+            </a:avLst>
+          </a:prstGeom>
+          <a:solidFill xmlns:a="http://schemas.openxmlformats.org/drawingml/2006/main">
+            <a:srgbClr val="EAF2FF"/>
+          </a:solidFill>
+          <a:ln xmlns:a="http://schemas.openxmlformats.org/drawingml/2006/main" w="9525">
+            <a:solidFill>
+              <a:srgbClr val="155EEF"/>
+            </a:solidFill>
+            <a:prstDash val="solid"/>
+          </a:ln>
+        </p:spPr>
+      </p:sp>
+      <p:sp>
+        <p:nvSpPr>
+          <p:cNvPr id="5" name="close-go">
+            <a:extLst xmlns:a="http://schemas.openxmlformats.org/drawingml/2006/main">
+              <a:ext uri="{FF2B5EF4-FFF2-40B4-BE49-F238E27FC236}">
+                <a16:creationId xmlns:a16="http://schemas.microsoft.com/office/drawing/2014/main" id="{29CF402C-9E70-4B3D-8FED-4FBB431FACD2}"/>
+              </a:ext>
+            </a:extLst>
+          </p:cNvPr>
+          <p:cNvSpPr>
+            <a:spLocks xmlns:a="http://schemas.openxmlformats.org/drawingml/2006/main" noGrp="1"/>
+          </p:cNvSpPr>
+          <p:nvPr/>
+        </p:nvSpPr>
+        <p:spPr>
+          <a:xfrm xmlns:a="http://schemas.openxmlformats.org/drawingml/2006/main">
+            <a:off x="8896350" y="2305050"/>
+            <a:ext cx="2305050" cy="895350"/>
+          </a:xfrm>
+          <a:prstGeom xmlns:a="http://schemas.openxmlformats.org/drawingml/2006/main" prst="rect">
+            <a:avLst/>
+          </a:prstGeom>
+          <a:noFill xmlns:a="http://schemas.openxmlformats.org/drawingml/2006/main"/>
+          <a:ln xmlns:a="http://schemas.openxmlformats.org/drawingml/2006/main" w="0">
+            <a:noFill/>
+            <a:prstDash val="solid"/>
+          </a:ln>
+        </p:spPr>
+        <p:txBody>
+          <a:bodyPr xmlns:a="http://schemas.openxmlformats.org/drawingml/2006/main"/>
+          <a:lstStyle xmlns:a="http://schemas.openxmlformats.org/drawingml/2006/main"/>
+          <a:p xmlns:a="http://schemas.openxmlformats.org/drawingml/2006/main">
+            <a:pPr algn="ctr">
+              <a:buNone/>
+              <a:defRPr sz="5100" b="1">
+                <a:solidFill>
+                  <a:srgbClr val="155EEF"/>
+                </a:solidFill>
+                <a:latin typeface="Malgun Gothic"/>
+                <a:ea typeface="Malgun Gothic"/>
+                <a:cs typeface="Malgun Gothic"/>
+              </a:defRPr>
+            </a:pPr>
+            <a:r>
+              <a:rPr sz="5100" b="1">
+                <a:solidFill>
+                  <a:srgbClr val="155EEF"/>
+                </a:solidFill>
+                <a:latin typeface="Malgun Gothic"/>
+                <a:ea typeface="Malgun Gothic"/>
+                <a:cs typeface="Malgun Gothic"/>
+              </a:rPr>
+              <a:t>GO</a:t>
+            </a:r>
+          </a:p>
+        </p:txBody>
+      </p:sp>
+      <p:sp>
+        <p:nvSpPr>
+          <p:cNvPr id="6" name="close-condition">
+            <a:extLst xmlns:a="http://schemas.openxmlformats.org/drawingml/2006/main">
+              <a:ext uri="{FF2B5EF4-FFF2-40B4-BE49-F238E27FC236}">
+                <a16:creationId xmlns:a16="http://schemas.microsoft.com/office/drawing/2014/main" id="{150AAE78-1296-4BC4-BA13-17A897DFABDF}"/>
+              </a:ext>
+            </a:extLst>
+          </p:cNvPr>
+          <p:cNvSpPr>
+            <a:spLocks xmlns:a="http://schemas.openxmlformats.org/drawingml/2006/main" noGrp="1"/>
+          </p:cNvSpPr>
+          <p:nvPr/>
+        </p:nvSpPr>
+        <p:spPr>
+          <a:xfrm xmlns:a="http://schemas.openxmlformats.org/drawingml/2006/main">
+            <a:off x="8877300" y="3390900"/>
+            <a:ext cx="2343150" cy="533400"/>
+          </a:xfrm>
+          <a:prstGeom xmlns:a="http://schemas.openxmlformats.org/drawingml/2006/main" prst="rect">
+            <a:avLst/>
+          </a:prstGeom>
+          <a:noFill xmlns:a="http://schemas.openxmlformats.org/drawingml/2006/main"/>
+          <a:ln xmlns:a="http://schemas.openxmlformats.org/drawingml/2006/main" w="0">
+            <a:noFill/>
+            <a:prstDash val="solid"/>
+          </a:ln>
+        </p:spPr>
+        <p:txBody>
+          <a:bodyPr xmlns:a="http://schemas.openxmlformats.org/drawingml/2006/main"/>
+          <a:lstStyle xmlns:a="http://schemas.openxmlformats.org/drawingml/2006/main"/>
+          <a:p xmlns:a="http://schemas.openxmlformats.org/drawingml/2006/main">
+            <a:pPr algn="ctr">
+              <a:buNone/>
+              <a:defRPr sz="1650" b="1">
+                <a:solidFill>
+                  <a:srgbClr val="15253E"/>
+                </a:solidFill>
+                <a:latin typeface="Malgun Gothic"/>
+                <a:ea typeface="Malgun Gothic"/>
+                <a:cs typeface="Malgun Gothic"/>
+              </a:defRPr>
+            </a:pPr>
+            <a:r>
+              <a:rPr sz="1650" b="1">
+                <a:solidFill>
+                  <a:srgbClr val="15253E"/>
+                </a:solidFill>
+                <a:latin typeface="Malgun Gothic"/>
+                <a:ea typeface="Malgun Gothic"/>
+                <a:cs typeface="Malgun Gothic"/>
+              </a:rPr>
+              <a:t>운영 반영 승인 대기</a:t>
+            </a:r>
+          </a:p>
+        </p:txBody>
+      </p:sp>
+      <p:sp>
+        <p:nvSpPr>
+          <p:cNvPr id="7" name="close-next">
+            <a:extLst xmlns:a="http://schemas.openxmlformats.org/drawingml/2006/main">
+              <a:ext uri="{FF2B5EF4-FFF2-40B4-BE49-F238E27FC236}">
+                <a16:creationId xmlns:a16="http://schemas.microsoft.com/office/drawing/2014/main" id="{7FF57361-4F99-46E5-8A10-2C2F456C0F78}"/>
+              </a:ext>
+            </a:extLst>
+          </p:cNvPr>
+          <p:cNvSpPr>
+            <a:spLocks xmlns:a="http://schemas.openxmlformats.org/drawingml/2006/main" noGrp="1"/>
+          </p:cNvSpPr>
+          <p:nvPr/>
+        </p:nvSpPr>
+        <p:spPr>
+          <a:xfrm xmlns:a="http://schemas.openxmlformats.org/drawingml/2006/main">
+            <a:off x="457200" y="5562600"/>
+            <a:ext cx="10668000" cy="457200"/>
+          </a:xfrm>
+          <a:prstGeom xmlns:a="http://schemas.openxmlformats.org/drawingml/2006/main" prst="rect">
+            <a:avLst/>
+          </a:prstGeom>
+          <a:noFill xmlns:a="http://schemas.openxmlformats.org/drawingml/2006/main"/>
+          <a:ln xmlns:a="http://schemas.openxmlformats.org/drawingml/2006/main" w="0">
+            <a:noFill/>
+            <a:prstDash val="solid"/>
+          </a:ln>
+        </p:spPr>
+        <p:txBody>
+          <a:bodyPr xmlns:a="http://schemas.openxmlformats.org/drawingml/2006/main"/>
+          <a:lstStyle xmlns:a="http://schemas.openxmlformats.org/drawingml/2006/main"/>
+          <a:p xmlns:a="http://schemas.openxmlformats.org/drawingml/2006/main">
+            <a:pPr algn="l">
+              <a:buNone/>
               <a:defRPr sz="1725" b="1">
                 <a:solidFill>
                   <a:srgbClr val="078248"/>

--- a/output/presentation/techflow-community-ui-modernization.pptx
+++ b/output/presentation/techflow-community-ui-modernization.pptx
@@ -2,21 +2,22 @@
 <file path=ppt/presentation.xml><?xml version="1.0" encoding="utf-8"?>
 <p:presentation xmlns:p="http://schemas.openxmlformats.org/presentationml/2006/main">
   <p:sldMasterIdLst>
-    <p:sldMasterId xmlns:r="http://schemas.openxmlformats.org/officeDocument/2006/relationships" id="2147483648" r:id="R894d45997f10424e"/>
+    <p:sldMasterId xmlns:r="http://schemas.openxmlformats.org/officeDocument/2006/relationships" id="2147483648" r:id="R7db422df728f478a"/>
   </p:sldMasterIdLst>
   <p:notesMasterIdLst>
-    <p:notesMasterId xmlns:r="http://schemas.openxmlformats.org/officeDocument/2006/relationships" r:id="Rc7128d46a0ab4c8e"/>
+    <p:notesMasterId xmlns:r="http://schemas.openxmlformats.org/officeDocument/2006/relationships" r:id="R0960b126cd00472f"/>
   </p:notesMasterIdLst>
   <p:sldIdLst>
-    <p:sldId xmlns:r="http://schemas.openxmlformats.org/officeDocument/2006/relationships" id="256" r:id="Rc5274dc3e8cf48cb"/>
-    <p:sldId xmlns:r="http://schemas.openxmlformats.org/officeDocument/2006/relationships" id="257" r:id="Rfdc76ce7e69649bb"/>
-    <p:sldId xmlns:r="http://schemas.openxmlformats.org/officeDocument/2006/relationships" id="258" r:id="Rf7e2f125ed02421c"/>
-    <p:sldId xmlns:r="http://schemas.openxmlformats.org/officeDocument/2006/relationships" id="259" r:id="R99de6d26c24d46c0"/>
-    <p:sldId xmlns:r="http://schemas.openxmlformats.org/officeDocument/2006/relationships" id="260" r:id="R0bbdcdd0611f4c7d"/>
-    <p:sldId xmlns:r="http://schemas.openxmlformats.org/officeDocument/2006/relationships" id="261" r:id="R41357c59c7594ee4"/>
-    <p:sldId xmlns:r="http://schemas.openxmlformats.org/officeDocument/2006/relationships" id="262" r:id="R0456d80c45ea4e59"/>
-    <p:sldId xmlns:r="http://schemas.openxmlformats.org/officeDocument/2006/relationships" id="263" r:id="R3c0c84b5f23f43bd"/>
-    <p:sldId xmlns:r="http://schemas.openxmlformats.org/officeDocument/2006/relationships" id="264" r:id="Rcf30438fe9df4305"/>
+    <p:sldId xmlns:r="http://schemas.openxmlformats.org/officeDocument/2006/relationships" id="256" r:id="R26d068967cce4fb4"/>
+    <p:sldId xmlns:r="http://schemas.openxmlformats.org/officeDocument/2006/relationships" id="257" r:id="R06461a7dbb924376"/>
+    <p:sldId xmlns:r="http://schemas.openxmlformats.org/officeDocument/2006/relationships" id="258" r:id="R0df35c2f5b0b4544"/>
+    <p:sldId xmlns:r="http://schemas.openxmlformats.org/officeDocument/2006/relationships" id="259" r:id="R374877f046074225"/>
+    <p:sldId xmlns:r="http://schemas.openxmlformats.org/officeDocument/2006/relationships" id="260" r:id="R582f93c1881a437f"/>
+    <p:sldId xmlns:r="http://schemas.openxmlformats.org/officeDocument/2006/relationships" id="261" r:id="R50f0ee913cc44329"/>
+    <p:sldId xmlns:r="http://schemas.openxmlformats.org/officeDocument/2006/relationships" id="262" r:id="R35088a03d5f143c5"/>
+    <p:sldId xmlns:r="http://schemas.openxmlformats.org/officeDocument/2006/relationships" id="263" r:id="R7a79459ba2694839"/>
+    <p:sldId xmlns:r="http://schemas.openxmlformats.org/officeDocument/2006/relationships" id="264" r:id="R9d2c6c782c27478b"/>
+    <p:sldId xmlns:r="http://schemas.openxmlformats.org/officeDocument/2006/relationships" id="265" r:id="R7fda2b10ebaf408c"/>
   </p:sldIdLst>
   <p:sldSz cx="12192000" cy="6858000"/>
   <p:notesSz cx="6858000" cy="9144000"/>
@@ -500,6 +501,96 @@
 </p:notes>
 </file>
 
+<file path=ppt/notesSlides/notesSlide10.xml><?xml version="1.0" encoding="utf-8"?>
+<p:notes xmlns:p="http://schemas.openxmlformats.org/presentationml/2006/main">
+  <p:cSld>
+    <p:spTree>
+      <p:nvGrpSpPr>
+        <p:cNvPr id="1" name=""/>
+        <p:cNvGrpSpPr/>
+        <p:nvPr/>
+      </p:nvGrpSpPr>
+      <p:grpSpPr>
+        <a:xfrm xmlns:a="http://schemas.openxmlformats.org/drawingml/2006/main"/>
+      </p:grpSpPr>
+      <p:sp>
+        <p:nvSpPr>
+          <p:cNvPr id="2" name="Slide Image Placeholder 1"/>
+          <p:cNvSpPr>
+            <a:spLocks xmlns:a="http://schemas.openxmlformats.org/drawingml/2006/main" noGrp="1"/>
+          </p:cNvSpPr>
+          <p:nvPr>
+            <p:ph type="sldImg" idx="0"/>
+          </p:nvPr>
+        </p:nvSpPr>
+        <p:spPr/>
+      </p:sp>
+      <p:sp>
+        <p:nvSpPr>
+          <p:cNvPr id="3" name="Notes Placeholder 2"/>
+          <p:cNvSpPr>
+            <a:spLocks xmlns:a="http://schemas.openxmlformats.org/drawingml/2006/main" noGrp="1"/>
+          </p:cNvSpPr>
+          <p:nvPr>
+            <p:ph type="body" idx="1"/>
+          </p:nvPr>
+        </p:nvSpPr>
+        <p:spPr/>
+        <p:txBody>
+          <a:bodyPr xmlns:a="http://schemas.openxmlformats.org/drawingml/2006/main"/>
+          <a:lstStyle xmlns:a="http://schemas.openxmlformats.org/drawingml/2006/main"/>
+          <a:p xmlns:a="http://schemas.openxmlformats.org/drawingml/2006/main">
+            <a:r>
+              <a:t>[Sources]</a:t>
+            </a:r>
+          </a:p>
+          <a:p xmlns:a="http://schemas.openxmlformats.org/drawingml/2006/main">
+            <a:r>
+              <a:t>- docs/reports/issue-73-community-ui-validation.md</a:t>
+            </a:r>
+          </a:p>
+          <a:p xmlns:a="http://schemas.openxmlformats.org/drawingml/2006/main">
+            <a:r>
+              <a:t>- docs/evidence/issue-73/community-theme-validation.json</a:t>
+            </a:r>
+          </a:p>
+          <a:p xmlns:a="http://schemas.openxmlformats.org/drawingml/2006/main">
+            <a:r>
+              <a:t>- docs/plans/issue-73-community-ui-modernization.md</a:t>
+            </a:r>
+          </a:p>
+          <a:p xmlns:a="http://schemas.openxmlformats.org/drawingml/2006/main">
+            <a:r>
+              <a:t>- docs/runbooks/community-theme-rollout-rollback.md</a:t>
+            </a:r>
+          </a:p>
+        </p:txBody>
+      </p:sp>
+      <p:sp>
+        <p:nvSpPr>
+          <p:cNvPr id="4" name="Slide Number Placeholder 3"/>
+          <p:cNvSpPr>
+            <a:spLocks xmlns:a="http://schemas.openxmlformats.org/drawingml/2006/main" noGrp="1"/>
+          </p:cNvSpPr>
+          <p:nvPr>
+            <p:ph type="sldNum" idx="5"/>
+          </p:nvPr>
+        </p:nvSpPr>
+        <p:spPr/>
+        <p:txBody>
+          <a:bodyPr xmlns:a="http://schemas.openxmlformats.org/drawingml/2006/main"/>
+          <a:lstStyle xmlns:a="http://schemas.openxmlformats.org/drawingml/2006/main"/>
+          <a:p xmlns:a="http://schemas.openxmlformats.org/drawingml/2006/main"/>
+        </p:txBody>
+      </p:sp>
+    </p:spTree>
+  </p:cSld>
+  <p:clrMapOvr>
+    <a:masterClrMapping xmlns:a="http://schemas.openxmlformats.org/drawingml/2006/main"/>
+  </p:clrMapOvr>
+</p:notes>
+</file>
+
 <file path=ppt/notesSlides/notesSlide2.xml><?xml version="1.0" encoding="utf-8"?>
 <p:notes xmlns:p="http://schemas.openxmlformats.org/presentationml/2006/main">
   <p:cSld>
@@ -1258,7 +1349,7 @@
   </p:cSld>
   <p:clrMap bg1="lt1" tx1="dk1" bg2="lt2" tx2="dk2" accent1="accent1" accent2="accent2" accent3="accent3" accent4="accent4" accent5="accent5" accent6="accent6" hlink="hlink" folHlink="folHlink"/>
   <p:sldLayoutIdLst>
-    <p:sldLayoutId xmlns:r="http://schemas.openxmlformats.org/officeDocument/2006/relationships" id="2147483649" r:id="R82bcf45673dc4b11"/>
+    <p:sldLayoutId xmlns:r="http://schemas.openxmlformats.org/officeDocument/2006/relationships" id="2147483649" r:id="R14412500c26e4139"/>
   </p:sldLayoutIdLst>
   <p:txStyles>
     <p:titleStyle>
@@ -2043,7 +2134,7 @@
           <p:nvPr/>
         </p:nvPicPr>
         <p:blipFill>
-          <a:blip xmlns:r="http://schemas.openxmlformats.org/officeDocument/2006/relationships" xmlns:a="http://schemas.openxmlformats.org/drawingml/2006/main" r:embed="R86b7ad43cb194650"/>
+          <a:blip xmlns:r="http://schemas.openxmlformats.org/officeDocument/2006/relationships" xmlns:a="http://schemas.openxmlformats.org/drawingml/2006/main" r:embed="Re730d171d35f48c4"/>
           <a:stretch xmlns:a="http://schemas.openxmlformats.org/drawingml/2006/main"/>
         </p:blipFill>
         <p:spPr>
@@ -2119,6 +2210,460 @@
     <p:extLst>
       <p:ext uri="{BB962C8B-B14F-4D97-AF65-F5344CB8AC3E}">
         <p14:creationId xmlns:p14="http://schemas.microsoft.com/office/powerpoint/2010/main" val="159873576"/>
+      </p:ext>
+    </p:extLst>
+  </p:cSld>
+</p:sld>
+</file>
+
+<file path=ppt/slides/slide10.xml><?xml version="1.0" encoding="utf-8"?>
+<p:sld xmlns:p="http://schemas.openxmlformats.org/presentationml/2006/main">
+  <p:cSld>
+    <p:bg>
+      <p:bgPr>
+        <a:solidFill xmlns:a="http://schemas.openxmlformats.org/drawingml/2006/main">
+          <a:srgbClr val="FFFFFF"/>
+        </a:solidFill>
+      </p:bgPr>
+    </p:bg>
+    <p:spTree>
+      <p:nvGrpSpPr>
+        <p:cNvPr id="1" name=""/>
+        <p:cNvGrpSpPr/>
+        <p:nvPr/>
+      </p:nvGrpSpPr>
+      <p:grpSpPr>
+        <a:xfrm xmlns:a="http://schemas.openxmlformats.org/drawingml/2006/main"/>
+      </p:grpSpPr>
+      <p:sp>
+        <p:nvSpPr>
+          <p:cNvPr id="8" name="close-kicker">
+            <a:extLst xmlns:a="http://schemas.openxmlformats.org/drawingml/2006/main">
+              <a:ext uri="{FF2B5EF4-FFF2-40B4-BE49-F238E27FC236}">
+                <a16:creationId xmlns:a16="http://schemas.microsoft.com/office/drawing/2014/main" id="{CA02A572-4AC9-4737-B75D-10EC7C22C06C}"/>
+              </a:ext>
+            </a:extLst>
+          </p:cNvPr>
+          <p:cNvSpPr>
+            <a:spLocks xmlns:a="http://schemas.openxmlformats.org/drawingml/2006/main" noGrp="1"/>
+          </p:cNvSpPr>
+          <p:nvPr/>
+        </p:nvSpPr>
+        <p:spPr>
+          <a:xfrm xmlns:a="http://schemas.openxmlformats.org/drawingml/2006/main">
+            <a:off x="457200" y="400050"/>
+            <a:ext cx="6191250" cy="342900"/>
+          </a:xfrm>
+          <a:prstGeom xmlns:a="http://schemas.openxmlformats.org/drawingml/2006/main" prst="rect">
+            <a:avLst/>
+          </a:prstGeom>
+          <a:noFill xmlns:a="http://schemas.openxmlformats.org/drawingml/2006/main"/>
+          <a:ln xmlns:a="http://schemas.openxmlformats.org/drawingml/2006/main" w="0">
+            <a:noFill/>
+            <a:prstDash val="solid"/>
+          </a:ln>
+        </p:spPr>
+        <p:txBody>
+          <a:bodyPr xmlns:a="http://schemas.openxmlformats.org/drawingml/2006/main"/>
+          <a:lstStyle xmlns:a="http://schemas.openxmlformats.org/drawingml/2006/main"/>
+          <a:p xmlns:a="http://schemas.openxmlformats.org/drawingml/2006/main">
+            <a:pPr algn="l">
+              <a:buNone/>
+              <a:defRPr sz="1500" b="1">
+                <a:solidFill>
+                  <a:srgbClr val="52647D"/>
+                </a:solidFill>
+                <a:latin typeface="Malgun Gothic"/>
+                <a:ea typeface="Malgun Gothic"/>
+                <a:cs typeface="Malgun Gothic"/>
+              </a:defRPr>
+            </a:pPr>
+            <a:r>
+              <a:rPr sz="1500" b="1">
+                <a:solidFill>
+                  <a:srgbClr val="52647D"/>
+                </a:solidFill>
+                <a:latin typeface="Malgun Gothic"/>
+                <a:ea typeface="Malgun Gothic"/>
+                <a:cs typeface="Malgun Gothic"/>
+              </a:rPr>
+              <a:t>ISSUE #73 · IMPLEMENTATION COMPLETE</a:t>
+            </a:r>
+          </a:p>
+        </p:txBody>
+      </p:sp>
+      <p:sp>
+        <p:nvSpPr>
+          <p:cNvPr id="2" name="close-title">
+            <a:extLst xmlns:a="http://schemas.openxmlformats.org/drawingml/2006/main">
+              <a:ext uri="{FF2B5EF4-FFF2-40B4-BE49-F238E27FC236}">
+                <a16:creationId xmlns:a16="http://schemas.microsoft.com/office/drawing/2014/main" id="{F5C154A0-B755-42E9-9F79-7921475EF0CD}"/>
+              </a:ext>
+            </a:extLst>
+          </p:cNvPr>
+          <p:cNvSpPr>
+            <a:spLocks xmlns:a="http://schemas.openxmlformats.org/drawingml/2006/main" noGrp="1"/>
+          </p:cNvSpPr>
+          <p:nvPr/>
+        </p:nvSpPr>
+        <p:spPr>
+          <a:xfrm xmlns:a="http://schemas.openxmlformats.org/drawingml/2006/main">
+            <a:off x="457200" y="1600200"/>
+            <a:ext cx="6667500" cy="1714500"/>
+          </a:xfrm>
+          <a:prstGeom xmlns:a="http://schemas.openxmlformats.org/drawingml/2006/main" prst="rect">
+            <a:avLst/>
+          </a:prstGeom>
+          <a:noFill xmlns:a="http://schemas.openxmlformats.org/drawingml/2006/main"/>
+          <a:ln xmlns:a="http://schemas.openxmlformats.org/drawingml/2006/main" w="0">
+            <a:noFill/>
+            <a:prstDash val="solid"/>
+          </a:ln>
+        </p:spPr>
+        <p:txBody>
+          <a:bodyPr xmlns:a="http://schemas.openxmlformats.org/drawingml/2006/main"/>
+          <a:lstStyle xmlns:a="http://schemas.openxmlformats.org/drawingml/2006/main"/>
+          <a:p xmlns:a="http://schemas.openxmlformats.org/drawingml/2006/main">
+            <a:pPr algn="l">
+              <a:buNone/>
+              <a:defRPr sz="4800" b="1">
+                <a:solidFill>
+                  <a:srgbClr val="15253E"/>
+                </a:solidFill>
+                <a:latin typeface="Malgun Gothic"/>
+                <a:ea typeface="Malgun Gothic"/>
+                <a:cs typeface="Malgun Gothic"/>
+              </a:defRPr>
+            </a:pPr>
+            <a:r>
+              <a:rPr sz="4800" b="1">
+                <a:solidFill>
+                  <a:srgbClr val="15253E"/>
+                </a:solidFill>
+                <a:latin typeface="Malgun Gothic"/>
+                <a:ea typeface="Malgun Gothic"/>
+                <a:cs typeface="Malgun Gothic"/>
+              </a:rPr>
+              <a:t>운영 적용만</a:t>
+            </a:r>
+          </a:p>
+          <a:p xmlns:a="http://schemas.openxmlformats.org/drawingml/2006/main">
+            <a:pPr algn="l">
+              <a:buNone/>
+              <a:defRPr sz="4800" b="1">
+                <a:solidFill>
+                  <a:srgbClr val="15253E"/>
+                </a:solidFill>
+                <a:latin typeface="Malgun Gothic"/>
+                <a:ea typeface="Malgun Gothic"/>
+                <a:cs typeface="Malgun Gothic"/>
+              </a:defRPr>
+            </a:pPr>
+            <a:r>
+              <a:rPr sz="4800" b="1">
+                <a:solidFill>
+                  <a:srgbClr val="15253E"/>
+                </a:solidFill>
+                <a:latin typeface="Malgun Gothic"/>
+                <a:ea typeface="Malgun Gothic"/>
+                <a:cs typeface="Malgun Gothic"/>
+              </a:rPr>
+              <a:t>승인하면 됩니다</a:t>
+            </a:r>
+          </a:p>
+        </p:txBody>
+      </p:sp>
+      <p:sp>
+        <p:nvSpPr>
+          <p:cNvPr id="3" name="close-detail">
+            <a:extLst xmlns:a="http://schemas.openxmlformats.org/drawingml/2006/main">
+              <a:ext uri="{FF2B5EF4-FFF2-40B4-BE49-F238E27FC236}">
+                <a16:creationId xmlns:a16="http://schemas.microsoft.com/office/drawing/2014/main" id="{3D772DBD-5B75-4245-9BF5-B2A8A3AB8069}"/>
+              </a:ext>
+            </a:extLst>
+          </p:cNvPr>
+          <p:cNvSpPr>
+            <a:spLocks xmlns:a="http://schemas.openxmlformats.org/drawingml/2006/main" noGrp="1"/>
+          </p:cNvSpPr>
+          <p:nvPr/>
+        </p:nvSpPr>
+        <p:spPr>
+          <a:xfrm xmlns:a="http://schemas.openxmlformats.org/drawingml/2006/main">
+            <a:off x="457200" y="4019550"/>
+            <a:ext cx="7620000" cy="876300"/>
+          </a:xfrm>
+          <a:prstGeom xmlns:a="http://schemas.openxmlformats.org/drawingml/2006/main" prst="rect">
+            <a:avLst/>
+          </a:prstGeom>
+          <a:noFill xmlns:a="http://schemas.openxmlformats.org/drawingml/2006/main"/>
+          <a:ln xmlns:a="http://schemas.openxmlformats.org/drawingml/2006/main" w="0">
+            <a:noFill/>
+            <a:prstDash val="solid"/>
+          </a:ln>
+        </p:spPr>
+        <p:txBody>
+          <a:bodyPr xmlns:a="http://schemas.openxmlformats.org/drawingml/2006/main"/>
+          <a:lstStyle xmlns:a="http://schemas.openxmlformats.org/drawingml/2006/main"/>
+          <a:p xmlns:a="http://schemas.openxmlformats.org/drawingml/2006/main">
+            <a:pPr algn="l">
+              <a:buNone/>
+              <a:defRPr sz="1950" b="0">
+                <a:solidFill>
+                  <a:srgbClr val="52647D"/>
+                </a:solidFill>
+                <a:latin typeface="Malgun Gothic"/>
+                <a:ea typeface="Malgun Gothic"/>
+                <a:cs typeface="Malgun Gothic"/>
+              </a:defRPr>
+            </a:pPr>
+            <a:r>
+              <a:rPr sz="1950" b="0">
+                <a:solidFill>
+                  <a:srgbClr val="52647D"/>
+                </a:solidFill>
+                <a:latin typeface="Malgun Gothic"/>
+                <a:ea typeface="Malgun Gothic"/>
+                <a:cs typeface="Malgun Gothic"/>
+              </a:rPr>
+              <a:t>WSL 전체 주기 PASS · 태그·날짜·아이콘 포함 직접 영문 0건</a:t>
+            </a:r>
+          </a:p>
+          <a:p xmlns:a="http://schemas.openxmlformats.org/drawingml/2006/main">
+            <a:pPr algn="l">
+              <a:buNone/>
+              <a:defRPr sz="1950" b="0">
+                <a:solidFill>
+                  <a:srgbClr val="52647D"/>
+                </a:solidFill>
+                <a:latin typeface="Malgun Gothic"/>
+                <a:ea typeface="Malgun Gothic"/>
+                <a:cs typeface="Malgun Gothic"/>
+              </a:defRPr>
+            </a:pPr>
+            <a:r>
+              <a:rPr sz="1950" b="0">
+                <a:solidFill>
+                  <a:srgbClr val="52647D"/>
+                </a:solidFill>
+                <a:latin typeface="Malgun Gothic"/>
+                <a:ea typeface="Malgun Gothic"/>
+                <a:cs typeface="Malgun Gothic"/>
+              </a:rPr>
+              <a:t>Core·Vendor·DB·운영 Community 변경 없음</a:t>
+            </a:r>
+          </a:p>
+        </p:txBody>
+      </p:sp>
+      <p:sp>
+        <p:nvSpPr>
+          <p:cNvPr id="4" name="close-status">
+            <a:extLst xmlns:a="http://schemas.openxmlformats.org/drawingml/2006/main">
+              <a:ext uri="{FF2B5EF4-FFF2-40B4-BE49-F238E27FC236}">
+                <a16:creationId xmlns:a16="http://schemas.microsoft.com/office/drawing/2014/main" id="{3160D9BC-7118-4FD3-AAD9-2144E7A4C4D7}"/>
+              </a:ext>
+            </a:extLst>
+          </p:cNvPr>
+          <p:cNvSpPr>
+            <a:spLocks xmlns:a="http://schemas.openxmlformats.org/drawingml/2006/main" noGrp="1"/>
+          </p:cNvSpPr>
+          <p:nvPr/>
+        </p:nvSpPr>
+        <p:spPr>
+          <a:xfrm xmlns:a="http://schemas.openxmlformats.org/drawingml/2006/main">
+            <a:off x="8572500" y="1657350"/>
+            <a:ext cx="2952750" cy="2952750"/>
+          </a:xfrm>
+          <a:prstGeom xmlns:a="http://schemas.openxmlformats.org/drawingml/2006/main" prst="roundRect">
+            <a:avLst>
+              <a:gd name="adj" fmla="val 2581"/>
+            </a:avLst>
+          </a:prstGeom>
+          <a:solidFill xmlns:a="http://schemas.openxmlformats.org/drawingml/2006/main">
+            <a:srgbClr val="EAF2FF"/>
+          </a:solidFill>
+          <a:ln xmlns:a="http://schemas.openxmlformats.org/drawingml/2006/main" w="9525">
+            <a:solidFill>
+              <a:srgbClr val="155EEF"/>
+            </a:solidFill>
+            <a:prstDash val="solid"/>
+          </a:ln>
+        </p:spPr>
+      </p:sp>
+      <p:sp>
+        <p:nvSpPr>
+          <p:cNvPr id="5" name="close-go">
+            <a:extLst xmlns:a="http://schemas.openxmlformats.org/drawingml/2006/main">
+              <a:ext uri="{FF2B5EF4-FFF2-40B4-BE49-F238E27FC236}">
+                <a16:creationId xmlns:a16="http://schemas.microsoft.com/office/drawing/2014/main" id="{29CF402C-9E70-4B3D-8FED-4FBB431FACD2}"/>
+              </a:ext>
+            </a:extLst>
+          </p:cNvPr>
+          <p:cNvSpPr>
+            <a:spLocks xmlns:a="http://schemas.openxmlformats.org/drawingml/2006/main" noGrp="1"/>
+          </p:cNvSpPr>
+          <p:nvPr/>
+        </p:nvSpPr>
+        <p:spPr>
+          <a:xfrm xmlns:a="http://schemas.openxmlformats.org/drawingml/2006/main">
+            <a:off x="8896350" y="2305050"/>
+            <a:ext cx="2305050" cy="895350"/>
+          </a:xfrm>
+          <a:prstGeom xmlns:a="http://schemas.openxmlformats.org/drawingml/2006/main" prst="rect">
+            <a:avLst/>
+          </a:prstGeom>
+          <a:noFill xmlns:a="http://schemas.openxmlformats.org/drawingml/2006/main"/>
+          <a:ln xmlns:a="http://schemas.openxmlformats.org/drawingml/2006/main" w="0">
+            <a:noFill/>
+            <a:prstDash val="solid"/>
+          </a:ln>
+        </p:spPr>
+        <p:txBody>
+          <a:bodyPr xmlns:a="http://schemas.openxmlformats.org/drawingml/2006/main"/>
+          <a:lstStyle xmlns:a="http://schemas.openxmlformats.org/drawingml/2006/main"/>
+          <a:p xmlns:a="http://schemas.openxmlformats.org/drawingml/2006/main">
+            <a:pPr algn="ctr">
+              <a:buNone/>
+              <a:defRPr sz="5100" b="1">
+                <a:solidFill>
+                  <a:srgbClr val="155EEF"/>
+                </a:solidFill>
+                <a:latin typeface="Malgun Gothic"/>
+                <a:ea typeface="Malgun Gothic"/>
+                <a:cs typeface="Malgun Gothic"/>
+              </a:defRPr>
+            </a:pPr>
+            <a:r>
+              <a:rPr sz="5100" b="1">
+                <a:solidFill>
+                  <a:srgbClr val="155EEF"/>
+                </a:solidFill>
+                <a:latin typeface="Malgun Gothic"/>
+                <a:ea typeface="Malgun Gothic"/>
+                <a:cs typeface="Malgun Gothic"/>
+              </a:rPr>
+              <a:t>GO</a:t>
+            </a:r>
+          </a:p>
+        </p:txBody>
+      </p:sp>
+      <p:sp>
+        <p:nvSpPr>
+          <p:cNvPr id="6" name="close-condition">
+            <a:extLst xmlns:a="http://schemas.openxmlformats.org/drawingml/2006/main">
+              <a:ext uri="{FF2B5EF4-FFF2-40B4-BE49-F238E27FC236}">
+                <a16:creationId xmlns:a16="http://schemas.microsoft.com/office/drawing/2014/main" id="{150AAE78-1296-4BC4-BA13-17A897DFABDF}"/>
+              </a:ext>
+            </a:extLst>
+          </p:cNvPr>
+          <p:cNvSpPr>
+            <a:spLocks xmlns:a="http://schemas.openxmlformats.org/drawingml/2006/main" noGrp="1"/>
+          </p:cNvSpPr>
+          <p:nvPr/>
+        </p:nvSpPr>
+        <p:spPr>
+          <a:xfrm xmlns:a="http://schemas.openxmlformats.org/drawingml/2006/main">
+            <a:off x="8877300" y="3390900"/>
+            <a:ext cx="2343150" cy="533400"/>
+          </a:xfrm>
+          <a:prstGeom xmlns:a="http://schemas.openxmlformats.org/drawingml/2006/main" prst="rect">
+            <a:avLst/>
+          </a:prstGeom>
+          <a:noFill xmlns:a="http://schemas.openxmlformats.org/drawingml/2006/main"/>
+          <a:ln xmlns:a="http://schemas.openxmlformats.org/drawingml/2006/main" w="0">
+            <a:noFill/>
+            <a:prstDash val="solid"/>
+          </a:ln>
+        </p:spPr>
+        <p:txBody>
+          <a:bodyPr xmlns:a="http://schemas.openxmlformats.org/drawingml/2006/main"/>
+          <a:lstStyle xmlns:a="http://schemas.openxmlformats.org/drawingml/2006/main"/>
+          <a:p xmlns:a="http://schemas.openxmlformats.org/drawingml/2006/main">
+            <a:pPr algn="ctr">
+              <a:buNone/>
+              <a:defRPr sz="1650" b="1">
+                <a:solidFill>
+                  <a:srgbClr val="15253E"/>
+                </a:solidFill>
+                <a:latin typeface="Malgun Gothic"/>
+                <a:ea typeface="Malgun Gothic"/>
+                <a:cs typeface="Malgun Gothic"/>
+              </a:defRPr>
+            </a:pPr>
+            <a:r>
+              <a:rPr sz="1650" b="1">
+                <a:solidFill>
+                  <a:srgbClr val="15253E"/>
+                </a:solidFill>
+                <a:latin typeface="Malgun Gothic"/>
+                <a:ea typeface="Malgun Gothic"/>
+                <a:cs typeface="Malgun Gothic"/>
+              </a:rPr>
+              <a:t>운영 반영 승인 대기</a:t>
+            </a:r>
+          </a:p>
+        </p:txBody>
+      </p:sp>
+      <p:sp>
+        <p:nvSpPr>
+          <p:cNvPr id="7" name="close-next">
+            <a:extLst xmlns:a="http://schemas.openxmlformats.org/drawingml/2006/main">
+              <a:ext uri="{FF2B5EF4-FFF2-40B4-BE49-F238E27FC236}">
+                <a16:creationId xmlns:a16="http://schemas.microsoft.com/office/drawing/2014/main" id="{7FF57361-4F99-46E5-8A10-2C2F456C0F78}"/>
+              </a:ext>
+            </a:extLst>
+          </p:cNvPr>
+          <p:cNvSpPr>
+            <a:spLocks xmlns:a="http://schemas.openxmlformats.org/drawingml/2006/main" noGrp="1"/>
+          </p:cNvSpPr>
+          <p:nvPr/>
+        </p:nvSpPr>
+        <p:spPr>
+          <a:xfrm xmlns:a="http://schemas.openxmlformats.org/drawingml/2006/main">
+            <a:off x="457200" y="5562600"/>
+            <a:ext cx="10668000" cy="457200"/>
+          </a:xfrm>
+          <a:prstGeom xmlns:a="http://schemas.openxmlformats.org/drawingml/2006/main" prst="rect">
+            <a:avLst/>
+          </a:prstGeom>
+          <a:noFill xmlns:a="http://schemas.openxmlformats.org/drawingml/2006/main"/>
+          <a:ln xmlns:a="http://schemas.openxmlformats.org/drawingml/2006/main" w="0">
+            <a:noFill/>
+            <a:prstDash val="solid"/>
+          </a:ln>
+        </p:spPr>
+        <p:txBody>
+          <a:bodyPr xmlns:a="http://schemas.openxmlformats.org/drawingml/2006/main"/>
+          <a:lstStyle xmlns:a="http://schemas.openxmlformats.org/drawingml/2006/main"/>
+          <a:p xmlns:a="http://schemas.openxmlformats.org/drawingml/2006/main">
+            <a:pPr algn="l">
+              <a:buNone/>
+              <a:defRPr sz="1725" b="1">
+                <a:solidFill>
+                  <a:srgbClr val="078248"/>
+                </a:solidFill>
+                <a:latin typeface="Malgun Gothic"/>
+                <a:ea typeface="Malgun Gothic"/>
+                <a:cs typeface="Malgun Gothic"/>
+              </a:defRPr>
+            </a:pPr>
+            <a:r>
+              <a:rPr sz="1725" b="1">
+                <a:solidFill>
+                  <a:srgbClr val="078248"/>
+                </a:solidFill>
+                <a:latin typeface="Malgun Gothic"/>
+                <a:ea typeface="Malgun Gothic"/>
+                <a:cs typeface="Malgun Gothic"/>
+              </a:rPr>
+              <a:t>다음: 백업 → 테마 적용 → Desktop/Mobile Smoke → 해시 비교</a:t>
+            </a:r>
+          </a:p>
+        </p:txBody>
+      </p:sp>
+    </p:spTree>
+    <p:extLst>
+      <p:ext uri="{BB962C8B-B14F-4D97-AF65-F5344CB8AC3E}">
+        <p14:creationId xmlns:p14="http://schemas.microsoft.com/office/powerpoint/2010/main" val="674511522"/>
       </p:ext>
     </p:extLst>
   </p:cSld>
@@ -2381,7 +2926,7 @@
           <p:nvPr/>
         </p:nvPicPr>
         <p:blipFill>
-          <a:blip xmlns:r="http://schemas.openxmlformats.org/officeDocument/2006/relationships" xmlns:a="http://schemas.openxmlformats.org/drawingml/2006/main" r:embed="R182a1840f8c044ed"/>
+          <a:blip xmlns:r="http://schemas.openxmlformats.org/officeDocument/2006/relationships" xmlns:a="http://schemas.openxmlformats.org/drawingml/2006/main" r:embed="R811f5a32f9d047d2"/>
           <a:stretch xmlns:a="http://schemas.openxmlformats.org/drawingml/2006/main"/>
         </p:blipFill>
         <p:spPr>
@@ -2405,7 +2950,7 @@
           <p:nvPr/>
         </p:nvPicPr>
         <p:blipFill>
-          <a:blip xmlns:r="http://schemas.openxmlformats.org/officeDocument/2006/relationships" xmlns:a="http://schemas.openxmlformats.org/drawingml/2006/main" r:embed="Rabaf519f2f47432c"/>
+          <a:blip xmlns:r="http://schemas.openxmlformats.org/officeDocument/2006/relationships" xmlns:a="http://schemas.openxmlformats.org/drawingml/2006/main" r:embed="R683557e4d6a5448c"/>
           <a:stretch xmlns:a="http://schemas.openxmlformats.org/drawingml/2006/main"/>
         </p:blipFill>
         <p:spPr>
@@ -3425,7 +3970,7 @@
           <p:nvPr/>
         </p:nvPicPr>
         <p:blipFill>
-          <a:blip xmlns:r="http://schemas.openxmlformats.org/officeDocument/2006/relationships" xmlns:a="http://schemas.openxmlformats.org/drawingml/2006/main" r:embed="Rbdb73b5e996c4930"/>
+          <a:blip xmlns:r="http://schemas.openxmlformats.org/officeDocument/2006/relationships" xmlns:a="http://schemas.openxmlformats.org/drawingml/2006/main" r:embed="R2ebcfacbe4cb4af5"/>
           <a:stretch xmlns:a="http://schemas.openxmlformats.org/drawingml/2006/main"/>
         </p:blipFill>
         <p:spPr>
@@ -3449,7 +3994,7 @@
           <p:nvPr/>
         </p:nvPicPr>
         <p:blipFill>
-          <a:blip xmlns:r="http://schemas.openxmlformats.org/officeDocument/2006/relationships" xmlns:a="http://schemas.openxmlformats.org/drawingml/2006/main" r:embed="R86147cbd289d40c0"/>
+          <a:blip xmlns:r="http://schemas.openxmlformats.org/officeDocument/2006/relationships" xmlns:a="http://schemas.openxmlformats.org/drawingml/2006/main" r:embed="Re6b7930988364404"/>
           <a:stretch xmlns:a="http://schemas.openxmlformats.org/drawingml/2006/main"/>
         </p:blipFill>
         <p:spPr>
@@ -3822,7 +4367,7 @@
           <p:nvPr/>
         </p:nvPicPr>
         <p:blipFill>
-          <a:blip xmlns:r="http://schemas.openxmlformats.org/officeDocument/2006/relationships" xmlns:a="http://schemas.openxmlformats.org/drawingml/2006/main" r:embed="Rf345b42927a94ffa"/>
+          <a:blip xmlns:r="http://schemas.openxmlformats.org/officeDocument/2006/relationships" xmlns:a="http://schemas.openxmlformats.org/drawingml/2006/main" r:embed="R23c80cfbd0f64f1e"/>
           <a:stretch xmlns:a="http://schemas.openxmlformats.org/drawingml/2006/main"/>
         </p:blipFill>
         <p:spPr>
@@ -4440,7 +4985,7 @@
           <p:nvPr/>
         </p:nvPicPr>
         <p:blipFill>
-          <a:blip xmlns:r="http://schemas.openxmlformats.org/officeDocument/2006/relationships" xmlns:a="http://schemas.openxmlformats.org/drawingml/2006/main" r:embed="R8955379a17b1478e"/>
+          <a:blip xmlns:r="http://schemas.openxmlformats.org/officeDocument/2006/relationships" xmlns:a="http://schemas.openxmlformats.org/drawingml/2006/main" r:embed="Rd33cab9055e04d27"/>
           <a:stretch xmlns:a="http://schemas.openxmlformats.org/drawingml/2006/main"/>
         </p:blipFill>
         <p:spPr>
@@ -4935,10 +5480,10 @@
       </p:grpSpPr>
       <p:sp>
         <p:nvSpPr>
-          <p:cNvPr id="20" name="title-6">
-            <a:extLst xmlns:a="http://schemas.openxmlformats.org/drawingml/2006/main">
-              <a:ext uri="{FF2B5EF4-FFF2-40B4-BE49-F238E27FC236}">
-                <a16:creationId xmlns:a16="http://schemas.microsoft.com/office/drawing/2014/main" id="{A1988E7D-4FE9-4900-8EFF-3040E5D0CEDA}"/>
+          <p:cNvPr id="11" name="title-5">
+            <a:extLst xmlns:a="http://schemas.openxmlformats.org/drawingml/2006/main">
+              <a:ext uri="{FF2B5EF4-FFF2-40B4-BE49-F238E27FC236}">
+                <a16:creationId xmlns:a16="http://schemas.microsoft.com/office/drawing/2014/main" id="{15B4B5EF-39AC-41BD-860C-4B8A8FDBAAA7}"/>
               </a:ext>
             </a:extLst>
           </p:cNvPr>
@@ -4985,17 +5530,17 @@
                 <a:ea typeface="Malgun Gothic"/>
                 <a:cs typeface="Malgun Gothic"/>
               </a:rPr>
-              <a:t>활성화와 롤백에도 콘텐츠는 그대로였습니다</a:t>
-            </a:r>
-          </a:p>
-        </p:txBody>
-      </p:sp>
-      <p:sp>
-        <p:nvSpPr>
-          <p:cNvPr id="2" name="page-6">
-            <a:extLst xmlns:a="http://schemas.openxmlformats.org/drawingml/2006/main">
-              <a:ext uri="{FF2B5EF4-FFF2-40B4-BE49-F238E27FC236}">
-                <a16:creationId xmlns:a16="http://schemas.microsoft.com/office/drawing/2014/main" id="{BE3DDE7B-FA52-43C9-AAE2-8928904D0FEC}"/>
+              <a:t>태그와 최근 토론을 읽기 쉬운 정보 구조로 나눴습니다</a:t>
+            </a:r>
+          </a:p>
+        </p:txBody>
+      </p:sp>
+      <p:sp>
+        <p:nvSpPr>
+          <p:cNvPr id="2" name="page-5">
+            <a:extLst xmlns:a="http://schemas.openxmlformats.org/drawingml/2006/main">
+              <a:ext uri="{FF2B5EF4-FFF2-40B4-BE49-F238E27FC236}">
+                <a16:creationId xmlns:a16="http://schemas.microsoft.com/office/drawing/2014/main" id="{E85E0CD4-3FBE-4910-B306-0119C668BAFC}"/>
               </a:ext>
             </a:extLst>
           </p:cNvPr>
@@ -5047,315 +5592,50 @@
           </a:p>
         </p:txBody>
       </p:sp>
-      <p:sp>
-        <p:nvSpPr>
-          <p:cNvPr id="3" name="arrow-0">
-            <a:extLst xmlns:a="http://schemas.openxmlformats.org/drawingml/2006/main">
-              <a:ext uri="{FF2B5EF4-FFF2-40B4-BE49-F238E27FC236}">
-                <a16:creationId xmlns:a16="http://schemas.microsoft.com/office/drawing/2014/main" id="{7B834A7A-209D-4491-899C-10F6F9E68B2E}"/>
-              </a:ext>
-            </a:extLst>
-          </p:cNvPr>
-          <p:cNvSpPr>
-            <a:spLocks xmlns:a="http://schemas.openxmlformats.org/drawingml/2006/main" noGrp="1"/>
-          </p:cNvSpPr>
-          <p:nvPr/>
-        </p:nvSpPr>
-        <p:spPr>
-          <a:xfrm xmlns:a="http://schemas.openxmlformats.org/drawingml/2006/main">
-            <a:off x="2876550" y="2809875"/>
-            <a:ext cx="552450" cy="495300"/>
-          </a:xfrm>
-          <a:prstGeom xmlns:a="http://schemas.openxmlformats.org/drawingml/2006/main" prst="rect">
-            <a:avLst/>
-          </a:prstGeom>
-          <a:noFill xmlns:a="http://schemas.openxmlformats.org/drawingml/2006/main"/>
-          <a:ln xmlns:a="http://schemas.openxmlformats.org/drawingml/2006/main" w="0">
-            <a:noFill/>
-            <a:prstDash val="solid"/>
-          </a:ln>
-        </p:spPr>
-        <p:txBody>
-          <a:bodyPr xmlns:a="http://schemas.openxmlformats.org/drawingml/2006/main"/>
-          <a:lstStyle xmlns:a="http://schemas.openxmlformats.org/drawingml/2006/main"/>
-          <a:p xmlns:a="http://schemas.openxmlformats.org/drawingml/2006/main">
-            <a:pPr algn="ctr">
-              <a:buNone/>
-              <a:defRPr sz="2400" b="1">
-                <a:solidFill>
-                  <a:srgbClr val="52647D"/>
-                </a:solidFill>
-                <a:latin typeface="Malgun Gothic"/>
-                <a:ea typeface="Malgun Gothic"/>
-                <a:cs typeface="Malgun Gothic"/>
-              </a:defRPr>
-            </a:pPr>
-            <a:r>
-              <a:rPr sz="2400" b="1">
-                <a:solidFill>
-                  <a:srgbClr val="52647D"/>
-                </a:solidFill>
-                <a:latin typeface="Malgun Gothic"/>
-                <a:ea typeface="Malgun Gothic"/>
-                <a:cs typeface="Malgun Gothic"/>
-              </a:rPr>
-              <a:t>→</a:t>
-            </a:r>
-          </a:p>
-        </p:txBody>
-      </p:sp>
-      <p:sp>
-        <p:nvSpPr>
-          <p:cNvPr id="4" name="phase-0">
-            <a:extLst xmlns:a="http://schemas.openxmlformats.org/drawingml/2006/main">
-              <a:ext uri="{FF2B5EF4-FFF2-40B4-BE49-F238E27FC236}">
-                <a16:creationId xmlns:a16="http://schemas.microsoft.com/office/drawing/2014/main" id="{739F78CD-D657-4918-A9FA-4B164DC81EF7}"/>
-              </a:ext>
-            </a:extLst>
-          </p:cNvPr>
-          <p:cNvSpPr>
-            <a:spLocks xmlns:a="http://schemas.openxmlformats.org/drawingml/2006/main" noGrp="1"/>
-          </p:cNvSpPr>
-          <p:nvPr/>
-        </p:nvSpPr>
-        <p:spPr>
-          <a:xfrm xmlns:a="http://schemas.openxmlformats.org/drawingml/2006/main">
-            <a:off x="666750" y="2247900"/>
-            <a:ext cx="2171700" cy="1562100"/>
+      <p:pic>
+        <p:nvPicPr>
+          <p:cNvPr id="15" name=""/>
+          <p:cNvPicPr>
+            <a:picLocks xmlns:a="http://schemas.openxmlformats.org/drawingml/2006/main" noChangeAspect="1"/>
+          </p:cNvPicPr>
+          <p:nvPr/>
+        </p:nvPicPr>
+        <p:blipFill>
+          <a:blip xmlns:r="http://schemas.openxmlformats.org/officeDocument/2006/relationships" xmlns:a="http://schemas.openxmlformats.org/drawingml/2006/main" r:embed="R49c8ed85e6e24bf8"/>
+          <a:stretch xmlns:a="http://schemas.openxmlformats.org/drawingml/2006/main"/>
+        </p:blipFill>
+        <p:spPr>
+          <a:xfrm xmlns:a="http://schemas.openxmlformats.org/drawingml/2006/main" flipH="0" flipV="0">
+            <a:off x="457200" y="1314450"/>
+            <a:ext cx="7239000" cy="4524375"/>
+          </a:xfrm>
+          <a:prstGeom xmlns:a="http://schemas.openxmlformats.org/drawingml/2006/main" prst="roundRect">
+            <a:avLst/>
+          </a:prstGeom>
+        </p:spPr>
+      </p:pic>
+      <p:sp>
+        <p:nvSpPr>
+          <p:cNvPr id="4" name="profile-result">
+            <a:extLst xmlns:a="http://schemas.openxmlformats.org/drawingml/2006/main">
+              <a:ext uri="{FF2B5EF4-FFF2-40B4-BE49-F238E27FC236}">
+                <a16:creationId xmlns:a16="http://schemas.microsoft.com/office/drawing/2014/main" id="{F2315AED-2B85-41E1-A5D8-A0DDEE6A5244}"/>
+              </a:ext>
+            </a:extLst>
+          </p:cNvPr>
+          <p:cNvSpPr>
+            <a:spLocks xmlns:a="http://schemas.openxmlformats.org/drawingml/2006/main" noGrp="1"/>
+          </p:cNvSpPr>
+          <p:nvPr/>
+        </p:nvSpPr>
+        <p:spPr>
+          <a:xfrm xmlns:a="http://schemas.openxmlformats.org/drawingml/2006/main">
+            <a:off x="8096250" y="1485900"/>
+            <a:ext cx="3333750" cy="1790700"/>
           </a:xfrm>
           <a:prstGeom xmlns:a="http://schemas.openxmlformats.org/drawingml/2006/main" prst="roundRect">
             <a:avLst>
-              <a:gd name="adj" fmla="val 4878"/>
-            </a:avLst>
-          </a:prstGeom>
-          <a:solidFill xmlns:a="http://schemas.openxmlformats.org/drawingml/2006/main">
-            <a:srgbClr val="F3F7FC"/>
-          </a:solidFill>
-          <a:ln xmlns:a="http://schemas.openxmlformats.org/drawingml/2006/main" w="9525">
-            <a:solidFill>
-              <a:srgbClr val="D5E1F1"/>
-            </a:solidFill>
-            <a:prstDash val="solid"/>
-          </a:ln>
-        </p:spPr>
-      </p:sp>
-      <p:sp>
-        <p:nvSpPr>
-          <p:cNvPr id="5" name="phase-label-0">
-            <a:extLst xmlns:a="http://schemas.openxmlformats.org/drawingml/2006/main">
-              <a:ext uri="{FF2B5EF4-FFF2-40B4-BE49-F238E27FC236}">
-                <a16:creationId xmlns:a16="http://schemas.microsoft.com/office/drawing/2014/main" id="{63AECE67-3CC4-4DA1-AF5E-C93DC0D47574}"/>
-              </a:ext>
-            </a:extLst>
-          </p:cNvPr>
-          <p:cNvSpPr>
-            <a:spLocks xmlns:a="http://schemas.openxmlformats.org/drawingml/2006/main" noGrp="1"/>
-          </p:cNvSpPr>
-          <p:nvPr/>
-        </p:nvSpPr>
-        <p:spPr>
-          <a:xfrm xmlns:a="http://schemas.openxmlformats.org/drawingml/2006/main">
-            <a:off x="857250" y="2552700"/>
-            <a:ext cx="1790700" cy="704850"/>
-          </a:xfrm>
-          <a:prstGeom xmlns:a="http://schemas.openxmlformats.org/drawingml/2006/main" prst="rect">
-            <a:avLst/>
-          </a:prstGeom>
-          <a:noFill xmlns:a="http://schemas.openxmlformats.org/drawingml/2006/main"/>
-          <a:ln xmlns:a="http://schemas.openxmlformats.org/drawingml/2006/main" w="0">
-            <a:noFill/>
-            <a:prstDash val="solid"/>
-          </a:ln>
-        </p:spPr>
-        <p:txBody>
-          <a:bodyPr xmlns:a="http://schemas.openxmlformats.org/drawingml/2006/main"/>
-          <a:lstStyle xmlns:a="http://schemas.openxmlformats.org/drawingml/2006/main"/>
-          <a:p xmlns:a="http://schemas.openxmlformats.org/drawingml/2006/main">
-            <a:pPr algn="ctr">
-              <a:buNone/>
-              <a:defRPr sz="1950" b="1">
-                <a:solidFill>
-                  <a:srgbClr val="15253E"/>
-                </a:solidFill>
-                <a:latin typeface="Malgun Gothic"/>
-                <a:ea typeface="Malgun Gothic"/>
-                <a:cs typeface="Malgun Gothic"/>
-              </a:defRPr>
-            </a:pPr>
-            <a:r>
-              <a:rPr sz="1950" b="1">
-                <a:solidFill>
-                  <a:srgbClr val="15253E"/>
-                </a:solidFill>
-                <a:latin typeface="Malgun Gothic"/>
-                <a:ea typeface="Malgun Gothic"/>
-                <a:cs typeface="Malgun Gothic"/>
-              </a:rPr>
-              <a:t>기준선</a:t>
-            </a:r>
-          </a:p>
-          <a:p xmlns:a="http://schemas.openxmlformats.org/drawingml/2006/main">
-            <a:pPr algn="ctr">
-              <a:buNone/>
-              <a:defRPr sz="1950" b="1">
-                <a:solidFill>
-                  <a:srgbClr val="15253E"/>
-                </a:solidFill>
-                <a:latin typeface="Malgun Gothic"/>
-                <a:ea typeface="Malgun Gothic"/>
-                <a:cs typeface="Malgun Gothic"/>
-              </a:defRPr>
-            </a:pPr>
-            <a:r>
-              <a:rPr sz="1950" b="1">
-                <a:solidFill>
-                  <a:srgbClr val="15253E"/>
-                </a:solidFill>
-                <a:latin typeface="Malgun Gothic"/>
-                <a:ea typeface="Malgun Gothic"/>
-                <a:cs typeface="Malgun Gothic"/>
-              </a:rPr>
-              <a:t>Disabled</a:t>
-            </a:r>
-          </a:p>
-        </p:txBody>
-      </p:sp>
-      <p:sp>
-        <p:nvSpPr>
-          <p:cNvPr id="6" name="phase-http-0">
-            <a:extLst xmlns:a="http://schemas.openxmlformats.org/drawingml/2006/main">
-              <a:ext uri="{FF2B5EF4-FFF2-40B4-BE49-F238E27FC236}">
-                <a16:creationId xmlns:a16="http://schemas.microsoft.com/office/drawing/2014/main" id="{3411BCDF-FFDB-4D8F-ABD4-9DF41B03F7D6}"/>
-              </a:ext>
-            </a:extLst>
-          </p:cNvPr>
-          <p:cNvSpPr>
-            <a:spLocks xmlns:a="http://schemas.openxmlformats.org/drawingml/2006/main" noGrp="1"/>
-          </p:cNvSpPr>
-          <p:nvPr/>
-        </p:nvSpPr>
-        <p:spPr>
-          <a:xfrm xmlns:a="http://schemas.openxmlformats.org/drawingml/2006/main">
-            <a:off x="857250" y="3333750"/>
-            <a:ext cx="1790700" cy="285750"/>
-          </a:xfrm>
-          <a:prstGeom xmlns:a="http://schemas.openxmlformats.org/drawingml/2006/main" prst="rect">
-            <a:avLst/>
-          </a:prstGeom>
-          <a:noFill xmlns:a="http://schemas.openxmlformats.org/drawingml/2006/main"/>
-          <a:ln xmlns:a="http://schemas.openxmlformats.org/drawingml/2006/main" w="0">
-            <a:noFill/>
-            <a:prstDash val="solid"/>
-          </a:ln>
-        </p:spPr>
-        <p:txBody>
-          <a:bodyPr xmlns:a="http://schemas.openxmlformats.org/drawingml/2006/main"/>
-          <a:lstStyle xmlns:a="http://schemas.openxmlformats.org/drawingml/2006/main"/>
-          <a:p xmlns:a="http://schemas.openxmlformats.org/drawingml/2006/main">
-            <a:pPr algn="ctr">
-              <a:buNone/>
-              <a:defRPr sz="1350" b="0">
-                <a:solidFill>
-                  <a:srgbClr val="52647D"/>
-                </a:solidFill>
-                <a:latin typeface="Malgun Gothic"/>
-                <a:ea typeface="Malgun Gothic"/>
-                <a:cs typeface="Malgun Gothic"/>
-              </a:defRPr>
-            </a:pPr>
-            <a:r>
-              <a:rPr sz="1350" b="0">
-                <a:solidFill>
-                  <a:srgbClr val="52647D"/>
-                </a:solidFill>
-                <a:latin typeface="Malgun Gothic"/>
-                <a:ea typeface="Malgun Gothic"/>
-                <a:cs typeface="Malgun Gothic"/>
-              </a:rPr>
-              <a:t>HTTP 200</a:t>
-            </a:r>
-          </a:p>
-        </p:txBody>
-      </p:sp>
-      <p:sp>
-        <p:nvSpPr>
-          <p:cNvPr id="7" name="arrow-1">
-            <a:extLst xmlns:a="http://schemas.openxmlformats.org/drawingml/2006/main">
-              <a:ext uri="{FF2B5EF4-FFF2-40B4-BE49-F238E27FC236}">
-                <a16:creationId xmlns:a16="http://schemas.microsoft.com/office/drawing/2014/main" id="{5C52BED4-5B33-4F1F-8B4C-1420869A3755}"/>
-              </a:ext>
-            </a:extLst>
-          </p:cNvPr>
-          <p:cNvSpPr>
-            <a:spLocks xmlns:a="http://schemas.openxmlformats.org/drawingml/2006/main" noGrp="1"/>
-          </p:cNvSpPr>
-          <p:nvPr/>
-        </p:nvSpPr>
-        <p:spPr>
-          <a:xfrm xmlns:a="http://schemas.openxmlformats.org/drawingml/2006/main">
-            <a:off x="5686425" y="2809875"/>
-            <a:ext cx="552450" cy="495300"/>
-          </a:xfrm>
-          <a:prstGeom xmlns:a="http://schemas.openxmlformats.org/drawingml/2006/main" prst="rect">
-            <a:avLst/>
-          </a:prstGeom>
-          <a:noFill xmlns:a="http://schemas.openxmlformats.org/drawingml/2006/main"/>
-          <a:ln xmlns:a="http://schemas.openxmlformats.org/drawingml/2006/main" w="0">
-            <a:noFill/>
-            <a:prstDash val="solid"/>
-          </a:ln>
-        </p:spPr>
-        <p:txBody>
-          <a:bodyPr xmlns:a="http://schemas.openxmlformats.org/drawingml/2006/main"/>
-          <a:lstStyle xmlns:a="http://schemas.openxmlformats.org/drawingml/2006/main"/>
-          <a:p xmlns:a="http://schemas.openxmlformats.org/drawingml/2006/main">
-            <a:pPr algn="ctr">
-              <a:buNone/>
-              <a:defRPr sz="2400" b="1">
-                <a:solidFill>
-                  <a:srgbClr val="52647D"/>
-                </a:solidFill>
-                <a:latin typeface="Malgun Gothic"/>
-                <a:ea typeface="Malgun Gothic"/>
-                <a:cs typeface="Malgun Gothic"/>
-              </a:defRPr>
-            </a:pPr>
-            <a:r>
-              <a:rPr sz="2400" b="1">
-                <a:solidFill>
-                  <a:srgbClr val="52647D"/>
-                </a:solidFill>
-                <a:latin typeface="Malgun Gothic"/>
-                <a:ea typeface="Malgun Gothic"/>
-                <a:cs typeface="Malgun Gothic"/>
-              </a:rPr>
-              <a:t>→</a:t>
-            </a:r>
-          </a:p>
-        </p:txBody>
-      </p:sp>
-      <p:sp>
-        <p:nvSpPr>
-          <p:cNvPr id="8" name="phase-1">
-            <a:extLst xmlns:a="http://schemas.openxmlformats.org/drawingml/2006/main">
-              <a:ext uri="{FF2B5EF4-FFF2-40B4-BE49-F238E27FC236}">
-                <a16:creationId xmlns:a16="http://schemas.microsoft.com/office/drawing/2014/main" id="{CCC5DC3E-EAAF-47A7-BE20-81A03A0A0384}"/>
-              </a:ext>
-            </a:extLst>
-          </p:cNvPr>
-          <p:cNvSpPr>
-            <a:spLocks xmlns:a="http://schemas.openxmlformats.org/drawingml/2006/main" noGrp="1"/>
-          </p:cNvSpPr>
-          <p:nvPr/>
-        </p:nvSpPr>
-        <p:spPr>
-          <a:xfrm xmlns:a="http://schemas.openxmlformats.org/drawingml/2006/main">
-            <a:off x="3476625" y="2247900"/>
-            <a:ext cx="2171700" cy="1562100"/>
-          </a:xfrm>
-          <a:prstGeom xmlns:a="http://schemas.openxmlformats.org/drawingml/2006/main" prst="roundRect">
-            <a:avLst>
-              <a:gd name="adj" fmla="val 4878"/>
+              <a:gd name="adj" fmla="val 4255"/>
             </a:avLst>
           </a:prstGeom>
           <a:solidFill xmlns:a="http://schemas.openxmlformats.org/drawingml/2006/main">
@@ -5371,22 +5651,22 @@
       </p:sp>
       <p:sp>
         <p:nvSpPr>
-          <p:cNvPr id="9" name="phase-label-1">
-            <a:extLst xmlns:a="http://schemas.openxmlformats.org/drawingml/2006/main">
-              <a:ext uri="{FF2B5EF4-FFF2-40B4-BE49-F238E27FC236}">
-                <a16:creationId xmlns:a16="http://schemas.microsoft.com/office/drawing/2014/main" id="{703B871E-E432-4AAB-8D50-6BCBAF062755}"/>
-              </a:ext>
-            </a:extLst>
-          </p:cNvPr>
-          <p:cNvSpPr>
-            <a:spLocks xmlns:a="http://schemas.openxmlformats.org/drawingml/2006/main" noGrp="1"/>
-          </p:cNvSpPr>
-          <p:nvPr/>
-        </p:nvSpPr>
-        <p:spPr>
-          <a:xfrm xmlns:a="http://schemas.openxmlformats.org/drawingml/2006/main">
-            <a:off x="3667125" y="2552700"/>
-            <a:ext cx="1790700" cy="704850"/>
+          <p:cNvPr id="5" name="profile-title">
+            <a:extLst xmlns:a="http://schemas.openxmlformats.org/drawingml/2006/main">
+              <a:ext uri="{FF2B5EF4-FFF2-40B4-BE49-F238E27FC236}">
+                <a16:creationId xmlns:a16="http://schemas.microsoft.com/office/drawing/2014/main" id="{F20E61C3-61BF-46BF-8C05-62259B784B9C}"/>
+              </a:ext>
+            </a:extLst>
+          </p:cNvPr>
+          <p:cNvSpPr>
+            <a:spLocks xmlns:a="http://schemas.openxmlformats.org/drawingml/2006/main" noGrp="1"/>
+          </p:cNvSpPr>
+          <p:nvPr/>
+        </p:nvSpPr>
+        <p:spPr>
+          <a:xfrm xmlns:a="http://schemas.openxmlformats.org/drawingml/2006/main">
+            <a:off x="8382000" y="1752600"/>
+            <a:ext cx="2762250" cy="361950"/>
           </a:xfrm>
           <a:prstGeom xmlns:a="http://schemas.openxmlformats.org/drawingml/2006/main" prst="rect">
             <a:avLst/>
@@ -5403,7 +5683,7 @@
           <a:p xmlns:a="http://schemas.openxmlformats.org/drawingml/2006/main">
             <a:pPr algn="ctr">
               <a:buNone/>
-              <a:defRPr sz="1950" b="1">
+              <a:defRPr sz="2025" b="1">
                 <a:solidFill>
                   <a:srgbClr val="155EEF"/>
                 </a:solidFill>
@@ -5413,7 +5693,7 @@
               </a:defRPr>
             </a:pPr>
             <a:r>
-              <a:rPr sz="1950" b="1">
+              <a:rPr sz="2025" b="1">
                 <a:solidFill>
                   <a:srgbClr val="155EEF"/>
                 </a:solidFill>
@@ -5421,53 +5701,29 @@
                 <a:ea typeface="Malgun Gothic"/>
                 <a:cs typeface="Malgun Gothic"/>
               </a:rPr>
-              <a:t>활성화</a:t>
-            </a:r>
-          </a:p>
-          <a:p xmlns:a="http://schemas.openxmlformats.org/drawingml/2006/main">
-            <a:pPr algn="ctr">
-              <a:buNone/>
-              <a:defRPr sz="1950" b="1">
-                <a:solidFill>
-                  <a:srgbClr val="155EEF"/>
-                </a:solidFill>
-                <a:latin typeface="Malgun Gothic"/>
-                <a:ea typeface="Malgun Gothic"/>
-                <a:cs typeface="Malgun Gothic"/>
-              </a:defRPr>
-            </a:pPr>
-            <a:r>
-              <a:rPr sz="1950" b="1">
-                <a:solidFill>
-                  <a:srgbClr val="155EEF"/>
-                </a:solidFill>
-                <a:latin typeface="Malgun Gothic"/>
-                <a:ea typeface="Malgun Gothic"/>
-                <a:cs typeface="Malgun Gothic"/>
-              </a:rPr>
-              <a:t>Enabled</a:t>
-            </a:r>
-          </a:p>
-        </p:txBody>
-      </p:sp>
-      <p:sp>
-        <p:nvSpPr>
-          <p:cNvPr id="10" name="phase-http-1">
-            <a:extLst xmlns:a="http://schemas.openxmlformats.org/drawingml/2006/main">
-              <a:ext uri="{FF2B5EF4-FFF2-40B4-BE49-F238E27FC236}">
-                <a16:creationId xmlns:a16="http://schemas.microsoft.com/office/drawing/2014/main" id="{AE3959C6-3A52-4DCF-821D-D827B0664350}"/>
-              </a:ext>
-            </a:extLst>
-          </p:cNvPr>
-          <p:cNvSpPr>
-            <a:spLocks xmlns:a="http://schemas.openxmlformats.org/drawingml/2006/main" noGrp="1"/>
-          </p:cNvSpPr>
-          <p:nvPr/>
-        </p:nvSpPr>
-        <p:spPr>
-          <a:xfrm xmlns:a="http://schemas.openxmlformats.org/drawingml/2006/main">
-            <a:off x="3667125" y="3333750"/>
-            <a:ext cx="1790700" cy="285750"/>
+              <a:t>주요 태그</a:t>
+            </a:r>
+          </a:p>
+        </p:txBody>
+      </p:sp>
+      <p:sp>
+        <p:nvSpPr>
+          <p:cNvPr id="6" name="profile-copy">
+            <a:extLst xmlns:a="http://schemas.openxmlformats.org/drawingml/2006/main">
+              <a:ext uri="{FF2B5EF4-FFF2-40B4-BE49-F238E27FC236}">
+                <a16:creationId xmlns:a16="http://schemas.microsoft.com/office/drawing/2014/main" id="{5DB761A4-0783-41E0-9D9F-1C0C49EB7A01}"/>
+              </a:ext>
+            </a:extLst>
+          </p:cNvPr>
+          <p:cNvSpPr>
+            <a:spLocks xmlns:a="http://schemas.openxmlformats.org/drawingml/2006/main" noGrp="1"/>
+          </p:cNvSpPr>
+          <p:nvPr/>
+        </p:nvSpPr>
+        <p:spPr>
+          <a:xfrm xmlns:a="http://schemas.openxmlformats.org/drawingml/2006/main">
+            <a:off x="8382000" y="2247900"/>
+            <a:ext cx="2762250" cy="838200"/>
           </a:xfrm>
           <a:prstGeom xmlns:a="http://schemas.openxmlformats.org/drawingml/2006/main" prst="rect">
             <a:avLst/>
@@ -5484,47 +5740,130 @@
           <a:p xmlns:a="http://schemas.openxmlformats.org/drawingml/2006/main">
             <a:pPr algn="ctr">
               <a:buNone/>
-              <a:defRPr sz="1350" b="0">
-                <a:solidFill>
-                  <a:srgbClr val="52647D"/>
-                </a:solidFill>
-                <a:latin typeface="Malgun Gothic"/>
-                <a:ea typeface="Malgun Gothic"/>
-                <a:cs typeface="Malgun Gothic"/>
-              </a:defRPr>
-            </a:pPr>
-            <a:r>
-              <a:rPr sz="1350" b="0">
-                <a:solidFill>
-                  <a:srgbClr val="52647D"/>
-                </a:solidFill>
-                <a:latin typeface="Malgun Gothic"/>
-                <a:ea typeface="Malgun Gothic"/>
-                <a:cs typeface="Malgun Gothic"/>
-              </a:rPr>
-              <a:t>HTTP 200</a:t>
-            </a:r>
-          </a:p>
-        </p:txBody>
-      </p:sp>
-      <p:sp>
-        <p:nvSpPr>
-          <p:cNvPr id="11" name="arrow-2">
-            <a:extLst xmlns:a="http://schemas.openxmlformats.org/drawingml/2006/main">
-              <a:ext uri="{FF2B5EF4-FFF2-40B4-BE49-F238E27FC236}">
-                <a16:creationId xmlns:a16="http://schemas.microsoft.com/office/drawing/2014/main" id="{EBB4EFA8-8837-4DC7-B490-F0FDBE819CC2}"/>
-              </a:ext>
-            </a:extLst>
-          </p:cNvPr>
-          <p:cNvSpPr>
-            <a:spLocks xmlns:a="http://schemas.openxmlformats.org/drawingml/2006/main" noGrp="1"/>
-          </p:cNvSpPr>
-          <p:nvPr/>
-        </p:nvSpPr>
-        <p:spPr>
-          <a:xfrm xmlns:a="http://schemas.openxmlformats.org/drawingml/2006/main">
-            <a:off x="8496300" y="2809875"/>
-            <a:ext cx="552450" cy="495300"/>
+              <a:defRPr sz="1500" b="0">
+                <a:solidFill>
+                  <a:srgbClr val="15253E"/>
+                </a:solidFill>
+                <a:latin typeface="Malgun Gothic"/>
+                <a:ea typeface="Malgun Gothic"/>
+                <a:cs typeface="Malgun Gothic"/>
+              </a:defRPr>
+            </a:pPr>
+            <a:r>
+              <a:rPr sz="1500" b="0">
+                <a:solidFill>
+                  <a:srgbClr val="15253E"/>
+                </a:solidFill>
+                <a:latin typeface="Malgun Gothic"/>
+                <a:ea typeface="Malgun Gothic"/>
+                <a:cs typeface="Malgun Gothic"/>
+              </a:rPr>
+              <a:t>3열 카드 · 간격 18px</a:t>
+            </a:r>
+          </a:p>
+          <a:p xmlns:a="http://schemas.openxmlformats.org/drawingml/2006/main">
+            <a:pPr algn="ctr">
+              <a:buNone/>
+              <a:defRPr sz="1500" b="0">
+                <a:solidFill>
+                  <a:srgbClr val="15253E"/>
+                </a:solidFill>
+                <a:latin typeface="Malgun Gothic"/>
+                <a:ea typeface="Malgun Gothic"/>
+                <a:cs typeface="Malgun Gothic"/>
+              </a:defRPr>
+            </a:pPr>
+            <a:r>
+              <a:rPr sz="1500" b="0">
+                <a:solidFill>
+                  <a:srgbClr val="15253E"/>
+                </a:solidFill>
+                <a:latin typeface="Malgun Gothic"/>
+                <a:ea typeface="Malgun Gothic"/>
+                <a:cs typeface="Malgun Gothic"/>
+              </a:rPr>
+              <a:t>최근 토론 독립 패널</a:t>
+            </a:r>
+          </a:p>
+          <a:p xmlns:a="http://schemas.openxmlformats.org/drawingml/2006/main">
+            <a:pPr algn="ctr">
+              <a:buNone/>
+              <a:defRPr sz="1500" b="0">
+                <a:solidFill>
+                  <a:srgbClr val="15253E"/>
+                </a:solidFill>
+                <a:latin typeface="Malgun Gothic"/>
+                <a:ea typeface="Malgun Gothic"/>
+                <a:cs typeface="Malgun Gothic"/>
+              </a:defRPr>
+            </a:pPr>
+            <a:r>
+              <a:rPr sz="1500" b="0">
+                <a:solidFill>
+                  <a:srgbClr val="15253E"/>
+                </a:solidFill>
+                <a:latin typeface="Malgun Gothic"/>
+                <a:ea typeface="Malgun Gothic"/>
+                <a:cs typeface="Malgun Gothic"/>
+              </a:rPr>
+              <a:t>날짜 00년 0월 0일</a:t>
+            </a:r>
+          </a:p>
+        </p:txBody>
+      </p:sp>
+      <p:sp>
+        <p:nvSpPr>
+          <p:cNvPr id="7" name="navigation-result">
+            <a:extLst xmlns:a="http://schemas.openxmlformats.org/drawingml/2006/main">
+              <a:ext uri="{FF2B5EF4-FFF2-40B4-BE49-F238E27FC236}">
+                <a16:creationId xmlns:a16="http://schemas.microsoft.com/office/drawing/2014/main" id="{2257FE94-6B17-44D6-9670-E774B0CFBBC8}"/>
+              </a:ext>
+            </a:extLst>
+          </p:cNvPr>
+          <p:cNvSpPr>
+            <a:spLocks xmlns:a="http://schemas.openxmlformats.org/drawingml/2006/main" noGrp="1"/>
+          </p:cNvSpPr>
+          <p:nvPr/>
+        </p:nvSpPr>
+        <p:spPr>
+          <a:xfrm xmlns:a="http://schemas.openxmlformats.org/drawingml/2006/main">
+            <a:off x="8096250" y="3600450"/>
+            <a:ext cx="3333750" cy="1790700"/>
+          </a:xfrm>
+          <a:prstGeom xmlns:a="http://schemas.openxmlformats.org/drawingml/2006/main" prst="roundRect">
+            <a:avLst>
+              <a:gd name="adj" fmla="val 4255"/>
+            </a:avLst>
+          </a:prstGeom>
+          <a:solidFill xmlns:a="http://schemas.openxmlformats.org/drawingml/2006/main">
+            <a:srgbClr val="EAFAF2"/>
+          </a:solidFill>
+          <a:ln xmlns:a="http://schemas.openxmlformats.org/drawingml/2006/main" w="9525">
+            <a:solidFill>
+              <a:srgbClr val="86D2AA"/>
+            </a:solidFill>
+            <a:prstDash val="solid"/>
+          </a:ln>
+        </p:spPr>
+      </p:sp>
+      <p:sp>
+        <p:nvSpPr>
+          <p:cNvPr id="8" name="navigation-title">
+            <a:extLst xmlns:a="http://schemas.openxmlformats.org/drawingml/2006/main">
+              <a:ext uri="{FF2B5EF4-FFF2-40B4-BE49-F238E27FC236}">
+                <a16:creationId xmlns:a16="http://schemas.microsoft.com/office/drawing/2014/main" id="{46964870-783A-46F5-A4D8-7731A9E8F348}"/>
+              </a:ext>
+            </a:extLst>
+          </p:cNvPr>
+          <p:cNvSpPr>
+            <a:spLocks xmlns:a="http://schemas.openxmlformats.org/drawingml/2006/main" noGrp="1"/>
+          </p:cNvSpPr>
+          <p:nvPr/>
+        </p:nvSpPr>
+        <p:spPr>
+          <a:xfrm xmlns:a="http://schemas.openxmlformats.org/drawingml/2006/main">
+            <a:off x="8382000" y="3867150"/>
+            <a:ext cx="2762250" cy="361950"/>
           </a:xfrm>
           <a:prstGeom xmlns:a="http://schemas.openxmlformats.org/drawingml/2006/main" prst="rect">
             <a:avLst/>
@@ -5541,82 +5880,47 @@
           <a:p xmlns:a="http://schemas.openxmlformats.org/drawingml/2006/main">
             <a:pPr algn="ctr">
               <a:buNone/>
-              <a:defRPr sz="2400" b="1">
-                <a:solidFill>
-                  <a:srgbClr val="52647D"/>
-                </a:solidFill>
-                <a:latin typeface="Malgun Gothic"/>
-                <a:ea typeface="Malgun Gothic"/>
-                <a:cs typeface="Malgun Gothic"/>
-              </a:defRPr>
-            </a:pPr>
-            <a:r>
-              <a:rPr sz="2400" b="1">
-                <a:solidFill>
-                  <a:srgbClr val="52647D"/>
-                </a:solidFill>
-                <a:latin typeface="Malgun Gothic"/>
-                <a:ea typeface="Malgun Gothic"/>
-                <a:cs typeface="Malgun Gothic"/>
-              </a:rPr>
-              <a:t>→</a:t>
-            </a:r>
-          </a:p>
-        </p:txBody>
-      </p:sp>
-      <p:sp>
-        <p:nvSpPr>
-          <p:cNvPr id="12" name="phase-2">
-            <a:extLst xmlns:a="http://schemas.openxmlformats.org/drawingml/2006/main">
-              <a:ext uri="{FF2B5EF4-FFF2-40B4-BE49-F238E27FC236}">
-                <a16:creationId xmlns:a16="http://schemas.microsoft.com/office/drawing/2014/main" id="{30B14935-D9F6-49E4-9FFA-35C561CA1787}"/>
-              </a:ext>
-            </a:extLst>
-          </p:cNvPr>
-          <p:cNvSpPr>
-            <a:spLocks xmlns:a="http://schemas.openxmlformats.org/drawingml/2006/main" noGrp="1"/>
-          </p:cNvSpPr>
-          <p:nvPr/>
-        </p:nvSpPr>
-        <p:spPr>
-          <a:xfrm xmlns:a="http://schemas.openxmlformats.org/drawingml/2006/main">
-            <a:off x="6286500" y="2247900"/>
-            <a:ext cx="2171700" cy="1562100"/>
-          </a:xfrm>
-          <a:prstGeom xmlns:a="http://schemas.openxmlformats.org/drawingml/2006/main" prst="roundRect">
-            <a:avLst>
-              <a:gd name="adj" fmla="val 4878"/>
-            </a:avLst>
-          </a:prstGeom>
-          <a:solidFill xmlns:a="http://schemas.openxmlformats.org/drawingml/2006/main">
-            <a:srgbClr val="F3F7FC"/>
-          </a:solidFill>
-          <a:ln xmlns:a="http://schemas.openxmlformats.org/drawingml/2006/main" w="9525">
-            <a:solidFill>
-              <a:srgbClr val="D5E1F1"/>
-            </a:solidFill>
-            <a:prstDash val="solid"/>
-          </a:ln>
-        </p:spPr>
-      </p:sp>
-      <p:sp>
-        <p:nvSpPr>
-          <p:cNvPr id="13" name="phase-label-2">
-            <a:extLst xmlns:a="http://schemas.openxmlformats.org/drawingml/2006/main">
-              <a:ext uri="{FF2B5EF4-FFF2-40B4-BE49-F238E27FC236}">
-                <a16:creationId xmlns:a16="http://schemas.microsoft.com/office/drawing/2014/main" id="{F84B927D-9C32-4480-B1CA-A2BEFFF6BD2C}"/>
-              </a:ext>
-            </a:extLst>
-          </p:cNvPr>
-          <p:cNvSpPr>
-            <a:spLocks xmlns:a="http://schemas.openxmlformats.org/drawingml/2006/main" noGrp="1"/>
-          </p:cNvSpPr>
-          <p:nvPr/>
-        </p:nvSpPr>
-        <p:spPr>
-          <a:xfrm xmlns:a="http://schemas.openxmlformats.org/drawingml/2006/main">
-            <a:off x="6477000" y="2552700"/>
-            <a:ext cx="1790700" cy="704850"/>
+              <a:defRPr sz="2025" b="1">
+                <a:solidFill>
+                  <a:srgbClr val="078248"/>
+                </a:solidFill>
+                <a:latin typeface="Malgun Gothic"/>
+                <a:ea typeface="Malgun Gothic"/>
+                <a:cs typeface="Malgun Gothic"/>
+              </a:defRPr>
+            </a:pPr>
+            <a:r>
+              <a:rPr sz="2025" b="1">
+                <a:solidFill>
+                  <a:srgbClr val="078248"/>
+                </a:solidFill>
+                <a:latin typeface="Malgun Gothic"/>
+                <a:ea typeface="Malgun Gothic"/>
+                <a:cs typeface="Malgun Gothic"/>
+              </a:rPr>
+              <a:t>보조 태그</a:t>
+            </a:r>
+          </a:p>
+        </p:txBody>
+      </p:sp>
+      <p:sp>
+        <p:nvSpPr>
+          <p:cNvPr id="9" name="navigation-copy">
+            <a:extLst xmlns:a="http://schemas.openxmlformats.org/drawingml/2006/main">
+              <a:ext uri="{FF2B5EF4-FFF2-40B4-BE49-F238E27FC236}">
+                <a16:creationId xmlns:a16="http://schemas.microsoft.com/office/drawing/2014/main" id="{347909D2-6157-4120-AFAB-F89F76764F7E}"/>
+              </a:ext>
+            </a:extLst>
+          </p:cNvPr>
+          <p:cNvSpPr>
+            <a:spLocks xmlns:a="http://schemas.openxmlformats.org/drawingml/2006/main" noGrp="1"/>
+          </p:cNvSpPr>
+          <p:nvPr/>
+        </p:nvSpPr>
+        <p:spPr>
+          <a:xfrm xmlns:a="http://schemas.openxmlformats.org/drawingml/2006/main">
+            <a:off x="8382000" y="4362450"/>
+            <a:ext cx="2762250" cy="838200"/>
           </a:xfrm>
           <a:prstGeom xmlns:a="http://schemas.openxmlformats.org/drawingml/2006/main" prst="rect">
             <a:avLst/>
@@ -5633,71 +5937,95 @@
           <a:p xmlns:a="http://schemas.openxmlformats.org/drawingml/2006/main">
             <a:pPr algn="ctr">
               <a:buNone/>
-              <a:defRPr sz="1950" b="1">
-                <a:solidFill>
-                  <a:srgbClr val="15253E"/>
-                </a:solidFill>
-                <a:latin typeface="Malgun Gothic"/>
-                <a:ea typeface="Malgun Gothic"/>
-                <a:cs typeface="Malgun Gothic"/>
-              </a:defRPr>
-            </a:pPr>
-            <a:r>
-              <a:rPr sz="1950" b="1">
-                <a:solidFill>
-                  <a:srgbClr val="15253E"/>
-                </a:solidFill>
-                <a:latin typeface="Malgun Gothic"/>
-                <a:ea typeface="Malgun Gothic"/>
-                <a:cs typeface="Malgun Gothic"/>
-              </a:rPr>
-              <a:t>롤백</a:t>
+              <a:defRPr sz="1500" b="0">
+                <a:solidFill>
+                  <a:srgbClr val="15253E"/>
+                </a:solidFill>
+                <a:latin typeface="Malgun Gothic"/>
+                <a:ea typeface="Malgun Gothic"/>
+                <a:cs typeface="Malgun Gothic"/>
+              </a:defRPr>
+            </a:pPr>
+            <a:r>
+              <a:rPr sz="1500" b="0">
+                <a:solidFill>
+                  <a:srgbClr val="15253E"/>
+                </a:solidFill>
+                <a:latin typeface="Malgun Gothic"/>
+                <a:ea typeface="Malgun Gothic"/>
+                <a:cs typeface="Malgun Gothic"/>
+              </a:rPr>
+              <a:t>별도 4열 구역</a:t>
             </a:r>
           </a:p>
           <a:p xmlns:a="http://schemas.openxmlformats.org/drawingml/2006/main">
             <a:pPr algn="ctr">
               <a:buNone/>
-              <a:defRPr sz="1950" b="1">
-                <a:solidFill>
-                  <a:srgbClr val="15253E"/>
-                </a:solidFill>
-                <a:latin typeface="Malgun Gothic"/>
-                <a:ea typeface="Malgun Gothic"/>
-                <a:cs typeface="Malgun Gothic"/>
-              </a:defRPr>
-            </a:pPr>
-            <a:r>
-              <a:rPr sz="1950" b="1">
-                <a:solidFill>
-                  <a:srgbClr val="15253E"/>
-                </a:solidFill>
-                <a:latin typeface="Malgun Gothic"/>
-                <a:ea typeface="Malgun Gothic"/>
-                <a:cs typeface="Malgun Gothic"/>
-              </a:rPr>
-              <a:t>Disabled</a:t>
-            </a:r>
-          </a:p>
-        </p:txBody>
-      </p:sp>
-      <p:sp>
-        <p:nvSpPr>
-          <p:cNvPr id="14" name="phase-http-2">
-            <a:extLst xmlns:a="http://schemas.openxmlformats.org/drawingml/2006/main">
-              <a:ext uri="{FF2B5EF4-FFF2-40B4-BE49-F238E27FC236}">
-                <a16:creationId xmlns:a16="http://schemas.microsoft.com/office/drawing/2014/main" id="{03579DE4-BE81-4564-8731-4EC8DE467A0F}"/>
-              </a:ext>
-            </a:extLst>
-          </p:cNvPr>
-          <p:cNvSpPr>
-            <a:spLocks xmlns:a="http://schemas.openxmlformats.org/drawingml/2006/main" noGrp="1"/>
-          </p:cNvSpPr>
-          <p:nvPr/>
-        </p:nvSpPr>
-        <p:spPr>
-          <a:xfrm xmlns:a="http://schemas.openxmlformats.org/drawingml/2006/main">
-            <a:off x="6477000" y="3333750"/>
-            <a:ext cx="1790700" cy="285750"/>
+              <a:defRPr sz="1500" b="0">
+                <a:solidFill>
+                  <a:srgbClr val="15253E"/>
+                </a:solidFill>
+                <a:latin typeface="Malgun Gothic"/>
+                <a:ea typeface="Malgun Gothic"/>
+                <a:cs typeface="Malgun Gothic"/>
+              </a:defRPr>
+            </a:pPr>
+            <a:r>
+              <a:rPr sz="1500" b="0">
+                <a:solidFill>
+                  <a:srgbClr val="15253E"/>
+                </a:solidFill>
+                <a:latin typeface="Malgun Gothic"/>
+                <a:ea typeface="Malgun Gothic"/>
+                <a:cs typeface="Malgun Gothic"/>
+              </a:rPr>
+              <a:t>설명 7건 표시</a:t>
+            </a:r>
+          </a:p>
+          <a:p xmlns:a="http://schemas.openxmlformats.org/drawingml/2006/main">
+            <a:pPr algn="ctr">
+              <a:buNone/>
+              <a:defRPr sz="1500" b="0">
+                <a:solidFill>
+                  <a:srgbClr val="15253E"/>
+                </a:solidFill>
+                <a:latin typeface="Malgun Gothic"/>
+                <a:ea typeface="Malgun Gothic"/>
+                <a:cs typeface="Malgun Gothic"/>
+              </a:defRPr>
+            </a:pPr>
+            <a:r>
+              <a:rPr sz="1500" b="0">
+                <a:solidFill>
+                  <a:srgbClr val="15253E"/>
+                </a:solidFill>
+                <a:latin typeface="Malgun Gothic"/>
+                <a:ea typeface="Malgun Gothic"/>
+                <a:cs typeface="Malgun Gothic"/>
+              </a:rPr>
+              <a:t>모바일 한 열 · 넘침 0px</a:t>
+            </a:r>
+          </a:p>
+        </p:txBody>
+      </p:sp>
+      <p:sp>
+        <p:nvSpPr>
+          <p:cNvPr id="10" name="profile-locale">
+            <a:extLst xmlns:a="http://schemas.openxmlformats.org/drawingml/2006/main">
+              <a:ext uri="{FF2B5EF4-FFF2-40B4-BE49-F238E27FC236}">
+                <a16:creationId xmlns:a16="http://schemas.microsoft.com/office/drawing/2014/main" id="{61A9A6BD-8E2C-4894-93A0-DEE7AB1A8EB9}"/>
+              </a:ext>
+            </a:extLst>
+          </p:cNvPr>
+          <p:cNvSpPr>
+            <a:spLocks xmlns:a="http://schemas.openxmlformats.org/drawingml/2006/main" noGrp="1"/>
+          </p:cNvSpPr>
+          <p:nvPr/>
+        </p:nvSpPr>
+        <p:spPr>
+          <a:xfrm xmlns:a="http://schemas.openxmlformats.org/drawingml/2006/main">
+            <a:off x="476250" y="5962650"/>
+            <a:ext cx="10668000" cy="323850"/>
           </a:xfrm>
           <a:prstGeom xmlns:a="http://schemas.openxmlformats.org/drawingml/2006/main" prst="rect">
             <a:avLst/>
@@ -5714,99 +6042,7 @@
           <a:p xmlns:a="http://schemas.openxmlformats.org/drawingml/2006/main">
             <a:pPr algn="ctr">
               <a:buNone/>
-              <a:defRPr sz="1350" b="0">
-                <a:solidFill>
-                  <a:srgbClr val="52647D"/>
-                </a:solidFill>
-                <a:latin typeface="Malgun Gothic"/>
-                <a:ea typeface="Malgun Gothic"/>
-                <a:cs typeface="Malgun Gothic"/>
-              </a:defRPr>
-            </a:pPr>
-            <a:r>
-              <a:rPr sz="1350" b="0">
-                <a:solidFill>
-                  <a:srgbClr val="52647D"/>
-                </a:solidFill>
-                <a:latin typeface="Malgun Gothic"/>
-                <a:ea typeface="Malgun Gothic"/>
-                <a:cs typeface="Malgun Gothic"/>
-              </a:rPr>
-              <a:t>HTTP 200</a:t>
-            </a:r>
-          </a:p>
-        </p:txBody>
-      </p:sp>
-      <p:sp>
-        <p:nvSpPr>
-          <p:cNvPr id="15" name="phase-3">
-            <a:extLst xmlns:a="http://schemas.openxmlformats.org/drawingml/2006/main">
-              <a:ext uri="{FF2B5EF4-FFF2-40B4-BE49-F238E27FC236}">
-                <a16:creationId xmlns:a16="http://schemas.microsoft.com/office/drawing/2014/main" id="{B1D3BD30-83E1-498D-B0C3-D6998089D16E}"/>
-              </a:ext>
-            </a:extLst>
-          </p:cNvPr>
-          <p:cNvSpPr>
-            <a:spLocks xmlns:a="http://schemas.openxmlformats.org/drawingml/2006/main" noGrp="1"/>
-          </p:cNvSpPr>
-          <p:nvPr/>
-        </p:nvSpPr>
-        <p:spPr>
-          <a:xfrm xmlns:a="http://schemas.openxmlformats.org/drawingml/2006/main">
-            <a:off x="9096375" y="2247900"/>
-            <a:ext cx="2171700" cy="1562100"/>
-          </a:xfrm>
-          <a:prstGeom xmlns:a="http://schemas.openxmlformats.org/drawingml/2006/main" prst="roundRect">
-            <a:avLst>
-              <a:gd name="adj" fmla="val 4878"/>
-            </a:avLst>
-          </a:prstGeom>
-          <a:solidFill xmlns:a="http://schemas.openxmlformats.org/drawingml/2006/main">
-            <a:srgbClr val="EAF2FF"/>
-          </a:solidFill>
-          <a:ln xmlns:a="http://schemas.openxmlformats.org/drawingml/2006/main" w="9525">
-            <a:solidFill>
-              <a:srgbClr val="155EEF"/>
-            </a:solidFill>
-            <a:prstDash val="solid"/>
-          </a:ln>
-        </p:spPr>
-      </p:sp>
-      <p:sp>
-        <p:nvSpPr>
-          <p:cNvPr id="16" name="phase-label-3">
-            <a:extLst xmlns:a="http://schemas.openxmlformats.org/drawingml/2006/main">
-              <a:ext uri="{FF2B5EF4-FFF2-40B4-BE49-F238E27FC236}">
-                <a16:creationId xmlns:a16="http://schemas.microsoft.com/office/drawing/2014/main" id="{2E4B63B9-05DD-4586-92E2-218CE46B8CF6}"/>
-              </a:ext>
-            </a:extLst>
-          </p:cNvPr>
-          <p:cNvSpPr>
-            <a:spLocks xmlns:a="http://schemas.openxmlformats.org/drawingml/2006/main" noGrp="1"/>
-          </p:cNvSpPr>
-          <p:nvPr/>
-        </p:nvSpPr>
-        <p:spPr>
-          <a:xfrm xmlns:a="http://schemas.openxmlformats.org/drawingml/2006/main">
-            <a:off x="9286875" y="2552700"/>
-            <a:ext cx="1790700" cy="704850"/>
-          </a:xfrm>
-          <a:prstGeom xmlns:a="http://schemas.openxmlformats.org/drawingml/2006/main" prst="rect">
-            <a:avLst/>
-          </a:prstGeom>
-          <a:noFill xmlns:a="http://schemas.openxmlformats.org/drawingml/2006/main"/>
-          <a:ln xmlns:a="http://schemas.openxmlformats.org/drawingml/2006/main" w="0">
-            <a:noFill/>
-            <a:prstDash val="solid"/>
-          </a:ln>
-        </p:spPr>
-        <p:txBody>
-          <a:bodyPr xmlns:a="http://schemas.openxmlformats.org/drawingml/2006/main"/>
-          <a:lstStyle xmlns:a="http://schemas.openxmlformats.org/drawingml/2006/main"/>
-          <a:p xmlns:a="http://schemas.openxmlformats.org/drawingml/2006/main">
-            <a:pPr algn="ctr">
-              <a:buNone/>
-              <a:defRPr sz="1950" b="1">
+              <a:defRPr sz="1500" b="1">
                 <a:solidFill>
                   <a:srgbClr val="155EEF"/>
                 </a:solidFill>
@@ -5816,7 +6052,7 @@
               </a:defRPr>
             </a:pPr>
             <a:r>
-              <a:rPr sz="1950" b="1">
+              <a:rPr sz="1500" b="1">
                 <a:solidFill>
                   <a:srgbClr val="155EEF"/>
                 </a:solidFill>
@@ -5824,202 +6060,7 @@
                 <a:ea typeface="Malgun Gothic"/>
                 <a:cs typeface="Malgun Gothic"/>
               </a:rPr>
-              <a:t>최종</a:t>
-            </a:r>
-          </a:p>
-          <a:p xmlns:a="http://schemas.openxmlformats.org/drawingml/2006/main">
-            <a:pPr algn="ctr">
-              <a:buNone/>
-              <a:defRPr sz="1950" b="1">
-                <a:solidFill>
-                  <a:srgbClr val="155EEF"/>
-                </a:solidFill>
-                <a:latin typeface="Malgun Gothic"/>
-                <a:ea typeface="Malgun Gothic"/>
-                <a:cs typeface="Malgun Gothic"/>
-              </a:defRPr>
-            </a:pPr>
-            <a:r>
-              <a:rPr sz="1950" b="1">
-                <a:solidFill>
-                  <a:srgbClr val="155EEF"/>
-                </a:solidFill>
-                <a:latin typeface="Malgun Gothic"/>
-                <a:ea typeface="Malgun Gothic"/>
-                <a:cs typeface="Malgun Gothic"/>
-              </a:rPr>
-              <a:t>Enabled</a:t>
-            </a:r>
-          </a:p>
-        </p:txBody>
-      </p:sp>
-      <p:sp>
-        <p:nvSpPr>
-          <p:cNvPr id="17" name="phase-http-3">
-            <a:extLst xmlns:a="http://schemas.openxmlformats.org/drawingml/2006/main">
-              <a:ext uri="{FF2B5EF4-FFF2-40B4-BE49-F238E27FC236}">
-                <a16:creationId xmlns:a16="http://schemas.microsoft.com/office/drawing/2014/main" id="{B2993C25-3261-4B34-90FD-48CACC67BAA0}"/>
-              </a:ext>
-            </a:extLst>
-          </p:cNvPr>
-          <p:cNvSpPr>
-            <a:spLocks xmlns:a="http://schemas.openxmlformats.org/drawingml/2006/main" noGrp="1"/>
-          </p:cNvSpPr>
-          <p:nvPr/>
-        </p:nvSpPr>
-        <p:spPr>
-          <a:xfrm xmlns:a="http://schemas.openxmlformats.org/drawingml/2006/main">
-            <a:off x="9286875" y="3333750"/>
-            <a:ext cx="1790700" cy="285750"/>
-          </a:xfrm>
-          <a:prstGeom xmlns:a="http://schemas.openxmlformats.org/drawingml/2006/main" prst="rect">
-            <a:avLst/>
-          </a:prstGeom>
-          <a:noFill xmlns:a="http://schemas.openxmlformats.org/drawingml/2006/main"/>
-          <a:ln xmlns:a="http://schemas.openxmlformats.org/drawingml/2006/main" w="0">
-            <a:noFill/>
-            <a:prstDash val="solid"/>
-          </a:ln>
-        </p:spPr>
-        <p:txBody>
-          <a:bodyPr xmlns:a="http://schemas.openxmlformats.org/drawingml/2006/main"/>
-          <a:lstStyle xmlns:a="http://schemas.openxmlformats.org/drawingml/2006/main"/>
-          <a:p xmlns:a="http://schemas.openxmlformats.org/drawingml/2006/main">
-            <a:pPr algn="ctr">
-              <a:buNone/>
-              <a:defRPr sz="1350" b="0">
-                <a:solidFill>
-                  <a:srgbClr val="52647D"/>
-                </a:solidFill>
-                <a:latin typeface="Malgun Gothic"/>
-                <a:ea typeface="Malgun Gothic"/>
-                <a:cs typeface="Malgun Gothic"/>
-              </a:defRPr>
-            </a:pPr>
-            <a:r>
-              <a:rPr sz="1350" b="0">
-                <a:solidFill>
-                  <a:srgbClr val="52647D"/>
-                </a:solidFill>
-                <a:latin typeface="Malgun Gothic"/>
-                <a:ea typeface="Malgun Gothic"/>
-                <a:cs typeface="Malgun Gothic"/>
-              </a:rPr>
-              <a:t>HTTP 200</a:t>
-            </a:r>
-          </a:p>
-        </p:txBody>
-      </p:sp>
-      <p:sp>
-        <p:nvSpPr>
-          <p:cNvPr id="18" name="integrity-count">
-            <a:extLst xmlns:a="http://schemas.openxmlformats.org/drawingml/2006/main">
-              <a:ext uri="{FF2B5EF4-FFF2-40B4-BE49-F238E27FC236}">
-                <a16:creationId xmlns:a16="http://schemas.microsoft.com/office/drawing/2014/main" id="{7D531B41-66A5-4441-97A2-88436706648C}"/>
-              </a:ext>
-            </a:extLst>
-          </p:cNvPr>
-          <p:cNvSpPr>
-            <a:spLocks xmlns:a="http://schemas.openxmlformats.org/drawingml/2006/main" noGrp="1"/>
-          </p:cNvSpPr>
-          <p:nvPr/>
-        </p:nvSpPr>
-        <p:spPr>
-          <a:xfrm xmlns:a="http://schemas.openxmlformats.org/drawingml/2006/main">
-            <a:off x="857250" y="4552950"/>
-            <a:ext cx="10477500" cy="552450"/>
-          </a:xfrm>
-          <a:prstGeom xmlns:a="http://schemas.openxmlformats.org/drawingml/2006/main" prst="rect">
-            <a:avLst/>
-          </a:prstGeom>
-          <a:noFill xmlns:a="http://schemas.openxmlformats.org/drawingml/2006/main"/>
-          <a:ln xmlns:a="http://schemas.openxmlformats.org/drawingml/2006/main" w="0">
-            <a:noFill/>
-            <a:prstDash val="solid"/>
-          </a:ln>
-        </p:spPr>
-        <p:txBody>
-          <a:bodyPr xmlns:a="http://schemas.openxmlformats.org/drawingml/2006/main"/>
-          <a:lstStyle xmlns:a="http://schemas.openxmlformats.org/drawingml/2006/main"/>
-          <a:p xmlns:a="http://schemas.openxmlformats.org/drawingml/2006/main">
-            <a:pPr algn="ctr">
-              <a:buNone/>
-              <a:defRPr sz="2400" b="1">
-                <a:solidFill>
-                  <a:srgbClr val="15253E"/>
-                </a:solidFill>
-                <a:latin typeface="Malgun Gothic"/>
-                <a:ea typeface="Malgun Gothic"/>
-                <a:cs typeface="Malgun Gothic"/>
-              </a:defRPr>
-            </a:pPr>
-            <a:r>
-              <a:rPr sz="2400" b="1">
-                <a:solidFill>
-                  <a:srgbClr val="15253E"/>
-                </a:solidFill>
-                <a:latin typeface="Malgun Gothic"/>
-                <a:ea typeface="Malgun Gothic"/>
-                <a:cs typeface="Malgun Gothic"/>
-              </a:rPr>
-              <a:t>39 users · 117 discussions · 305 posts</a:t>
-            </a:r>
-          </a:p>
-        </p:txBody>
-      </p:sp>
-      <p:sp>
-        <p:nvSpPr>
-          <p:cNvPr id="19" name="integrity-hash">
-            <a:extLst xmlns:a="http://schemas.openxmlformats.org/drawingml/2006/main">
-              <a:ext uri="{FF2B5EF4-FFF2-40B4-BE49-F238E27FC236}">
-                <a16:creationId xmlns:a16="http://schemas.microsoft.com/office/drawing/2014/main" id="{CFB67921-C80E-4482-BC13-B3C78F46F4D4}"/>
-              </a:ext>
-            </a:extLst>
-          </p:cNvPr>
-          <p:cNvSpPr>
-            <a:spLocks xmlns:a="http://schemas.openxmlformats.org/drawingml/2006/main" noGrp="1"/>
-          </p:cNvSpPr>
-          <p:nvPr/>
-        </p:nvSpPr>
-        <p:spPr>
-          <a:xfrm xmlns:a="http://schemas.openxmlformats.org/drawingml/2006/main">
-            <a:off x="857250" y="5238750"/>
-            <a:ext cx="10477500" cy="457200"/>
-          </a:xfrm>
-          <a:prstGeom xmlns:a="http://schemas.openxmlformats.org/drawingml/2006/main" prst="rect">
-            <a:avLst/>
-          </a:prstGeom>
-          <a:noFill xmlns:a="http://schemas.openxmlformats.org/drawingml/2006/main"/>
-          <a:ln xmlns:a="http://schemas.openxmlformats.org/drawingml/2006/main" w="0">
-            <a:noFill/>
-            <a:prstDash val="solid"/>
-          </a:ln>
-        </p:spPr>
-        <p:txBody>
-          <a:bodyPr xmlns:a="http://schemas.openxmlformats.org/drawingml/2006/main"/>
-          <a:lstStyle xmlns:a="http://schemas.openxmlformats.org/drawingml/2006/main"/>
-          <a:p xmlns:a="http://schemas.openxmlformats.org/drawingml/2006/main">
-            <a:pPr algn="ctr">
-              <a:buNone/>
-              <a:defRPr sz="1800" b="0">
-                <a:solidFill>
-                  <a:srgbClr val="078248"/>
-                </a:solidFill>
-                <a:latin typeface="Malgun Gothic"/>
-                <a:ea typeface="Malgun Gothic"/>
-                <a:cs typeface="Malgun Gothic"/>
-              </a:defRPr>
-            </a:pPr>
-            <a:r>
-              <a:rPr sz="1800" b="0">
-                <a:solidFill>
-                  <a:srgbClr val="078248"/>
-                </a:solidFill>
-                <a:latin typeface="Malgun Gothic"/>
-                <a:ea typeface="Malgun Gothic"/>
-                <a:cs typeface="Malgun Gothic"/>
-              </a:rPr>
-              <a:t>콘텐츠 SHA-256 동일 · 첨부 SHA-256 동일 · 정적 계약 8/8</a:t>
+              <a:t>상대 날짜는 유지 · 웹폰트 전용 깨진 문자 0건</a:t>
             </a:r>
           </a:p>
         </p:txBody>
@@ -6027,7 +6068,7 @@
     </p:spTree>
     <p:extLst>
       <p:ext uri="{BB962C8B-B14F-4D97-AF65-F5344CB8AC3E}">
-        <p14:creationId xmlns:p14="http://schemas.microsoft.com/office/powerpoint/2010/main" val="224538138"/>
+        <p14:creationId xmlns:p14="http://schemas.microsoft.com/office/powerpoint/2010/main" val="1966110520"/>
       </p:ext>
     </p:extLst>
   </p:cSld>
@@ -6055,10 +6096,10 @@
       </p:grpSpPr>
       <p:sp>
         <p:nvSpPr>
-          <p:cNvPr id="16" name="title-7">
-            <a:extLst xmlns:a="http://schemas.openxmlformats.org/drawingml/2006/main">
-              <a:ext uri="{FF2B5EF4-FFF2-40B4-BE49-F238E27FC236}">
-                <a16:creationId xmlns:a16="http://schemas.microsoft.com/office/drawing/2014/main" id="{B1E5F8CB-12E8-414B-A782-7921D9DB98E9}"/>
+          <p:cNvPr id="20" name="title-6">
+            <a:extLst xmlns:a="http://schemas.openxmlformats.org/drawingml/2006/main">
+              <a:ext uri="{FF2B5EF4-FFF2-40B4-BE49-F238E27FC236}">
+                <a16:creationId xmlns:a16="http://schemas.microsoft.com/office/drawing/2014/main" id="{A1988E7D-4FE9-4900-8EFF-3040E5D0CEDA}"/>
               </a:ext>
             </a:extLst>
           </p:cNvPr>
@@ -6105,17 +6146,17 @@
                 <a:ea typeface="Malgun Gothic"/>
                 <a:cs typeface="Malgun Gothic"/>
               </a:rPr>
-              <a:t>Flarum Core를 건드리지 않아 롤백은 확장 하나로 끝납니다</a:t>
-            </a:r>
-          </a:p>
-        </p:txBody>
-      </p:sp>
-      <p:sp>
-        <p:nvSpPr>
-          <p:cNvPr id="2" name="page-7">
-            <a:extLst xmlns:a="http://schemas.openxmlformats.org/drawingml/2006/main">
-              <a:ext uri="{FF2B5EF4-FFF2-40B4-BE49-F238E27FC236}">
-                <a16:creationId xmlns:a16="http://schemas.microsoft.com/office/drawing/2014/main" id="{A3276DCC-0352-4CE1-B01D-E79903100583}"/>
+              <a:t>활성화와 롤백에도 콘텐츠는 그대로였습니다</a:t>
+            </a:r>
+          </a:p>
+        </p:txBody>
+      </p:sp>
+      <p:sp>
+        <p:nvSpPr>
+          <p:cNvPr id="2" name="page-6">
+            <a:extLst xmlns:a="http://schemas.openxmlformats.org/drawingml/2006/main">
+              <a:ext uri="{FF2B5EF4-FFF2-40B4-BE49-F238E27FC236}">
+                <a16:creationId xmlns:a16="http://schemas.microsoft.com/office/drawing/2014/main" id="{BE3DDE7B-FA52-43C9-AAE2-8928904D0FEC}"/>
               </a:ext>
             </a:extLst>
           </p:cNvPr>
@@ -6169,22 +6210,22 @@
       </p:sp>
       <p:sp>
         <p:nvSpPr>
-          <p:cNvPr id="3" name="flow-arrow-1">
-            <a:extLst xmlns:a="http://schemas.openxmlformats.org/drawingml/2006/main">
-              <a:ext uri="{FF2B5EF4-FFF2-40B4-BE49-F238E27FC236}">
-                <a16:creationId xmlns:a16="http://schemas.microsoft.com/office/drawing/2014/main" id="{F33C0C86-C636-49E7-9EF3-AD3434C40404}"/>
-              </a:ext>
-            </a:extLst>
-          </p:cNvPr>
-          <p:cNvSpPr>
-            <a:spLocks xmlns:a="http://schemas.openxmlformats.org/drawingml/2006/main" noGrp="1"/>
-          </p:cNvSpPr>
-          <p:nvPr/>
-        </p:nvSpPr>
-        <p:spPr>
-          <a:xfrm xmlns:a="http://schemas.openxmlformats.org/drawingml/2006/main">
-            <a:off x="3848100" y="2724150"/>
-            <a:ext cx="762000" cy="476250"/>
+          <p:cNvPr id="3" name="arrow-0">
+            <a:extLst xmlns:a="http://schemas.openxmlformats.org/drawingml/2006/main">
+              <a:ext uri="{FF2B5EF4-FFF2-40B4-BE49-F238E27FC236}">
+                <a16:creationId xmlns:a16="http://schemas.microsoft.com/office/drawing/2014/main" id="{7B834A7A-209D-4491-899C-10F6F9E68B2E}"/>
+              </a:ext>
+            </a:extLst>
+          </p:cNvPr>
+          <p:cNvSpPr>
+            <a:spLocks xmlns:a="http://schemas.openxmlformats.org/drawingml/2006/main" noGrp="1"/>
+          </p:cNvSpPr>
+          <p:nvPr/>
+        </p:nvSpPr>
+        <p:spPr>
+          <a:xfrm xmlns:a="http://schemas.openxmlformats.org/drawingml/2006/main">
+            <a:off x="2876550" y="2809875"/>
+            <a:ext cx="552450" cy="495300"/>
           </a:xfrm>
           <a:prstGeom xmlns:a="http://schemas.openxmlformats.org/drawingml/2006/main" prst="rect">
             <a:avLst/>
@@ -6201,7 +6242,7 @@
           <a:p xmlns:a="http://schemas.openxmlformats.org/drawingml/2006/main">
             <a:pPr algn="ctr">
               <a:buNone/>
-              <a:defRPr sz="2700" b="1">
+              <a:defRPr sz="2400" b="1">
                 <a:solidFill>
                   <a:srgbClr val="52647D"/>
                 </a:solidFill>
@@ -6211,7 +6252,7 @@
               </a:defRPr>
             </a:pPr>
             <a:r>
-              <a:rPr sz="2700" b="1">
+              <a:rPr sz="2400" b="1">
                 <a:solidFill>
                   <a:srgbClr val="52647D"/>
                 </a:solidFill>
@@ -6226,83 +6267,26 @@
       </p:sp>
       <p:sp>
         <p:nvSpPr>
-          <p:cNvPr id="4" name="flow-arrow-2">
-            <a:extLst xmlns:a="http://schemas.openxmlformats.org/drawingml/2006/main">
-              <a:ext uri="{FF2B5EF4-FFF2-40B4-BE49-F238E27FC236}">
-                <a16:creationId xmlns:a16="http://schemas.microsoft.com/office/drawing/2014/main" id="{35F70949-AD48-4799-9CD4-E06EF4FA6024}"/>
-              </a:ext>
-            </a:extLst>
-          </p:cNvPr>
-          <p:cNvSpPr>
-            <a:spLocks xmlns:a="http://schemas.openxmlformats.org/drawingml/2006/main" noGrp="1"/>
-          </p:cNvSpPr>
-          <p:nvPr/>
-        </p:nvSpPr>
-        <p:spPr>
-          <a:xfrm xmlns:a="http://schemas.openxmlformats.org/drawingml/2006/main">
-            <a:off x="7581900" y="2724150"/>
-            <a:ext cx="762000" cy="476250"/>
-          </a:xfrm>
-          <a:prstGeom xmlns:a="http://schemas.openxmlformats.org/drawingml/2006/main" prst="rect">
-            <a:avLst/>
-          </a:prstGeom>
-          <a:noFill xmlns:a="http://schemas.openxmlformats.org/drawingml/2006/main"/>
-          <a:ln xmlns:a="http://schemas.openxmlformats.org/drawingml/2006/main" w="0">
-            <a:noFill/>
-            <a:prstDash val="solid"/>
-          </a:ln>
-        </p:spPr>
-        <p:txBody>
-          <a:bodyPr xmlns:a="http://schemas.openxmlformats.org/drawingml/2006/main"/>
-          <a:lstStyle xmlns:a="http://schemas.openxmlformats.org/drawingml/2006/main"/>
-          <a:p xmlns:a="http://schemas.openxmlformats.org/drawingml/2006/main">
-            <a:pPr algn="ctr">
-              <a:buNone/>
-              <a:defRPr sz="2700" b="1">
-                <a:solidFill>
-                  <a:srgbClr val="52647D"/>
-                </a:solidFill>
-                <a:latin typeface="Malgun Gothic"/>
-                <a:ea typeface="Malgun Gothic"/>
-                <a:cs typeface="Malgun Gothic"/>
-              </a:defRPr>
-            </a:pPr>
-            <a:r>
-              <a:rPr sz="2700" b="1">
-                <a:solidFill>
-                  <a:srgbClr val="52647D"/>
-                </a:solidFill>
-                <a:latin typeface="Malgun Gothic"/>
-                <a:ea typeface="Malgun Gothic"/>
-                <a:cs typeface="Malgun Gothic"/>
-              </a:rPr>
-              <a:t>→</a:t>
-            </a:r>
-          </a:p>
-        </p:txBody>
-      </p:sp>
-      <p:sp>
-        <p:nvSpPr>
-          <p:cNvPr id="5" name="flarum-core">
-            <a:extLst xmlns:a="http://schemas.openxmlformats.org/drawingml/2006/main">
-              <a:ext uri="{FF2B5EF4-FFF2-40B4-BE49-F238E27FC236}">
-                <a16:creationId xmlns:a16="http://schemas.microsoft.com/office/drawing/2014/main" id="{2D23B9C7-BD3C-4600-BA89-78668692D407}"/>
-              </a:ext>
-            </a:extLst>
-          </p:cNvPr>
-          <p:cNvSpPr>
-            <a:spLocks xmlns:a="http://schemas.openxmlformats.org/drawingml/2006/main" noGrp="1"/>
-          </p:cNvSpPr>
-          <p:nvPr/>
-        </p:nvSpPr>
-        <p:spPr>
-          <a:xfrm xmlns:a="http://schemas.openxmlformats.org/drawingml/2006/main">
-            <a:off x="666750" y="2076450"/>
-            <a:ext cx="3143250" cy="1809750"/>
+          <p:cNvPr id="4" name="phase-0">
+            <a:extLst xmlns:a="http://schemas.openxmlformats.org/drawingml/2006/main">
+              <a:ext uri="{FF2B5EF4-FFF2-40B4-BE49-F238E27FC236}">
+                <a16:creationId xmlns:a16="http://schemas.microsoft.com/office/drawing/2014/main" id="{739F78CD-D657-4918-A9FA-4B164DC81EF7}"/>
+              </a:ext>
+            </a:extLst>
+          </p:cNvPr>
+          <p:cNvSpPr>
+            <a:spLocks xmlns:a="http://schemas.openxmlformats.org/drawingml/2006/main" noGrp="1"/>
+          </p:cNvSpPr>
+          <p:nvPr/>
+        </p:nvSpPr>
+        <p:spPr>
+          <a:xfrm xmlns:a="http://schemas.openxmlformats.org/drawingml/2006/main">
+            <a:off x="666750" y="2247900"/>
+            <a:ext cx="2171700" cy="1562100"/>
           </a:xfrm>
           <a:prstGeom xmlns:a="http://schemas.openxmlformats.org/drawingml/2006/main" prst="roundRect">
             <a:avLst>
-              <a:gd name="adj" fmla="val 4211"/>
+              <a:gd name="adj" fmla="val 4878"/>
             </a:avLst>
           </a:prstGeom>
           <a:solidFill xmlns:a="http://schemas.openxmlformats.org/drawingml/2006/main">
@@ -6318,26 +6302,221 @@
       </p:sp>
       <p:sp>
         <p:nvSpPr>
-          <p:cNvPr id="6" name="theme-extension">
-            <a:extLst xmlns:a="http://schemas.openxmlformats.org/drawingml/2006/main">
-              <a:ext uri="{FF2B5EF4-FFF2-40B4-BE49-F238E27FC236}">
-                <a16:creationId xmlns:a16="http://schemas.microsoft.com/office/drawing/2014/main" id="{66F5027A-7FA7-413F-B51E-8043D0948B2C}"/>
-              </a:ext>
-            </a:extLst>
-          </p:cNvPr>
-          <p:cNvSpPr>
-            <a:spLocks xmlns:a="http://schemas.openxmlformats.org/drawingml/2006/main" noGrp="1"/>
-          </p:cNvSpPr>
-          <p:nvPr/>
-        </p:nvSpPr>
-        <p:spPr>
-          <a:xfrm xmlns:a="http://schemas.openxmlformats.org/drawingml/2006/main">
-            <a:off x="4572000" y="2076450"/>
-            <a:ext cx="2971800" cy="1809750"/>
+          <p:cNvPr id="5" name="phase-label-0">
+            <a:extLst xmlns:a="http://schemas.openxmlformats.org/drawingml/2006/main">
+              <a:ext uri="{FF2B5EF4-FFF2-40B4-BE49-F238E27FC236}">
+                <a16:creationId xmlns:a16="http://schemas.microsoft.com/office/drawing/2014/main" id="{63AECE67-3CC4-4DA1-AF5E-C93DC0D47574}"/>
+              </a:ext>
+            </a:extLst>
+          </p:cNvPr>
+          <p:cNvSpPr>
+            <a:spLocks xmlns:a="http://schemas.openxmlformats.org/drawingml/2006/main" noGrp="1"/>
+          </p:cNvSpPr>
+          <p:nvPr/>
+        </p:nvSpPr>
+        <p:spPr>
+          <a:xfrm xmlns:a="http://schemas.openxmlformats.org/drawingml/2006/main">
+            <a:off x="857250" y="2552700"/>
+            <a:ext cx="1790700" cy="704850"/>
+          </a:xfrm>
+          <a:prstGeom xmlns:a="http://schemas.openxmlformats.org/drawingml/2006/main" prst="rect">
+            <a:avLst/>
+          </a:prstGeom>
+          <a:noFill xmlns:a="http://schemas.openxmlformats.org/drawingml/2006/main"/>
+          <a:ln xmlns:a="http://schemas.openxmlformats.org/drawingml/2006/main" w="0">
+            <a:noFill/>
+            <a:prstDash val="solid"/>
+          </a:ln>
+        </p:spPr>
+        <p:txBody>
+          <a:bodyPr xmlns:a="http://schemas.openxmlformats.org/drawingml/2006/main"/>
+          <a:lstStyle xmlns:a="http://schemas.openxmlformats.org/drawingml/2006/main"/>
+          <a:p xmlns:a="http://schemas.openxmlformats.org/drawingml/2006/main">
+            <a:pPr algn="ctr">
+              <a:buNone/>
+              <a:defRPr sz="1950" b="1">
+                <a:solidFill>
+                  <a:srgbClr val="15253E"/>
+                </a:solidFill>
+                <a:latin typeface="Malgun Gothic"/>
+                <a:ea typeface="Malgun Gothic"/>
+                <a:cs typeface="Malgun Gothic"/>
+              </a:defRPr>
+            </a:pPr>
+            <a:r>
+              <a:rPr sz="1950" b="1">
+                <a:solidFill>
+                  <a:srgbClr val="15253E"/>
+                </a:solidFill>
+                <a:latin typeface="Malgun Gothic"/>
+                <a:ea typeface="Malgun Gothic"/>
+                <a:cs typeface="Malgun Gothic"/>
+              </a:rPr>
+              <a:t>기준선</a:t>
+            </a:r>
+          </a:p>
+          <a:p xmlns:a="http://schemas.openxmlformats.org/drawingml/2006/main">
+            <a:pPr algn="ctr">
+              <a:buNone/>
+              <a:defRPr sz="1950" b="1">
+                <a:solidFill>
+                  <a:srgbClr val="15253E"/>
+                </a:solidFill>
+                <a:latin typeface="Malgun Gothic"/>
+                <a:ea typeface="Malgun Gothic"/>
+                <a:cs typeface="Malgun Gothic"/>
+              </a:defRPr>
+            </a:pPr>
+            <a:r>
+              <a:rPr sz="1950" b="1">
+                <a:solidFill>
+                  <a:srgbClr val="15253E"/>
+                </a:solidFill>
+                <a:latin typeface="Malgun Gothic"/>
+                <a:ea typeface="Malgun Gothic"/>
+                <a:cs typeface="Malgun Gothic"/>
+              </a:rPr>
+              <a:t>Disabled</a:t>
+            </a:r>
+          </a:p>
+        </p:txBody>
+      </p:sp>
+      <p:sp>
+        <p:nvSpPr>
+          <p:cNvPr id="6" name="phase-http-0">
+            <a:extLst xmlns:a="http://schemas.openxmlformats.org/drawingml/2006/main">
+              <a:ext uri="{FF2B5EF4-FFF2-40B4-BE49-F238E27FC236}">
+                <a16:creationId xmlns:a16="http://schemas.microsoft.com/office/drawing/2014/main" id="{3411BCDF-FFDB-4D8F-ABD4-9DF41B03F7D6}"/>
+              </a:ext>
+            </a:extLst>
+          </p:cNvPr>
+          <p:cNvSpPr>
+            <a:spLocks xmlns:a="http://schemas.openxmlformats.org/drawingml/2006/main" noGrp="1"/>
+          </p:cNvSpPr>
+          <p:nvPr/>
+        </p:nvSpPr>
+        <p:spPr>
+          <a:xfrm xmlns:a="http://schemas.openxmlformats.org/drawingml/2006/main">
+            <a:off x="857250" y="3333750"/>
+            <a:ext cx="1790700" cy="285750"/>
+          </a:xfrm>
+          <a:prstGeom xmlns:a="http://schemas.openxmlformats.org/drawingml/2006/main" prst="rect">
+            <a:avLst/>
+          </a:prstGeom>
+          <a:noFill xmlns:a="http://schemas.openxmlformats.org/drawingml/2006/main"/>
+          <a:ln xmlns:a="http://schemas.openxmlformats.org/drawingml/2006/main" w="0">
+            <a:noFill/>
+            <a:prstDash val="solid"/>
+          </a:ln>
+        </p:spPr>
+        <p:txBody>
+          <a:bodyPr xmlns:a="http://schemas.openxmlformats.org/drawingml/2006/main"/>
+          <a:lstStyle xmlns:a="http://schemas.openxmlformats.org/drawingml/2006/main"/>
+          <a:p xmlns:a="http://schemas.openxmlformats.org/drawingml/2006/main">
+            <a:pPr algn="ctr">
+              <a:buNone/>
+              <a:defRPr sz="1350" b="0">
+                <a:solidFill>
+                  <a:srgbClr val="52647D"/>
+                </a:solidFill>
+                <a:latin typeface="Malgun Gothic"/>
+                <a:ea typeface="Malgun Gothic"/>
+                <a:cs typeface="Malgun Gothic"/>
+              </a:defRPr>
+            </a:pPr>
+            <a:r>
+              <a:rPr sz="1350" b="0">
+                <a:solidFill>
+                  <a:srgbClr val="52647D"/>
+                </a:solidFill>
+                <a:latin typeface="Malgun Gothic"/>
+                <a:ea typeface="Malgun Gothic"/>
+                <a:cs typeface="Malgun Gothic"/>
+              </a:rPr>
+              <a:t>HTTP 200</a:t>
+            </a:r>
+          </a:p>
+        </p:txBody>
+      </p:sp>
+      <p:sp>
+        <p:nvSpPr>
+          <p:cNvPr id="7" name="arrow-1">
+            <a:extLst xmlns:a="http://schemas.openxmlformats.org/drawingml/2006/main">
+              <a:ext uri="{FF2B5EF4-FFF2-40B4-BE49-F238E27FC236}">
+                <a16:creationId xmlns:a16="http://schemas.microsoft.com/office/drawing/2014/main" id="{5C52BED4-5B33-4F1F-8B4C-1420869A3755}"/>
+              </a:ext>
+            </a:extLst>
+          </p:cNvPr>
+          <p:cNvSpPr>
+            <a:spLocks xmlns:a="http://schemas.openxmlformats.org/drawingml/2006/main" noGrp="1"/>
+          </p:cNvSpPr>
+          <p:nvPr/>
+        </p:nvSpPr>
+        <p:spPr>
+          <a:xfrm xmlns:a="http://schemas.openxmlformats.org/drawingml/2006/main">
+            <a:off x="5686425" y="2809875"/>
+            <a:ext cx="552450" cy="495300"/>
+          </a:xfrm>
+          <a:prstGeom xmlns:a="http://schemas.openxmlformats.org/drawingml/2006/main" prst="rect">
+            <a:avLst/>
+          </a:prstGeom>
+          <a:noFill xmlns:a="http://schemas.openxmlformats.org/drawingml/2006/main"/>
+          <a:ln xmlns:a="http://schemas.openxmlformats.org/drawingml/2006/main" w="0">
+            <a:noFill/>
+            <a:prstDash val="solid"/>
+          </a:ln>
+        </p:spPr>
+        <p:txBody>
+          <a:bodyPr xmlns:a="http://schemas.openxmlformats.org/drawingml/2006/main"/>
+          <a:lstStyle xmlns:a="http://schemas.openxmlformats.org/drawingml/2006/main"/>
+          <a:p xmlns:a="http://schemas.openxmlformats.org/drawingml/2006/main">
+            <a:pPr algn="ctr">
+              <a:buNone/>
+              <a:defRPr sz="2400" b="1">
+                <a:solidFill>
+                  <a:srgbClr val="52647D"/>
+                </a:solidFill>
+                <a:latin typeface="Malgun Gothic"/>
+                <a:ea typeface="Malgun Gothic"/>
+                <a:cs typeface="Malgun Gothic"/>
+              </a:defRPr>
+            </a:pPr>
+            <a:r>
+              <a:rPr sz="2400" b="1">
+                <a:solidFill>
+                  <a:srgbClr val="52647D"/>
+                </a:solidFill>
+                <a:latin typeface="Malgun Gothic"/>
+                <a:ea typeface="Malgun Gothic"/>
+                <a:cs typeface="Malgun Gothic"/>
+              </a:rPr>
+              <a:t>→</a:t>
+            </a:r>
+          </a:p>
+        </p:txBody>
+      </p:sp>
+      <p:sp>
+        <p:nvSpPr>
+          <p:cNvPr id="8" name="phase-1">
+            <a:extLst xmlns:a="http://schemas.openxmlformats.org/drawingml/2006/main">
+              <a:ext uri="{FF2B5EF4-FFF2-40B4-BE49-F238E27FC236}">
+                <a16:creationId xmlns:a16="http://schemas.microsoft.com/office/drawing/2014/main" id="{CCC5DC3E-EAAF-47A7-BE20-81A03A0A0384}"/>
+              </a:ext>
+            </a:extLst>
+          </p:cNvPr>
+          <p:cNvSpPr>
+            <a:spLocks xmlns:a="http://schemas.openxmlformats.org/drawingml/2006/main" noGrp="1"/>
+          </p:cNvSpPr>
+          <p:nvPr/>
+        </p:nvSpPr>
+        <p:spPr>
+          <a:xfrm xmlns:a="http://schemas.openxmlformats.org/drawingml/2006/main">
+            <a:off x="3476625" y="2247900"/>
+            <a:ext cx="2171700" cy="1562100"/>
           </a:xfrm>
           <a:prstGeom xmlns:a="http://schemas.openxmlformats.org/drawingml/2006/main" prst="roundRect">
             <a:avLst>
-              <a:gd name="adj" fmla="val 4211"/>
+              <a:gd name="adj" fmla="val 4878"/>
             </a:avLst>
           </a:prstGeom>
           <a:solidFill xmlns:a="http://schemas.openxmlformats.org/drawingml/2006/main">
@@ -6353,34 +6532,229 @@
       </p:sp>
       <p:sp>
         <p:nvSpPr>
-          <p:cNvPr id="7" name="community-ui">
-            <a:extLst xmlns:a="http://schemas.openxmlformats.org/drawingml/2006/main">
-              <a:ext uri="{FF2B5EF4-FFF2-40B4-BE49-F238E27FC236}">
-                <a16:creationId xmlns:a16="http://schemas.microsoft.com/office/drawing/2014/main" id="{E7F3E4DE-3896-4972-B8F1-AF6C18CFFA99}"/>
-              </a:ext>
-            </a:extLst>
-          </p:cNvPr>
-          <p:cNvSpPr>
-            <a:spLocks xmlns:a="http://schemas.openxmlformats.org/drawingml/2006/main" noGrp="1"/>
-          </p:cNvSpPr>
-          <p:nvPr/>
-        </p:nvSpPr>
-        <p:spPr>
-          <a:xfrm xmlns:a="http://schemas.openxmlformats.org/drawingml/2006/main">
-            <a:off x="8305800" y="2076450"/>
-            <a:ext cx="3143250" cy="1809750"/>
+          <p:cNvPr id="9" name="phase-label-1">
+            <a:extLst xmlns:a="http://schemas.openxmlformats.org/drawingml/2006/main">
+              <a:ext uri="{FF2B5EF4-FFF2-40B4-BE49-F238E27FC236}">
+                <a16:creationId xmlns:a16="http://schemas.microsoft.com/office/drawing/2014/main" id="{703B871E-E432-4AAB-8D50-6BCBAF062755}"/>
+              </a:ext>
+            </a:extLst>
+          </p:cNvPr>
+          <p:cNvSpPr>
+            <a:spLocks xmlns:a="http://schemas.openxmlformats.org/drawingml/2006/main" noGrp="1"/>
+          </p:cNvSpPr>
+          <p:nvPr/>
+        </p:nvSpPr>
+        <p:spPr>
+          <a:xfrm xmlns:a="http://schemas.openxmlformats.org/drawingml/2006/main">
+            <a:off x="3667125" y="2552700"/>
+            <a:ext cx="1790700" cy="704850"/>
+          </a:xfrm>
+          <a:prstGeom xmlns:a="http://schemas.openxmlformats.org/drawingml/2006/main" prst="rect">
+            <a:avLst/>
+          </a:prstGeom>
+          <a:noFill xmlns:a="http://schemas.openxmlformats.org/drawingml/2006/main"/>
+          <a:ln xmlns:a="http://schemas.openxmlformats.org/drawingml/2006/main" w="0">
+            <a:noFill/>
+            <a:prstDash val="solid"/>
+          </a:ln>
+        </p:spPr>
+        <p:txBody>
+          <a:bodyPr xmlns:a="http://schemas.openxmlformats.org/drawingml/2006/main"/>
+          <a:lstStyle xmlns:a="http://schemas.openxmlformats.org/drawingml/2006/main"/>
+          <a:p xmlns:a="http://schemas.openxmlformats.org/drawingml/2006/main">
+            <a:pPr algn="ctr">
+              <a:buNone/>
+              <a:defRPr sz="1950" b="1">
+                <a:solidFill>
+                  <a:srgbClr val="155EEF"/>
+                </a:solidFill>
+                <a:latin typeface="Malgun Gothic"/>
+                <a:ea typeface="Malgun Gothic"/>
+                <a:cs typeface="Malgun Gothic"/>
+              </a:defRPr>
+            </a:pPr>
+            <a:r>
+              <a:rPr sz="1950" b="1">
+                <a:solidFill>
+                  <a:srgbClr val="155EEF"/>
+                </a:solidFill>
+                <a:latin typeface="Malgun Gothic"/>
+                <a:ea typeface="Malgun Gothic"/>
+                <a:cs typeface="Malgun Gothic"/>
+              </a:rPr>
+              <a:t>활성화</a:t>
+            </a:r>
+          </a:p>
+          <a:p xmlns:a="http://schemas.openxmlformats.org/drawingml/2006/main">
+            <a:pPr algn="ctr">
+              <a:buNone/>
+              <a:defRPr sz="1950" b="1">
+                <a:solidFill>
+                  <a:srgbClr val="155EEF"/>
+                </a:solidFill>
+                <a:latin typeface="Malgun Gothic"/>
+                <a:ea typeface="Malgun Gothic"/>
+                <a:cs typeface="Malgun Gothic"/>
+              </a:defRPr>
+            </a:pPr>
+            <a:r>
+              <a:rPr sz="1950" b="1">
+                <a:solidFill>
+                  <a:srgbClr val="155EEF"/>
+                </a:solidFill>
+                <a:latin typeface="Malgun Gothic"/>
+                <a:ea typeface="Malgun Gothic"/>
+                <a:cs typeface="Malgun Gothic"/>
+              </a:rPr>
+              <a:t>Enabled</a:t>
+            </a:r>
+          </a:p>
+        </p:txBody>
+      </p:sp>
+      <p:sp>
+        <p:nvSpPr>
+          <p:cNvPr id="10" name="phase-http-1">
+            <a:extLst xmlns:a="http://schemas.openxmlformats.org/drawingml/2006/main">
+              <a:ext uri="{FF2B5EF4-FFF2-40B4-BE49-F238E27FC236}">
+                <a16:creationId xmlns:a16="http://schemas.microsoft.com/office/drawing/2014/main" id="{AE3959C6-3A52-4DCF-821D-D827B0664350}"/>
+              </a:ext>
+            </a:extLst>
+          </p:cNvPr>
+          <p:cNvSpPr>
+            <a:spLocks xmlns:a="http://schemas.openxmlformats.org/drawingml/2006/main" noGrp="1"/>
+          </p:cNvSpPr>
+          <p:nvPr/>
+        </p:nvSpPr>
+        <p:spPr>
+          <a:xfrm xmlns:a="http://schemas.openxmlformats.org/drawingml/2006/main">
+            <a:off x="3667125" y="3333750"/>
+            <a:ext cx="1790700" cy="285750"/>
+          </a:xfrm>
+          <a:prstGeom xmlns:a="http://schemas.openxmlformats.org/drawingml/2006/main" prst="rect">
+            <a:avLst/>
+          </a:prstGeom>
+          <a:noFill xmlns:a="http://schemas.openxmlformats.org/drawingml/2006/main"/>
+          <a:ln xmlns:a="http://schemas.openxmlformats.org/drawingml/2006/main" w="0">
+            <a:noFill/>
+            <a:prstDash val="solid"/>
+          </a:ln>
+        </p:spPr>
+        <p:txBody>
+          <a:bodyPr xmlns:a="http://schemas.openxmlformats.org/drawingml/2006/main"/>
+          <a:lstStyle xmlns:a="http://schemas.openxmlformats.org/drawingml/2006/main"/>
+          <a:p xmlns:a="http://schemas.openxmlformats.org/drawingml/2006/main">
+            <a:pPr algn="ctr">
+              <a:buNone/>
+              <a:defRPr sz="1350" b="0">
+                <a:solidFill>
+                  <a:srgbClr val="52647D"/>
+                </a:solidFill>
+                <a:latin typeface="Malgun Gothic"/>
+                <a:ea typeface="Malgun Gothic"/>
+                <a:cs typeface="Malgun Gothic"/>
+              </a:defRPr>
+            </a:pPr>
+            <a:r>
+              <a:rPr sz="1350" b="0">
+                <a:solidFill>
+                  <a:srgbClr val="52647D"/>
+                </a:solidFill>
+                <a:latin typeface="Malgun Gothic"/>
+                <a:ea typeface="Malgun Gothic"/>
+                <a:cs typeface="Malgun Gothic"/>
+              </a:rPr>
+              <a:t>HTTP 200</a:t>
+            </a:r>
+          </a:p>
+        </p:txBody>
+      </p:sp>
+      <p:sp>
+        <p:nvSpPr>
+          <p:cNvPr id="11" name="arrow-2">
+            <a:extLst xmlns:a="http://schemas.openxmlformats.org/drawingml/2006/main">
+              <a:ext uri="{FF2B5EF4-FFF2-40B4-BE49-F238E27FC236}">
+                <a16:creationId xmlns:a16="http://schemas.microsoft.com/office/drawing/2014/main" id="{EBB4EFA8-8837-4DC7-B490-F0FDBE819CC2}"/>
+              </a:ext>
+            </a:extLst>
+          </p:cNvPr>
+          <p:cNvSpPr>
+            <a:spLocks xmlns:a="http://schemas.openxmlformats.org/drawingml/2006/main" noGrp="1"/>
+          </p:cNvSpPr>
+          <p:nvPr/>
+        </p:nvSpPr>
+        <p:spPr>
+          <a:xfrm xmlns:a="http://schemas.openxmlformats.org/drawingml/2006/main">
+            <a:off x="8496300" y="2809875"/>
+            <a:ext cx="552450" cy="495300"/>
+          </a:xfrm>
+          <a:prstGeom xmlns:a="http://schemas.openxmlformats.org/drawingml/2006/main" prst="rect">
+            <a:avLst/>
+          </a:prstGeom>
+          <a:noFill xmlns:a="http://schemas.openxmlformats.org/drawingml/2006/main"/>
+          <a:ln xmlns:a="http://schemas.openxmlformats.org/drawingml/2006/main" w="0">
+            <a:noFill/>
+            <a:prstDash val="solid"/>
+          </a:ln>
+        </p:spPr>
+        <p:txBody>
+          <a:bodyPr xmlns:a="http://schemas.openxmlformats.org/drawingml/2006/main"/>
+          <a:lstStyle xmlns:a="http://schemas.openxmlformats.org/drawingml/2006/main"/>
+          <a:p xmlns:a="http://schemas.openxmlformats.org/drawingml/2006/main">
+            <a:pPr algn="ctr">
+              <a:buNone/>
+              <a:defRPr sz="2400" b="1">
+                <a:solidFill>
+                  <a:srgbClr val="52647D"/>
+                </a:solidFill>
+                <a:latin typeface="Malgun Gothic"/>
+                <a:ea typeface="Malgun Gothic"/>
+                <a:cs typeface="Malgun Gothic"/>
+              </a:defRPr>
+            </a:pPr>
+            <a:r>
+              <a:rPr sz="2400" b="1">
+                <a:solidFill>
+                  <a:srgbClr val="52647D"/>
+                </a:solidFill>
+                <a:latin typeface="Malgun Gothic"/>
+                <a:ea typeface="Malgun Gothic"/>
+                <a:cs typeface="Malgun Gothic"/>
+              </a:rPr>
+              <a:t>→</a:t>
+            </a:r>
+          </a:p>
+        </p:txBody>
+      </p:sp>
+      <p:sp>
+        <p:nvSpPr>
+          <p:cNvPr id="12" name="phase-2">
+            <a:extLst xmlns:a="http://schemas.openxmlformats.org/drawingml/2006/main">
+              <a:ext uri="{FF2B5EF4-FFF2-40B4-BE49-F238E27FC236}">
+                <a16:creationId xmlns:a16="http://schemas.microsoft.com/office/drawing/2014/main" id="{30B14935-D9F6-49E4-9FFA-35C561CA1787}"/>
+              </a:ext>
+            </a:extLst>
+          </p:cNvPr>
+          <p:cNvSpPr>
+            <a:spLocks xmlns:a="http://schemas.openxmlformats.org/drawingml/2006/main" noGrp="1"/>
+          </p:cNvSpPr>
+          <p:nvPr/>
+        </p:nvSpPr>
+        <p:spPr>
+          <a:xfrm xmlns:a="http://schemas.openxmlformats.org/drawingml/2006/main">
+            <a:off x="6286500" y="2247900"/>
+            <a:ext cx="2171700" cy="1562100"/>
           </a:xfrm>
           <a:prstGeom xmlns:a="http://schemas.openxmlformats.org/drawingml/2006/main" prst="roundRect">
             <a:avLst>
-              <a:gd name="adj" fmla="val 4211"/>
+              <a:gd name="adj" fmla="val 4878"/>
             </a:avLst>
           </a:prstGeom>
           <a:solidFill xmlns:a="http://schemas.openxmlformats.org/drawingml/2006/main">
-            <a:srgbClr val="EAFAF2"/>
+            <a:srgbClr val="F3F7FC"/>
           </a:solidFill>
           <a:ln xmlns:a="http://schemas.openxmlformats.org/drawingml/2006/main" w="9525">
             <a:solidFill>
-              <a:srgbClr val="86D2AA"/>
+              <a:srgbClr val="D5E1F1"/>
             </a:solidFill>
             <a:prstDash val="solid"/>
           </a:ln>
@@ -6388,22 +6762,22 @@
       </p:sp>
       <p:sp>
         <p:nvSpPr>
-          <p:cNvPr id="8" name="flarum-core-title">
-            <a:extLst xmlns:a="http://schemas.openxmlformats.org/drawingml/2006/main">
-              <a:ext uri="{FF2B5EF4-FFF2-40B4-BE49-F238E27FC236}">
-                <a16:creationId xmlns:a16="http://schemas.microsoft.com/office/drawing/2014/main" id="{0136A85B-5961-4FFA-8B8D-5B294E1A0C1F}"/>
-              </a:ext>
-            </a:extLst>
-          </p:cNvPr>
-          <p:cNvSpPr>
-            <a:spLocks xmlns:a="http://schemas.openxmlformats.org/drawingml/2006/main" noGrp="1"/>
-          </p:cNvSpPr>
-          <p:nvPr/>
-        </p:nvSpPr>
-        <p:spPr>
-          <a:xfrm xmlns:a="http://schemas.openxmlformats.org/drawingml/2006/main">
-            <a:off x="933450" y="2533650"/>
-            <a:ext cx="2609850" cy="457200"/>
+          <p:cNvPr id="13" name="phase-label-2">
+            <a:extLst xmlns:a="http://schemas.openxmlformats.org/drawingml/2006/main">
+              <a:ext uri="{FF2B5EF4-FFF2-40B4-BE49-F238E27FC236}">
+                <a16:creationId xmlns:a16="http://schemas.microsoft.com/office/drawing/2014/main" id="{F84B927D-9C32-4480-B1CA-A2BEFFF6BD2C}"/>
+              </a:ext>
+            </a:extLst>
+          </p:cNvPr>
+          <p:cNvSpPr>
+            <a:spLocks xmlns:a="http://schemas.openxmlformats.org/drawingml/2006/main" noGrp="1"/>
+          </p:cNvSpPr>
+          <p:nvPr/>
+        </p:nvSpPr>
+        <p:spPr>
+          <a:xfrm xmlns:a="http://schemas.openxmlformats.org/drawingml/2006/main">
+            <a:off x="6477000" y="2552700"/>
+            <a:ext cx="1790700" cy="704850"/>
           </a:xfrm>
           <a:prstGeom xmlns:a="http://schemas.openxmlformats.org/drawingml/2006/main" prst="rect">
             <a:avLst/>
@@ -6420,47 +6794,71 @@
           <a:p xmlns:a="http://schemas.openxmlformats.org/drawingml/2006/main">
             <a:pPr algn="ctr">
               <a:buNone/>
-              <a:defRPr sz="2250" b="1">
-                <a:solidFill>
-                  <a:srgbClr val="15253E"/>
-                </a:solidFill>
-                <a:latin typeface="Malgun Gothic"/>
-                <a:ea typeface="Malgun Gothic"/>
-                <a:cs typeface="Malgun Gothic"/>
-              </a:defRPr>
-            </a:pPr>
-            <a:r>
-              <a:rPr sz="2250" b="1">
-                <a:solidFill>
-                  <a:srgbClr val="15253E"/>
-                </a:solidFill>
-                <a:latin typeface="Malgun Gothic"/>
-                <a:ea typeface="Malgun Gothic"/>
-                <a:cs typeface="Malgun Gothic"/>
-              </a:rPr>
-              <a:t>Flarum 1.8.18</a:t>
-            </a:r>
-          </a:p>
-        </p:txBody>
-      </p:sp>
-      <p:sp>
-        <p:nvSpPr>
-          <p:cNvPr id="9" name="flarum-core-copy">
-            <a:extLst xmlns:a="http://schemas.openxmlformats.org/drawingml/2006/main">
-              <a:ext uri="{FF2B5EF4-FFF2-40B4-BE49-F238E27FC236}">
-                <a16:creationId xmlns:a16="http://schemas.microsoft.com/office/drawing/2014/main" id="{E7DB7EDB-905C-43D0-890F-80D3946E2991}"/>
-              </a:ext>
-            </a:extLst>
-          </p:cNvPr>
-          <p:cNvSpPr>
-            <a:spLocks xmlns:a="http://schemas.openxmlformats.org/drawingml/2006/main" noGrp="1"/>
-          </p:cNvSpPr>
-          <p:nvPr/>
-        </p:nvSpPr>
-        <p:spPr>
-          <a:xfrm xmlns:a="http://schemas.openxmlformats.org/drawingml/2006/main">
-            <a:off x="933450" y="3105150"/>
-            <a:ext cx="2609850" cy="323850"/>
+              <a:defRPr sz="1950" b="1">
+                <a:solidFill>
+                  <a:srgbClr val="15253E"/>
+                </a:solidFill>
+                <a:latin typeface="Malgun Gothic"/>
+                <a:ea typeface="Malgun Gothic"/>
+                <a:cs typeface="Malgun Gothic"/>
+              </a:defRPr>
+            </a:pPr>
+            <a:r>
+              <a:rPr sz="1950" b="1">
+                <a:solidFill>
+                  <a:srgbClr val="15253E"/>
+                </a:solidFill>
+                <a:latin typeface="Malgun Gothic"/>
+                <a:ea typeface="Malgun Gothic"/>
+                <a:cs typeface="Malgun Gothic"/>
+              </a:rPr>
+              <a:t>롤백</a:t>
+            </a:r>
+          </a:p>
+          <a:p xmlns:a="http://schemas.openxmlformats.org/drawingml/2006/main">
+            <a:pPr algn="ctr">
+              <a:buNone/>
+              <a:defRPr sz="1950" b="1">
+                <a:solidFill>
+                  <a:srgbClr val="15253E"/>
+                </a:solidFill>
+                <a:latin typeface="Malgun Gothic"/>
+                <a:ea typeface="Malgun Gothic"/>
+                <a:cs typeface="Malgun Gothic"/>
+              </a:defRPr>
+            </a:pPr>
+            <a:r>
+              <a:rPr sz="1950" b="1">
+                <a:solidFill>
+                  <a:srgbClr val="15253E"/>
+                </a:solidFill>
+                <a:latin typeface="Malgun Gothic"/>
+                <a:ea typeface="Malgun Gothic"/>
+                <a:cs typeface="Malgun Gothic"/>
+              </a:rPr>
+              <a:t>Disabled</a:t>
+            </a:r>
+          </a:p>
+        </p:txBody>
+      </p:sp>
+      <p:sp>
+        <p:nvSpPr>
+          <p:cNvPr id="14" name="phase-http-2">
+            <a:extLst xmlns:a="http://schemas.openxmlformats.org/drawingml/2006/main">
+              <a:ext uri="{FF2B5EF4-FFF2-40B4-BE49-F238E27FC236}">
+                <a16:creationId xmlns:a16="http://schemas.microsoft.com/office/drawing/2014/main" id="{03579DE4-BE81-4564-8731-4EC8DE467A0F}"/>
+              </a:ext>
+            </a:extLst>
+          </p:cNvPr>
+          <p:cNvSpPr>
+            <a:spLocks xmlns:a="http://schemas.openxmlformats.org/drawingml/2006/main" noGrp="1"/>
+          </p:cNvSpPr>
+          <p:nvPr/>
+        </p:nvSpPr>
+        <p:spPr>
+          <a:xfrm xmlns:a="http://schemas.openxmlformats.org/drawingml/2006/main">
+            <a:off x="6477000" y="3333750"/>
+            <a:ext cx="1790700" cy="285750"/>
           </a:xfrm>
           <a:prstGeom xmlns:a="http://schemas.openxmlformats.org/drawingml/2006/main" prst="rect">
             <a:avLst/>
@@ -6477,7 +6875,7 @@
           <a:p xmlns:a="http://schemas.openxmlformats.org/drawingml/2006/main">
             <a:pPr algn="ctr">
               <a:buNone/>
-              <a:defRPr sz="1500" b="0">
+              <a:defRPr sz="1350" b="0">
                 <a:solidFill>
                   <a:srgbClr val="52647D"/>
                 </a:solidFill>
@@ -6487,7 +6885,7 @@
               </a:defRPr>
             </a:pPr>
             <a:r>
-              <a:rPr sz="1500" b="0">
+              <a:rPr sz="1350" b="0">
                 <a:solidFill>
                   <a:srgbClr val="52647D"/>
                 </a:solidFill>
@@ -6495,29 +6893,64 @@
                 <a:ea typeface="Malgun Gothic"/>
                 <a:cs typeface="Malgun Gothic"/>
               </a:rPr>
-              <a:t>라우팅 · 권한 · 검색 · 작성</a:t>
-            </a:r>
-          </a:p>
-        </p:txBody>
-      </p:sp>
-      <p:sp>
-        <p:nvSpPr>
-          <p:cNvPr id="10" name="theme-title">
-            <a:extLst xmlns:a="http://schemas.openxmlformats.org/drawingml/2006/main">
-              <a:ext uri="{FF2B5EF4-FFF2-40B4-BE49-F238E27FC236}">
-                <a16:creationId xmlns:a16="http://schemas.microsoft.com/office/drawing/2014/main" id="{DBD93488-5F1B-4674-80CA-8AF64A4024CD}"/>
-              </a:ext>
-            </a:extLst>
-          </p:cNvPr>
-          <p:cNvSpPr>
-            <a:spLocks xmlns:a="http://schemas.openxmlformats.org/drawingml/2006/main" noGrp="1"/>
-          </p:cNvSpPr>
-          <p:nvPr/>
-        </p:nvSpPr>
-        <p:spPr>
-          <a:xfrm xmlns:a="http://schemas.openxmlformats.org/drawingml/2006/main">
-            <a:off x="4819650" y="2362200"/>
-            <a:ext cx="2476500" cy="742950"/>
+              <a:t>HTTP 200</a:t>
+            </a:r>
+          </a:p>
+        </p:txBody>
+      </p:sp>
+      <p:sp>
+        <p:nvSpPr>
+          <p:cNvPr id="15" name="phase-3">
+            <a:extLst xmlns:a="http://schemas.openxmlformats.org/drawingml/2006/main">
+              <a:ext uri="{FF2B5EF4-FFF2-40B4-BE49-F238E27FC236}">
+                <a16:creationId xmlns:a16="http://schemas.microsoft.com/office/drawing/2014/main" id="{B1D3BD30-83E1-498D-B0C3-D6998089D16E}"/>
+              </a:ext>
+            </a:extLst>
+          </p:cNvPr>
+          <p:cNvSpPr>
+            <a:spLocks xmlns:a="http://schemas.openxmlformats.org/drawingml/2006/main" noGrp="1"/>
+          </p:cNvSpPr>
+          <p:nvPr/>
+        </p:nvSpPr>
+        <p:spPr>
+          <a:xfrm xmlns:a="http://schemas.openxmlformats.org/drawingml/2006/main">
+            <a:off x="9096375" y="2247900"/>
+            <a:ext cx="2171700" cy="1562100"/>
+          </a:xfrm>
+          <a:prstGeom xmlns:a="http://schemas.openxmlformats.org/drawingml/2006/main" prst="roundRect">
+            <a:avLst>
+              <a:gd name="adj" fmla="val 4878"/>
+            </a:avLst>
+          </a:prstGeom>
+          <a:solidFill xmlns:a="http://schemas.openxmlformats.org/drawingml/2006/main">
+            <a:srgbClr val="EAF2FF"/>
+          </a:solidFill>
+          <a:ln xmlns:a="http://schemas.openxmlformats.org/drawingml/2006/main" w="9525">
+            <a:solidFill>
+              <a:srgbClr val="155EEF"/>
+            </a:solidFill>
+            <a:prstDash val="solid"/>
+          </a:ln>
+        </p:spPr>
+      </p:sp>
+      <p:sp>
+        <p:nvSpPr>
+          <p:cNvPr id="16" name="phase-label-3">
+            <a:extLst xmlns:a="http://schemas.openxmlformats.org/drawingml/2006/main">
+              <a:ext uri="{FF2B5EF4-FFF2-40B4-BE49-F238E27FC236}">
+                <a16:creationId xmlns:a16="http://schemas.microsoft.com/office/drawing/2014/main" id="{2E4B63B9-05DD-4586-92E2-218CE46B8CF6}"/>
+              </a:ext>
+            </a:extLst>
+          </p:cNvPr>
+          <p:cNvSpPr>
+            <a:spLocks xmlns:a="http://schemas.openxmlformats.org/drawingml/2006/main" noGrp="1"/>
+          </p:cNvSpPr>
+          <p:nvPr/>
+        </p:nvSpPr>
+        <p:spPr>
+          <a:xfrm xmlns:a="http://schemas.openxmlformats.org/drawingml/2006/main">
+            <a:off x="9286875" y="2552700"/>
+            <a:ext cx="1790700" cy="704850"/>
           </a:xfrm>
           <a:prstGeom xmlns:a="http://schemas.openxmlformats.org/drawingml/2006/main" prst="rect">
             <a:avLst/>
@@ -6534,7 +6967,7 @@
           <a:p xmlns:a="http://schemas.openxmlformats.org/drawingml/2006/main">
             <a:pPr algn="ctr">
               <a:buNone/>
-              <a:defRPr sz="2175" b="1">
+              <a:defRPr sz="1950" b="1">
                 <a:solidFill>
                   <a:srgbClr val="155EEF"/>
                 </a:solidFill>
@@ -6544,7 +6977,7 @@
               </a:defRPr>
             </a:pPr>
             <a:r>
-              <a:rPr sz="2175" b="1">
+              <a:rPr sz="1950" b="1">
                 <a:solidFill>
                   <a:srgbClr val="155EEF"/>
                 </a:solidFill>
@@ -6552,13 +6985,13 @@
                 <a:ea typeface="Malgun Gothic"/>
                 <a:cs typeface="Malgun Gothic"/>
               </a:rPr>
-              <a:t>ABLESTACK</a:t>
+              <a:t>최종</a:t>
             </a:r>
           </a:p>
           <a:p xmlns:a="http://schemas.openxmlformats.org/drawingml/2006/main">
             <a:pPr algn="ctr">
               <a:buNone/>
-              <a:defRPr sz="2175" b="1">
+              <a:defRPr sz="1950" b="1">
                 <a:solidFill>
                   <a:srgbClr val="155EEF"/>
                 </a:solidFill>
@@ -6568,7 +7001,7 @@
               </a:defRPr>
             </a:pPr>
             <a:r>
-              <a:rPr sz="2175" b="1">
+              <a:rPr sz="1950" b="1">
                 <a:solidFill>
                   <a:srgbClr val="155EEF"/>
                 </a:solidFill>
@@ -6576,29 +7009,29 @@
                 <a:ea typeface="Malgun Gothic"/>
                 <a:cs typeface="Malgun Gothic"/>
               </a:rPr>
-              <a:t>Theme</a:t>
-            </a:r>
-          </a:p>
-        </p:txBody>
-      </p:sp>
-      <p:sp>
-        <p:nvSpPr>
-          <p:cNvPr id="11" name="theme-copy">
-            <a:extLst xmlns:a="http://schemas.openxmlformats.org/drawingml/2006/main">
-              <a:ext uri="{FF2B5EF4-FFF2-40B4-BE49-F238E27FC236}">
-                <a16:creationId xmlns:a16="http://schemas.microsoft.com/office/drawing/2014/main" id="{C8B03E0C-FD83-420F-AF7B-3F7089B47394}"/>
-              </a:ext>
-            </a:extLst>
-          </p:cNvPr>
-          <p:cNvSpPr>
-            <a:spLocks xmlns:a="http://schemas.openxmlformats.org/drawingml/2006/main" noGrp="1"/>
-          </p:cNvSpPr>
-          <p:nvPr/>
-        </p:nvSpPr>
-        <p:spPr>
-          <a:xfrm xmlns:a="http://schemas.openxmlformats.org/drawingml/2006/main">
-            <a:off x="4819650" y="3257550"/>
-            <a:ext cx="2476500" cy="323850"/>
+              <a:t>Enabled</a:t>
+            </a:r>
+          </a:p>
+        </p:txBody>
+      </p:sp>
+      <p:sp>
+        <p:nvSpPr>
+          <p:cNvPr id="17" name="phase-http-3">
+            <a:extLst xmlns:a="http://schemas.openxmlformats.org/drawingml/2006/main">
+              <a:ext uri="{FF2B5EF4-FFF2-40B4-BE49-F238E27FC236}">
+                <a16:creationId xmlns:a16="http://schemas.microsoft.com/office/drawing/2014/main" id="{B2993C25-3261-4B34-90FD-48CACC67BAA0}"/>
+              </a:ext>
+            </a:extLst>
+          </p:cNvPr>
+          <p:cNvSpPr>
+            <a:spLocks xmlns:a="http://schemas.openxmlformats.org/drawingml/2006/main" noGrp="1"/>
+          </p:cNvSpPr>
+          <p:nvPr/>
+        </p:nvSpPr>
+        <p:spPr>
+          <a:xfrm xmlns:a="http://schemas.openxmlformats.org/drawingml/2006/main">
+            <a:off x="9286875" y="3333750"/>
+            <a:ext cx="1790700" cy="285750"/>
           </a:xfrm>
           <a:prstGeom xmlns:a="http://schemas.openxmlformats.org/drawingml/2006/main" prst="rect">
             <a:avLst/>
@@ -6633,29 +7066,29 @@
                 <a:ea typeface="Malgun Gothic"/>
                 <a:cs typeface="Malgun Gothic"/>
               </a:rPr>
-              <a:t>LESS · 한글 Cache · 상태 표시</a:t>
-            </a:r>
-          </a:p>
-        </p:txBody>
-      </p:sp>
-      <p:sp>
-        <p:nvSpPr>
-          <p:cNvPr id="12" name="ui-title">
-            <a:extLst xmlns:a="http://schemas.openxmlformats.org/drawingml/2006/main">
-              <a:ext uri="{FF2B5EF4-FFF2-40B4-BE49-F238E27FC236}">
-                <a16:creationId xmlns:a16="http://schemas.microsoft.com/office/drawing/2014/main" id="{37B98FC2-7DDE-45BF-B2BF-AA8E8A3D4DE8}"/>
-              </a:ext>
-            </a:extLst>
-          </p:cNvPr>
-          <p:cNvSpPr>
-            <a:spLocks xmlns:a="http://schemas.openxmlformats.org/drawingml/2006/main" noGrp="1"/>
-          </p:cNvSpPr>
-          <p:nvPr/>
-        </p:nvSpPr>
-        <p:spPr>
-          <a:xfrm xmlns:a="http://schemas.openxmlformats.org/drawingml/2006/main">
-            <a:off x="8572500" y="2533650"/>
-            <a:ext cx="2609850" cy="457200"/>
+              <a:t>HTTP 200</a:t>
+            </a:r>
+          </a:p>
+        </p:txBody>
+      </p:sp>
+      <p:sp>
+        <p:nvSpPr>
+          <p:cNvPr id="18" name="integrity-count">
+            <a:extLst xmlns:a="http://schemas.openxmlformats.org/drawingml/2006/main">
+              <a:ext uri="{FF2B5EF4-FFF2-40B4-BE49-F238E27FC236}">
+                <a16:creationId xmlns:a16="http://schemas.microsoft.com/office/drawing/2014/main" id="{7D531B41-66A5-4441-97A2-88436706648C}"/>
+              </a:ext>
+            </a:extLst>
+          </p:cNvPr>
+          <p:cNvSpPr>
+            <a:spLocks xmlns:a="http://schemas.openxmlformats.org/drawingml/2006/main" noGrp="1"/>
+          </p:cNvSpPr>
+          <p:nvPr/>
+        </p:nvSpPr>
+        <p:spPr>
+          <a:xfrm xmlns:a="http://schemas.openxmlformats.org/drawingml/2006/main">
+            <a:off x="857250" y="4552950"/>
+            <a:ext cx="10477500" cy="552450"/>
           </a:xfrm>
           <a:prstGeom xmlns:a="http://schemas.openxmlformats.org/drawingml/2006/main" prst="rect">
             <a:avLst/>
@@ -6672,47 +7105,47 @@
           <a:p xmlns:a="http://schemas.openxmlformats.org/drawingml/2006/main">
             <a:pPr algn="ctr">
               <a:buNone/>
-              <a:defRPr sz="2250" b="1">
-                <a:solidFill>
-                  <a:srgbClr val="078248"/>
-                </a:solidFill>
-                <a:latin typeface="Malgun Gothic"/>
-                <a:ea typeface="Malgun Gothic"/>
-                <a:cs typeface="Malgun Gothic"/>
-              </a:defRPr>
-            </a:pPr>
-            <a:r>
-              <a:rPr sz="2250" b="1">
-                <a:solidFill>
-                  <a:srgbClr val="078248"/>
-                </a:solidFill>
-                <a:latin typeface="Malgun Gothic"/>
-                <a:ea typeface="Malgun Gothic"/>
-                <a:cs typeface="Malgun Gothic"/>
-              </a:rPr>
-              <a:t>Community UI</a:t>
-            </a:r>
-          </a:p>
-        </p:txBody>
-      </p:sp>
-      <p:sp>
-        <p:nvSpPr>
-          <p:cNvPr id="13" name="ui-copy">
-            <a:extLst xmlns:a="http://schemas.openxmlformats.org/drawingml/2006/main">
-              <a:ext uri="{FF2B5EF4-FFF2-40B4-BE49-F238E27FC236}">
-                <a16:creationId xmlns:a16="http://schemas.microsoft.com/office/drawing/2014/main" id="{3B149A4F-0659-480B-9329-13D669118779}"/>
-              </a:ext>
-            </a:extLst>
-          </p:cNvPr>
-          <p:cNvSpPr>
-            <a:spLocks xmlns:a="http://schemas.openxmlformats.org/drawingml/2006/main" noGrp="1"/>
-          </p:cNvSpPr>
-          <p:nvPr/>
-        </p:nvSpPr>
-        <p:spPr>
-          <a:xfrm xmlns:a="http://schemas.openxmlformats.org/drawingml/2006/main">
-            <a:off x="8572500" y="3105150"/>
-            <a:ext cx="2609850" cy="323850"/>
+              <a:defRPr sz="2400" b="1">
+                <a:solidFill>
+                  <a:srgbClr val="15253E"/>
+                </a:solidFill>
+                <a:latin typeface="Malgun Gothic"/>
+                <a:ea typeface="Malgun Gothic"/>
+                <a:cs typeface="Malgun Gothic"/>
+              </a:defRPr>
+            </a:pPr>
+            <a:r>
+              <a:rPr sz="2400" b="1">
+                <a:solidFill>
+                  <a:srgbClr val="15253E"/>
+                </a:solidFill>
+                <a:latin typeface="Malgun Gothic"/>
+                <a:ea typeface="Malgun Gothic"/>
+                <a:cs typeface="Malgun Gothic"/>
+              </a:rPr>
+              <a:t>39 users · 117 discussions · 305 posts</a:t>
+            </a:r>
+          </a:p>
+        </p:txBody>
+      </p:sp>
+      <p:sp>
+        <p:nvSpPr>
+          <p:cNvPr id="19" name="integrity-hash">
+            <a:extLst xmlns:a="http://schemas.openxmlformats.org/drawingml/2006/main">
+              <a:ext uri="{FF2B5EF4-FFF2-40B4-BE49-F238E27FC236}">
+                <a16:creationId xmlns:a16="http://schemas.microsoft.com/office/drawing/2014/main" id="{CFB67921-C80E-4482-BC13-B3C78F46F4D4}"/>
+              </a:ext>
+            </a:extLst>
+          </p:cNvPr>
+          <p:cNvSpPr>
+            <a:spLocks xmlns:a="http://schemas.openxmlformats.org/drawingml/2006/main" noGrp="1"/>
+          </p:cNvSpPr>
+          <p:nvPr/>
+        </p:nvSpPr>
+        <p:spPr>
+          <a:xfrm xmlns:a="http://schemas.openxmlformats.org/drawingml/2006/main">
+            <a:off x="857250" y="5238750"/>
+            <a:ext cx="10477500" cy="457200"/>
           </a:xfrm>
           <a:prstGeom xmlns:a="http://schemas.openxmlformats.org/drawingml/2006/main" prst="rect">
             <a:avLst/>
@@ -6729,117 +7162,25 @@
           <a:p xmlns:a="http://schemas.openxmlformats.org/drawingml/2006/main">
             <a:pPr algn="ctr">
               <a:buNone/>
-              <a:defRPr sz="1500" b="0">
-                <a:solidFill>
-                  <a:srgbClr val="52647D"/>
-                </a:solidFill>
-                <a:latin typeface="Malgun Gothic"/>
-                <a:ea typeface="Malgun Gothic"/>
-                <a:cs typeface="Malgun Gothic"/>
-              </a:defRPr>
-            </a:pPr>
-            <a:r>
-              <a:rPr sz="1500" b="0">
-                <a:solidFill>
-                  <a:srgbClr val="52647D"/>
-                </a:solidFill>
-                <a:latin typeface="Malgun Gothic"/>
-                <a:ea typeface="Malgun Gothic"/>
-                <a:cs typeface="Malgun Gothic"/>
-              </a:rPr>
-              <a:t>Desktop · Mobile · Accessibility</a:t>
-            </a:r>
-          </a:p>
-        </p:txBody>
-      </p:sp>
-      <p:sp>
-        <p:nvSpPr>
-          <p:cNvPr id="14" name="rollback-strip">
-            <a:extLst xmlns:a="http://schemas.openxmlformats.org/drawingml/2006/main">
-              <a:ext uri="{FF2B5EF4-FFF2-40B4-BE49-F238E27FC236}">
-                <a16:creationId xmlns:a16="http://schemas.microsoft.com/office/drawing/2014/main" id="{1329660C-7BA4-47F6-B431-662F73A2D12C}"/>
-              </a:ext>
-            </a:extLst>
-          </p:cNvPr>
-          <p:cNvSpPr>
-            <a:spLocks xmlns:a="http://schemas.openxmlformats.org/drawingml/2006/main" noGrp="1"/>
-          </p:cNvSpPr>
-          <p:nvPr/>
-        </p:nvSpPr>
-        <p:spPr>
-          <a:xfrm xmlns:a="http://schemas.openxmlformats.org/drawingml/2006/main">
-            <a:off x="2381250" y="4781550"/>
-            <a:ext cx="7429500" cy="838200"/>
-          </a:xfrm>
-          <a:prstGeom xmlns:a="http://schemas.openxmlformats.org/drawingml/2006/main" prst="roundRect">
-            <a:avLst>
-              <a:gd name="adj" fmla="val 9091"/>
-            </a:avLst>
-          </a:prstGeom>
-          <a:solidFill xmlns:a="http://schemas.openxmlformats.org/drawingml/2006/main">
-            <a:srgbClr val="FFF6DF"/>
-          </a:solidFill>
-          <a:ln xmlns:a="http://schemas.openxmlformats.org/drawingml/2006/main" w="9525">
-            <a:solidFill>
-              <a:srgbClr val="E4B955"/>
-            </a:solidFill>
-            <a:prstDash val="solid"/>
-          </a:ln>
-        </p:spPr>
-      </p:sp>
-      <p:sp>
-        <p:nvSpPr>
-          <p:cNvPr id="15" name="rollback-copy">
-            <a:extLst xmlns:a="http://schemas.openxmlformats.org/drawingml/2006/main">
-              <a:ext uri="{FF2B5EF4-FFF2-40B4-BE49-F238E27FC236}">
-                <a16:creationId xmlns:a16="http://schemas.microsoft.com/office/drawing/2014/main" id="{29AD88B8-B664-4F55-9D04-7AE25E4B8A59}"/>
-              </a:ext>
-            </a:extLst>
-          </p:cNvPr>
-          <p:cNvSpPr>
-            <a:spLocks xmlns:a="http://schemas.openxmlformats.org/drawingml/2006/main" noGrp="1"/>
-          </p:cNvSpPr>
-          <p:nvPr/>
-        </p:nvSpPr>
-        <p:spPr>
-          <a:xfrm xmlns:a="http://schemas.openxmlformats.org/drawingml/2006/main">
-            <a:off x="2686050" y="4991100"/>
-            <a:ext cx="6819900" cy="400050"/>
-          </a:xfrm>
-          <a:prstGeom xmlns:a="http://schemas.openxmlformats.org/drawingml/2006/main" prst="rect">
-            <a:avLst/>
-          </a:prstGeom>
-          <a:noFill xmlns:a="http://schemas.openxmlformats.org/drawingml/2006/main"/>
-          <a:ln xmlns:a="http://schemas.openxmlformats.org/drawingml/2006/main" w="0">
-            <a:noFill/>
-            <a:prstDash val="solid"/>
-          </a:ln>
-        </p:spPr>
-        <p:txBody>
-          <a:bodyPr xmlns:a="http://schemas.openxmlformats.org/drawingml/2006/main"/>
-          <a:lstStyle xmlns:a="http://schemas.openxmlformats.org/drawingml/2006/main"/>
-          <a:p xmlns:a="http://schemas.openxmlformats.org/drawingml/2006/main">
-            <a:pPr algn="ctr">
-              <a:buNone/>
-              <a:defRPr sz="1950" b="1">
-                <a:solidFill>
-                  <a:srgbClr val="9A6700"/>
-                </a:solidFill>
-                <a:latin typeface="Malgun Gothic"/>
-                <a:ea typeface="Malgun Gothic"/>
-                <a:cs typeface="Malgun Gothic"/>
-              </a:defRPr>
-            </a:pPr>
-            <a:r>
-              <a:rPr sz="1950" b="1">
-                <a:solidFill>
-                  <a:srgbClr val="9A6700"/>
-                </a:solidFill>
-                <a:latin typeface="Malgun Gothic"/>
-                <a:ea typeface="Malgun Gothic"/>
-                <a:cs typeface="Malgun Gothic"/>
-              </a:rPr>
-              <a:t>장애 시 extension:disable → 기본 Flarum UI 복귀</a:t>
+              <a:defRPr sz="1800" b="0">
+                <a:solidFill>
+                  <a:srgbClr val="078248"/>
+                </a:solidFill>
+                <a:latin typeface="Malgun Gothic"/>
+                <a:ea typeface="Malgun Gothic"/>
+                <a:cs typeface="Malgun Gothic"/>
+              </a:defRPr>
+            </a:pPr>
+            <a:r>
+              <a:rPr sz="1800" b="0">
+                <a:solidFill>
+                  <a:srgbClr val="078248"/>
+                </a:solidFill>
+                <a:latin typeface="Malgun Gothic"/>
+                <a:ea typeface="Malgun Gothic"/>
+                <a:cs typeface="Malgun Gothic"/>
+              </a:rPr>
+              <a:t>콘텐츠 SHA-256 동일 · 첨부 SHA-256 동일 · 정적 계약 8/8</a:t>
             </a:r>
           </a:p>
         </p:txBody>
@@ -6847,7 +7188,7 @@
     </p:spTree>
     <p:extLst>
       <p:ext uri="{BB962C8B-B14F-4D97-AF65-F5344CB8AC3E}">
-        <p14:creationId xmlns:p14="http://schemas.microsoft.com/office/powerpoint/2010/main" val="1960291864"/>
+        <p14:creationId xmlns:p14="http://schemas.microsoft.com/office/powerpoint/2010/main" val="224538138"/>
       </p:ext>
     </p:extLst>
   </p:cSld>
@@ -6875,22 +7216,22 @@
       </p:grpSpPr>
       <p:sp>
         <p:nvSpPr>
-          <p:cNvPr id="8" name="close-kicker">
-            <a:extLst xmlns:a="http://schemas.openxmlformats.org/drawingml/2006/main">
-              <a:ext uri="{FF2B5EF4-FFF2-40B4-BE49-F238E27FC236}">
-                <a16:creationId xmlns:a16="http://schemas.microsoft.com/office/drawing/2014/main" id="{CA02A572-4AC9-4737-B75D-10EC7C22C06C}"/>
-              </a:ext>
-            </a:extLst>
-          </p:cNvPr>
-          <p:cNvSpPr>
-            <a:spLocks xmlns:a="http://schemas.openxmlformats.org/drawingml/2006/main" noGrp="1"/>
-          </p:cNvSpPr>
-          <p:nvPr/>
-        </p:nvSpPr>
-        <p:spPr>
-          <a:xfrm xmlns:a="http://schemas.openxmlformats.org/drawingml/2006/main">
-            <a:off x="457200" y="400050"/>
-            <a:ext cx="6191250" cy="342900"/>
+          <p:cNvPr id="16" name="title-7">
+            <a:extLst xmlns:a="http://schemas.openxmlformats.org/drawingml/2006/main">
+              <a:ext uri="{FF2B5EF4-FFF2-40B4-BE49-F238E27FC236}">
+                <a16:creationId xmlns:a16="http://schemas.microsoft.com/office/drawing/2014/main" id="{B1E5F8CB-12E8-414B-A782-7921D9DB98E9}"/>
+              </a:ext>
+            </a:extLst>
+          </p:cNvPr>
+          <p:cNvSpPr>
+            <a:spLocks xmlns:a="http://schemas.openxmlformats.org/drawingml/2006/main" noGrp="1"/>
+          </p:cNvSpPr>
+          <p:nvPr/>
+        </p:nvSpPr>
+        <p:spPr>
+          <a:xfrm xmlns:a="http://schemas.openxmlformats.org/drawingml/2006/main">
+            <a:off x="457200" y="342900"/>
+            <a:ext cx="10572750" cy="685800"/>
           </a:xfrm>
           <a:prstGeom xmlns:a="http://schemas.openxmlformats.org/drawingml/2006/main" prst="rect">
             <a:avLst/>
@@ -6907,47 +7248,47 @@
           <a:p xmlns:a="http://schemas.openxmlformats.org/drawingml/2006/main">
             <a:pPr algn="l">
               <a:buNone/>
-              <a:defRPr sz="1500" b="1">
-                <a:solidFill>
-                  <a:srgbClr val="52647D"/>
-                </a:solidFill>
-                <a:latin typeface="Malgun Gothic"/>
-                <a:ea typeface="Malgun Gothic"/>
-                <a:cs typeface="Malgun Gothic"/>
-              </a:defRPr>
-            </a:pPr>
-            <a:r>
-              <a:rPr sz="1500" b="1">
-                <a:solidFill>
-                  <a:srgbClr val="52647D"/>
-                </a:solidFill>
-                <a:latin typeface="Malgun Gothic"/>
-                <a:ea typeface="Malgun Gothic"/>
-                <a:cs typeface="Malgun Gothic"/>
-              </a:rPr>
-              <a:t>ISSUE #73 · IMPLEMENTATION COMPLETE</a:t>
-            </a:r>
-          </a:p>
-        </p:txBody>
-      </p:sp>
-      <p:sp>
-        <p:nvSpPr>
-          <p:cNvPr id="2" name="close-title">
-            <a:extLst xmlns:a="http://schemas.openxmlformats.org/drawingml/2006/main">
-              <a:ext uri="{FF2B5EF4-FFF2-40B4-BE49-F238E27FC236}">
-                <a16:creationId xmlns:a16="http://schemas.microsoft.com/office/drawing/2014/main" id="{F5C154A0-B755-42E9-9F79-7921475EF0CD}"/>
-              </a:ext>
-            </a:extLst>
-          </p:cNvPr>
-          <p:cNvSpPr>
-            <a:spLocks xmlns:a="http://schemas.openxmlformats.org/drawingml/2006/main" noGrp="1"/>
-          </p:cNvSpPr>
-          <p:nvPr/>
-        </p:nvSpPr>
-        <p:spPr>
-          <a:xfrm xmlns:a="http://schemas.openxmlformats.org/drawingml/2006/main">
-            <a:off x="457200" y="1600200"/>
-            <a:ext cx="6667500" cy="1714500"/>
+              <a:defRPr sz="3000" b="1">
+                <a:solidFill>
+                  <a:srgbClr val="15253E"/>
+                </a:solidFill>
+                <a:latin typeface="Malgun Gothic"/>
+                <a:ea typeface="Malgun Gothic"/>
+                <a:cs typeface="Malgun Gothic"/>
+              </a:defRPr>
+            </a:pPr>
+            <a:r>
+              <a:rPr sz="3000" b="1">
+                <a:solidFill>
+                  <a:srgbClr val="15253E"/>
+                </a:solidFill>
+                <a:latin typeface="Malgun Gothic"/>
+                <a:ea typeface="Malgun Gothic"/>
+                <a:cs typeface="Malgun Gothic"/>
+              </a:rPr>
+              <a:t>Flarum Core를 건드리지 않아 롤백은 확장 하나로 끝납니다</a:t>
+            </a:r>
+          </a:p>
+        </p:txBody>
+      </p:sp>
+      <p:sp>
+        <p:nvSpPr>
+          <p:cNvPr id="2" name="page-7">
+            <a:extLst xmlns:a="http://schemas.openxmlformats.org/drawingml/2006/main">
+              <a:ext uri="{FF2B5EF4-FFF2-40B4-BE49-F238E27FC236}">
+                <a16:creationId xmlns:a16="http://schemas.microsoft.com/office/drawing/2014/main" id="{A3276DCC-0352-4CE1-B01D-E79903100583}"/>
+              </a:ext>
+            </a:extLst>
+          </p:cNvPr>
+          <p:cNvSpPr>
+            <a:spLocks xmlns:a="http://schemas.openxmlformats.org/drawingml/2006/main" noGrp="1"/>
+          </p:cNvSpPr>
+          <p:nvPr/>
+        </p:nvSpPr>
+        <p:spPr>
+          <a:xfrm xmlns:a="http://schemas.openxmlformats.org/drawingml/2006/main">
+            <a:off x="11163300" y="6286500"/>
+            <a:ext cx="571500" cy="228600"/>
           </a:xfrm>
           <a:prstGeom xmlns:a="http://schemas.openxmlformats.org/drawingml/2006/main" prst="rect">
             <a:avLst/>
@@ -6962,73 +7303,49 @@
           <a:bodyPr xmlns:a="http://schemas.openxmlformats.org/drawingml/2006/main"/>
           <a:lstStyle xmlns:a="http://schemas.openxmlformats.org/drawingml/2006/main"/>
           <a:p xmlns:a="http://schemas.openxmlformats.org/drawingml/2006/main">
-            <a:pPr algn="l">
-              <a:buNone/>
-              <a:defRPr sz="4800" b="1">
-                <a:solidFill>
-                  <a:srgbClr val="15253E"/>
-                </a:solidFill>
-                <a:latin typeface="Malgun Gothic"/>
-                <a:ea typeface="Malgun Gothic"/>
-                <a:cs typeface="Malgun Gothic"/>
-              </a:defRPr>
-            </a:pPr>
-            <a:r>
-              <a:rPr sz="4800" b="1">
-                <a:solidFill>
-                  <a:srgbClr val="15253E"/>
-                </a:solidFill>
-                <a:latin typeface="Malgun Gothic"/>
-                <a:ea typeface="Malgun Gothic"/>
-                <a:cs typeface="Malgun Gothic"/>
-              </a:rPr>
-              <a:t>운영 적용만</a:t>
-            </a:r>
-          </a:p>
-          <a:p xmlns:a="http://schemas.openxmlformats.org/drawingml/2006/main">
-            <a:pPr algn="l">
-              <a:buNone/>
-              <a:defRPr sz="4800" b="1">
-                <a:solidFill>
-                  <a:srgbClr val="15253E"/>
-                </a:solidFill>
-                <a:latin typeface="Malgun Gothic"/>
-                <a:ea typeface="Malgun Gothic"/>
-                <a:cs typeface="Malgun Gothic"/>
-              </a:defRPr>
-            </a:pPr>
-            <a:r>
-              <a:rPr sz="4800" b="1">
-                <a:solidFill>
-                  <a:srgbClr val="15253E"/>
-                </a:solidFill>
-                <a:latin typeface="Malgun Gothic"/>
-                <a:ea typeface="Malgun Gothic"/>
-                <a:cs typeface="Malgun Gothic"/>
-              </a:rPr>
-              <a:t>승인하면 됩니다</a:t>
-            </a:r>
-          </a:p>
-        </p:txBody>
-      </p:sp>
-      <p:sp>
-        <p:nvSpPr>
-          <p:cNvPr id="3" name="close-detail">
-            <a:extLst xmlns:a="http://schemas.openxmlformats.org/drawingml/2006/main">
-              <a:ext uri="{FF2B5EF4-FFF2-40B4-BE49-F238E27FC236}">
-                <a16:creationId xmlns:a16="http://schemas.microsoft.com/office/drawing/2014/main" id="{3D772DBD-5B75-4245-9BF5-B2A8A3AB8069}"/>
-              </a:ext>
-            </a:extLst>
-          </p:cNvPr>
-          <p:cNvSpPr>
-            <a:spLocks xmlns:a="http://schemas.openxmlformats.org/drawingml/2006/main" noGrp="1"/>
-          </p:cNvSpPr>
-          <p:nvPr/>
-        </p:nvSpPr>
-        <p:spPr>
-          <a:xfrm xmlns:a="http://schemas.openxmlformats.org/drawingml/2006/main">
-            <a:off x="457200" y="4019550"/>
-            <a:ext cx="7620000" cy="876300"/>
+            <a:pPr algn="r">
+              <a:buNone/>
+              <a:defRPr sz="1200" b="0">
+                <a:solidFill>
+                  <a:srgbClr val="52647D"/>
+                </a:solidFill>
+                <a:latin typeface="Malgun Gothic"/>
+                <a:ea typeface="Malgun Gothic"/>
+                <a:cs typeface="Malgun Gothic"/>
+              </a:defRPr>
+            </a:pPr>
+            <a:r>
+              <a:rPr sz="1200" b="0">
+                <a:solidFill>
+                  <a:srgbClr val="52647D"/>
+                </a:solidFill>
+                <a:latin typeface="Malgun Gothic"/>
+                <a:ea typeface="Malgun Gothic"/>
+                <a:cs typeface="Malgun Gothic"/>
+              </a:rPr>
+              <a:t>09</a:t>
+            </a:r>
+          </a:p>
+        </p:txBody>
+      </p:sp>
+      <p:sp>
+        <p:nvSpPr>
+          <p:cNvPr id="3" name="flow-arrow-1">
+            <a:extLst xmlns:a="http://schemas.openxmlformats.org/drawingml/2006/main">
+              <a:ext uri="{FF2B5EF4-FFF2-40B4-BE49-F238E27FC236}">
+                <a16:creationId xmlns:a16="http://schemas.microsoft.com/office/drawing/2014/main" id="{F33C0C86-C636-49E7-9EF3-AD3434C40404}"/>
+              </a:ext>
+            </a:extLst>
+          </p:cNvPr>
+          <p:cNvSpPr>
+            <a:spLocks xmlns:a="http://schemas.openxmlformats.org/drawingml/2006/main" noGrp="1"/>
+          </p:cNvSpPr>
+          <p:nvPr/>
+        </p:nvSpPr>
+        <p:spPr>
+          <a:xfrm xmlns:a="http://schemas.openxmlformats.org/drawingml/2006/main">
+            <a:off x="3848100" y="2724150"/>
+            <a:ext cx="762000" cy="476250"/>
           </a:xfrm>
           <a:prstGeom xmlns:a="http://schemas.openxmlformats.org/drawingml/2006/main" prst="rect">
             <a:avLst/>
@@ -7043,9 +7360,9 @@
           <a:bodyPr xmlns:a="http://schemas.openxmlformats.org/drawingml/2006/main"/>
           <a:lstStyle xmlns:a="http://schemas.openxmlformats.org/drawingml/2006/main"/>
           <a:p xmlns:a="http://schemas.openxmlformats.org/drawingml/2006/main">
-            <a:pPr algn="l">
-              <a:buNone/>
-              <a:defRPr sz="1950" b="0">
+            <a:pPr algn="ctr">
+              <a:buNone/>
+              <a:defRPr sz="2700" b="1">
                 <a:solidFill>
                   <a:srgbClr val="52647D"/>
                 </a:solidFill>
@@ -7055,7 +7372,7 @@
               </a:defRPr>
             </a:pPr>
             <a:r>
-              <a:rPr sz="1950" b="0">
+              <a:rPr sz="2700" b="1">
                 <a:solidFill>
                   <a:srgbClr val="52647D"/>
                 </a:solidFill>
@@ -7063,13 +7380,46 @@
                 <a:ea typeface="Malgun Gothic"/>
                 <a:cs typeface="Malgun Gothic"/>
               </a:rPr>
-              <a:t>WSL 전체 주기 PASS · 설정·보안 포함 직접 영문 0건</a:t>
-            </a:r>
-          </a:p>
-          <a:p xmlns:a="http://schemas.openxmlformats.org/drawingml/2006/main">
-            <a:pPr algn="l">
-              <a:buNone/>
-              <a:defRPr sz="1950" b="0">
+              <a:t>→</a:t>
+            </a:r>
+          </a:p>
+        </p:txBody>
+      </p:sp>
+      <p:sp>
+        <p:nvSpPr>
+          <p:cNvPr id="4" name="flow-arrow-2">
+            <a:extLst xmlns:a="http://schemas.openxmlformats.org/drawingml/2006/main">
+              <a:ext uri="{FF2B5EF4-FFF2-40B4-BE49-F238E27FC236}">
+                <a16:creationId xmlns:a16="http://schemas.microsoft.com/office/drawing/2014/main" id="{35F70949-AD48-4799-9CD4-E06EF4FA6024}"/>
+              </a:ext>
+            </a:extLst>
+          </p:cNvPr>
+          <p:cNvSpPr>
+            <a:spLocks xmlns:a="http://schemas.openxmlformats.org/drawingml/2006/main" noGrp="1"/>
+          </p:cNvSpPr>
+          <p:nvPr/>
+        </p:nvSpPr>
+        <p:spPr>
+          <a:xfrm xmlns:a="http://schemas.openxmlformats.org/drawingml/2006/main">
+            <a:off x="7581900" y="2724150"/>
+            <a:ext cx="762000" cy="476250"/>
+          </a:xfrm>
+          <a:prstGeom xmlns:a="http://schemas.openxmlformats.org/drawingml/2006/main" prst="rect">
+            <a:avLst/>
+          </a:prstGeom>
+          <a:noFill xmlns:a="http://schemas.openxmlformats.org/drawingml/2006/main"/>
+          <a:ln xmlns:a="http://schemas.openxmlformats.org/drawingml/2006/main" w="0">
+            <a:noFill/>
+            <a:prstDash val="solid"/>
+          </a:ln>
+        </p:spPr>
+        <p:txBody>
+          <a:bodyPr xmlns:a="http://schemas.openxmlformats.org/drawingml/2006/main"/>
+          <a:lstStyle xmlns:a="http://schemas.openxmlformats.org/drawingml/2006/main"/>
+          <a:p xmlns:a="http://schemas.openxmlformats.org/drawingml/2006/main">
+            <a:pPr algn="ctr">
+              <a:buNone/>
+              <a:defRPr sz="2700" b="1">
                 <a:solidFill>
                   <a:srgbClr val="52647D"/>
                 </a:solidFill>
@@ -7079,7 +7429,7 @@
               </a:defRPr>
             </a:pPr>
             <a:r>
-              <a:rPr sz="1950" b="0">
+              <a:rPr sz="2700" b="1">
                 <a:solidFill>
                   <a:srgbClr val="52647D"/>
                 </a:solidFill>
@@ -7087,33 +7437,68 @@
                 <a:ea typeface="Malgun Gothic"/>
                 <a:cs typeface="Malgun Gothic"/>
               </a:rPr>
-              <a:t>Core·Vendor·DB·운영 Community 변경 없음</a:t>
-            </a:r>
-          </a:p>
-        </p:txBody>
-      </p:sp>
-      <p:sp>
-        <p:nvSpPr>
-          <p:cNvPr id="4" name="close-status">
-            <a:extLst xmlns:a="http://schemas.openxmlformats.org/drawingml/2006/main">
-              <a:ext uri="{FF2B5EF4-FFF2-40B4-BE49-F238E27FC236}">
-                <a16:creationId xmlns:a16="http://schemas.microsoft.com/office/drawing/2014/main" id="{3160D9BC-7118-4FD3-AAD9-2144E7A4C4D7}"/>
-              </a:ext>
-            </a:extLst>
-          </p:cNvPr>
-          <p:cNvSpPr>
-            <a:spLocks xmlns:a="http://schemas.openxmlformats.org/drawingml/2006/main" noGrp="1"/>
-          </p:cNvSpPr>
-          <p:nvPr/>
-        </p:nvSpPr>
-        <p:spPr>
-          <a:xfrm xmlns:a="http://schemas.openxmlformats.org/drawingml/2006/main">
-            <a:off x="8572500" y="1657350"/>
-            <a:ext cx="2952750" cy="2952750"/>
+              <a:t>→</a:t>
+            </a:r>
+          </a:p>
+        </p:txBody>
+      </p:sp>
+      <p:sp>
+        <p:nvSpPr>
+          <p:cNvPr id="5" name="flarum-core">
+            <a:extLst xmlns:a="http://schemas.openxmlformats.org/drawingml/2006/main">
+              <a:ext uri="{FF2B5EF4-FFF2-40B4-BE49-F238E27FC236}">
+                <a16:creationId xmlns:a16="http://schemas.microsoft.com/office/drawing/2014/main" id="{2D23B9C7-BD3C-4600-BA89-78668692D407}"/>
+              </a:ext>
+            </a:extLst>
+          </p:cNvPr>
+          <p:cNvSpPr>
+            <a:spLocks xmlns:a="http://schemas.openxmlformats.org/drawingml/2006/main" noGrp="1"/>
+          </p:cNvSpPr>
+          <p:nvPr/>
+        </p:nvSpPr>
+        <p:spPr>
+          <a:xfrm xmlns:a="http://schemas.openxmlformats.org/drawingml/2006/main">
+            <a:off x="666750" y="2076450"/>
+            <a:ext cx="3143250" cy="1809750"/>
           </a:xfrm>
           <a:prstGeom xmlns:a="http://schemas.openxmlformats.org/drawingml/2006/main" prst="roundRect">
             <a:avLst>
-              <a:gd name="adj" fmla="val 2581"/>
+              <a:gd name="adj" fmla="val 4211"/>
+            </a:avLst>
+          </a:prstGeom>
+          <a:solidFill xmlns:a="http://schemas.openxmlformats.org/drawingml/2006/main">
+            <a:srgbClr val="F3F7FC"/>
+          </a:solidFill>
+          <a:ln xmlns:a="http://schemas.openxmlformats.org/drawingml/2006/main" w="9525">
+            <a:solidFill>
+              <a:srgbClr val="D5E1F1"/>
+            </a:solidFill>
+            <a:prstDash val="solid"/>
+          </a:ln>
+        </p:spPr>
+      </p:sp>
+      <p:sp>
+        <p:nvSpPr>
+          <p:cNvPr id="6" name="theme-extension">
+            <a:extLst xmlns:a="http://schemas.openxmlformats.org/drawingml/2006/main">
+              <a:ext uri="{FF2B5EF4-FFF2-40B4-BE49-F238E27FC236}">
+                <a16:creationId xmlns:a16="http://schemas.microsoft.com/office/drawing/2014/main" id="{66F5027A-7FA7-413F-B51E-8043D0948B2C}"/>
+              </a:ext>
+            </a:extLst>
+          </p:cNvPr>
+          <p:cNvSpPr>
+            <a:spLocks xmlns:a="http://schemas.openxmlformats.org/drawingml/2006/main" noGrp="1"/>
+          </p:cNvSpPr>
+          <p:nvPr/>
+        </p:nvSpPr>
+        <p:spPr>
+          <a:xfrm xmlns:a="http://schemas.openxmlformats.org/drawingml/2006/main">
+            <a:off x="4572000" y="2076450"/>
+            <a:ext cx="2971800" cy="1809750"/>
+          </a:xfrm>
+          <a:prstGeom xmlns:a="http://schemas.openxmlformats.org/drawingml/2006/main" prst="roundRect">
+            <a:avLst>
+              <a:gd name="adj" fmla="val 4211"/>
             </a:avLst>
           </a:prstGeom>
           <a:solidFill xmlns:a="http://schemas.openxmlformats.org/drawingml/2006/main">
@@ -7129,22 +7514,57 @@
       </p:sp>
       <p:sp>
         <p:nvSpPr>
-          <p:cNvPr id="5" name="close-go">
-            <a:extLst xmlns:a="http://schemas.openxmlformats.org/drawingml/2006/main">
-              <a:ext uri="{FF2B5EF4-FFF2-40B4-BE49-F238E27FC236}">
-                <a16:creationId xmlns:a16="http://schemas.microsoft.com/office/drawing/2014/main" id="{29CF402C-9E70-4B3D-8FED-4FBB431FACD2}"/>
-              </a:ext>
-            </a:extLst>
-          </p:cNvPr>
-          <p:cNvSpPr>
-            <a:spLocks xmlns:a="http://schemas.openxmlformats.org/drawingml/2006/main" noGrp="1"/>
-          </p:cNvSpPr>
-          <p:nvPr/>
-        </p:nvSpPr>
-        <p:spPr>
-          <a:xfrm xmlns:a="http://schemas.openxmlformats.org/drawingml/2006/main">
-            <a:off x="8896350" y="2305050"/>
-            <a:ext cx="2305050" cy="895350"/>
+          <p:cNvPr id="7" name="community-ui">
+            <a:extLst xmlns:a="http://schemas.openxmlformats.org/drawingml/2006/main">
+              <a:ext uri="{FF2B5EF4-FFF2-40B4-BE49-F238E27FC236}">
+                <a16:creationId xmlns:a16="http://schemas.microsoft.com/office/drawing/2014/main" id="{E7F3E4DE-3896-4972-B8F1-AF6C18CFFA99}"/>
+              </a:ext>
+            </a:extLst>
+          </p:cNvPr>
+          <p:cNvSpPr>
+            <a:spLocks xmlns:a="http://schemas.openxmlformats.org/drawingml/2006/main" noGrp="1"/>
+          </p:cNvSpPr>
+          <p:nvPr/>
+        </p:nvSpPr>
+        <p:spPr>
+          <a:xfrm xmlns:a="http://schemas.openxmlformats.org/drawingml/2006/main">
+            <a:off x="8305800" y="2076450"/>
+            <a:ext cx="3143250" cy="1809750"/>
+          </a:xfrm>
+          <a:prstGeom xmlns:a="http://schemas.openxmlformats.org/drawingml/2006/main" prst="roundRect">
+            <a:avLst>
+              <a:gd name="adj" fmla="val 4211"/>
+            </a:avLst>
+          </a:prstGeom>
+          <a:solidFill xmlns:a="http://schemas.openxmlformats.org/drawingml/2006/main">
+            <a:srgbClr val="EAFAF2"/>
+          </a:solidFill>
+          <a:ln xmlns:a="http://schemas.openxmlformats.org/drawingml/2006/main" w="9525">
+            <a:solidFill>
+              <a:srgbClr val="86D2AA"/>
+            </a:solidFill>
+            <a:prstDash val="solid"/>
+          </a:ln>
+        </p:spPr>
+      </p:sp>
+      <p:sp>
+        <p:nvSpPr>
+          <p:cNvPr id="8" name="flarum-core-title">
+            <a:extLst xmlns:a="http://schemas.openxmlformats.org/drawingml/2006/main">
+              <a:ext uri="{FF2B5EF4-FFF2-40B4-BE49-F238E27FC236}">
+                <a16:creationId xmlns:a16="http://schemas.microsoft.com/office/drawing/2014/main" id="{0136A85B-5961-4FFA-8B8D-5B294E1A0C1F}"/>
+              </a:ext>
+            </a:extLst>
+          </p:cNvPr>
+          <p:cNvSpPr>
+            <a:spLocks xmlns:a="http://schemas.openxmlformats.org/drawingml/2006/main" noGrp="1"/>
+          </p:cNvSpPr>
+          <p:nvPr/>
+        </p:nvSpPr>
+        <p:spPr>
+          <a:xfrm xmlns:a="http://schemas.openxmlformats.org/drawingml/2006/main">
+            <a:off x="933450" y="2533650"/>
+            <a:ext cx="2609850" cy="457200"/>
           </a:xfrm>
           <a:prstGeom xmlns:a="http://schemas.openxmlformats.org/drawingml/2006/main" prst="rect">
             <a:avLst/>
@@ -7161,47 +7581,47 @@
           <a:p xmlns:a="http://schemas.openxmlformats.org/drawingml/2006/main">
             <a:pPr algn="ctr">
               <a:buNone/>
-              <a:defRPr sz="5100" b="1">
-                <a:solidFill>
-                  <a:srgbClr val="155EEF"/>
-                </a:solidFill>
-                <a:latin typeface="Malgun Gothic"/>
-                <a:ea typeface="Malgun Gothic"/>
-                <a:cs typeface="Malgun Gothic"/>
-              </a:defRPr>
-            </a:pPr>
-            <a:r>
-              <a:rPr sz="5100" b="1">
-                <a:solidFill>
-                  <a:srgbClr val="155EEF"/>
-                </a:solidFill>
-                <a:latin typeface="Malgun Gothic"/>
-                <a:ea typeface="Malgun Gothic"/>
-                <a:cs typeface="Malgun Gothic"/>
-              </a:rPr>
-              <a:t>GO</a:t>
-            </a:r>
-          </a:p>
-        </p:txBody>
-      </p:sp>
-      <p:sp>
-        <p:nvSpPr>
-          <p:cNvPr id="6" name="close-condition">
-            <a:extLst xmlns:a="http://schemas.openxmlformats.org/drawingml/2006/main">
-              <a:ext uri="{FF2B5EF4-FFF2-40B4-BE49-F238E27FC236}">
-                <a16:creationId xmlns:a16="http://schemas.microsoft.com/office/drawing/2014/main" id="{150AAE78-1296-4BC4-BA13-17A897DFABDF}"/>
-              </a:ext>
-            </a:extLst>
-          </p:cNvPr>
-          <p:cNvSpPr>
-            <a:spLocks xmlns:a="http://schemas.openxmlformats.org/drawingml/2006/main" noGrp="1"/>
-          </p:cNvSpPr>
-          <p:nvPr/>
-        </p:nvSpPr>
-        <p:spPr>
-          <a:xfrm xmlns:a="http://schemas.openxmlformats.org/drawingml/2006/main">
-            <a:off x="8877300" y="3390900"/>
-            <a:ext cx="2343150" cy="533400"/>
+              <a:defRPr sz="2250" b="1">
+                <a:solidFill>
+                  <a:srgbClr val="15253E"/>
+                </a:solidFill>
+                <a:latin typeface="Malgun Gothic"/>
+                <a:ea typeface="Malgun Gothic"/>
+                <a:cs typeface="Malgun Gothic"/>
+              </a:defRPr>
+            </a:pPr>
+            <a:r>
+              <a:rPr sz="2250" b="1">
+                <a:solidFill>
+                  <a:srgbClr val="15253E"/>
+                </a:solidFill>
+                <a:latin typeface="Malgun Gothic"/>
+                <a:ea typeface="Malgun Gothic"/>
+                <a:cs typeface="Malgun Gothic"/>
+              </a:rPr>
+              <a:t>Flarum 1.8.18</a:t>
+            </a:r>
+          </a:p>
+        </p:txBody>
+      </p:sp>
+      <p:sp>
+        <p:nvSpPr>
+          <p:cNvPr id="9" name="flarum-core-copy">
+            <a:extLst xmlns:a="http://schemas.openxmlformats.org/drawingml/2006/main">
+              <a:ext uri="{FF2B5EF4-FFF2-40B4-BE49-F238E27FC236}">
+                <a16:creationId xmlns:a16="http://schemas.microsoft.com/office/drawing/2014/main" id="{E7DB7EDB-905C-43D0-890F-80D3946E2991}"/>
+              </a:ext>
+            </a:extLst>
+          </p:cNvPr>
+          <p:cNvSpPr>
+            <a:spLocks xmlns:a="http://schemas.openxmlformats.org/drawingml/2006/main" noGrp="1"/>
+          </p:cNvSpPr>
+          <p:nvPr/>
+        </p:nvSpPr>
+        <p:spPr>
+          <a:xfrm xmlns:a="http://schemas.openxmlformats.org/drawingml/2006/main">
+            <a:off x="933450" y="3105150"/>
+            <a:ext cx="2609850" cy="323850"/>
           </a:xfrm>
           <a:prstGeom xmlns:a="http://schemas.openxmlformats.org/drawingml/2006/main" prst="rect">
             <a:avLst/>
@@ -7218,47 +7638,47 @@
           <a:p xmlns:a="http://schemas.openxmlformats.org/drawingml/2006/main">
             <a:pPr algn="ctr">
               <a:buNone/>
-              <a:defRPr sz="1650" b="1">
-                <a:solidFill>
-                  <a:srgbClr val="15253E"/>
-                </a:solidFill>
-                <a:latin typeface="Malgun Gothic"/>
-                <a:ea typeface="Malgun Gothic"/>
-                <a:cs typeface="Malgun Gothic"/>
-              </a:defRPr>
-            </a:pPr>
-            <a:r>
-              <a:rPr sz="1650" b="1">
-                <a:solidFill>
-                  <a:srgbClr val="15253E"/>
-                </a:solidFill>
-                <a:latin typeface="Malgun Gothic"/>
-                <a:ea typeface="Malgun Gothic"/>
-                <a:cs typeface="Malgun Gothic"/>
-              </a:rPr>
-              <a:t>운영 반영 승인 대기</a:t>
-            </a:r>
-          </a:p>
-        </p:txBody>
-      </p:sp>
-      <p:sp>
-        <p:nvSpPr>
-          <p:cNvPr id="7" name="close-next">
-            <a:extLst xmlns:a="http://schemas.openxmlformats.org/drawingml/2006/main">
-              <a:ext uri="{FF2B5EF4-FFF2-40B4-BE49-F238E27FC236}">
-                <a16:creationId xmlns:a16="http://schemas.microsoft.com/office/drawing/2014/main" id="{7FF57361-4F99-46E5-8A10-2C2F456C0F78}"/>
-              </a:ext>
-            </a:extLst>
-          </p:cNvPr>
-          <p:cNvSpPr>
-            <a:spLocks xmlns:a="http://schemas.openxmlformats.org/drawingml/2006/main" noGrp="1"/>
-          </p:cNvSpPr>
-          <p:nvPr/>
-        </p:nvSpPr>
-        <p:spPr>
-          <a:xfrm xmlns:a="http://schemas.openxmlformats.org/drawingml/2006/main">
-            <a:off x="457200" y="5562600"/>
-            <a:ext cx="10668000" cy="457200"/>
+              <a:defRPr sz="1500" b="0">
+                <a:solidFill>
+                  <a:srgbClr val="52647D"/>
+                </a:solidFill>
+                <a:latin typeface="Malgun Gothic"/>
+                <a:ea typeface="Malgun Gothic"/>
+                <a:cs typeface="Malgun Gothic"/>
+              </a:defRPr>
+            </a:pPr>
+            <a:r>
+              <a:rPr sz="1500" b="0">
+                <a:solidFill>
+                  <a:srgbClr val="52647D"/>
+                </a:solidFill>
+                <a:latin typeface="Malgun Gothic"/>
+                <a:ea typeface="Malgun Gothic"/>
+                <a:cs typeface="Malgun Gothic"/>
+              </a:rPr>
+              <a:t>라우팅 · 권한 · 검색 · 작성</a:t>
+            </a:r>
+          </a:p>
+        </p:txBody>
+      </p:sp>
+      <p:sp>
+        <p:nvSpPr>
+          <p:cNvPr id="10" name="theme-title">
+            <a:extLst xmlns:a="http://schemas.openxmlformats.org/drawingml/2006/main">
+              <a:ext uri="{FF2B5EF4-FFF2-40B4-BE49-F238E27FC236}">
+                <a16:creationId xmlns:a16="http://schemas.microsoft.com/office/drawing/2014/main" id="{DBD93488-5F1B-4674-80CA-8AF64A4024CD}"/>
+              </a:ext>
+            </a:extLst>
+          </p:cNvPr>
+          <p:cNvSpPr>
+            <a:spLocks xmlns:a="http://schemas.openxmlformats.org/drawingml/2006/main" noGrp="1"/>
+          </p:cNvSpPr>
+          <p:nvPr/>
+        </p:nvSpPr>
+        <p:spPr>
+          <a:xfrm xmlns:a="http://schemas.openxmlformats.org/drawingml/2006/main">
+            <a:off x="4819650" y="2362200"/>
+            <a:ext cx="2476500" cy="742950"/>
           </a:xfrm>
           <a:prstGeom xmlns:a="http://schemas.openxmlformats.org/drawingml/2006/main" prst="rect">
             <a:avLst/>
@@ -7273,9 +7693,147 @@
           <a:bodyPr xmlns:a="http://schemas.openxmlformats.org/drawingml/2006/main"/>
           <a:lstStyle xmlns:a="http://schemas.openxmlformats.org/drawingml/2006/main"/>
           <a:p xmlns:a="http://schemas.openxmlformats.org/drawingml/2006/main">
-            <a:pPr algn="l">
-              <a:buNone/>
-              <a:defRPr sz="1725" b="1">
+            <a:pPr algn="ctr">
+              <a:buNone/>
+              <a:defRPr sz="2175" b="1">
+                <a:solidFill>
+                  <a:srgbClr val="155EEF"/>
+                </a:solidFill>
+                <a:latin typeface="Malgun Gothic"/>
+                <a:ea typeface="Malgun Gothic"/>
+                <a:cs typeface="Malgun Gothic"/>
+              </a:defRPr>
+            </a:pPr>
+            <a:r>
+              <a:rPr sz="2175" b="1">
+                <a:solidFill>
+                  <a:srgbClr val="155EEF"/>
+                </a:solidFill>
+                <a:latin typeface="Malgun Gothic"/>
+                <a:ea typeface="Malgun Gothic"/>
+                <a:cs typeface="Malgun Gothic"/>
+              </a:rPr>
+              <a:t>ABLESTACK</a:t>
+            </a:r>
+          </a:p>
+          <a:p xmlns:a="http://schemas.openxmlformats.org/drawingml/2006/main">
+            <a:pPr algn="ctr">
+              <a:buNone/>
+              <a:defRPr sz="2175" b="1">
+                <a:solidFill>
+                  <a:srgbClr val="155EEF"/>
+                </a:solidFill>
+                <a:latin typeface="Malgun Gothic"/>
+                <a:ea typeface="Malgun Gothic"/>
+                <a:cs typeface="Malgun Gothic"/>
+              </a:defRPr>
+            </a:pPr>
+            <a:r>
+              <a:rPr sz="2175" b="1">
+                <a:solidFill>
+                  <a:srgbClr val="155EEF"/>
+                </a:solidFill>
+                <a:latin typeface="Malgun Gothic"/>
+                <a:ea typeface="Malgun Gothic"/>
+                <a:cs typeface="Malgun Gothic"/>
+              </a:rPr>
+              <a:t>Theme</a:t>
+            </a:r>
+          </a:p>
+        </p:txBody>
+      </p:sp>
+      <p:sp>
+        <p:nvSpPr>
+          <p:cNvPr id="11" name="theme-copy">
+            <a:extLst xmlns:a="http://schemas.openxmlformats.org/drawingml/2006/main">
+              <a:ext uri="{FF2B5EF4-FFF2-40B4-BE49-F238E27FC236}">
+                <a16:creationId xmlns:a16="http://schemas.microsoft.com/office/drawing/2014/main" id="{C8B03E0C-FD83-420F-AF7B-3F7089B47394}"/>
+              </a:ext>
+            </a:extLst>
+          </p:cNvPr>
+          <p:cNvSpPr>
+            <a:spLocks xmlns:a="http://schemas.openxmlformats.org/drawingml/2006/main" noGrp="1"/>
+          </p:cNvSpPr>
+          <p:nvPr/>
+        </p:nvSpPr>
+        <p:spPr>
+          <a:xfrm xmlns:a="http://schemas.openxmlformats.org/drawingml/2006/main">
+            <a:off x="4819650" y="3257550"/>
+            <a:ext cx="2476500" cy="323850"/>
+          </a:xfrm>
+          <a:prstGeom xmlns:a="http://schemas.openxmlformats.org/drawingml/2006/main" prst="rect">
+            <a:avLst/>
+          </a:prstGeom>
+          <a:noFill xmlns:a="http://schemas.openxmlformats.org/drawingml/2006/main"/>
+          <a:ln xmlns:a="http://schemas.openxmlformats.org/drawingml/2006/main" w="0">
+            <a:noFill/>
+            <a:prstDash val="solid"/>
+          </a:ln>
+        </p:spPr>
+        <p:txBody>
+          <a:bodyPr xmlns:a="http://schemas.openxmlformats.org/drawingml/2006/main"/>
+          <a:lstStyle xmlns:a="http://schemas.openxmlformats.org/drawingml/2006/main"/>
+          <a:p xmlns:a="http://schemas.openxmlformats.org/drawingml/2006/main">
+            <a:pPr algn="ctr">
+              <a:buNone/>
+              <a:defRPr sz="1350" b="0">
+                <a:solidFill>
+                  <a:srgbClr val="52647D"/>
+                </a:solidFill>
+                <a:latin typeface="Malgun Gothic"/>
+                <a:ea typeface="Malgun Gothic"/>
+                <a:cs typeface="Malgun Gothic"/>
+              </a:defRPr>
+            </a:pPr>
+            <a:r>
+              <a:rPr sz="1350" b="0">
+                <a:solidFill>
+                  <a:srgbClr val="52647D"/>
+                </a:solidFill>
+                <a:latin typeface="Malgun Gothic"/>
+                <a:ea typeface="Malgun Gothic"/>
+                <a:cs typeface="Malgun Gothic"/>
+              </a:rPr>
+              <a:t>LESS · 한글 Cache · 상태 표시</a:t>
+            </a:r>
+          </a:p>
+        </p:txBody>
+      </p:sp>
+      <p:sp>
+        <p:nvSpPr>
+          <p:cNvPr id="12" name="ui-title">
+            <a:extLst xmlns:a="http://schemas.openxmlformats.org/drawingml/2006/main">
+              <a:ext uri="{FF2B5EF4-FFF2-40B4-BE49-F238E27FC236}">
+                <a16:creationId xmlns:a16="http://schemas.microsoft.com/office/drawing/2014/main" id="{37B98FC2-7DDE-45BF-B2BF-AA8E8A3D4DE8}"/>
+              </a:ext>
+            </a:extLst>
+          </p:cNvPr>
+          <p:cNvSpPr>
+            <a:spLocks xmlns:a="http://schemas.openxmlformats.org/drawingml/2006/main" noGrp="1"/>
+          </p:cNvSpPr>
+          <p:nvPr/>
+        </p:nvSpPr>
+        <p:spPr>
+          <a:xfrm xmlns:a="http://schemas.openxmlformats.org/drawingml/2006/main">
+            <a:off x="8572500" y="2533650"/>
+            <a:ext cx="2609850" cy="457200"/>
+          </a:xfrm>
+          <a:prstGeom xmlns:a="http://schemas.openxmlformats.org/drawingml/2006/main" prst="rect">
+            <a:avLst/>
+          </a:prstGeom>
+          <a:noFill xmlns:a="http://schemas.openxmlformats.org/drawingml/2006/main"/>
+          <a:ln xmlns:a="http://schemas.openxmlformats.org/drawingml/2006/main" w="0">
+            <a:noFill/>
+            <a:prstDash val="solid"/>
+          </a:ln>
+        </p:spPr>
+        <p:txBody>
+          <a:bodyPr xmlns:a="http://schemas.openxmlformats.org/drawingml/2006/main"/>
+          <a:lstStyle xmlns:a="http://schemas.openxmlformats.org/drawingml/2006/main"/>
+          <a:p xmlns:a="http://schemas.openxmlformats.org/drawingml/2006/main">
+            <a:pPr algn="ctr">
+              <a:buNone/>
+              <a:defRPr sz="2250" b="1">
                 <a:solidFill>
                   <a:srgbClr val="078248"/>
                 </a:solidFill>
@@ -7285,7 +7843,7 @@
               </a:defRPr>
             </a:pPr>
             <a:r>
-              <a:rPr sz="1725" b="1">
+              <a:rPr sz="2250" b="1">
                 <a:solidFill>
                   <a:srgbClr val="078248"/>
                 </a:solidFill>
@@ -7293,7 +7851,156 @@
                 <a:ea typeface="Malgun Gothic"/>
                 <a:cs typeface="Malgun Gothic"/>
               </a:rPr>
-              <a:t>다음: 백업 → 테마 적용 → Desktop/Mobile Smoke → 해시 비교</a:t>
+              <a:t>Community UI</a:t>
+            </a:r>
+          </a:p>
+        </p:txBody>
+      </p:sp>
+      <p:sp>
+        <p:nvSpPr>
+          <p:cNvPr id="13" name="ui-copy">
+            <a:extLst xmlns:a="http://schemas.openxmlformats.org/drawingml/2006/main">
+              <a:ext uri="{FF2B5EF4-FFF2-40B4-BE49-F238E27FC236}">
+                <a16:creationId xmlns:a16="http://schemas.microsoft.com/office/drawing/2014/main" id="{3B149A4F-0659-480B-9329-13D669118779}"/>
+              </a:ext>
+            </a:extLst>
+          </p:cNvPr>
+          <p:cNvSpPr>
+            <a:spLocks xmlns:a="http://schemas.openxmlformats.org/drawingml/2006/main" noGrp="1"/>
+          </p:cNvSpPr>
+          <p:nvPr/>
+        </p:nvSpPr>
+        <p:spPr>
+          <a:xfrm xmlns:a="http://schemas.openxmlformats.org/drawingml/2006/main">
+            <a:off x="8572500" y="3105150"/>
+            <a:ext cx="2609850" cy="323850"/>
+          </a:xfrm>
+          <a:prstGeom xmlns:a="http://schemas.openxmlformats.org/drawingml/2006/main" prst="rect">
+            <a:avLst/>
+          </a:prstGeom>
+          <a:noFill xmlns:a="http://schemas.openxmlformats.org/drawingml/2006/main"/>
+          <a:ln xmlns:a="http://schemas.openxmlformats.org/drawingml/2006/main" w="0">
+            <a:noFill/>
+            <a:prstDash val="solid"/>
+          </a:ln>
+        </p:spPr>
+        <p:txBody>
+          <a:bodyPr xmlns:a="http://schemas.openxmlformats.org/drawingml/2006/main"/>
+          <a:lstStyle xmlns:a="http://schemas.openxmlformats.org/drawingml/2006/main"/>
+          <a:p xmlns:a="http://schemas.openxmlformats.org/drawingml/2006/main">
+            <a:pPr algn="ctr">
+              <a:buNone/>
+              <a:defRPr sz="1500" b="0">
+                <a:solidFill>
+                  <a:srgbClr val="52647D"/>
+                </a:solidFill>
+                <a:latin typeface="Malgun Gothic"/>
+                <a:ea typeface="Malgun Gothic"/>
+                <a:cs typeface="Malgun Gothic"/>
+              </a:defRPr>
+            </a:pPr>
+            <a:r>
+              <a:rPr sz="1500" b="0">
+                <a:solidFill>
+                  <a:srgbClr val="52647D"/>
+                </a:solidFill>
+                <a:latin typeface="Malgun Gothic"/>
+                <a:ea typeface="Malgun Gothic"/>
+                <a:cs typeface="Malgun Gothic"/>
+              </a:rPr>
+              <a:t>Desktop · Mobile · Accessibility</a:t>
+            </a:r>
+          </a:p>
+        </p:txBody>
+      </p:sp>
+      <p:sp>
+        <p:nvSpPr>
+          <p:cNvPr id="14" name="rollback-strip">
+            <a:extLst xmlns:a="http://schemas.openxmlformats.org/drawingml/2006/main">
+              <a:ext uri="{FF2B5EF4-FFF2-40B4-BE49-F238E27FC236}">
+                <a16:creationId xmlns:a16="http://schemas.microsoft.com/office/drawing/2014/main" id="{1329660C-7BA4-47F6-B431-662F73A2D12C}"/>
+              </a:ext>
+            </a:extLst>
+          </p:cNvPr>
+          <p:cNvSpPr>
+            <a:spLocks xmlns:a="http://schemas.openxmlformats.org/drawingml/2006/main" noGrp="1"/>
+          </p:cNvSpPr>
+          <p:nvPr/>
+        </p:nvSpPr>
+        <p:spPr>
+          <a:xfrm xmlns:a="http://schemas.openxmlformats.org/drawingml/2006/main">
+            <a:off x="2381250" y="4781550"/>
+            <a:ext cx="7429500" cy="838200"/>
+          </a:xfrm>
+          <a:prstGeom xmlns:a="http://schemas.openxmlformats.org/drawingml/2006/main" prst="roundRect">
+            <a:avLst>
+              <a:gd name="adj" fmla="val 9091"/>
+            </a:avLst>
+          </a:prstGeom>
+          <a:solidFill xmlns:a="http://schemas.openxmlformats.org/drawingml/2006/main">
+            <a:srgbClr val="FFF6DF"/>
+          </a:solidFill>
+          <a:ln xmlns:a="http://schemas.openxmlformats.org/drawingml/2006/main" w="9525">
+            <a:solidFill>
+              <a:srgbClr val="E4B955"/>
+            </a:solidFill>
+            <a:prstDash val="solid"/>
+          </a:ln>
+        </p:spPr>
+      </p:sp>
+      <p:sp>
+        <p:nvSpPr>
+          <p:cNvPr id="15" name="rollback-copy">
+            <a:extLst xmlns:a="http://schemas.openxmlformats.org/drawingml/2006/main">
+              <a:ext uri="{FF2B5EF4-FFF2-40B4-BE49-F238E27FC236}">
+                <a16:creationId xmlns:a16="http://schemas.microsoft.com/office/drawing/2014/main" id="{29AD88B8-B664-4F55-9D04-7AE25E4B8A59}"/>
+              </a:ext>
+            </a:extLst>
+          </p:cNvPr>
+          <p:cNvSpPr>
+            <a:spLocks xmlns:a="http://schemas.openxmlformats.org/drawingml/2006/main" noGrp="1"/>
+          </p:cNvSpPr>
+          <p:nvPr/>
+        </p:nvSpPr>
+        <p:spPr>
+          <a:xfrm xmlns:a="http://schemas.openxmlformats.org/drawingml/2006/main">
+            <a:off x="2686050" y="4991100"/>
+            <a:ext cx="6819900" cy="400050"/>
+          </a:xfrm>
+          <a:prstGeom xmlns:a="http://schemas.openxmlformats.org/drawingml/2006/main" prst="rect">
+            <a:avLst/>
+          </a:prstGeom>
+          <a:noFill xmlns:a="http://schemas.openxmlformats.org/drawingml/2006/main"/>
+          <a:ln xmlns:a="http://schemas.openxmlformats.org/drawingml/2006/main" w="0">
+            <a:noFill/>
+            <a:prstDash val="solid"/>
+          </a:ln>
+        </p:spPr>
+        <p:txBody>
+          <a:bodyPr xmlns:a="http://schemas.openxmlformats.org/drawingml/2006/main"/>
+          <a:lstStyle xmlns:a="http://schemas.openxmlformats.org/drawingml/2006/main"/>
+          <a:p xmlns:a="http://schemas.openxmlformats.org/drawingml/2006/main">
+            <a:pPr algn="ctr">
+              <a:buNone/>
+              <a:defRPr sz="1950" b="1">
+                <a:solidFill>
+                  <a:srgbClr val="9A6700"/>
+                </a:solidFill>
+                <a:latin typeface="Malgun Gothic"/>
+                <a:ea typeface="Malgun Gothic"/>
+                <a:cs typeface="Malgun Gothic"/>
+              </a:defRPr>
+            </a:pPr>
+            <a:r>
+              <a:rPr sz="1950" b="1">
+                <a:solidFill>
+                  <a:srgbClr val="9A6700"/>
+                </a:solidFill>
+                <a:latin typeface="Malgun Gothic"/>
+                <a:ea typeface="Malgun Gothic"/>
+                <a:cs typeface="Malgun Gothic"/>
+              </a:rPr>
+              <a:t>장애 시 extension:disable → 기본 Flarum UI 복귀</a:t>
             </a:r>
           </a:p>
         </p:txBody>
@@ -7301,7 +8008,7 @@
     </p:spTree>
     <p:extLst>
       <p:ext uri="{BB962C8B-B14F-4D97-AF65-F5344CB8AC3E}">
-        <p14:creationId xmlns:p14="http://schemas.microsoft.com/office/powerpoint/2010/main" val="674511522"/>
+        <p14:creationId xmlns:p14="http://schemas.microsoft.com/office/powerpoint/2010/main" val="1960291864"/>
       </p:ext>
     </p:extLst>
   </p:cSld>

--- a/output/presentation/techflow-community-ui-modernization.pptx
+++ b/output/presentation/techflow-community-ui-modernization.pptx
@@ -2,22 +2,22 @@
 <file path=ppt/presentation.xml><?xml version="1.0" encoding="utf-8"?>
 <p:presentation xmlns:p="http://schemas.openxmlformats.org/presentationml/2006/main">
   <p:sldMasterIdLst>
-    <p:sldMasterId xmlns:r="http://schemas.openxmlformats.org/officeDocument/2006/relationships" id="2147483648" r:id="R7db422df728f478a"/>
+    <p:sldMasterId xmlns:r="http://schemas.openxmlformats.org/officeDocument/2006/relationships" id="2147483648" r:id="Re28256fed2fd4433"/>
   </p:sldMasterIdLst>
   <p:notesMasterIdLst>
-    <p:notesMasterId xmlns:r="http://schemas.openxmlformats.org/officeDocument/2006/relationships" r:id="R0960b126cd00472f"/>
+    <p:notesMasterId xmlns:r="http://schemas.openxmlformats.org/officeDocument/2006/relationships" r:id="Rd83297cf3d714436"/>
   </p:notesMasterIdLst>
   <p:sldIdLst>
-    <p:sldId xmlns:r="http://schemas.openxmlformats.org/officeDocument/2006/relationships" id="256" r:id="R26d068967cce4fb4"/>
-    <p:sldId xmlns:r="http://schemas.openxmlformats.org/officeDocument/2006/relationships" id="257" r:id="R06461a7dbb924376"/>
-    <p:sldId xmlns:r="http://schemas.openxmlformats.org/officeDocument/2006/relationships" id="258" r:id="R0df35c2f5b0b4544"/>
-    <p:sldId xmlns:r="http://schemas.openxmlformats.org/officeDocument/2006/relationships" id="259" r:id="R374877f046074225"/>
-    <p:sldId xmlns:r="http://schemas.openxmlformats.org/officeDocument/2006/relationships" id="260" r:id="R582f93c1881a437f"/>
-    <p:sldId xmlns:r="http://schemas.openxmlformats.org/officeDocument/2006/relationships" id="261" r:id="R50f0ee913cc44329"/>
-    <p:sldId xmlns:r="http://schemas.openxmlformats.org/officeDocument/2006/relationships" id="262" r:id="R35088a03d5f143c5"/>
-    <p:sldId xmlns:r="http://schemas.openxmlformats.org/officeDocument/2006/relationships" id="263" r:id="R7a79459ba2694839"/>
-    <p:sldId xmlns:r="http://schemas.openxmlformats.org/officeDocument/2006/relationships" id="264" r:id="R9d2c6c782c27478b"/>
-    <p:sldId xmlns:r="http://schemas.openxmlformats.org/officeDocument/2006/relationships" id="265" r:id="R7fda2b10ebaf408c"/>
+    <p:sldId xmlns:r="http://schemas.openxmlformats.org/officeDocument/2006/relationships" id="256" r:id="R2ef9808c0832444c"/>
+    <p:sldId xmlns:r="http://schemas.openxmlformats.org/officeDocument/2006/relationships" id="257" r:id="R0bf4653d89694c5c"/>
+    <p:sldId xmlns:r="http://schemas.openxmlformats.org/officeDocument/2006/relationships" id="258" r:id="R86cc6d5d17af416b"/>
+    <p:sldId xmlns:r="http://schemas.openxmlformats.org/officeDocument/2006/relationships" id="259" r:id="R9ef85d4e6ca144c4"/>
+    <p:sldId xmlns:r="http://schemas.openxmlformats.org/officeDocument/2006/relationships" id="260" r:id="Ra67a4fcaec834343"/>
+    <p:sldId xmlns:r="http://schemas.openxmlformats.org/officeDocument/2006/relationships" id="261" r:id="R43ec01329edf4c04"/>
+    <p:sldId xmlns:r="http://schemas.openxmlformats.org/officeDocument/2006/relationships" id="262" r:id="Rb51ffe74a32440c4"/>
+    <p:sldId xmlns:r="http://schemas.openxmlformats.org/officeDocument/2006/relationships" id="263" r:id="R2a7b33579c564e27"/>
+    <p:sldId xmlns:r="http://schemas.openxmlformats.org/officeDocument/2006/relationships" id="264" r:id="R6e65bc2964ca44d3"/>
+    <p:sldId xmlns:r="http://schemas.openxmlformats.org/officeDocument/2006/relationships" id="265" r:id="R376053102cd4487d"/>
   </p:sldIdLst>
   <p:sldSz cx="12192000" cy="6858000"/>
   <p:notesSz cx="6858000" cy="9144000"/>
@@ -1349,7 +1349,7 @@
   </p:cSld>
   <p:clrMap bg1="lt1" tx1="dk1" bg2="lt2" tx2="dk2" accent1="accent1" accent2="accent2" accent3="accent3" accent4="accent4" accent5="accent5" accent6="accent6" hlink="hlink" folHlink="folHlink"/>
   <p:sldLayoutIdLst>
-    <p:sldLayoutId xmlns:r="http://schemas.openxmlformats.org/officeDocument/2006/relationships" id="2147483649" r:id="R14412500c26e4139"/>
+    <p:sldLayoutId xmlns:r="http://schemas.openxmlformats.org/officeDocument/2006/relationships" id="2147483649" r:id="Rf70e38ab41794488"/>
   </p:sldLayoutIdLst>
   <p:txStyles>
     <p:titleStyle>
@@ -2134,7 +2134,7 @@
           <p:nvPr/>
         </p:nvPicPr>
         <p:blipFill>
-          <a:blip xmlns:r="http://schemas.openxmlformats.org/officeDocument/2006/relationships" xmlns:a="http://schemas.openxmlformats.org/drawingml/2006/main" r:embed="Re730d171d35f48c4"/>
+          <a:blip xmlns:r="http://schemas.openxmlformats.org/officeDocument/2006/relationships" xmlns:a="http://schemas.openxmlformats.org/drawingml/2006/main" r:embed="R4ddfb0e8ef284776"/>
           <a:stretch xmlns:a="http://schemas.openxmlformats.org/drawingml/2006/main"/>
         </p:blipFill>
         <p:spPr>
@@ -2926,7 +2926,7 @@
           <p:nvPr/>
         </p:nvPicPr>
         <p:blipFill>
-          <a:blip xmlns:r="http://schemas.openxmlformats.org/officeDocument/2006/relationships" xmlns:a="http://schemas.openxmlformats.org/drawingml/2006/main" r:embed="R811f5a32f9d047d2"/>
+          <a:blip xmlns:r="http://schemas.openxmlformats.org/officeDocument/2006/relationships" xmlns:a="http://schemas.openxmlformats.org/drawingml/2006/main" r:embed="R5723e9f9a9ae46b2"/>
           <a:stretch xmlns:a="http://schemas.openxmlformats.org/drawingml/2006/main"/>
         </p:blipFill>
         <p:spPr>
@@ -2950,7 +2950,7 @@
           <p:nvPr/>
         </p:nvPicPr>
         <p:blipFill>
-          <a:blip xmlns:r="http://schemas.openxmlformats.org/officeDocument/2006/relationships" xmlns:a="http://schemas.openxmlformats.org/drawingml/2006/main" r:embed="R683557e4d6a5448c"/>
+          <a:blip xmlns:r="http://schemas.openxmlformats.org/officeDocument/2006/relationships" xmlns:a="http://schemas.openxmlformats.org/drawingml/2006/main" r:embed="R052c4a1681914faf"/>
           <a:stretch xmlns:a="http://schemas.openxmlformats.org/drawingml/2006/main"/>
         </p:blipFill>
         <p:spPr>
@@ -3970,7 +3970,7 @@
           <p:nvPr/>
         </p:nvPicPr>
         <p:blipFill>
-          <a:blip xmlns:r="http://schemas.openxmlformats.org/officeDocument/2006/relationships" xmlns:a="http://schemas.openxmlformats.org/drawingml/2006/main" r:embed="R2ebcfacbe4cb4af5"/>
+          <a:blip xmlns:r="http://schemas.openxmlformats.org/officeDocument/2006/relationships" xmlns:a="http://schemas.openxmlformats.org/drawingml/2006/main" r:embed="R5430c362d0994903"/>
           <a:stretch xmlns:a="http://schemas.openxmlformats.org/drawingml/2006/main"/>
         </p:blipFill>
         <p:spPr>
@@ -3994,7 +3994,7 @@
           <p:nvPr/>
         </p:nvPicPr>
         <p:blipFill>
-          <a:blip xmlns:r="http://schemas.openxmlformats.org/officeDocument/2006/relationships" xmlns:a="http://schemas.openxmlformats.org/drawingml/2006/main" r:embed="Re6b7930988364404"/>
+          <a:blip xmlns:r="http://schemas.openxmlformats.org/officeDocument/2006/relationships" xmlns:a="http://schemas.openxmlformats.org/drawingml/2006/main" r:embed="R9f1bbb8d76b44b05"/>
           <a:stretch xmlns:a="http://schemas.openxmlformats.org/drawingml/2006/main"/>
         </p:blipFill>
         <p:spPr>
@@ -4367,7 +4367,7 @@
           <p:nvPr/>
         </p:nvPicPr>
         <p:blipFill>
-          <a:blip xmlns:r="http://schemas.openxmlformats.org/officeDocument/2006/relationships" xmlns:a="http://schemas.openxmlformats.org/drawingml/2006/main" r:embed="R23c80cfbd0f64f1e"/>
+          <a:blip xmlns:r="http://schemas.openxmlformats.org/officeDocument/2006/relationships" xmlns:a="http://schemas.openxmlformats.org/drawingml/2006/main" r:embed="R659996087eb04fb4"/>
           <a:stretch xmlns:a="http://schemas.openxmlformats.org/drawingml/2006/main"/>
         </p:blipFill>
         <p:spPr>
@@ -4985,7 +4985,7 @@
           <p:nvPr/>
         </p:nvPicPr>
         <p:blipFill>
-          <a:blip xmlns:r="http://schemas.openxmlformats.org/officeDocument/2006/relationships" xmlns:a="http://schemas.openxmlformats.org/drawingml/2006/main" r:embed="Rd33cab9055e04d27"/>
+          <a:blip xmlns:r="http://schemas.openxmlformats.org/officeDocument/2006/relationships" xmlns:a="http://schemas.openxmlformats.org/drawingml/2006/main" r:embed="Rd369a969f65042fa"/>
           <a:stretch xmlns:a="http://schemas.openxmlformats.org/drawingml/2006/main"/>
         </p:blipFill>
         <p:spPr>
@@ -5601,7 +5601,7 @@
           <p:nvPr/>
         </p:nvPicPr>
         <p:blipFill>
-          <a:blip xmlns:r="http://schemas.openxmlformats.org/officeDocument/2006/relationships" xmlns:a="http://schemas.openxmlformats.org/drawingml/2006/main" r:embed="R49c8ed85e6e24bf8"/>
+          <a:blip xmlns:r="http://schemas.openxmlformats.org/officeDocument/2006/relationships" xmlns:a="http://schemas.openxmlformats.org/drawingml/2006/main" r:embed="R6a8b987270744855"/>
           <a:stretch xmlns:a="http://schemas.openxmlformats.org/drawingml/2006/main"/>
         </p:blipFill>
         <p:spPr>

--- a/output/presentation/techflow-community-ui-modernization.pptx
+++ b/output/presentation/techflow-community-ui-modernization.pptx
@@ -2,22 +2,22 @@
 <file path=ppt/presentation.xml><?xml version="1.0" encoding="utf-8"?>
 <p:presentation xmlns:p="http://schemas.openxmlformats.org/presentationml/2006/main">
   <p:sldMasterIdLst>
-    <p:sldMasterId xmlns:r="http://schemas.openxmlformats.org/officeDocument/2006/relationships" id="2147483648" r:id="Re28256fed2fd4433"/>
+    <p:sldMasterId xmlns:r="http://schemas.openxmlformats.org/officeDocument/2006/relationships" id="2147483648" r:id="Rc0a1012876f74a02"/>
   </p:sldMasterIdLst>
   <p:notesMasterIdLst>
-    <p:notesMasterId xmlns:r="http://schemas.openxmlformats.org/officeDocument/2006/relationships" r:id="Rd83297cf3d714436"/>
+    <p:notesMasterId xmlns:r="http://schemas.openxmlformats.org/officeDocument/2006/relationships" r:id="R09537e89205a475c"/>
   </p:notesMasterIdLst>
   <p:sldIdLst>
-    <p:sldId xmlns:r="http://schemas.openxmlformats.org/officeDocument/2006/relationships" id="256" r:id="R2ef9808c0832444c"/>
-    <p:sldId xmlns:r="http://schemas.openxmlformats.org/officeDocument/2006/relationships" id="257" r:id="R0bf4653d89694c5c"/>
-    <p:sldId xmlns:r="http://schemas.openxmlformats.org/officeDocument/2006/relationships" id="258" r:id="R86cc6d5d17af416b"/>
-    <p:sldId xmlns:r="http://schemas.openxmlformats.org/officeDocument/2006/relationships" id="259" r:id="R9ef85d4e6ca144c4"/>
-    <p:sldId xmlns:r="http://schemas.openxmlformats.org/officeDocument/2006/relationships" id="260" r:id="Ra67a4fcaec834343"/>
-    <p:sldId xmlns:r="http://schemas.openxmlformats.org/officeDocument/2006/relationships" id="261" r:id="R43ec01329edf4c04"/>
-    <p:sldId xmlns:r="http://schemas.openxmlformats.org/officeDocument/2006/relationships" id="262" r:id="Rb51ffe74a32440c4"/>
-    <p:sldId xmlns:r="http://schemas.openxmlformats.org/officeDocument/2006/relationships" id="263" r:id="R2a7b33579c564e27"/>
-    <p:sldId xmlns:r="http://schemas.openxmlformats.org/officeDocument/2006/relationships" id="264" r:id="R6e65bc2964ca44d3"/>
-    <p:sldId xmlns:r="http://schemas.openxmlformats.org/officeDocument/2006/relationships" id="265" r:id="R376053102cd4487d"/>
+    <p:sldId xmlns:r="http://schemas.openxmlformats.org/officeDocument/2006/relationships" id="256" r:id="R6f5f761318f84ead"/>
+    <p:sldId xmlns:r="http://schemas.openxmlformats.org/officeDocument/2006/relationships" id="257" r:id="R87d8c1a1de6f4f3f"/>
+    <p:sldId xmlns:r="http://schemas.openxmlformats.org/officeDocument/2006/relationships" id="258" r:id="R28ebe28a0b4b40d8"/>
+    <p:sldId xmlns:r="http://schemas.openxmlformats.org/officeDocument/2006/relationships" id="259" r:id="Ra70bf6bf2ff04f25"/>
+    <p:sldId xmlns:r="http://schemas.openxmlformats.org/officeDocument/2006/relationships" id="260" r:id="Rbf3d42721cb049ba"/>
+    <p:sldId xmlns:r="http://schemas.openxmlformats.org/officeDocument/2006/relationships" id="261" r:id="R5b87b23ec7da4e09"/>
+    <p:sldId xmlns:r="http://schemas.openxmlformats.org/officeDocument/2006/relationships" id="262" r:id="Ra01236f2f4be4a56"/>
+    <p:sldId xmlns:r="http://schemas.openxmlformats.org/officeDocument/2006/relationships" id="263" r:id="R5694f46df98d4d89"/>
+    <p:sldId xmlns:r="http://schemas.openxmlformats.org/officeDocument/2006/relationships" id="264" r:id="Rfff52b38055a4ad4"/>
+    <p:sldId xmlns:r="http://schemas.openxmlformats.org/officeDocument/2006/relationships" id="265" r:id="R29af5c0cf98f4619"/>
   </p:sldIdLst>
   <p:sldSz cx="12192000" cy="6858000"/>
   <p:notesSz cx="6858000" cy="9144000"/>
@@ -1349,7 +1349,7 @@
   </p:cSld>
   <p:clrMap bg1="lt1" tx1="dk1" bg2="lt2" tx2="dk2" accent1="accent1" accent2="accent2" accent3="accent3" accent4="accent4" accent5="accent5" accent6="accent6" hlink="hlink" folHlink="folHlink"/>
   <p:sldLayoutIdLst>
-    <p:sldLayoutId xmlns:r="http://schemas.openxmlformats.org/officeDocument/2006/relationships" id="2147483649" r:id="Rf70e38ab41794488"/>
+    <p:sldLayoutId xmlns:r="http://schemas.openxmlformats.org/officeDocument/2006/relationships" id="2147483649" r:id="R1fb6da3c51434911"/>
   </p:sldLayoutIdLst>
   <p:txStyles>
     <p:titleStyle>
@@ -2134,18 +2134,16 @@
           <p:nvPr/>
         </p:nvPicPr>
         <p:blipFill>
-          <a:blip xmlns:r="http://schemas.openxmlformats.org/officeDocument/2006/relationships" xmlns:a="http://schemas.openxmlformats.org/drawingml/2006/main" r:embed="R4ddfb0e8ef284776"/>
+          <a:blip xmlns:r="http://schemas.openxmlformats.org/officeDocument/2006/relationships" xmlns:a="http://schemas.openxmlformats.org/drawingml/2006/main" r:embed="R948f363f16224dcb"/>
           <a:stretch xmlns:a="http://schemas.openxmlformats.org/drawingml/2006/main"/>
         </p:blipFill>
         <p:spPr>
-          <a:xfrm xmlns:a="http://schemas.openxmlformats.org/drawingml/2006/main">
+          <a:xfrm xmlns:a="http://schemas.openxmlformats.org/drawingml/2006/main" flipH="0" flipV="0">
             <a:off x="6438900" y="1632347"/>
             <a:ext cx="5048250" cy="3155156"/>
           </a:xfrm>
           <a:prstGeom xmlns:a="http://schemas.openxmlformats.org/drawingml/2006/main" prst="roundRect">
-            <a:avLst>
-              <a:gd name="adj" fmla="val 2281"/>
-            </a:avLst>
+            <a:avLst/>
           </a:prstGeom>
         </p:spPr>
       </p:pic>
@@ -2425,7 +2423,7 @@
                 <a:ea typeface="Malgun Gothic"/>
                 <a:cs typeface="Malgun Gothic"/>
               </a:rPr>
-              <a:t>WSL 전체 주기 PASS · 태그·날짜·아이콘 포함 직접 영문 0건</a:t>
+              <a:t>WSL 전체 주기 PASS · 헤더 5개 항목 44px 정렬 · 신고·알림 아이콘 표시</a:t>
             </a:r>
           </a:p>
           <a:p xmlns:a="http://schemas.openxmlformats.org/drawingml/2006/main">
@@ -2926,7 +2924,7 @@
           <p:nvPr/>
         </p:nvPicPr>
         <p:blipFill>
-          <a:blip xmlns:r="http://schemas.openxmlformats.org/officeDocument/2006/relationships" xmlns:a="http://schemas.openxmlformats.org/drawingml/2006/main" r:embed="R5723e9f9a9ae46b2"/>
+          <a:blip xmlns:r="http://schemas.openxmlformats.org/officeDocument/2006/relationships" xmlns:a="http://schemas.openxmlformats.org/drawingml/2006/main" r:embed="Raba9bfd57bbf4702"/>
           <a:stretch xmlns:a="http://schemas.openxmlformats.org/drawingml/2006/main"/>
         </p:blipFill>
         <p:spPr>
@@ -2950,7 +2948,7 @@
           <p:nvPr/>
         </p:nvPicPr>
         <p:blipFill>
-          <a:blip xmlns:r="http://schemas.openxmlformats.org/officeDocument/2006/relationships" xmlns:a="http://schemas.openxmlformats.org/drawingml/2006/main" r:embed="R052c4a1681914faf"/>
+          <a:blip xmlns:r="http://schemas.openxmlformats.org/officeDocument/2006/relationships" xmlns:a="http://schemas.openxmlformats.org/drawingml/2006/main" r:embed="R5d3a26c0d08849fb"/>
           <a:stretch xmlns:a="http://schemas.openxmlformats.org/drawingml/2006/main"/>
         </p:blipFill>
         <p:spPr>
@@ -3970,7 +3968,7 @@
           <p:nvPr/>
         </p:nvPicPr>
         <p:blipFill>
-          <a:blip xmlns:r="http://schemas.openxmlformats.org/officeDocument/2006/relationships" xmlns:a="http://schemas.openxmlformats.org/drawingml/2006/main" r:embed="R5430c362d0994903"/>
+          <a:blip xmlns:r="http://schemas.openxmlformats.org/officeDocument/2006/relationships" xmlns:a="http://schemas.openxmlformats.org/drawingml/2006/main" r:embed="R231e6aab645549e9"/>
           <a:stretch xmlns:a="http://schemas.openxmlformats.org/drawingml/2006/main"/>
         </p:blipFill>
         <p:spPr>
@@ -3994,7 +3992,7 @@
           <p:nvPr/>
         </p:nvPicPr>
         <p:blipFill>
-          <a:blip xmlns:r="http://schemas.openxmlformats.org/officeDocument/2006/relationships" xmlns:a="http://schemas.openxmlformats.org/drawingml/2006/main" r:embed="R9f1bbb8d76b44b05"/>
+          <a:blip xmlns:r="http://schemas.openxmlformats.org/officeDocument/2006/relationships" xmlns:a="http://schemas.openxmlformats.org/drawingml/2006/main" r:embed="R4cb4473d79ea4f69"/>
           <a:stretch xmlns:a="http://schemas.openxmlformats.org/drawingml/2006/main"/>
         </p:blipFill>
         <p:spPr>
@@ -4367,7 +4365,7 @@
           <p:nvPr/>
         </p:nvPicPr>
         <p:blipFill>
-          <a:blip xmlns:r="http://schemas.openxmlformats.org/officeDocument/2006/relationships" xmlns:a="http://schemas.openxmlformats.org/drawingml/2006/main" r:embed="R659996087eb04fb4"/>
+          <a:blip xmlns:r="http://schemas.openxmlformats.org/officeDocument/2006/relationships" xmlns:a="http://schemas.openxmlformats.org/drawingml/2006/main" r:embed="R45b7dfd8faec437a"/>
           <a:stretch xmlns:a="http://schemas.openxmlformats.org/drawingml/2006/main"/>
         </p:blipFill>
         <p:spPr>
@@ -4985,7 +4983,7 @@
           <p:nvPr/>
         </p:nvPicPr>
         <p:blipFill>
-          <a:blip xmlns:r="http://schemas.openxmlformats.org/officeDocument/2006/relationships" xmlns:a="http://schemas.openxmlformats.org/drawingml/2006/main" r:embed="Rd369a969f65042fa"/>
+          <a:blip xmlns:r="http://schemas.openxmlformats.org/officeDocument/2006/relationships" xmlns:a="http://schemas.openxmlformats.org/drawingml/2006/main" r:embed="R053b4449f60647c1"/>
           <a:stretch xmlns:a="http://schemas.openxmlformats.org/drawingml/2006/main"/>
         </p:blipFill>
         <p:spPr>
@@ -5601,7 +5599,7 @@
           <p:nvPr/>
         </p:nvPicPr>
         <p:blipFill>
-          <a:blip xmlns:r="http://schemas.openxmlformats.org/officeDocument/2006/relationships" xmlns:a="http://schemas.openxmlformats.org/drawingml/2006/main" r:embed="R6a8b987270744855"/>
+          <a:blip xmlns:r="http://schemas.openxmlformats.org/officeDocument/2006/relationships" xmlns:a="http://schemas.openxmlformats.org/drawingml/2006/main" r:embed="Rd892e131d29041c9"/>
           <a:stretch xmlns:a="http://schemas.openxmlformats.org/drawingml/2006/main"/>
         </p:blipFill>
         <p:spPr>
@@ -7180,7 +7178,7 @@
                 <a:ea typeface="Malgun Gothic"/>
                 <a:cs typeface="Malgun Gothic"/>
               </a:rPr>
-              <a:t>콘텐츠 SHA-256 동일 · 첨부 SHA-256 동일 · 정적 계약 8/8</a:t>
+              <a:t>콘텐츠 SHA-256 동일 · 첨부 SHA-256 동일 · 정적 계약 10/10</a:t>
             </a:r>
           </a:p>
         </p:txBody>

--- a/output/presentation/techflow-community-ui-modernization.pptx
+++ b/output/presentation/techflow-community-ui-modernization.pptx
@@ -2,22 +2,22 @@
 <file path=ppt/presentation.xml><?xml version="1.0" encoding="utf-8"?>
 <p:presentation xmlns:p="http://schemas.openxmlformats.org/presentationml/2006/main">
   <p:sldMasterIdLst>
-    <p:sldMasterId xmlns:r="http://schemas.openxmlformats.org/officeDocument/2006/relationships" id="2147483648" r:id="Rc0a1012876f74a02"/>
+    <p:sldMasterId xmlns:r="http://schemas.openxmlformats.org/officeDocument/2006/relationships" id="2147483648" r:id="R66c41340626646f0"/>
   </p:sldMasterIdLst>
   <p:notesMasterIdLst>
-    <p:notesMasterId xmlns:r="http://schemas.openxmlformats.org/officeDocument/2006/relationships" r:id="R09537e89205a475c"/>
+    <p:notesMasterId xmlns:r="http://schemas.openxmlformats.org/officeDocument/2006/relationships" r:id="Rb371bacbbbe34996"/>
   </p:notesMasterIdLst>
   <p:sldIdLst>
-    <p:sldId xmlns:r="http://schemas.openxmlformats.org/officeDocument/2006/relationships" id="256" r:id="R6f5f761318f84ead"/>
-    <p:sldId xmlns:r="http://schemas.openxmlformats.org/officeDocument/2006/relationships" id="257" r:id="R87d8c1a1de6f4f3f"/>
-    <p:sldId xmlns:r="http://schemas.openxmlformats.org/officeDocument/2006/relationships" id="258" r:id="R28ebe28a0b4b40d8"/>
-    <p:sldId xmlns:r="http://schemas.openxmlformats.org/officeDocument/2006/relationships" id="259" r:id="Ra70bf6bf2ff04f25"/>
-    <p:sldId xmlns:r="http://schemas.openxmlformats.org/officeDocument/2006/relationships" id="260" r:id="Rbf3d42721cb049ba"/>
-    <p:sldId xmlns:r="http://schemas.openxmlformats.org/officeDocument/2006/relationships" id="261" r:id="R5b87b23ec7da4e09"/>
-    <p:sldId xmlns:r="http://schemas.openxmlformats.org/officeDocument/2006/relationships" id="262" r:id="Ra01236f2f4be4a56"/>
-    <p:sldId xmlns:r="http://schemas.openxmlformats.org/officeDocument/2006/relationships" id="263" r:id="R5694f46df98d4d89"/>
-    <p:sldId xmlns:r="http://schemas.openxmlformats.org/officeDocument/2006/relationships" id="264" r:id="Rfff52b38055a4ad4"/>
-    <p:sldId xmlns:r="http://schemas.openxmlformats.org/officeDocument/2006/relationships" id="265" r:id="R29af5c0cf98f4619"/>
+    <p:sldId xmlns:r="http://schemas.openxmlformats.org/officeDocument/2006/relationships" id="256" r:id="R421f4a0087934b19"/>
+    <p:sldId xmlns:r="http://schemas.openxmlformats.org/officeDocument/2006/relationships" id="257" r:id="R6fae06355a9a4f1b"/>
+    <p:sldId xmlns:r="http://schemas.openxmlformats.org/officeDocument/2006/relationships" id="258" r:id="Ra46b688f408449b6"/>
+    <p:sldId xmlns:r="http://schemas.openxmlformats.org/officeDocument/2006/relationships" id="259" r:id="Rbe0ec6b4f5e741e7"/>
+    <p:sldId xmlns:r="http://schemas.openxmlformats.org/officeDocument/2006/relationships" id="260" r:id="Reb1ce01b5a8d41b4"/>
+    <p:sldId xmlns:r="http://schemas.openxmlformats.org/officeDocument/2006/relationships" id="261" r:id="Rd33476dba3494d92"/>
+    <p:sldId xmlns:r="http://schemas.openxmlformats.org/officeDocument/2006/relationships" id="262" r:id="R8083cb7c0dd7439c"/>
+    <p:sldId xmlns:r="http://schemas.openxmlformats.org/officeDocument/2006/relationships" id="263" r:id="R79b2276e9ae9480e"/>
+    <p:sldId xmlns:r="http://schemas.openxmlformats.org/officeDocument/2006/relationships" id="264" r:id="Rb7ef19d013ac48b2"/>
+    <p:sldId xmlns:r="http://schemas.openxmlformats.org/officeDocument/2006/relationships" id="265" r:id="Re94c627166174200"/>
   </p:sldIdLst>
   <p:sldSz cx="12192000" cy="6858000"/>
   <p:notesSz cx="6858000" cy="9144000"/>
@@ -1349,7 +1349,7 @@
   </p:cSld>
   <p:clrMap bg1="lt1" tx1="dk1" bg2="lt2" tx2="dk2" accent1="accent1" accent2="accent2" accent3="accent3" accent4="accent4" accent5="accent5" accent6="accent6" hlink="hlink" folHlink="folHlink"/>
   <p:sldLayoutIdLst>
-    <p:sldLayoutId xmlns:r="http://schemas.openxmlformats.org/officeDocument/2006/relationships" id="2147483649" r:id="R1fb6da3c51434911"/>
+    <p:sldLayoutId xmlns:r="http://schemas.openxmlformats.org/officeDocument/2006/relationships" id="2147483649" r:id="R958c5ff59c6a48c3"/>
   </p:sldLayoutIdLst>
   <p:txStyles>
     <p:titleStyle>
@@ -1900,7 +1900,7 @@
           <p:cNvPr id="7" name="cover-kicker">
             <a:extLst xmlns:a="http://schemas.openxmlformats.org/drawingml/2006/main">
               <a:ext uri="{FF2B5EF4-FFF2-40B4-BE49-F238E27FC236}">
-                <a16:creationId xmlns:a16="http://schemas.microsoft.com/office/drawing/2014/main" id="{EA28F31F-48A4-4EAA-A5AB-984238044BE1}"/>
+                <a16:creationId xmlns:a16="http://schemas.microsoft.com/office/drawing/2014/main" id="{0831942A-4FA7-4197-A56B-40BC47816EC1}"/>
               </a:ext>
             </a:extLst>
           </p:cNvPr>
@@ -1928,7 +1928,6 @@
           <a:lstStyle xmlns:a="http://schemas.openxmlformats.org/drawingml/2006/main"/>
           <a:p xmlns:a="http://schemas.openxmlformats.org/drawingml/2006/main">
             <a:pPr algn="l">
-              <a:buNone/>
               <a:defRPr sz="1500" b="1">
                 <a:solidFill>
                   <a:srgbClr val="52647D"/>
@@ -1957,7 +1956,7 @@
           <p:cNvPr id="2" name="cover-title">
             <a:extLst xmlns:a="http://schemas.openxmlformats.org/drawingml/2006/main">
               <a:ext uri="{FF2B5EF4-FFF2-40B4-BE49-F238E27FC236}">
-                <a16:creationId xmlns:a16="http://schemas.microsoft.com/office/drawing/2014/main" id="{AC38D8EA-556D-4E19-9373-999A5CFEA394}"/>
+                <a16:creationId xmlns:a16="http://schemas.microsoft.com/office/drawing/2014/main" id="{B2B3D133-9D8B-4A5F-9808-CB8019391A6D}"/>
               </a:ext>
             </a:extLst>
           </p:cNvPr>
@@ -1985,7 +1984,6 @@
           <a:lstStyle xmlns:a="http://schemas.openxmlformats.org/drawingml/2006/main"/>
           <a:p xmlns:a="http://schemas.openxmlformats.org/drawingml/2006/main">
             <a:pPr algn="l">
-              <a:buNone/>
               <a:defRPr sz="4650" b="1">
                 <a:solidFill>
                   <a:srgbClr val="15253E"/>
@@ -2009,7 +2007,6 @@
           </a:p>
           <a:p xmlns:a="http://schemas.openxmlformats.org/drawingml/2006/main">
             <a:pPr algn="l">
-              <a:buNone/>
               <a:defRPr sz="4650" b="1">
                 <a:solidFill>
                   <a:srgbClr val="15253E"/>
@@ -2038,7 +2035,7 @@
           <p:cNvPr id="3" name="cover-subtitle">
             <a:extLst xmlns:a="http://schemas.openxmlformats.org/drawingml/2006/main">
               <a:ext uri="{FF2B5EF4-FFF2-40B4-BE49-F238E27FC236}">
-                <a16:creationId xmlns:a16="http://schemas.microsoft.com/office/drawing/2014/main" id="{FE5FDCE8-FD06-4B45-8C0D-AAD47D24E672}"/>
+                <a16:creationId xmlns:a16="http://schemas.microsoft.com/office/drawing/2014/main" id="{15411666-89E7-4925-B585-5B787DF3DEE1}"/>
               </a:ext>
             </a:extLst>
           </p:cNvPr>
@@ -2066,7 +2063,6 @@
           <a:lstStyle xmlns:a="http://schemas.openxmlformats.org/drawingml/2006/main"/>
           <a:p xmlns:a="http://schemas.openxmlformats.org/drawingml/2006/main">
             <a:pPr algn="l">
-              <a:buNone/>
               <a:defRPr sz="1950" b="0">
                 <a:solidFill>
                   <a:srgbClr val="52647D"/>
@@ -2095,7 +2091,7 @@
           <p:cNvPr id="4" name="cover-image-frame">
             <a:extLst xmlns:a="http://schemas.openxmlformats.org/drawingml/2006/main">
               <a:ext uri="{FF2B5EF4-FFF2-40B4-BE49-F238E27FC236}">
-                <a16:creationId xmlns:a16="http://schemas.microsoft.com/office/drawing/2014/main" id="{AA2838ED-043E-4EDE-9BEF-65EE8A40445F}"/>
+                <a16:creationId xmlns:a16="http://schemas.microsoft.com/office/drawing/2014/main" id="{E40F805C-6C35-48CA-AA6E-7B4D4B811604}"/>
               </a:ext>
             </a:extLst>
           </p:cNvPr>
@@ -2127,23 +2123,25 @@
       </p:sp>
       <p:pic>
         <p:nvPicPr>
-          <p:cNvPr id="13" name=""/>
+          <p:cNvPr id="11" name=""/>
           <p:cNvPicPr>
             <a:picLocks xmlns:a="http://schemas.openxmlformats.org/drawingml/2006/main" noChangeAspect="1"/>
           </p:cNvPicPr>
           <p:nvPr/>
         </p:nvPicPr>
         <p:blipFill>
-          <a:blip xmlns:r="http://schemas.openxmlformats.org/officeDocument/2006/relationships" xmlns:a="http://schemas.openxmlformats.org/drawingml/2006/main" r:embed="R948f363f16224dcb"/>
+          <a:blip xmlns:r="http://schemas.openxmlformats.org/officeDocument/2006/relationships" xmlns:a="http://schemas.openxmlformats.org/drawingml/2006/main" r:embed="R5a6aad62ff9a46ae"/>
           <a:stretch xmlns:a="http://schemas.openxmlformats.org/drawingml/2006/main"/>
         </p:blipFill>
         <p:spPr>
-          <a:xfrm xmlns:a="http://schemas.openxmlformats.org/drawingml/2006/main" flipH="0" flipV="0">
+          <a:xfrm xmlns:a="http://schemas.openxmlformats.org/drawingml/2006/main">
             <a:off x="6438900" y="1632347"/>
             <a:ext cx="5048250" cy="3155156"/>
           </a:xfrm>
           <a:prstGeom xmlns:a="http://schemas.openxmlformats.org/drawingml/2006/main" prst="roundRect">
-            <a:avLst/>
+            <a:avLst>
+              <a:gd name="adj" fmla="val 2281"/>
+            </a:avLst>
           </a:prstGeom>
         </p:spPr>
       </p:pic>
@@ -2152,7 +2150,7 @@
           <p:cNvPr id="6" name="cover-status">
             <a:extLst xmlns:a="http://schemas.openxmlformats.org/drawingml/2006/main">
               <a:ext uri="{FF2B5EF4-FFF2-40B4-BE49-F238E27FC236}">
-                <a16:creationId xmlns:a16="http://schemas.microsoft.com/office/drawing/2014/main" id="{3ABA49B2-2460-4A09-8C44-69F4387885B7}"/>
+                <a16:creationId xmlns:a16="http://schemas.microsoft.com/office/drawing/2014/main" id="{24564B8F-0972-465A-85E1-8F6E98AF493D}"/>
               </a:ext>
             </a:extLst>
           </p:cNvPr>
@@ -2180,7 +2178,6 @@
           <a:lstStyle xmlns:a="http://schemas.openxmlformats.org/drawingml/2006/main"/>
           <a:p xmlns:a="http://schemas.openxmlformats.org/drawingml/2006/main">
             <a:pPr algn="l">
-              <a:buNone/>
               <a:defRPr sz="1800" b="1">
                 <a:solidFill>
                   <a:srgbClr val="155EEF"/>
@@ -2207,7 +2204,7 @@
     </p:spTree>
     <p:extLst>
       <p:ext uri="{BB962C8B-B14F-4D97-AF65-F5344CB8AC3E}">
-        <p14:creationId xmlns:p14="http://schemas.microsoft.com/office/powerpoint/2010/main" val="159873576"/>
+        <p14:creationId xmlns:p14="http://schemas.microsoft.com/office/powerpoint/2010/main" val="108750241"/>
       </p:ext>
     </p:extLst>
   </p:cSld>
@@ -2238,7 +2235,7 @@
           <p:cNvPr id="8" name="close-kicker">
             <a:extLst xmlns:a="http://schemas.openxmlformats.org/drawingml/2006/main">
               <a:ext uri="{FF2B5EF4-FFF2-40B4-BE49-F238E27FC236}">
-                <a16:creationId xmlns:a16="http://schemas.microsoft.com/office/drawing/2014/main" id="{CA02A572-4AC9-4737-B75D-10EC7C22C06C}"/>
+                <a16:creationId xmlns:a16="http://schemas.microsoft.com/office/drawing/2014/main" id="{C4BC1143-FD1A-4C80-83A4-A9C23E41BC43}"/>
               </a:ext>
             </a:extLst>
           </p:cNvPr>
@@ -2266,7 +2263,6 @@
           <a:lstStyle xmlns:a="http://schemas.openxmlformats.org/drawingml/2006/main"/>
           <a:p xmlns:a="http://schemas.openxmlformats.org/drawingml/2006/main">
             <a:pPr algn="l">
-              <a:buNone/>
               <a:defRPr sz="1500" b="1">
                 <a:solidFill>
                   <a:srgbClr val="52647D"/>
@@ -2295,7 +2291,7 @@
           <p:cNvPr id="2" name="close-title">
             <a:extLst xmlns:a="http://schemas.openxmlformats.org/drawingml/2006/main">
               <a:ext uri="{FF2B5EF4-FFF2-40B4-BE49-F238E27FC236}">
-                <a16:creationId xmlns:a16="http://schemas.microsoft.com/office/drawing/2014/main" id="{F5C154A0-B755-42E9-9F79-7921475EF0CD}"/>
+                <a16:creationId xmlns:a16="http://schemas.microsoft.com/office/drawing/2014/main" id="{BA5B4900-D447-4AF4-8DEF-DDF414498DC4}"/>
               </a:ext>
             </a:extLst>
           </p:cNvPr>
@@ -2323,7 +2319,6 @@
           <a:lstStyle xmlns:a="http://schemas.openxmlformats.org/drawingml/2006/main"/>
           <a:p xmlns:a="http://schemas.openxmlformats.org/drawingml/2006/main">
             <a:pPr algn="l">
-              <a:buNone/>
               <a:defRPr sz="4800" b="1">
                 <a:solidFill>
                   <a:srgbClr val="15253E"/>
@@ -2347,7 +2342,6 @@
           </a:p>
           <a:p xmlns:a="http://schemas.openxmlformats.org/drawingml/2006/main">
             <a:pPr algn="l">
-              <a:buNone/>
               <a:defRPr sz="4800" b="1">
                 <a:solidFill>
                   <a:srgbClr val="15253E"/>
@@ -2376,7 +2370,7 @@
           <p:cNvPr id="3" name="close-detail">
             <a:extLst xmlns:a="http://schemas.openxmlformats.org/drawingml/2006/main">
               <a:ext uri="{FF2B5EF4-FFF2-40B4-BE49-F238E27FC236}">
-                <a16:creationId xmlns:a16="http://schemas.microsoft.com/office/drawing/2014/main" id="{3D772DBD-5B75-4245-9BF5-B2A8A3AB8069}"/>
+                <a16:creationId xmlns:a16="http://schemas.microsoft.com/office/drawing/2014/main" id="{0F09E4A6-9EB4-408F-9778-46EDB8674009}"/>
               </a:ext>
             </a:extLst>
           </p:cNvPr>
@@ -2404,7 +2398,6 @@
           <a:lstStyle xmlns:a="http://schemas.openxmlformats.org/drawingml/2006/main"/>
           <a:p xmlns:a="http://schemas.openxmlformats.org/drawingml/2006/main">
             <a:pPr algn="l">
-              <a:buNone/>
               <a:defRPr sz="1950" b="0">
                 <a:solidFill>
                   <a:srgbClr val="52647D"/>
@@ -2423,12 +2416,11 @@
                 <a:ea typeface="Malgun Gothic"/>
                 <a:cs typeface="Malgun Gothic"/>
               </a:rPr>
-              <a:t>WSL 전체 주기 PASS · 헤더 5개 항목 44px 정렬 · 신고·알림 아이콘 표시</a:t>
+              <a:t>WSL 전체 주기 PASS · 280px 메뉴 · Header 겹침 0px</a:t>
             </a:r>
           </a:p>
           <a:p xmlns:a="http://schemas.openxmlformats.org/drawingml/2006/main">
             <a:pPr algn="l">
-              <a:buNone/>
               <a:defRPr sz="1950" b="0">
                 <a:solidFill>
                   <a:srgbClr val="52647D"/>
@@ -2447,7 +2439,7 @@
                 <a:ea typeface="Malgun Gothic"/>
                 <a:cs typeface="Malgun Gothic"/>
               </a:rPr>
-              <a:t>Core·Vendor·DB·운영 Community 변경 없음</a:t>
+              <a:t>45+ SVG 아이콘·검색 포커스·첫 게시물 진입 검증</a:t>
             </a:r>
           </a:p>
         </p:txBody>
@@ -2457,7 +2449,7 @@
           <p:cNvPr id="4" name="close-status">
             <a:extLst xmlns:a="http://schemas.openxmlformats.org/drawingml/2006/main">
               <a:ext uri="{FF2B5EF4-FFF2-40B4-BE49-F238E27FC236}">
-                <a16:creationId xmlns:a16="http://schemas.microsoft.com/office/drawing/2014/main" id="{3160D9BC-7118-4FD3-AAD9-2144E7A4C4D7}"/>
+                <a16:creationId xmlns:a16="http://schemas.microsoft.com/office/drawing/2014/main" id="{D2D6557F-C25A-4A46-8A3B-C3FDD49B6A67}"/>
               </a:ext>
             </a:extLst>
           </p:cNvPr>
@@ -2492,7 +2484,7 @@
           <p:cNvPr id="5" name="close-go">
             <a:extLst xmlns:a="http://schemas.openxmlformats.org/drawingml/2006/main">
               <a:ext uri="{FF2B5EF4-FFF2-40B4-BE49-F238E27FC236}">
-                <a16:creationId xmlns:a16="http://schemas.microsoft.com/office/drawing/2014/main" id="{29CF402C-9E70-4B3D-8FED-4FBB431FACD2}"/>
+                <a16:creationId xmlns:a16="http://schemas.microsoft.com/office/drawing/2014/main" id="{F14DB7E6-A78C-44CE-A1E9-70E2CA42D724}"/>
               </a:ext>
             </a:extLst>
           </p:cNvPr>
@@ -2520,7 +2512,6 @@
           <a:lstStyle xmlns:a="http://schemas.openxmlformats.org/drawingml/2006/main"/>
           <a:p xmlns:a="http://schemas.openxmlformats.org/drawingml/2006/main">
             <a:pPr algn="ctr">
-              <a:buNone/>
               <a:defRPr sz="5100" b="1">
                 <a:solidFill>
                   <a:srgbClr val="155EEF"/>
@@ -2549,7 +2540,7 @@
           <p:cNvPr id="6" name="close-condition">
             <a:extLst xmlns:a="http://schemas.openxmlformats.org/drawingml/2006/main">
               <a:ext uri="{FF2B5EF4-FFF2-40B4-BE49-F238E27FC236}">
-                <a16:creationId xmlns:a16="http://schemas.microsoft.com/office/drawing/2014/main" id="{150AAE78-1296-4BC4-BA13-17A897DFABDF}"/>
+                <a16:creationId xmlns:a16="http://schemas.microsoft.com/office/drawing/2014/main" id="{7BD48EE6-0441-4D52-8095-26D946AB8797}"/>
               </a:ext>
             </a:extLst>
           </p:cNvPr>
@@ -2577,7 +2568,6 @@
           <a:lstStyle xmlns:a="http://schemas.openxmlformats.org/drawingml/2006/main"/>
           <a:p xmlns:a="http://schemas.openxmlformats.org/drawingml/2006/main">
             <a:pPr algn="ctr">
-              <a:buNone/>
               <a:defRPr sz="1650" b="1">
                 <a:solidFill>
                   <a:srgbClr val="15253E"/>
@@ -2606,7 +2596,7 @@
           <p:cNvPr id="7" name="close-next">
             <a:extLst xmlns:a="http://schemas.openxmlformats.org/drawingml/2006/main">
               <a:ext uri="{FF2B5EF4-FFF2-40B4-BE49-F238E27FC236}">
-                <a16:creationId xmlns:a16="http://schemas.microsoft.com/office/drawing/2014/main" id="{7FF57361-4F99-46E5-8A10-2C2F456C0F78}"/>
+                <a16:creationId xmlns:a16="http://schemas.microsoft.com/office/drawing/2014/main" id="{B9CBF51B-4A2B-4661-9553-8E9755921008}"/>
               </a:ext>
             </a:extLst>
           </p:cNvPr>
@@ -2634,7 +2624,6 @@
           <a:lstStyle xmlns:a="http://schemas.openxmlformats.org/drawingml/2006/main"/>
           <a:p xmlns:a="http://schemas.openxmlformats.org/drawingml/2006/main">
             <a:pPr algn="l">
-              <a:buNone/>
               <a:defRPr sz="1725" b="1">
                 <a:solidFill>
                   <a:srgbClr val="078248"/>
@@ -2661,7 +2650,7 @@
     </p:spTree>
     <p:extLst>
       <p:ext uri="{BB962C8B-B14F-4D97-AF65-F5344CB8AC3E}">
-        <p14:creationId xmlns:p14="http://schemas.microsoft.com/office/powerpoint/2010/main" val="674511522"/>
+        <p14:creationId xmlns:p14="http://schemas.microsoft.com/office/powerpoint/2010/main" val="323033837"/>
       </p:ext>
     </p:extLst>
   </p:cSld>
@@ -2692,7 +2681,7 @@
           <p:cNvPr id="9" name="title-2">
             <a:extLst xmlns:a="http://schemas.openxmlformats.org/drawingml/2006/main">
               <a:ext uri="{FF2B5EF4-FFF2-40B4-BE49-F238E27FC236}">
-                <a16:creationId xmlns:a16="http://schemas.microsoft.com/office/drawing/2014/main" id="{624C129A-A9CA-41FC-84FC-FCF3D153985D}"/>
+                <a16:creationId xmlns:a16="http://schemas.microsoft.com/office/drawing/2014/main" id="{3F5BEE9C-EDDE-4B2B-8EAD-1765160EB20D}"/>
               </a:ext>
             </a:extLst>
           </p:cNvPr>
@@ -2720,7 +2709,6 @@
           <a:lstStyle xmlns:a="http://schemas.openxmlformats.org/drawingml/2006/main"/>
           <a:p xmlns:a="http://schemas.openxmlformats.org/drawingml/2006/main">
             <a:pPr algn="l">
-              <a:buNone/>
               <a:defRPr sz="3000" b="1">
                 <a:solidFill>
                   <a:srgbClr val="15253E"/>
@@ -2749,7 +2737,7 @@
           <p:cNvPr id="2" name="page-2">
             <a:extLst xmlns:a="http://schemas.openxmlformats.org/drawingml/2006/main">
               <a:ext uri="{FF2B5EF4-FFF2-40B4-BE49-F238E27FC236}">
-                <a16:creationId xmlns:a16="http://schemas.microsoft.com/office/drawing/2014/main" id="{52FBA979-9324-4642-BAC8-8A3791E5953C}"/>
+                <a16:creationId xmlns:a16="http://schemas.microsoft.com/office/drawing/2014/main" id="{8138F1B7-FF75-48C9-BAEE-01ED6BAD12B4}"/>
               </a:ext>
             </a:extLst>
           </p:cNvPr>
@@ -2777,7 +2765,6 @@
           <a:lstStyle xmlns:a="http://schemas.openxmlformats.org/drawingml/2006/main"/>
           <a:p xmlns:a="http://schemas.openxmlformats.org/drawingml/2006/main">
             <a:pPr algn="r">
-              <a:buNone/>
               <a:defRPr sz="1200" b="0">
                 <a:solidFill>
                   <a:srgbClr val="52647D"/>
@@ -2806,7 +2793,7 @@
           <p:cNvPr id="3" name="before-label">
             <a:extLst xmlns:a="http://schemas.openxmlformats.org/drawingml/2006/main">
               <a:ext uri="{FF2B5EF4-FFF2-40B4-BE49-F238E27FC236}">
-                <a16:creationId xmlns:a16="http://schemas.microsoft.com/office/drawing/2014/main" id="{1AE99113-5BBF-469F-A457-AC7DFEE547BB}"/>
+                <a16:creationId xmlns:a16="http://schemas.microsoft.com/office/drawing/2014/main" id="{16E6163B-B9D8-4A08-BCD3-EFB05EC1FFA3}"/>
               </a:ext>
             </a:extLst>
           </p:cNvPr>
@@ -2834,7 +2821,6 @@
           <a:lstStyle xmlns:a="http://schemas.openxmlformats.org/drawingml/2006/main"/>
           <a:p xmlns:a="http://schemas.openxmlformats.org/drawingml/2006/main">
             <a:pPr algn="l">
-              <a:buNone/>
               <a:defRPr sz="1500" b="1">
                 <a:solidFill>
                   <a:srgbClr val="52647D"/>
@@ -2863,7 +2849,7 @@
           <p:cNvPr id="4" name="after-label">
             <a:extLst xmlns:a="http://schemas.openxmlformats.org/drawingml/2006/main">
               <a:ext uri="{FF2B5EF4-FFF2-40B4-BE49-F238E27FC236}">
-                <a16:creationId xmlns:a16="http://schemas.microsoft.com/office/drawing/2014/main" id="{6AD6548B-C0CB-4B68-8EC8-FDD40718B74B}"/>
+                <a16:creationId xmlns:a16="http://schemas.microsoft.com/office/drawing/2014/main" id="{0ED1218E-772A-4FD4-97D3-6923F33D6D6B}"/>
               </a:ext>
             </a:extLst>
           </p:cNvPr>
@@ -2891,7 +2877,6 @@
           <a:lstStyle xmlns:a="http://schemas.openxmlformats.org/drawingml/2006/main"/>
           <a:p xmlns:a="http://schemas.openxmlformats.org/drawingml/2006/main">
             <a:pPr algn="l">
-              <a:buNone/>
               <a:defRPr sz="1500" b="1">
                 <a:solidFill>
                   <a:srgbClr val="155EEF"/>
@@ -2917,14 +2902,14 @@
       </p:sp>
       <p:pic>
         <p:nvPicPr>
-          <p:cNvPr id="16" name=""/>
+          <p:cNvPr id="13" name=""/>
           <p:cNvPicPr>
             <a:picLocks xmlns:a="http://schemas.openxmlformats.org/drawingml/2006/main" noChangeAspect="1"/>
           </p:cNvPicPr>
           <p:nvPr/>
         </p:nvPicPr>
         <p:blipFill>
-          <a:blip xmlns:r="http://schemas.openxmlformats.org/officeDocument/2006/relationships" xmlns:a="http://schemas.openxmlformats.org/drawingml/2006/main" r:embed="Raba9bfd57bbf4702"/>
+          <a:blip xmlns:r="http://schemas.openxmlformats.org/officeDocument/2006/relationships" xmlns:a="http://schemas.openxmlformats.org/drawingml/2006/main" r:embed="R855e1b23405a43dc"/>
           <a:stretch xmlns:a="http://schemas.openxmlformats.org/drawingml/2006/main"/>
         </p:blipFill>
         <p:spPr>
@@ -2941,14 +2926,14 @@
       </p:pic>
       <p:pic>
         <p:nvPicPr>
-          <p:cNvPr id="17" name=""/>
+          <p:cNvPr id="14" name=""/>
           <p:cNvPicPr>
             <a:picLocks xmlns:a="http://schemas.openxmlformats.org/drawingml/2006/main" noChangeAspect="1"/>
           </p:cNvPicPr>
           <p:nvPr/>
         </p:nvPicPr>
         <p:blipFill>
-          <a:blip xmlns:r="http://schemas.openxmlformats.org/officeDocument/2006/relationships" xmlns:a="http://schemas.openxmlformats.org/drawingml/2006/main" r:embed="R5d3a26c0d08849fb"/>
+          <a:blip xmlns:r="http://schemas.openxmlformats.org/officeDocument/2006/relationships" xmlns:a="http://schemas.openxmlformats.org/drawingml/2006/main" r:embed="R9f16110f7030477c"/>
           <a:stretch xmlns:a="http://schemas.openxmlformats.org/drawingml/2006/main"/>
         </p:blipFill>
         <p:spPr>
@@ -2968,7 +2953,7 @@
           <p:cNvPr id="7" name="before-copy">
             <a:extLst xmlns:a="http://schemas.openxmlformats.org/drawingml/2006/main">
               <a:ext uri="{FF2B5EF4-FFF2-40B4-BE49-F238E27FC236}">
-                <a16:creationId xmlns:a16="http://schemas.microsoft.com/office/drawing/2014/main" id="{596D4AE4-EC1C-4A2B-AAFD-DAB15D7CFB79}"/>
+                <a16:creationId xmlns:a16="http://schemas.microsoft.com/office/drawing/2014/main" id="{9267EC86-997F-46CE-981F-05CB51C2875C}"/>
               </a:ext>
             </a:extLst>
           </p:cNvPr>
@@ -2996,7 +2981,6 @@
           <a:lstStyle xmlns:a="http://schemas.openxmlformats.org/drawingml/2006/main"/>
           <a:p xmlns:a="http://schemas.openxmlformats.org/drawingml/2006/main">
             <a:pPr algn="ctr">
-              <a:buNone/>
               <a:defRPr sz="1650" b="0">
                 <a:solidFill>
                   <a:srgbClr val="52647D"/>
@@ -3025,7 +3009,7 @@
           <p:cNvPr id="8" name="after-copy">
             <a:extLst xmlns:a="http://schemas.openxmlformats.org/drawingml/2006/main">
               <a:ext uri="{FF2B5EF4-FFF2-40B4-BE49-F238E27FC236}">
-                <a16:creationId xmlns:a16="http://schemas.microsoft.com/office/drawing/2014/main" id="{3BBB677B-C723-41F7-B66F-7E51972CE4AC}"/>
+                <a16:creationId xmlns:a16="http://schemas.microsoft.com/office/drawing/2014/main" id="{9D371677-85F5-44F1-A99D-C1FAB51CC47E}"/>
               </a:ext>
             </a:extLst>
           </p:cNvPr>
@@ -3053,7 +3037,6 @@
           <a:lstStyle xmlns:a="http://schemas.openxmlformats.org/drawingml/2006/main"/>
           <a:p xmlns:a="http://schemas.openxmlformats.org/drawingml/2006/main">
             <a:pPr algn="ctr">
-              <a:buNone/>
               <a:defRPr sz="1425" b="1">
                 <a:solidFill>
                   <a:srgbClr val="15253E"/>
@@ -3072,7 +3055,7 @@
                 <a:ea typeface="Malgun Gothic"/>
                 <a:cs typeface="Malgun Gothic"/>
               </a:rPr>
-              <a:t>62px 단일 행 · 제목·태그·댓글 수 한 줄 · 240px 탐색</a:t>
+              <a:t>62px 단일 행 · 제목·태그·댓글 수 한 줄 · 280px 탐색</a:t>
             </a:r>
           </a:p>
         </p:txBody>
@@ -3080,7 +3063,7 @@
     </p:spTree>
     <p:extLst>
       <p:ext uri="{BB962C8B-B14F-4D97-AF65-F5344CB8AC3E}">
-        <p14:creationId xmlns:p14="http://schemas.microsoft.com/office/powerpoint/2010/main" val="673266305"/>
+        <p14:creationId xmlns:p14="http://schemas.microsoft.com/office/powerpoint/2010/main" val="2029416873"/>
       </p:ext>
     </p:extLst>
   </p:cSld>
@@ -3111,7 +3094,7 @@
           <p:cNvPr id="15" name="title-3">
             <a:extLst xmlns:a="http://schemas.openxmlformats.org/drawingml/2006/main">
               <a:ext uri="{FF2B5EF4-FFF2-40B4-BE49-F238E27FC236}">
-                <a16:creationId xmlns:a16="http://schemas.microsoft.com/office/drawing/2014/main" id="{D8F15D1D-EB18-4F6E-93D6-349708858ED5}"/>
+                <a16:creationId xmlns:a16="http://schemas.microsoft.com/office/drawing/2014/main" id="{B70A688E-BA8D-4296-B59E-FC87D47A899C}"/>
               </a:ext>
             </a:extLst>
           </p:cNvPr>
@@ -3139,7 +3122,6 @@
           <a:lstStyle xmlns:a="http://schemas.openxmlformats.org/drawingml/2006/main"/>
           <a:p xmlns:a="http://schemas.openxmlformats.org/drawingml/2006/main">
             <a:pPr algn="l">
-              <a:buNone/>
               <a:defRPr sz="3000" b="1">
                 <a:solidFill>
                   <a:srgbClr val="15253E"/>
@@ -3168,7 +3150,7 @@
           <p:cNvPr id="2" name="page-3">
             <a:extLst xmlns:a="http://schemas.openxmlformats.org/drawingml/2006/main">
               <a:ext uri="{FF2B5EF4-FFF2-40B4-BE49-F238E27FC236}">
-                <a16:creationId xmlns:a16="http://schemas.microsoft.com/office/drawing/2014/main" id="{D3E2338A-2FE4-4651-AB5C-9FC53A388FAF}"/>
+                <a16:creationId xmlns:a16="http://schemas.microsoft.com/office/drawing/2014/main" id="{03ECAB18-1F42-46A7-86CC-6B517028E1F2}"/>
               </a:ext>
             </a:extLst>
           </p:cNvPr>
@@ -3196,7 +3178,6 @@
           <a:lstStyle xmlns:a="http://schemas.openxmlformats.org/drawingml/2006/main"/>
           <a:p xmlns:a="http://schemas.openxmlformats.org/drawingml/2006/main">
             <a:pPr algn="r">
-              <a:buNone/>
               <a:defRPr sz="1200" b="0">
                 <a:solidFill>
                   <a:srgbClr val="52647D"/>
@@ -3225,7 +3206,7 @@
           <p:cNvPr id="3" name="state-0">
             <a:extLst xmlns:a="http://schemas.openxmlformats.org/drawingml/2006/main">
               <a:ext uri="{FF2B5EF4-FFF2-40B4-BE49-F238E27FC236}">
-                <a16:creationId xmlns:a16="http://schemas.microsoft.com/office/drawing/2014/main" id="{AD36A0EB-7B60-4EBC-9179-A4320395EC66}"/>
+                <a16:creationId xmlns:a16="http://schemas.microsoft.com/office/drawing/2014/main" id="{CA26F7D7-E64E-460F-9E88-00121483E8B8}"/>
               </a:ext>
             </a:extLst>
           </p:cNvPr>
@@ -3260,7 +3241,7 @@
           <p:cNvPr id="4" name="state-label-0">
             <a:extLst xmlns:a="http://schemas.openxmlformats.org/drawingml/2006/main">
               <a:ext uri="{FF2B5EF4-FFF2-40B4-BE49-F238E27FC236}">
-                <a16:creationId xmlns:a16="http://schemas.microsoft.com/office/drawing/2014/main" id="{A603C445-B8B9-45A9-A5D8-A77DBC9CA40D}"/>
+                <a16:creationId xmlns:a16="http://schemas.microsoft.com/office/drawing/2014/main" id="{B650A297-F151-42F4-B94E-88B33EFB7864}"/>
               </a:ext>
             </a:extLst>
           </p:cNvPr>
@@ -3288,7 +3269,6 @@
           <a:lstStyle xmlns:a="http://schemas.openxmlformats.org/drawingml/2006/main"/>
           <a:p xmlns:a="http://schemas.openxmlformats.org/drawingml/2006/main">
             <a:pPr algn="l">
-              <a:buNone/>
               <a:defRPr sz="1950" b="1">
                 <a:solidFill>
                   <a:srgbClr val="15253E"/>
@@ -3317,7 +3297,7 @@
           <p:cNvPr id="5" name="state-detail-0">
             <a:extLst xmlns:a="http://schemas.openxmlformats.org/drawingml/2006/main">
               <a:ext uri="{FF2B5EF4-FFF2-40B4-BE49-F238E27FC236}">
-                <a16:creationId xmlns:a16="http://schemas.microsoft.com/office/drawing/2014/main" id="{E275ED53-AFF2-4A20-AB4D-BD23F353185B}"/>
+                <a16:creationId xmlns:a16="http://schemas.microsoft.com/office/drawing/2014/main" id="{6DE8864E-7CF1-45AA-846B-5975887BBF16}"/>
               </a:ext>
             </a:extLst>
           </p:cNvPr>
@@ -3345,7 +3325,6 @@
           <a:lstStyle xmlns:a="http://schemas.openxmlformats.org/drawingml/2006/main"/>
           <a:p xmlns:a="http://schemas.openxmlformats.org/drawingml/2006/main">
             <a:pPr algn="l">
-              <a:buNone/>
               <a:defRPr sz="1650" b="0">
                 <a:solidFill>
                   <a:srgbClr val="15253E"/>
@@ -3374,7 +3353,7 @@
           <p:cNvPr id="6" name="state-1">
             <a:extLst xmlns:a="http://schemas.openxmlformats.org/drawingml/2006/main">
               <a:ext uri="{FF2B5EF4-FFF2-40B4-BE49-F238E27FC236}">
-                <a16:creationId xmlns:a16="http://schemas.microsoft.com/office/drawing/2014/main" id="{49D9B92D-9E05-4B95-B98B-A61C731CF097}"/>
+                <a16:creationId xmlns:a16="http://schemas.microsoft.com/office/drawing/2014/main" id="{E21AA93C-1659-45D9-9BAC-D21A3C40F19F}"/>
               </a:ext>
             </a:extLst>
           </p:cNvPr>
@@ -3409,7 +3388,7 @@
           <p:cNvPr id="7" name="state-label-1">
             <a:extLst xmlns:a="http://schemas.openxmlformats.org/drawingml/2006/main">
               <a:ext uri="{FF2B5EF4-FFF2-40B4-BE49-F238E27FC236}">
-                <a16:creationId xmlns:a16="http://schemas.microsoft.com/office/drawing/2014/main" id="{A29728F8-8D49-47CE-A122-347A791D7205}"/>
+                <a16:creationId xmlns:a16="http://schemas.microsoft.com/office/drawing/2014/main" id="{84CE8A24-9CA7-42CB-8580-9189FED24423}"/>
               </a:ext>
             </a:extLst>
           </p:cNvPr>
@@ -3437,7 +3416,6 @@
           <a:lstStyle xmlns:a="http://schemas.openxmlformats.org/drawingml/2006/main"/>
           <a:p xmlns:a="http://schemas.openxmlformats.org/drawingml/2006/main">
             <a:pPr algn="l">
-              <a:buNone/>
               <a:defRPr sz="1950" b="1">
                 <a:solidFill>
                   <a:srgbClr val="155EEF"/>
@@ -3466,7 +3444,7 @@
           <p:cNvPr id="8" name="state-detail-1">
             <a:extLst xmlns:a="http://schemas.openxmlformats.org/drawingml/2006/main">
               <a:ext uri="{FF2B5EF4-FFF2-40B4-BE49-F238E27FC236}">
-                <a16:creationId xmlns:a16="http://schemas.microsoft.com/office/drawing/2014/main" id="{0B028B3D-9F3A-4E22-B7D2-925A15FC170E}"/>
+                <a16:creationId xmlns:a16="http://schemas.microsoft.com/office/drawing/2014/main" id="{62DE8DAD-EBC0-43D7-999D-5DC235C124CB}"/>
               </a:ext>
             </a:extLst>
           </p:cNvPr>
@@ -3494,7 +3472,6 @@
           <a:lstStyle xmlns:a="http://schemas.openxmlformats.org/drawingml/2006/main"/>
           <a:p xmlns:a="http://schemas.openxmlformats.org/drawingml/2006/main">
             <a:pPr algn="l">
-              <a:buNone/>
               <a:defRPr sz="1650" b="0">
                 <a:solidFill>
                   <a:srgbClr val="15253E"/>
@@ -3523,7 +3500,7 @@
           <p:cNvPr id="9" name="state-2">
             <a:extLst xmlns:a="http://schemas.openxmlformats.org/drawingml/2006/main">
               <a:ext uri="{FF2B5EF4-FFF2-40B4-BE49-F238E27FC236}">
-                <a16:creationId xmlns:a16="http://schemas.microsoft.com/office/drawing/2014/main" id="{5E97731B-3E08-4FCE-8DD4-6A8FD7AD8F45}"/>
+                <a16:creationId xmlns:a16="http://schemas.microsoft.com/office/drawing/2014/main" id="{3BAB2EF9-A116-4479-B609-AF870C51BDD7}"/>
               </a:ext>
             </a:extLst>
           </p:cNvPr>
@@ -3558,7 +3535,7 @@
           <p:cNvPr id="10" name="state-label-2">
             <a:extLst xmlns:a="http://schemas.openxmlformats.org/drawingml/2006/main">
               <a:ext uri="{FF2B5EF4-FFF2-40B4-BE49-F238E27FC236}">
-                <a16:creationId xmlns:a16="http://schemas.microsoft.com/office/drawing/2014/main" id="{EED740E0-8C52-48AD-A8C1-BAC00B3B450D}"/>
+                <a16:creationId xmlns:a16="http://schemas.microsoft.com/office/drawing/2014/main" id="{278E515B-5265-4D07-AEE2-57924FD43AE2}"/>
               </a:ext>
             </a:extLst>
           </p:cNvPr>
@@ -3586,7 +3563,6 @@
           <a:lstStyle xmlns:a="http://schemas.openxmlformats.org/drawingml/2006/main"/>
           <a:p xmlns:a="http://schemas.openxmlformats.org/drawingml/2006/main">
             <a:pPr algn="l">
-              <a:buNone/>
               <a:defRPr sz="1950" b="1">
                 <a:solidFill>
                   <a:srgbClr val="9A6700"/>
@@ -3615,7 +3591,7 @@
           <p:cNvPr id="11" name="state-detail-2">
             <a:extLst xmlns:a="http://schemas.openxmlformats.org/drawingml/2006/main">
               <a:ext uri="{FF2B5EF4-FFF2-40B4-BE49-F238E27FC236}">
-                <a16:creationId xmlns:a16="http://schemas.microsoft.com/office/drawing/2014/main" id="{9E32C771-F098-4D27-8F1B-CAE0525007E8}"/>
+                <a16:creationId xmlns:a16="http://schemas.microsoft.com/office/drawing/2014/main" id="{5BD76827-FF47-44B6-9657-378657B32F93}"/>
               </a:ext>
             </a:extLst>
           </p:cNvPr>
@@ -3643,7 +3619,6 @@
           <a:lstStyle xmlns:a="http://schemas.openxmlformats.org/drawingml/2006/main"/>
           <a:p xmlns:a="http://schemas.openxmlformats.org/drawingml/2006/main">
             <a:pPr algn="l">
-              <a:buNone/>
               <a:defRPr sz="1650" b="0">
                 <a:solidFill>
                   <a:srgbClr val="15253E"/>
@@ -3672,7 +3647,7 @@
           <p:cNvPr id="12" name="state-3">
             <a:extLst xmlns:a="http://schemas.openxmlformats.org/drawingml/2006/main">
               <a:ext uri="{FF2B5EF4-FFF2-40B4-BE49-F238E27FC236}">
-                <a16:creationId xmlns:a16="http://schemas.microsoft.com/office/drawing/2014/main" id="{A6DFFEA8-6EFD-48A8-AAB5-EDBA2158C91E}"/>
+                <a16:creationId xmlns:a16="http://schemas.microsoft.com/office/drawing/2014/main" id="{B7B8F814-7865-4F2D-9FCA-299891239096}"/>
               </a:ext>
             </a:extLst>
           </p:cNvPr>
@@ -3707,7 +3682,7 @@
           <p:cNvPr id="13" name="state-label-3">
             <a:extLst xmlns:a="http://schemas.openxmlformats.org/drawingml/2006/main">
               <a:ext uri="{FF2B5EF4-FFF2-40B4-BE49-F238E27FC236}">
-                <a16:creationId xmlns:a16="http://schemas.microsoft.com/office/drawing/2014/main" id="{3F67467E-37DF-4FA0-B7AE-61C63BEDF4D3}"/>
+                <a16:creationId xmlns:a16="http://schemas.microsoft.com/office/drawing/2014/main" id="{30CF7C98-CBC7-4C42-A58B-9B2CECF6D56D}"/>
               </a:ext>
             </a:extLst>
           </p:cNvPr>
@@ -3735,7 +3710,6 @@
           <a:lstStyle xmlns:a="http://schemas.openxmlformats.org/drawingml/2006/main"/>
           <a:p xmlns:a="http://schemas.openxmlformats.org/drawingml/2006/main">
             <a:pPr algn="l">
-              <a:buNone/>
               <a:defRPr sz="1950" b="1">
                 <a:solidFill>
                   <a:srgbClr val="078248"/>
@@ -3764,7 +3738,7 @@
           <p:cNvPr id="14" name="state-detail-3">
             <a:extLst xmlns:a="http://schemas.openxmlformats.org/drawingml/2006/main">
               <a:ext uri="{FF2B5EF4-FFF2-40B4-BE49-F238E27FC236}">
-                <a16:creationId xmlns:a16="http://schemas.microsoft.com/office/drawing/2014/main" id="{96F0AD84-0932-4D8F-A410-C318364E2060}"/>
+                <a16:creationId xmlns:a16="http://schemas.microsoft.com/office/drawing/2014/main" id="{F373DAE1-EA30-47E8-B8EA-8358D4A26C02}"/>
               </a:ext>
             </a:extLst>
           </p:cNvPr>
@@ -3792,7 +3766,6 @@
           <a:lstStyle xmlns:a="http://schemas.openxmlformats.org/drawingml/2006/main"/>
           <a:p xmlns:a="http://schemas.openxmlformats.org/drawingml/2006/main">
             <a:pPr algn="l">
-              <a:buNone/>
               <a:defRPr sz="1650" b="0">
                 <a:solidFill>
                   <a:srgbClr val="15253E"/>
@@ -3819,7 +3792,7 @@
     </p:spTree>
     <p:extLst>
       <p:ext uri="{BB962C8B-B14F-4D97-AF65-F5344CB8AC3E}">
-        <p14:creationId xmlns:p14="http://schemas.microsoft.com/office/powerpoint/2010/main" val="479000186"/>
+        <p14:creationId xmlns:p14="http://schemas.microsoft.com/office/powerpoint/2010/main" val="751827108"/>
       </p:ext>
     </p:extLst>
   </p:cSld>
@@ -3850,7 +3823,7 @@
           <p:cNvPr id="9" name="title-4">
             <a:extLst xmlns:a="http://schemas.openxmlformats.org/drawingml/2006/main">
               <a:ext uri="{FF2B5EF4-FFF2-40B4-BE49-F238E27FC236}">
-                <a16:creationId xmlns:a16="http://schemas.microsoft.com/office/drawing/2014/main" id="{F61DC087-68A1-4F56-B1C2-B89BC5DA631E}"/>
+                <a16:creationId xmlns:a16="http://schemas.microsoft.com/office/drawing/2014/main" id="{FF1CCC28-3B20-4F30-80FC-81B9E8EEDB1A}"/>
               </a:ext>
             </a:extLst>
           </p:cNvPr>
@@ -3878,7 +3851,6 @@
           <a:lstStyle xmlns:a="http://schemas.openxmlformats.org/drawingml/2006/main"/>
           <a:p xmlns:a="http://schemas.openxmlformats.org/drawingml/2006/main">
             <a:pPr algn="l">
-              <a:buNone/>
               <a:defRPr sz="3000" b="1">
                 <a:solidFill>
                   <a:srgbClr val="15253E"/>
@@ -3907,7 +3879,7 @@
           <p:cNvPr id="2" name="page-4">
             <a:extLst xmlns:a="http://schemas.openxmlformats.org/drawingml/2006/main">
               <a:ext uri="{FF2B5EF4-FFF2-40B4-BE49-F238E27FC236}">
-                <a16:creationId xmlns:a16="http://schemas.microsoft.com/office/drawing/2014/main" id="{4427C92C-FC22-4B0E-BF92-DB42AABBEBEA}"/>
+                <a16:creationId xmlns:a16="http://schemas.microsoft.com/office/drawing/2014/main" id="{2F285550-1D3F-4374-A00B-13680A189281}"/>
               </a:ext>
             </a:extLst>
           </p:cNvPr>
@@ -3935,7 +3907,6 @@
           <a:lstStyle xmlns:a="http://schemas.openxmlformats.org/drawingml/2006/main"/>
           <a:p xmlns:a="http://schemas.openxmlformats.org/drawingml/2006/main">
             <a:pPr algn="r">
-              <a:buNone/>
               <a:defRPr sz="1200" b="0">
                 <a:solidFill>
                   <a:srgbClr val="52647D"/>
@@ -3961,14 +3932,14 @@
       </p:sp>
       <p:pic>
         <p:nvPicPr>
-          <p:cNvPr id="14" name=""/>
+          <p:cNvPr id="11" name=""/>
           <p:cNvPicPr>
             <a:picLocks xmlns:a="http://schemas.openxmlformats.org/drawingml/2006/main" noChangeAspect="1"/>
           </p:cNvPicPr>
           <p:nvPr/>
         </p:nvPicPr>
         <p:blipFill>
-          <a:blip xmlns:r="http://schemas.openxmlformats.org/officeDocument/2006/relationships" xmlns:a="http://schemas.openxmlformats.org/drawingml/2006/main" r:embed="R231e6aab645549e9"/>
+          <a:blip xmlns:r="http://schemas.openxmlformats.org/officeDocument/2006/relationships" xmlns:a="http://schemas.openxmlformats.org/drawingml/2006/main" r:embed="R251c8ff33f22420e"/>
           <a:stretch xmlns:a="http://schemas.openxmlformats.org/drawingml/2006/main"/>
         </p:blipFill>
         <p:spPr>
@@ -3985,14 +3956,14 @@
       </p:pic>
       <p:pic>
         <p:nvPicPr>
-          <p:cNvPr id="15" name=""/>
+          <p:cNvPr id="12" name=""/>
           <p:cNvPicPr>
             <a:picLocks xmlns:a="http://schemas.openxmlformats.org/drawingml/2006/main" noChangeAspect="1"/>
           </p:cNvPicPr>
           <p:nvPr/>
         </p:nvPicPr>
         <p:blipFill>
-          <a:blip xmlns:r="http://schemas.openxmlformats.org/officeDocument/2006/relationships" xmlns:a="http://schemas.openxmlformats.org/drawingml/2006/main" r:embed="R4cb4473d79ea4f69"/>
+          <a:blip xmlns:r="http://schemas.openxmlformats.org/officeDocument/2006/relationships" xmlns:a="http://schemas.openxmlformats.org/drawingml/2006/main" r:embed="R4210e99c239a4e47"/>
           <a:stretch xmlns:a="http://schemas.openxmlformats.org/drawingml/2006/main"/>
         </p:blipFill>
         <p:spPr>
@@ -4012,7 +3983,7 @@
           <p:cNvPr id="5" name="action-caption">
             <a:extLst xmlns:a="http://schemas.openxmlformats.org/drawingml/2006/main">
               <a:ext uri="{FF2B5EF4-FFF2-40B4-BE49-F238E27FC236}">
-                <a16:creationId xmlns:a16="http://schemas.microsoft.com/office/drawing/2014/main" id="{C0B5F925-BF6C-4D47-BE3B-BF57B752173C}"/>
+                <a16:creationId xmlns:a16="http://schemas.microsoft.com/office/drawing/2014/main" id="{0E567804-45A6-4A83-83C3-ECF6A83AA768}"/>
               </a:ext>
             </a:extLst>
           </p:cNvPr>
@@ -4040,7 +4011,6 @@
           <a:lstStyle xmlns:a="http://schemas.openxmlformats.org/drawingml/2006/main"/>
           <a:p xmlns:a="http://schemas.openxmlformats.org/drawingml/2006/main">
             <a:pPr algn="ctr">
-              <a:buNone/>
               <a:defRPr sz="1425" b="1">
                 <a:solidFill>
                   <a:srgbClr val="155EEF"/>
@@ -4069,7 +4039,7 @@
           <p:cNvPr id="6" name="dialog-result">
             <a:extLst xmlns:a="http://schemas.openxmlformats.org/drawingml/2006/main">
               <a:ext uri="{FF2B5EF4-FFF2-40B4-BE49-F238E27FC236}">
-                <a16:creationId xmlns:a16="http://schemas.microsoft.com/office/drawing/2014/main" id="{05B8748A-B9C3-438B-8856-EBFC824357C1}"/>
+                <a16:creationId xmlns:a16="http://schemas.microsoft.com/office/drawing/2014/main" id="{F1F71EB9-9F56-4538-93DE-30BFE32C0E03}"/>
               </a:ext>
             </a:extLst>
           </p:cNvPr>
@@ -4104,7 +4074,7 @@
           <p:cNvPr id="7" name="dialog-result-main">
             <a:extLst xmlns:a="http://schemas.openxmlformats.org/drawingml/2006/main">
               <a:ext uri="{FF2B5EF4-FFF2-40B4-BE49-F238E27FC236}">
-                <a16:creationId xmlns:a16="http://schemas.microsoft.com/office/drawing/2014/main" id="{EF591584-1900-4FD1-97DF-7E8F08BB65ED}"/>
+                <a16:creationId xmlns:a16="http://schemas.microsoft.com/office/drawing/2014/main" id="{53D52412-89D0-4A67-AF24-1B201304B636}"/>
               </a:ext>
             </a:extLst>
           </p:cNvPr>
@@ -4132,7 +4102,6 @@
           <a:lstStyle xmlns:a="http://schemas.openxmlformats.org/drawingml/2006/main"/>
           <a:p xmlns:a="http://schemas.openxmlformats.org/drawingml/2006/main">
             <a:pPr algn="ctr">
-              <a:buNone/>
               <a:defRPr sz="1650" b="1">
                 <a:solidFill>
                   <a:srgbClr val="15253E"/>
@@ -4151,7 +4120,7 @@
                 <a:ea typeface="Malgun Gothic"/>
                 <a:cs typeface="Malgun Gothic"/>
               </a:rPr>
-              <a:t>공통 Modal 규칙 · 부드러운 2px 포커스 · 직접 노출 영문 0건</a:t>
+              <a:t>공통 Modal 규칙 · 검색 2px 단일 포커스 · 직접 노출 영문 0건</a:t>
             </a:r>
           </a:p>
         </p:txBody>
@@ -4161,7 +4130,7 @@
           <p:cNvPr id="8" name="dialog-result-sub">
             <a:extLst xmlns:a="http://schemas.openxmlformats.org/drawingml/2006/main">
               <a:ext uri="{FF2B5EF4-FFF2-40B4-BE49-F238E27FC236}">
-                <a16:creationId xmlns:a16="http://schemas.microsoft.com/office/drawing/2014/main" id="{26A7B8F6-9E47-4666-889B-D833C8252A06}"/>
+                <a16:creationId xmlns:a16="http://schemas.microsoft.com/office/drawing/2014/main" id="{88FB90F1-72E5-45E3-9718-AB05B7F200F8}"/>
               </a:ext>
             </a:extLst>
           </p:cNvPr>
@@ -4189,7 +4158,6 @@
           <a:lstStyle xmlns:a="http://schemas.openxmlformats.org/drawingml/2006/main"/>
           <a:p xmlns:a="http://schemas.openxmlformats.org/drawingml/2006/main">
             <a:pPr algn="ctr">
-              <a:buNone/>
               <a:defRPr sz="1425" b="0">
                 <a:solidFill>
                   <a:srgbClr val="155EEF"/>
@@ -4216,7 +4184,7 @@
     </p:spTree>
     <p:extLst>
       <p:ext uri="{BB962C8B-B14F-4D97-AF65-F5344CB8AC3E}">
-        <p14:creationId xmlns:p14="http://schemas.microsoft.com/office/powerpoint/2010/main" val="1969041538"/>
+        <p14:creationId xmlns:p14="http://schemas.microsoft.com/office/powerpoint/2010/main" val="379427461"/>
       </p:ext>
     </p:extLst>
   </p:cSld>
@@ -4247,7 +4215,7 @@
           <p:cNvPr id="11" name="title-5">
             <a:extLst xmlns:a="http://schemas.openxmlformats.org/drawingml/2006/main">
               <a:ext uri="{FF2B5EF4-FFF2-40B4-BE49-F238E27FC236}">
-                <a16:creationId xmlns:a16="http://schemas.microsoft.com/office/drawing/2014/main" id="{15B4B5EF-39AC-41BD-860C-4B8A8FDBAAA7}"/>
+                <a16:creationId xmlns:a16="http://schemas.microsoft.com/office/drawing/2014/main" id="{79D4E410-FC1B-4A8C-9F6E-2D69C009762A}"/>
               </a:ext>
             </a:extLst>
           </p:cNvPr>
@@ -4275,7 +4243,6 @@
           <a:lstStyle xmlns:a="http://schemas.openxmlformats.org/drawingml/2006/main"/>
           <a:p xmlns:a="http://schemas.openxmlformats.org/drawingml/2006/main">
             <a:pPr algn="l">
-              <a:buNone/>
               <a:defRPr sz="3000" b="1">
                 <a:solidFill>
                   <a:srgbClr val="15253E"/>
@@ -4304,7 +4271,7 @@
           <p:cNvPr id="2" name="page-5">
             <a:extLst xmlns:a="http://schemas.openxmlformats.org/drawingml/2006/main">
               <a:ext uri="{FF2B5EF4-FFF2-40B4-BE49-F238E27FC236}">
-                <a16:creationId xmlns:a16="http://schemas.microsoft.com/office/drawing/2014/main" id="{E85E0CD4-3FBE-4910-B306-0119C668BAFC}"/>
+                <a16:creationId xmlns:a16="http://schemas.microsoft.com/office/drawing/2014/main" id="{59A4307D-FA17-4B71-94D7-94A42DBF6D49}"/>
               </a:ext>
             </a:extLst>
           </p:cNvPr>
@@ -4332,7 +4299,6 @@
           <a:lstStyle xmlns:a="http://schemas.openxmlformats.org/drawingml/2006/main"/>
           <a:p xmlns:a="http://schemas.openxmlformats.org/drawingml/2006/main">
             <a:pPr algn="r">
-              <a:buNone/>
               <a:defRPr sz="1200" b="0">
                 <a:solidFill>
                   <a:srgbClr val="52647D"/>
@@ -4358,14 +4324,14 @@
       </p:sp>
       <p:pic>
         <p:nvPicPr>
-          <p:cNvPr id="15" name=""/>
+          <p:cNvPr id="13" name=""/>
           <p:cNvPicPr>
             <a:picLocks xmlns:a="http://schemas.openxmlformats.org/drawingml/2006/main" noChangeAspect="1"/>
           </p:cNvPicPr>
           <p:nvPr/>
         </p:nvPicPr>
         <p:blipFill>
-          <a:blip xmlns:r="http://schemas.openxmlformats.org/officeDocument/2006/relationships" xmlns:a="http://schemas.openxmlformats.org/drawingml/2006/main" r:embed="R45b7dfd8faec437a"/>
+          <a:blip xmlns:r="http://schemas.openxmlformats.org/officeDocument/2006/relationships" xmlns:a="http://schemas.openxmlformats.org/drawingml/2006/main" r:embed="R6c867ac67bb242a3"/>
           <a:stretch xmlns:a="http://schemas.openxmlformats.org/drawingml/2006/main"/>
         </p:blipFill>
         <p:spPr>
@@ -4385,7 +4351,7 @@
           <p:cNvPr id="4" name="profile-result">
             <a:extLst xmlns:a="http://schemas.openxmlformats.org/drawingml/2006/main">
               <a:ext uri="{FF2B5EF4-FFF2-40B4-BE49-F238E27FC236}">
-                <a16:creationId xmlns:a16="http://schemas.microsoft.com/office/drawing/2014/main" id="{F2315AED-2B85-41E1-A5D8-A0DDEE6A5244}"/>
+                <a16:creationId xmlns:a16="http://schemas.microsoft.com/office/drawing/2014/main" id="{D0494C80-5317-4904-B737-5BD3DCC0B491}"/>
               </a:ext>
             </a:extLst>
           </p:cNvPr>
@@ -4420,7 +4386,7 @@
           <p:cNvPr id="5" name="profile-title">
             <a:extLst xmlns:a="http://schemas.openxmlformats.org/drawingml/2006/main">
               <a:ext uri="{FF2B5EF4-FFF2-40B4-BE49-F238E27FC236}">
-                <a16:creationId xmlns:a16="http://schemas.microsoft.com/office/drawing/2014/main" id="{F20E61C3-61BF-46BF-8C05-62259B784B9C}"/>
+                <a16:creationId xmlns:a16="http://schemas.microsoft.com/office/drawing/2014/main" id="{3B38CC23-A437-47B0-8C82-70AB173B9E04}"/>
               </a:ext>
             </a:extLst>
           </p:cNvPr>
@@ -4448,7 +4414,6 @@
           <a:lstStyle xmlns:a="http://schemas.openxmlformats.org/drawingml/2006/main"/>
           <a:p xmlns:a="http://schemas.openxmlformats.org/drawingml/2006/main">
             <a:pPr algn="ctr">
-              <a:buNone/>
               <a:defRPr sz="2025" b="1">
                 <a:solidFill>
                   <a:srgbClr val="155EEF"/>
@@ -4477,7 +4442,7 @@
           <p:cNvPr id="6" name="profile-copy">
             <a:extLst xmlns:a="http://schemas.openxmlformats.org/drawingml/2006/main">
               <a:ext uri="{FF2B5EF4-FFF2-40B4-BE49-F238E27FC236}">
-                <a16:creationId xmlns:a16="http://schemas.microsoft.com/office/drawing/2014/main" id="{5DB761A4-0783-41E0-9D9F-1C0C49EB7A01}"/>
+                <a16:creationId xmlns:a16="http://schemas.microsoft.com/office/drawing/2014/main" id="{3FBDD296-FE31-4B26-84EE-0A8EFDE44FCF}"/>
               </a:ext>
             </a:extLst>
           </p:cNvPr>
@@ -4505,7 +4470,6 @@
           <a:lstStyle xmlns:a="http://schemas.openxmlformats.org/drawingml/2006/main"/>
           <a:p xmlns:a="http://schemas.openxmlformats.org/drawingml/2006/main">
             <a:pPr algn="ctr">
-              <a:buNone/>
               <a:defRPr sz="1500" b="0">
                 <a:solidFill>
                   <a:srgbClr val="15253E"/>
@@ -4529,7 +4493,6 @@
           </a:p>
           <a:p xmlns:a="http://schemas.openxmlformats.org/drawingml/2006/main">
             <a:pPr algn="ctr">
-              <a:buNone/>
               <a:defRPr sz="1500" b="0">
                 <a:solidFill>
                   <a:srgbClr val="15253E"/>
@@ -4553,7 +4516,6 @@
           </a:p>
           <a:p xmlns:a="http://schemas.openxmlformats.org/drawingml/2006/main">
             <a:pPr algn="ctr">
-              <a:buNone/>
               <a:defRPr sz="1500" b="0">
                 <a:solidFill>
                   <a:srgbClr val="15253E"/>
@@ -4572,7 +4534,7 @@
                 <a:ea typeface="Malgun Gothic"/>
                 <a:cs typeface="Malgun Gothic"/>
               </a:rPr>
-              <a:t>240px 메뉴 · 780px 콘텐츠</a:t>
+              <a:t>280px 메뉴 · 780px 콘텐츠</a:t>
             </a:r>
           </a:p>
         </p:txBody>
@@ -4582,7 +4544,7 @@
           <p:cNvPr id="7" name="navigation-result">
             <a:extLst xmlns:a="http://schemas.openxmlformats.org/drawingml/2006/main">
               <a:ext uri="{FF2B5EF4-FFF2-40B4-BE49-F238E27FC236}">
-                <a16:creationId xmlns:a16="http://schemas.microsoft.com/office/drawing/2014/main" id="{2257FE94-6B17-44D6-9670-E774B0CFBBC8}"/>
+                <a16:creationId xmlns:a16="http://schemas.microsoft.com/office/drawing/2014/main" id="{BD6F893A-5961-466E-BBF8-3CD4AF4E571F}"/>
               </a:ext>
             </a:extLst>
           </p:cNvPr>
@@ -4617,7 +4579,7 @@
           <p:cNvPr id="8" name="navigation-title">
             <a:extLst xmlns:a="http://schemas.openxmlformats.org/drawingml/2006/main">
               <a:ext uri="{FF2B5EF4-FFF2-40B4-BE49-F238E27FC236}">
-                <a16:creationId xmlns:a16="http://schemas.microsoft.com/office/drawing/2014/main" id="{46964870-783A-46F5-A4D8-7731A9E8F348}"/>
+                <a16:creationId xmlns:a16="http://schemas.microsoft.com/office/drawing/2014/main" id="{8A9D4375-3889-42B9-B6FB-DD8EDB1AA3FB}"/>
               </a:ext>
             </a:extLst>
           </p:cNvPr>
@@ -4645,7 +4607,6 @@
           <a:lstStyle xmlns:a="http://schemas.openxmlformats.org/drawingml/2006/main"/>
           <a:p xmlns:a="http://schemas.openxmlformats.org/drawingml/2006/main">
             <a:pPr algn="ctr">
-              <a:buNone/>
               <a:defRPr sz="2025" b="1">
                 <a:solidFill>
                   <a:srgbClr val="078248"/>
@@ -4674,7 +4635,7 @@
           <p:cNvPr id="9" name="navigation-copy">
             <a:extLst xmlns:a="http://schemas.openxmlformats.org/drawingml/2006/main">
               <a:ext uri="{FF2B5EF4-FFF2-40B4-BE49-F238E27FC236}">
-                <a16:creationId xmlns:a16="http://schemas.microsoft.com/office/drawing/2014/main" id="{347909D2-6157-4120-AFAB-F89F76764F7E}"/>
+                <a16:creationId xmlns:a16="http://schemas.microsoft.com/office/drawing/2014/main" id="{672787F1-67F4-40FC-9D0B-0103FB0288AE}"/>
               </a:ext>
             </a:extLst>
           </p:cNvPr>
@@ -4702,7 +4663,6 @@
           <a:lstStyle xmlns:a="http://schemas.openxmlformats.org/drawingml/2006/main"/>
           <a:p xmlns:a="http://schemas.openxmlformats.org/drawingml/2006/main">
             <a:pPr algn="ctr">
-              <a:buNone/>
               <a:defRPr sz="1500" b="0">
                 <a:solidFill>
                   <a:srgbClr val="15253E"/>
@@ -4726,7 +4686,6 @@
           </a:p>
           <a:p xmlns:a="http://schemas.openxmlformats.org/drawingml/2006/main">
             <a:pPr algn="ctr">
-              <a:buNone/>
               <a:defRPr sz="1500" b="0">
                 <a:solidFill>
                   <a:srgbClr val="15253E"/>
@@ -4750,7 +4709,6 @@
           </a:p>
           <a:p xmlns:a="http://schemas.openxmlformats.org/drawingml/2006/main">
             <a:pPr algn="ctr">
-              <a:buNone/>
               <a:defRPr sz="1500" b="0">
                 <a:solidFill>
                   <a:srgbClr val="15253E"/>
@@ -4779,7 +4737,7 @@
           <p:cNvPr id="10" name="profile-locale">
             <a:extLst xmlns:a="http://schemas.openxmlformats.org/drawingml/2006/main">
               <a:ext uri="{FF2B5EF4-FFF2-40B4-BE49-F238E27FC236}">
-                <a16:creationId xmlns:a16="http://schemas.microsoft.com/office/drawing/2014/main" id="{61A9A6BD-8E2C-4894-93A0-DEE7AB1A8EB9}"/>
+                <a16:creationId xmlns:a16="http://schemas.microsoft.com/office/drawing/2014/main" id="{188E9641-B320-43A6-A122-2FB81C2586A7}"/>
               </a:ext>
             </a:extLst>
           </p:cNvPr>
@@ -4807,7 +4765,6 @@
           <a:lstStyle xmlns:a="http://schemas.openxmlformats.org/drawingml/2006/main"/>
           <a:p xmlns:a="http://schemas.openxmlformats.org/drawingml/2006/main">
             <a:pPr algn="ctr">
-              <a:buNone/>
               <a:defRPr sz="1500" b="1">
                 <a:solidFill>
                   <a:srgbClr val="155EEF"/>
@@ -4834,7 +4791,7 @@
     </p:spTree>
     <p:extLst>
       <p:ext uri="{BB962C8B-B14F-4D97-AF65-F5344CB8AC3E}">
-        <p14:creationId xmlns:p14="http://schemas.microsoft.com/office/powerpoint/2010/main" val="1966110520"/>
+        <p14:creationId xmlns:p14="http://schemas.microsoft.com/office/powerpoint/2010/main" val="193029475"/>
       </p:ext>
     </p:extLst>
   </p:cSld>
@@ -4862,10 +4819,10 @@
       </p:grpSpPr>
       <p:sp>
         <p:nvSpPr>
-          <p:cNvPr id="11" name="title-5">
-            <a:extLst xmlns:a="http://schemas.openxmlformats.org/drawingml/2006/main">
-              <a:ext uri="{FF2B5EF4-FFF2-40B4-BE49-F238E27FC236}">
-                <a16:creationId xmlns:a16="http://schemas.microsoft.com/office/drawing/2014/main" id="{15B4B5EF-39AC-41BD-860C-4B8A8FDBAAA7}"/>
+          <p:cNvPr id="14" name="title-6">
+            <a:extLst xmlns:a="http://schemas.openxmlformats.org/drawingml/2006/main">
+              <a:ext uri="{FF2B5EF4-FFF2-40B4-BE49-F238E27FC236}">
+                <a16:creationId xmlns:a16="http://schemas.microsoft.com/office/drawing/2014/main" id="{E89BED19-8A45-4CD6-9925-96EF2A5024EC}"/>
               </a:ext>
             </a:extLst>
           </p:cNvPr>
@@ -4893,7 +4850,6 @@
           <a:lstStyle xmlns:a="http://schemas.openxmlformats.org/drawingml/2006/main"/>
           <a:p xmlns:a="http://schemas.openxmlformats.org/drawingml/2006/main">
             <a:pPr algn="l">
-              <a:buNone/>
               <a:defRPr sz="3000" b="1">
                 <a:solidFill>
                   <a:srgbClr val="15253E"/>
@@ -4912,17 +4868,17 @@
                 <a:ea typeface="Malgun Gothic"/>
                 <a:cs typeface="Malgun Gothic"/>
               </a:rPr>
-              <a:t>더보기 메뉴와 설정·보안 화면을 같은 체계로 맞췄습니다</a:t>
-            </a:r>
-          </a:p>
-        </p:txBody>
-      </p:sp>
-      <p:sp>
-        <p:nvSpPr>
-          <p:cNvPr id="2" name="page-5">
-            <a:extLst xmlns:a="http://schemas.openxmlformats.org/drawingml/2006/main">
-              <a:ext uri="{FF2B5EF4-FFF2-40B4-BE49-F238E27FC236}">
-                <a16:creationId xmlns:a16="http://schemas.microsoft.com/office/drawing/2014/main" id="{E85E0CD4-3FBE-4910-B306-0119C668BAFC}"/>
+              <a:t>목록과 아이콘을 웹폰트 없이 안정화했습니다</a:t>
+            </a:r>
+          </a:p>
+        </p:txBody>
+      </p:sp>
+      <p:sp>
+        <p:nvSpPr>
+          <p:cNvPr id="2" name="page-6">
+            <a:extLst xmlns:a="http://schemas.openxmlformats.org/drawingml/2006/main">
+              <a:ext uri="{FF2B5EF4-FFF2-40B4-BE49-F238E27FC236}">
+                <a16:creationId xmlns:a16="http://schemas.microsoft.com/office/drawing/2014/main" id="{19169AC8-E234-4809-AA30-5C8498F10AC6}"/>
               </a:ext>
             </a:extLst>
           </p:cNvPr>
@@ -4950,7 +4906,6 @@
           <a:lstStyle xmlns:a="http://schemas.openxmlformats.org/drawingml/2006/main"/>
           <a:p xmlns:a="http://schemas.openxmlformats.org/drawingml/2006/main">
             <a:pPr algn="r">
-              <a:buNone/>
               <a:defRPr sz="1200" b="0">
                 <a:solidFill>
                   <a:srgbClr val="52647D"/>
@@ -4976,48 +4931,50 @@
       </p:sp>
       <p:pic>
         <p:nvPicPr>
-          <p:cNvPr id="15" name=""/>
+          <p:cNvPr id="16" name=""/>
           <p:cNvPicPr>
             <a:picLocks xmlns:a="http://schemas.openxmlformats.org/drawingml/2006/main" noChangeAspect="1"/>
           </p:cNvPicPr>
           <p:nvPr/>
         </p:nvPicPr>
         <p:blipFill>
-          <a:blip xmlns:r="http://schemas.openxmlformats.org/officeDocument/2006/relationships" xmlns:a="http://schemas.openxmlformats.org/drawingml/2006/main" r:embed="R053b4449f60647c1"/>
+          <a:blip xmlns:r="http://schemas.openxmlformats.org/officeDocument/2006/relationships" xmlns:a="http://schemas.openxmlformats.org/drawingml/2006/main" r:embed="R14749d1187f34432"/>
           <a:stretch xmlns:a="http://schemas.openxmlformats.org/drawingml/2006/main"/>
         </p:blipFill>
         <p:spPr>
-          <a:xfrm xmlns:a="http://schemas.openxmlformats.org/drawingml/2006/main" flipH="0" flipV="0">
-            <a:off x="457200" y="1314450"/>
-            <a:ext cx="7239000" cy="4524375"/>
-          </a:xfrm>
-          <a:prstGeom xmlns:a="http://schemas.openxmlformats.org/drawingml/2006/main" prst="roundRect">
-            <a:avLst/>
-          </a:prstGeom>
-        </p:spPr>
-      </p:pic>
-      <p:sp>
-        <p:nvSpPr>
-          <p:cNvPr id="4" name="profile-result">
-            <a:extLst xmlns:a="http://schemas.openxmlformats.org/drawingml/2006/main">
-              <a:ext uri="{FF2B5EF4-FFF2-40B4-BE49-F238E27FC236}">
-                <a16:creationId xmlns:a16="http://schemas.microsoft.com/office/drawing/2014/main" id="{F2315AED-2B85-41E1-A5D8-A0DDEE6A5244}"/>
-              </a:ext>
-            </a:extLst>
-          </p:cNvPr>
-          <p:cNvSpPr>
-            <a:spLocks xmlns:a="http://schemas.openxmlformats.org/drawingml/2006/main" noGrp="1"/>
-          </p:cNvSpPr>
-          <p:nvPr/>
-        </p:nvSpPr>
-        <p:spPr>
-          <a:xfrm xmlns:a="http://schemas.openxmlformats.org/drawingml/2006/main">
-            <a:off x="8096250" y="1485900"/>
-            <a:ext cx="3333750" cy="1790700"/>
+          <a:xfrm xmlns:a="http://schemas.openxmlformats.org/drawingml/2006/main">
+            <a:off x="457200" y="1373981"/>
+            <a:ext cx="6667500" cy="4167188"/>
           </a:xfrm>
           <a:prstGeom xmlns:a="http://schemas.openxmlformats.org/drawingml/2006/main" prst="roundRect">
             <a:avLst>
-              <a:gd name="adj" fmla="val 4255"/>
+              <a:gd name="adj" fmla="val 2667"/>
+            </a:avLst>
+          </a:prstGeom>
+        </p:spPr>
+      </p:pic>
+      <p:sp>
+        <p:nvSpPr>
+          <p:cNvPr id="4" name="pane-result">
+            <a:extLst xmlns:a="http://schemas.openxmlformats.org/drawingml/2006/main">
+              <a:ext uri="{FF2B5EF4-FFF2-40B4-BE49-F238E27FC236}">
+                <a16:creationId xmlns:a16="http://schemas.microsoft.com/office/drawing/2014/main" id="{673C9B90-5BB4-423D-BDD7-DDDFC0BB205A}"/>
+              </a:ext>
+            </a:extLst>
+          </p:cNvPr>
+          <p:cNvSpPr>
+            <a:spLocks xmlns:a="http://schemas.openxmlformats.org/drawingml/2006/main" noGrp="1"/>
+          </p:cNvSpPr>
+          <p:nvPr/>
+        </p:nvSpPr>
+        <p:spPr>
+          <a:xfrm xmlns:a="http://schemas.openxmlformats.org/drawingml/2006/main">
+            <a:off x="7524750" y="1352550"/>
+            <a:ext cx="3905250" cy="1104900"/>
+          </a:xfrm>
+          <a:prstGeom xmlns:a="http://schemas.openxmlformats.org/drawingml/2006/main" prst="roundRect">
+            <a:avLst>
+              <a:gd name="adj" fmla="val 6897"/>
             </a:avLst>
           </a:prstGeom>
           <a:solidFill xmlns:a="http://schemas.openxmlformats.org/drawingml/2006/main">
@@ -5033,22 +4990,22 @@
       </p:sp>
       <p:sp>
         <p:nvSpPr>
-          <p:cNvPr id="5" name="profile-title">
-            <a:extLst xmlns:a="http://schemas.openxmlformats.org/drawingml/2006/main">
-              <a:ext uri="{FF2B5EF4-FFF2-40B4-BE49-F238E27FC236}">
-                <a16:creationId xmlns:a16="http://schemas.microsoft.com/office/drawing/2014/main" id="{F20E61C3-61BF-46BF-8C05-62259B784B9C}"/>
-              </a:ext>
-            </a:extLst>
-          </p:cNvPr>
-          <p:cNvSpPr>
-            <a:spLocks xmlns:a="http://schemas.openxmlformats.org/drawingml/2006/main" noGrp="1"/>
-          </p:cNvSpPr>
-          <p:nvPr/>
-        </p:nvSpPr>
-        <p:spPr>
-          <a:xfrm xmlns:a="http://schemas.openxmlformats.org/drawingml/2006/main">
-            <a:off x="8382000" y="1752600"/>
-            <a:ext cx="2762250" cy="361950"/>
+          <p:cNvPr id="5" name="pane-title">
+            <a:extLst xmlns:a="http://schemas.openxmlformats.org/drawingml/2006/main">
+              <a:ext uri="{FF2B5EF4-FFF2-40B4-BE49-F238E27FC236}">
+                <a16:creationId xmlns:a16="http://schemas.microsoft.com/office/drawing/2014/main" id="{4C05C078-06B3-4C4D-9E07-6692797E8CA5}"/>
+              </a:ext>
+            </a:extLst>
+          </p:cNvPr>
+          <p:cNvSpPr>
+            <a:spLocks xmlns:a="http://schemas.openxmlformats.org/drawingml/2006/main" noGrp="1"/>
+          </p:cNvSpPr>
+          <p:nvPr/>
+        </p:nvSpPr>
+        <p:spPr>
+          <a:xfrm xmlns:a="http://schemas.openxmlformats.org/drawingml/2006/main">
+            <a:off x="7810500" y="1543050"/>
+            <a:ext cx="3333750" cy="304800"/>
           </a:xfrm>
           <a:prstGeom xmlns:a="http://schemas.openxmlformats.org/drawingml/2006/main" prst="rect">
             <a:avLst/>
@@ -5064,8 +5021,7 @@
           <a:lstStyle xmlns:a="http://schemas.openxmlformats.org/drawingml/2006/main"/>
           <a:p xmlns:a="http://schemas.openxmlformats.org/drawingml/2006/main">
             <a:pPr algn="ctr">
-              <a:buNone/>
-              <a:defRPr sz="2025" b="1">
+              <a:defRPr sz="1800" b="1">
                 <a:solidFill>
                   <a:srgbClr val="155EEF"/>
                 </a:solidFill>
@@ -5075,7 +5031,7 @@
               </a:defRPr>
             </a:pPr>
             <a:r>
-              <a:rPr sz="2025" b="1">
+              <a:rPr sz="1800" b="1">
                 <a:solidFill>
                   <a:srgbClr val="155EEF"/>
                 </a:solidFill>
@@ -5083,29 +5039,29 @@
                 <a:ea typeface="Malgun Gothic"/>
                 <a:cs typeface="Malgun Gothic"/>
               </a:rPr>
-              <a:t>설정 화면</a:t>
-            </a:r>
-          </a:p>
-        </p:txBody>
-      </p:sp>
-      <p:sp>
-        <p:nvSpPr>
-          <p:cNvPr id="6" name="profile-copy">
-            <a:extLst xmlns:a="http://schemas.openxmlformats.org/drawingml/2006/main">
-              <a:ext uri="{FF2B5EF4-FFF2-40B4-BE49-F238E27FC236}">
-                <a16:creationId xmlns:a16="http://schemas.microsoft.com/office/drawing/2014/main" id="{5DB761A4-0783-41E0-9D9F-1C0C49EB7A01}"/>
-              </a:ext>
-            </a:extLst>
-          </p:cNvPr>
-          <p:cNvSpPr>
-            <a:spLocks xmlns:a="http://schemas.openxmlformats.org/drawingml/2006/main" noGrp="1"/>
-          </p:cNvSpPr>
-          <p:nvPr/>
-        </p:nvSpPr>
-        <p:spPr>
-          <a:xfrm xmlns:a="http://schemas.openxmlformats.org/drawingml/2006/main">
-            <a:off x="8382000" y="2247900"/>
-            <a:ext cx="2762250" cy="838200"/>
+              <a:t>상세 목록 패널</a:t>
+            </a:r>
+          </a:p>
+        </p:txBody>
+      </p:sp>
+      <p:sp>
+        <p:nvSpPr>
+          <p:cNvPr id="6" name="pane-copy">
+            <a:extLst xmlns:a="http://schemas.openxmlformats.org/drawingml/2006/main">
+              <a:ext uri="{FF2B5EF4-FFF2-40B4-BE49-F238E27FC236}">
+                <a16:creationId xmlns:a16="http://schemas.microsoft.com/office/drawing/2014/main" id="{09EE246E-2642-4D4F-B06D-06E2424FE69B}"/>
+              </a:ext>
+            </a:extLst>
+          </p:cNvPr>
+          <p:cNvSpPr>
+            <a:spLocks xmlns:a="http://schemas.openxmlformats.org/drawingml/2006/main" noGrp="1"/>
+          </p:cNvSpPr>
+          <p:nvPr/>
+        </p:nvSpPr>
+        <p:spPr>
+          <a:xfrm xmlns:a="http://schemas.openxmlformats.org/drawingml/2006/main">
+            <a:off x="7810500" y="1924050"/>
+            <a:ext cx="3333750" cy="438150"/>
           </a:xfrm>
           <a:prstGeom xmlns:a="http://schemas.openxmlformats.org/drawingml/2006/main" prst="rect">
             <a:avLst/>
@@ -5121,100 +5077,74 @@
           <a:lstStyle xmlns:a="http://schemas.openxmlformats.org/drawingml/2006/main"/>
           <a:p xmlns:a="http://schemas.openxmlformats.org/drawingml/2006/main">
             <a:pPr algn="ctr">
-              <a:buNone/>
-              <a:defRPr sz="1500" b="0">
-                <a:solidFill>
-                  <a:srgbClr val="15253E"/>
-                </a:solidFill>
-                <a:latin typeface="Malgun Gothic"/>
-                <a:ea typeface="Malgun Gothic"/>
-                <a:cs typeface="Malgun Gothic"/>
-              </a:defRPr>
-            </a:pPr>
-            <a:r>
-              <a:rPr sz="1500" b="0">
-                <a:solidFill>
-                  <a:srgbClr val="15253E"/>
-                </a:solidFill>
-                <a:latin typeface="Malgun Gothic"/>
-                <a:ea typeface="Malgun Gothic"/>
-                <a:cs typeface="Malgun Gothic"/>
-              </a:rPr>
-              <a:t>카드·버튼·알림 표 통일</a:t>
+              <a:defRPr sz="1350" b="0">
+                <a:solidFill>
+                  <a:srgbClr val="15253E"/>
+                </a:solidFill>
+                <a:latin typeface="Malgun Gothic"/>
+                <a:ea typeface="Malgun Gothic"/>
+                <a:cs typeface="Malgun Gothic"/>
+              </a:defRPr>
+            </a:pPr>
+            <a:r>
+              <a:rPr sz="1350" b="0">
+                <a:solidFill>
+                  <a:srgbClr val="15253E"/>
+                </a:solidFill>
+                <a:latin typeface="Malgun Gothic"/>
+                <a:ea typeface="Malgun Gothic"/>
+                <a:cs typeface="Malgun Gothic"/>
+              </a:rPr>
+              <a:t>Header 겹침 0px · 400px 목록</a:t>
             </a:r>
           </a:p>
           <a:p xmlns:a="http://schemas.openxmlformats.org/drawingml/2006/main">
             <a:pPr algn="ctr">
-              <a:buNone/>
-              <a:defRPr sz="1500" b="0">
-                <a:solidFill>
-                  <a:srgbClr val="15253E"/>
-                </a:solidFill>
-                <a:latin typeface="Malgun Gothic"/>
-                <a:ea typeface="Malgun Gothic"/>
-                <a:cs typeface="Malgun Gothic"/>
-              </a:defRPr>
-            </a:pPr>
-            <a:r>
-              <a:rPr sz="1500" b="0">
-                <a:solidFill>
-                  <a:srgbClr val="15253E"/>
-                </a:solidFill>
-                <a:latin typeface="Malgun Gothic"/>
-                <a:ea typeface="Malgun Gothic"/>
-                <a:cs typeface="Malgun Gothic"/>
-              </a:rPr>
-              <a:t>직접 노출 영문 0건</a:t>
-            </a:r>
-          </a:p>
-          <a:p xmlns:a="http://schemas.openxmlformats.org/drawingml/2006/main">
-            <a:pPr algn="ctr">
-              <a:buNone/>
-              <a:defRPr sz="1500" b="0">
-                <a:solidFill>
-                  <a:srgbClr val="15253E"/>
-                </a:solidFill>
-                <a:latin typeface="Malgun Gothic"/>
-                <a:ea typeface="Malgun Gothic"/>
-                <a:cs typeface="Malgun Gothic"/>
-              </a:defRPr>
-            </a:pPr>
-            <a:r>
-              <a:rPr sz="1500" b="0">
-                <a:solidFill>
-                  <a:srgbClr val="15253E"/>
-                </a:solidFill>
-                <a:latin typeface="Malgun Gothic"/>
-                <a:ea typeface="Malgun Gothic"/>
-                <a:cs typeface="Malgun Gothic"/>
-              </a:rPr>
-              <a:t>모바일 표 302px</a:t>
-            </a:r>
-          </a:p>
-        </p:txBody>
-      </p:sp>
-      <p:sp>
-        <p:nvSpPr>
-          <p:cNvPr id="7" name="navigation-result">
-            <a:extLst xmlns:a="http://schemas.openxmlformats.org/drawingml/2006/main">
-              <a:ext uri="{FF2B5EF4-FFF2-40B4-BE49-F238E27FC236}">
-                <a16:creationId xmlns:a16="http://schemas.microsoft.com/office/drawing/2014/main" id="{2257FE94-6B17-44D6-9670-E774B0CFBBC8}"/>
-              </a:ext>
-            </a:extLst>
-          </p:cNvPr>
-          <p:cNvSpPr>
-            <a:spLocks xmlns:a="http://schemas.openxmlformats.org/drawingml/2006/main" noGrp="1"/>
-          </p:cNvSpPr>
-          <p:nvPr/>
-        </p:nvSpPr>
-        <p:spPr>
-          <a:xfrm xmlns:a="http://schemas.openxmlformats.org/drawingml/2006/main">
-            <a:off x="8096250" y="3600450"/>
-            <a:ext cx="3333750" cy="1790700"/>
+              <a:defRPr sz="1350" b="0">
+                <a:solidFill>
+                  <a:srgbClr val="15253E"/>
+                </a:solidFill>
+                <a:latin typeface="Malgun Gothic"/>
+                <a:ea typeface="Malgun Gothic"/>
+                <a:cs typeface="Malgun Gothic"/>
+              </a:defRPr>
+            </a:pPr>
+            <a:r>
+              <a:rPr sz="1350" b="0">
+                <a:solidFill>
+                  <a:srgbClr val="15253E"/>
+                </a:solidFill>
+                <a:latin typeface="Malgun Gothic"/>
+                <a:ea typeface="Malgun Gothic"/>
+                <a:cs typeface="Malgun Gothic"/>
+              </a:rPr>
+              <a:t>6px 스크롤바 · 카드 간격 8px</a:t>
+            </a:r>
+          </a:p>
+        </p:txBody>
+      </p:sp>
+      <p:sp>
+        <p:nvSpPr>
+          <p:cNvPr id="7" name="icon-result">
+            <a:extLst xmlns:a="http://schemas.openxmlformats.org/drawingml/2006/main">
+              <a:ext uri="{FF2B5EF4-FFF2-40B4-BE49-F238E27FC236}">
+                <a16:creationId xmlns:a16="http://schemas.microsoft.com/office/drawing/2014/main" id="{F9A55859-5C55-4EC2-BDA4-BE1DC80D0140}"/>
+              </a:ext>
+            </a:extLst>
+          </p:cNvPr>
+          <p:cNvSpPr>
+            <a:spLocks xmlns:a="http://schemas.openxmlformats.org/drawingml/2006/main" noGrp="1"/>
+          </p:cNvSpPr>
+          <p:nvPr/>
+        </p:nvSpPr>
+        <p:spPr>
+          <a:xfrm xmlns:a="http://schemas.openxmlformats.org/drawingml/2006/main">
+            <a:off x="7524750" y="2647950"/>
+            <a:ext cx="3905250" cy="1333500"/>
           </a:xfrm>
           <a:prstGeom xmlns:a="http://schemas.openxmlformats.org/drawingml/2006/main" prst="roundRect">
             <a:avLst>
-              <a:gd name="adj" fmla="val 4255"/>
+              <a:gd name="adj" fmla="val 5714"/>
             </a:avLst>
           </a:prstGeom>
           <a:solidFill xmlns:a="http://schemas.openxmlformats.org/drawingml/2006/main">
@@ -5230,22 +5160,22 @@
       </p:sp>
       <p:sp>
         <p:nvSpPr>
-          <p:cNvPr id="8" name="navigation-title">
-            <a:extLst xmlns:a="http://schemas.openxmlformats.org/drawingml/2006/main">
-              <a:ext uri="{FF2B5EF4-FFF2-40B4-BE49-F238E27FC236}">
-                <a16:creationId xmlns:a16="http://schemas.microsoft.com/office/drawing/2014/main" id="{46964870-783A-46F5-A4D8-7731A9E8F348}"/>
-              </a:ext>
-            </a:extLst>
-          </p:cNvPr>
-          <p:cNvSpPr>
-            <a:spLocks xmlns:a="http://schemas.openxmlformats.org/drawingml/2006/main" noGrp="1"/>
-          </p:cNvSpPr>
-          <p:nvPr/>
-        </p:nvSpPr>
-        <p:spPr>
-          <a:xfrm xmlns:a="http://schemas.openxmlformats.org/drawingml/2006/main">
-            <a:off x="8382000" y="3867150"/>
-            <a:ext cx="2762250" cy="361950"/>
+          <p:cNvPr id="8" name="icon-title">
+            <a:extLst xmlns:a="http://schemas.openxmlformats.org/drawingml/2006/main">
+              <a:ext uri="{FF2B5EF4-FFF2-40B4-BE49-F238E27FC236}">
+                <a16:creationId xmlns:a16="http://schemas.microsoft.com/office/drawing/2014/main" id="{48657250-48A8-4681-A7F4-0ADB9BACA061}"/>
+              </a:ext>
+            </a:extLst>
+          </p:cNvPr>
+          <p:cNvSpPr>
+            <a:spLocks xmlns:a="http://schemas.openxmlformats.org/drawingml/2006/main" noGrp="1"/>
+          </p:cNvSpPr>
+          <p:nvPr/>
+        </p:nvSpPr>
+        <p:spPr>
+          <a:xfrm xmlns:a="http://schemas.openxmlformats.org/drawingml/2006/main">
+            <a:off x="7810500" y="2838450"/>
+            <a:ext cx="3333750" cy="304800"/>
           </a:xfrm>
           <a:prstGeom xmlns:a="http://schemas.openxmlformats.org/drawingml/2006/main" prst="rect">
             <a:avLst/>
@@ -5261,8 +5191,7 @@
           <a:lstStyle xmlns:a="http://schemas.openxmlformats.org/drawingml/2006/main"/>
           <a:p xmlns:a="http://schemas.openxmlformats.org/drawingml/2006/main">
             <a:pPr algn="ctr">
-              <a:buNone/>
-              <a:defRPr sz="2025" b="1">
+              <a:defRPr sz="1800" b="1">
                 <a:solidFill>
                   <a:srgbClr val="078248"/>
                 </a:solidFill>
@@ -5272,7 +5201,7 @@
               </a:defRPr>
             </a:pPr>
             <a:r>
-              <a:rPr sz="2025" b="1">
+              <a:rPr sz="1800" b="1">
                 <a:solidFill>
                   <a:srgbClr val="078248"/>
                 </a:solidFill>
@@ -5280,29 +5209,29 @@
                 <a:ea typeface="Malgun Gothic"/>
                 <a:cs typeface="Malgun Gothic"/>
               </a:rPr>
-              <a:t>목록·보안</a:t>
-            </a:r>
-          </a:p>
-        </p:txBody>
-      </p:sp>
-      <p:sp>
-        <p:nvSpPr>
-          <p:cNvPr id="9" name="navigation-copy">
-            <a:extLst xmlns:a="http://schemas.openxmlformats.org/drawingml/2006/main">
-              <a:ext uri="{FF2B5EF4-FFF2-40B4-BE49-F238E27FC236}">
-                <a16:creationId xmlns:a16="http://schemas.microsoft.com/office/drawing/2014/main" id="{347909D2-6157-4120-AFAB-F89F76764F7E}"/>
-              </a:ext>
-            </a:extLst>
-          </p:cNvPr>
-          <p:cNvSpPr>
-            <a:spLocks xmlns:a="http://schemas.openxmlformats.org/drawingml/2006/main" noGrp="1"/>
-          </p:cNvSpPr>
-          <p:nvPr/>
-        </p:nvSpPr>
-        <p:spPr>
-          <a:xfrm xmlns:a="http://schemas.openxmlformats.org/drawingml/2006/main">
-            <a:off x="8382000" y="4362450"/>
-            <a:ext cx="2762250" cy="838200"/>
+              <a:t>45+ 내장 SVG</a:t>
+            </a:r>
+          </a:p>
+        </p:txBody>
+      </p:sp>
+      <p:sp>
+        <p:nvSpPr>
+          <p:cNvPr id="9" name="icon-copy">
+            <a:extLst xmlns:a="http://schemas.openxmlformats.org/drawingml/2006/main">
+              <a:ext uri="{FF2B5EF4-FFF2-40B4-BE49-F238E27FC236}">
+                <a16:creationId xmlns:a16="http://schemas.microsoft.com/office/drawing/2014/main" id="{4F6BD1D7-2243-4092-B210-AD9942E1652A}"/>
+              </a:ext>
+            </a:extLst>
+          </p:cNvPr>
+          <p:cNvSpPr>
+            <a:spLocks xmlns:a="http://schemas.openxmlformats.org/drawingml/2006/main" noGrp="1"/>
+          </p:cNvSpPr>
+          <p:nvPr/>
+        </p:nvSpPr>
+        <p:spPr>
+          <a:xfrm xmlns:a="http://schemas.openxmlformats.org/drawingml/2006/main">
+            <a:off x="7810500" y="3219450"/>
+            <a:ext cx="3333750" cy="552450"/>
           </a:xfrm>
           <a:prstGeom xmlns:a="http://schemas.openxmlformats.org/drawingml/2006/main" prst="rect">
             <a:avLst/>
@@ -5318,96 +5247,105 @@
           <a:lstStyle xmlns:a="http://schemas.openxmlformats.org/drawingml/2006/main"/>
           <a:p xmlns:a="http://schemas.openxmlformats.org/drawingml/2006/main">
             <a:pPr algn="ctr">
-              <a:buNone/>
-              <a:defRPr sz="1500" b="0">
-                <a:solidFill>
-                  <a:srgbClr val="15253E"/>
-                </a:solidFill>
-                <a:latin typeface="Malgun Gothic"/>
-                <a:ea typeface="Malgun Gothic"/>
-                <a:cs typeface="Malgun Gothic"/>
-              </a:defRPr>
-            </a:pPr>
-            <a:r>
-              <a:rPr sz="1500" b="0">
-                <a:solidFill>
-                  <a:srgbClr val="15253E"/>
-                </a:solidFill>
-                <a:latin typeface="Malgun Gothic"/>
-                <a:ea typeface="Malgun Gothic"/>
-                <a:cs typeface="Malgun Gothic"/>
-              </a:rPr>
-              <a:t>더보기 상시 표시</a:t>
+              <a:defRPr sz="1350" b="0">
+                <a:solidFill>
+                  <a:srgbClr val="15253E"/>
+                </a:solidFill>
+                <a:latin typeface="Malgun Gothic"/>
+                <a:ea typeface="Malgun Gothic"/>
+                <a:cs typeface="Malgun Gothic"/>
+              </a:defRPr>
+            </a:pPr>
+            <a:r>
+              <a:rPr sz="1350" b="0">
+                <a:solidFill>
+                  <a:srgbClr val="15253E"/>
+                </a:solidFill>
+                <a:latin typeface="Malgun Gothic"/>
+                <a:ea typeface="Malgun Gothic"/>
+                <a:cs typeface="Malgun Gothic"/>
+              </a:rPr>
+              <a:t>배지 · 타임라인 · 댓글 수</a:t>
             </a:r>
           </a:p>
           <a:p xmlns:a="http://schemas.openxmlformats.org/drawingml/2006/main">
             <a:pPr algn="ctr">
-              <a:buNone/>
-              <a:defRPr sz="1500" b="0">
-                <a:solidFill>
-                  <a:srgbClr val="15253E"/>
-                </a:solidFill>
-                <a:latin typeface="Malgun Gothic"/>
-                <a:ea typeface="Malgun Gothic"/>
-                <a:cs typeface="Malgun Gothic"/>
-              </a:defRPr>
-            </a:pPr>
-            <a:r>
-              <a:rPr sz="1500" b="0">
-                <a:solidFill>
-                  <a:srgbClr val="15253E"/>
-                </a:solidFill>
-                <a:latin typeface="Malgun Gothic"/>
-                <a:ea typeface="Malgun Gothic"/>
-                <a:cs typeface="Malgun Gothic"/>
-              </a:rPr>
-              <a:t>중앙 오차 0px · 메뉴 1080</a:t>
-            </a:r>
-          </a:p>
-          <a:p xmlns:a="http://schemas.openxmlformats.org/drawingml/2006/main">
-            <a:pPr algn="ctr">
-              <a:buNone/>
-              <a:defRPr sz="1500" b="0">
-                <a:solidFill>
-                  <a:srgbClr val="15253E"/>
-                </a:solidFill>
-                <a:latin typeface="Malgun Gothic"/>
-                <a:ea typeface="Malgun Gothic"/>
-                <a:cs typeface="Malgun Gothic"/>
-              </a:defRPr>
-            </a:pPr>
-            <a:r>
-              <a:rPr sz="1500" b="0">
-                <a:solidFill>
-                  <a:srgbClr val="15253E"/>
-                </a:solidFill>
-                <a:latin typeface="Malgun Gothic"/>
-                <a:ea typeface="Malgun Gothic"/>
-                <a:cs typeface="Malgun Gothic"/>
-              </a:rPr>
-              <a:t>세션·토큰 카드 통일</a:t>
-            </a:r>
-          </a:p>
-        </p:txBody>
-      </p:sp>
-      <p:sp>
-        <p:nvSpPr>
-          <p:cNvPr id="10" name="profile-locale">
-            <a:extLst xmlns:a="http://schemas.openxmlformats.org/drawingml/2006/main">
-              <a:ext uri="{FF2B5EF4-FFF2-40B4-BE49-F238E27FC236}">
-                <a16:creationId xmlns:a16="http://schemas.microsoft.com/office/drawing/2014/main" id="{61A9A6BD-8E2C-4894-93A0-DEE7AB1A8EB9}"/>
-              </a:ext>
-            </a:extLst>
-          </p:cNvPr>
-          <p:cNvSpPr>
-            <a:spLocks xmlns:a="http://schemas.openxmlformats.org/drawingml/2006/main" noGrp="1"/>
-          </p:cNvSpPr>
-          <p:nvPr/>
-        </p:nvSpPr>
-        <p:spPr>
-          <a:xfrm xmlns:a="http://schemas.openxmlformats.org/drawingml/2006/main">
-            <a:off x="476250" y="5962650"/>
-            <a:ext cx="10668000" cy="323850"/>
+              <a:defRPr sz="1350" b="0">
+                <a:solidFill>
+                  <a:srgbClr val="15253E"/>
+                </a:solidFill>
+                <a:latin typeface="Malgun Gothic"/>
+                <a:ea typeface="Malgun Gothic"/>
+                <a:cs typeface="Malgun Gothic"/>
+              </a:defRPr>
+            </a:pPr>
+            <a:r>
+              <a:rPr sz="1350" b="0">
+                <a:solidFill>
+                  <a:srgbClr val="15253E"/>
+                </a:solidFill>
+                <a:latin typeface="Malgun Gothic"/>
+                <a:ea typeface="Malgun Gothic"/>
+                <a:cs typeface="Malgun Gothic"/>
+              </a:rPr>
+              <a:t>설정 · 작성기 · 검색 초기화</a:t>
+            </a:r>
+          </a:p>
+        </p:txBody>
+      </p:sp>
+      <p:sp>
+        <p:nvSpPr>
+          <p:cNvPr id="10" name="entry-result">
+            <a:extLst xmlns:a="http://schemas.openxmlformats.org/drawingml/2006/main">
+              <a:ext uri="{FF2B5EF4-FFF2-40B4-BE49-F238E27FC236}">
+                <a16:creationId xmlns:a16="http://schemas.microsoft.com/office/drawing/2014/main" id="{909C937E-DAB7-4447-9BAC-BB60B36EA3C2}"/>
+              </a:ext>
+            </a:extLst>
+          </p:cNvPr>
+          <p:cNvSpPr>
+            <a:spLocks xmlns:a="http://schemas.openxmlformats.org/drawingml/2006/main" noGrp="1"/>
+          </p:cNvSpPr>
+          <p:nvPr/>
+        </p:nvSpPr>
+        <p:spPr>
+          <a:xfrm xmlns:a="http://schemas.openxmlformats.org/drawingml/2006/main">
+            <a:off x="7524750" y="4171950"/>
+            <a:ext cx="3905250" cy="1104900"/>
+          </a:xfrm>
+          <a:prstGeom xmlns:a="http://schemas.openxmlformats.org/drawingml/2006/main" prst="roundRect">
+            <a:avLst>
+              <a:gd name="adj" fmla="val 6897"/>
+            </a:avLst>
+          </a:prstGeom>
+          <a:solidFill xmlns:a="http://schemas.openxmlformats.org/drawingml/2006/main">
+            <a:srgbClr val="FFF6DF"/>
+          </a:solidFill>
+          <a:ln xmlns:a="http://schemas.openxmlformats.org/drawingml/2006/main" w="9525">
+            <a:solidFill>
+              <a:srgbClr val="E4B955"/>
+            </a:solidFill>
+            <a:prstDash val="solid"/>
+          </a:ln>
+        </p:spPr>
+      </p:sp>
+      <p:sp>
+        <p:nvSpPr>
+          <p:cNvPr id="11" name="entry-title">
+            <a:extLst xmlns:a="http://schemas.openxmlformats.org/drawingml/2006/main">
+              <a:ext uri="{FF2B5EF4-FFF2-40B4-BE49-F238E27FC236}">
+                <a16:creationId xmlns:a16="http://schemas.microsoft.com/office/drawing/2014/main" id="{40B66CCD-CAAB-46D7-9F95-E646147B36F6}"/>
+              </a:ext>
+            </a:extLst>
+          </p:cNvPr>
+          <p:cNvSpPr>
+            <a:spLocks xmlns:a="http://schemas.openxmlformats.org/drawingml/2006/main" noGrp="1"/>
+          </p:cNvSpPr>
+          <p:nvPr/>
+        </p:nvSpPr>
+        <p:spPr>
+          <a:xfrm xmlns:a="http://schemas.openxmlformats.org/drawingml/2006/main">
+            <a:off x="7810500" y="4362450"/>
+            <a:ext cx="3333750" cy="304800"/>
           </a:xfrm>
           <a:prstGeom xmlns:a="http://schemas.openxmlformats.org/drawingml/2006/main" prst="rect">
             <a:avLst/>
@@ -5423,8 +5361,142 @@
           <a:lstStyle xmlns:a="http://schemas.openxmlformats.org/drawingml/2006/main"/>
           <a:p xmlns:a="http://schemas.openxmlformats.org/drawingml/2006/main">
             <a:pPr algn="ctr">
-              <a:buNone/>
-              <a:defRPr sz="1500" b="1">
+              <a:defRPr sz="1800" b="1">
+                <a:solidFill>
+                  <a:srgbClr val="9A6700"/>
+                </a:solidFill>
+                <a:latin typeface="Malgun Gothic"/>
+                <a:ea typeface="Malgun Gothic"/>
+                <a:cs typeface="Malgun Gothic"/>
+              </a:defRPr>
+            </a:pPr>
+            <a:r>
+              <a:rPr sz="1800" b="1">
+                <a:solidFill>
+                  <a:srgbClr val="9A6700"/>
+                </a:solidFill>
+                <a:latin typeface="Malgun Gothic"/>
+                <a:ea typeface="Malgun Gothic"/>
+                <a:cs typeface="Malgun Gothic"/>
+              </a:rPr>
+              <a:t>첫 게시물 진입</a:t>
+            </a:r>
+          </a:p>
+        </p:txBody>
+      </p:sp>
+      <p:sp>
+        <p:nvSpPr>
+          <p:cNvPr id="12" name="entry-copy">
+            <a:extLst xmlns:a="http://schemas.openxmlformats.org/drawingml/2006/main">
+              <a:ext uri="{FF2B5EF4-FFF2-40B4-BE49-F238E27FC236}">
+                <a16:creationId xmlns:a16="http://schemas.microsoft.com/office/drawing/2014/main" id="{35BC0C33-CC4D-45B9-BA95-44C2AC2BBD5C}"/>
+              </a:ext>
+            </a:extLst>
+          </p:cNvPr>
+          <p:cNvSpPr>
+            <a:spLocks xmlns:a="http://schemas.openxmlformats.org/drawingml/2006/main" noGrp="1"/>
+          </p:cNvSpPr>
+          <p:nvPr/>
+        </p:nvSpPr>
+        <p:spPr>
+          <a:xfrm xmlns:a="http://schemas.openxmlformats.org/drawingml/2006/main">
+            <a:off x="7810500" y="4743450"/>
+            <a:ext cx="3333750" cy="438150"/>
+          </a:xfrm>
+          <a:prstGeom xmlns:a="http://schemas.openxmlformats.org/drawingml/2006/main" prst="rect">
+            <a:avLst/>
+          </a:prstGeom>
+          <a:noFill xmlns:a="http://schemas.openxmlformats.org/drawingml/2006/main"/>
+          <a:ln xmlns:a="http://schemas.openxmlformats.org/drawingml/2006/main" w="0">
+            <a:noFill/>
+            <a:prstDash val="solid"/>
+          </a:ln>
+        </p:spPr>
+        <p:txBody>
+          <a:bodyPr xmlns:a="http://schemas.openxmlformats.org/drawingml/2006/main"/>
+          <a:lstStyle xmlns:a="http://schemas.openxmlformats.org/drawingml/2006/main"/>
+          <a:p xmlns:a="http://schemas.openxmlformats.org/drawingml/2006/main">
+            <a:pPr algn="ctr">
+              <a:defRPr sz="1350" b="0">
+                <a:solidFill>
+                  <a:srgbClr val="15253E"/>
+                </a:solidFill>
+                <a:latin typeface="Malgun Gothic"/>
+                <a:ea typeface="Malgun Gothic"/>
+                <a:cs typeface="Malgun Gothic"/>
+              </a:defRPr>
+            </a:pPr>
+            <a:r>
+              <a:rPr sz="1350" b="0">
+                <a:solidFill>
+                  <a:srgbClr val="15253E"/>
+                </a:solidFill>
+                <a:latin typeface="Malgun Gothic"/>
+                <a:ea typeface="Malgun Gothic"/>
+                <a:cs typeface="Malgun Gothic"/>
+              </a:rPr>
+              <a:t>게시물 번호 제거 · scrollY 0</a:t>
+            </a:r>
+          </a:p>
+          <a:p xmlns:a="http://schemas.openxmlformats.org/drawingml/2006/main">
+            <a:pPr algn="ctr">
+              <a:defRPr sz="1350" b="0">
+                <a:solidFill>
+                  <a:srgbClr val="15253E"/>
+                </a:solidFill>
+                <a:latin typeface="Malgun Gothic"/>
+                <a:ea typeface="Malgun Gothic"/>
+                <a:cs typeface="Malgun Gothic"/>
+              </a:defRPr>
+            </a:pPr>
+            <a:r>
+              <a:rPr sz="1350" b="0">
+                <a:solidFill>
+                  <a:srgbClr val="15253E"/>
+                </a:solidFill>
+                <a:latin typeface="Malgun Gothic"/>
+                <a:ea typeface="Malgun Gothic"/>
+                <a:cs typeface="Malgun Gothic"/>
+              </a:rPr>
+              <a:t>알림의 특정 답변 링크는 유지</a:t>
+            </a:r>
+          </a:p>
+        </p:txBody>
+      </p:sp>
+      <p:sp>
+        <p:nvSpPr>
+          <p:cNvPr id="13" name="icon-result-strip">
+            <a:extLst xmlns:a="http://schemas.openxmlformats.org/drawingml/2006/main">
+              <a:ext uri="{FF2B5EF4-FFF2-40B4-BE49-F238E27FC236}">
+                <a16:creationId xmlns:a16="http://schemas.microsoft.com/office/drawing/2014/main" id="{3874FB1B-26F5-4C32-AA45-914B8C532F08}"/>
+              </a:ext>
+            </a:extLst>
+          </p:cNvPr>
+          <p:cNvSpPr>
+            <a:spLocks xmlns:a="http://schemas.openxmlformats.org/drawingml/2006/main" noGrp="1"/>
+          </p:cNvSpPr>
+          <p:nvPr/>
+        </p:nvSpPr>
+        <p:spPr>
+          <a:xfrm xmlns:a="http://schemas.openxmlformats.org/drawingml/2006/main">
+            <a:off x="857250" y="5924550"/>
+            <a:ext cx="10477500" cy="342900"/>
+          </a:xfrm>
+          <a:prstGeom xmlns:a="http://schemas.openxmlformats.org/drawingml/2006/main" prst="rect">
+            <a:avLst/>
+          </a:prstGeom>
+          <a:noFill xmlns:a="http://schemas.openxmlformats.org/drawingml/2006/main"/>
+          <a:ln xmlns:a="http://schemas.openxmlformats.org/drawingml/2006/main" w="0">
+            <a:noFill/>
+            <a:prstDash val="solid"/>
+          </a:ln>
+        </p:spPr>
+        <p:txBody>
+          <a:bodyPr xmlns:a="http://schemas.openxmlformats.org/drawingml/2006/main"/>
+          <a:lstStyle xmlns:a="http://schemas.openxmlformats.org/drawingml/2006/main"/>
+          <a:p xmlns:a="http://schemas.openxmlformats.org/drawingml/2006/main">
+            <a:pPr algn="ctr">
+              <a:defRPr sz="1650" b="1">
                 <a:solidFill>
                   <a:srgbClr val="155EEF"/>
                 </a:solidFill>
@@ -5434,7 +5506,7 @@
               </a:defRPr>
             </a:pPr>
             <a:r>
-              <a:rPr sz="1500" b="1">
+              <a:rPr sz="1650" b="1">
                 <a:solidFill>
                   <a:srgbClr val="155EEF"/>
                 </a:solidFill>
@@ -5442,7 +5514,7 @@
                 <a:ea typeface="Malgun Gothic"/>
                 <a:cs typeface="Malgun Gothic"/>
               </a:rPr>
-              <a:t>해결 답변 알림 · 새 토큰 · 검색 정보 설정까지 한글</a:t>
+              <a:t>점 · 더하기 · 깨진 사각형 대체 아이콘 0건</a:t>
             </a:r>
           </a:p>
         </p:txBody>
@@ -5450,7 +5522,7 @@
     </p:spTree>
     <p:extLst>
       <p:ext uri="{BB962C8B-B14F-4D97-AF65-F5344CB8AC3E}">
-        <p14:creationId xmlns:p14="http://schemas.microsoft.com/office/powerpoint/2010/main" val="1966110520"/>
+        <p14:creationId xmlns:p14="http://schemas.microsoft.com/office/powerpoint/2010/main" val="1214194857"/>
       </p:ext>
     </p:extLst>
   </p:cSld>
@@ -5478,10 +5550,10 @@
       </p:grpSpPr>
       <p:sp>
         <p:nvSpPr>
-          <p:cNvPr id="11" name="title-5">
-            <a:extLst xmlns:a="http://schemas.openxmlformats.org/drawingml/2006/main">
-              <a:ext uri="{FF2B5EF4-FFF2-40B4-BE49-F238E27FC236}">
-                <a16:creationId xmlns:a16="http://schemas.microsoft.com/office/drawing/2014/main" id="{15B4B5EF-39AC-41BD-860C-4B8A8FDBAAA7}"/>
+          <p:cNvPr id="11" name="title-7">
+            <a:extLst xmlns:a="http://schemas.openxmlformats.org/drawingml/2006/main">
+              <a:ext uri="{FF2B5EF4-FFF2-40B4-BE49-F238E27FC236}">
+                <a16:creationId xmlns:a16="http://schemas.microsoft.com/office/drawing/2014/main" id="{ECF60069-4CE1-4B1B-8A3C-22D7029B1DE7}"/>
               </a:ext>
             </a:extLst>
           </p:cNvPr>
@@ -5509,7 +5581,6 @@
           <a:lstStyle xmlns:a="http://schemas.openxmlformats.org/drawingml/2006/main"/>
           <a:p xmlns:a="http://schemas.openxmlformats.org/drawingml/2006/main">
             <a:pPr algn="l">
-              <a:buNone/>
               <a:defRPr sz="3000" b="1">
                 <a:solidFill>
                   <a:srgbClr val="15253E"/>
@@ -5528,17 +5599,17 @@
                 <a:ea typeface="Malgun Gothic"/>
                 <a:cs typeface="Malgun Gothic"/>
               </a:rPr>
-              <a:t>태그와 최근 토론을 읽기 쉬운 정보 구조로 나눴습니다</a:t>
-            </a:r>
-          </a:p>
-        </p:txBody>
-      </p:sp>
-      <p:sp>
-        <p:nvSpPr>
-          <p:cNvPr id="2" name="page-5">
-            <a:extLst xmlns:a="http://schemas.openxmlformats.org/drawingml/2006/main">
-              <a:ext uri="{FF2B5EF4-FFF2-40B4-BE49-F238E27FC236}">
-                <a16:creationId xmlns:a16="http://schemas.microsoft.com/office/drawing/2014/main" id="{E85E0CD4-3FBE-4910-B306-0119C668BAFC}"/>
+              <a:t>태그와 보조 태그를 읽기 쉬운 구조로 나눴습니다</a:t>
+            </a:r>
+          </a:p>
+        </p:txBody>
+      </p:sp>
+      <p:sp>
+        <p:nvSpPr>
+          <p:cNvPr id="2" name="page-7">
+            <a:extLst xmlns:a="http://schemas.openxmlformats.org/drawingml/2006/main">
+              <a:ext uri="{FF2B5EF4-FFF2-40B4-BE49-F238E27FC236}">
+                <a16:creationId xmlns:a16="http://schemas.microsoft.com/office/drawing/2014/main" id="{BFA962F0-2088-4F08-83B5-DBDD988DB8C1}"/>
               </a:ext>
             </a:extLst>
           </p:cNvPr>
@@ -5566,7 +5637,6 @@
           <a:lstStyle xmlns:a="http://schemas.openxmlformats.org/drawingml/2006/main"/>
           <a:p xmlns:a="http://schemas.openxmlformats.org/drawingml/2006/main">
             <a:pPr algn="r">
-              <a:buNone/>
               <a:defRPr sz="1200" b="0">
                 <a:solidFill>
                   <a:srgbClr val="52647D"/>
@@ -5592,48 +5662,50 @@
       </p:sp>
       <p:pic>
         <p:nvPicPr>
-          <p:cNvPr id="15" name=""/>
+          <p:cNvPr id="13" name=""/>
           <p:cNvPicPr>
             <a:picLocks xmlns:a="http://schemas.openxmlformats.org/drawingml/2006/main" noChangeAspect="1"/>
           </p:cNvPicPr>
           <p:nvPr/>
         </p:nvPicPr>
         <p:blipFill>
-          <a:blip xmlns:r="http://schemas.openxmlformats.org/officeDocument/2006/relationships" xmlns:a="http://schemas.openxmlformats.org/drawingml/2006/main" r:embed="Rd892e131d29041c9"/>
+          <a:blip xmlns:r="http://schemas.openxmlformats.org/officeDocument/2006/relationships" xmlns:a="http://schemas.openxmlformats.org/drawingml/2006/main" r:embed="R955ff43caf28431d"/>
           <a:stretch xmlns:a="http://schemas.openxmlformats.org/drawingml/2006/main"/>
         </p:blipFill>
         <p:spPr>
-          <a:xfrm xmlns:a="http://schemas.openxmlformats.org/drawingml/2006/main" flipH="0" flipV="0">
-            <a:off x="457200" y="1314450"/>
+          <a:xfrm xmlns:a="http://schemas.openxmlformats.org/drawingml/2006/main">
+            <a:off x="457200" y="1281113"/>
             <a:ext cx="7239000" cy="4524375"/>
-          </a:xfrm>
-          <a:prstGeom xmlns:a="http://schemas.openxmlformats.org/drawingml/2006/main" prst="roundRect">
-            <a:avLst/>
-          </a:prstGeom>
-        </p:spPr>
-      </p:pic>
-      <p:sp>
-        <p:nvSpPr>
-          <p:cNvPr id="4" name="profile-result">
-            <a:extLst xmlns:a="http://schemas.openxmlformats.org/drawingml/2006/main">
-              <a:ext uri="{FF2B5EF4-FFF2-40B4-BE49-F238E27FC236}">
-                <a16:creationId xmlns:a16="http://schemas.microsoft.com/office/drawing/2014/main" id="{F2315AED-2B85-41E1-A5D8-A0DDEE6A5244}"/>
-              </a:ext>
-            </a:extLst>
-          </p:cNvPr>
-          <p:cNvSpPr>
-            <a:spLocks xmlns:a="http://schemas.openxmlformats.org/drawingml/2006/main" noGrp="1"/>
-          </p:cNvSpPr>
-          <p:nvPr/>
-        </p:nvSpPr>
-        <p:spPr>
-          <a:xfrm xmlns:a="http://schemas.openxmlformats.org/drawingml/2006/main">
-            <a:off x="8096250" y="1485900"/>
-            <a:ext cx="3333750" cy="1790700"/>
           </a:xfrm>
           <a:prstGeom xmlns:a="http://schemas.openxmlformats.org/drawingml/2006/main" prst="roundRect">
             <a:avLst>
-              <a:gd name="adj" fmla="val 4255"/>
+              <a:gd name="adj" fmla="val 2500"/>
+            </a:avLst>
+          </a:prstGeom>
+        </p:spPr>
+      </p:pic>
+      <p:sp>
+        <p:nvSpPr>
+          <p:cNvPr id="4" name="primary-tags">
+            <a:extLst xmlns:a="http://schemas.openxmlformats.org/drawingml/2006/main">
+              <a:ext uri="{FF2B5EF4-FFF2-40B4-BE49-F238E27FC236}">
+                <a16:creationId xmlns:a16="http://schemas.microsoft.com/office/drawing/2014/main" id="{CCD30C19-C709-47AB-BBB7-66898B825990}"/>
+              </a:ext>
+            </a:extLst>
+          </p:cNvPr>
+          <p:cNvSpPr>
+            <a:spLocks xmlns:a="http://schemas.openxmlformats.org/drawingml/2006/main" noGrp="1"/>
+          </p:cNvSpPr>
+          <p:nvPr/>
+        </p:nvSpPr>
+        <p:spPr>
+          <a:xfrm xmlns:a="http://schemas.openxmlformats.org/drawingml/2006/main">
+            <a:off x="8096250" y="1428750"/>
+            <a:ext cx="3333750" cy="1695450"/>
+          </a:xfrm>
+          <a:prstGeom xmlns:a="http://schemas.openxmlformats.org/drawingml/2006/main" prst="roundRect">
+            <a:avLst>
+              <a:gd name="adj" fmla="val 4494"/>
             </a:avLst>
           </a:prstGeom>
           <a:solidFill xmlns:a="http://schemas.openxmlformats.org/drawingml/2006/main">
@@ -5649,22 +5721,22 @@
       </p:sp>
       <p:sp>
         <p:nvSpPr>
-          <p:cNvPr id="5" name="profile-title">
-            <a:extLst xmlns:a="http://schemas.openxmlformats.org/drawingml/2006/main">
-              <a:ext uri="{FF2B5EF4-FFF2-40B4-BE49-F238E27FC236}">
-                <a16:creationId xmlns:a16="http://schemas.microsoft.com/office/drawing/2014/main" id="{F20E61C3-61BF-46BF-8C05-62259B784B9C}"/>
-              </a:ext>
-            </a:extLst>
-          </p:cNvPr>
-          <p:cNvSpPr>
-            <a:spLocks xmlns:a="http://schemas.openxmlformats.org/drawingml/2006/main" noGrp="1"/>
-          </p:cNvSpPr>
-          <p:nvPr/>
-        </p:nvSpPr>
-        <p:spPr>
-          <a:xfrm xmlns:a="http://schemas.openxmlformats.org/drawingml/2006/main">
-            <a:off x="8382000" y="1752600"/>
-            <a:ext cx="2762250" cy="361950"/>
+          <p:cNvPr id="5" name="primary-tags-title">
+            <a:extLst xmlns:a="http://schemas.openxmlformats.org/drawingml/2006/main">
+              <a:ext uri="{FF2B5EF4-FFF2-40B4-BE49-F238E27FC236}">
+                <a16:creationId xmlns:a16="http://schemas.microsoft.com/office/drawing/2014/main" id="{866D92E6-7065-4689-BB3C-CC0202558912}"/>
+              </a:ext>
+            </a:extLst>
+          </p:cNvPr>
+          <p:cNvSpPr>
+            <a:spLocks xmlns:a="http://schemas.openxmlformats.org/drawingml/2006/main" noGrp="1"/>
+          </p:cNvSpPr>
+          <p:nvPr/>
+        </p:nvSpPr>
+        <p:spPr>
+          <a:xfrm xmlns:a="http://schemas.openxmlformats.org/drawingml/2006/main">
+            <a:off x="8382000" y="1676400"/>
+            <a:ext cx="2762250" cy="342900"/>
           </a:xfrm>
           <a:prstGeom xmlns:a="http://schemas.openxmlformats.org/drawingml/2006/main" prst="rect">
             <a:avLst/>
@@ -5680,8 +5752,7 @@
           <a:lstStyle xmlns:a="http://schemas.openxmlformats.org/drawingml/2006/main"/>
           <a:p xmlns:a="http://schemas.openxmlformats.org/drawingml/2006/main">
             <a:pPr algn="ctr">
-              <a:buNone/>
-              <a:defRPr sz="2025" b="1">
+              <a:defRPr sz="1950" b="1">
                 <a:solidFill>
                   <a:srgbClr val="155EEF"/>
                 </a:solidFill>
@@ -5691,7 +5762,7 @@
               </a:defRPr>
             </a:pPr>
             <a:r>
-              <a:rPr sz="2025" b="1">
+              <a:rPr sz="1950" b="1">
                 <a:solidFill>
                   <a:srgbClr val="155EEF"/>
                 </a:solidFill>
@@ -5706,22 +5777,22 @@
       </p:sp>
       <p:sp>
         <p:nvSpPr>
-          <p:cNvPr id="6" name="profile-copy">
-            <a:extLst xmlns:a="http://schemas.openxmlformats.org/drawingml/2006/main">
-              <a:ext uri="{FF2B5EF4-FFF2-40B4-BE49-F238E27FC236}">
-                <a16:creationId xmlns:a16="http://schemas.microsoft.com/office/drawing/2014/main" id="{5DB761A4-0783-41E0-9D9F-1C0C49EB7A01}"/>
-              </a:ext>
-            </a:extLst>
-          </p:cNvPr>
-          <p:cNvSpPr>
-            <a:spLocks xmlns:a="http://schemas.openxmlformats.org/drawingml/2006/main" noGrp="1"/>
-          </p:cNvSpPr>
-          <p:nvPr/>
-        </p:nvSpPr>
-        <p:spPr>
-          <a:xfrm xmlns:a="http://schemas.openxmlformats.org/drawingml/2006/main">
-            <a:off x="8382000" y="2247900"/>
-            <a:ext cx="2762250" cy="838200"/>
+          <p:cNvPr id="6" name="primary-tags-copy">
+            <a:extLst xmlns:a="http://schemas.openxmlformats.org/drawingml/2006/main">
+              <a:ext uri="{FF2B5EF4-FFF2-40B4-BE49-F238E27FC236}">
+                <a16:creationId xmlns:a16="http://schemas.microsoft.com/office/drawing/2014/main" id="{4BE870E9-3AAA-4DCA-834F-25AA733A9FD3}"/>
+              </a:ext>
+            </a:extLst>
+          </p:cNvPr>
+          <p:cNvSpPr>
+            <a:spLocks xmlns:a="http://schemas.openxmlformats.org/drawingml/2006/main" noGrp="1"/>
+          </p:cNvSpPr>
+          <p:nvPr/>
+        </p:nvSpPr>
+        <p:spPr>
+          <a:xfrm xmlns:a="http://schemas.openxmlformats.org/drawingml/2006/main">
+            <a:off x="8382000" y="2152650"/>
+            <a:ext cx="2762250" cy="723900"/>
           </a:xfrm>
           <a:prstGeom xmlns:a="http://schemas.openxmlformats.org/drawingml/2006/main" prst="rect">
             <a:avLst/>
@@ -5737,18 +5808,17 @@
           <a:lstStyle xmlns:a="http://schemas.openxmlformats.org/drawingml/2006/main"/>
           <a:p xmlns:a="http://schemas.openxmlformats.org/drawingml/2006/main">
             <a:pPr algn="ctr">
-              <a:buNone/>
-              <a:defRPr sz="1500" b="0">
-                <a:solidFill>
-                  <a:srgbClr val="15253E"/>
-                </a:solidFill>
-                <a:latin typeface="Malgun Gothic"/>
-                <a:ea typeface="Malgun Gothic"/>
-                <a:cs typeface="Malgun Gothic"/>
-              </a:defRPr>
-            </a:pPr>
-            <a:r>
-              <a:rPr sz="1500" b="0">
+              <a:defRPr sz="1425" b="0">
+                <a:solidFill>
+                  <a:srgbClr val="15253E"/>
+                </a:solidFill>
+                <a:latin typeface="Malgun Gothic"/>
+                <a:ea typeface="Malgun Gothic"/>
+                <a:cs typeface="Malgun Gothic"/>
+              </a:defRPr>
+            </a:pPr>
+            <a:r>
+              <a:rPr sz="1425" b="0">
                 <a:solidFill>
                   <a:srgbClr val="15253E"/>
                 </a:solidFill>
@@ -5761,18 +5831,17 @@
           </a:p>
           <a:p xmlns:a="http://schemas.openxmlformats.org/drawingml/2006/main">
             <a:pPr algn="ctr">
-              <a:buNone/>
-              <a:defRPr sz="1500" b="0">
-                <a:solidFill>
-                  <a:srgbClr val="15253E"/>
-                </a:solidFill>
-                <a:latin typeface="Malgun Gothic"/>
-                <a:ea typeface="Malgun Gothic"/>
-                <a:cs typeface="Malgun Gothic"/>
-              </a:defRPr>
-            </a:pPr>
-            <a:r>
-              <a:rPr sz="1500" b="0">
+              <a:defRPr sz="1425" b="0">
+                <a:solidFill>
+                  <a:srgbClr val="15253E"/>
+                </a:solidFill>
+                <a:latin typeface="Malgun Gothic"/>
+                <a:ea typeface="Malgun Gothic"/>
+                <a:cs typeface="Malgun Gothic"/>
+              </a:defRPr>
+            </a:pPr>
+            <a:r>
+              <a:rPr sz="1425" b="0">
                 <a:solidFill>
                   <a:srgbClr val="15253E"/>
                 </a:solidFill>
@@ -5785,18 +5854,17 @@
           </a:p>
           <a:p xmlns:a="http://schemas.openxmlformats.org/drawingml/2006/main">
             <a:pPr algn="ctr">
-              <a:buNone/>
-              <a:defRPr sz="1500" b="0">
-                <a:solidFill>
-                  <a:srgbClr val="15253E"/>
-                </a:solidFill>
-                <a:latin typeface="Malgun Gothic"/>
-                <a:ea typeface="Malgun Gothic"/>
-                <a:cs typeface="Malgun Gothic"/>
-              </a:defRPr>
-            </a:pPr>
-            <a:r>
-              <a:rPr sz="1500" b="0">
+              <a:defRPr sz="1425" b="0">
+                <a:solidFill>
+                  <a:srgbClr val="15253E"/>
+                </a:solidFill>
+                <a:latin typeface="Malgun Gothic"/>
+                <a:ea typeface="Malgun Gothic"/>
+                <a:cs typeface="Malgun Gothic"/>
+              </a:defRPr>
+            </a:pPr>
+            <a:r>
+              <a:rPr sz="1425" b="0">
                 <a:solidFill>
                   <a:srgbClr val="15253E"/>
                 </a:solidFill>
@@ -5811,26 +5879,26 @@
       </p:sp>
       <p:sp>
         <p:nvSpPr>
-          <p:cNvPr id="7" name="navigation-result">
-            <a:extLst xmlns:a="http://schemas.openxmlformats.org/drawingml/2006/main">
-              <a:ext uri="{FF2B5EF4-FFF2-40B4-BE49-F238E27FC236}">
-                <a16:creationId xmlns:a16="http://schemas.microsoft.com/office/drawing/2014/main" id="{2257FE94-6B17-44D6-9670-E774B0CFBBC8}"/>
-              </a:ext>
-            </a:extLst>
-          </p:cNvPr>
-          <p:cNvSpPr>
-            <a:spLocks xmlns:a="http://schemas.openxmlformats.org/drawingml/2006/main" noGrp="1"/>
-          </p:cNvSpPr>
-          <p:nvPr/>
-        </p:nvSpPr>
-        <p:spPr>
-          <a:xfrm xmlns:a="http://schemas.openxmlformats.org/drawingml/2006/main">
-            <a:off x="8096250" y="3600450"/>
-            <a:ext cx="3333750" cy="1790700"/>
+          <p:cNvPr id="7" name="secondary-tags">
+            <a:extLst xmlns:a="http://schemas.openxmlformats.org/drawingml/2006/main">
+              <a:ext uri="{FF2B5EF4-FFF2-40B4-BE49-F238E27FC236}">
+                <a16:creationId xmlns:a16="http://schemas.microsoft.com/office/drawing/2014/main" id="{B7FD7FEF-6EF5-4C7F-BBE9-DFFE92FC7DCA}"/>
+              </a:ext>
+            </a:extLst>
+          </p:cNvPr>
+          <p:cNvSpPr>
+            <a:spLocks xmlns:a="http://schemas.openxmlformats.org/drawingml/2006/main" noGrp="1"/>
+          </p:cNvSpPr>
+          <p:nvPr/>
+        </p:nvSpPr>
+        <p:spPr>
+          <a:xfrm xmlns:a="http://schemas.openxmlformats.org/drawingml/2006/main">
+            <a:off x="8096250" y="3467100"/>
+            <a:ext cx="3333750" cy="1695450"/>
           </a:xfrm>
           <a:prstGeom xmlns:a="http://schemas.openxmlformats.org/drawingml/2006/main" prst="roundRect">
             <a:avLst>
-              <a:gd name="adj" fmla="val 4255"/>
+              <a:gd name="adj" fmla="val 4494"/>
             </a:avLst>
           </a:prstGeom>
           <a:solidFill xmlns:a="http://schemas.openxmlformats.org/drawingml/2006/main">
@@ -5846,22 +5914,22 @@
       </p:sp>
       <p:sp>
         <p:nvSpPr>
-          <p:cNvPr id="8" name="navigation-title">
-            <a:extLst xmlns:a="http://schemas.openxmlformats.org/drawingml/2006/main">
-              <a:ext uri="{FF2B5EF4-FFF2-40B4-BE49-F238E27FC236}">
-                <a16:creationId xmlns:a16="http://schemas.microsoft.com/office/drawing/2014/main" id="{46964870-783A-46F5-A4D8-7731A9E8F348}"/>
-              </a:ext>
-            </a:extLst>
-          </p:cNvPr>
-          <p:cNvSpPr>
-            <a:spLocks xmlns:a="http://schemas.openxmlformats.org/drawingml/2006/main" noGrp="1"/>
-          </p:cNvSpPr>
-          <p:nvPr/>
-        </p:nvSpPr>
-        <p:spPr>
-          <a:xfrm xmlns:a="http://schemas.openxmlformats.org/drawingml/2006/main">
-            <a:off x="8382000" y="3867150"/>
-            <a:ext cx="2762250" cy="361950"/>
+          <p:cNvPr id="8" name="secondary-tags-title">
+            <a:extLst xmlns:a="http://schemas.openxmlformats.org/drawingml/2006/main">
+              <a:ext uri="{FF2B5EF4-FFF2-40B4-BE49-F238E27FC236}">
+                <a16:creationId xmlns:a16="http://schemas.microsoft.com/office/drawing/2014/main" id="{CFEFABCD-398A-4991-B783-C049767D8734}"/>
+              </a:ext>
+            </a:extLst>
+          </p:cNvPr>
+          <p:cNvSpPr>
+            <a:spLocks xmlns:a="http://schemas.openxmlformats.org/drawingml/2006/main" noGrp="1"/>
+          </p:cNvSpPr>
+          <p:nvPr/>
+        </p:nvSpPr>
+        <p:spPr>
+          <a:xfrm xmlns:a="http://schemas.openxmlformats.org/drawingml/2006/main">
+            <a:off x="8382000" y="3714750"/>
+            <a:ext cx="2762250" cy="342900"/>
           </a:xfrm>
           <a:prstGeom xmlns:a="http://schemas.openxmlformats.org/drawingml/2006/main" prst="rect">
             <a:avLst/>
@@ -5877,8 +5945,7 @@
           <a:lstStyle xmlns:a="http://schemas.openxmlformats.org/drawingml/2006/main"/>
           <a:p xmlns:a="http://schemas.openxmlformats.org/drawingml/2006/main">
             <a:pPr algn="ctr">
-              <a:buNone/>
-              <a:defRPr sz="2025" b="1">
+              <a:defRPr sz="1950" b="1">
                 <a:solidFill>
                   <a:srgbClr val="078248"/>
                 </a:solidFill>
@@ -5888,7 +5955,7 @@
               </a:defRPr>
             </a:pPr>
             <a:r>
-              <a:rPr sz="2025" b="1">
+              <a:rPr sz="1950" b="1">
                 <a:solidFill>
                   <a:srgbClr val="078248"/>
                 </a:solidFill>
@@ -5903,22 +5970,22 @@
       </p:sp>
       <p:sp>
         <p:nvSpPr>
-          <p:cNvPr id="9" name="navigation-copy">
-            <a:extLst xmlns:a="http://schemas.openxmlformats.org/drawingml/2006/main">
-              <a:ext uri="{FF2B5EF4-FFF2-40B4-BE49-F238E27FC236}">
-                <a16:creationId xmlns:a16="http://schemas.microsoft.com/office/drawing/2014/main" id="{347909D2-6157-4120-AFAB-F89F76764F7E}"/>
-              </a:ext>
-            </a:extLst>
-          </p:cNvPr>
-          <p:cNvSpPr>
-            <a:spLocks xmlns:a="http://schemas.openxmlformats.org/drawingml/2006/main" noGrp="1"/>
-          </p:cNvSpPr>
-          <p:nvPr/>
-        </p:nvSpPr>
-        <p:spPr>
-          <a:xfrm xmlns:a="http://schemas.openxmlformats.org/drawingml/2006/main">
-            <a:off x="8382000" y="4362450"/>
-            <a:ext cx="2762250" cy="838200"/>
+          <p:cNvPr id="9" name="secondary-tags-copy">
+            <a:extLst xmlns:a="http://schemas.openxmlformats.org/drawingml/2006/main">
+              <a:ext uri="{FF2B5EF4-FFF2-40B4-BE49-F238E27FC236}">
+                <a16:creationId xmlns:a16="http://schemas.microsoft.com/office/drawing/2014/main" id="{3F33E8E4-88FB-4B0A-A385-F1FF6B45EB88}"/>
+              </a:ext>
+            </a:extLst>
+          </p:cNvPr>
+          <p:cNvSpPr>
+            <a:spLocks xmlns:a="http://schemas.openxmlformats.org/drawingml/2006/main" noGrp="1"/>
+          </p:cNvSpPr>
+          <p:nvPr/>
+        </p:nvSpPr>
+        <p:spPr>
+          <a:xfrm xmlns:a="http://schemas.openxmlformats.org/drawingml/2006/main">
+            <a:off x="8382000" y="4191000"/>
+            <a:ext cx="2762250" cy="723900"/>
           </a:xfrm>
           <a:prstGeom xmlns:a="http://schemas.openxmlformats.org/drawingml/2006/main" prst="rect">
             <a:avLst/>
@@ -5934,96 +6001,93 @@
           <a:lstStyle xmlns:a="http://schemas.openxmlformats.org/drawingml/2006/main"/>
           <a:p xmlns:a="http://schemas.openxmlformats.org/drawingml/2006/main">
             <a:pPr algn="ctr">
-              <a:buNone/>
-              <a:defRPr sz="1500" b="0">
-                <a:solidFill>
-                  <a:srgbClr val="15253E"/>
-                </a:solidFill>
-                <a:latin typeface="Malgun Gothic"/>
-                <a:ea typeface="Malgun Gothic"/>
-                <a:cs typeface="Malgun Gothic"/>
-              </a:defRPr>
-            </a:pPr>
-            <a:r>
-              <a:rPr sz="1500" b="0">
-                <a:solidFill>
-                  <a:srgbClr val="15253E"/>
-                </a:solidFill>
-                <a:latin typeface="Malgun Gothic"/>
-                <a:ea typeface="Malgun Gothic"/>
-                <a:cs typeface="Malgun Gothic"/>
-              </a:rPr>
-              <a:t>별도 4열 구역</a:t>
+              <a:defRPr sz="1425" b="0">
+                <a:solidFill>
+                  <a:srgbClr val="15253E"/>
+                </a:solidFill>
+                <a:latin typeface="Malgun Gothic"/>
+                <a:ea typeface="Malgun Gothic"/>
+                <a:cs typeface="Malgun Gothic"/>
+              </a:defRPr>
+            </a:pPr>
+            <a:r>
+              <a:rPr sz="1425" b="0">
+                <a:solidFill>
+                  <a:srgbClr val="15253E"/>
+                </a:solidFill>
+                <a:latin typeface="Malgun Gothic"/>
+                <a:ea typeface="Malgun Gothic"/>
+                <a:cs typeface="Malgun Gothic"/>
+              </a:rPr>
+              <a:t>별도 4열 구역 · 설명 7건</a:t>
             </a:r>
           </a:p>
           <a:p xmlns:a="http://schemas.openxmlformats.org/drawingml/2006/main">
             <a:pPr algn="ctr">
-              <a:buNone/>
-              <a:defRPr sz="1500" b="0">
-                <a:solidFill>
-                  <a:srgbClr val="15253E"/>
-                </a:solidFill>
-                <a:latin typeface="Malgun Gothic"/>
-                <a:ea typeface="Malgun Gothic"/>
-                <a:cs typeface="Malgun Gothic"/>
-              </a:defRPr>
-            </a:pPr>
-            <a:r>
-              <a:rPr sz="1500" b="0">
-                <a:solidFill>
-                  <a:srgbClr val="15253E"/>
-                </a:solidFill>
-                <a:latin typeface="Malgun Gothic"/>
-                <a:ea typeface="Malgun Gothic"/>
-                <a:cs typeface="Malgun Gothic"/>
-              </a:rPr>
-              <a:t>설명 7건 표시</a:t>
+              <a:defRPr sz="1425" b="0">
+                <a:solidFill>
+                  <a:srgbClr val="15253E"/>
+                </a:solidFill>
+                <a:latin typeface="Malgun Gothic"/>
+                <a:ea typeface="Malgun Gothic"/>
+                <a:cs typeface="Malgun Gothic"/>
+              </a:defRPr>
+            </a:pPr>
+            <a:r>
+              <a:rPr sz="1425" b="0">
+                <a:solidFill>
+                  <a:srgbClr val="15253E"/>
+                </a:solidFill>
+                <a:latin typeface="Malgun Gothic"/>
+                <a:ea typeface="Malgun Gothic"/>
+                <a:cs typeface="Malgun Gothic"/>
+              </a:rPr>
+              <a:t>모바일 한 열 · 넘침 0px</a:t>
             </a:r>
           </a:p>
           <a:p xmlns:a="http://schemas.openxmlformats.org/drawingml/2006/main">
             <a:pPr algn="ctr">
-              <a:buNone/>
-              <a:defRPr sz="1500" b="0">
-                <a:solidFill>
-                  <a:srgbClr val="15253E"/>
-                </a:solidFill>
-                <a:latin typeface="Malgun Gothic"/>
-                <a:ea typeface="Malgun Gothic"/>
-                <a:cs typeface="Malgun Gothic"/>
-              </a:defRPr>
-            </a:pPr>
-            <a:r>
-              <a:rPr sz="1500" b="0">
-                <a:solidFill>
-                  <a:srgbClr val="15253E"/>
-                </a:solidFill>
-                <a:latin typeface="Malgun Gothic"/>
-                <a:ea typeface="Malgun Gothic"/>
-                <a:cs typeface="Malgun Gothic"/>
-              </a:rPr>
-              <a:t>모바일 한 열 · 넘침 0px</a:t>
-            </a:r>
-          </a:p>
-        </p:txBody>
-      </p:sp>
-      <p:sp>
-        <p:nvSpPr>
-          <p:cNvPr id="10" name="profile-locale">
-            <a:extLst xmlns:a="http://schemas.openxmlformats.org/drawingml/2006/main">
-              <a:ext uri="{FF2B5EF4-FFF2-40B4-BE49-F238E27FC236}">
-                <a16:creationId xmlns:a16="http://schemas.microsoft.com/office/drawing/2014/main" id="{61A9A6BD-8E2C-4894-93A0-DEE7AB1A8EB9}"/>
-              </a:ext>
-            </a:extLst>
-          </p:cNvPr>
-          <p:cNvSpPr>
-            <a:spLocks xmlns:a="http://schemas.openxmlformats.org/drawingml/2006/main" noGrp="1"/>
-          </p:cNvSpPr>
-          <p:nvPr/>
-        </p:nvSpPr>
-        <p:spPr>
-          <a:xfrm xmlns:a="http://schemas.openxmlformats.org/drawingml/2006/main">
-            <a:off x="476250" y="5962650"/>
-            <a:ext cx="10668000" cy="323850"/>
+              <a:defRPr sz="1425" b="0">
+                <a:solidFill>
+                  <a:srgbClr val="15253E"/>
+                </a:solidFill>
+                <a:latin typeface="Malgun Gothic"/>
+                <a:ea typeface="Malgun Gothic"/>
+                <a:cs typeface="Malgun Gothic"/>
+              </a:defRPr>
+            </a:pPr>
+            <a:r>
+              <a:rPr sz="1425" b="0">
+                <a:solidFill>
+                  <a:srgbClr val="15253E"/>
+                </a:solidFill>
+                <a:latin typeface="Malgun Gothic"/>
+                <a:ea typeface="Malgun Gothic"/>
+                <a:cs typeface="Malgun Gothic"/>
+              </a:rPr>
+              <a:t>도구 모음 균등 여백</a:t>
+            </a:r>
+          </a:p>
+        </p:txBody>
+      </p:sp>
+      <p:sp>
+        <p:nvSpPr>
+          <p:cNvPr id="10" name="tag-result-strip">
+            <a:extLst xmlns:a="http://schemas.openxmlformats.org/drawingml/2006/main">
+              <a:ext uri="{FF2B5EF4-FFF2-40B4-BE49-F238E27FC236}">
+                <a16:creationId xmlns:a16="http://schemas.microsoft.com/office/drawing/2014/main" id="{1FB2B715-D34D-40AB-87D8-486C1645B0A9}"/>
+              </a:ext>
+            </a:extLst>
+          </p:cNvPr>
+          <p:cNvSpPr>
+            <a:spLocks xmlns:a="http://schemas.openxmlformats.org/drawingml/2006/main" noGrp="1"/>
+          </p:cNvSpPr>
+          <p:nvPr/>
+        </p:nvSpPr>
+        <p:spPr>
+          <a:xfrm xmlns:a="http://schemas.openxmlformats.org/drawingml/2006/main">
+            <a:off x="666750" y="5924550"/>
+            <a:ext cx="10858500" cy="342900"/>
           </a:xfrm>
           <a:prstGeom xmlns:a="http://schemas.openxmlformats.org/drawingml/2006/main" prst="rect">
             <a:avLst/>
@@ -6039,8 +6103,7 @@
           <a:lstStyle xmlns:a="http://schemas.openxmlformats.org/drawingml/2006/main"/>
           <a:p xmlns:a="http://schemas.openxmlformats.org/drawingml/2006/main">
             <a:pPr algn="ctr">
-              <a:buNone/>
-              <a:defRPr sz="1500" b="1">
+              <a:defRPr sz="1650" b="1">
                 <a:solidFill>
                   <a:srgbClr val="155EEF"/>
                 </a:solidFill>
@@ -6050,7 +6113,7 @@
               </a:defRPr>
             </a:pPr>
             <a:r>
-              <a:rPr sz="1500" b="1">
+              <a:rPr sz="1650" b="1">
                 <a:solidFill>
                   <a:srgbClr val="155EEF"/>
                 </a:solidFill>
@@ -6058,7 +6121,7 @@
                 <a:ea typeface="Malgun Gothic"/>
                 <a:cs typeface="Malgun Gothic"/>
               </a:rPr>
-              <a:t>상대 날짜는 유지 · 웹폰트 전용 깨진 문자 0건</a:t>
+              <a:t>태그 고유색은 강조선으로만 유지 · 본문 가독성 우선</a:t>
             </a:r>
           </a:p>
         </p:txBody>
@@ -6066,7 +6129,7 @@
     </p:spTree>
     <p:extLst>
       <p:ext uri="{BB962C8B-B14F-4D97-AF65-F5344CB8AC3E}">
-        <p14:creationId xmlns:p14="http://schemas.microsoft.com/office/powerpoint/2010/main" val="1966110520"/>
+        <p14:creationId xmlns:p14="http://schemas.microsoft.com/office/powerpoint/2010/main" val="1153279502"/>
       </p:ext>
     </p:extLst>
   </p:cSld>
@@ -6094,10 +6157,10 @@
       </p:grpSpPr>
       <p:sp>
         <p:nvSpPr>
-          <p:cNvPr id="20" name="title-6">
-            <a:extLst xmlns:a="http://schemas.openxmlformats.org/drawingml/2006/main">
-              <a:ext uri="{FF2B5EF4-FFF2-40B4-BE49-F238E27FC236}">
-                <a16:creationId xmlns:a16="http://schemas.microsoft.com/office/drawing/2014/main" id="{A1988E7D-4FE9-4900-8EFF-3040E5D0CEDA}"/>
+          <p:cNvPr id="20" name="title-8">
+            <a:extLst xmlns:a="http://schemas.openxmlformats.org/drawingml/2006/main">
+              <a:ext uri="{FF2B5EF4-FFF2-40B4-BE49-F238E27FC236}">
+                <a16:creationId xmlns:a16="http://schemas.microsoft.com/office/drawing/2014/main" id="{D5FFEDA9-4482-4F75-A354-3D7B7EFC07EB}"/>
               </a:ext>
             </a:extLst>
           </p:cNvPr>
@@ -6125,7 +6188,6 @@
           <a:lstStyle xmlns:a="http://schemas.openxmlformats.org/drawingml/2006/main"/>
           <a:p xmlns:a="http://schemas.openxmlformats.org/drawingml/2006/main">
             <a:pPr algn="l">
-              <a:buNone/>
               <a:defRPr sz="3000" b="1">
                 <a:solidFill>
                   <a:srgbClr val="15253E"/>
@@ -6151,10 +6213,10 @@
       </p:sp>
       <p:sp>
         <p:nvSpPr>
-          <p:cNvPr id="2" name="page-6">
-            <a:extLst xmlns:a="http://schemas.openxmlformats.org/drawingml/2006/main">
-              <a:ext uri="{FF2B5EF4-FFF2-40B4-BE49-F238E27FC236}">
-                <a16:creationId xmlns:a16="http://schemas.microsoft.com/office/drawing/2014/main" id="{BE3DDE7B-FA52-43C9-AAE2-8928904D0FEC}"/>
+          <p:cNvPr id="2" name="page-8">
+            <a:extLst xmlns:a="http://schemas.openxmlformats.org/drawingml/2006/main">
+              <a:ext uri="{FF2B5EF4-FFF2-40B4-BE49-F238E27FC236}">
+                <a16:creationId xmlns:a16="http://schemas.microsoft.com/office/drawing/2014/main" id="{F6060937-F067-4E9B-A2DE-040E0A47F69F}"/>
               </a:ext>
             </a:extLst>
           </p:cNvPr>
@@ -6182,7 +6244,6 @@
           <a:lstStyle xmlns:a="http://schemas.openxmlformats.org/drawingml/2006/main"/>
           <a:p xmlns:a="http://schemas.openxmlformats.org/drawingml/2006/main">
             <a:pPr algn="r">
-              <a:buNone/>
               <a:defRPr sz="1200" b="0">
                 <a:solidFill>
                   <a:srgbClr val="52647D"/>
@@ -6211,7 +6272,7 @@
           <p:cNvPr id="3" name="arrow-0">
             <a:extLst xmlns:a="http://schemas.openxmlformats.org/drawingml/2006/main">
               <a:ext uri="{FF2B5EF4-FFF2-40B4-BE49-F238E27FC236}">
-                <a16:creationId xmlns:a16="http://schemas.microsoft.com/office/drawing/2014/main" id="{7B834A7A-209D-4491-899C-10F6F9E68B2E}"/>
+                <a16:creationId xmlns:a16="http://schemas.microsoft.com/office/drawing/2014/main" id="{0C1B1588-78B2-47E1-BC92-984AE01F6B40}"/>
               </a:ext>
             </a:extLst>
           </p:cNvPr>
@@ -6239,7 +6300,6 @@
           <a:lstStyle xmlns:a="http://schemas.openxmlformats.org/drawingml/2006/main"/>
           <a:p xmlns:a="http://schemas.openxmlformats.org/drawingml/2006/main">
             <a:pPr algn="ctr">
-              <a:buNone/>
               <a:defRPr sz="2400" b="1">
                 <a:solidFill>
                   <a:srgbClr val="52647D"/>
@@ -6268,7 +6328,7 @@
           <p:cNvPr id="4" name="phase-0">
             <a:extLst xmlns:a="http://schemas.openxmlformats.org/drawingml/2006/main">
               <a:ext uri="{FF2B5EF4-FFF2-40B4-BE49-F238E27FC236}">
-                <a16:creationId xmlns:a16="http://schemas.microsoft.com/office/drawing/2014/main" id="{739F78CD-D657-4918-A9FA-4B164DC81EF7}"/>
+                <a16:creationId xmlns:a16="http://schemas.microsoft.com/office/drawing/2014/main" id="{FC99B8CC-CEF7-47A9-A018-448F17E4CBA9}"/>
               </a:ext>
             </a:extLst>
           </p:cNvPr>
@@ -6303,7 +6363,7 @@
           <p:cNvPr id="5" name="phase-label-0">
             <a:extLst xmlns:a="http://schemas.openxmlformats.org/drawingml/2006/main">
               <a:ext uri="{FF2B5EF4-FFF2-40B4-BE49-F238E27FC236}">
-                <a16:creationId xmlns:a16="http://schemas.microsoft.com/office/drawing/2014/main" id="{63AECE67-3CC4-4DA1-AF5E-C93DC0D47574}"/>
+                <a16:creationId xmlns:a16="http://schemas.microsoft.com/office/drawing/2014/main" id="{46DE96C1-1EEF-46ED-944F-E63353CD28EE}"/>
               </a:ext>
             </a:extLst>
           </p:cNvPr>
@@ -6331,7 +6391,6 @@
           <a:lstStyle xmlns:a="http://schemas.openxmlformats.org/drawingml/2006/main"/>
           <a:p xmlns:a="http://schemas.openxmlformats.org/drawingml/2006/main">
             <a:pPr algn="ctr">
-              <a:buNone/>
               <a:defRPr sz="1950" b="1">
                 <a:solidFill>
                   <a:srgbClr val="15253E"/>
@@ -6355,7 +6414,6 @@
           </a:p>
           <a:p xmlns:a="http://schemas.openxmlformats.org/drawingml/2006/main">
             <a:pPr algn="ctr">
-              <a:buNone/>
               <a:defRPr sz="1950" b="1">
                 <a:solidFill>
                   <a:srgbClr val="15253E"/>
@@ -6384,7 +6442,7 @@
           <p:cNvPr id="6" name="phase-http-0">
             <a:extLst xmlns:a="http://schemas.openxmlformats.org/drawingml/2006/main">
               <a:ext uri="{FF2B5EF4-FFF2-40B4-BE49-F238E27FC236}">
-                <a16:creationId xmlns:a16="http://schemas.microsoft.com/office/drawing/2014/main" id="{3411BCDF-FFDB-4D8F-ABD4-9DF41B03F7D6}"/>
+                <a16:creationId xmlns:a16="http://schemas.microsoft.com/office/drawing/2014/main" id="{E9C02EB3-081C-4A28-90A6-72F3831066F8}"/>
               </a:ext>
             </a:extLst>
           </p:cNvPr>
@@ -6412,7 +6470,6 @@
           <a:lstStyle xmlns:a="http://schemas.openxmlformats.org/drawingml/2006/main"/>
           <a:p xmlns:a="http://schemas.openxmlformats.org/drawingml/2006/main">
             <a:pPr algn="ctr">
-              <a:buNone/>
               <a:defRPr sz="1350" b="0">
                 <a:solidFill>
                   <a:srgbClr val="52647D"/>
@@ -6441,7 +6498,7 @@
           <p:cNvPr id="7" name="arrow-1">
             <a:extLst xmlns:a="http://schemas.openxmlformats.org/drawingml/2006/main">
               <a:ext uri="{FF2B5EF4-FFF2-40B4-BE49-F238E27FC236}">
-                <a16:creationId xmlns:a16="http://schemas.microsoft.com/office/drawing/2014/main" id="{5C52BED4-5B33-4F1F-8B4C-1420869A3755}"/>
+                <a16:creationId xmlns:a16="http://schemas.microsoft.com/office/drawing/2014/main" id="{F009F930-535C-49B1-B733-195ABCE4A83E}"/>
               </a:ext>
             </a:extLst>
           </p:cNvPr>
@@ -6469,7 +6526,6 @@
           <a:lstStyle xmlns:a="http://schemas.openxmlformats.org/drawingml/2006/main"/>
           <a:p xmlns:a="http://schemas.openxmlformats.org/drawingml/2006/main">
             <a:pPr algn="ctr">
-              <a:buNone/>
               <a:defRPr sz="2400" b="1">
                 <a:solidFill>
                   <a:srgbClr val="52647D"/>
@@ -6498,7 +6554,7 @@
           <p:cNvPr id="8" name="phase-1">
             <a:extLst xmlns:a="http://schemas.openxmlformats.org/drawingml/2006/main">
               <a:ext uri="{FF2B5EF4-FFF2-40B4-BE49-F238E27FC236}">
-                <a16:creationId xmlns:a16="http://schemas.microsoft.com/office/drawing/2014/main" id="{CCC5DC3E-EAAF-47A7-BE20-81A03A0A0384}"/>
+                <a16:creationId xmlns:a16="http://schemas.microsoft.com/office/drawing/2014/main" id="{12D274A3-8A34-4999-87FA-B42EA833D349}"/>
               </a:ext>
             </a:extLst>
           </p:cNvPr>
@@ -6533,7 +6589,7 @@
           <p:cNvPr id="9" name="phase-label-1">
             <a:extLst xmlns:a="http://schemas.openxmlformats.org/drawingml/2006/main">
               <a:ext uri="{FF2B5EF4-FFF2-40B4-BE49-F238E27FC236}">
-                <a16:creationId xmlns:a16="http://schemas.microsoft.com/office/drawing/2014/main" id="{703B871E-E432-4AAB-8D50-6BCBAF062755}"/>
+                <a16:creationId xmlns:a16="http://schemas.microsoft.com/office/drawing/2014/main" id="{9FA5C76C-F91B-4A4A-9CF1-22C9178BCFB8}"/>
               </a:ext>
             </a:extLst>
           </p:cNvPr>
@@ -6561,7 +6617,6 @@
           <a:lstStyle xmlns:a="http://schemas.openxmlformats.org/drawingml/2006/main"/>
           <a:p xmlns:a="http://schemas.openxmlformats.org/drawingml/2006/main">
             <a:pPr algn="ctr">
-              <a:buNone/>
               <a:defRPr sz="1950" b="1">
                 <a:solidFill>
                   <a:srgbClr val="155EEF"/>
@@ -6585,7 +6640,6 @@
           </a:p>
           <a:p xmlns:a="http://schemas.openxmlformats.org/drawingml/2006/main">
             <a:pPr algn="ctr">
-              <a:buNone/>
               <a:defRPr sz="1950" b="1">
                 <a:solidFill>
                   <a:srgbClr val="155EEF"/>
@@ -6614,7 +6668,7 @@
           <p:cNvPr id="10" name="phase-http-1">
             <a:extLst xmlns:a="http://schemas.openxmlformats.org/drawingml/2006/main">
               <a:ext uri="{FF2B5EF4-FFF2-40B4-BE49-F238E27FC236}">
-                <a16:creationId xmlns:a16="http://schemas.microsoft.com/office/drawing/2014/main" id="{AE3959C6-3A52-4DCF-821D-D827B0664350}"/>
+                <a16:creationId xmlns:a16="http://schemas.microsoft.com/office/drawing/2014/main" id="{6858344C-C69D-48AA-84FB-4749D2BE1023}"/>
               </a:ext>
             </a:extLst>
           </p:cNvPr>
@@ -6642,7 +6696,6 @@
           <a:lstStyle xmlns:a="http://schemas.openxmlformats.org/drawingml/2006/main"/>
           <a:p xmlns:a="http://schemas.openxmlformats.org/drawingml/2006/main">
             <a:pPr algn="ctr">
-              <a:buNone/>
               <a:defRPr sz="1350" b="0">
                 <a:solidFill>
                   <a:srgbClr val="52647D"/>
@@ -6671,7 +6724,7 @@
           <p:cNvPr id="11" name="arrow-2">
             <a:extLst xmlns:a="http://schemas.openxmlformats.org/drawingml/2006/main">
               <a:ext uri="{FF2B5EF4-FFF2-40B4-BE49-F238E27FC236}">
-                <a16:creationId xmlns:a16="http://schemas.microsoft.com/office/drawing/2014/main" id="{EBB4EFA8-8837-4DC7-B490-F0FDBE819CC2}"/>
+                <a16:creationId xmlns:a16="http://schemas.microsoft.com/office/drawing/2014/main" id="{0ADD3CF4-7B23-49CD-A21E-ECAD9FF0F603}"/>
               </a:ext>
             </a:extLst>
           </p:cNvPr>
@@ -6699,7 +6752,6 @@
           <a:lstStyle xmlns:a="http://schemas.openxmlformats.org/drawingml/2006/main"/>
           <a:p xmlns:a="http://schemas.openxmlformats.org/drawingml/2006/main">
             <a:pPr algn="ctr">
-              <a:buNone/>
               <a:defRPr sz="2400" b="1">
                 <a:solidFill>
                   <a:srgbClr val="52647D"/>
@@ -6728,7 +6780,7 @@
           <p:cNvPr id="12" name="phase-2">
             <a:extLst xmlns:a="http://schemas.openxmlformats.org/drawingml/2006/main">
               <a:ext uri="{FF2B5EF4-FFF2-40B4-BE49-F238E27FC236}">
-                <a16:creationId xmlns:a16="http://schemas.microsoft.com/office/drawing/2014/main" id="{30B14935-D9F6-49E4-9FFA-35C561CA1787}"/>
+                <a16:creationId xmlns:a16="http://schemas.microsoft.com/office/drawing/2014/main" id="{0C7760BE-D41D-4600-A1E0-85988B17529B}"/>
               </a:ext>
             </a:extLst>
           </p:cNvPr>
@@ -6763,7 +6815,7 @@
           <p:cNvPr id="13" name="phase-label-2">
             <a:extLst xmlns:a="http://schemas.openxmlformats.org/drawingml/2006/main">
               <a:ext uri="{FF2B5EF4-FFF2-40B4-BE49-F238E27FC236}">
-                <a16:creationId xmlns:a16="http://schemas.microsoft.com/office/drawing/2014/main" id="{F84B927D-9C32-4480-B1CA-A2BEFFF6BD2C}"/>
+                <a16:creationId xmlns:a16="http://schemas.microsoft.com/office/drawing/2014/main" id="{9B3EC55D-9341-4E73-92FD-B20AC7E1D11B}"/>
               </a:ext>
             </a:extLst>
           </p:cNvPr>
@@ -6791,7 +6843,6 @@
           <a:lstStyle xmlns:a="http://schemas.openxmlformats.org/drawingml/2006/main"/>
           <a:p xmlns:a="http://schemas.openxmlformats.org/drawingml/2006/main">
             <a:pPr algn="ctr">
-              <a:buNone/>
               <a:defRPr sz="1950" b="1">
                 <a:solidFill>
                   <a:srgbClr val="15253E"/>
@@ -6815,7 +6866,6 @@
           </a:p>
           <a:p xmlns:a="http://schemas.openxmlformats.org/drawingml/2006/main">
             <a:pPr algn="ctr">
-              <a:buNone/>
               <a:defRPr sz="1950" b="1">
                 <a:solidFill>
                   <a:srgbClr val="15253E"/>
@@ -6844,7 +6894,7 @@
           <p:cNvPr id="14" name="phase-http-2">
             <a:extLst xmlns:a="http://schemas.openxmlformats.org/drawingml/2006/main">
               <a:ext uri="{FF2B5EF4-FFF2-40B4-BE49-F238E27FC236}">
-                <a16:creationId xmlns:a16="http://schemas.microsoft.com/office/drawing/2014/main" id="{03579DE4-BE81-4564-8731-4EC8DE467A0F}"/>
+                <a16:creationId xmlns:a16="http://schemas.microsoft.com/office/drawing/2014/main" id="{333C4389-2E45-452C-93F3-DA22A8024FCE}"/>
               </a:ext>
             </a:extLst>
           </p:cNvPr>
@@ -6872,7 +6922,6 @@
           <a:lstStyle xmlns:a="http://schemas.openxmlformats.org/drawingml/2006/main"/>
           <a:p xmlns:a="http://schemas.openxmlformats.org/drawingml/2006/main">
             <a:pPr algn="ctr">
-              <a:buNone/>
               <a:defRPr sz="1350" b="0">
                 <a:solidFill>
                   <a:srgbClr val="52647D"/>
@@ -6901,7 +6950,7 @@
           <p:cNvPr id="15" name="phase-3">
             <a:extLst xmlns:a="http://schemas.openxmlformats.org/drawingml/2006/main">
               <a:ext uri="{FF2B5EF4-FFF2-40B4-BE49-F238E27FC236}">
-                <a16:creationId xmlns:a16="http://schemas.microsoft.com/office/drawing/2014/main" id="{B1D3BD30-83E1-498D-B0C3-D6998089D16E}"/>
+                <a16:creationId xmlns:a16="http://schemas.microsoft.com/office/drawing/2014/main" id="{F4916EA0-DD8C-448C-ADCD-3958706BFF9E}"/>
               </a:ext>
             </a:extLst>
           </p:cNvPr>
@@ -6936,7 +6985,7 @@
           <p:cNvPr id="16" name="phase-label-3">
             <a:extLst xmlns:a="http://schemas.openxmlformats.org/drawingml/2006/main">
               <a:ext uri="{FF2B5EF4-FFF2-40B4-BE49-F238E27FC236}">
-                <a16:creationId xmlns:a16="http://schemas.microsoft.com/office/drawing/2014/main" id="{2E4B63B9-05DD-4586-92E2-218CE46B8CF6}"/>
+                <a16:creationId xmlns:a16="http://schemas.microsoft.com/office/drawing/2014/main" id="{9375A860-35A5-417A-96DE-9D0DF5BE037F}"/>
               </a:ext>
             </a:extLst>
           </p:cNvPr>
@@ -6964,7 +7013,6 @@
           <a:lstStyle xmlns:a="http://schemas.openxmlformats.org/drawingml/2006/main"/>
           <a:p xmlns:a="http://schemas.openxmlformats.org/drawingml/2006/main">
             <a:pPr algn="ctr">
-              <a:buNone/>
               <a:defRPr sz="1950" b="1">
                 <a:solidFill>
                   <a:srgbClr val="155EEF"/>
@@ -6988,7 +7036,6 @@
           </a:p>
           <a:p xmlns:a="http://schemas.openxmlformats.org/drawingml/2006/main">
             <a:pPr algn="ctr">
-              <a:buNone/>
               <a:defRPr sz="1950" b="1">
                 <a:solidFill>
                   <a:srgbClr val="155EEF"/>
@@ -7017,7 +7064,7 @@
           <p:cNvPr id="17" name="phase-http-3">
             <a:extLst xmlns:a="http://schemas.openxmlformats.org/drawingml/2006/main">
               <a:ext uri="{FF2B5EF4-FFF2-40B4-BE49-F238E27FC236}">
-                <a16:creationId xmlns:a16="http://schemas.microsoft.com/office/drawing/2014/main" id="{B2993C25-3261-4B34-90FD-48CACC67BAA0}"/>
+                <a16:creationId xmlns:a16="http://schemas.microsoft.com/office/drawing/2014/main" id="{6F371A94-2807-4433-A0A0-BC62257BC572}"/>
               </a:ext>
             </a:extLst>
           </p:cNvPr>
@@ -7045,7 +7092,6 @@
           <a:lstStyle xmlns:a="http://schemas.openxmlformats.org/drawingml/2006/main"/>
           <a:p xmlns:a="http://schemas.openxmlformats.org/drawingml/2006/main">
             <a:pPr algn="ctr">
-              <a:buNone/>
               <a:defRPr sz="1350" b="0">
                 <a:solidFill>
                   <a:srgbClr val="52647D"/>
@@ -7074,7 +7120,7 @@
           <p:cNvPr id="18" name="integrity-count">
             <a:extLst xmlns:a="http://schemas.openxmlformats.org/drawingml/2006/main">
               <a:ext uri="{FF2B5EF4-FFF2-40B4-BE49-F238E27FC236}">
-                <a16:creationId xmlns:a16="http://schemas.microsoft.com/office/drawing/2014/main" id="{7D531B41-66A5-4441-97A2-88436706648C}"/>
+                <a16:creationId xmlns:a16="http://schemas.microsoft.com/office/drawing/2014/main" id="{78F43157-3B01-44E6-B62B-E8B0EDF6C485}"/>
               </a:ext>
             </a:extLst>
           </p:cNvPr>
@@ -7102,7 +7148,6 @@
           <a:lstStyle xmlns:a="http://schemas.openxmlformats.org/drawingml/2006/main"/>
           <a:p xmlns:a="http://schemas.openxmlformats.org/drawingml/2006/main">
             <a:pPr algn="ctr">
-              <a:buNone/>
               <a:defRPr sz="2400" b="1">
                 <a:solidFill>
                   <a:srgbClr val="15253E"/>
@@ -7131,7 +7176,7 @@
           <p:cNvPr id="19" name="integrity-hash">
             <a:extLst xmlns:a="http://schemas.openxmlformats.org/drawingml/2006/main">
               <a:ext uri="{FF2B5EF4-FFF2-40B4-BE49-F238E27FC236}">
-                <a16:creationId xmlns:a16="http://schemas.microsoft.com/office/drawing/2014/main" id="{CFB67921-C80E-4482-BC13-B3C78F46F4D4}"/>
+                <a16:creationId xmlns:a16="http://schemas.microsoft.com/office/drawing/2014/main" id="{1C566AAC-29B8-4C07-9B85-65B6C64AE143}"/>
               </a:ext>
             </a:extLst>
           </p:cNvPr>
@@ -7159,7 +7204,6 @@
           <a:lstStyle xmlns:a="http://schemas.openxmlformats.org/drawingml/2006/main"/>
           <a:p xmlns:a="http://schemas.openxmlformats.org/drawingml/2006/main">
             <a:pPr algn="ctr">
-              <a:buNone/>
               <a:defRPr sz="1800" b="0">
                 <a:solidFill>
                   <a:srgbClr val="078248"/>
@@ -7186,7 +7230,7 @@
     </p:spTree>
     <p:extLst>
       <p:ext uri="{BB962C8B-B14F-4D97-AF65-F5344CB8AC3E}">
-        <p14:creationId xmlns:p14="http://schemas.microsoft.com/office/powerpoint/2010/main" val="224538138"/>
+        <p14:creationId xmlns:p14="http://schemas.microsoft.com/office/powerpoint/2010/main" val="1990562547"/>
       </p:ext>
     </p:extLst>
   </p:cSld>
@@ -7214,10 +7258,10 @@
       </p:grpSpPr>
       <p:sp>
         <p:nvSpPr>
-          <p:cNvPr id="16" name="title-7">
-            <a:extLst xmlns:a="http://schemas.openxmlformats.org/drawingml/2006/main">
-              <a:ext uri="{FF2B5EF4-FFF2-40B4-BE49-F238E27FC236}">
-                <a16:creationId xmlns:a16="http://schemas.microsoft.com/office/drawing/2014/main" id="{B1E5F8CB-12E8-414B-A782-7921D9DB98E9}"/>
+          <p:cNvPr id="16" name="title-9">
+            <a:extLst xmlns:a="http://schemas.openxmlformats.org/drawingml/2006/main">
+              <a:ext uri="{FF2B5EF4-FFF2-40B4-BE49-F238E27FC236}">
+                <a16:creationId xmlns:a16="http://schemas.microsoft.com/office/drawing/2014/main" id="{47F617EE-AD59-4CED-9A10-F36B822B04B6}"/>
               </a:ext>
             </a:extLst>
           </p:cNvPr>
@@ -7245,7 +7289,6 @@
           <a:lstStyle xmlns:a="http://schemas.openxmlformats.org/drawingml/2006/main"/>
           <a:p xmlns:a="http://schemas.openxmlformats.org/drawingml/2006/main">
             <a:pPr algn="l">
-              <a:buNone/>
               <a:defRPr sz="3000" b="1">
                 <a:solidFill>
                   <a:srgbClr val="15253E"/>
@@ -7271,10 +7314,10 @@
       </p:sp>
       <p:sp>
         <p:nvSpPr>
-          <p:cNvPr id="2" name="page-7">
-            <a:extLst xmlns:a="http://schemas.openxmlformats.org/drawingml/2006/main">
-              <a:ext uri="{FF2B5EF4-FFF2-40B4-BE49-F238E27FC236}">
-                <a16:creationId xmlns:a16="http://schemas.microsoft.com/office/drawing/2014/main" id="{A3276DCC-0352-4CE1-B01D-E79903100583}"/>
+          <p:cNvPr id="2" name="page-9">
+            <a:extLst xmlns:a="http://schemas.openxmlformats.org/drawingml/2006/main">
+              <a:ext uri="{FF2B5EF4-FFF2-40B4-BE49-F238E27FC236}">
+                <a16:creationId xmlns:a16="http://schemas.microsoft.com/office/drawing/2014/main" id="{4856FB6A-8CC2-4D68-9518-8E13BDD5D699}"/>
               </a:ext>
             </a:extLst>
           </p:cNvPr>
@@ -7302,7 +7345,6 @@
           <a:lstStyle xmlns:a="http://schemas.openxmlformats.org/drawingml/2006/main"/>
           <a:p xmlns:a="http://schemas.openxmlformats.org/drawingml/2006/main">
             <a:pPr algn="r">
-              <a:buNone/>
               <a:defRPr sz="1200" b="0">
                 <a:solidFill>
                   <a:srgbClr val="52647D"/>
@@ -7331,7 +7373,7 @@
           <p:cNvPr id="3" name="flow-arrow-1">
             <a:extLst xmlns:a="http://schemas.openxmlformats.org/drawingml/2006/main">
               <a:ext uri="{FF2B5EF4-FFF2-40B4-BE49-F238E27FC236}">
-                <a16:creationId xmlns:a16="http://schemas.microsoft.com/office/drawing/2014/main" id="{F33C0C86-C636-49E7-9EF3-AD3434C40404}"/>
+                <a16:creationId xmlns:a16="http://schemas.microsoft.com/office/drawing/2014/main" id="{B10348F6-03F7-4D19-872F-85C0819BB362}"/>
               </a:ext>
             </a:extLst>
           </p:cNvPr>
@@ -7359,7 +7401,6 @@
           <a:lstStyle xmlns:a="http://schemas.openxmlformats.org/drawingml/2006/main"/>
           <a:p xmlns:a="http://schemas.openxmlformats.org/drawingml/2006/main">
             <a:pPr algn="ctr">
-              <a:buNone/>
               <a:defRPr sz="2700" b="1">
                 <a:solidFill>
                   <a:srgbClr val="52647D"/>
@@ -7388,7 +7429,7 @@
           <p:cNvPr id="4" name="flow-arrow-2">
             <a:extLst xmlns:a="http://schemas.openxmlformats.org/drawingml/2006/main">
               <a:ext uri="{FF2B5EF4-FFF2-40B4-BE49-F238E27FC236}">
-                <a16:creationId xmlns:a16="http://schemas.microsoft.com/office/drawing/2014/main" id="{35F70949-AD48-4799-9CD4-E06EF4FA6024}"/>
+                <a16:creationId xmlns:a16="http://schemas.microsoft.com/office/drawing/2014/main" id="{D8DEBE38-E2FC-47E9-B0B8-4B1A4082F003}"/>
               </a:ext>
             </a:extLst>
           </p:cNvPr>
@@ -7416,7 +7457,6 @@
           <a:lstStyle xmlns:a="http://schemas.openxmlformats.org/drawingml/2006/main"/>
           <a:p xmlns:a="http://schemas.openxmlformats.org/drawingml/2006/main">
             <a:pPr algn="ctr">
-              <a:buNone/>
               <a:defRPr sz="2700" b="1">
                 <a:solidFill>
                   <a:srgbClr val="52647D"/>
@@ -7445,7 +7485,7 @@
           <p:cNvPr id="5" name="flarum-core">
             <a:extLst xmlns:a="http://schemas.openxmlformats.org/drawingml/2006/main">
               <a:ext uri="{FF2B5EF4-FFF2-40B4-BE49-F238E27FC236}">
-                <a16:creationId xmlns:a16="http://schemas.microsoft.com/office/drawing/2014/main" id="{2D23B9C7-BD3C-4600-BA89-78668692D407}"/>
+                <a16:creationId xmlns:a16="http://schemas.microsoft.com/office/drawing/2014/main" id="{CC5209C8-C965-497D-A6FA-24160E908C4A}"/>
               </a:ext>
             </a:extLst>
           </p:cNvPr>
@@ -7480,7 +7520,7 @@
           <p:cNvPr id="6" name="theme-extension">
             <a:extLst xmlns:a="http://schemas.openxmlformats.org/drawingml/2006/main">
               <a:ext uri="{FF2B5EF4-FFF2-40B4-BE49-F238E27FC236}">
-                <a16:creationId xmlns:a16="http://schemas.microsoft.com/office/drawing/2014/main" id="{66F5027A-7FA7-413F-B51E-8043D0948B2C}"/>
+                <a16:creationId xmlns:a16="http://schemas.microsoft.com/office/drawing/2014/main" id="{3AEF5555-B2BE-486E-B618-6C0CAD4DBE3C}"/>
               </a:ext>
             </a:extLst>
           </p:cNvPr>
@@ -7515,7 +7555,7 @@
           <p:cNvPr id="7" name="community-ui">
             <a:extLst xmlns:a="http://schemas.openxmlformats.org/drawingml/2006/main">
               <a:ext uri="{FF2B5EF4-FFF2-40B4-BE49-F238E27FC236}">
-                <a16:creationId xmlns:a16="http://schemas.microsoft.com/office/drawing/2014/main" id="{E7F3E4DE-3896-4972-B8F1-AF6C18CFFA99}"/>
+                <a16:creationId xmlns:a16="http://schemas.microsoft.com/office/drawing/2014/main" id="{28A97A5E-908C-4247-A1BE-C1E80DE057B0}"/>
               </a:ext>
             </a:extLst>
           </p:cNvPr>
@@ -7550,7 +7590,7 @@
           <p:cNvPr id="8" name="flarum-core-title">
             <a:extLst xmlns:a="http://schemas.openxmlformats.org/drawingml/2006/main">
               <a:ext uri="{FF2B5EF4-FFF2-40B4-BE49-F238E27FC236}">
-                <a16:creationId xmlns:a16="http://schemas.microsoft.com/office/drawing/2014/main" id="{0136A85B-5961-4FFA-8B8D-5B294E1A0C1F}"/>
+                <a16:creationId xmlns:a16="http://schemas.microsoft.com/office/drawing/2014/main" id="{1535F209-B60D-46DB-B0D4-DC88CCA7FA61}"/>
               </a:ext>
             </a:extLst>
           </p:cNvPr>
@@ -7578,7 +7618,6 @@
           <a:lstStyle xmlns:a="http://schemas.openxmlformats.org/drawingml/2006/main"/>
           <a:p xmlns:a="http://schemas.openxmlformats.org/drawingml/2006/main">
             <a:pPr algn="ctr">
-              <a:buNone/>
               <a:defRPr sz="2250" b="1">
                 <a:solidFill>
                   <a:srgbClr val="15253E"/>
@@ -7607,7 +7646,7 @@
           <p:cNvPr id="9" name="flarum-core-copy">
             <a:extLst xmlns:a="http://schemas.openxmlformats.org/drawingml/2006/main">
               <a:ext uri="{FF2B5EF4-FFF2-40B4-BE49-F238E27FC236}">
-                <a16:creationId xmlns:a16="http://schemas.microsoft.com/office/drawing/2014/main" id="{E7DB7EDB-905C-43D0-890F-80D3946E2991}"/>
+                <a16:creationId xmlns:a16="http://schemas.microsoft.com/office/drawing/2014/main" id="{CBB0078B-7956-41E8-AAE5-5E10E36AAC0E}"/>
               </a:ext>
             </a:extLst>
           </p:cNvPr>
@@ -7635,7 +7674,6 @@
           <a:lstStyle xmlns:a="http://schemas.openxmlformats.org/drawingml/2006/main"/>
           <a:p xmlns:a="http://schemas.openxmlformats.org/drawingml/2006/main">
             <a:pPr algn="ctr">
-              <a:buNone/>
               <a:defRPr sz="1500" b="0">
                 <a:solidFill>
                   <a:srgbClr val="52647D"/>
@@ -7664,7 +7702,7 @@
           <p:cNvPr id="10" name="theme-title">
             <a:extLst xmlns:a="http://schemas.openxmlformats.org/drawingml/2006/main">
               <a:ext uri="{FF2B5EF4-FFF2-40B4-BE49-F238E27FC236}">
-                <a16:creationId xmlns:a16="http://schemas.microsoft.com/office/drawing/2014/main" id="{DBD93488-5F1B-4674-80CA-8AF64A4024CD}"/>
+                <a16:creationId xmlns:a16="http://schemas.microsoft.com/office/drawing/2014/main" id="{9B4819BB-A8E2-4153-B9CA-8C76B83CC1FC}"/>
               </a:ext>
             </a:extLst>
           </p:cNvPr>
@@ -7692,7 +7730,6 @@
           <a:lstStyle xmlns:a="http://schemas.openxmlformats.org/drawingml/2006/main"/>
           <a:p xmlns:a="http://schemas.openxmlformats.org/drawingml/2006/main">
             <a:pPr algn="ctr">
-              <a:buNone/>
               <a:defRPr sz="2175" b="1">
                 <a:solidFill>
                   <a:srgbClr val="155EEF"/>
@@ -7716,7 +7753,6 @@
           </a:p>
           <a:p xmlns:a="http://schemas.openxmlformats.org/drawingml/2006/main">
             <a:pPr algn="ctr">
-              <a:buNone/>
               <a:defRPr sz="2175" b="1">
                 <a:solidFill>
                   <a:srgbClr val="155EEF"/>
@@ -7745,7 +7781,7 @@
           <p:cNvPr id="11" name="theme-copy">
             <a:extLst xmlns:a="http://schemas.openxmlformats.org/drawingml/2006/main">
               <a:ext uri="{FF2B5EF4-FFF2-40B4-BE49-F238E27FC236}">
-                <a16:creationId xmlns:a16="http://schemas.microsoft.com/office/drawing/2014/main" id="{C8B03E0C-FD83-420F-AF7B-3F7089B47394}"/>
+                <a16:creationId xmlns:a16="http://schemas.microsoft.com/office/drawing/2014/main" id="{488558CC-7B69-4395-A9C0-F3F1C93DFD2B}"/>
               </a:ext>
             </a:extLst>
           </p:cNvPr>
@@ -7773,7 +7809,6 @@
           <a:lstStyle xmlns:a="http://schemas.openxmlformats.org/drawingml/2006/main"/>
           <a:p xmlns:a="http://schemas.openxmlformats.org/drawingml/2006/main">
             <a:pPr algn="ctr">
-              <a:buNone/>
               <a:defRPr sz="1350" b="0">
                 <a:solidFill>
                   <a:srgbClr val="52647D"/>
@@ -7802,7 +7837,7 @@
           <p:cNvPr id="12" name="ui-title">
             <a:extLst xmlns:a="http://schemas.openxmlformats.org/drawingml/2006/main">
               <a:ext uri="{FF2B5EF4-FFF2-40B4-BE49-F238E27FC236}">
-                <a16:creationId xmlns:a16="http://schemas.microsoft.com/office/drawing/2014/main" id="{37B98FC2-7DDE-45BF-B2BF-AA8E8A3D4DE8}"/>
+                <a16:creationId xmlns:a16="http://schemas.microsoft.com/office/drawing/2014/main" id="{A92CD0A9-4DB5-4DB2-8D24-F9FDA971889A}"/>
               </a:ext>
             </a:extLst>
           </p:cNvPr>
@@ -7830,7 +7865,6 @@
           <a:lstStyle xmlns:a="http://schemas.openxmlformats.org/drawingml/2006/main"/>
           <a:p xmlns:a="http://schemas.openxmlformats.org/drawingml/2006/main">
             <a:pPr algn="ctr">
-              <a:buNone/>
               <a:defRPr sz="2250" b="1">
                 <a:solidFill>
                   <a:srgbClr val="078248"/>
@@ -7859,7 +7893,7 @@
           <p:cNvPr id="13" name="ui-copy">
             <a:extLst xmlns:a="http://schemas.openxmlformats.org/drawingml/2006/main">
               <a:ext uri="{FF2B5EF4-FFF2-40B4-BE49-F238E27FC236}">
-                <a16:creationId xmlns:a16="http://schemas.microsoft.com/office/drawing/2014/main" id="{3B149A4F-0659-480B-9329-13D669118779}"/>
+                <a16:creationId xmlns:a16="http://schemas.microsoft.com/office/drawing/2014/main" id="{1FC941D7-F811-4A54-803E-30EBDDE18B4A}"/>
               </a:ext>
             </a:extLst>
           </p:cNvPr>
@@ -7887,7 +7921,6 @@
           <a:lstStyle xmlns:a="http://schemas.openxmlformats.org/drawingml/2006/main"/>
           <a:p xmlns:a="http://schemas.openxmlformats.org/drawingml/2006/main">
             <a:pPr algn="ctr">
-              <a:buNone/>
               <a:defRPr sz="1500" b="0">
                 <a:solidFill>
                   <a:srgbClr val="52647D"/>
@@ -7916,7 +7949,7 @@
           <p:cNvPr id="14" name="rollback-strip">
             <a:extLst xmlns:a="http://schemas.openxmlformats.org/drawingml/2006/main">
               <a:ext uri="{FF2B5EF4-FFF2-40B4-BE49-F238E27FC236}">
-                <a16:creationId xmlns:a16="http://schemas.microsoft.com/office/drawing/2014/main" id="{1329660C-7BA4-47F6-B431-662F73A2D12C}"/>
+                <a16:creationId xmlns:a16="http://schemas.microsoft.com/office/drawing/2014/main" id="{4E43A1B4-DFCB-46DE-9BDD-FAD72A8828C9}"/>
               </a:ext>
             </a:extLst>
           </p:cNvPr>
@@ -7951,7 +7984,7 @@
           <p:cNvPr id="15" name="rollback-copy">
             <a:extLst xmlns:a="http://schemas.openxmlformats.org/drawingml/2006/main">
               <a:ext uri="{FF2B5EF4-FFF2-40B4-BE49-F238E27FC236}">
-                <a16:creationId xmlns:a16="http://schemas.microsoft.com/office/drawing/2014/main" id="{29AD88B8-B664-4F55-9D04-7AE25E4B8A59}"/>
+                <a16:creationId xmlns:a16="http://schemas.microsoft.com/office/drawing/2014/main" id="{8789E935-4D4A-462A-AA09-92DD49053952}"/>
               </a:ext>
             </a:extLst>
           </p:cNvPr>
@@ -7979,7 +8012,6 @@
           <a:lstStyle xmlns:a="http://schemas.openxmlformats.org/drawingml/2006/main"/>
           <a:p xmlns:a="http://schemas.openxmlformats.org/drawingml/2006/main">
             <a:pPr algn="ctr">
-              <a:buNone/>
               <a:defRPr sz="1950" b="1">
                 <a:solidFill>
                   <a:srgbClr val="9A6700"/>
@@ -8006,7 +8038,7 @@
     </p:spTree>
     <p:extLst>
       <p:ext uri="{BB962C8B-B14F-4D97-AF65-F5344CB8AC3E}">
-        <p14:creationId xmlns:p14="http://schemas.microsoft.com/office/powerpoint/2010/main" val="1960291864"/>
+        <p14:creationId xmlns:p14="http://schemas.microsoft.com/office/powerpoint/2010/main" val="324834626"/>
       </p:ext>
     </p:extLst>
   </p:cSld>

--- a/output/presentation/techflow-community-ui-modernization.pptx
+++ b/output/presentation/techflow-community-ui-modernization.pptx
@@ -2,22 +2,22 @@
 <file path=ppt/presentation.xml><?xml version="1.0" encoding="utf-8"?>
 <p:presentation xmlns:p="http://schemas.openxmlformats.org/presentationml/2006/main">
   <p:sldMasterIdLst>
-    <p:sldMasterId xmlns:r="http://schemas.openxmlformats.org/officeDocument/2006/relationships" id="2147483648" r:id="R66c41340626646f0"/>
+    <p:sldMasterId xmlns:r="http://schemas.openxmlformats.org/officeDocument/2006/relationships" id="2147483648" r:id="R94ee054866e8496f"/>
   </p:sldMasterIdLst>
   <p:notesMasterIdLst>
-    <p:notesMasterId xmlns:r="http://schemas.openxmlformats.org/officeDocument/2006/relationships" r:id="Rb371bacbbbe34996"/>
+    <p:notesMasterId xmlns:r="http://schemas.openxmlformats.org/officeDocument/2006/relationships" r:id="R9d75b6a1c43d47d8"/>
   </p:notesMasterIdLst>
   <p:sldIdLst>
-    <p:sldId xmlns:r="http://schemas.openxmlformats.org/officeDocument/2006/relationships" id="256" r:id="R421f4a0087934b19"/>
-    <p:sldId xmlns:r="http://schemas.openxmlformats.org/officeDocument/2006/relationships" id="257" r:id="R6fae06355a9a4f1b"/>
-    <p:sldId xmlns:r="http://schemas.openxmlformats.org/officeDocument/2006/relationships" id="258" r:id="Ra46b688f408449b6"/>
-    <p:sldId xmlns:r="http://schemas.openxmlformats.org/officeDocument/2006/relationships" id="259" r:id="Rbe0ec6b4f5e741e7"/>
-    <p:sldId xmlns:r="http://schemas.openxmlformats.org/officeDocument/2006/relationships" id="260" r:id="Reb1ce01b5a8d41b4"/>
-    <p:sldId xmlns:r="http://schemas.openxmlformats.org/officeDocument/2006/relationships" id="261" r:id="Rd33476dba3494d92"/>
-    <p:sldId xmlns:r="http://schemas.openxmlformats.org/officeDocument/2006/relationships" id="262" r:id="R8083cb7c0dd7439c"/>
-    <p:sldId xmlns:r="http://schemas.openxmlformats.org/officeDocument/2006/relationships" id="263" r:id="R79b2276e9ae9480e"/>
-    <p:sldId xmlns:r="http://schemas.openxmlformats.org/officeDocument/2006/relationships" id="264" r:id="Rb7ef19d013ac48b2"/>
-    <p:sldId xmlns:r="http://schemas.openxmlformats.org/officeDocument/2006/relationships" id="265" r:id="Re94c627166174200"/>
+    <p:sldId xmlns:r="http://schemas.openxmlformats.org/officeDocument/2006/relationships" id="256" r:id="R6f54963825c743d0"/>
+    <p:sldId xmlns:r="http://schemas.openxmlformats.org/officeDocument/2006/relationships" id="257" r:id="R6c32de01a3b54629"/>
+    <p:sldId xmlns:r="http://schemas.openxmlformats.org/officeDocument/2006/relationships" id="258" r:id="Rc12a014bad244cba"/>
+    <p:sldId xmlns:r="http://schemas.openxmlformats.org/officeDocument/2006/relationships" id="259" r:id="Rf6441fabd5f740bf"/>
+    <p:sldId xmlns:r="http://schemas.openxmlformats.org/officeDocument/2006/relationships" id="260" r:id="Rb7fa767a0c5c44fa"/>
+    <p:sldId xmlns:r="http://schemas.openxmlformats.org/officeDocument/2006/relationships" id="261" r:id="R78821729725845ed"/>
+    <p:sldId xmlns:r="http://schemas.openxmlformats.org/officeDocument/2006/relationships" id="262" r:id="Rfb85140611174bed"/>
+    <p:sldId xmlns:r="http://schemas.openxmlformats.org/officeDocument/2006/relationships" id="263" r:id="R2b03af21cdc04420"/>
+    <p:sldId xmlns:r="http://schemas.openxmlformats.org/officeDocument/2006/relationships" id="264" r:id="Rc6e5dec055994feb"/>
+    <p:sldId xmlns:r="http://schemas.openxmlformats.org/officeDocument/2006/relationships" id="265" r:id="Rf363f71595334ab2"/>
   </p:sldIdLst>
   <p:sldSz cx="12192000" cy="6858000"/>
   <p:notesSz cx="6858000" cy="9144000"/>
@@ -1349,7 +1349,7 @@
   </p:cSld>
   <p:clrMap bg1="lt1" tx1="dk1" bg2="lt2" tx2="dk2" accent1="accent1" accent2="accent2" accent3="accent3" accent4="accent4" accent5="accent5" accent6="accent6" hlink="hlink" folHlink="folHlink"/>
   <p:sldLayoutIdLst>
-    <p:sldLayoutId xmlns:r="http://schemas.openxmlformats.org/officeDocument/2006/relationships" id="2147483649" r:id="R958c5ff59c6a48c3"/>
+    <p:sldLayoutId xmlns:r="http://schemas.openxmlformats.org/officeDocument/2006/relationships" id="2147483649" r:id="Rb50509a2544d4b7b"/>
   </p:sldLayoutIdLst>
   <p:txStyles>
     <p:titleStyle>
@@ -1900,7 +1900,7 @@
           <p:cNvPr id="7" name="cover-kicker">
             <a:extLst xmlns:a="http://schemas.openxmlformats.org/drawingml/2006/main">
               <a:ext uri="{FF2B5EF4-FFF2-40B4-BE49-F238E27FC236}">
-                <a16:creationId xmlns:a16="http://schemas.microsoft.com/office/drawing/2014/main" id="{0831942A-4FA7-4197-A56B-40BC47816EC1}"/>
+                <a16:creationId xmlns:a16="http://schemas.microsoft.com/office/drawing/2014/main" id="{FF6B1B45-AEDA-414F-8042-BC08C845C9B9}"/>
               </a:ext>
             </a:extLst>
           </p:cNvPr>
@@ -1956,7 +1956,7 @@
           <p:cNvPr id="2" name="cover-title">
             <a:extLst xmlns:a="http://schemas.openxmlformats.org/drawingml/2006/main">
               <a:ext uri="{FF2B5EF4-FFF2-40B4-BE49-F238E27FC236}">
-                <a16:creationId xmlns:a16="http://schemas.microsoft.com/office/drawing/2014/main" id="{B2B3D133-9D8B-4A5F-9808-CB8019391A6D}"/>
+                <a16:creationId xmlns:a16="http://schemas.microsoft.com/office/drawing/2014/main" id="{666CFAA1-BC5B-428A-8DF2-3A616A8DB7B3}"/>
               </a:ext>
             </a:extLst>
           </p:cNvPr>
@@ -2035,7 +2035,7 @@
           <p:cNvPr id="3" name="cover-subtitle">
             <a:extLst xmlns:a="http://schemas.openxmlformats.org/drawingml/2006/main">
               <a:ext uri="{FF2B5EF4-FFF2-40B4-BE49-F238E27FC236}">
-                <a16:creationId xmlns:a16="http://schemas.microsoft.com/office/drawing/2014/main" id="{15411666-89E7-4925-B585-5B787DF3DEE1}"/>
+                <a16:creationId xmlns:a16="http://schemas.microsoft.com/office/drawing/2014/main" id="{19718DD0-2545-4ED1-89A8-E23856FA9413}"/>
               </a:ext>
             </a:extLst>
           </p:cNvPr>
@@ -2091,7 +2091,7 @@
           <p:cNvPr id="4" name="cover-image-frame">
             <a:extLst xmlns:a="http://schemas.openxmlformats.org/drawingml/2006/main">
               <a:ext uri="{FF2B5EF4-FFF2-40B4-BE49-F238E27FC236}">
-                <a16:creationId xmlns:a16="http://schemas.microsoft.com/office/drawing/2014/main" id="{E40F805C-6C35-48CA-AA6E-7B4D4B811604}"/>
+                <a16:creationId xmlns:a16="http://schemas.microsoft.com/office/drawing/2014/main" id="{62FB5166-7834-43ED-9FA1-E1A1863252D2}"/>
               </a:ext>
             </a:extLst>
           </p:cNvPr>
@@ -2130,7 +2130,7 @@
           <p:nvPr/>
         </p:nvPicPr>
         <p:blipFill>
-          <a:blip xmlns:r="http://schemas.openxmlformats.org/officeDocument/2006/relationships" xmlns:a="http://schemas.openxmlformats.org/drawingml/2006/main" r:embed="R5a6aad62ff9a46ae"/>
+          <a:blip xmlns:r="http://schemas.openxmlformats.org/officeDocument/2006/relationships" xmlns:a="http://schemas.openxmlformats.org/drawingml/2006/main" r:embed="Ra2e0125c611a4d89"/>
           <a:stretch xmlns:a="http://schemas.openxmlformats.org/drawingml/2006/main"/>
         </p:blipFill>
         <p:spPr>
@@ -2150,7 +2150,7 @@
           <p:cNvPr id="6" name="cover-status">
             <a:extLst xmlns:a="http://schemas.openxmlformats.org/drawingml/2006/main">
               <a:ext uri="{FF2B5EF4-FFF2-40B4-BE49-F238E27FC236}">
-                <a16:creationId xmlns:a16="http://schemas.microsoft.com/office/drawing/2014/main" id="{24564B8F-0972-465A-85E1-8F6E98AF493D}"/>
+                <a16:creationId xmlns:a16="http://schemas.microsoft.com/office/drawing/2014/main" id="{FD1083C8-117D-4797-ADFF-3B40F83F31BD}"/>
               </a:ext>
             </a:extLst>
           </p:cNvPr>
@@ -2204,7 +2204,7 @@
     </p:spTree>
     <p:extLst>
       <p:ext uri="{BB962C8B-B14F-4D97-AF65-F5344CB8AC3E}">
-        <p14:creationId xmlns:p14="http://schemas.microsoft.com/office/powerpoint/2010/main" val="108750241"/>
+        <p14:creationId xmlns:p14="http://schemas.microsoft.com/office/powerpoint/2010/main" val="528625707"/>
       </p:ext>
     </p:extLst>
   </p:cSld>
@@ -2235,7 +2235,7 @@
           <p:cNvPr id="8" name="close-kicker">
             <a:extLst xmlns:a="http://schemas.openxmlformats.org/drawingml/2006/main">
               <a:ext uri="{FF2B5EF4-FFF2-40B4-BE49-F238E27FC236}">
-                <a16:creationId xmlns:a16="http://schemas.microsoft.com/office/drawing/2014/main" id="{C4BC1143-FD1A-4C80-83A4-A9C23E41BC43}"/>
+                <a16:creationId xmlns:a16="http://schemas.microsoft.com/office/drawing/2014/main" id="{E2698C2A-2501-426D-8800-E19E6530BDA1}"/>
               </a:ext>
             </a:extLst>
           </p:cNvPr>
@@ -2291,7 +2291,7 @@
           <p:cNvPr id="2" name="close-title">
             <a:extLst xmlns:a="http://schemas.openxmlformats.org/drawingml/2006/main">
               <a:ext uri="{FF2B5EF4-FFF2-40B4-BE49-F238E27FC236}">
-                <a16:creationId xmlns:a16="http://schemas.microsoft.com/office/drawing/2014/main" id="{BA5B4900-D447-4AF4-8DEF-DDF414498DC4}"/>
+                <a16:creationId xmlns:a16="http://schemas.microsoft.com/office/drawing/2014/main" id="{60EA3C49-A376-4F68-81B0-038C25CECB6D}"/>
               </a:ext>
             </a:extLst>
           </p:cNvPr>
@@ -2370,7 +2370,7 @@
           <p:cNvPr id="3" name="close-detail">
             <a:extLst xmlns:a="http://schemas.openxmlformats.org/drawingml/2006/main">
               <a:ext uri="{FF2B5EF4-FFF2-40B4-BE49-F238E27FC236}">
-                <a16:creationId xmlns:a16="http://schemas.microsoft.com/office/drawing/2014/main" id="{0F09E4A6-9EB4-408F-9778-46EDB8674009}"/>
+                <a16:creationId xmlns:a16="http://schemas.microsoft.com/office/drawing/2014/main" id="{3F161E3C-B6C6-4657-9139-18E786CB635E}"/>
               </a:ext>
             </a:extLst>
           </p:cNvPr>
@@ -2439,7 +2439,7 @@
                 <a:ea typeface="Malgun Gothic"/>
                 <a:cs typeface="Malgun Gothic"/>
               </a:rPr>
-              <a:t>45+ SVG 아이콘·검색 포커스·첫 게시물 진입 검증</a:t>
+              <a:t>180px 드롭다운·45+ SVG 아이콘·첫 게시물 진입 검증</a:t>
             </a:r>
           </a:p>
         </p:txBody>
@@ -2449,7 +2449,7 @@
           <p:cNvPr id="4" name="close-status">
             <a:extLst xmlns:a="http://schemas.openxmlformats.org/drawingml/2006/main">
               <a:ext uri="{FF2B5EF4-FFF2-40B4-BE49-F238E27FC236}">
-                <a16:creationId xmlns:a16="http://schemas.microsoft.com/office/drawing/2014/main" id="{D2D6557F-C25A-4A46-8A3B-C3FDD49B6A67}"/>
+                <a16:creationId xmlns:a16="http://schemas.microsoft.com/office/drawing/2014/main" id="{B8B28206-BFBD-42FC-9485-E6AD173DFC19}"/>
               </a:ext>
             </a:extLst>
           </p:cNvPr>
@@ -2484,7 +2484,7 @@
           <p:cNvPr id="5" name="close-go">
             <a:extLst xmlns:a="http://schemas.openxmlformats.org/drawingml/2006/main">
               <a:ext uri="{FF2B5EF4-FFF2-40B4-BE49-F238E27FC236}">
-                <a16:creationId xmlns:a16="http://schemas.microsoft.com/office/drawing/2014/main" id="{F14DB7E6-A78C-44CE-A1E9-70E2CA42D724}"/>
+                <a16:creationId xmlns:a16="http://schemas.microsoft.com/office/drawing/2014/main" id="{03DF171F-F85E-4947-ADEB-20CAEC428327}"/>
               </a:ext>
             </a:extLst>
           </p:cNvPr>
@@ -2540,7 +2540,7 @@
           <p:cNvPr id="6" name="close-condition">
             <a:extLst xmlns:a="http://schemas.openxmlformats.org/drawingml/2006/main">
               <a:ext uri="{FF2B5EF4-FFF2-40B4-BE49-F238E27FC236}">
-                <a16:creationId xmlns:a16="http://schemas.microsoft.com/office/drawing/2014/main" id="{7BD48EE6-0441-4D52-8095-26D946AB8797}"/>
+                <a16:creationId xmlns:a16="http://schemas.microsoft.com/office/drawing/2014/main" id="{07486C99-CB5C-44FF-9BBD-A4E07551D628}"/>
               </a:ext>
             </a:extLst>
           </p:cNvPr>
@@ -2596,7 +2596,7 @@
           <p:cNvPr id="7" name="close-next">
             <a:extLst xmlns:a="http://schemas.openxmlformats.org/drawingml/2006/main">
               <a:ext uri="{FF2B5EF4-FFF2-40B4-BE49-F238E27FC236}">
-                <a16:creationId xmlns:a16="http://schemas.microsoft.com/office/drawing/2014/main" id="{B9CBF51B-4A2B-4661-9553-8E9755921008}"/>
+                <a16:creationId xmlns:a16="http://schemas.microsoft.com/office/drawing/2014/main" id="{B60B08D0-B0AB-4EFB-B7CA-8110852BA64E}"/>
               </a:ext>
             </a:extLst>
           </p:cNvPr>
@@ -2650,7 +2650,7 @@
     </p:spTree>
     <p:extLst>
       <p:ext uri="{BB962C8B-B14F-4D97-AF65-F5344CB8AC3E}">
-        <p14:creationId xmlns:p14="http://schemas.microsoft.com/office/powerpoint/2010/main" val="323033837"/>
+        <p14:creationId xmlns:p14="http://schemas.microsoft.com/office/powerpoint/2010/main" val="811772999"/>
       </p:ext>
     </p:extLst>
   </p:cSld>
@@ -2681,7 +2681,7 @@
           <p:cNvPr id="9" name="title-2">
             <a:extLst xmlns:a="http://schemas.openxmlformats.org/drawingml/2006/main">
               <a:ext uri="{FF2B5EF4-FFF2-40B4-BE49-F238E27FC236}">
-                <a16:creationId xmlns:a16="http://schemas.microsoft.com/office/drawing/2014/main" id="{3F5BEE9C-EDDE-4B2B-8EAD-1765160EB20D}"/>
+                <a16:creationId xmlns:a16="http://schemas.microsoft.com/office/drawing/2014/main" id="{0FB3C023-EEDF-49F5-B6E5-10D7A4C547C2}"/>
               </a:ext>
             </a:extLst>
           </p:cNvPr>
@@ -2737,7 +2737,7 @@
           <p:cNvPr id="2" name="page-2">
             <a:extLst xmlns:a="http://schemas.openxmlformats.org/drawingml/2006/main">
               <a:ext uri="{FF2B5EF4-FFF2-40B4-BE49-F238E27FC236}">
-                <a16:creationId xmlns:a16="http://schemas.microsoft.com/office/drawing/2014/main" id="{8138F1B7-FF75-48C9-BAEE-01ED6BAD12B4}"/>
+                <a16:creationId xmlns:a16="http://schemas.microsoft.com/office/drawing/2014/main" id="{D6A19DDC-E29E-43FF-A10D-E0A0188617BD}"/>
               </a:ext>
             </a:extLst>
           </p:cNvPr>
@@ -2793,7 +2793,7 @@
           <p:cNvPr id="3" name="before-label">
             <a:extLst xmlns:a="http://schemas.openxmlformats.org/drawingml/2006/main">
               <a:ext uri="{FF2B5EF4-FFF2-40B4-BE49-F238E27FC236}">
-                <a16:creationId xmlns:a16="http://schemas.microsoft.com/office/drawing/2014/main" id="{16E6163B-B9D8-4A08-BCD3-EFB05EC1FFA3}"/>
+                <a16:creationId xmlns:a16="http://schemas.microsoft.com/office/drawing/2014/main" id="{CF6D25D2-EB48-4CDD-AD80-BE985A9B87BE}"/>
               </a:ext>
             </a:extLst>
           </p:cNvPr>
@@ -2849,7 +2849,7 @@
           <p:cNvPr id="4" name="after-label">
             <a:extLst xmlns:a="http://schemas.openxmlformats.org/drawingml/2006/main">
               <a:ext uri="{FF2B5EF4-FFF2-40B4-BE49-F238E27FC236}">
-                <a16:creationId xmlns:a16="http://schemas.microsoft.com/office/drawing/2014/main" id="{0ED1218E-772A-4FD4-97D3-6923F33D6D6B}"/>
+                <a16:creationId xmlns:a16="http://schemas.microsoft.com/office/drawing/2014/main" id="{AF267786-95E4-451E-999F-0F3F5523664B}"/>
               </a:ext>
             </a:extLst>
           </p:cNvPr>
@@ -2909,7 +2909,7 @@
           <p:nvPr/>
         </p:nvPicPr>
         <p:blipFill>
-          <a:blip xmlns:r="http://schemas.openxmlformats.org/officeDocument/2006/relationships" xmlns:a="http://schemas.openxmlformats.org/drawingml/2006/main" r:embed="R855e1b23405a43dc"/>
+          <a:blip xmlns:r="http://schemas.openxmlformats.org/officeDocument/2006/relationships" xmlns:a="http://schemas.openxmlformats.org/drawingml/2006/main" r:embed="Ra17b5b3323244965"/>
           <a:stretch xmlns:a="http://schemas.openxmlformats.org/drawingml/2006/main"/>
         </p:blipFill>
         <p:spPr>
@@ -2933,7 +2933,7 @@
           <p:nvPr/>
         </p:nvPicPr>
         <p:blipFill>
-          <a:blip xmlns:r="http://schemas.openxmlformats.org/officeDocument/2006/relationships" xmlns:a="http://schemas.openxmlformats.org/drawingml/2006/main" r:embed="R9f16110f7030477c"/>
+          <a:blip xmlns:r="http://schemas.openxmlformats.org/officeDocument/2006/relationships" xmlns:a="http://schemas.openxmlformats.org/drawingml/2006/main" r:embed="Re3fbeb1a17d94bfa"/>
           <a:stretch xmlns:a="http://schemas.openxmlformats.org/drawingml/2006/main"/>
         </p:blipFill>
         <p:spPr>
@@ -2953,7 +2953,7 @@
           <p:cNvPr id="7" name="before-copy">
             <a:extLst xmlns:a="http://schemas.openxmlformats.org/drawingml/2006/main">
               <a:ext uri="{FF2B5EF4-FFF2-40B4-BE49-F238E27FC236}">
-                <a16:creationId xmlns:a16="http://schemas.microsoft.com/office/drawing/2014/main" id="{9267EC86-997F-46CE-981F-05CB51C2875C}"/>
+                <a16:creationId xmlns:a16="http://schemas.microsoft.com/office/drawing/2014/main" id="{FA51509B-EED9-42F4-83E6-7CD5B286C525}"/>
               </a:ext>
             </a:extLst>
           </p:cNvPr>
@@ -3009,7 +3009,7 @@
           <p:cNvPr id="8" name="after-copy">
             <a:extLst xmlns:a="http://schemas.openxmlformats.org/drawingml/2006/main">
               <a:ext uri="{FF2B5EF4-FFF2-40B4-BE49-F238E27FC236}">
-                <a16:creationId xmlns:a16="http://schemas.microsoft.com/office/drawing/2014/main" id="{9D371677-85F5-44F1-A99D-C1FAB51CC47E}"/>
+                <a16:creationId xmlns:a16="http://schemas.microsoft.com/office/drawing/2014/main" id="{135F5375-5C5B-40AD-B63E-6EB442C2F2E4}"/>
               </a:ext>
             </a:extLst>
           </p:cNvPr>
@@ -3063,7 +3063,7 @@
     </p:spTree>
     <p:extLst>
       <p:ext uri="{BB962C8B-B14F-4D97-AF65-F5344CB8AC3E}">
-        <p14:creationId xmlns:p14="http://schemas.microsoft.com/office/powerpoint/2010/main" val="2029416873"/>
+        <p14:creationId xmlns:p14="http://schemas.microsoft.com/office/powerpoint/2010/main" val="1537639416"/>
       </p:ext>
     </p:extLst>
   </p:cSld>
@@ -3094,7 +3094,7 @@
           <p:cNvPr id="15" name="title-3">
             <a:extLst xmlns:a="http://schemas.openxmlformats.org/drawingml/2006/main">
               <a:ext uri="{FF2B5EF4-FFF2-40B4-BE49-F238E27FC236}">
-                <a16:creationId xmlns:a16="http://schemas.microsoft.com/office/drawing/2014/main" id="{B70A688E-BA8D-4296-B59E-FC87D47A899C}"/>
+                <a16:creationId xmlns:a16="http://schemas.microsoft.com/office/drawing/2014/main" id="{31E866ED-4CFC-4DF7-AB0F-358B210A3764}"/>
               </a:ext>
             </a:extLst>
           </p:cNvPr>
@@ -3150,7 +3150,7 @@
           <p:cNvPr id="2" name="page-3">
             <a:extLst xmlns:a="http://schemas.openxmlformats.org/drawingml/2006/main">
               <a:ext uri="{FF2B5EF4-FFF2-40B4-BE49-F238E27FC236}">
-                <a16:creationId xmlns:a16="http://schemas.microsoft.com/office/drawing/2014/main" id="{03ECAB18-1F42-46A7-86CC-6B517028E1F2}"/>
+                <a16:creationId xmlns:a16="http://schemas.microsoft.com/office/drawing/2014/main" id="{DB184D92-6DD6-46F4-8130-5B1F435973B5}"/>
               </a:ext>
             </a:extLst>
           </p:cNvPr>
@@ -3206,7 +3206,7 @@
           <p:cNvPr id="3" name="state-0">
             <a:extLst xmlns:a="http://schemas.openxmlformats.org/drawingml/2006/main">
               <a:ext uri="{FF2B5EF4-FFF2-40B4-BE49-F238E27FC236}">
-                <a16:creationId xmlns:a16="http://schemas.microsoft.com/office/drawing/2014/main" id="{CA26F7D7-E64E-460F-9E88-00121483E8B8}"/>
+                <a16:creationId xmlns:a16="http://schemas.microsoft.com/office/drawing/2014/main" id="{286A0587-40D5-4A46-956A-59D91F16D6FE}"/>
               </a:ext>
             </a:extLst>
           </p:cNvPr>
@@ -3241,7 +3241,7 @@
           <p:cNvPr id="4" name="state-label-0">
             <a:extLst xmlns:a="http://schemas.openxmlformats.org/drawingml/2006/main">
               <a:ext uri="{FF2B5EF4-FFF2-40B4-BE49-F238E27FC236}">
-                <a16:creationId xmlns:a16="http://schemas.microsoft.com/office/drawing/2014/main" id="{B650A297-F151-42F4-B94E-88B33EFB7864}"/>
+                <a16:creationId xmlns:a16="http://schemas.microsoft.com/office/drawing/2014/main" id="{1DEA4C9E-46DD-4A36-A5BB-AA1EEC1AA689}"/>
               </a:ext>
             </a:extLst>
           </p:cNvPr>
@@ -3297,7 +3297,7 @@
           <p:cNvPr id="5" name="state-detail-0">
             <a:extLst xmlns:a="http://schemas.openxmlformats.org/drawingml/2006/main">
               <a:ext uri="{FF2B5EF4-FFF2-40B4-BE49-F238E27FC236}">
-                <a16:creationId xmlns:a16="http://schemas.microsoft.com/office/drawing/2014/main" id="{6DE8864E-7CF1-45AA-846B-5975887BBF16}"/>
+                <a16:creationId xmlns:a16="http://schemas.microsoft.com/office/drawing/2014/main" id="{173ABB83-150F-4A6D-B7A9-87C60DCFB5E9}"/>
               </a:ext>
             </a:extLst>
           </p:cNvPr>
@@ -3353,7 +3353,7 @@
           <p:cNvPr id="6" name="state-1">
             <a:extLst xmlns:a="http://schemas.openxmlformats.org/drawingml/2006/main">
               <a:ext uri="{FF2B5EF4-FFF2-40B4-BE49-F238E27FC236}">
-                <a16:creationId xmlns:a16="http://schemas.microsoft.com/office/drawing/2014/main" id="{E21AA93C-1659-45D9-9BAC-D21A3C40F19F}"/>
+                <a16:creationId xmlns:a16="http://schemas.microsoft.com/office/drawing/2014/main" id="{ECB7E249-113A-476E-85DF-90255823DA50}"/>
               </a:ext>
             </a:extLst>
           </p:cNvPr>
@@ -3388,7 +3388,7 @@
           <p:cNvPr id="7" name="state-label-1">
             <a:extLst xmlns:a="http://schemas.openxmlformats.org/drawingml/2006/main">
               <a:ext uri="{FF2B5EF4-FFF2-40B4-BE49-F238E27FC236}">
-                <a16:creationId xmlns:a16="http://schemas.microsoft.com/office/drawing/2014/main" id="{84CE8A24-9CA7-42CB-8580-9189FED24423}"/>
+                <a16:creationId xmlns:a16="http://schemas.microsoft.com/office/drawing/2014/main" id="{7F4F6262-6A65-413E-96C8-39471B18FAF1}"/>
               </a:ext>
             </a:extLst>
           </p:cNvPr>
@@ -3444,7 +3444,7 @@
           <p:cNvPr id="8" name="state-detail-1">
             <a:extLst xmlns:a="http://schemas.openxmlformats.org/drawingml/2006/main">
               <a:ext uri="{FF2B5EF4-FFF2-40B4-BE49-F238E27FC236}">
-                <a16:creationId xmlns:a16="http://schemas.microsoft.com/office/drawing/2014/main" id="{62DE8DAD-EBC0-43D7-999D-5DC235C124CB}"/>
+                <a16:creationId xmlns:a16="http://schemas.microsoft.com/office/drawing/2014/main" id="{1A0DEF46-4F93-405A-800F-CD6D7AA99671}"/>
               </a:ext>
             </a:extLst>
           </p:cNvPr>
@@ -3500,7 +3500,7 @@
           <p:cNvPr id="9" name="state-2">
             <a:extLst xmlns:a="http://schemas.openxmlformats.org/drawingml/2006/main">
               <a:ext uri="{FF2B5EF4-FFF2-40B4-BE49-F238E27FC236}">
-                <a16:creationId xmlns:a16="http://schemas.microsoft.com/office/drawing/2014/main" id="{3BAB2EF9-A116-4479-B609-AF870C51BDD7}"/>
+                <a16:creationId xmlns:a16="http://schemas.microsoft.com/office/drawing/2014/main" id="{EB434C36-B3E2-461C-B088-D670D4A1B6FB}"/>
               </a:ext>
             </a:extLst>
           </p:cNvPr>
@@ -3535,7 +3535,7 @@
           <p:cNvPr id="10" name="state-label-2">
             <a:extLst xmlns:a="http://schemas.openxmlformats.org/drawingml/2006/main">
               <a:ext uri="{FF2B5EF4-FFF2-40B4-BE49-F238E27FC236}">
-                <a16:creationId xmlns:a16="http://schemas.microsoft.com/office/drawing/2014/main" id="{278E515B-5265-4D07-AEE2-57924FD43AE2}"/>
+                <a16:creationId xmlns:a16="http://schemas.microsoft.com/office/drawing/2014/main" id="{0D837C12-3514-4D85-9777-B29C97759E5E}"/>
               </a:ext>
             </a:extLst>
           </p:cNvPr>
@@ -3591,7 +3591,7 @@
           <p:cNvPr id="11" name="state-detail-2">
             <a:extLst xmlns:a="http://schemas.openxmlformats.org/drawingml/2006/main">
               <a:ext uri="{FF2B5EF4-FFF2-40B4-BE49-F238E27FC236}">
-                <a16:creationId xmlns:a16="http://schemas.microsoft.com/office/drawing/2014/main" id="{5BD76827-FF47-44B6-9657-378657B32F93}"/>
+                <a16:creationId xmlns:a16="http://schemas.microsoft.com/office/drawing/2014/main" id="{81654EAC-73AA-49D9-A8EA-8CDC2D895238}"/>
               </a:ext>
             </a:extLst>
           </p:cNvPr>
@@ -3647,7 +3647,7 @@
           <p:cNvPr id="12" name="state-3">
             <a:extLst xmlns:a="http://schemas.openxmlformats.org/drawingml/2006/main">
               <a:ext uri="{FF2B5EF4-FFF2-40B4-BE49-F238E27FC236}">
-                <a16:creationId xmlns:a16="http://schemas.microsoft.com/office/drawing/2014/main" id="{B7B8F814-7865-4F2D-9FCA-299891239096}"/>
+                <a16:creationId xmlns:a16="http://schemas.microsoft.com/office/drawing/2014/main" id="{71599C5B-E61E-4769-9FDF-E7EA23132AEF}"/>
               </a:ext>
             </a:extLst>
           </p:cNvPr>
@@ -3682,7 +3682,7 @@
           <p:cNvPr id="13" name="state-label-3">
             <a:extLst xmlns:a="http://schemas.openxmlformats.org/drawingml/2006/main">
               <a:ext uri="{FF2B5EF4-FFF2-40B4-BE49-F238E27FC236}">
-                <a16:creationId xmlns:a16="http://schemas.microsoft.com/office/drawing/2014/main" id="{30CF7C98-CBC7-4C42-A58B-9B2CECF6D56D}"/>
+                <a16:creationId xmlns:a16="http://schemas.microsoft.com/office/drawing/2014/main" id="{945E6740-4AE1-47C7-9245-D8ED22EA6258}"/>
               </a:ext>
             </a:extLst>
           </p:cNvPr>
@@ -3738,7 +3738,7 @@
           <p:cNvPr id="14" name="state-detail-3">
             <a:extLst xmlns:a="http://schemas.openxmlformats.org/drawingml/2006/main">
               <a:ext uri="{FF2B5EF4-FFF2-40B4-BE49-F238E27FC236}">
-                <a16:creationId xmlns:a16="http://schemas.microsoft.com/office/drawing/2014/main" id="{F373DAE1-EA30-47E8-B8EA-8358D4A26C02}"/>
+                <a16:creationId xmlns:a16="http://schemas.microsoft.com/office/drawing/2014/main" id="{A65FD030-9284-42CE-BE00-B22395E4BB64}"/>
               </a:ext>
             </a:extLst>
           </p:cNvPr>
@@ -3792,7 +3792,7 @@
     </p:spTree>
     <p:extLst>
       <p:ext uri="{BB962C8B-B14F-4D97-AF65-F5344CB8AC3E}">
-        <p14:creationId xmlns:p14="http://schemas.microsoft.com/office/powerpoint/2010/main" val="751827108"/>
+        <p14:creationId xmlns:p14="http://schemas.microsoft.com/office/powerpoint/2010/main" val="1130848782"/>
       </p:ext>
     </p:extLst>
   </p:cSld>
@@ -3823,7 +3823,7 @@
           <p:cNvPr id="9" name="title-4">
             <a:extLst xmlns:a="http://schemas.openxmlformats.org/drawingml/2006/main">
               <a:ext uri="{FF2B5EF4-FFF2-40B4-BE49-F238E27FC236}">
-                <a16:creationId xmlns:a16="http://schemas.microsoft.com/office/drawing/2014/main" id="{FF1CCC28-3B20-4F30-80FC-81B9E8EEDB1A}"/>
+                <a16:creationId xmlns:a16="http://schemas.microsoft.com/office/drawing/2014/main" id="{921908DC-1E88-49F5-9567-5E2234D0C332}"/>
               </a:ext>
             </a:extLst>
           </p:cNvPr>
@@ -3879,7 +3879,7 @@
           <p:cNvPr id="2" name="page-4">
             <a:extLst xmlns:a="http://schemas.openxmlformats.org/drawingml/2006/main">
               <a:ext uri="{FF2B5EF4-FFF2-40B4-BE49-F238E27FC236}">
-                <a16:creationId xmlns:a16="http://schemas.microsoft.com/office/drawing/2014/main" id="{2F285550-1D3F-4374-A00B-13680A189281}"/>
+                <a16:creationId xmlns:a16="http://schemas.microsoft.com/office/drawing/2014/main" id="{B61C5CC9-5CBC-4757-B301-753AD02E176F}"/>
               </a:ext>
             </a:extLst>
           </p:cNvPr>
@@ -3939,7 +3939,7 @@
           <p:nvPr/>
         </p:nvPicPr>
         <p:blipFill>
-          <a:blip xmlns:r="http://schemas.openxmlformats.org/officeDocument/2006/relationships" xmlns:a="http://schemas.openxmlformats.org/drawingml/2006/main" r:embed="R251c8ff33f22420e"/>
+          <a:blip xmlns:r="http://schemas.openxmlformats.org/officeDocument/2006/relationships" xmlns:a="http://schemas.openxmlformats.org/drawingml/2006/main" r:embed="R004366ba0d6f4e70"/>
           <a:stretch xmlns:a="http://schemas.openxmlformats.org/drawingml/2006/main"/>
         </p:blipFill>
         <p:spPr>
@@ -3963,7 +3963,7 @@
           <p:nvPr/>
         </p:nvPicPr>
         <p:blipFill>
-          <a:blip xmlns:r="http://schemas.openxmlformats.org/officeDocument/2006/relationships" xmlns:a="http://schemas.openxmlformats.org/drawingml/2006/main" r:embed="R4210e99c239a4e47"/>
+          <a:blip xmlns:r="http://schemas.openxmlformats.org/officeDocument/2006/relationships" xmlns:a="http://schemas.openxmlformats.org/drawingml/2006/main" r:embed="R208a908b29424b72"/>
           <a:stretch xmlns:a="http://schemas.openxmlformats.org/drawingml/2006/main"/>
         </p:blipFill>
         <p:spPr>
@@ -3983,7 +3983,7 @@
           <p:cNvPr id="5" name="action-caption">
             <a:extLst xmlns:a="http://schemas.openxmlformats.org/drawingml/2006/main">
               <a:ext uri="{FF2B5EF4-FFF2-40B4-BE49-F238E27FC236}">
-                <a16:creationId xmlns:a16="http://schemas.microsoft.com/office/drawing/2014/main" id="{0E567804-45A6-4A83-83C3-ECF6A83AA768}"/>
+                <a16:creationId xmlns:a16="http://schemas.microsoft.com/office/drawing/2014/main" id="{D380B658-9BC8-4176-AD1F-E37110FC762B}"/>
               </a:ext>
             </a:extLst>
           </p:cNvPr>
@@ -4039,7 +4039,7 @@
           <p:cNvPr id="6" name="dialog-result">
             <a:extLst xmlns:a="http://schemas.openxmlformats.org/drawingml/2006/main">
               <a:ext uri="{FF2B5EF4-FFF2-40B4-BE49-F238E27FC236}">
-                <a16:creationId xmlns:a16="http://schemas.microsoft.com/office/drawing/2014/main" id="{F1F71EB9-9F56-4538-93DE-30BFE32C0E03}"/>
+                <a16:creationId xmlns:a16="http://schemas.microsoft.com/office/drawing/2014/main" id="{4D2BCF81-4C14-4DBE-AAC9-DA7CA36A1833}"/>
               </a:ext>
             </a:extLst>
           </p:cNvPr>
@@ -4074,7 +4074,7 @@
           <p:cNvPr id="7" name="dialog-result-main">
             <a:extLst xmlns:a="http://schemas.openxmlformats.org/drawingml/2006/main">
               <a:ext uri="{FF2B5EF4-FFF2-40B4-BE49-F238E27FC236}">
-                <a16:creationId xmlns:a16="http://schemas.microsoft.com/office/drawing/2014/main" id="{53D52412-89D0-4A67-AF24-1B201304B636}"/>
+                <a16:creationId xmlns:a16="http://schemas.microsoft.com/office/drawing/2014/main" id="{E70C3D2E-F584-46DF-BCAA-ED9BA4A12FA7}"/>
               </a:ext>
             </a:extLst>
           </p:cNvPr>
@@ -4130,7 +4130,7 @@
           <p:cNvPr id="8" name="dialog-result-sub">
             <a:extLst xmlns:a="http://schemas.openxmlformats.org/drawingml/2006/main">
               <a:ext uri="{FF2B5EF4-FFF2-40B4-BE49-F238E27FC236}">
-                <a16:creationId xmlns:a16="http://schemas.microsoft.com/office/drawing/2014/main" id="{88FB90F1-72E5-45E3-9718-AB05B7F200F8}"/>
+                <a16:creationId xmlns:a16="http://schemas.microsoft.com/office/drawing/2014/main" id="{2627A281-F2FB-4FF5-9814-73170732E2FA}"/>
               </a:ext>
             </a:extLst>
           </p:cNvPr>
@@ -4184,7 +4184,7 @@
     </p:spTree>
     <p:extLst>
       <p:ext uri="{BB962C8B-B14F-4D97-AF65-F5344CB8AC3E}">
-        <p14:creationId xmlns:p14="http://schemas.microsoft.com/office/powerpoint/2010/main" val="379427461"/>
+        <p14:creationId xmlns:p14="http://schemas.microsoft.com/office/powerpoint/2010/main" val="2116243404"/>
       </p:ext>
     </p:extLst>
   </p:cSld>
@@ -4215,7 +4215,7 @@
           <p:cNvPr id="11" name="title-5">
             <a:extLst xmlns:a="http://schemas.openxmlformats.org/drawingml/2006/main">
               <a:ext uri="{FF2B5EF4-FFF2-40B4-BE49-F238E27FC236}">
-                <a16:creationId xmlns:a16="http://schemas.microsoft.com/office/drawing/2014/main" id="{79D4E410-FC1B-4A8C-9F6E-2D69C009762A}"/>
+                <a16:creationId xmlns:a16="http://schemas.microsoft.com/office/drawing/2014/main" id="{68C33207-F52A-49E1-B423-933303E8CA22}"/>
               </a:ext>
             </a:extLst>
           </p:cNvPr>
@@ -4271,7 +4271,7 @@
           <p:cNvPr id="2" name="page-5">
             <a:extLst xmlns:a="http://schemas.openxmlformats.org/drawingml/2006/main">
               <a:ext uri="{FF2B5EF4-FFF2-40B4-BE49-F238E27FC236}">
-                <a16:creationId xmlns:a16="http://schemas.microsoft.com/office/drawing/2014/main" id="{59A4307D-FA17-4B71-94D7-94A42DBF6D49}"/>
+                <a16:creationId xmlns:a16="http://schemas.microsoft.com/office/drawing/2014/main" id="{6084F754-07EF-43E9-9A1F-BC50FBD3C6BD}"/>
               </a:ext>
             </a:extLst>
           </p:cNvPr>
@@ -4331,7 +4331,7 @@
           <p:nvPr/>
         </p:nvPicPr>
         <p:blipFill>
-          <a:blip xmlns:r="http://schemas.openxmlformats.org/officeDocument/2006/relationships" xmlns:a="http://schemas.openxmlformats.org/drawingml/2006/main" r:embed="R6c867ac67bb242a3"/>
+          <a:blip xmlns:r="http://schemas.openxmlformats.org/officeDocument/2006/relationships" xmlns:a="http://schemas.openxmlformats.org/drawingml/2006/main" r:embed="R4675dd04f5fa4a18"/>
           <a:stretch xmlns:a="http://schemas.openxmlformats.org/drawingml/2006/main"/>
         </p:blipFill>
         <p:spPr>
@@ -4351,7 +4351,7 @@
           <p:cNvPr id="4" name="profile-result">
             <a:extLst xmlns:a="http://schemas.openxmlformats.org/drawingml/2006/main">
               <a:ext uri="{FF2B5EF4-FFF2-40B4-BE49-F238E27FC236}">
-                <a16:creationId xmlns:a16="http://schemas.microsoft.com/office/drawing/2014/main" id="{D0494C80-5317-4904-B737-5BD3DCC0B491}"/>
+                <a16:creationId xmlns:a16="http://schemas.microsoft.com/office/drawing/2014/main" id="{E1E8C2C1-7B4A-4386-B0D8-E823C353A050}"/>
               </a:ext>
             </a:extLst>
           </p:cNvPr>
@@ -4386,7 +4386,7 @@
           <p:cNvPr id="5" name="profile-title">
             <a:extLst xmlns:a="http://schemas.openxmlformats.org/drawingml/2006/main">
               <a:ext uri="{FF2B5EF4-FFF2-40B4-BE49-F238E27FC236}">
-                <a16:creationId xmlns:a16="http://schemas.microsoft.com/office/drawing/2014/main" id="{3B38CC23-A437-47B0-8C82-70AB173B9E04}"/>
+                <a16:creationId xmlns:a16="http://schemas.microsoft.com/office/drawing/2014/main" id="{0DDE3A0F-D7D9-49EE-B6E5-D6DA0368C18B}"/>
               </a:ext>
             </a:extLst>
           </p:cNvPr>
@@ -4442,7 +4442,7 @@
           <p:cNvPr id="6" name="profile-copy">
             <a:extLst xmlns:a="http://schemas.openxmlformats.org/drawingml/2006/main">
               <a:ext uri="{FF2B5EF4-FFF2-40B4-BE49-F238E27FC236}">
-                <a16:creationId xmlns:a16="http://schemas.microsoft.com/office/drawing/2014/main" id="{3FBDD296-FE31-4B26-84EE-0A8EFDE44FCF}"/>
+                <a16:creationId xmlns:a16="http://schemas.microsoft.com/office/drawing/2014/main" id="{9A3A3785-75E7-4047-AE4F-8919C7E379F1}"/>
               </a:ext>
             </a:extLst>
           </p:cNvPr>
@@ -4544,7 +4544,7 @@
           <p:cNvPr id="7" name="navigation-result">
             <a:extLst xmlns:a="http://schemas.openxmlformats.org/drawingml/2006/main">
               <a:ext uri="{FF2B5EF4-FFF2-40B4-BE49-F238E27FC236}">
-                <a16:creationId xmlns:a16="http://schemas.microsoft.com/office/drawing/2014/main" id="{BD6F893A-5961-466E-BBF8-3CD4AF4E571F}"/>
+                <a16:creationId xmlns:a16="http://schemas.microsoft.com/office/drawing/2014/main" id="{A6D4131D-0329-41FE-80AC-C645BDE45D57}"/>
               </a:ext>
             </a:extLst>
           </p:cNvPr>
@@ -4579,7 +4579,7 @@
           <p:cNvPr id="8" name="navigation-title">
             <a:extLst xmlns:a="http://schemas.openxmlformats.org/drawingml/2006/main">
               <a:ext uri="{FF2B5EF4-FFF2-40B4-BE49-F238E27FC236}">
-                <a16:creationId xmlns:a16="http://schemas.microsoft.com/office/drawing/2014/main" id="{8A9D4375-3889-42B9-B6FB-DD8EDB1AA3FB}"/>
+                <a16:creationId xmlns:a16="http://schemas.microsoft.com/office/drawing/2014/main" id="{233B93FE-B3C3-4B9D-B7AF-6A7506203AAF}"/>
               </a:ext>
             </a:extLst>
           </p:cNvPr>
@@ -4635,7 +4635,7 @@
           <p:cNvPr id="9" name="navigation-copy">
             <a:extLst xmlns:a="http://schemas.openxmlformats.org/drawingml/2006/main">
               <a:ext uri="{FF2B5EF4-FFF2-40B4-BE49-F238E27FC236}">
-                <a16:creationId xmlns:a16="http://schemas.microsoft.com/office/drawing/2014/main" id="{672787F1-67F4-40FC-9D0B-0103FB0288AE}"/>
+                <a16:creationId xmlns:a16="http://schemas.microsoft.com/office/drawing/2014/main" id="{1E4867F5-F386-433F-B83F-EF73008AF3CB}"/>
               </a:ext>
             </a:extLst>
           </p:cNvPr>
@@ -4737,7 +4737,7 @@
           <p:cNvPr id="10" name="profile-locale">
             <a:extLst xmlns:a="http://schemas.openxmlformats.org/drawingml/2006/main">
               <a:ext uri="{FF2B5EF4-FFF2-40B4-BE49-F238E27FC236}">
-                <a16:creationId xmlns:a16="http://schemas.microsoft.com/office/drawing/2014/main" id="{188E9641-B320-43A6-A122-2FB81C2586A7}"/>
+                <a16:creationId xmlns:a16="http://schemas.microsoft.com/office/drawing/2014/main" id="{EAD0D0E6-4C56-4943-BC65-F56E36CC7B8C}"/>
               </a:ext>
             </a:extLst>
           </p:cNvPr>
@@ -4791,7 +4791,7 @@
     </p:spTree>
     <p:extLst>
       <p:ext uri="{BB962C8B-B14F-4D97-AF65-F5344CB8AC3E}">
-        <p14:creationId xmlns:p14="http://schemas.microsoft.com/office/powerpoint/2010/main" val="193029475"/>
+        <p14:creationId xmlns:p14="http://schemas.microsoft.com/office/powerpoint/2010/main" val="1841353888"/>
       </p:ext>
     </p:extLst>
   </p:cSld>
@@ -4822,7 +4822,7 @@
           <p:cNvPr id="14" name="title-6">
             <a:extLst xmlns:a="http://schemas.openxmlformats.org/drawingml/2006/main">
               <a:ext uri="{FF2B5EF4-FFF2-40B4-BE49-F238E27FC236}">
-                <a16:creationId xmlns:a16="http://schemas.microsoft.com/office/drawing/2014/main" id="{E89BED19-8A45-4CD6-9925-96EF2A5024EC}"/>
+                <a16:creationId xmlns:a16="http://schemas.microsoft.com/office/drawing/2014/main" id="{E89249BA-9BB4-4749-AB5F-9FBE949DBF04}"/>
               </a:ext>
             </a:extLst>
           </p:cNvPr>
@@ -4878,7 +4878,7 @@
           <p:cNvPr id="2" name="page-6">
             <a:extLst xmlns:a="http://schemas.openxmlformats.org/drawingml/2006/main">
               <a:ext uri="{FF2B5EF4-FFF2-40B4-BE49-F238E27FC236}">
-                <a16:creationId xmlns:a16="http://schemas.microsoft.com/office/drawing/2014/main" id="{19169AC8-E234-4809-AA30-5C8498F10AC6}"/>
+                <a16:creationId xmlns:a16="http://schemas.microsoft.com/office/drawing/2014/main" id="{829FA0FD-A73C-4941-B486-B7190FDEB391}"/>
               </a:ext>
             </a:extLst>
           </p:cNvPr>
@@ -4938,7 +4938,7 @@
           <p:nvPr/>
         </p:nvPicPr>
         <p:blipFill>
-          <a:blip xmlns:r="http://schemas.openxmlformats.org/officeDocument/2006/relationships" xmlns:a="http://schemas.openxmlformats.org/drawingml/2006/main" r:embed="R14749d1187f34432"/>
+          <a:blip xmlns:r="http://schemas.openxmlformats.org/officeDocument/2006/relationships" xmlns:a="http://schemas.openxmlformats.org/drawingml/2006/main" r:embed="R38617bedae4e4be6"/>
           <a:stretch xmlns:a="http://schemas.openxmlformats.org/drawingml/2006/main"/>
         </p:blipFill>
         <p:spPr>
@@ -4958,7 +4958,7 @@
           <p:cNvPr id="4" name="pane-result">
             <a:extLst xmlns:a="http://schemas.openxmlformats.org/drawingml/2006/main">
               <a:ext uri="{FF2B5EF4-FFF2-40B4-BE49-F238E27FC236}">
-                <a16:creationId xmlns:a16="http://schemas.microsoft.com/office/drawing/2014/main" id="{673C9B90-5BB4-423D-BDD7-DDDFC0BB205A}"/>
+                <a16:creationId xmlns:a16="http://schemas.microsoft.com/office/drawing/2014/main" id="{2FAD7FBC-8989-4469-A030-880FFC1037A2}"/>
               </a:ext>
             </a:extLst>
           </p:cNvPr>
@@ -4993,7 +4993,7 @@
           <p:cNvPr id="5" name="pane-title">
             <a:extLst xmlns:a="http://schemas.openxmlformats.org/drawingml/2006/main">
               <a:ext uri="{FF2B5EF4-FFF2-40B4-BE49-F238E27FC236}">
-                <a16:creationId xmlns:a16="http://schemas.microsoft.com/office/drawing/2014/main" id="{4C05C078-06B3-4C4D-9E07-6692797E8CA5}"/>
+                <a16:creationId xmlns:a16="http://schemas.microsoft.com/office/drawing/2014/main" id="{7503317A-2809-4385-8874-173A5CE7462B}"/>
               </a:ext>
             </a:extLst>
           </p:cNvPr>
@@ -5049,7 +5049,7 @@
           <p:cNvPr id="6" name="pane-copy">
             <a:extLst xmlns:a="http://schemas.openxmlformats.org/drawingml/2006/main">
               <a:ext uri="{FF2B5EF4-FFF2-40B4-BE49-F238E27FC236}">
-                <a16:creationId xmlns:a16="http://schemas.microsoft.com/office/drawing/2014/main" id="{09EE246E-2642-4D4F-B06D-06E2424FE69B}"/>
+                <a16:creationId xmlns:a16="http://schemas.microsoft.com/office/drawing/2014/main" id="{2E08AE07-DC5A-4614-A775-5273850ACA4D}"/>
               </a:ext>
             </a:extLst>
           </p:cNvPr>
@@ -5128,7 +5128,7 @@
           <p:cNvPr id="7" name="icon-result">
             <a:extLst xmlns:a="http://schemas.openxmlformats.org/drawingml/2006/main">
               <a:ext uri="{FF2B5EF4-FFF2-40B4-BE49-F238E27FC236}">
-                <a16:creationId xmlns:a16="http://schemas.microsoft.com/office/drawing/2014/main" id="{F9A55859-5C55-4EC2-BDA4-BE1DC80D0140}"/>
+                <a16:creationId xmlns:a16="http://schemas.microsoft.com/office/drawing/2014/main" id="{E443F3AC-F9BA-414F-821F-22A889CDCE7E}"/>
               </a:ext>
             </a:extLst>
           </p:cNvPr>
@@ -5163,7 +5163,7 @@
           <p:cNvPr id="8" name="icon-title">
             <a:extLst xmlns:a="http://schemas.openxmlformats.org/drawingml/2006/main">
               <a:ext uri="{FF2B5EF4-FFF2-40B4-BE49-F238E27FC236}">
-                <a16:creationId xmlns:a16="http://schemas.microsoft.com/office/drawing/2014/main" id="{48657250-48A8-4681-A7F4-0ADB9BACA061}"/>
+                <a16:creationId xmlns:a16="http://schemas.microsoft.com/office/drawing/2014/main" id="{B7CB4BDF-4C9C-46B2-A90B-805190D97185}"/>
               </a:ext>
             </a:extLst>
           </p:cNvPr>
@@ -5219,7 +5219,7 @@
           <p:cNvPr id="9" name="icon-copy">
             <a:extLst xmlns:a="http://schemas.openxmlformats.org/drawingml/2006/main">
               <a:ext uri="{FF2B5EF4-FFF2-40B4-BE49-F238E27FC236}">
-                <a16:creationId xmlns:a16="http://schemas.microsoft.com/office/drawing/2014/main" id="{4F6BD1D7-2243-4092-B210-AD9942E1652A}"/>
+                <a16:creationId xmlns:a16="http://schemas.microsoft.com/office/drawing/2014/main" id="{77945E8B-F529-4FF8-9C6F-D2D9F7470B0B}"/>
               </a:ext>
             </a:extLst>
           </p:cNvPr>
@@ -5298,7 +5298,7 @@
           <p:cNvPr id="10" name="entry-result">
             <a:extLst xmlns:a="http://schemas.openxmlformats.org/drawingml/2006/main">
               <a:ext uri="{FF2B5EF4-FFF2-40B4-BE49-F238E27FC236}">
-                <a16:creationId xmlns:a16="http://schemas.microsoft.com/office/drawing/2014/main" id="{909C937E-DAB7-4447-9BAC-BB60B36EA3C2}"/>
+                <a16:creationId xmlns:a16="http://schemas.microsoft.com/office/drawing/2014/main" id="{D0B7AA84-3703-4274-9A26-FE8D6AB16391}"/>
               </a:ext>
             </a:extLst>
           </p:cNvPr>
@@ -5333,7 +5333,7 @@
           <p:cNvPr id="11" name="entry-title">
             <a:extLst xmlns:a="http://schemas.openxmlformats.org/drawingml/2006/main">
               <a:ext uri="{FF2B5EF4-FFF2-40B4-BE49-F238E27FC236}">
-                <a16:creationId xmlns:a16="http://schemas.microsoft.com/office/drawing/2014/main" id="{40B66CCD-CAAB-46D7-9F95-E646147B36F6}"/>
+                <a16:creationId xmlns:a16="http://schemas.microsoft.com/office/drawing/2014/main" id="{A713B9D1-058F-48EB-AB97-D5FA5D695C78}"/>
               </a:ext>
             </a:extLst>
           </p:cNvPr>
@@ -5389,7 +5389,7 @@
           <p:cNvPr id="12" name="entry-copy">
             <a:extLst xmlns:a="http://schemas.openxmlformats.org/drawingml/2006/main">
               <a:ext uri="{FF2B5EF4-FFF2-40B4-BE49-F238E27FC236}">
-                <a16:creationId xmlns:a16="http://schemas.microsoft.com/office/drawing/2014/main" id="{35BC0C33-CC4D-45B9-BA95-44C2AC2BBD5C}"/>
+                <a16:creationId xmlns:a16="http://schemas.microsoft.com/office/drawing/2014/main" id="{FB7157B2-B3C2-4F7A-90D2-643FF45E30EC}"/>
               </a:ext>
             </a:extLst>
           </p:cNvPr>
@@ -5468,7 +5468,7 @@
           <p:cNvPr id="13" name="icon-result-strip">
             <a:extLst xmlns:a="http://schemas.openxmlformats.org/drawingml/2006/main">
               <a:ext uri="{FF2B5EF4-FFF2-40B4-BE49-F238E27FC236}">
-                <a16:creationId xmlns:a16="http://schemas.microsoft.com/office/drawing/2014/main" id="{3874FB1B-26F5-4C32-AA45-914B8C532F08}"/>
+                <a16:creationId xmlns:a16="http://schemas.microsoft.com/office/drawing/2014/main" id="{4B17FA46-9620-4D82-9FAD-DFE950630854}"/>
               </a:ext>
             </a:extLst>
           </p:cNvPr>
@@ -5522,7 +5522,7 @@
     </p:spTree>
     <p:extLst>
       <p:ext uri="{BB962C8B-B14F-4D97-AF65-F5344CB8AC3E}">
-        <p14:creationId xmlns:p14="http://schemas.microsoft.com/office/powerpoint/2010/main" val="1214194857"/>
+        <p14:creationId xmlns:p14="http://schemas.microsoft.com/office/powerpoint/2010/main" val="513797146"/>
       </p:ext>
     </p:extLst>
   </p:cSld>
@@ -5553,7 +5553,7 @@
           <p:cNvPr id="11" name="title-7">
             <a:extLst xmlns:a="http://schemas.openxmlformats.org/drawingml/2006/main">
               <a:ext uri="{FF2B5EF4-FFF2-40B4-BE49-F238E27FC236}">
-                <a16:creationId xmlns:a16="http://schemas.microsoft.com/office/drawing/2014/main" id="{ECF60069-4CE1-4B1B-8A3C-22D7029B1DE7}"/>
+                <a16:creationId xmlns:a16="http://schemas.microsoft.com/office/drawing/2014/main" id="{C52DDEC1-E76B-4AAD-BDFC-DAA8C2667171}"/>
               </a:ext>
             </a:extLst>
           </p:cNvPr>
@@ -5609,7 +5609,7 @@
           <p:cNvPr id="2" name="page-7">
             <a:extLst xmlns:a="http://schemas.openxmlformats.org/drawingml/2006/main">
               <a:ext uri="{FF2B5EF4-FFF2-40B4-BE49-F238E27FC236}">
-                <a16:creationId xmlns:a16="http://schemas.microsoft.com/office/drawing/2014/main" id="{BFA962F0-2088-4F08-83B5-DBDD988DB8C1}"/>
+                <a16:creationId xmlns:a16="http://schemas.microsoft.com/office/drawing/2014/main" id="{DDB288E2-533B-4F39-9AF1-F2CC802A1DAD}"/>
               </a:ext>
             </a:extLst>
           </p:cNvPr>
@@ -5669,7 +5669,7 @@
           <p:nvPr/>
         </p:nvPicPr>
         <p:blipFill>
-          <a:blip xmlns:r="http://schemas.openxmlformats.org/officeDocument/2006/relationships" xmlns:a="http://schemas.openxmlformats.org/drawingml/2006/main" r:embed="R955ff43caf28431d"/>
+          <a:blip xmlns:r="http://schemas.openxmlformats.org/officeDocument/2006/relationships" xmlns:a="http://schemas.openxmlformats.org/drawingml/2006/main" r:embed="R701cfe61b0944583"/>
           <a:stretch xmlns:a="http://schemas.openxmlformats.org/drawingml/2006/main"/>
         </p:blipFill>
         <p:spPr>
@@ -5689,7 +5689,7 @@
           <p:cNvPr id="4" name="primary-tags">
             <a:extLst xmlns:a="http://schemas.openxmlformats.org/drawingml/2006/main">
               <a:ext uri="{FF2B5EF4-FFF2-40B4-BE49-F238E27FC236}">
-                <a16:creationId xmlns:a16="http://schemas.microsoft.com/office/drawing/2014/main" id="{CCD30C19-C709-47AB-BBB7-66898B825990}"/>
+                <a16:creationId xmlns:a16="http://schemas.microsoft.com/office/drawing/2014/main" id="{E8AD6E8F-298A-49D0-B9F0-CD7E0C6F60DE}"/>
               </a:ext>
             </a:extLst>
           </p:cNvPr>
@@ -5724,7 +5724,7 @@
           <p:cNvPr id="5" name="primary-tags-title">
             <a:extLst xmlns:a="http://schemas.openxmlformats.org/drawingml/2006/main">
               <a:ext uri="{FF2B5EF4-FFF2-40B4-BE49-F238E27FC236}">
-                <a16:creationId xmlns:a16="http://schemas.microsoft.com/office/drawing/2014/main" id="{866D92E6-7065-4689-BB3C-CC0202558912}"/>
+                <a16:creationId xmlns:a16="http://schemas.microsoft.com/office/drawing/2014/main" id="{F5BC1C8A-ED71-4A4C-910F-D7DA09775161}"/>
               </a:ext>
             </a:extLst>
           </p:cNvPr>
@@ -5780,7 +5780,7 @@
           <p:cNvPr id="6" name="primary-tags-copy">
             <a:extLst xmlns:a="http://schemas.openxmlformats.org/drawingml/2006/main">
               <a:ext uri="{FF2B5EF4-FFF2-40B4-BE49-F238E27FC236}">
-                <a16:creationId xmlns:a16="http://schemas.microsoft.com/office/drawing/2014/main" id="{4BE870E9-3AAA-4DCA-834F-25AA733A9FD3}"/>
+                <a16:creationId xmlns:a16="http://schemas.microsoft.com/office/drawing/2014/main" id="{81654280-75DF-4F80-AF55-EBE851B969D5}"/>
               </a:ext>
             </a:extLst>
           </p:cNvPr>
@@ -5882,7 +5882,7 @@
           <p:cNvPr id="7" name="secondary-tags">
             <a:extLst xmlns:a="http://schemas.openxmlformats.org/drawingml/2006/main">
               <a:ext uri="{FF2B5EF4-FFF2-40B4-BE49-F238E27FC236}">
-                <a16:creationId xmlns:a16="http://schemas.microsoft.com/office/drawing/2014/main" id="{B7FD7FEF-6EF5-4C7F-BBE9-DFFE92FC7DCA}"/>
+                <a16:creationId xmlns:a16="http://schemas.microsoft.com/office/drawing/2014/main" id="{E4451455-B96B-44C7-95ED-7E041D2D34F5}"/>
               </a:ext>
             </a:extLst>
           </p:cNvPr>
@@ -5917,7 +5917,7 @@
           <p:cNvPr id="8" name="secondary-tags-title">
             <a:extLst xmlns:a="http://schemas.openxmlformats.org/drawingml/2006/main">
               <a:ext uri="{FF2B5EF4-FFF2-40B4-BE49-F238E27FC236}">
-                <a16:creationId xmlns:a16="http://schemas.microsoft.com/office/drawing/2014/main" id="{CFEFABCD-398A-4991-B783-C049767D8734}"/>
+                <a16:creationId xmlns:a16="http://schemas.microsoft.com/office/drawing/2014/main" id="{DB5EC6B4-A071-4B39-8CBF-B61DD51FEA65}"/>
               </a:ext>
             </a:extLst>
           </p:cNvPr>
@@ -5973,7 +5973,7 @@
           <p:cNvPr id="9" name="secondary-tags-copy">
             <a:extLst xmlns:a="http://schemas.openxmlformats.org/drawingml/2006/main">
               <a:ext uri="{FF2B5EF4-FFF2-40B4-BE49-F238E27FC236}">
-                <a16:creationId xmlns:a16="http://schemas.microsoft.com/office/drawing/2014/main" id="{3F33E8E4-88FB-4B0A-A385-F1FF6B45EB88}"/>
+                <a16:creationId xmlns:a16="http://schemas.microsoft.com/office/drawing/2014/main" id="{41500D96-25A6-4171-943F-29E527EEDEB7}"/>
               </a:ext>
             </a:extLst>
           </p:cNvPr>
@@ -6075,7 +6075,7 @@
           <p:cNvPr id="10" name="tag-result-strip">
             <a:extLst xmlns:a="http://schemas.openxmlformats.org/drawingml/2006/main">
               <a:ext uri="{FF2B5EF4-FFF2-40B4-BE49-F238E27FC236}">
-                <a16:creationId xmlns:a16="http://schemas.microsoft.com/office/drawing/2014/main" id="{1FB2B715-D34D-40AB-87D8-486C1645B0A9}"/>
+                <a16:creationId xmlns:a16="http://schemas.microsoft.com/office/drawing/2014/main" id="{24D58DDA-CA75-4E41-A33A-D2D5CC4B5E18}"/>
               </a:ext>
             </a:extLst>
           </p:cNvPr>
@@ -6129,7 +6129,7 @@
     </p:spTree>
     <p:extLst>
       <p:ext uri="{BB962C8B-B14F-4D97-AF65-F5344CB8AC3E}">
-        <p14:creationId xmlns:p14="http://schemas.microsoft.com/office/powerpoint/2010/main" val="1153279502"/>
+        <p14:creationId xmlns:p14="http://schemas.microsoft.com/office/powerpoint/2010/main" val="1618485541"/>
       </p:ext>
     </p:extLst>
   </p:cSld>
@@ -6160,7 +6160,7 @@
           <p:cNvPr id="20" name="title-8">
             <a:extLst xmlns:a="http://schemas.openxmlformats.org/drawingml/2006/main">
               <a:ext uri="{FF2B5EF4-FFF2-40B4-BE49-F238E27FC236}">
-                <a16:creationId xmlns:a16="http://schemas.microsoft.com/office/drawing/2014/main" id="{D5FFEDA9-4482-4F75-A354-3D7B7EFC07EB}"/>
+                <a16:creationId xmlns:a16="http://schemas.microsoft.com/office/drawing/2014/main" id="{22B09B46-8D4B-4102-B04F-0F1D5C816232}"/>
               </a:ext>
             </a:extLst>
           </p:cNvPr>
@@ -6216,7 +6216,7 @@
           <p:cNvPr id="2" name="page-8">
             <a:extLst xmlns:a="http://schemas.openxmlformats.org/drawingml/2006/main">
               <a:ext uri="{FF2B5EF4-FFF2-40B4-BE49-F238E27FC236}">
-                <a16:creationId xmlns:a16="http://schemas.microsoft.com/office/drawing/2014/main" id="{F6060937-F067-4E9B-A2DE-040E0A47F69F}"/>
+                <a16:creationId xmlns:a16="http://schemas.microsoft.com/office/drawing/2014/main" id="{2BA3493D-0449-455D-950F-A6AF4E982E02}"/>
               </a:ext>
             </a:extLst>
           </p:cNvPr>
@@ -6272,7 +6272,7 @@
           <p:cNvPr id="3" name="arrow-0">
             <a:extLst xmlns:a="http://schemas.openxmlformats.org/drawingml/2006/main">
               <a:ext uri="{FF2B5EF4-FFF2-40B4-BE49-F238E27FC236}">
-                <a16:creationId xmlns:a16="http://schemas.microsoft.com/office/drawing/2014/main" id="{0C1B1588-78B2-47E1-BC92-984AE01F6B40}"/>
+                <a16:creationId xmlns:a16="http://schemas.microsoft.com/office/drawing/2014/main" id="{38566391-DB3E-485B-8391-710CF06725DF}"/>
               </a:ext>
             </a:extLst>
           </p:cNvPr>
@@ -6328,7 +6328,7 @@
           <p:cNvPr id="4" name="phase-0">
             <a:extLst xmlns:a="http://schemas.openxmlformats.org/drawingml/2006/main">
               <a:ext uri="{FF2B5EF4-FFF2-40B4-BE49-F238E27FC236}">
-                <a16:creationId xmlns:a16="http://schemas.microsoft.com/office/drawing/2014/main" id="{FC99B8CC-CEF7-47A9-A018-448F17E4CBA9}"/>
+                <a16:creationId xmlns:a16="http://schemas.microsoft.com/office/drawing/2014/main" id="{2A96A972-2495-405E-8C5B-3899F1D047A2}"/>
               </a:ext>
             </a:extLst>
           </p:cNvPr>
@@ -6363,7 +6363,7 @@
           <p:cNvPr id="5" name="phase-label-0">
             <a:extLst xmlns:a="http://schemas.openxmlformats.org/drawingml/2006/main">
               <a:ext uri="{FF2B5EF4-FFF2-40B4-BE49-F238E27FC236}">
-                <a16:creationId xmlns:a16="http://schemas.microsoft.com/office/drawing/2014/main" id="{46DE96C1-1EEF-46ED-944F-E63353CD28EE}"/>
+                <a16:creationId xmlns:a16="http://schemas.microsoft.com/office/drawing/2014/main" id="{A8331EB1-A881-4DC0-9C47-6740A489634A}"/>
               </a:ext>
             </a:extLst>
           </p:cNvPr>
@@ -6442,7 +6442,7 @@
           <p:cNvPr id="6" name="phase-http-0">
             <a:extLst xmlns:a="http://schemas.openxmlformats.org/drawingml/2006/main">
               <a:ext uri="{FF2B5EF4-FFF2-40B4-BE49-F238E27FC236}">
-                <a16:creationId xmlns:a16="http://schemas.microsoft.com/office/drawing/2014/main" id="{E9C02EB3-081C-4A28-90A6-72F3831066F8}"/>
+                <a16:creationId xmlns:a16="http://schemas.microsoft.com/office/drawing/2014/main" id="{8E29E33B-C04C-45EA-BA6B-4D619796EC2C}"/>
               </a:ext>
             </a:extLst>
           </p:cNvPr>
@@ -6498,7 +6498,7 @@
           <p:cNvPr id="7" name="arrow-1">
             <a:extLst xmlns:a="http://schemas.openxmlformats.org/drawingml/2006/main">
               <a:ext uri="{FF2B5EF4-FFF2-40B4-BE49-F238E27FC236}">
-                <a16:creationId xmlns:a16="http://schemas.microsoft.com/office/drawing/2014/main" id="{F009F930-535C-49B1-B733-195ABCE4A83E}"/>
+                <a16:creationId xmlns:a16="http://schemas.microsoft.com/office/drawing/2014/main" id="{AC494B63-997C-483C-8FEB-85852A124EEA}"/>
               </a:ext>
             </a:extLst>
           </p:cNvPr>
@@ -6554,7 +6554,7 @@
           <p:cNvPr id="8" name="phase-1">
             <a:extLst xmlns:a="http://schemas.openxmlformats.org/drawingml/2006/main">
               <a:ext uri="{FF2B5EF4-FFF2-40B4-BE49-F238E27FC236}">
-                <a16:creationId xmlns:a16="http://schemas.microsoft.com/office/drawing/2014/main" id="{12D274A3-8A34-4999-87FA-B42EA833D349}"/>
+                <a16:creationId xmlns:a16="http://schemas.microsoft.com/office/drawing/2014/main" id="{DABD6498-554A-4E6F-8A91-3CBF858F20F7}"/>
               </a:ext>
             </a:extLst>
           </p:cNvPr>
@@ -6589,7 +6589,7 @@
           <p:cNvPr id="9" name="phase-label-1">
             <a:extLst xmlns:a="http://schemas.openxmlformats.org/drawingml/2006/main">
               <a:ext uri="{FF2B5EF4-FFF2-40B4-BE49-F238E27FC236}">
-                <a16:creationId xmlns:a16="http://schemas.microsoft.com/office/drawing/2014/main" id="{9FA5C76C-F91B-4A4A-9CF1-22C9178BCFB8}"/>
+                <a16:creationId xmlns:a16="http://schemas.microsoft.com/office/drawing/2014/main" id="{37AAF792-0404-4FB7-9947-2D9C3D50FAB8}"/>
               </a:ext>
             </a:extLst>
           </p:cNvPr>
@@ -6668,7 +6668,7 @@
           <p:cNvPr id="10" name="phase-http-1">
             <a:extLst xmlns:a="http://schemas.openxmlformats.org/drawingml/2006/main">
               <a:ext uri="{FF2B5EF4-FFF2-40B4-BE49-F238E27FC236}">
-                <a16:creationId xmlns:a16="http://schemas.microsoft.com/office/drawing/2014/main" id="{6858344C-C69D-48AA-84FB-4749D2BE1023}"/>
+                <a16:creationId xmlns:a16="http://schemas.microsoft.com/office/drawing/2014/main" id="{2A2BF333-3249-4AAF-9BEB-8A7F6CDA702C}"/>
               </a:ext>
             </a:extLst>
           </p:cNvPr>
@@ -6724,7 +6724,7 @@
           <p:cNvPr id="11" name="arrow-2">
             <a:extLst xmlns:a="http://schemas.openxmlformats.org/drawingml/2006/main">
               <a:ext uri="{FF2B5EF4-FFF2-40B4-BE49-F238E27FC236}">
-                <a16:creationId xmlns:a16="http://schemas.microsoft.com/office/drawing/2014/main" id="{0ADD3CF4-7B23-49CD-A21E-ECAD9FF0F603}"/>
+                <a16:creationId xmlns:a16="http://schemas.microsoft.com/office/drawing/2014/main" id="{F0506DE5-532B-4D96-88AC-02AB37AAC0E2}"/>
               </a:ext>
             </a:extLst>
           </p:cNvPr>
@@ -6780,7 +6780,7 @@
           <p:cNvPr id="12" name="phase-2">
             <a:extLst xmlns:a="http://schemas.openxmlformats.org/drawingml/2006/main">
               <a:ext uri="{FF2B5EF4-FFF2-40B4-BE49-F238E27FC236}">
-                <a16:creationId xmlns:a16="http://schemas.microsoft.com/office/drawing/2014/main" id="{0C7760BE-D41D-4600-A1E0-85988B17529B}"/>
+                <a16:creationId xmlns:a16="http://schemas.microsoft.com/office/drawing/2014/main" id="{E7F23E92-2EFE-4882-91FE-7F1A3B6AB1D3}"/>
               </a:ext>
             </a:extLst>
           </p:cNvPr>
@@ -6815,7 +6815,7 @@
           <p:cNvPr id="13" name="phase-label-2">
             <a:extLst xmlns:a="http://schemas.openxmlformats.org/drawingml/2006/main">
               <a:ext uri="{FF2B5EF4-FFF2-40B4-BE49-F238E27FC236}">
-                <a16:creationId xmlns:a16="http://schemas.microsoft.com/office/drawing/2014/main" id="{9B3EC55D-9341-4E73-92FD-B20AC7E1D11B}"/>
+                <a16:creationId xmlns:a16="http://schemas.microsoft.com/office/drawing/2014/main" id="{70ACD50C-456A-4738-8658-391CBE03EEAA}"/>
               </a:ext>
             </a:extLst>
           </p:cNvPr>
@@ -6894,7 +6894,7 @@
           <p:cNvPr id="14" name="phase-http-2">
             <a:extLst xmlns:a="http://schemas.openxmlformats.org/drawingml/2006/main">
               <a:ext uri="{FF2B5EF4-FFF2-40B4-BE49-F238E27FC236}">
-                <a16:creationId xmlns:a16="http://schemas.microsoft.com/office/drawing/2014/main" id="{333C4389-2E45-452C-93F3-DA22A8024FCE}"/>
+                <a16:creationId xmlns:a16="http://schemas.microsoft.com/office/drawing/2014/main" id="{C4F6289C-BBEC-4655-8C3C-AE2AF8CADCFB}"/>
               </a:ext>
             </a:extLst>
           </p:cNvPr>
@@ -6950,7 +6950,7 @@
           <p:cNvPr id="15" name="phase-3">
             <a:extLst xmlns:a="http://schemas.openxmlformats.org/drawingml/2006/main">
               <a:ext uri="{FF2B5EF4-FFF2-40B4-BE49-F238E27FC236}">
-                <a16:creationId xmlns:a16="http://schemas.microsoft.com/office/drawing/2014/main" id="{F4916EA0-DD8C-448C-ADCD-3958706BFF9E}"/>
+                <a16:creationId xmlns:a16="http://schemas.microsoft.com/office/drawing/2014/main" id="{5C7BCD4F-4E29-4119-9492-9E0C8D106814}"/>
               </a:ext>
             </a:extLst>
           </p:cNvPr>
@@ -6985,7 +6985,7 @@
           <p:cNvPr id="16" name="phase-label-3">
             <a:extLst xmlns:a="http://schemas.openxmlformats.org/drawingml/2006/main">
               <a:ext uri="{FF2B5EF4-FFF2-40B4-BE49-F238E27FC236}">
-                <a16:creationId xmlns:a16="http://schemas.microsoft.com/office/drawing/2014/main" id="{9375A860-35A5-417A-96DE-9D0DF5BE037F}"/>
+                <a16:creationId xmlns:a16="http://schemas.microsoft.com/office/drawing/2014/main" id="{AFA22900-70EC-46B9-B2C3-C9EE10CA0B38}"/>
               </a:ext>
             </a:extLst>
           </p:cNvPr>
@@ -7064,7 +7064,7 @@
           <p:cNvPr id="17" name="phase-http-3">
             <a:extLst xmlns:a="http://schemas.openxmlformats.org/drawingml/2006/main">
               <a:ext uri="{FF2B5EF4-FFF2-40B4-BE49-F238E27FC236}">
-                <a16:creationId xmlns:a16="http://schemas.microsoft.com/office/drawing/2014/main" id="{6F371A94-2807-4433-A0A0-BC62257BC572}"/>
+                <a16:creationId xmlns:a16="http://schemas.microsoft.com/office/drawing/2014/main" id="{11E3F585-2BCF-448E-ADB0-82964F766430}"/>
               </a:ext>
             </a:extLst>
           </p:cNvPr>
@@ -7120,7 +7120,7 @@
           <p:cNvPr id="18" name="integrity-count">
             <a:extLst xmlns:a="http://schemas.openxmlformats.org/drawingml/2006/main">
               <a:ext uri="{FF2B5EF4-FFF2-40B4-BE49-F238E27FC236}">
-                <a16:creationId xmlns:a16="http://schemas.microsoft.com/office/drawing/2014/main" id="{78F43157-3B01-44E6-B62B-E8B0EDF6C485}"/>
+                <a16:creationId xmlns:a16="http://schemas.microsoft.com/office/drawing/2014/main" id="{88735C9B-FE9E-4C2E-B089-692C138F575D}"/>
               </a:ext>
             </a:extLst>
           </p:cNvPr>
@@ -7176,7 +7176,7 @@
           <p:cNvPr id="19" name="integrity-hash">
             <a:extLst xmlns:a="http://schemas.openxmlformats.org/drawingml/2006/main">
               <a:ext uri="{FF2B5EF4-FFF2-40B4-BE49-F238E27FC236}">
-                <a16:creationId xmlns:a16="http://schemas.microsoft.com/office/drawing/2014/main" id="{1C566AAC-29B8-4C07-9B85-65B6C64AE143}"/>
+                <a16:creationId xmlns:a16="http://schemas.microsoft.com/office/drawing/2014/main" id="{2A0026CC-C9E4-460A-8639-6A35C6480F97}"/>
               </a:ext>
             </a:extLst>
           </p:cNvPr>
@@ -7230,7 +7230,7 @@
     </p:spTree>
     <p:extLst>
       <p:ext uri="{BB962C8B-B14F-4D97-AF65-F5344CB8AC3E}">
-        <p14:creationId xmlns:p14="http://schemas.microsoft.com/office/powerpoint/2010/main" val="1990562547"/>
+        <p14:creationId xmlns:p14="http://schemas.microsoft.com/office/powerpoint/2010/main" val="2039651597"/>
       </p:ext>
     </p:extLst>
   </p:cSld>
@@ -7261,7 +7261,7 @@
           <p:cNvPr id="16" name="title-9">
             <a:extLst xmlns:a="http://schemas.openxmlformats.org/drawingml/2006/main">
               <a:ext uri="{FF2B5EF4-FFF2-40B4-BE49-F238E27FC236}">
-                <a16:creationId xmlns:a16="http://schemas.microsoft.com/office/drawing/2014/main" id="{47F617EE-AD59-4CED-9A10-F36B822B04B6}"/>
+                <a16:creationId xmlns:a16="http://schemas.microsoft.com/office/drawing/2014/main" id="{7C58BD1A-7D83-4D38-BAB8-001DAA262B75}"/>
               </a:ext>
             </a:extLst>
           </p:cNvPr>
@@ -7317,7 +7317,7 @@
           <p:cNvPr id="2" name="page-9">
             <a:extLst xmlns:a="http://schemas.openxmlformats.org/drawingml/2006/main">
               <a:ext uri="{FF2B5EF4-FFF2-40B4-BE49-F238E27FC236}">
-                <a16:creationId xmlns:a16="http://schemas.microsoft.com/office/drawing/2014/main" id="{4856FB6A-8CC2-4D68-9518-8E13BDD5D699}"/>
+                <a16:creationId xmlns:a16="http://schemas.microsoft.com/office/drawing/2014/main" id="{51CB4377-E71D-43AB-858B-732B43F3C04A}"/>
               </a:ext>
             </a:extLst>
           </p:cNvPr>
@@ -7373,7 +7373,7 @@
           <p:cNvPr id="3" name="flow-arrow-1">
             <a:extLst xmlns:a="http://schemas.openxmlformats.org/drawingml/2006/main">
               <a:ext uri="{FF2B5EF4-FFF2-40B4-BE49-F238E27FC236}">
-                <a16:creationId xmlns:a16="http://schemas.microsoft.com/office/drawing/2014/main" id="{B10348F6-03F7-4D19-872F-85C0819BB362}"/>
+                <a16:creationId xmlns:a16="http://schemas.microsoft.com/office/drawing/2014/main" id="{9DCB0FFB-27E3-460D-A686-B5212C34A7B6}"/>
               </a:ext>
             </a:extLst>
           </p:cNvPr>
@@ -7429,7 +7429,7 @@
           <p:cNvPr id="4" name="flow-arrow-2">
             <a:extLst xmlns:a="http://schemas.openxmlformats.org/drawingml/2006/main">
               <a:ext uri="{FF2B5EF4-FFF2-40B4-BE49-F238E27FC236}">
-                <a16:creationId xmlns:a16="http://schemas.microsoft.com/office/drawing/2014/main" id="{D8DEBE38-E2FC-47E9-B0B8-4B1A4082F003}"/>
+                <a16:creationId xmlns:a16="http://schemas.microsoft.com/office/drawing/2014/main" id="{B0B041C5-60D7-4A13-9732-C2213124B792}"/>
               </a:ext>
             </a:extLst>
           </p:cNvPr>
@@ -7485,7 +7485,7 @@
           <p:cNvPr id="5" name="flarum-core">
             <a:extLst xmlns:a="http://schemas.openxmlformats.org/drawingml/2006/main">
               <a:ext uri="{FF2B5EF4-FFF2-40B4-BE49-F238E27FC236}">
-                <a16:creationId xmlns:a16="http://schemas.microsoft.com/office/drawing/2014/main" id="{CC5209C8-C965-497D-A6FA-24160E908C4A}"/>
+                <a16:creationId xmlns:a16="http://schemas.microsoft.com/office/drawing/2014/main" id="{B4F28B3B-D288-456B-B875-F4EBE1289861}"/>
               </a:ext>
             </a:extLst>
           </p:cNvPr>
@@ -7520,7 +7520,7 @@
           <p:cNvPr id="6" name="theme-extension">
             <a:extLst xmlns:a="http://schemas.openxmlformats.org/drawingml/2006/main">
               <a:ext uri="{FF2B5EF4-FFF2-40B4-BE49-F238E27FC236}">
-                <a16:creationId xmlns:a16="http://schemas.microsoft.com/office/drawing/2014/main" id="{3AEF5555-B2BE-486E-B618-6C0CAD4DBE3C}"/>
+                <a16:creationId xmlns:a16="http://schemas.microsoft.com/office/drawing/2014/main" id="{2BB1C12C-3627-4AB1-8B05-AEA5015C7F79}"/>
               </a:ext>
             </a:extLst>
           </p:cNvPr>
@@ -7555,7 +7555,7 @@
           <p:cNvPr id="7" name="community-ui">
             <a:extLst xmlns:a="http://schemas.openxmlformats.org/drawingml/2006/main">
               <a:ext uri="{FF2B5EF4-FFF2-40B4-BE49-F238E27FC236}">
-                <a16:creationId xmlns:a16="http://schemas.microsoft.com/office/drawing/2014/main" id="{28A97A5E-908C-4247-A1BE-C1E80DE057B0}"/>
+                <a16:creationId xmlns:a16="http://schemas.microsoft.com/office/drawing/2014/main" id="{0D4EF798-1503-4801-8A49-B5173594949D}"/>
               </a:ext>
             </a:extLst>
           </p:cNvPr>
@@ -7590,7 +7590,7 @@
           <p:cNvPr id="8" name="flarum-core-title">
             <a:extLst xmlns:a="http://schemas.openxmlformats.org/drawingml/2006/main">
               <a:ext uri="{FF2B5EF4-FFF2-40B4-BE49-F238E27FC236}">
-                <a16:creationId xmlns:a16="http://schemas.microsoft.com/office/drawing/2014/main" id="{1535F209-B60D-46DB-B0D4-DC88CCA7FA61}"/>
+                <a16:creationId xmlns:a16="http://schemas.microsoft.com/office/drawing/2014/main" id="{4F3B1CF1-75A8-4B36-B74D-3088A1756D38}"/>
               </a:ext>
             </a:extLst>
           </p:cNvPr>
@@ -7646,7 +7646,7 @@
           <p:cNvPr id="9" name="flarum-core-copy">
             <a:extLst xmlns:a="http://schemas.openxmlformats.org/drawingml/2006/main">
               <a:ext uri="{FF2B5EF4-FFF2-40B4-BE49-F238E27FC236}">
-                <a16:creationId xmlns:a16="http://schemas.microsoft.com/office/drawing/2014/main" id="{CBB0078B-7956-41E8-AAE5-5E10E36AAC0E}"/>
+                <a16:creationId xmlns:a16="http://schemas.microsoft.com/office/drawing/2014/main" id="{12A9BF0D-1399-4F18-ABF7-DC18D1DB27D4}"/>
               </a:ext>
             </a:extLst>
           </p:cNvPr>
@@ -7702,7 +7702,7 @@
           <p:cNvPr id="10" name="theme-title">
             <a:extLst xmlns:a="http://schemas.openxmlformats.org/drawingml/2006/main">
               <a:ext uri="{FF2B5EF4-FFF2-40B4-BE49-F238E27FC236}">
-                <a16:creationId xmlns:a16="http://schemas.microsoft.com/office/drawing/2014/main" id="{9B4819BB-A8E2-4153-B9CA-8C76B83CC1FC}"/>
+                <a16:creationId xmlns:a16="http://schemas.microsoft.com/office/drawing/2014/main" id="{80ED6732-0A15-421C-8C27-7E03581A86EC}"/>
               </a:ext>
             </a:extLst>
           </p:cNvPr>
@@ -7781,7 +7781,7 @@
           <p:cNvPr id="11" name="theme-copy">
             <a:extLst xmlns:a="http://schemas.openxmlformats.org/drawingml/2006/main">
               <a:ext uri="{FF2B5EF4-FFF2-40B4-BE49-F238E27FC236}">
-                <a16:creationId xmlns:a16="http://schemas.microsoft.com/office/drawing/2014/main" id="{488558CC-7B69-4395-A9C0-F3F1C93DFD2B}"/>
+                <a16:creationId xmlns:a16="http://schemas.microsoft.com/office/drawing/2014/main" id="{E9269A89-5FB8-404B-A11A-59D64B810B94}"/>
               </a:ext>
             </a:extLst>
           </p:cNvPr>
@@ -7837,7 +7837,7 @@
           <p:cNvPr id="12" name="ui-title">
             <a:extLst xmlns:a="http://schemas.openxmlformats.org/drawingml/2006/main">
               <a:ext uri="{FF2B5EF4-FFF2-40B4-BE49-F238E27FC236}">
-                <a16:creationId xmlns:a16="http://schemas.microsoft.com/office/drawing/2014/main" id="{A92CD0A9-4DB5-4DB2-8D24-F9FDA971889A}"/>
+                <a16:creationId xmlns:a16="http://schemas.microsoft.com/office/drawing/2014/main" id="{72FC5B78-A4B9-4542-8683-5121EB5059A8}"/>
               </a:ext>
             </a:extLst>
           </p:cNvPr>
@@ -7893,7 +7893,7 @@
           <p:cNvPr id="13" name="ui-copy">
             <a:extLst xmlns:a="http://schemas.openxmlformats.org/drawingml/2006/main">
               <a:ext uri="{FF2B5EF4-FFF2-40B4-BE49-F238E27FC236}">
-                <a16:creationId xmlns:a16="http://schemas.microsoft.com/office/drawing/2014/main" id="{1FC941D7-F811-4A54-803E-30EBDDE18B4A}"/>
+                <a16:creationId xmlns:a16="http://schemas.microsoft.com/office/drawing/2014/main" id="{C330B991-6989-411E-93D8-890184BD69EA}"/>
               </a:ext>
             </a:extLst>
           </p:cNvPr>
@@ -7949,7 +7949,7 @@
           <p:cNvPr id="14" name="rollback-strip">
             <a:extLst xmlns:a="http://schemas.openxmlformats.org/drawingml/2006/main">
               <a:ext uri="{FF2B5EF4-FFF2-40B4-BE49-F238E27FC236}">
-                <a16:creationId xmlns:a16="http://schemas.microsoft.com/office/drawing/2014/main" id="{4E43A1B4-DFCB-46DE-9BDD-FAD72A8828C9}"/>
+                <a16:creationId xmlns:a16="http://schemas.microsoft.com/office/drawing/2014/main" id="{D71BE7B0-96CD-457A-9D26-FA03B939BF20}"/>
               </a:ext>
             </a:extLst>
           </p:cNvPr>
@@ -7984,7 +7984,7 @@
           <p:cNvPr id="15" name="rollback-copy">
             <a:extLst xmlns:a="http://schemas.openxmlformats.org/drawingml/2006/main">
               <a:ext uri="{FF2B5EF4-FFF2-40B4-BE49-F238E27FC236}">
-                <a16:creationId xmlns:a16="http://schemas.microsoft.com/office/drawing/2014/main" id="{8789E935-4D4A-462A-AA09-92DD49053952}"/>
+                <a16:creationId xmlns:a16="http://schemas.microsoft.com/office/drawing/2014/main" id="{B509C740-367D-4623-B647-E5510CD64714}"/>
               </a:ext>
             </a:extLst>
           </p:cNvPr>
@@ -8038,7 +8038,7 @@
     </p:spTree>
     <p:extLst>
       <p:ext uri="{BB962C8B-B14F-4D97-AF65-F5344CB8AC3E}">
-        <p14:creationId xmlns:p14="http://schemas.microsoft.com/office/powerpoint/2010/main" val="324834626"/>
+        <p14:creationId xmlns:p14="http://schemas.microsoft.com/office/powerpoint/2010/main" val="1842519271"/>
       </p:ext>
     </p:extLst>
   </p:cSld>
